--- a/portfolio-tracker/presentation/portfolio-tracker-final.pptx
+++ b/portfolio-tracker/presentation/portfolio-tracker-final.pptx
@@ -19,7 +19,6 @@
     <p:sldId id="267" r:id="rId18"/>
     <p:sldId id="268" r:id="rId19"/>
     <p:sldId id="269" r:id="rId20"/>
-    <p:sldId id="270" r:id="rId21"/>
   </p:sldIdLst>
   <p:sldSz cx="12188952" cy="6858000" type="screen4x3"/>
   <p:notesSz cx="6858000" cy="9144000"/>
@@ -3396,7 +3395,7 @@
                   <a:srgbClr val="9E9E9E"/>
                 </a:solidFill>
               </a:rPr>
-              <a:t>Jooseonghyeon  ·  2026.06</a:t>
+              <a:t>2026.06</a:t>
             </a:r>
           </a:p>
         </p:txBody>
@@ -3523,7 +3522,7 @@
                   <a:srgbClr val="9E9E9E"/>
                 </a:solidFill>
               </a:rPr>
-              <a:t>Jooseonghyeon 기법 구성</a:t>
+              <a:t>팀원 B  ·  가산점 B+2</a:t>
             </a:r>
           </a:p>
         </p:txBody>
@@ -3600,7 +3599,7 @@
                   <a:srgbClr val="9E9E9E"/>
                 </a:solidFill>
               </a:rPr>
-              <a:t>10 / 15</a:t>
+              <a:t>10 / 14</a:t>
             </a:r>
           </a:p>
         </p:txBody>
@@ -3613,8 +3612,8 @@
         </p:nvSpPr>
         <p:spPr>
           <a:xfrm>
-            <a:off x="457200" y="1051560"/>
-            <a:ext cx="11247120" cy="1508760"/>
+            <a:off x="457200" y="1234440"/>
+            <a:ext cx="11247120" cy="1554480"/>
           </a:xfrm>
           <a:prstGeom prst="rect">
             <a:avLst/>
@@ -3656,8 +3655,8 @@
         </p:nvSpPr>
         <p:spPr>
           <a:xfrm>
-            <a:off x="457200" y="1051560"/>
-            <a:ext cx="54864" cy="1508760"/>
+            <a:off x="457200" y="1234440"/>
+            <a:ext cx="54864" cy="1554480"/>
           </a:xfrm>
           <a:prstGeom prst="rect">
             <a:avLst/>
@@ -3699,7 +3698,7 @@
         </p:nvSpPr>
         <p:spPr>
           <a:xfrm>
-            <a:off x="457200" y="1051560"/>
+            <a:off x="457200" y="1234440"/>
             <a:ext cx="11247120" cy="438912"/>
           </a:xfrm>
           <a:prstGeom prst="rect">
@@ -3736,126 +3735,14 @@
       </p:sp>
       <p:sp>
         <p:nvSpPr>
-          <p:cNvPr id="10" name="TextBox 9"/>
-          <p:cNvSpPr txBox="1"/>
-          <p:nvPr/>
-        </p:nvSpPr>
-        <p:spPr>
-          <a:xfrm>
-            <a:off x="658368" y="1124712"/>
-            <a:ext cx="10972800" cy="320040"/>
-          </a:xfrm>
-          <a:prstGeom prst="rect">
-            <a:avLst/>
-          </a:prstGeom>
-          <a:noFill/>
-        </p:spPr>
-        <p:txBody>
-          <a:bodyPr wrap="square">
-            <a:spAutoFit/>
-          </a:bodyPr>
-          <a:lstStyle/>
-          <a:p>
-            <a:pPr algn="l"/>
-            <a:r>
-              <a:rPr sz="1300" b="1">
-                <a:solidFill>
-                  <a:srgbClr val="3F51B5"/>
-                </a:solidFill>
-              </a:rPr>
-              <a:t>기법 1  —  단일 md 부트스트랩</a:t>
-            </a:r>
-          </a:p>
-        </p:txBody>
-      </p:sp>
-      <p:sp>
-        <p:nvSpPr>
-          <p:cNvPr id="11" name="TextBox 10"/>
-          <p:cNvSpPr txBox="1"/>
-          <p:nvPr/>
-        </p:nvSpPr>
-        <p:spPr>
-          <a:xfrm>
-            <a:off x="658368" y="1618488"/>
-            <a:ext cx="10789920" cy="841248"/>
-          </a:xfrm>
-          <a:prstGeom prst="rect">
-            <a:avLst/>
-          </a:prstGeom>
-          <a:noFill/>
-        </p:spPr>
-        <p:txBody>
-          <a:bodyPr wrap="square">
-            <a:spAutoFit/>
-          </a:bodyPr>
-          <a:lstStyle/>
-          <a:p>
-            <a:pPr algn="l"/>
-            <a:r>
-              <a:rPr sz="1200" b="0">
-                <a:solidFill>
-                  <a:srgbClr val="212121"/>
-                </a:solidFill>
-              </a:rPr>
-              <a:t>AUTHORING.Jooseonghyeon.v0.1.0.md 하나로 Rules · Skills · Commands 전체를 자동 세팅
-새 프로젝트에 이 파일 하나만 전달하면 AI 운영 체계가 즉시 구성됨</a:t>
-            </a:r>
-          </a:p>
-        </p:txBody>
-      </p:sp>
-      <p:sp>
-        <p:nvSpPr>
-          <p:cNvPr id="12" name="Rectangle 11"/>
+          <p:cNvPr id="10" name="Rectangle 9"/>
           <p:cNvSpPr/>
           <p:nvPr/>
         </p:nvSpPr>
         <p:spPr>
           <a:xfrm>
-            <a:off x="457200" y="2788920"/>
-            <a:ext cx="11247120" cy="1508760"/>
-          </a:xfrm>
-          <a:prstGeom prst="rect">
-            <a:avLst/>
-          </a:prstGeom>
-          <a:noFill/>
-          <a:ln w="10160">
-            <a:solidFill>
-              <a:srgbClr val="E0E0E0"/>
-            </a:solidFill>
-          </a:ln>
-        </p:spPr>
-        <p:style>
-          <a:lnRef idx="1">
-            <a:schemeClr val="accent1"/>
-          </a:lnRef>
-          <a:fillRef idx="3">
-            <a:schemeClr val="accent1"/>
-          </a:fillRef>
-          <a:effectRef idx="2">
-            <a:schemeClr val="accent1"/>
-          </a:effectRef>
-          <a:fontRef idx="minor">
-            <a:schemeClr val="lt1"/>
-          </a:fontRef>
-        </p:style>
-        <p:txBody>
-          <a:bodyPr rtlCol="0" anchor="ctr"/>
-          <a:lstStyle/>
-          <a:p>
-            <a:pPr algn="ctr"/>
-          </a:p>
-        </p:txBody>
-      </p:sp>
-      <p:sp>
-        <p:nvSpPr>
-          <p:cNvPr id="13" name="Rectangle 12"/>
-          <p:cNvSpPr/>
-          <p:nvPr/>
-        </p:nvSpPr>
-        <p:spPr>
-          <a:xfrm>
-            <a:off x="457200" y="2788920"/>
-            <a:ext cx="54864" cy="1508760"/>
+            <a:off x="10241280" y="1307592"/>
+            <a:ext cx="1234440" cy="292608"/>
           </a:xfrm>
           <a:prstGeom prst="rect">
             <a:avLst/>
@@ -3891,13 +3778,202 @@
       </p:sp>
       <p:sp>
         <p:nvSpPr>
+          <p:cNvPr id="11" name="TextBox 10"/>
+          <p:cNvSpPr txBox="1"/>
+          <p:nvPr/>
+        </p:nvSpPr>
+        <p:spPr>
+          <a:xfrm>
+            <a:off x="10241280" y="1307592"/>
+            <a:ext cx="1234440" cy="292608"/>
+          </a:xfrm>
+          <a:prstGeom prst="rect">
+            <a:avLst/>
+          </a:prstGeom>
+          <a:noFill/>
+        </p:spPr>
+        <p:txBody>
+          <a:bodyPr wrap="square">
+            <a:spAutoFit/>
+          </a:bodyPr>
+          <a:lstStyle/>
+          <a:p>
+            <a:pPr algn="ctr"/>
+            <a:r>
+              <a:rPr sz="1100" b="1">
+                <a:solidFill>
+                  <a:srgbClr val="FFFFFF"/>
+                </a:solidFill>
+              </a:rPr>
+              <a:t>B  +2</a:t>
+            </a:r>
+          </a:p>
+        </p:txBody>
+      </p:sp>
+      <p:sp>
+        <p:nvSpPr>
+          <p:cNvPr id="12" name="TextBox 11"/>
+          <p:cNvSpPr txBox="1"/>
+          <p:nvPr/>
+        </p:nvSpPr>
+        <p:spPr>
+          <a:xfrm>
+            <a:off x="658368" y="1307592"/>
+            <a:ext cx="9418320" cy="320040"/>
+          </a:xfrm>
+          <a:prstGeom prst="rect">
+            <a:avLst/>
+          </a:prstGeom>
+          <a:noFill/>
+        </p:spPr>
+        <p:txBody>
+          <a:bodyPr wrap="square">
+            <a:spAutoFit/>
+          </a:bodyPr>
+          <a:lstStyle/>
+          <a:p>
+            <a:pPr algn="l"/>
+            <a:r>
+              <a:rPr sz="1300" b="1">
+                <a:solidFill>
+                  <a:srgbClr val="3F51B5"/>
+                </a:solidFill>
+              </a:rPr>
+              <a:t>기법 1  —  단일 md 부트스트랩</a:t>
+            </a:r>
+          </a:p>
+        </p:txBody>
+      </p:sp>
+      <p:sp>
+        <p:nvSpPr>
+          <p:cNvPr id="13" name="TextBox 12"/>
+          <p:cNvSpPr txBox="1"/>
+          <p:nvPr/>
+        </p:nvSpPr>
+        <p:spPr>
+          <a:xfrm>
+            <a:off x="658368" y="1801368"/>
+            <a:ext cx="10789920" cy="896112"/>
+          </a:xfrm>
+          <a:prstGeom prst="rect">
+            <a:avLst/>
+          </a:prstGeom>
+          <a:noFill/>
+        </p:spPr>
+        <p:txBody>
+          <a:bodyPr wrap="square">
+            <a:spAutoFit/>
+          </a:bodyPr>
+          <a:lstStyle/>
+          <a:p>
+            <a:pPr algn="l"/>
+            <a:r>
+              <a:rPr sz="1200" b="0">
+                <a:solidFill>
+                  <a:srgbClr val="212121"/>
+                </a:solidFill>
+              </a:rPr>
+              <a:t>AUTHORING.jeongkyeongwoo.v0.1.0.md 하나로 Rules · Skills · Commands 전체 자동 세팅
+새 프로젝트에 이 파일 하나만 주면 AI 운영 체계 즉시 구성</a:t>
+            </a:r>
+          </a:p>
+        </p:txBody>
+      </p:sp>
+      <p:sp>
+        <p:nvSpPr>
           <p:cNvPr id="14" name="Rectangle 13"/>
           <p:cNvSpPr/>
           <p:nvPr/>
         </p:nvSpPr>
         <p:spPr>
           <a:xfrm>
-            <a:off x="457200" y="2788920"/>
+            <a:off x="457200" y="3017520"/>
+            <a:ext cx="11247120" cy="1554480"/>
+          </a:xfrm>
+          <a:prstGeom prst="rect">
+            <a:avLst/>
+          </a:prstGeom>
+          <a:noFill/>
+          <a:ln w="10160">
+            <a:solidFill>
+              <a:srgbClr val="E0E0E0"/>
+            </a:solidFill>
+          </a:ln>
+        </p:spPr>
+        <p:style>
+          <a:lnRef idx="1">
+            <a:schemeClr val="accent1"/>
+          </a:lnRef>
+          <a:fillRef idx="3">
+            <a:schemeClr val="accent1"/>
+          </a:fillRef>
+          <a:effectRef idx="2">
+            <a:schemeClr val="accent1"/>
+          </a:effectRef>
+          <a:fontRef idx="minor">
+            <a:schemeClr val="lt1"/>
+          </a:fontRef>
+        </p:style>
+        <p:txBody>
+          <a:bodyPr rtlCol="0" anchor="ctr"/>
+          <a:lstStyle/>
+          <a:p>
+            <a:pPr algn="ctr"/>
+          </a:p>
+        </p:txBody>
+      </p:sp>
+      <p:sp>
+        <p:nvSpPr>
+          <p:cNvPr id="15" name="Rectangle 14"/>
+          <p:cNvSpPr/>
+          <p:nvPr/>
+        </p:nvSpPr>
+        <p:spPr>
+          <a:xfrm>
+            <a:off x="457200" y="3017520"/>
+            <a:ext cx="54864" cy="1554480"/>
+          </a:xfrm>
+          <a:prstGeom prst="rect">
+            <a:avLst/>
+          </a:prstGeom>
+          <a:solidFill>
+            <a:srgbClr val="3F51B5"/>
+          </a:solidFill>
+          <a:ln>
+            <a:noFill/>
+          </a:ln>
+        </p:spPr>
+        <p:style>
+          <a:lnRef idx="1">
+            <a:schemeClr val="accent1"/>
+          </a:lnRef>
+          <a:fillRef idx="3">
+            <a:schemeClr val="accent1"/>
+          </a:fillRef>
+          <a:effectRef idx="2">
+            <a:schemeClr val="accent1"/>
+          </a:effectRef>
+          <a:fontRef idx="minor">
+            <a:schemeClr val="lt1"/>
+          </a:fontRef>
+        </p:style>
+        <p:txBody>
+          <a:bodyPr rtlCol="0" anchor="ctr"/>
+          <a:lstStyle/>
+          <a:p>
+            <a:pPr algn="ctr"/>
+          </a:p>
+        </p:txBody>
+      </p:sp>
+      <p:sp>
+        <p:nvSpPr>
+          <p:cNvPr id="16" name="Rectangle 15"/>
+          <p:cNvSpPr/>
+          <p:nvPr/>
+        </p:nvSpPr>
+        <p:spPr>
+          <a:xfrm>
+            <a:off x="457200" y="3017520"/>
             <a:ext cx="11247120" cy="438912"/>
           </a:xfrm>
           <a:prstGeom prst="rect">
@@ -3934,126 +4010,14 @@
       </p:sp>
       <p:sp>
         <p:nvSpPr>
-          <p:cNvPr id="15" name="TextBox 14"/>
-          <p:cNvSpPr txBox="1"/>
-          <p:nvPr/>
-        </p:nvSpPr>
-        <p:spPr>
-          <a:xfrm>
-            <a:off x="658368" y="2862072"/>
-            <a:ext cx="10972800" cy="320040"/>
-          </a:xfrm>
-          <a:prstGeom prst="rect">
-            <a:avLst/>
-          </a:prstGeom>
-          <a:noFill/>
-        </p:spPr>
-        <p:txBody>
-          <a:bodyPr wrap="square">
-            <a:spAutoFit/>
-          </a:bodyPr>
-          <a:lstStyle/>
-          <a:p>
-            <a:pPr algn="l"/>
-            <a:r>
-              <a:rPr sz="1300" b="1">
-                <a:solidFill>
-                  <a:srgbClr val="3F51B5"/>
-                </a:solidFill>
-              </a:rPr>
-              <a:t>기법 2  —  도메인 특화 서브에이전트 + 암묵지 기록</a:t>
-            </a:r>
-          </a:p>
-        </p:txBody>
-      </p:sp>
-      <p:sp>
-        <p:nvSpPr>
-          <p:cNvPr id="16" name="TextBox 15"/>
-          <p:cNvSpPr txBox="1"/>
-          <p:nvPr/>
-        </p:nvSpPr>
-        <p:spPr>
-          <a:xfrm>
-            <a:off x="658368" y="3355848"/>
-            <a:ext cx="10789920" cy="841248"/>
-          </a:xfrm>
-          <a:prstGeom prst="rect">
-            <a:avLst/>
-          </a:prstGeom>
-          <a:noFill/>
-        </p:spPr>
-        <p:txBody>
-          <a:bodyPr wrap="square">
-            <a:spAutoFit/>
-          </a:bodyPr>
-          <a:lstStyle/>
-          <a:p>
-            <a:pPr algn="l"/>
-            <a:r>
-              <a:rPr sz="1200" b="0">
-                <a:solidFill>
-                  <a:srgbClr val="212121"/>
-                </a:solidFill>
-              </a:rPr>
-              <a:t>feature-debugger (/dg): 앱 기능 6개 영역 체크리스트 기반 정적 분석 — 반복 점검 자동화
-llm-wiki: Claude Code 사용 인사이트 11개 항목 운영 (notes/llm-wiki.md)</a:t>
-            </a:r>
-          </a:p>
-        </p:txBody>
-      </p:sp>
-      <p:sp>
-        <p:nvSpPr>
           <p:cNvPr id="17" name="Rectangle 16"/>
           <p:cNvSpPr/>
           <p:nvPr/>
         </p:nvSpPr>
         <p:spPr>
           <a:xfrm>
-            <a:off x="457200" y="4526279"/>
-            <a:ext cx="11247120" cy="1508760"/>
-          </a:xfrm>
-          <a:prstGeom prst="rect">
-            <a:avLst/>
-          </a:prstGeom>
-          <a:noFill/>
-          <a:ln w="10160">
-            <a:solidFill>
-              <a:srgbClr val="E0E0E0"/>
-            </a:solidFill>
-          </a:ln>
-        </p:spPr>
-        <p:style>
-          <a:lnRef idx="1">
-            <a:schemeClr val="accent1"/>
-          </a:lnRef>
-          <a:fillRef idx="3">
-            <a:schemeClr val="accent1"/>
-          </a:fillRef>
-          <a:effectRef idx="2">
-            <a:schemeClr val="accent1"/>
-          </a:effectRef>
-          <a:fontRef idx="minor">
-            <a:schemeClr val="lt1"/>
-          </a:fontRef>
-        </p:style>
-        <p:txBody>
-          <a:bodyPr rtlCol="0" anchor="ctr"/>
-          <a:lstStyle/>
-          <a:p>
-            <a:pPr algn="ctr"/>
-          </a:p>
-        </p:txBody>
-      </p:sp>
-      <p:sp>
-        <p:nvSpPr>
-          <p:cNvPr id="18" name="Rectangle 17"/>
-          <p:cNvSpPr/>
-          <p:nvPr/>
-        </p:nvSpPr>
-        <p:spPr>
-          <a:xfrm>
-            <a:off x="457200" y="4526279"/>
-            <a:ext cx="54864" cy="1508760"/>
+            <a:off x="10241280" y="3090672"/>
+            <a:ext cx="1234440" cy="292608"/>
           </a:xfrm>
           <a:prstGeom prst="rect">
             <a:avLst/>
@@ -4089,13 +4053,202 @@
       </p:sp>
       <p:sp>
         <p:nvSpPr>
-          <p:cNvPr id="19" name="Rectangle 18"/>
+          <p:cNvPr id="18" name="TextBox 17"/>
+          <p:cNvSpPr txBox="1"/>
+          <p:nvPr/>
+        </p:nvSpPr>
+        <p:spPr>
+          <a:xfrm>
+            <a:off x="10241280" y="3090672"/>
+            <a:ext cx="1234440" cy="292608"/>
+          </a:xfrm>
+          <a:prstGeom prst="rect">
+            <a:avLst/>
+          </a:prstGeom>
+          <a:noFill/>
+        </p:spPr>
+        <p:txBody>
+          <a:bodyPr wrap="square">
+            <a:spAutoFit/>
+          </a:bodyPr>
+          <a:lstStyle/>
+          <a:p>
+            <a:pPr algn="ctr"/>
+            <a:r>
+              <a:rPr sz="1100" b="1">
+                <a:solidFill>
+                  <a:srgbClr val="FFFFFF"/>
+                </a:solidFill>
+              </a:rPr>
+              <a:t>B  +2</a:t>
+            </a:r>
+          </a:p>
+        </p:txBody>
+      </p:sp>
+      <p:sp>
+        <p:nvSpPr>
+          <p:cNvPr id="19" name="TextBox 18"/>
+          <p:cNvSpPr txBox="1"/>
+          <p:nvPr/>
+        </p:nvSpPr>
+        <p:spPr>
+          <a:xfrm>
+            <a:off x="658368" y="3090672"/>
+            <a:ext cx="9418320" cy="320040"/>
+          </a:xfrm>
+          <a:prstGeom prst="rect">
+            <a:avLst/>
+          </a:prstGeom>
+          <a:noFill/>
+        </p:spPr>
+        <p:txBody>
+          <a:bodyPr wrap="square">
+            <a:spAutoFit/>
+          </a:bodyPr>
+          <a:lstStyle/>
+          <a:p>
+            <a:pPr algn="l"/>
+            <a:r>
+              <a:rPr sz="1300" b="1">
+                <a:solidFill>
+                  <a:srgbClr val="3F51B5"/>
+                </a:solidFill>
+              </a:rPr>
+              <a:t>기법 2  —  pre-presentation-checker 직접 제작 + /pc 실사용</a:t>
+            </a:r>
+          </a:p>
+        </p:txBody>
+      </p:sp>
+      <p:sp>
+        <p:nvSpPr>
+          <p:cNvPr id="20" name="TextBox 19"/>
+          <p:cNvSpPr txBox="1"/>
+          <p:nvPr/>
+        </p:nvSpPr>
+        <p:spPr>
+          <a:xfrm>
+            <a:off x="658368" y="3584448"/>
+            <a:ext cx="10789920" cy="896112"/>
+          </a:xfrm>
+          <a:prstGeom prst="rect">
+            <a:avLst/>
+          </a:prstGeom>
+          <a:noFill/>
+        </p:spPr>
+        <p:txBody>
+          <a:bodyPr wrap="square">
+            <a:spAutoFit/>
+          </a:bodyPr>
+          <a:lstStyle/>
+          <a:p>
+            <a:pPr algn="l"/>
+            <a:r>
+              <a:rPr sz="1200" b="0">
+                <a:solidFill>
+                  <a:srgbClr val="212121"/>
+                </a:solidFill>
+              </a:rPr>
+              <a:t>.claude/agents/pre-presentation-checker.md  직접 제작  ·  /pc 명령어로 호출
+발표 전 제출 서류 · 가산점 · 앱 상태를 평가 루브릭 기준으로 자동 점검 → 미완료 항목 우선 보고</a:t>
+            </a:r>
+          </a:p>
+        </p:txBody>
+      </p:sp>
+      <p:sp>
+        <p:nvSpPr>
+          <p:cNvPr id="21" name="Rectangle 20"/>
           <p:cNvSpPr/>
           <p:nvPr/>
         </p:nvSpPr>
         <p:spPr>
           <a:xfrm>
-            <a:off x="457200" y="4526279"/>
+            <a:off x="457200" y="4800600"/>
+            <a:ext cx="11247120" cy="1554480"/>
+          </a:xfrm>
+          <a:prstGeom prst="rect">
+            <a:avLst/>
+          </a:prstGeom>
+          <a:noFill/>
+          <a:ln w="10160">
+            <a:solidFill>
+              <a:srgbClr val="E0E0E0"/>
+            </a:solidFill>
+          </a:ln>
+        </p:spPr>
+        <p:style>
+          <a:lnRef idx="1">
+            <a:schemeClr val="accent1"/>
+          </a:lnRef>
+          <a:fillRef idx="3">
+            <a:schemeClr val="accent1"/>
+          </a:fillRef>
+          <a:effectRef idx="2">
+            <a:schemeClr val="accent1"/>
+          </a:effectRef>
+          <a:fontRef idx="minor">
+            <a:schemeClr val="lt1"/>
+          </a:fontRef>
+        </p:style>
+        <p:txBody>
+          <a:bodyPr rtlCol="0" anchor="ctr"/>
+          <a:lstStyle/>
+          <a:p>
+            <a:pPr algn="ctr"/>
+          </a:p>
+        </p:txBody>
+      </p:sp>
+      <p:sp>
+        <p:nvSpPr>
+          <p:cNvPr id="22" name="Rectangle 21"/>
+          <p:cNvSpPr/>
+          <p:nvPr/>
+        </p:nvSpPr>
+        <p:spPr>
+          <a:xfrm>
+            <a:off x="457200" y="4800600"/>
+            <a:ext cx="54864" cy="1554480"/>
+          </a:xfrm>
+          <a:prstGeom prst="rect">
+            <a:avLst/>
+          </a:prstGeom>
+          <a:solidFill>
+            <a:srgbClr val="3F51B5"/>
+          </a:solidFill>
+          <a:ln>
+            <a:noFill/>
+          </a:ln>
+        </p:spPr>
+        <p:style>
+          <a:lnRef idx="1">
+            <a:schemeClr val="accent1"/>
+          </a:lnRef>
+          <a:fillRef idx="3">
+            <a:schemeClr val="accent1"/>
+          </a:fillRef>
+          <a:effectRef idx="2">
+            <a:schemeClr val="accent1"/>
+          </a:effectRef>
+          <a:fontRef idx="minor">
+            <a:schemeClr val="lt1"/>
+          </a:fontRef>
+        </p:style>
+        <p:txBody>
+          <a:bodyPr rtlCol="0" anchor="ctr"/>
+          <a:lstStyle/>
+          <a:p>
+            <a:pPr algn="ctr"/>
+          </a:p>
+        </p:txBody>
+      </p:sp>
+      <p:sp>
+        <p:nvSpPr>
+          <p:cNvPr id="23" name="Rectangle 22"/>
+          <p:cNvSpPr/>
+          <p:nvPr/>
+        </p:nvSpPr>
+        <p:spPr>
+          <a:xfrm>
+            <a:off x="457200" y="4800600"/>
             <a:ext cx="11247120" cy="438912"/>
           </a:xfrm>
           <a:prstGeom prst="rect">
@@ -4132,14 +4285,91 @@
       </p:sp>
       <p:sp>
         <p:nvSpPr>
-          <p:cNvPr id="20" name="TextBox 19"/>
-          <p:cNvSpPr txBox="1"/>
-          <p:nvPr/>
-        </p:nvSpPr>
-        <p:spPr>
-          <a:xfrm>
-            <a:off x="658368" y="4599431"/>
-            <a:ext cx="10972800" cy="320040"/>
+          <p:cNvPr id="24" name="Rectangle 23"/>
+          <p:cNvSpPr/>
+          <p:nvPr/>
+        </p:nvSpPr>
+        <p:spPr>
+          <a:xfrm>
+            <a:off x="10241280" y="4873752"/>
+            <a:ext cx="1234440" cy="292608"/>
+          </a:xfrm>
+          <a:prstGeom prst="rect">
+            <a:avLst/>
+          </a:prstGeom>
+          <a:solidFill>
+            <a:srgbClr val="3F51B5"/>
+          </a:solidFill>
+          <a:ln>
+            <a:noFill/>
+          </a:ln>
+        </p:spPr>
+        <p:style>
+          <a:lnRef idx="1">
+            <a:schemeClr val="accent1"/>
+          </a:lnRef>
+          <a:fillRef idx="3">
+            <a:schemeClr val="accent1"/>
+          </a:fillRef>
+          <a:effectRef idx="2">
+            <a:schemeClr val="accent1"/>
+          </a:effectRef>
+          <a:fontRef idx="minor">
+            <a:schemeClr val="lt1"/>
+          </a:fontRef>
+        </p:style>
+        <p:txBody>
+          <a:bodyPr rtlCol="0" anchor="ctr"/>
+          <a:lstStyle/>
+          <a:p>
+            <a:pPr algn="ctr"/>
+          </a:p>
+        </p:txBody>
+      </p:sp>
+      <p:sp>
+        <p:nvSpPr>
+          <p:cNvPr id="25" name="TextBox 24"/>
+          <p:cNvSpPr txBox="1"/>
+          <p:nvPr/>
+        </p:nvSpPr>
+        <p:spPr>
+          <a:xfrm>
+            <a:off x="10241280" y="4873752"/>
+            <a:ext cx="1234440" cy="292608"/>
+          </a:xfrm>
+          <a:prstGeom prst="rect">
+            <a:avLst/>
+          </a:prstGeom>
+          <a:noFill/>
+        </p:spPr>
+        <p:txBody>
+          <a:bodyPr wrap="square">
+            <a:spAutoFit/>
+          </a:bodyPr>
+          <a:lstStyle/>
+          <a:p>
+            <a:pPr algn="ctr"/>
+            <a:r>
+              <a:rPr sz="1100" b="1">
+                <a:solidFill>
+                  <a:srgbClr val="FFFFFF"/>
+                </a:solidFill>
+              </a:rPr>
+              <a:t>B  +2</a:t>
+            </a:r>
+          </a:p>
+        </p:txBody>
+      </p:sp>
+      <p:sp>
+        <p:nvSpPr>
+          <p:cNvPr id="26" name="TextBox 25"/>
+          <p:cNvSpPr txBox="1"/>
+          <p:nvPr/>
+        </p:nvSpPr>
+        <p:spPr>
+          <a:xfrm>
+            <a:off x="658368" y="4873752"/>
+            <a:ext cx="9418320" cy="320040"/>
           </a:xfrm>
           <a:prstGeom prst="rect">
             <a:avLst/>
@@ -4159,21 +4389,21 @@
                   <a:srgbClr val="3F51B5"/>
                 </a:solidFill>
               </a:rPr>
-              <a:t>기법 3  —  단계별 개발 계획 · 진행</a:t>
-            </a:r>
-          </a:p>
-        </p:txBody>
-      </p:sp>
-      <p:sp>
-        <p:nvSpPr>
-          <p:cNvPr id="21" name="TextBox 20"/>
-          <p:cNvSpPr txBox="1"/>
-          <p:nvPr/>
-        </p:nvSpPr>
-        <p:spPr>
-          <a:xfrm>
-            <a:off x="658368" y="5093207"/>
-            <a:ext cx="10789920" cy="841248"/>
+              <a:t>기법 3  —  단계별 보고 방식</a:t>
+            </a:r>
+          </a:p>
+        </p:txBody>
+      </p:sp>
+      <p:sp>
+        <p:nvSpPr>
+          <p:cNvPr id="27" name="TextBox 26"/>
+          <p:cNvSpPr txBox="1"/>
+          <p:nvPr/>
+        </p:nvSpPr>
+        <p:spPr>
+          <a:xfrm>
+            <a:off x="658368" y="5367528"/>
+            <a:ext cx="10789920" cy="896112"/>
           </a:xfrm>
           <a:prstGeom prst="rect">
             <a:avLst/>
@@ -4193,8 +4423,8 @@
                   <a:srgbClr val="212121"/>
                 </a:solidFill>
               </a:rPr>
-              <a:t>개발 전 단계별 계획 수립 → AI로 구현 → 직접 점검 · 이해 후 다음 단계 진행
-AI 의존 개발에서 코드 이해도를 유지하기 위한 개인 워크플로우</a:t>
+              <a:t>각 구현 단계 완료 후 AI에게 결과 보고받기 → 코드 이해도 유지
+"방금 만든 기능을 3줄로 설명해줘" → 내용 이해 후 다음 단계 진행  ·  Q&amp;A 즉답 가능</a:t>
             </a:r>
           </a:p>
         </p:txBody>
@@ -4287,48 +4517,14 @@
                   <a:srgbClr val="3F51B5"/>
                 </a:solidFill>
               </a:rPr>
-              <a:t>10.  개발 방식 — AI 워크플로우</a:t>
-            </a:r>
-          </a:p>
-        </p:txBody>
-      </p:sp>
-      <p:sp>
-        <p:nvSpPr>
-          <p:cNvPr id="4" name="TextBox 3"/>
-          <p:cNvSpPr txBox="1"/>
-          <p:nvPr/>
-        </p:nvSpPr>
-        <p:spPr>
-          <a:xfrm>
-            <a:off x="457200" y="621792"/>
-            <a:ext cx="10972800" cy="274320"/>
-          </a:xfrm>
-          <a:prstGeom prst="rect">
-            <a:avLst/>
-          </a:prstGeom>
-          <a:noFill/>
-        </p:spPr>
-        <p:txBody>
-          <a:bodyPr wrap="square">
-            <a:spAutoFit/>
-          </a:bodyPr>
-          <a:lstStyle/>
-          <a:p>
-            <a:pPr algn="l"/>
-            <a:r>
-              <a:rPr sz="1100" b="0">
-                <a:solidFill>
-                  <a:srgbClr val="9E9E9E"/>
-                </a:solidFill>
-              </a:rPr>
-              <a:t>jeongkyeongwoo 기법 구성</a:t>
-            </a:r>
-          </a:p>
-        </p:txBody>
-      </p:sp>
-      <p:sp>
-        <p:nvSpPr>
-          <p:cNvPr id="5" name="Rectangle 4"/>
+              <a:t>ADR-0001  —  모바일 프레임워크 선택</a:t>
+            </a:r>
+          </a:p>
+        </p:txBody>
+      </p:sp>
+      <p:sp>
+        <p:nvSpPr>
+          <p:cNvPr id="4" name="Rectangle 3"/>
           <p:cNvSpPr/>
           <p:nvPr/>
         </p:nvSpPr>
@@ -4371,7 +4567,7 @@
       </p:sp>
       <p:sp>
         <p:nvSpPr>
-          <p:cNvPr id="6" name="TextBox 5"/>
+          <p:cNvPr id="5" name="TextBox 4"/>
           <p:cNvSpPr txBox="1"/>
           <p:nvPr/>
         </p:nvSpPr>
@@ -4398,7 +4594,41 @@
                   <a:srgbClr val="9E9E9E"/>
                 </a:solidFill>
               </a:rPr>
-              <a:t>11 / 15</a:t>
+              <a:t>11 / 14</a:t>
+            </a:r>
+          </a:p>
+        </p:txBody>
+      </p:sp>
+      <p:sp>
+        <p:nvSpPr>
+          <p:cNvPr id="6" name="TextBox 5"/>
+          <p:cNvSpPr txBox="1"/>
+          <p:nvPr/>
+        </p:nvSpPr>
+        <p:spPr>
+          <a:xfrm>
+            <a:off x="457200" y="987552"/>
+            <a:ext cx="10972800" cy="347472"/>
+          </a:xfrm>
+          <a:prstGeom prst="rect">
+            <a:avLst/>
+          </a:prstGeom>
+          <a:noFill/>
+        </p:spPr>
+        <p:txBody>
+          <a:bodyPr wrap="square">
+            <a:spAutoFit/>
+          </a:bodyPr>
+          <a:lstStyle/>
+          <a:p>
+            <a:pPr algn="l"/>
+            <a:r>
+              <a:rPr sz="1200" b="0">
+                <a:solidFill>
+                  <a:srgbClr val="9E9E9E"/>
+                </a:solidFill>
+              </a:rPr>
+              <a:t>선택지 비교</a:t>
             </a:r>
           </a:p>
         </p:txBody>
@@ -4411,8 +4641,8 @@
         </p:nvSpPr>
         <p:spPr>
           <a:xfrm>
-            <a:off x="457200" y="1417320"/>
-            <a:ext cx="11247120" cy="1920240"/>
+            <a:off x="457200" y="1389888"/>
+            <a:ext cx="11247120" cy="1024128"/>
           </a:xfrm>
           <a:prstGeom prst="rect">
             <a:avLst/>
@@ -4448,14 +4678,202 @@
       </p:sp>
       <p:sp>
         <p:nvSpPr>
-          <p:cNvPr id="8" name="Rectangle 7"/>
+          <p:cNvPr id="8" name="TextBox 7"/>
+          <p:cNvSpPr txBox="1"/>
+          <p:nvPr/>
+        </p:nvSpPr>
+        <p:spPr>
+          <a:xfrm>
+            <a:off x="594360" y="1499616"/>
+            <a:ext cx="11064240" cy="886968"/>
+          </a:xfrm>
+          <a:prstGeom prst="rect">
+            <a:avLst/>
+          </a:prstGeom>
+          <a:noFill/>
+        </p:spPr>
+        <p:txBody>
+          <a:bodyPr wrap="square">
+            <a:spAutoFit/>
+          </a:bodyPr>
+          <a:lstStyle/>
+          <a:p>
+            <a:pPr algn="l"/>
+            <a:r>
+              <a:rPr sz="1600" b="0">
+                <a:solidFill>
+                  <a:srgbClr val="9E9E9E"/>
+                </a:solidFill>
+              </a:rPr>
+              <a:t>React Native</a:t>
+            </a:r>
+          </a:p>
+        </p:txBody>
+      </p:sp>
+      <p:sp>
+        <p:nvSpPr>
+          <p:cNvPr id="9" name="Rectangle 8"/>
           <p:cNvSpPr/>
           <p:nvPr/>
         </p:nvSpPr>
         <p:spPr>
           <a:xfrm>
-            <a:off x="457200" y="1417320"/>
-            <a:ext cx="54864" cy="1920240"/>
+            <a:off x="457200" y="2651760"/>
+            <a:ext cx="11247120" cy="1024128"/>
+          </a:xfrm>
+          <a:prstGeom prst="rect">
+            <a:avLst/>
+          </a:prstGeom>
+          <a:noFill/>
+          <a:ln w="10160">
+            <a:solidFill>
+              <a:srgbClr val="E0E0E0"/>
+            </a:solidFill>
+          </a:ln>
+        </p:spPr>
+        <p:style>
+          <a:lnRef idx="1">
+            <a:schemeClr val="accent1"/>
+          </a:lnRef>
+          <a:fillRef idx="3">
+            <a:schemeClr val="accent1"/>
+          </a:fillRef>
+          <a:effectRef idx="2">
+            <a:schemeClr val="accent1"/>
+          </a:effectRef>
+          <a:fontRef idx="minor">
+            <a:schemeClr val="lt1"/>
+          </a:fontRef>
+        </p:style>
+        <p:txBody>
+          <a:bodyPr rtlCol="0" anchor="ctr"/>
+          <a:lstStyle/>
+          <a:p>
+            <a:pPr algn="ctr"/>
+          </a:p>
+        </p:txBody>
+      </p:sp>
+      <p:sp>
+        <p:nvSpPr>
+          <p:cNvPr id="10" name="TextBox 9"/>
+          <p:cNvSpPr txBox="1"/>
+          <p:nvPr/>
+        </p:nvSpPr>
+        <p:spPr>
+          <a:xfrm>
+            <a:off x="594360" y="2761488"/>
+            <a:ext cx="11064240" cy="886968"/>
+          </a:xfrm>
+          <a:prstGeom prst="rect">
+            <a:avLst/>
+          </a:prstGeom>
+          <a:noFill/>
+        </p:spPr>
+        <p:txBody>
+          <a:bodyPr wrap="square">
+            <a:spAutoFit/>
+          </a:bodyPr>
+          <a:lstStyle/>
+          <a:p>
+            <a:pPr algn="l"/>
+            <a:r>
+              <a:rPr sz="1600" b="0">
+                <a:solidFill>
+                  <a:srgbClr val="9E9E9E"/>
+                </a:solidFill>
+              </a:rPr>
+              <a:t>안드로이드 전용 개발</a:t>
+            </a:r>
+          </a:p>
+        </p:txBody>
+      </p:sp>
+      <p:sp>
+        <p:nvSpPr>
+          <p:cNvPr id="11" name="Rectangle 10"/>
+          <p:cNvSpPr/>
+          <p:nvPr/>
+        </p:nvSpPr>
+        <p:spPr>
+          <a:xfrm>
+            <a:off x="457200" y="3913631"/>
+            <a:ext cx="11247120" cy="1024128"/>
+          </a:xfrm>
+          <a:prstGeom prst="rect">
+            <a:avLst/>
+          </a:prstGeom>
+          <a:noFill/>
+          <a:ln w="10160">
+            <a:solidFill>
+              <a:srgbClr val="E0E0E0"/>
+            </a:solidFill>
+          </a:ln>
+        </p:spPr>
+        <p:style>
+          <a:lnRef idx="1">
+            <a:schemeClr val="accent1"/>
+          </a:lnRef>
+          <a:fillRef idx="3">
+            <a:schemeClr val="accent1"/>
+          </a:fillRef>
+          <a:effectRef idx="2">
+            <a:schemeClr val="accent1"/>
+          </a:effectRef>
+          <a:fontRef idx="minor">
+            <a:schemeClr val="lt1"/>
+          </a:fontRef>
+        </p:style>
+        <p:txBody>
+          <a:bodyPr rtlCol="0" anchor="ctr"/>
+          <a:lstStyle/>
+          <a:p>
+            <a:pPr algn="ctr"/>
+          </a:p>
+        </p:txBody>
+      </p:sp>
+      <p:sp>
+        <p:nvSpPr>
+          <p:cNvPr id="12" name="TextBox 11"/>
+          <p:cNvSpPr txBox="1"/>
+          <p:nvPr/>
+        </p:nvSpPr>
+        <p:spPr>
+          <a:xfrm>
+            <a:off x="594360" y="4023359"/>
+            <a:ext cx="11064240" cy="886968"/>
+          </a:xfrm>
+          <a:prstGeom prst="rect">
+            <a:avLst/>
+          </a:prstGeom>
+          <a:noFill/>
+        </p:spPr>
+        <p:txBody>
+          <a:bodyPr wrap="square">
+            <a:spAutoFit/>
+          </a:bodyPr>
+          <a:lstStyle/>
+          <a:p>
+            <a:pPr algn="l"/>
+            <a:r>
+              <a:rPr sz="1600" b="0">
+                <a:solidFill>
+                  <a:srgbClr val="9E9E9E"/>
+                </a:solidFill>
+              </a:rPr>
+              <a:t>아이폰 전용 개발</a:t>
+            </a:r>
+          </a:p>
+        </p:txBody>
+      </p:sp>
+      <p:sp>
+        <p:nvSpPr>
+          <p:cNvPr id="13" name="Rectangle 12"/>
+          <p:cNvSpPr/>
+          <p:nvPr/>
+        </p:nvSpPr>
+        <p:spPr>
+          <a:xfrm>
+            <a:off x="457200" y="5175504"/>
+            <a:ext cx="11247120" cy="1024128"/>
           </a:xfrm>
           <a:prstGeom prst="rect">
             <a:avLst/>
@@ -4491,57 +4909,14 @@
       </p:sp>
       <p:sp>
         <p:nvSpPr>
-          <p:cNvPr id="9" name="Rectangle 8"/>
-          <p:cNvSpPr/>
-          <p:nvPr/>
-        </p:nvSpPr>
-        <p:spPr>
-          <a:xfrm>
-            <a:off x="457200" y="1417320"/>
-            <a:ext cx="11247120" cy="438912"/>
-          </a:xfrm>
-          <a:prstGeom prst="rect">
-            <a:avLst/>
-          </a:prstGeom>
-          <a:solidFill>
-            <a:srgbClr val="F5F5F5"/>
-          </a:solidFill>
-          <a:ln>
-            <a:noFill/>
-          </a:ln>
-        </p:spPr>
-        <p:style>
-          <a:lnRef idx="1">
-            <a:schemeClr val="accent1"/>
-          </a:lnRef>
-          <a:fillRef idx="3">
-            <a:schemeClr val="accent1"/>
-          </a:fillRef>
-          <a:effectRef idx="2">
-            <a:schemeClr val="accent1"/>
-          </a:effectRef>
-          <a:fontRef idx="minor">
-            <a:schemeClr val="lt1"/>
-          </a:fontRef>
-        </p:style>
-        <p:txBody>
-          <a:bodyPr rtlCol="0" anchor="ctr"/>
-          <a:lstStyle/>
-          <a:p>
-            <a:pPr algn="ctr"/>
-          </a:p>
-        </p:txBody>
-      </p:sp>
-      <p:sp>
-        <p:nvSpPr>
-          <p:cNvPr id="10" name="TextBox 9"/>
-          <p:cNvSpPr txBox="1"/>
-          <p:nvPr/>
-        </p:nvSpPr>
-        <p:spPr>
-          <a:xfrm>
-            <a:off x="658368" y="1490472"/>
-            <a:ext cx="10972800" cy="320040"/>
+          <p:cNvPr id="14" name="TextBox 13"/>
+          <p:cNvSpPr txBox="1"/>
+          <p:nvPr/>
+        </p:nvSpPr>
+        <p:spPr>
+          <a:xfrm>
+            <a:off x="594360" y="5285232"/>
+            <a:ext cx="11064240" cy="886968"/>
           </a:xfrm>
           <a:prstGeom prst="rect">
             <a:avLst/>
@@ -4556,245 +4931,12 @@
           <a:p>
             <a:pPr algn="l"/>
             <a:r>
-              <a:rPr sz="1300" b="1">
-                <a:solidFill>
-                  <a:srgbClr val="3F51B5"/>
-                </a:solidFill>
-              </a:rPr>
-              <a:t>기법 1  —  pre-presentation-checker (/pc)</a:t>
-            </a:r>
-          </a:p>
-        </p:txBody>
-      </p:sp>
-      <p:sp>
-        <p:nvSpPr>
-          <p:cNvPr id="11" name="TextBox 10"/>
-          <p:cNvSpPr txBox="1"/>
-          <p:nvPr/>
-        </p:nvSpPr>
-        <p:spPr>
-          <a:xfrm>
-            <a:off x="658368" y="1984248"/>
-            <a:ext cx="10789920" cy="1188720"/>
-          </a:xfrm>
-          <a:prstGeom prst="rect">
-            <a:avLst/>
-          </a:prstGeom>
-          <a:noFill/>
-        </p:spPr>
-        <p:txBody>
-          <a:bodyPr wrap="square">
-            <a:spAutoFit/>
-          </a:bodyPr>
-          <a:lstStyle/>
-          <a:p>
-            <a:pPr algn="l"/>
-            <a:r>
-              <a:rPr sz="1200" b="0">
-                <a:solidFill>
-                  <a:srgbClr val="212121"/>
-                </a:solidFill>
-              </a:rPr>
-              <a:t>발표 전 제출 서류·가산점 요소·앱 상태를 평가 루브릭 기준으로 종합 점검
-미완료 항목과 현재 점수를 한눈에 보고 → 발표 당일 사각지대 없이 준비</a:t>
-            </a:r>
-          </a:p>
-        </p:txBody>
-      </p:sp>
-      <p:sp>
-        <p:nvSpPr>
-          <p:cNvPr id="12" name="Rectangle 11"/>
-          <p:cNvSpPr/>
-          <p:nvPr/>
-        </p:nvSpPr>
-        <p:spPr>
-          <a:xfrm>
-            <a:off x="457200" y="3611880"/>
-            <a:ext cx="11247120" cy="1920240"/>
-          </a:xfrm>
-          <a:prstGeom prst="rect">
-            <a:avLst/>
-          </a:prstGeom>
-          <a:noFill/>
-          <a:ln w="10160">
-            <a:solidFill>
-              <a:srgbClr val="E0E0E0"/>
-            </a:solidFill>
-          </a:ln>
-        </p:spPr>
-        <p:style>
-          <a:lnRef idx="1">
-            <a:schemeClr val="accent1"/>
-          </a:lnRef>
-          <a:fillRef idx="3">
-            <a:schemeClr val="accent1"/>
-          </a:fillRef>
-          <a:effectRef idx="2">
-            <a:schemeClr val="accent1"/>
-          </a:effectRef>
-          <a:fontRef idx="minor">
-            <a:schemeClr val="lt1"/>
-          </a:fontRef>
-        </p:style>
-        <p:txBody>
-          <a:bodyPr rtlCol="0" anchor="ctr"/>
-          <a:lstStyle/>
-          <a:p>
-            <a:pPr algn="ctr"/>
-          </a:p>
-        </p:txBody>
-      </p:sp>
-      <p:sp>
-        <p:nvSpPr>
-          <p:cNvPr id="13" name="Rectangle 12"/>
-          <p:cNvSpPr/>
-          <p:nvPr/>
-        </p:nvSpPr>
-        <p:spPr>
-          <a:xfrm>
-            <a:off x="457200" y="3611880"/>
-            <a:ext cx="54864" cy="1920240"/>
-          </a:xfrm>
-          <a:prstGeom prst="rect">
-            <a:avLst/>
-          </a:prstGeom>
-          <a:solidFill>
-            <a:srgbClr val="3F51B5"/>
-          </a:solidFill>
-          <a:ln>
-            <a:noFill/>
-          </a:ln>
-        </p:spPr>
-        <p:style>
-          <a:lnRef idx="1">
-            <a:schemeClr val="accent1"/>
-          </a:lnRef>
-          <a:fillRef idx="3">
-            <a:schemeClr val="accent1"/>
-          </a:fillRef>
-          <a:effectRef idx="2">
-            <a:schemeClr val="accent1"/>
-          </a:effectRef>
-          <a:fontRef idx="minor">
-            <a:schemeClr val="lt1"/>
-          </a:fontRef>
-        </p:style>
-        <p:txBody>
-          <a:bodyPr rtlCol="0" anchor="ctr"/>
-          <a:lstStyle/>
-          <a:p>
-            <a:pPr algn="ctr"/>
-          </a:p>
-        </p:txBody>
-      </p:sp>
-      <p:sp>
-        <p:nvSpPr>
-          <p:cNvPr id="14" name="Rectangle 13"/>
-          <p:cNvSpPr/>
-          <p:nvPr/>
-        </p:nvSpPr>
-        <p:spPr>
-          <a:xfrm>
-            <a:off x="457200" y="3611880"/>
-            <a:ext cx="11247120" cy="438912"/>
-          </a:xfrm>
-          <a:prstGeom prst="rect">
-            <a:avLst/>
-          </a:prstGeom>
-          <a:solidFill>
-            <a:srgbClr val="F5F5F5"/>
-          </a:solidFill>
-          <a:ln>
-            <a:noFill/>
-          </a:ln>
-        </p:spPr>
-        <p:style>
-          <a:lnRef idx="1">
-            <a:schemeClr val="accent1"/>
-          </a:lnRef>
-          <a:fillRef idx="3">
-            <a:schemeClr val="accent1"/>
-          </a:fillRef>
-          <a:effectRef idx="2">
-            <a:schemeClr val="accent1"/>
-          </a:effectRef>
-          <a:fontRef idx="minor">
-            <a:schemeClr val="lt1"/>
-          </a:fontRef>
-        </p:style>
-        <p:txBody>
-          <a:bodyPr rtlCol="0" anchor="ctr"/>
-          <a:lstStyle/>
-          <a:p>
-            <a:pPr algn="ctr"/>
-          </a:p>
-        </p:txBody>
-      </p:sp>
-      <p:sp>
-        <p:nvSpPr>
-          <p:cNvPr id="15" name="TextBox 14"/>
-          <p:cNvSpPr txBox="1"/>
-          <p:nvPr/>
-        </p:nvSpPr>
-        <p:spPr>
-          <a:xfrm>
-            <a:off x="658368" y="3685032"/>
-            <a:ext cx="10972800" cy="320040"/>
-          </a:xfrm>
-          <a:prstGeom prst="rect">
-            <a:avLst/>
-          </a:prstGeom>
-          <a:noFill/>
-        </p:spPr>
-        <p:txBody>
-          <a:bodyPr wrap="square">
-            <a:spAutoFit/>
-          </a:bodyPr>
-          <a:lstStyle/>
-          <a:p>
-            <a:pPr algn="l"/>
-            <a:r>
-              <a:rPr sz="1300" b="1">
-                <a:solidFill>
-                  <a:srgbClr val="3F51B5"/>
-                </a:solidFill>
-              </a:rPr>
-              <a:t>기법 2  —  단계별 보고 방식</a:t>
-            </a:r>
-          </a:p>
-        </p:txBody>
-      </p:sp>
-      <p:sp>
-        <p:nvSpPr>
-          <p:cNvPr id="16" name="TextBox 15"/>
-          <p:cNvSpPr txBox="1"/>
-          <p:nvPr/>
-        </p:nvSpPr>
-        <p:spPr>
-          <a:xfrm>
-            <a:off x="658368" y="4178808"/>
-            <a:ext cx="10789920" cy="1188720"/>
-          </a:xfrm>
-          <a:prstGeom prst="rect">
-            <a:avLst/>
-          </a:prstGeom>
-          <a:noFill/>
-        </p:spPr>
-        <p:txBody>
-          <a:bodyPr wrap="square">
-            <a:spAutoFit/>
-          </a:bodyPr>
-          <a:lstStyle/>
-          <a:p>
-            <a:pPr algn="l"/>
-            <a:r>
-              <a:rPr sz="1200" b="0">
-                <a:solidFill>
-                  <a:srgbClr val="212121"/>
-                </a:solidFill>
-              </a:rPr>
-              <a:t>각 구현 단계 완료 후 AI에게 구현 내용 보고 요청 → 놓친 항목·개선점 자동 파악
-비전공자도 이해할 수 있게 요약 보고 → 코드 이해도 유지 + Q&amp;A 즉답 가능</a:t>
+              <a:rPr sz="1600" b="1">
+                <a:solidFill>
+                  <a:srgbClr val="FFFFFF"/>
+                </a:solidFill>
+              </a:rPr>
+              <a:t>✓  Flutter</a:t>
             </a:r>
           </a:p>
         </p:txBody>
@@ -4887,7 +5029,7 @@
                   <a:srgbClr val="3F51B5"/>
                 </a:solidFill>
               </a:rPr>
-              <a:t>ADR-0001  —  모바일 프레임워크 선택</a:t>
+              <a:t>ADR-0002  —  아키텍처 패턴 선택</a:t>
             </a:r>
           </a:p>
         </p:txBody>
@@ -4964,7 +5106,7 @@
                   <a:srgbClr val="9E9E9E"/>
                 </a:solidFill>
               </a:rPr>
-              <a:t>12 / 15</a:t>
+              <a:t>12 / 14</a:t>
             </a:r>
           </a:p>
         </p:txBody>
@@ -4978,7 +5120,7 @@
         <p:spPr>
           <a:xfrm>
             <a:off x="457200" y="987552"/>
-            <a:ext cx="10972800" cy="347472"/>
+            <a:ext cx="5486400" cy="347472"/>
           </a:xfrm>
           <a:prstGeom prst="rect">
             <a:avLst/>
@@ -5012,7 +5154,7 @@
         <p:spPr>
           <a:xfrm>
             <a:off x="457200" y="1389888"/>
-            <a:ext cx="11247120" cy="1024128"/>
+            <a:ext cx="5486400" cy="1024128"/>
           </a:xfrm>
           <a:prstGeom prst="rect">
             <a:avLst/>
@@ -5055,7 +5197,7 @@
         <p:spPr>
           <a:xfrm>
             <a:off x="594360" y="1499616"/>
-            <a:ext cx="11064240" cy="886968"/>
+            <a:ext cx="5303520" cy="886968"/>
           </a:xfrm>
           <a:prstGeom prst="rect">
             <a:avLst/>
@@ -5075,7 +5217,7 @@
                   <a:srgbClr val="9E9E9E"/>
                 </a:solidFill>
               </a:rPr>
-              <a:t>React Native</a:t>
+              <a:t>역할 구분 없이 한 파일</a:t>
             </a:r>
           </a:p>
         </p:txBody>
@@ -5089,7 +5231,7 @@
         <p:spPr>
           <a:xfrm>
             <a:off x="457200" y="2651760"/>
-            <a:ext cx="11247120" cy="1024128"/>
+            <a:ext cx="5486400" cy="1024128"/>
           </a:xfrm>
           <a:prstGeom prst="rect">
             <a:avLst/>
@@ -5132,7 +5274,7 @@
         <p:spPr>
           <a:xfrm>
             <a:off x="594360" y="2761488"/>
-            <a:ext cx="11064240" cy="886968"/>
+            <a:ext cx="5303520" cy="886968"/>
           </a:xfrm>
           <a:prstGeom prst="rect">
             <a:avLst/>
@@ -5152,7 +5294,7 @@
                   <a:srgbClr val="9E9E9E"/>
                 </a:solidFill>
               </a:rPr>
-              <a:t>안드로이드 전용 개발</a:t>
+              <a:t>MVC 방식</a:t>
             </a:r>
           </a:p>
         </p:txBody>
@@ -5166,7 +5308,7 @@
         <p:spPr>
           <a:xfrm>
             <a:off x="457200" y="3913631"/>
-            <a:ext cx="11247120" cy="1024128"/>
+            <a:ext cx="5486400" cy="1024128"/>
           </a:xfrm>
           <a:prstGeom prst="rect">
             <a:avLst/>
@@ -5209,7 +5351,7 @@
         <p:spPr>
           <a:xfrm>
             <a:off x="594360" y="4023359"/>
-            <a:ext cx="11064240" cy="886968"/>
+            <a:ext cx="5303520" cy="886968"/>
           </a:xfrm>
           <a:prstGeom prst="rect">
             <a:avLst/>
@@ -5229,7 +5371,7 @@
                   <a:srgbClr val="9E9E9E"/>
                 </a:solidFill>
               </a:rPr>
-              <a:t>아이폰 전용 개발</a:t>
+              <a:t>6 ~ 8개 레이어</a:t>
             </a:r>
           </a:p>
         </p:txBody>
@@ -5243,7 +5385,7 @@
         <p:spPr>
           <a:xfrm>
             <a:off x="457200" y="5175504"/>
-            <a:ext cx="11247120" cy="1024128"/>
+            <a:ext cx="5486400" cy="1024128"/>
           </a:xfrm>
           <a:prstGeom prst="rect">
             <a:avLst/>
@@ -5286,7 +5428,7 @@
         <p:spPr>
           <a:xfrm>
             <a:off x="594360" y="5285232"/>
-            <a:ext cx="11064240" cy="886968"/>
+            <a:ext cx="5303520" cy="886968"/>
           </a:xfrm>
           <a:prstGeom prst="rect">
             <a:avLst/>
@@ -5306,7 +5448,1226 @@
                   <a:srgbClr val="FFFFFF"/>
                 </a:solidFill>
               </a:rPr>
-              <a:t>✓  Flutter</a:t>
+              <a:t>✓  4레이어 구조</a:t>
+            </a:r>
+          </a:p>
+        </p:txBody>
+      </p:sp>
+      <p:sp>
+        <p:nvSpPr>
+          <p:cNvPr id="15" name="TextBox 14"/>
+          <p:cNvSpPr txBox="1"/>
+          <p:nvPr/>
+        </p:nvSpPr>
+        <p:spPr>
+          <a:xfrm>
+            <a:off x="6400800" y="987552"/>
+            <a:ext cx="5394960" cy="347472"/>
+          </a:xfrm>
+          <a:prstGeom prst="rect">
+            <a:avLst/>
+          </a:prstGeom>
+          <a:noFill/>
+        </p:spPr>
+        <p:txBody>
+          <a:bodyPr wrap="square">
+            <a:spAutoFit/>
+          </a:bodyPr>
+          <a:lstStyle/>
+          <a:p>
+            <a:pPr algn="l"/>
+            <a:r>
+              <a:rPr sz="1200" b="0">
+                <a:solidFill>
+                  <a:srgbClr val="9E9E9E"/>
+                </a:solidFill>
+              </a:rPr>
+              <a:t>선택된 4레이어 구조</a:t>
+            </a:r>
+          </a:p>
+        </p:txBody>
+      </p:sp>
+      <p:sp>
+        <p:nvSpPr>
+          <p:cNvPr id="16" name="Rectangle 15"/>
+          <p:cNvSpPr/>
+          <p:nvPr/>
+        </p:nvSpPr>
+        <p:spPr>
+          <a:xfrm>
+            <a:off x="6400800" y="1389888"/>
+            <a:ext cx="1371600" cy="822960"/>
+          </a:xfrm>
+          <a:prstGeom prst="rect">
+            <a:avLst/>
+          </a:prstGeom>
+          <a:solidFill>
+            <a:srgbClr val="F5F5F5"/>
+          </a:solidFill>
+          <a:ln w="10160">
+            <a:solidFill>
+              <a:srgbClr val="E0E0E0"/>
+            </a:solidFill>
+          </a:ln>
+        </p:spPr>
+        <p:style>
+          <a:lnRef idx="1">
+            <a:schemeClr val="accent1"/>
+          </a:lnRef>
+          <a:fillRef idx="3">
+            <a:schemeClr val="accent1"/>
+          </a:fillRef>
+          <a:effectRef idx="2">
+            <a:schemeClr val="accent1"/>
+          </a:effectRef>
+          <a:fontRef idx="minor">
+            <a:schemeClr val="lt1"/>
+          </a:fontRef>
+        </p:style>
+        <p:txBody>
+          <a:bodyPr rtlCol="0" anchor="ctr"/>
+          <a:lstStyle/>
+          <a:p>
+            <a:pPr algn="ctr"/>
+          </a:p>
+        </p:txBody>
+      </p:sp>
+      <p:sp>
+        <p:nvSpPr>
+          <p:cNvPr id="17" name="TextBox 16"/>
+          <p:cNvSpPr txBox="1"/>
+          <p:nvPr/>
+        </p:nvSpPr>
+        <p:spPr>
+          <a:xfrm>
+            <a:off x="6510528" y="1591056"/>
+            <a:ext cx="1188720" cy="438912"/>
+          </a:xfrm>
+          <a:prstGeom prst="rect">
+            <a:avLst/>
+          </a:prstGeom>
+          <a:noFill/>
+        </p:spPr>
+        <p:txBody>
+          <a:bodyPr wrap="square">
+            <a:spAutoFit/>
+          </a:bodyPr>
+          <a:lstStyle/>
+          <a:p>
+            <a:pPr algn="l"/>
+            <a:r>
+              <a:rPr sz="1200" b="1">
+                <a:solidFill>
+                  <a:srgbClr val="3F51B5"/>
+                </a:solidFill>
+              </a:rPr>
+              <a:t>레이어</a:t>
+            </a:r>
+          </a:p>
+        </p:txBody>
+      </p:sp>
+      <p:sp>
+        <p:nvSpPr>
+          <p:cNvPr id="18" name="Rectangle 17"/>
+          <p:cNvSpPr/>
+          <p:nvPr/>
+        </p:nvSpPr>
+        <p:spPr>
+          <a:xfrm>
+            <a:off x="7818120" y="1389888"/>
+            <a:ext cx="2560320" cy="822960"/>
+          </a:xfrm>
+          <a:prstGeom prst="rect">
+            <a:avLst/>
+          </a:prstGeom>
+          <a:solidFill>
+            <a:srgbClr val="F5F5F5"/>
+          </a:solidFill>
+          <a:ln w="10160">
+            <a:solidFill>
+              <a:srgbClr val="E0E0E0"/>
+            </a:solidFill>
+          </a:ln>
+        </p:spPr>
+        <p:style>
+          <a:lnRef idx="1">
+            <a:schemeClr val="accent1"/>
+          </a:lnRef>
+          <a:fillRef idx="3">
+            <a:schemeClr val="accent1"/>
+          </a:fillRef>
+          <a:effectRef idx="2">
+            <a:schemeClr val="accent1"/>
+          </a:effectRef>
+          <a:fontRef idx="minor">
+            <a:schemeClr val="lt1"/>
+          </a:fontRef>
+        </p:style>
+        <p:txBody>
+          <a:bodyPr rtlCol="0" anchor="ctr"/>
+          <a:lstStyle/>
+          <a:p>
+            <a:pPr algn="ctr"/>
+          </a:p>
+        </p:txBody>
+      </p:sp>
+      <p:sp>
+        <p:nvSpPr>
+          <p:cNvPr id="19" name="TextBox 18"/>
+          <p:cNvSpPr txBox="1"/>
+          <p:nvPr/>
+        </p:nvSpPr>
+        <p:spPr>
+          <a:xfrm>
+            <a:off x="7927848" y="1591056"/>
+            <a:ext cx="2377439" cy="438912"/>
+          </a:xfrm>
+          <a:prstGeom prst="rect">
+            <a:avLst/>
+          </a:prstGeom>
+          <a:noFill/>
+        </p:spPr>
+        <p:txBody>
+          <a:bodyPr wrap="square">
+            <a:spAutoFit/>
+          </a:bodyPr>
+          <a:lstStyle/>
+          <a:p>
+            <a:pPr algn="l"/>
+            <a:r>
+              <a:rPr sz="1200" b="1">
+                <a:solidFill>
+                  <a:srgbClr val="3F51B5"/>
+                </a:solidFill>
+              </a:rPr>
+              <a:t>역할</a:t>
+            </a:r>
+          </a:p>
+        </p:txBody>
+      </p:sp>
+      <p:sp>
+        <p:nvSpPr>
+          <p:cNvPr id="20" name="Rectangle 19"/>
+          <p:cNvSpPr/>
+          <p:nvPr/>
+        </p:nvSpPr>
+        <p:spPr>
+          <a:xfrm>
+            <a:off x="10424160" y="1389888"/>
+            <a:ext cx="1737360" cy="822960"/>
+          </a:xfrm>
+          <a:prstGeom prst="rect">
+            <a:avLst/>
+          </a:prstGeom>
+          <a:solidFill>
+            <a:srgbClr val="F5F5F5"/>
+          </a:solidFill>
+          <a:ln w="10160">
+            <a:solidFill>
+              <a:srgbClr val="E0E0E0"/>
+            </a:solidFill>
+          </a:ln>
+        </p:spPr>
+        <p:style>
+          <a:lnRef idx="1">
+            <a:schemeClr val="accent1"/>
+          </a:lnRef>
+          <a:fillRef idx="3">
+            <a:schemeClr val="accent1"/>
+          </a:fillRef>
+          <a:effectRef idx="2">
+            <a:schemeClr val="accent1"/>
+          </a:effectRef>
+          <a:fontRef idx="minor">
+            <a:schemeClr val="lt1"/>
+          </a:fontRef>
+        </p:style>
+        <p:txBody>
+          <a:bodyPr rtlCol="0" anchor="ctr"/>
+          <a:lstStyle/>
+          <a:p>
+            <a:pPr algn="ctr"/>
+          </a:p>
+        </p:txBody>
+      </p:sp>
+      <p:sp>
+        <p:nvSpPr>
+          <p:cNvPr id="21" name="TextBox 20"/>
+          <p:cNvSpPr txBox="1"/>
+          <p:nvPr/>
+        </p:nvSpPr>
+        <p:spPr>
+          <a:xfrm>
+            <a:off x="10533888" y="1591056"/>
+            <a:ext cx="1554480" cy="438912"/>
+          </a:xfrm>
+          <a:prstGeom prst="rect">
+            <a:avLst/>
+          </a:prstGeom>
+          <a:noFill/>
+        </p:spPr>
+        <p:txBody>
+          <a:bodyPr wrap="square">
+            <a:spAutoFit/>
+          </a:bodyPr>
+          <a:lstStyle/>
+          <a:p>
+            <a:pPr algn="l"/>
+            <a:r>
+              <a:rPr sz="1200" b="1">
+                <a:solidFill>
+                  <a:srgbClr val="3F51B5"/>
+                </a:solidFill>
+              </a:rPr>
+              <a:t>위치</a:t>
+            </a:r>
+          </a:p>
+        </p:txBody>
+      </p:sp>
+      <p:sp>
+        <p:nvSpPr>
+          <p:cNvPr id="22" name="Rectangle 21"/>
+          <p:cNvSpPr/>
+          <p:nvPr/>
+        </p:nvSpPr>
+        <p:spPr>
+          <a:xfrm>
+            <a:off x="6400800" y="2395728"/>
+            <a:ext cx="1371600" cy="822960"/>
+          </a:xfrm>
+          <a:prstGeom prst="rect">
+            <a:avLst/>
+          </a:prstGeom>
+          <a:solidFill>
+            <a:srgbClr val="FFFFFF"/>
+          </a:solidFill>
+          <a:ln w="10160">
+            <a:solidFill>
+              <a:srgbClr val="E0E0E0"/>
+            </a:solidFill>
+          </a:ln>
+        </p:spPr>
+        <p:style>
+          <a:lnRef idx="1">
+            <a:schemeClr val="accent1"/>
+          </a:lnRef>
+          <a:fillRef idx="3">
+            <a:schemeClr val="accent1"/>
+          </a:fillRef>
+          <a:effectRef idx="2">
+            <a:schemeClr val="accent1"/>
+          </a:effectRef>
+          <a:fontRef idx="minor">
+            <a:schemeClr val="lt1"/>
+          </a:fontRef>
+        </p:style>
+        <p:txBody>
+          <a:bodyPr rtlCol="0" anchor="ctr"/>
+          <a:lstStyle/>
+          <a:p>
+            <a:pPr algn="ctr"/>
+          </a:p>
+        </p:txBody>
+      </p:sp>
+      <p:sp>
+        <p:nvSpPr>
+          <p:cNvPr id="23" name="TextBox 22"/>
+          <p:cNvSpPr txBox="1"/>
+          <p:nvPr/>
+        </p:nvSpPr>
+        <p:spPr>
+          <a:xfrm>
+            <a:off x="6510528" y="2596896"/>
+            <a:ext cx="1188720" cy="438912"/>
+          </a:xfrm>
+          <a:prstGeom prst="rect">
+            <a:avLst/>
+          </a:prstGeom>
+          <a:noFill/>
+        </p:spPr>
+        <p:txBody>
+          <a:bodyPr wrap="square">
+            <a:spAutoFit/>
+          </a:bodyPr>
+          <a:lstStyle/>
+          <a:p>
+            <a:pPr algn="l"/>
+            <a:r>
+              <a:rPr sz="1200" b="0">
+                <a:solidFill>
+                  <a:srgbClr val="212121"/>
+                </a:solidFill>
+              </a:rPr>
+              <a:t>화면</a:t>
+            </a:r>
+          </a:p>
+        </p:txBody>
+      </p:sp>
+      <p:sp>
+        <p:nvSpPr>
+          <p:cNvPr id="24" name="Rectangle 23"/>
+          <p:cNvSpPr/>
+          <p:nvPr/>
+        </p:nvSpPr>
+        <p:spPr>
+          <a:xfrm>
+            <a:off x="7818120" y="2395728"/>
+            <a:ext cx="2560320" cy="822960"/>
+          </a:xfrm>
+          <a:prstGeom prst="rect">
+            <a:avLst/>
+          </a:prstGeom>
+          <a:solidFill>
+            <a:srgbClr val="FFFFFF"/>
+          </a:solidFill>
+          <a:ln w="10160">
+            <a:solidFill>
+              <a:srgbClr val="E0E0E0"/>
+            </a:solidFill>
+          </a:ln>
+        </p:spPr>
+        <p:style>
+          <a:lnRef idx="1">
+            <a:schemeClr val="accent1"/>
+          </a:lnRef>
+          <a:fillRef idx="3">
+            <a:schemeClr val="accent1"/>
+          </a:fillRef>
+          <a:effectRef idx="2">
+            <a:schemeClr val="accent1"/>
+          </a:effectRef>
+          <a:fontRef idx="minor">
+            <a:schemeClr val="lt1"/>
+          </a:fontRef>
+        </p:style>
+        <p:txBody>
+          <a:bodyPr rtlCol="0" anchor="ctr"/>
+          <a:lstStyle/>
+          <a:p>
+            <a:pPr algn="ctr"/>
+          </a:p>
+        </p:txBody>
+      </p:sp>
+      <p:sp>
+        <p:nvSpPr>
+          <p:cNvPr id="25" name="TextBox 24"/>
+          <p:cNvSpPr txBox="1"/>
+          <p:nvPr/>
+        </p:nvSpPr>
+        <p:spPr>
+          <a:xfrm>
+            <a:off x="7927848" y="2596896"/>
+            <a:ext cx="2377439" cy="438912"/>
+          </a:xfrm>
+          <a:prstGeom prst="rect">
+            <a:avLst/>
+          </a:prstGeom>
+          <a:noFill/>
+        </p:spPr>
+        <p:txBody>
+          <a:bodyPr wrap="square">
+            <a:spAutoFit/>
+          </a:bodyPr>
+          <a:lstStyle/>
+          <a:p>
+            <a:pPr algn="l"/>
+            <a:r>
+              <a:rPr sz="1200" b="0">
+                <a:solidFill>
+                  <a:srgbClr val="212121"/>
+                </a:solidFill>
+              </a:rPr>
+              <a:t>버튼·목록·입력창</a:t>
+            </a:r>
+          </a:p>
+        </p:txBody>
+      </p:sp>
+      <p:sp>
+        <p:nvSpPr>
+          <p:cNvPr id="26" name="Rectangle 25"/>
+          <p:cNvSpPr/>
+          <p:nvPr/>
+        </p:nvSpPr>
+        <p:spPr>
+          <a:xfrm>
+            <a:off x="10424160" y="2395728"/>
+            <a:ext cx="1737360" cy="822960"/>
+          </a:xfrm>
+          <a:prstGeom prst="rect">
+            <a:avLst/>
+          </a:prstGeom>
+          <a:solidFill>
+            <a:srgbClr val="FFFFFF"/>
+          </a:solidFill>
+          <a:ln w="10160">
+            <a:solidFill>
+              <a:srgbClr val="E0E0E0"/>
+            </a:solidFill>
+          </a:ln>
+        </p:spPr>
+        <p:style>
+          <a:lnRef idx="1">
+            <a:schemeClr val="accent1"/>
+          </a:lnRef>
+          <a:fillRef idx="3">
+            <a:schemeClr val="accent1"/>
+          </a:fillRef>
+          <a:effectRef idx="2">
+            <a:schemeClr val="accent1"/>
+          </a:effectRef>
+          <a:fontRef idx="minor">
+            <a:schemeClr val="lt1"/>
+          </a:fontRef>
+        </p:style>
+        <p:txBody>
+          <a:bodyPr rtlCol="0" anchor="ctr"/>
+          <a:lstStyle/>
+          <a:p>
+            <a:pPr algn="ctr"/>
+          </a:p>
+        </p:txBody>
+      </p:sp>
+      <p:sp>
+        <p:nvSpPr>
+          <p:cNvPr id="27" name="TextBox 26"/>
+          <p:cNvSpPr txBox="1"/>
+          <p:nvPr/>
+        </p:nvSpPr>
+        <p:spPr>
+          <a:xfrm>
+            <a:off x="10533888" y="2596896"/>
+            <a:ext cx="1554480" cy="438912"/>
+          </a:xfrm>
+          <a:prstGeom prst="rect">
+            <a:avLst/>
+          </a:prstGeom>
+          <a:noFill/>
+        </p:spPr>
+        <p:txBody>
+          <a:bodyPr wrap="square">
+            <a:spAutoFit/>
+          </a:bodyPr>
+          <a:lstStyle/>
+          <a:p>
+            <a:pPr algn="l"/>
+            <a:r>
+              <a:rPr sz="1200" b="0">
+                <a:solidFill>
+                  <a:srgbClr val="212121"/>
+                </a:solidFill>
+              </a:rPr>
+              <a:t>screens/</a:t>
+            </a:r>
+          </a:p>
+        </p:txBody>
+      </p:sp>
+      <p:sp>
+        <p:nvSpPr>
+          <p:cNvPr id="28" name="Rectangle 27"/>
+          <p:cNvSpPr/>
+          <p:nvPr/>
+        </p:nvSpPr>
+        <p:spPr>
+          <a:xfrm>
+            <a:off x="6400800" y="3401568"/>
+            <a:ext cx="1371600" cy="822960"/>
+          </a:xfrm>
+          <a:prstGeom prst="rect">
+            <a:avLst/>
+          </a:prstGeom>
+          <a:solidFill>
+            <a:srgbClr val="FFFFFF"/>
+          </a:solidFill>
+          <a:ln w="10160">
+            <a:solidFill>
+              <a:srgbClr val="E0E0E0"/>
+            </a:solidFill>
+          </a:ln>
+        </p:spPr>
+        <p:style>
+          <a:lnRef idx="1">
+            <a:schemeClr val="accent1"/>
+          </a:lnRef>
+          <a:fillRef idx="3">
+            <a:schemeClr val="accent1"/>
+          </a:fillRef>
+          <a:effectRef idx="2">
+            <a:schemeClr val="accent1"/>
+          </a:effectRef>
+          <a:fontRef idx="minor">
+            <a:schemeClr val="lt1"/>
+          </a:fontRef>
+        </p:style>
+        <p:txBody>
+          <a:bodyPr rtlCol="0" anchor="ctr"/>
+          <a:lstStyle/>
+          <a:p>
+            <a:pPr algn="ctr"/>
+          </a:p>
+        </p:txBody>
+      </p:sp>
+      <p:sp>
+        <p:nvSpPr>
+          <p:cNvPr id="29" name="TextBox 28"/>
+          <p:cNvSpPr txBox="1"/>
+          <p:nvPr/>
+        </p:nvSpPr>
+        <p:spPr>
+          <a:xfrm>
+            <a:off x="6510528" y="3602736"/>
+            <a:ext cx="1188720" cy="438912"/>
+          </a:xfrm>
+          <a:prstGeom prst="rect">
+            <a:avLst/>
+          </a:prstGeom>
+          <a:noFill/>
+        </p:spPr>
+        <p:txBody>
+          <a:bodyPr wrap="square">
+            <a:spAutoFit/>
+          </a:bodyPr>
+          <a:lstStyle/>
+          <a:p>
+            <a:pPr algn="l"/>
+            <a:r>
+              <a:rPr sz="1200" b="0">
+                <a:solidFill>
+                  <a:srgbClr val="212121"/>
+                </a:solidFill>
+              </a:rPr>
+              <a:t>흐름</a:t>
+            </a:r>
+          </a:p>
+        </p:txBody>
+      </p:sp>
+      <p:sp>
+        <p:nvSpPr>
+          <p:cNvPr id="30" name="Rectangle 29"/>
+          <p:cNvSpPr/>
+          <p:nvPr/>
+        </p:nvSpPr>
+        <p:spPr>
+          <a:xfrm>
+            <a:off x="7818120" y="3401568"/>
+            <a:ext cx="2560320" cy="822960"/>
+          </a:xfrm>
+          <a:prstGeom prst="rect">
+            <a:avLst/>
+          </a:prstGeom>
+          <a:solidFill>
+            <a:srgbClr val="FFFFFF"/>
+          </a:solidFill>
+          <a:ln w="10160">
+            <a:solidFill>
+              <a:srgbClr val="E0E0E0"/>
+            </a:solidFill>
+          </a:ln>
+        </p:spPr>
+        <p:style>
+          <a:lnRef idx="1">
+            <a:schemeClr val="accent1"/>
+          </a:lnRef>
+          <a:fillRef idx="3">
+            <a:schemeClr val="accent1"/>
+          </a:fillRef>
+          <a:effectRef idx="2">
+            <a:schemeClr val="accent1"/>
+          </a:effectRef>
+          <a:fontRef idx="minor">
+            <a:schemeClr val="lt1"/>
+          </a:fontRef>
+        </p:style>
+        <p:txBody>
+          <a:bodyPr rtlCol="0" anchor="ctr"/>
+          <a:lstStyle/>
+          <a:p>
+            <a:pPr algn="ctr"/>
+          </a:p>
+        </p:txBody>
+      </p:sp>
+      <p:sp>
+        <p:nvSpPr>
+          <p:cNvPr id="31" name="TextBox 30"/>
+          <p:cNvSpPr txBox="1"/>
+          <p:nvPr/>
+        </p:nvSpPr>
+        <p:spPr>
+          <a:xfrm>
+            <a:off x="7927848" y="3602736"/>
+            <a:ext cx="2377439" cy="438912"/>
+          </a:xfrm>
+          <a:prstGeom prst="rect">
+            <a:avLst/>
+          </a:prstGeom>
+          <a:noFill/>
+        </p:spPr>
+        <p:txBody>
+          <a:bodyPr wrap="square">
+            <a:spAutoFit/>
+          </a:bodyPr>
+          <a:lstStyle/>
+          <a:p>
+            <a:pPr algn="l"/>
+            <a:r>
+              <a:rPr sz="1200" b="0">
+                <a:solidFill>
+                  <a:srgbClr val="212121"/>
+                </a:solidFill>
+              </a:rPr>
+              <a:t>화면-데이터 연결 처리</a:t>
+            </a:r>
+          </a:p>
+        </p:txBody>
+      </p:sp>
+      <p:sp>
+        <p:nvSpPr>
+          <p:cNvPr id="32" name="Rectangle 31"/>
+          <p:cNvSpPr/>
+          <p:nvPr/>
+        </p:nvSpPr>
+        <p:spPr>
+          <a:xfrm>
+            <a:off x="10424160" y="3401568"/>
+            <a:ext cx="1737360" cy="822960"/>
+          </a:xfrm>
+          <a:prstGeom prst="rect">
+            <a:avLst/>
+          </a:prstGeom>
+          <a:solidFill>
+            <a:srgbClr val="FFFFFF"/>
+          </a:solidFill>
+          <a:ln w="10160">
+            <a:solidFill>
+              <a:srgbClr val="E0E0E0"/>
+            </a:solidFill>
+          </a:ln>
+        </p:spPr>
+        <p:style>
+          <a:lnRef idx="1">
+            <a:schemeClr val="accent1"/>
+          </a:lnRef>
+          <a:fillRef idx="3">
+            <a:schemeClr val="accent1"/>
+          </a:fillRef>
+          <a:effectRef idx="2">
+            <a:schemeClr val="accent1"/>
+          </a:effectRef>
+          <a:fontRef idx="minor">
+            <a:schemeClr val="lt1"/>
+          </a:fontRef>
+        </p:style>
+        <p:txBody>
+          <a:bodyPr rtlCol="0" anchor="ctr"/>
+          <a:lstStyle/>
+          <a:p>
+            <a:pPr algn="ctr"/>
+          </a:p>
+        </p:txBody>
+      </p:sp>
+      <p:sp>
+        <p:nvSpPr>
+          <p:cNvPr id="33" name="TextBox 32"/>
+          <p:cNvSpPr txBox="1"/>
+          <p:nvPr/>
+        </p:nvSpPr>
+        <p:spPr>
+          <a:xfrm>
+            <a:off x="10533888" y="3602736"/>
+            <a:ext cx="1554480" cy="438912"/>
+          </a:xfrm>
+          <a:prstGeom prst="rect">
+            <a:avLst/>
+          </a:prstGeom>
+          <a:noFill/>
+        </p:spPr>
+        <p:txBody>
+          <a:bodyPr wrap="square">
+            <a:spAutoFit/>
+          </a:bodyPr>
+          <a:lstStyle/>
+          <a:p>
+            <a:pPr algn="l"/>
+            <a:r>
+              <a:rPr sz="1200" b="0">
+                <a:solidFill>
+                  <a:srgbClr val="212121"/>
+                </a:solidFill>
+              </a:rPr>
+              <a:t/>
+            </a:r>
+          </a:p>
+        </p:txBody>
+      </p:sp>
+      <p:sp>
+        <p:nvSpPr>
+          <p:cNvPr id="34" name="Rectangle 33"/>
+          <p:cNvSpPr/>
+          <p:nvPr/>
+        </p:nvSpPr>
+        <p:spPr>
+          <a:xfrm>
+            <a:off x="6400800" y="4407408"/>
+            <a:ext cx="1371600" cy="822960"/>
+          </a:xfrm>
+          <a:prstGeom prst="rect">
+            <a:avLst/>
+          </a:prstGeom>
+          <a:solidFill>
+            <a:srgbClr val="FFFFFF"/>
+          </a:solidFill>
+          <a:ln w="10160">
+            <a:solidFill>
+              <a:srgbClr val="E0E0E0"/>
+            </a:solidFill>
+          </a:ln>
+        </p:spPr>
+        <p:style>
+          <a:lnRef idx="1">
+            <a:schemeClr val="accent1"/>
+          </a:lnRef>
+          <a:fillRef idx="3">
+            <a:schemeClr val="accent1"/>
+          </a:fillRef>
+          <a:effectRef idx="2">
+            <a:schemeClr val="accent1"/>
+          </a:effectRef>
+          <a:fontRef idx="minor">
+            <a:schemeClr val="lt1"/>
+          </a:fontRef>
+        </p:style>
+        <p:txBody>
+          <a:bodyPr rtlCol="0" anchor="ctr"/>
+          <a:lstStyle/>
+          <a:p>
+            <a:pPr algn="ctr"/>
+          </a:p>
+        </p:txBody>
+      </p:sp>
+      <p:sp>
+        <p:nvSpPr>
+          <p:cNvPr id="35" name="TextBox 34"/>
+          <p:cNvSpPr txBox="1"/>
+          <p:nvPr/>
+        </p:nvSpPr>
+        <p:spPr>
+          <a:xfrm>
+            <a:off x="6510528" y="4608576"/>
+            <a:ext cx="1188720" cy="438912"/>
+          </a:xfrm>
+          <a:prstGeom prst="rect">
+            <a:avLst/>
+          </a:prstGeom>
+          <a:noFill/>
+        </p:spPr>
+        <p:txBody>
+          <a:bodyPr wrap="square">
+            <a:spAutoFit/>
+          </a:bodyPr>
+          <a:lstStyle/>
+          <a:p>
+            <a:pPr algn="l"/>
+            <a:r>
+              <a:rPr sz="1200" b="0">
+                <a:solidFill>
+                  <a:srgbClr val="212121"/>
+                </a:solidFill>
+              </a:rPr>
+              <a:t>규칙</a:t>
+            </a:r>
+          </a:p>
+        </p:txBody>
+      </p:sp>
+      <p:sp>
+        <p:nvSpPr>
+          <p:cNvPr id="36" name="Rectangle 35"/>
+          <p:cNvSpPr/>
+          <p:nvPr/>
+        </p:nvSpPr>
+        <p:spPr>
+          <a:xfrm>
+            <a:off x="7818120" y="4407408"/>
+            <a:ext cx="2560320" cy="822960"/>
+          </a:xfrm>
+          <a:prstGeom prst="rect">
+            <a:avLst/>
+          </a:prstGeom>
+          <a:solidFill>
+            <a:srgbClr val="FFFFFF"/>
+          </a:solidFill>
+          <a:ln w="10160">
+            <a:solidFill>
+              <a:srgbClr val="E0E0E0"/>
+            </a:solidFill>
+          </a:ln>
+        </p:spPr>
+        <p:style>
+          <a:lnRef idx="1">
+            <a:schemeClr val="accent1"/>
+          </a:lnRef>
+          <a:fillRef idx="3">
+            <a:schemeClr val="accent1"/>
+          </a:fillRef>
+          <a:effectRef idx="2">
+            <a:schemeClr val="accent1"/>
+          </a:effectRef>
+          <a:fontRef idx="minor">
+            <a:schemeClr val="lt1"/>
+          </a:fontRef>
+        </p:style>
+        <p:txBody>
+          <a:bodyPr rtlCol="0" anchor="ctr"/>
+          <a:lstStyle/>
+          <a:p>
+            <a:pPr algn="ctr"/>
+          </a:p>
+        </p:txBody>
+      </p:sp>
+      <p:sp>
+        <p:nvSpPr>
+          <p:cNvPr id="37" name="TextBox 36"/>
+          <p:cNvSpPr txBox="1"/>
+          <p:nvPr/>
+        </p:nvSpPr>
+        <p:spPr>
+          <a:xfrm>
+            <a:off x="7927848" y="4608576"/>
+            <a:ext cx="2377439" cy="438912"/>
+          </a:xfrm>
+          <a:prstGeom prst="rect">
+            <a:avLst/>
+          </a:prstGeom>
+          <a:noFill/>
+        </p:spPr>
+        <p:txBody>
+          <a:bodyPr wrap="square">
+            <a:spAutoFit/>
+          </a:bodyPr>
+          <a:lstStyle/>
+          <a:p>
+            <a:pPr algn="l"/>
+            <a:r>
+              <a:rPr sz="1200" b="0">
+                <a:solidFill>
+                  <a:srgbClr val="212121"/>
+                </a:solidFill>
+              </a:rPr>
+              <a:t>잔액·수익률 계산</a:t>
+            </a:r>
+          </a:p>
+        </p:txBody>
+      </p:sp>
+      <p:sp>
+        <p:nvSpPr>
+          <p:cNvPr id="38" name="Rectangle 37"/>
+          <p:cNvSpPr/>
+          <p:nvPr/>
+        </p:nvSpPr>
+        <p:spPr>
+          <a:xfrm>
+            <a:off x="10424160" y="4407408"/>
+            <a:ext cx="1737360" cy="822960"/>
+          </a:xfrm>
+          <a:prstGeom prst="rect">
+            <a:avLst/>
+          </a:prstGeom>
+          <a:solidFill>
+            <a:srgbClr val="FFFFFF"/>
+          </a:solidFill>
+          <a:ln w="10160">
+            <a:solidFill>
+              <a:srgbClr val="E0E0E0"/>
+            </a:solidFill>
+          </a:ln>
+        </p:spPr>
+        <p:style>
+          <a:lnRef idx="1">
+            <a:schemeClr val="accent1"/>
+          </a:lnRef>
+          <a:fillRef idx="3">
+            <a:schemeClr val="accent1"/>
+          </a:fillRef>
+          <a:effectRef idx="2">
+            <a:schemeClr val="accent1"/>
+          </a:effectRef>
+          <a:fontRef idx="minor">
+            <a:schemeClr val="lt1"/>
+          </a:fontRef>
+        </p:style>
+        <p:txBody>
+          <a:bodyPr rtlCol="0" anchor="ctr"/>
+          <a:lstStyle/>
+          <a:p>
+            <a:pPr algn="ctr"/>
+          </a:p>
+        </p:txBody>
+      </p:sp>
+      <p:sp>
+        <p:nvSpPr>
+          <p:cNvPr id="39" name="TextBox 38"/>
+          <p:cNvSpPr txBox="1"/>
+          <p:nvPr/>
+        </p:nvSpPr>
+        <p:spPr>
+          <a:xfrm>
+            <a:off x="10533888" y="4608576"/>
+            <a:ext cx="1554480" cy="438912"/>
+          </a:xfrm>
+          <a:prstGeom prst="rect">
+            <a:avLst/>
+          </a:prstGeom>
+          <a:noFill/>
+        </p:spPr>
+        <p:txBody>
+          <a:bodyPr wrap="square">
+            <a:spAutoFit/>
+          </a:bodyPr>
+          <a:lstStyle/>
+          <a:p>
+            <a:pPr algn="l"/>
+            <a:r>
+              <a:rPr sz="1200" b="0">
+                <a:solidFill>
+                  <a:srgbClr val="212121"/>
+                </a:solidFill>
+              </a:rPr>
+              <a:t>models/</a:t>
+            </a:r>
+          </a:p>
+        </p:txBody>
+      </p:sp>
+      <p:sp>
+        <p:nvSpPr>
+          <p:cNvPr id="40" name="Rectangle 39"/>
+          <p:cNvSpPr/>
+          <p:nvPr/>
+        </p:nvSpPr>
+        <p:spPr>
+          <a:xfrm>
+            <a:off x="6400800" y="5413248"/>
+            <a:ext cx="1371600" cy="822960"/>
+          </a:xfrm>
+          <a:prstGeom prst="rect">
+            <a:avLst/>
+          </a:prstGeom>
+          <a:solidFill>
+            <a:srgbClr val="FFFFFF"/>
+          </a:solidFill>
+          <a:ln w="10160">
+            <a:solidFill>
+              <a:srgbClr val="E0E0E0"/>
+            </a:solidFill>
+          </a:ln>
+        </p:spPr>
+        <p:style>
+          <a:lnRef idx="1">
+            <a:schemeClr val="accent1"/>
+          </a:lnRef>
+          <a:fillRef idx="3">
+            <a:schemeClr val="accent1"/>
+          </a:fillRef>
+          <a:effectRef idx="2">
+            <a:schemeClr val="accent1"/>
+          </a:effectRef>
+          <a:fontRef idx="minor">
+            <a:schemeClr val="lt1"/>
+          </a:fontRef>
+        </p:style>
+        <p:txBody>
+          <a:bodyPr rtlCol="0" anchor="ctr"/>
+          <a:lstStyle/>
+          <a:p>
+            <a:pPr algn="ctr"/>
+          </a:p>
+        </p:txBody>
+      </p:sp>
+      <p:sp>
+        <p:nvSpPr>
+          <p:cNvPr id="41" name="TextBox 40"/>
+          <p:cNvSpPr txBox="1"/>
+          <p:nvPr/>
+        </p:nvSpPr>
+        <p:spPr>
+          <a:xfrm>
+            <a:off x="6510528" y="5614416"/>
+            <a:ext cx="1188720" cy="438912"/>
+          </a:xfrm>
+          <a:prstGeom prst="rect">
+            <a:avLst/>
+          </a:prstGeom>
+          <a:noFill/>
+        </p:spPr>
+        <p:txBody>
+          <a:bodyPr wrap="square">
+            <a:spAutoFit/>
+          </a:bodyPr>
+          <a:lstStyle/>
+          <a:p>
+            <a:pPr algn="l"/>
+            <a:r>
+              <a:rPr sz="1200" b="0">
+                <a:solidFill>
+                  <a:srgbClr val="212121"/>
+                </a:solidFill>
+              </a:rPr>
+              <a:t>저장</a:t>
+            </a:r>
+          </a:p>
+        </p:txBody>
+      </p:sp>
+      <p:sp>
+        <p:nvSpPr>
+          <p:cNvPr id="42" name="Rectangle 41"/>
+          <p:cNvSpPr/>
+          <p:nvPr/>
+        </p:nvSpPr>
+        <p:spPr>
+          <a:xfrm>
+            <a:off x="7818120" y="5413248"/>
+            <a:ext cx="2560320" cy="822960"/>
+          </a:xfrm>
+          <a:prstGeom prst="rect">
+            <a:avLst/>
+          </a:prstGeom>
+          <a:solidFill>
+            <a:srgbClr val="FFFFFF"/>
+          </a:solidFill>
+          <a:ln w="10160">
+            <a:solidFill>
+              <a:srgbClr val="E0E0E0"/>
+            </a:solidFill>
+          </a:ln>
+        </p:spPr>
+        <p:style>
+          <a:lnRef idx="1">
+            <a:schemeClr val="accent1"/>
+          </a:lnRef>
+          <a:fillRef idx="3">
+            <a:schemeClr val="accent1"/>
+          </a:fillRef>
+          <a:effectRef idx="2">
+            <a:schemeClr val="accent1"/>
+          </a:effectRef>
+          <a:fontRef idx="minor">
+            <a:schemeClr val="lt1"/>
+          </a:fontRef>
+        </p:style>
+        <p:txBody>
+          <a:bodyPr rtlCol="0" anchor="ctr"/>
+          <a:lstStyle/>
+          <a:p>
+            <a:pPr algn="ctr"/>
+          </a:p>
+        </p:txBody>
+      </p:sp>
+      <p:sp>
+        <p:nvSpPr>
+          <p:cNvPr id="43" name="TextBox 42"/>
+          <p:cNvSpPr txBox="1"/>
+          <p:nvPr/>
+        </p:nvSpPr>
+        <p:spPr>
+          <a:xfrm>
+            <a:off x="7927848" y="5614416"/>
+            <a:ext cx="2377439" cy="438912"/>
+          </a:xfrm>
+          <a:prstGeom prst="rect">
+            <a:avLst/>
+          </a:prstGeom>
+          <a:noFill/>
+        </p:spPr>
+        <p:txBody>
+          <a:bodyPr wrap="square">
+            <a:spAutoFit/>
+          </a:bodyPr>
+          <a:lstStyle/>
+          <a:p>
+            <a:pPr algn="l"/>
+            <a:r>
+              <a:rPr sz="1200" b="0">
+                <a:solidFill>
+                  <a:srgbClr val="212121"/>
+                </a:solidFill>
+              </a:rPr>
+              <a:t>Firestore 입출력</a:t>
+            </a:r>
+          </a:p>
+        </p:txBody>
+      </p:sp>
+      <p:sp>
+        <p:nvSpPr>
+          <p:cNvPr id="44" name="Rectangle 43"/>
+          <p:cNvSpPr/>
+          <p:nvPr/>
+        </p:nvSpPr>
+        <p:spPr>
+          <a:xfrm>
+            <a:off x="10424160" y="5413248"/>
+            <a:ext cx="1737360" cy="822960"/>
+          </a:xfrm>
+          <a:prstGeom prst="rect">
+            <a:avLst/>
+          </a:prstGeom>
+          <a:solidFill>
+            <a:srgbClr val="FFFFFF"/>
+          </a:solidFill>
+          <a:ln w="10160">
+            <a:solidFill>
+              <a:srgbClr val="E0E0E0"/>
+            </a:solidFill>
+          </a:ln>
+        </p:spPr>
+        <p:style>
+          <a:lnRef idx="1">
+            <a:schemeClr val="accent1"/>
+          </a:lnRef>
+          <a:fillRef idx="3">
+            <a:schemeClr val="accent1"/>
+          </a:fillRef>
+          <a:effectRef idx="2">
+            <a:schemeClr val="accent1"/>
+          </a:effectRef>
+          <a:fontRef idx="minor">
+            <a:schemeClr val="lt1"/>
+          </a:fontRef>
+        </p:style>
+        <p:txBody>
+          <a:bodyPr rtlCol="0" anchor="ctr"/>
+          <a:lstStyle/>
+          <a:p>
+            <a:pPr algn="ctr"/>
+          </a:p>
+        </p:txBody>
+      </p:sp>
+      <p:sp>
+        <p:nvSpPr>
+          <p:cNvPr id="45" name="TextBox 44"/>
+          <p:cNvSpPr txBox="1"/>
+          <p:nvPr/>
+        </p:nvSpPr>
+        <p:spPr>
+          <a:xfrm>
+            <a:off x="10533888" y="5614416"/>
+            <a:ext cx="1554480" cy="438912"/>
+          </a:xfrm>
+          <a:prstGeom prst="rect">
+            <a:avLst/>
+          </a:prstGeom>
+          <a:noFill/>
+        </p:spPr>
+        <p:txBody>
+          <a:bodyPr wrap="square">
+            <a:spAutoFit/>
+          </a:bodyPr>
+          <a:lstStyle/>
+          <a:p>
+            <a:pPr algn="l"/>
+            <a:r>
+              <a:rPr sz="1200" b="0">
+                <a:solidFill>
+                  <a:srgbClr val="212121"/>
+                </a:solidFill>
+              </a:rPr>
+              <a:t>services/</a:t>
             </a:r>
           </a:p>
         </p:txBody>
@@ -5399,7 +6760,7 @@
                   <a:srgbClr val="3F51B5"/>
                 </a:solidFill>
               </a:rPr>
-              <a:t>ADR-0002  —  아키텍처 패턴 선택</a:t>
+              <a:t>ADR-0003  —  백엔드 서비스 선택</a:t>
             </a:r>
           </a:p>
         </p:txBody>
@@ -5476,7 +6837,7 @@
                   <a:srgbClr val="9E9E9E"/>
                 </a:solidFill>
               </a:rPr>
-              <a:t>13 / 15</a:t>
+              <a:t>13 / 14</a:t>
             </a:r>
           </a:p>
         </p:txBody>
@@ -5490,7 +6851,7 @@
         <p:spPr>
           <a:xfrm>
             <a:off x="457200" y="987552"/>
-            <a:ext cx="5486400" cy="347472"/>
+            <a:ext cx="10972800" cy="347472"/>
           </a:xfrm>
           <a:prstGeom prst="rect">
             <a:avLst/>
@@ -5524,7 +6885,7 @@
         <p:spPr>
           <a:xfrm>
             <a:off x="457200" y="1389888"/>
-            <a:ext cx="5486400" cy="1024128"/>
+            <a:ext cx="11247120" cy="1024128"/>
           </a:xfrm>
           <a:prstGeom prst="rect">
             <a:avLst/>
@@ -5567,7 +6928,7 @@
         <p:spPr>
           <a:xfrm>
             <a:off x="594360" y="1499616"/>
-            <a:ext cx="5303520" cy="886968"/>
+            <a:ext cx="11064240" cy="886968"/>
           </a:xfrm>
           <a:prstGeom prst="rect">
             <a:avLst/>
@@ -5587,7 +6948,7 @@
                   <a:srgbClr val="9E9E9E"/>
                 </a:solidFill>
               </a:rPr>
-              <a:t>역할 구분 없이 한 파일</a:t>
+              <a:t>Supabase</a:t>
             </a:r>
           </a:p>
         </p:txBody>
@@ -5601,7 +6962,7 @@
         <p:spPr>
           <a:xfrm>
             <a:off x="457200" y="2651760"/>
-            <a:ext cx="5486400" cy="1024128"/>
+            <a:ext cx="11247120" cy="1024128"/>
           </a:xfrm>
           <a:prstGeom prst="rect">
             <a:avLst/>
@@ -5644,7 +7005,7 @@
         <p:spPr>
           <a:xfrm>
             <a:off x="594360" y="2761488"/>
-            <a:ext cx="5303520" cy="886968"/>
+            <a:ext cx="11064240" cy="886968"/>
           </a:xfrm>
           <a:prstGeom prst="rect">
             <a:avLst/>
@@ -5664,7 +7025,7 @@
                   <a:srgbClr val="9E9E9E"/>
                 </a:solidFill>
               </a:rPr>
-              <a:t>MVC 방식</a:t>
+              <a:t>폰 내부 저장 (SQLite 등)</a:t>
             </a:r>
           </a:p>
         </p:txBody>
@@ -5678,7 +7039,7 @@
         <p:spPr>
           <a:xfrm>
             <a:off x="457200" y="3913631"/>
-            <a:ext cx="5486400" cy="1024128"/>
+            <a:ext cx="11247120" cy="1024128"/>
           </a:xfrm>
           <a:prstGeom prst="rect">
             <a:avLst/>
@@ -5721,7 +7082,7 @@
         <p:spPr>
           <a:xfrm>
             <a:off x="594360" y="4023359"/>
-            <a:ext cx="5303520" cy="886968"/>
+            <a:ext cx="11064240" cy="886968"/>
           </a:xfrm>
           <a:prstGeom prst="rect">
             <a:avLst/>
@@ -5741,7 +7102,7 @@
                   <a:srgbClr val="9E9E9E"/>
                 </a:solidFill>
               </a:rPr>
-              <a:t>6 ~ 8개 레이어</a:t>
+              <a:t>직접 서버 구축</a:t>
             </a:r>
           </a:p>
         </p:txBody>
@@ -5755,7 +7116,7 @@
         <p:spPr>
           <a:xfrm>
             <a:off x="457200" y="5175504"/>
-            <a:ext cx="5486400" cy="1024128"/>
+            <a:ext cx="11247120" cy="1024128"/>
           </a:xfrm>
           <a:prstGeom prst="rect">
             <a:avLst/>
@@ -5798,7 +7159,7 @@
         <p:spPr>
           <a:xfrm>
             <a:off x="594360" y="5285232"/>
-            <a:ext cx="5303520" cy="886968"/>
+            <a:ext cx="11064240" cy="886968"/>
           </a:xfrm>
           <a:prstGeom prst="rect">
             <a:avLst/>
@@ -5818,1226 +7179,7 @@
                   <a:srgbClr val="FFFFFF"/>
                 </a:solidFill>
               </a:rPr>
-              <a:t>✓  4레이어 구조</a:t>
-            </a:r>
-          </a:p>
-        </p:txBody>
-      </p:sp>
-      <p:sp>
-        <p:nvSpPr>
-          <p:cNvPr id="15" name="TextBox 14"/>
-          <p:cNvSpPr txBox="1"/>
-          <p:nvPr/>
-        </p:nvSpPr>
-        <p:spPr>
-          <a:xfrm>
-            <a:off x="6400800" y="987552"/>
-            <a:ext cx="5394960" cy="347472"/>
-          </a:xfrm>
-          <a:prstGeom prst="rect">
-            <a:avLst/>
-          </a:prstGeom>
-          <a:noFill/>
-        </p:spPr>
-        <p:txBody>
-          <a:bodyPr wrap="square">
-            <a:spAutoFit/>
-          </a:bodyPr>
-          <a:lstStyle/>
-          <a:p>
-            <a:pPr algn="l"/>
-            <a:r>
-              <a:rPr sz="1200" b="0">
-                <a:solidFill>
-                  <a:srgbClr val="9E9E9E"/>
-                </a:solidFill>
-              </a:rPr>
-              <a:t>선택된 4레이어 구조</a:t>
-            </a:r>
-          </a:p>
-        </p:txBody>
-      </p:sp>
-      <p:sp>
-        <p:nvSpPr>
-          <p:cNvPr id="16" name="Rectangle 15"/>
-          <p:cNvSpPr/>
-          <p:nvPr/>
-        </p:nvSpPr>
-        <p:spPr>
-          <a:xfrm>
-            <a:off x="6400800" y="1389888"/>
-            <a:ext cx="1371600" cy="822960"/>
-          </a:xfrm>
-          <a:prstGeom prst="rect">
-            <a:avLst/>
-          </a:prstGeom>
-          <a:solidFill>
-            <a:srgbClr val="F5F5F5"/>
-          </a:solidFill>
-          <a:ln w="10160">
-            <a:solidFill>
-              <a:srgbClr val="E0E0E0"/>
-            </a:solidFill>
-          </a:ln>
-        </p:spPr>
-        <p:style>
-          <a:lnRef idx="1">
-            <a:schemeClr val="accent1"/>
-          </a:lnRef>
-          <a:fillRef idx="3">
-            <a:schemeClr val="accent1"/>
-          </a:fillRef>
-          <a:effectRef idx="2">
-            <a:schemeClr val="accent1"/>
-          </a:effectRef>
-          <a:fontRef idx="minor">
-            <a:schemeClr val="lt1"/>
-          </a:fontRef>
-        </p:style>
-        <p:txBody>
-          <a:bodyPr rtlCol="0" anchor="ctr"/>
-          <a:lstStyle/>
-          <a:p>
-            <a:pPr algn="ctr"/>
-          </a:p>
-        </p:txBody>
-      </p:sp>
-      <p:sp>
-        <p:nvSpPr>
-          <p:cNvPr id="17" name="TextBox 16"/>
-          <p:cNvSpPr txBox="1"/>
-          <p:nvPr/>
-        </p:nvSpPr>
-        <p:spPr>
-          <a:xfrm>
-            <a:off x="6510528" y="1591056"/>
-            <a:ext cx="1188720" cy="438912"/>
-          </a:xfrm>
-          <a:prstGeom prst="rect">
-            <a:avLst/>
-          </a:prstGeom>
-          <a:noFill/>
-        </p:spPr>
-        <p:txBody>
-          <a:bodyPr wrap="square">
-            <a:spAutoFit/>
-          </a:bodyPr>
-          <a:lstStyle/>
-          <a:p>
-            <a:pPr algn="l"/>
-            <a:r>
-              <a:rPr sz="1200" b="1">
-                <a:solidFill>
-                  <a:srgbClr val="3F51B5"/>
-                </a:solidFill>
-              </a:rPr>
-              <a:t>레이어</a:t>
-            </a:r>
-          </a:p>
-        </p:txBody>
-      </p:sp>
-      <p:sp>
-        <p:nvSpPr>
-          <p:cNvPr id="18" name="Rectangle 17"/>
-          <p:cNvSpPr/>
-          <p:nvPr/>
-        </p:nvSpPr>
-        <p:spPr>
-          <a:xfrm>
-            <a:off x="7818120" y="1389888"/>
-            <a:ext cx="2560320" cy="822960"/>
-          </a:xfrm>
-          <a:prstGeom prst="rect">
-            <a:avLst/>
-          </a:prstGeom>
-          <a:solidFill>
-            <a:srgbClr val="F5F5F5"/>
-          </a:solidFill>
-          <a:ln w="10160">
-            <a:solidFill>
-              <a:srgbClr val="E0E0E0"/>
-            </a:solidFill>
-          </a:ln>
-        </p:spPr>
-        <p:style>
-          <a:lnRef idx="1">
-            <a:schemeClr val="accent1"/>
-          </a:lnRef>
-          <a:fillRef idx="3">
-            <a:schemeClr val="accent1"/>
-          </a:fillRef>
-          <a:effectRef idx="2">
-            <a:schemeClr val="accent1"/>
-          </a:effectRef>
-          <a:fontRef idx="minor">
-            <a:schemeClr val="lt1"/>
-          </a:fontRef>
-        </p:style>
-        <p:txBody>
-          <a:bodyPr rtlCol="0" anchor="ctr"/>
-          <a:lstStyle/>
-          <a:p>
-            <a:pPr algn="ctr"/>
-          </a:p>
-        </p:txBody>
-      </p:sp>
-      <p:sp>
-        <p:nvSpPr>
-          <p:cNvPr id="19" name="TextBox 18"/>
-          <p:cNvSpPr txBox="1"/>
-          <p:nvPr/>
-        </p:nvSpPr>
-        <p:spPr>
-          <a:xfrm>
-            <a:off x="7927848" y="1591056"/>
-            <a:ext cx="2377439" cy="438912"/>
-          </a:xfrm>
-          <a:prstGeom prst="rect">
-            <a:avLst/>
-          </a:prstGeom>
-          <a:noFill/>
-        </p:spPr>
-        <p:txBody>
-          <a:bodyPr wrap="square">
-            <a:spAutoFit/>
-          </a:bodyPr>
-          <a:lstStyle/>
-          <a:p>
-            <a:pPr algn="l"/>
-            <a:r>
-              <a:rPr sz="1200" b="1">
-                <a:solidFill>
-                  <a:srgbClr val="3F51B5"/>
-                </a:solidFill>
-              </a:rPr>
-              <a:t>역할</a:t>
-            </a:r>
-          </a:p>
-        </p:txBody>
-      </p:sp>
-      <p:sp>
-        <p:nvSpPr>
-          <p:cNvPr id="20" name="Rectangle 19"/>
-          <p:cNvSpPr/>
-          <p:nvPr/>
-        </p:nvSpPr>
-        <p:spPr>
-          <a:xfrm>
-            <a:off x="10424160" y="1389888"/>
-            <a:ext cx="1737360" cy="822960"/>
-          </a:xfrm>
-          <a:prstGeom prst="rect">
-            <a:avLst/>
-          </a:prstGeom>
-          <a:solidFill>
-            <a:srgbClr val="F5F5F5"/>
-          </a:solidFill>
-          <a:ln w="10160">
-            <a:solidFill>
-              <a:srgbClr val="E0E0E0"/>
-            </a:solidFill>
-          </a:ln>
-        </p:spPr>
-        <p:style>
-          <a:lnRef idx="1">
-            <a:schemeClr val="accent1"/>
-          </a:lnRef>
-          <a:fillRef idx="3">
-            <a:schemeClr val="accent1"/>
-          </a:fillRef>
-          <a:effectRef idx="2">
-            <a:schemeClr val="accent1"/>
-          </a:effectRef>
-          <a:fontRef idx="minor">
-            <a:schemeClr val="lt1"/>
-          </a:fontRef>
-        </p:style>
-        <p:txBody>
-          <a:bodyPr rtlCol="0" anchor="ctr"/>
-          <a:lstStyle/>
-          <a:p>
-            <a:pPr algn="ctr"/>
-          </a:p>
-        </p:txBody>
-      </p:sp>
-      <p:sp>
-        <p:nvSpPr>
-          <p:cNvPr id="21" name="TextBox 20"/>
-          <p:cNvSpPr txBox="1"/>
-          <p:nvPr/>
-        </p:nvSpPr>
-        <p:spPr>
-          <a:xfrm>
-            <a:off x="10533888" y="1591056"/>
-            <a:ext cx="1554480" cy="438912"/>
-          </a:xfrm>
-          <a:prstGeom prst="rect">
-            <a:avLst/>
-          </a:prstGeom>
-          <a:noFill/>
-        </p:spPr>
-        <p:txBody>
-          <a:bodyPr wrap="square">
-            <a:spAutoFit/>
-          </a:bodyPr>
-          <a:lstStyle/>
-          <a:p>
-            <a:pPr algn="l"/>
-            <a:r>
-              <a:rPr sz="1200" b="1">
-                <a:solidFill>
-                  <a:srgbClr val="3F51B5"/>
-                </a:solidFill>
-              </a:rPr>
-              <a:t>위치</a:t>
-            </a:r>
-          </a:p>
-        </p:txBody>
-      </p:sp>
-      <p:sp>
-        <p:nvSpPr>
-          <p:cNvPr id="22" name="Rectangle 21"/>
-          <p:cNvSpPr/>
-          <p:nvPr/>
-        </p:nvSpPr>
-        <p:spPr>
-          <a:xfrm>
-            <a:off x="6400800" y="2395728"/>
-            <a:ext cx="1371600" cy="822960"/>
-          </a:xfrm>
-          <a:prstGeom prst="rect">
-            <a:avLst/>
-          </a:prstGeom>
-          <a:solidFill>
-            <a:srgbClr val="FFFFFF"/>
-          </a:solidFill>
-          <a:ln w="10160">
-            <a:solidFill>
-              <a:srgbClr val="E0E0E0"/>
-            </a:solidFill>
-          </a:ln>
-        </p:spPr>
-        <p:style>
-          <a:lnRef idx="1">
-            <a:schemeClr val="accent1"/>
-          </a:lnRef>
-          <a:fillRef idx="3">
-            <a:schemeClr val="accent1"/>
-          </a:fillRef>
-          <a:effectRef idx="2">
-            <a:schemeClr val="accent1"/>
-          </a:effectRef>
-          <a:fontRef idx="minor">
-            <a:schemeClr val="lt1"/>
-          </a:fontRef>
-        </p:style>
-        <p:txBody>
-          <a:bodyPr rtlCol="0" anchor="ctr"/>
-          <a:lstStyle/>
-          <a:p>
-            <a:pPr algn="ctr"/>
-          </a:p>
-        </p:txBody>
-      </p:sp>
-      <p:sp>
-        <p:nvSpPr>
-          <p:cNvPr id="23" name="TextBox 22"/>
-          <p:cNvSpPr txBox="1"/>
-          <p:nvPr/>
-        </p:nvSpPr>
-        <p:spPr>
-          <a:xfrm>
-            <a:off x="6510528" y="2596896"/>
-            <a:ext cx="1188720" cy="438912"/>
-          </a:xfrm>
-          <a:prstGeom prst="rect">
-            <a:avLst/>
-          </a:prstGeom>
-          <a:noFill/>
-        </p:spPr>
-        <p:txBody>
-          <a:bodyPr wrap="square">
-            <a:spAutoFit/>
-          </a:bodyPr>
-          <a:lstStyle/>
-          <a:p>
-            <a:pPr algn="l"/>
-            <a:r>
-              <a:rPr sz="1200" b="0">
-                <a:solidFill>
-                  <a:srgbClr val="212121"/>
-                </a:solidFill>
-              </a:rPr>
-              <a:t>화면</a:t>
-            </a:r>
-          </a:p>
-        </p:txBody>
-      </p:sp>
-      <p:sp>
-        <p:nvSpPr>
-          <p:cNvPr id="24" name="Rectangle 23"/>
-          <p:cNvSpPr/>
-          <p:nvPr/>
-        </p:nvSpPr>
-        <p:spPr>
-          <a:xfrm>
-            <a:off x="7818120" y="2395728"/>
-            <a:ext cx="2560320" cy="822960"/>
-          </a:xfrm>
-          <a:prstGeom prst="rect">
-            <a:avLst/>
-          </a:prstGeom>
-          <a:solidFill>
-            <a:srgbClr val="FFFFFF"/>
-          </a:solidFill>
-          <a:ln w="10160">
-            <a:solidFill>
-              <a:srgbClr val="E0E0E0"/>
-            </a:solidFill>
-          </a:ln>
-        </p:spPr>
-        <p:style>
-          <a:lnRef idx="1">
-            <a:schemeClr val="accent1"/>
-          </a:lnRef>
-          <a:fillRef idx="3">
-            <a:schemeClr val="accent1"/>
-          </a:fillRef>
-          <a:effectRef idx="2">
-            <a:schemeClr val="accent1"/>
-          </a:effectRef>
-          <a:fontRef idx="minor">
-            <a:schemeClr val="lt1"/>
-          </a:fontRef>
-        </p:style>
-        <p:txBody>
-          <a:bodyPr rtlCol="0" anchor="ctr"/>
-          <a:lstStyle/>
-          <a:p>
-            <a:pPr algn="ctr"/>
-          </a:p>
-        </p:txBody>
-      </p:sp>
-      <p:sp>
-        <p:nvSpPr>
-          <p:cNvPr id="25" name="TextBox 24"/>
-          <p:cNvSpPr txBox="1"/>
-          <p:nvPr/>
-        </p:nvSpPr>
-        <p:spPr>
-          <a:xfrm>
-            <a:off x="7927848" y="2596896"/>
-            <a:ext cx="2377439" cy="438912"/>
-          </a:xfrm>
-          <a:prstGeom prst="rect">
-            <a:avLst/>
-          </a:prstGeom>
-          <a:noFill/>
-        </p:spPr>
-        <p:txBody>
-          <a:bodyPr wrap="square">
-            <a:spAutoFit/>
-          </a:bodyPr>
-          <a:lstStyle/>
-          <a:p>
-            <a:pPr algn="l"/>
-            <a:r>
-              <a:rPr sz="1200" b="0">
-                <a:solidFill>
-                  <a:srgbClr val="212121"/>
-                </a:solidFill>
-              </a:rPr>
-              <a:t>버튼·목록·입력창</a:t>
-            </a:r>
-          </a:p>
-        </p:txBody>
-      </p:sp>
-      <p:sp>
-        <p:nvSpPr>
-          <p:cNvPr id="26" name="Rectangle 25"/>
-          <p:cNvSpPr/>
-          <p:nvPr/>
-        </p:nvSpPr>
-        <p:spPr>
-          <a:xfrm>
-            <a:off x="10424160" y="2395728"/>
-            <a:ext cx="1737360" cy="822960"/>
-          </a:xfrm>
-          <a:prstGeom prst="rect">
-            <a:avLst/>
-          </a:prstGeom>
-          <a:solidFill>
-            <a:srgbClr val="FFFFFF"/>
-          </a:solidFill>
-          <a:ln w="10160">
-            <a:solidFill>
-              <a:srgbClr val="E0E0E0"/>
-            </a:solidFill>
-          </a:ln>
-        </p:spPr>
-        <p:style>
-          <a:lnRef idx="1">
-            <a:schemeClr val="accent1"/>
-          </a:lnRef>
-          <a:fillRef idx="3">
-            <a:schemeClr val="accent1"/>
-          </a:fillRef>
-          <a:effectRef idx="2">
-            <a:schemeClr val="accent1"/>
-          </a:effectRef>
-          <a:fontRef idx="minor">
-            <a:schemeClr val="lt1"/>
-          </a:fontRef>
-        </p:style>
-        <p:txBody>
-          <a:bodyPr rtlCol="0" anchor="ctr"/>
-          <a:lstStyle/>
-          <a:p>
-            <a:pPr algn="ctr"/>
-          </a:p>
-        </p:txBody>
-      </p:sp>
-      <p:sp>
-        <p:nvSpPr>
-          <p:cNvPr id="27" name="TextBox 26"/>
-          <p:cNvSpPr txBox="1"/>
-          <p:nvPr/>
-        </p:nvSpPr>
-        <p:spPr>
-          <a:xfrm>
-            <a:off x="10533888" y="2596896"/>
-            <a:ext cx="1554480" cy="438912"/>
-          </a:xfrm>
-          <a:prstGeom prst="rect">
-            <a:avLst/>
-          </a:prstGeom>
-          <a:noFill/>
-        </p:spPr>
-        <p:txBody>
-          <a:bodyPr wrap="square">
-            <a:spAutoFit/>
-          </a:bodyPr>
-          <a:lstStyle/>
-          <a:p>
-            <a:pPr algn="l"/>
-            <a:r>
-              <a:rPr sz="1200" b="0">
-                <a:solidFill>
-                  <a:srgbClr val="212121"/>
-                </a:solidFill>
-              </a:rPr>
-              <a:t>screens/</a:t>
-            </a:r>
-          </a:p>
-        </p:txBody>
-      </p:sp>
-      <p:sp>
-        <p:nvSpPr>
-          <p:cNvPr id="28" name="Rectangle 27"/>
-          <p:cNvSpPr/>
-          <p:nvPr/>
-        </p:nvSpPr>
-        <p:spPr>
-          <a:xfrm>
-            <a:off x="6400800" y="3401568"/>
-            <a:ext cx="1371600" cy="822960"/>
-          </a:xfrm>
-          <a:prstGeom prst="rect">
-            <a:avLst/>
-          </a:prstGeom>
-          <a:solidFill>
-            <a:srgbClr val="FFFFFF"/>
-          </a:solidFill>
-          <a:ln w="10160">
-            <a:solidFill>
-              <a:srgbClr val="E0E0E0"/>
-            </a:solidFill>
-          </a:ln>
-        </p:spPr>
-        <p:style>
-          <a:lnRef idx="1">
-            <a:schemeClr val="accent1"/>
-          </a:lnRef>
-          <a:fillRef idx="3">
-            <a:schemeClr val="accent1"/>
-          </a:fillRef>
-          <a:effectRef idx="2">
-            <a:schemeClr val="accent1"/>
-          </a:effectRef>
-          <a:fontRef idx="minor">
-            <a:schemeClr val="lt1"/>
-          </a:fontRef>
-        </p:style>
-        <p:txBody>
-          <a:bodyPr rtlCol="0" anchor="ctr"/>
-          <a:lstStyle/>
-          <a:p>
-            <a:pPr algn="ctr"/>
-          </a:p>
-        </p:txBody>
-      </p:sp>
-      <p:sp>
-        <p:nvSpPr>
-          <p:cNvPr id="29" name="TextBox 28"/>
-          <p:cNvSpPr txBox="1"/>
-          <p:nvPr/>
-        </p:nvSpPr>
-        <p:spPr>
-          <a:xfrm>
-            <a:off x="6510528" y="3602736"/>
-            <a:ext cx="1188720" cy="438912"/>
-          </a:xfrm>
-          <a:prstGeom prst="rect">
-            <a:avLst/>
-          </a:prstGeom>
-          <a:noFill/>
-        </p:spPr>
-        <p:txBody>
-          <a:bodyPr wrap="square">
-            <a:spAutoFit/>
-          </a:bodyPr>
-          <a:lstStyle/>
-          <a:p>
-            <a:pPr algn="l"/>
-            <a:r>
-              <a:rPr sz="1200" b="0">
-                <a:solidFill>
-                  <a:srgbClr val="212121"/>
-                </a:solidFill>
-              </a:rPr>
-              <a:t>흐름</a:t>
-            </a:r>
-          </a:p>
-        </p:txBody>
-      </p:sp>
-      <p:sp>
-        <p:nvSpPr>
-          <p:cNvPr id="30" name="Rectangle 29"/>
-          <p:cNvSpPr/>
-          <p:nvPr/>
-        </p:nvSpPr>
-        <p:spPr>
-          <a:xfrm>
-            <a:off x="7818120" y="3401568"/>
-            <a:ext cx="2560320" cy="822960"/>
-          </a:xfrm>
-          <a:prstGeom prst="rect">
-            <a:avLst/>
-          </a:prstGeom>
-          <a:solidFill>
-            <a:srgbClr val="FFFFFF"/>
-          </a:solidFill>
-          <a:ln w="10160">
-            <a:solidFill>
-              <a:srgbClr val="E0E0E0"/>
-            </a:solidFill>
-          </a:ln>
-        </p:spPr>
-        <p:style>
-          <a:lnRef idx="1">
-            <a:schemeClr val="accent1"/>
-          </a:lnRef>
-          <a:fillRef idx="3">
-            <a:schemeClr val="accent1"/>
-          </a:fillRef>
-          <a:effectRef idx="2">
-            <a:schemeClr val="accent1"/>
-          </a:effectRef>
-          <a:fontRef idx="minor">
-            <a:schemeClr val="lt1"/>
-          </a:fontRef>
-        </p:style>
-        <p:txBody>
-          <a:bodyPr rtlCol="0" anchor="ctr"/>
-          <a:lstStyle/>
-          <a:p>
-            <a:pPr algn="ctr"/>
-          </a:p>
-        </p:txBody>
-      </p:sp>
-      <p:sp>
-        <p:nvSpPr>
-          <p:cNvPr id="31" name="TextBox 30"/>
-          <p:cNvSpPr txBox="1"/>
-          <p:nvPr/>
-        </p:nvSpPr>
-        <p:spPr>
-          <a:xfrm>
-            <a:off x="7927848" y="3602736"/>
-            <a:ext cx="2377439" cy="438912"/>
-          </a:xfrm>
-          <a:prstGeom prst="rect">
-            <a:avLst/>
-          </a:prstGeom>
-          <a:noFill/>
-        </p:spPr>
-        <p:txBody>
-          <a:bodyPr wrap="square">
-            <a:spAutoFit/>
-          </a:bodyPr>
-          <a:lstStyle/>
-          <a:p>
-            <a:pPr algn="l"/>
-            <a:r>
-              <a:rPr sz="1200" b="0">
-                <a:solidFill>
-                  <a:srgbClr val="212121"/>
-                </a:solidFill>
-              </a:rPr>
-              <a:t>화면-데이터 연결 처리</a:t>
-            </a:r>
-          </a:p>
-        </p:txBody>
-      </p:sp>
-      <p:sp>
-        <p:nvSpPr>
-          <p:cNvPr id="32" name="Rectangle 31"/>
-          <p:cNvSpPr/>
-          <p:nvPr/>
-        </p:nvSpPr>
-        <p:spPr>
-          <a:xfrm>
-            <a:off x="10424160" y="3401568"/>
-            <a:ext cx="1737360" cy="822960"/>
-          </a:xfrm>
-          <a:prstGeom prst="rect">
-            <a:avLst/>
-          </a:prstGeom>
-          <a:solidFill>
-            <a:srgbClr val="FFFFFF"/>
-          </a:solidFill>
-          <a:ln w="10160">
-            <a:solidFill>
-              <a:srgbClr val="E0E0E0"/>
-            </a:solidFill>
-          </a:ln>
-        </p:spPr>
-        <p:style>
-          <a:lnRef idx="1">
-            <a:schemeClr val="accent1"/>
-          </a:lnRef>
-          <a:fillRef idx="3">
-            <a:schemeClr val="accent1"/>
-          </a:fillRef>
-          <a:effectRef idx="2">
-            <a:schemeClr val="accent1"/>
-          </a:effectRef>
-          <a:fontRef idx="minor">
-            <a:schemeClr val="lt1"/>
-          </a:fontRef>
-        </p:style>
-        <p:txBody>
-          <a:bodyPr rtlCol="0" anchor="ctr"/>
-          <a:lstStyle/>
-          <a:p>
-            <a:pPr algn="ctr"/>
-          </a:p>
-        </p:txBody>
-      </p:sp>
-      <p:sp>
-        <p:nvSpPr>
-          <p:cNvPr id="33" name="TextBox 32"/>
-          <p:cNvSpPr txBox="1"/>
-          <p:nvPr/>
-        </p:nvSpPr>
-        <p:spPr>
-          <a:xfrm>
-            <a:off x="10533888" y="3602736"/>
-            <a:ext cx="1554480" cy="438912"/>
-          </a:xfrm>
-          <a:prstGeom prst="rect">
-            <a:avLst/>
-          </a:prstGeom>
-          <a:noFill/>
-        </p:spPr>
-        <p:txBody>
-          <a:bodyPr wrap="square">
-            <a:spAutoFit/>
-          </a:bodyPr>
-          <a:lstStyle/>
-          <a:p>
-            <a:pPr algn="l"/>
-            <a:r>
-              <a:rPr sz="1200" b="0">
-                <a:solidFill>
-                  <a:srgbClr val="212121"/>
-                </a:solidFill>
-              </a:rPr>
-              <a:t/>
-            </a:r>
-          </a:p>
-        </p:txBody>
-      </p:sp>
-      <p:sp>
-        <p:nvSpPr>
-          <p:cNvPr id="34" name="Rectangle 33"/>
-          <p:cNvSpPr/>
-          <p:nvPr/>
-        </p:nvSpPr>
-        <p:spPr>
-          <a:xfrm>
-            <a:off x="6400800" y="4407408"/>
-            <a:ext cx="1371600" cy="822960"/>
-          </a:xfrm>
-          <a:prstGeom prst="rect">
-            <a:avLst/>
-          </a:prstGeom>
-          <a:solidFill>
-            <a:srgbClr val="FFFFFF"/>
-          </a:solidFill>
-          <a:ln w="10160">
-            <a:solidFill>
-              <a:srgbClr val="E0E0E0"/>
-            </a:solidFill>
-          </a:ln>
-        </p:spPr>
-        <p:style>
-          <a:lnRef idx="1">
-            <a:schemeClr val="accent1"/>
-          </a:lnRef>
-          <a:fillRef idx="3">
-            <a:schemeClr val="accent1"/>
-          </a:fillRef>
-          <a:effectRef idx="2">
-            <a:schemeClr val="accent1"/>
-          </a:effectRef>
-          <a:fontRef idx="minor">
-            <a:schemeClr val="lt1"/>
-          </a:fontRef>
-        </p:style>
-        <p:txBody>
-          <a:bodyPr rtlCol="0" anchor="ctr"/>
-          <a:lstStyle/>
-          <a:p>
-            <a:pPr algn="ctr"/>
-          </a:p>
-        </p:txBody>
-      </p:sp>
-      <p:sp>
-        <p:nvSpPr>
-          <p:cNvPr id="35" name="TextBox 34"/>
-          <p:cNvSpPr txBox="1"/>
-          <p:nvPr/>
-        </p:nvSpPr>
-        <p:spPr>
-          <a:xfrm>
-            <a:off x="6510528" y="4608576"/>
-            <a:ext cx="1188720" cy="438912"/>
-          </a:xfrm>
-          <a:prstGeom prst="rect">
-            <a:avLst/>
-          </a:prstGeom>
-          <a:noFill/>
-        </p:spPr>
-        <p:txBody>
-          <a:bodyPr wrap="square">
-            <a:spAutoFit/>
-          </a:bodyPr>
-          <a:lstStyle/>
-          <a:p>
-            <a:pPr algn="l"/>
-            <a:r>
-              <a:rPr sz="1200" b="0">
-                <a:solidFill>
-                  <a:srgbClr val="212121"/>
-                </a:solidFill>
-              </a:rPr>
-              <a:t>규칙</a:t>
-            </a:r>
-          </a:p>
-        </p:txBody>
-      </p:sp>
-      <p:sp>
-        <p:nvSpPr>
-          <p:cNvPr id="36" name="Rectangle 35"/>
-          <p:cNvSpPr/>
-          <p:nvPr/>
-        </p:nvSpPr>
-        <p:spPr>
-          <a:xfrm>
-            <a:off x="7818120" y="4407408"/>
-            <a:ext cx="2560320" cy="822960"/>
-          </a:xfrm>
-          <a:prstGeom prst="rect">
-            <a:avLst/>
-          </a:prstGeom>
-          <a:solidFill>
-            <a:srgbClr val="FFFFFF"/>
-          </a:solidFill>
-          <a:ln w="10160">
-            <a:solidFill>
-              <a:srgbClr val="E0E0E0"/>
-            </a:solidFill>
-          </a:ln>
-        </p:spPr>
-        <p:style>
-          <a:lnRef idx="1">
-            <a:schemeClr val="accent1"/>
-          </a:lnRef>
-          <a:fillRef idx="3">
-            <a:schemeClr val="accent1"/>
-          </a:fillRef>
-          <a:effectRef idx="2">
-            <a:schemeClr val="accent1"/>
-          </a:effectRef>
-          <a:fontRef idx="minor">
-            <a:schemeClr val="lt1"/>
-          </a:fontRef>
-        </p:style>
-        <p:txBody>
-          <a:bodyPr rtlCol="0" anchor="ctr"/>
-          <a:lstStyle/>
-          <a:p>
-            <a:pPr algn="ctr"/>
-          </a:p>
-        </p:txBody>
-      </p:sp>
-      <p:sp>
-        <p:nvSpPr>
-          <p:cNvPr id="37" name="TextBox 36"/>
-          <p:cNvSpPr txBox="1"/>
-          <p:nvPr/>
-        </p:nvSpPr>
-        <p:spPr>
-          <a:xfrm>
-            <a:off x="7927848" y="4608576"/>
-            <a:ext cx="2377439" cy="438912"/>
-          </a:xfrm>
-          <a:prstGeom prst="rect">
-            <a:avLst/>
-          </a:prstGeom>
-          <a:noFill/>
-        </p:spPr>
-        <p:txBody>
-          <a:bodyPr wrap="square">
-            <a:spAutoFit/>
-          </a:bodyPr>
-          <a:lstStyle/>
-          <a:p>
-            <a:pPr algn="l"/>
-            <a:r>
-              <a:rPr sz="1200" b="0">
-                <a:solidFill>
-                  <a:srgbClr val="212121"/>
-                </a:solidFill>
-              </a:rPr>
-              <a:t>잔액·수익률 계산</a:t>
-            </a:r>
-          </a:p>
-        </p:txBody>
-      </p:sp>
-      <p:sp>
-        <p:nvSpPr>
-          <p:cNvPr id="38" name="Rectangle 37"/>
-          <p:cNvSpPr/>
-          <p:nvPr/>
-        </p:nvSpPr>
-        <p:spPr>
-          <a:xfrm>
-            <a:off x="10424160" y="4407408"/>
-            <a:ext cx="1737360" cy="822960"/>
-          </a:xfrm>
-          <a:prstGeom prst="rect">
-            <a:avLst/>
-          </a:prstGeom>
-          <a:solidFill>
-            <a:srgbClr val="FFFFFF"/>
-          </a:solidFill>
-          <a:ln w="10160">
-            <a:solidFill>
-              <a:srgbClr val="E0E0E0"/>
-            </a:solidFill>
-          </a:ln>
-        </p:spPr>
-        <p:style>
-          <a:lnRef idx="1">
-            <a:schemeClr val="accent1"/>
-          </a:lnRef>
-          <a:fillRef idx="3">
-            <a:schemeClr val="accent1"/>
-          </a:fillRef>
-          <a:effectRef idx="2">
-            <a:schemeClr val="accent1"/>
-          </a:effectRef>
-          <a:fontRef idx="minor">
-            <a:schemeClr val="lt1"/>
-          </a:fontRef>
-        </p:style>
-        <p:txBody>
-          <a:bodyPr rtlCol="0" anchor="ctr"/>
-          <a:lstStyle/>
-          <a:p>
-            <a:pPr algn="ctr"/>
-          </a:p>
-        </p:txBody>
-      </p:sp>
-      <p:sp>
-        <p:nvSpPr>
-          <p:cNvPr id="39" name="TextBox 38"/>
-          <p:cNvSpPr txBox="1"/>
-          <p:nvPr/>
-        </p:nvSpPr>
-        <p:spPr>
-          <a:xfrm>
-            <a:off x="10533888" y="4608576"/>
-            <a:ext cx="1554480" cy="438912"/>
-          </a:xfrm>
-          <a:prstGeom prst="rect">
-            <a:avLst/>
-          </a:prstGeom>
-          <a:noFill/>
-        </p:spPr>
-        <p:txBody>
-          <a:bodyPr wrap="square">
-            <a:spAutoFit/>
-          </a:bodyPr>
-          <a:lstStyle/>
-          <a:p>
-            <a:pPr algn="l"/>
-            <a:r>
-              <a:rPr sz="1200" b="0">
-                <a:solidFill>
-                  <a:srgbClr val="212121"/>
-                </a:solidFill>
-              </a:rPr>
-              <a:t>models/</a:t>
-            </a:r>
-          </a:p>
-        </p:txBody>
-      </p:sp>
-      <p:sp>
-        <p:nvSpPr>
-          <p:cNvPr id="40" name="Rectangle 39"/>
-          <p:cNvSpPr/>
-          <p:nvPr/>
-        </p:nvSpPr>
-        <p:spPr>
-          <a:xfrm>
-            <a:off x="6400800" y="5413248"/>
-            <a:ext cx="1371600" cy="822960"/>
-          </a:xfrm>
-          <a:prstGeom prst="rect">
-            <a:avLst/>
-          </a:prstGeom>
-          <a:solidFill>
-            <a:srgbClr val="FFFFFF"/>
-          </a:solidFill>
-          <a:ln w="10160">
-            <a:solidFill>
-              <a:srgbClr val="E0E0E0"/>
-            </a:solidFill>
-          </a:ln>
-        </p:spPr>
-        <p:style>
-          <a:lnRef idx="1">
-            <a:schemeClr val="accent1"/>
-          </a:lnRef>
-          <a:fillRef idx="3">
-            <a:schemeClr val="accent1"/>
-          </a:fillRef>
-          <a:effectRef idx="2">
-            <a:schemeClr val="accent1"/>
-          </a:effectRef>
-          <a:fontRef idx="minor">
-            <a:schemeClr val="lt1"/>
-          </a:fontRef>
-        </p:style>
-        <p:txBody>
-          <a:bodyPr rtlCol="0" anchor="ctr"/>
-          <a:lstStyle/>
-          <a:p>
-            <a:pPr algn="ctr"/>
-          </a:p>
-        </p:txBody>
-      </p:sp>
-      <p:sp>
-        <p:nvSpPr>
-          <p:cNvPr id="41" name="TextBox 40"/>
-          <p:cNvSpPr txBox="1"/>
-          <p:nvPr/>
-        </p:nvSpPr>
-        <p:spPr>
-          <a:xfrm>
-            <a:off x="6510528" y="5614416"/>
-            <a:ext cx="1188720" cy="438912"/>
-          </a:xfrm>
-          <a:prstGeom prst="rect">
-            <a:avLst/>
-          </a:prstGeom>
-          <a:noFill/>
-        </p:spPr>
-        <p:txBody>
-          <a:bodyPr wrap="square">
-            <a:spAutoFit/>
-          </a:bodyPr>
-          <a:lstStyle/>
-          <a:p>
-            <a:pPr algn="l"/>
-            <a:r>
-              <a:rPr sz="1200" b="0">
-                <a:solidFill>
-                  <a:srgbClr val="212121"/>
-                </a:solidFill>
-              </a:rPr>
-              <a:t>저장</a:t>
-            </a:r>
-          </a:p>
-        </p:txBody>
-      </p:sp>
-      <p:sp>
-        <p:nvSpPr>
-          <p:cNvPr id="42" name="Rectangle 41"/>
-          <p:cNvSpPr/>
-          <p:nvPr/>
-        </p:nvSpPr>
-        <p:spPr>
-          <a:xfrm>
-            <a:off x="7818120" y="5413248"/>
-            <a:ext cx="2560320" cy="822960"/>
-          </a:xfrm>
-          <a:prstGeom prst="rect">
-            <a:avLst/>
-          </a:prstGeom>
-          <a:solidFill>
-            <a:srgbClr val="FFFFFF"/>
-          </a:solidFill>
-          <a:ln w="10160">
-            <a:solidFill>
-              <a:srgbClr val="E0E0E0"/>
-            </a:solidFill>
-          </a:ln>
-        </p:spPr>
-        <p:style>
-          <a:lnRef idx="1">
-            <a:schemeClr val="accent1"/>
-          </a:lnRef>
-          <a:fillRef idx="3">
-            <a:schemeClr val="accent1"/>
-          </a:fillRef>
-          <a:effectRef idx="2">
-            <a:schemeClr val="accent1"/>
-          </a:effectRef>
-          <a:fontRef idx="minor">
-            <a:schemeClr val="lt1"/>
-          </a:fontRef>
-        </p:style>
-        <p:txBody>
-          <a:bodyPr rtlCol="0" anchor="ctr"/>
-          <a:lstStyle/>
-          <a:p>
-            <a:pPr algn="ctr"/>
-          </a:p>
-        </p:txBody>
-      </p:sp>
-      <p:sp>
-        <p:nvSpPr>
-          <p:cNvPr id="43" name="TextBox 42"/>
-          <p:cNvSpPr txBox="1"/>
-          <p:nvPr/>
-        </p:nvSpPr>
-        <p:spPr>
-          <a:xfrm>
-            <a:off x="7927848" y="5614416"/>
-            <a:ext cx="2377439" cy="438912"/>
-          </a:xfrm>
-          <a:prstGeom prst="rect">
-            <a:avLst/>
-          </a:prstGeom>
-          <a:noFill/>
-        </p:spPr>
-        <p:txBody>
-          <a:bodyPr wrap="square">
-            <a:spAutoFit/>
-          </a:bodyPr>
-          <a:lstStyle/>
-          <a:p>
-            <a:pPr algn="l"/>
-            <a:r>
-              <a:rPr sz="1200" b="0">
-                <a:solidFill>
-                  <a:srgbClr val="212121"/>
-                </a:solidFill>
-              </a:rPr>
-              <a:t>Firestore 입출력</a:t>
-            </a:r>
-          </a:p>
-        </p:txBody>
-      </p:sp>
-      <p:sp>
-        <p:nvSpPr>
-          <p:cNvPr id="44" name="Rectangle 43"/>
-          <p:cNvSpPr/>
-          <p:nvPr/>
-        </p:nvSpPr>
-        <p:spPr>
-          <a:xfrm>
-            <a:off x="10424160" y="5413248"/>
-            <a:ext cx="1737360" cy="822960"/>
-          </a:xfrm>
-          <a:prstGeom prst="rect">
-            <a:avLst/>
-          </a:prstGeom>
-          <a:solidFill>
-            <a:srgbClr val="FFFFFF"/>
-          </a:solidFill>
-          <a:ln w="10160">
-            <a:solidFill>
-              <a:srgbClr val="E0E0E0"/>
-            </a:solidFill>
-          </a:ln>
-        </p:spPr>
-        <p:style>
-          <a:lnRef idx="1">
-            <a:schemeClr val="accent1"/>
-          </a:lnRef>
-          <a:fillRef idx="3">
-            <a:schemeClr val="accent1"/>
-          </a:fillRef>
-          <a:effectRef idx="2">
-            <a:schemeClr val="accent1"/>
-          </a:effectRef>
-          <a:fontRef idx="minor">
-            <a:schemeClr val="lt1"/>
-          </a:fontRef>
-        </p:style>
-        <p:txBody>
-          <a:bodyPr rtlCol="0" anchor="ctr"/>
-          <a:lstStyle/>
-          <a:p>
-            <a:pPr algn="ctr"/>
-          </a:p>
-        </p:txBody>
-      </p:sp>
-      <p:sp>
-        <p:nvSpPr>
-          <p:cNvPr id="45" name="TextBox 44"/>
-          <p:cNvSpPr txBox="1"/>
-          <p:nvPr/>
-        </p:nvSpPr>
-        <p:spPr>
-          <a:xfrm>
-            <a:off x="10533888" y="5614416"/>
-            <a:ext cx="1554480" cy="438912"/>
-          </a:xfrm>
-          <a:prstGeom prst="rect">
-            <a:avLst/>
-          </a:prstGeom>
-          <a:noFill/>
-        </p:spPr>
-        <p:txBody>
-          <a:bodyPr wrap="square">
-            <a:spAutoFit/>
-          </a:bodyPr>
-          <a:lstStyle/>
-          <a:p>
-            <a:pPr algn="l"/>
-            <a:r>
-              <a:rPr sz="1200" b="0">
-                <a:solidFill>
-                  <a:srgbClr val="212121"/>
-                </a:solidFill>
-              </a:rPr>
-              <a:t>services/</a:t>
+              <a:t>✓  Firebase (Auth + Firestore)</a:t>
             </a:r>
           </a:p>
         </p:txBody>
@@ -7069,12 +7211,14 @@
         <p:spPr>
           <a:xfrm>
             <a:off x="0" y="0"/>
-            <a:ext cx="12188952" cy="914400"/>
-          </a:xfrm>
-          <a:prstGeom prst="rect">
-            <a:avLst/>
-          </a:prstGeom>
-          <a:noFill/>
+            <a:ext cx="12188952" cy="6858000"/>
+          </a:xfrm>
+          <a:prstGeom prst="rect">
+            <a:avLst/>
+          </a:prstGeom>
+          <a:solidFill>
+            <a:srgbClr val="FFFFFF"/>
+          </a:solidFill>
           <a:ln>
             <a:noFill/>
           </a:ln>
@@ -7103,47 +7247,13 @@
       </p:sp>
       <p:sp>
         <p:nvSpPr>
-          <p:cNvPr id="3" name="TextBox 2"/>
-          <p:cNvSpPr txBox="1"/>
-          <p:nvPr/>
-        </p:nvSpPr>
-        <p:spPr>
-          <a:xfrm>
-            <a:off x="457200" y="73152"/>
-            <a:ext cx="10972800" cy="566928"/>
-          </a:xfrm>
-          <a:prstGeom prst="rect">
-            <a:avLst/>
-          </a:prstGeom>
-          <a:noFill/>
-        </p:spPr>
-        <p:txBody>
-          <a:bodyPr wrap="square">
-            <a:spAutoFit/>
-          </a:bodyPr>
-          <a:lstStyle/>
-          <a:p>
-            <a:pPr algn="l"/>
-            <a:r>
-              <a:rPr sz="2400" b="1">
-                <a:solidFill>
-                  <a:srgbClr val="3F51B5"/>
-                </a:solidFill>
-              </a:rPr>
-              <a:t>ADR-0003  —  백엔드 서비스 선택</a:t>
-            </a:r>
-          </a:p>
-        </p:txBody>
-      </p:sp>
-      <p:sp>
-        <p:nvSpPr>
-          <p:cNvPr id="4" name="Rectangle 3"/>
+          <p:cNvPr id="3" name="Rectangle 2"/>
           <p:cNvSpPr/>
           <p:nvPr/>
         </p:nvSpPr>
         <p:spPr>
           <a:xfrm>
-            <a:off x="0" y="868680"/>
+            <a:off x="0" y="4663440"/>
             <a:ext cx="12188952" cy="45720"/>
           </a:xfrm>
           <a:prstGeom prst="rect">
@@ -7180,486 +7290,6 @@
       </p:sp>
       <p:sp>
         <p:nvSpPr>
-          <p:cNvPr id="5" name="TextBox 4"/>
-          <p:cNvSpPr txBox="1"/>
-          <p:nvPr/>
-        </p:nvSpPr>
-        <p:spPr>
-          <a:xfrm>
-            <a:off x="11247120" y="6492240"/>
-            <a:ext cx="822960" cy="274320"/>
-          </a:xfrm>
-          <a:prstGeom prst="rect">
-            <a:avLst/>
-          </a:prstGeom>
-          <a:noFill/>
-        </p:spPr>
-        <p:txBody>
-          <a:bodyPr wrap="square">
-            <a:spAutoFit/>
-          </a:bodyPr>
-          <a:lstStyle/>
-          <a:p>
-            <a:pPr algn="ctr"/>
-            <a:r>
-              <a:rPr sz="1000" b="0">
-                <a:solidFill>
-                  <a:srgbClr val="9E9E9E"/>
-                </a:solidFill>
-              </a:rPr>
-              <a:t>14 / 15</a:t>
-            </a:r>
-          </a:p>
-        </p:txBody>
-      </p:sp>
-      <p:sp>
-        <p:nvSpPr>
-          <p:cNvPr id="6" name="TextBox 5"/>
-          <p:cNvSpPr txBox="1"/>
-          <p:nvPr/>
-        </p:nvSpPr>
-        <p:spPr>
-          <a:xfrm>
-            <a:off x="457200" y="987552"/>
-            <a:ext cx="10972800" cy="347472"/>
-          </a:xfrm>
-          <a:prstGeom prst="rect">
-            <a:avLst/>
-          </a:prstGeom>
-          <a:noFill/>
-        </p:spPr>
-        <p:txBody>
-          <a:bodyPr wrap="square">
-            <a:spAutoFit/>
-          </a:bodyPr>
-          <a:lstStyle/>
-          <a:p>
-            <a:pPr algn="l"/>
-            <a:r>
-              <a:rPr sz="1200" b="0">
-                <a:solidFill>
-                  <a:srgbClr val="9E9E9E"/>
-                </a:solidFill>
-              </a:rPr>
-              <a:t>선택지 비교</a:t>
-            </a:r>
-          </a:p>
-        </p:txBody>
-      </p:sp>
-      <p:sp>
-        <p:nvSpPr>
-          <p:cNvPr id="7" name="Rectangle 6"/>
-          <p:cNvSpPr/>
-          <p:nvPr/>
-        </p:nvSpPr>
-        <p:spPr>
-          <a:xfrm>
-            <a:off x="457200" y="1389888"/>
-            <a:ext cx="11247120" cy="1024128"/>
-          </a:xfrm>
-          <a:prstGeom prst="rect">
-            <a:avLst/>
-          </a:prstGeom>
-          <a:noFill/>
-          <a:ln w="10160">
-            <a:solidFill>
-              <a:srgbClr val="E0E0E0"/>
-            </a:solidFill>
-          </a:ln>
-        </p:spPr>
-        <p:style>
-          <a:lnRef idx="1">
-            <a:schemeClr val="accent1"/>
-          </a:lnRef>
-          <a:fillRef idx="3">
-            <a:schemeClr val="accent1"/>
-          </a:fillRef>
-          <a:effectRef idx="2">
-            <a:schemeClr val="accent1"/>
-          </a:effectRef>
-          <a:fontRef idx="minor">
-            <a:schemeClr val="lt1"/>
-          </a:fontRef>
-        </p:style>
-        <p:txBody>
-          <a:bodyPr rtlCol="0" anchor="ctr"/>
-          <a:lstStyle/>
-          <a:p>
-            <a:pPr algn="ctr"/>
-          </a:p>
-        </p:txBody>
-      </p:sp>
-      <p:sp>
-        <p:nvSpPr>
-          <p:cNvPr id="8" name="TextBox 7"/>
-          <p:cNvSpPr txBox="1"/>
-          <p:nvPr/>
-        </p:nvSpPr>
-        <p:spPr>
-          <a:xfrm>
-            <a:off x="594360" y="1499616"/>
-            <a:ext cx="11064240" cy="886968"/>
-          </a:xfrm>
-          <a:prstGeom prst="rect">
-            <a:avLst/>
-          </a:prstGeom>
-          <a:noFill/>
-        </p:spPr>
-        <p:txBody>
-          <a:bodyPr wrap="square">
-            <a:spAutoFit/>
-          </a:bodyPr>
-          <a:lstStyle/>
-          <a:p>
-            <a:pPr algn="l"/>
-            <a:r>
-              <a:rPr sz="1600" b="0">
-                <a:solidFill>
-                  <a:srgbClr val="9E9E9E"/>
-                </a:solidFill>
-              </a:rPr>
-              <a:t>Supabase</a:t>
-            </a:r>
-          </a:p>
-        </p:txBody>
-      </p:sp>
-      <p:sp>
-        <p:nvSpPr>
-          <p:cNvPr id="9" name="Rectangle 8"/>
-          <p:cNvSpPr/>
-          <p:nvPr/>
-        </p:nvSpPr>
-        <p:spPr>
-          <a:xfrm>
-            <a:off x="457200" y="2651760"/>
-            <a:ext cx="11247120" cy="1024128"/>
-          </a:xfrm>
-          <a:prstGeom prst="rect">
-            <a:avLst/>
-          </a:prstGeom>
-          <a:noFill/>
-          <a:ln w="10160">
-            <a:solidFill>
-              <a:srgbClr val="E0E0E0"/>
-            </a:solidFill>
-          </a:ln>
-        </p:spPr>
-        <p:style>
-          <a:lnRef idx="1">
-            <a:schemeClr val="accent1"/>
-          </a:lnRef>
-          <a:fillRef idx="3">
-            <a:schemeClr val="accent1"/>
-          </a:fillRef>
-          <a:effectRef idx="2">
-            <a:schemeClr val="accent1"/>
-          </a:effectRef>
-          <a:fontRef idx="minor">
-            <a:schemeClr val="lt1"/>
-          </a:fontRef>
-        </p:style>
-        <p:txBody>
-          <a:bodyPr rtlCol="0" anchor="ctr"/>
-          <a:lstStyle/>
-          <a:p>
-            <a:pPr algn="ctr"/>
-          </a:p>
-        </p:txBody>
-      </p:sp>
-      <p:sp>
-        <p:nvSpPr>
-          <p:cNvPr id="10" name="TextBox 9"/>
-          <p:cNvSpPr txBox="1"/>
-          <p:nvPr/>
-        </p:nvSpPr>
-        <p:spPr>
-          <a:xfrm>
-            <a:off x="594360" y="2761488"/>
-            <a:ext cx="11064240" cy="886968"/>
-          </a:xfrm>
-          <a:prstGeom prst="rect">
-            <a:avLst/>
-          </a:prstGeom>
-          <a:noFill/>
-        </p:spPr>
-        <p:txBody>
-          <a:bodyPr wrap="square">
-            <a:spAutoFit/>
-          </a:bodyPr>
-          <a:lstStyle/>
-          <a:p>
-            <a:pPr algn="l"/>
-            <a:r>
-              <a:rPr sz="1600" b="0">
-                <a:solidFill>
-                  <a:srgbClr val="9E9E9E"/>
-                </a:solidFill>
-              </a:rPr>
-              <a:t>폰 내부 저장 (SQLite 등)</a:t>
-            </a:r>
-          </a:p>
-        </p:txBody>
-      </p:sp>
-      <p:sp>
-        <p:nvSpPr>
-          <p:cNvPr id="11" name="Rectangle 10"/>
-          <p:cNvSpPr/>
-          <p:nvPr/>
-        </p:nvSpPr>
-        <p:spPr>
-          <a:xfrm>
-            <a:off x="457200" y="3913631"/>
-            <a:ext cx="11247120" cy="1024128"/>
-          </a:xfrm>
-          <a:prstGeom prst="rect">
-            <a:avLst/>
-          </a:prstGeom>
-          <a:noFill/>
-          <a:ln w="10160">
-            <a:solidFill>
-              <a:srgbClr val="E0E0E0"/>
-            </a:solidFill>
-          </a:ln>
-        </p:spPr>
-        <p:style>
-          <a:lnRef idx="1">
-            <a:schemeClr val="accent1"/>
-          </a:lnRef>
-          <a:fillRef idx="3">
-            <a:schemeClr val="accent1"/>
-          </a:fillRef>
-          <a:effectRef idx="2">
-            <a:schemeClr val="accent1"/>
-          </a:effectRef>
-          <a:fontRef idx="minor">
-            <a:schemeClr val="lt1"/>
-          </a:fontRef>
-        </p:style>
-        <p:txBody>
-          <a:bodyPr rtlCol="0" anchor="ctr"/>
-          <a:lstStyle/>
-          <a:p>
-            <a:pPr algn="ctr"/>
-          </a:p>
-        </p:txBody>
-      </p:sp>
-      <p:sp>
-        <p:nvSpPr>
-          <p:cNvPr id="12" name="TextBox 11"/>
-          <p:cNvSpPr txBox="1"/>
-          <p:nvPr/>
-        </p:nvSpPr>
-        <p:spPr>
-          <a:xfrm>
-            <a:off x="594360" y="4023359"/>
-            <a:ext cx="11064240" cy="886968"/>
-          </a:xfrm>
-          <a:prstGeom prst="rect">
-            <a:avLst/>
-          </a:prstGeom>
-          <a:noFill/>
-        </p:spPr>
-        <p:txBody>
-          <a:bodyPr wrap="square">
-            <a:spAutoFit/>
-          </a:bodyPr>
-          <a:lstStyle/>
-          <a:p>
-            <a:pPr algn="l"/>
-            <a:r>
-              <a:rPr sz="1600" b="0">
-                <a:solidFill>
-                  <a:srgbClr val="9E9E9E"/>
-                </a:solidFill>
-              </a:rPr>
-              <a:t>직접 서버 구축</a:t>
-            </a:r>
-          </a:p>
-        </p:txBody>
-      </p:sp>
-      <p:sp>
-        <p:nvSpPr>
-          <p:cNvPr id="13" name="Rectangle 12"/>
-          <p:cNvSpPr/>
-          <p:nvPr/>
-        </p:nvSpPr>
-        <p:spPr>
-          <a:xfrm>
-            <a:off x="457200" y="5175504"/>
-            <a:ext cx="11247120" cy="1024128"/>
-          </a:xfrm>
-          <a:prstGeom prst="rect">
-            <a:avLst/>
-          </a:prstGeom>
-          <a:solidFill>
-            <a:srgbClr val="3F51B5"/>
-          </a:solidFill>
-          <a:ln>
-            <a:noFill/>
-          </a:ln>
-        </p:spPr>
-        <p:style>
-          <a:lnRef idx="1">
-            <a:schemeClr val="accent1"/>
-          </a:lnRef>
-          <a:fillRef idx="3">
-            <a:schemeClr val="accent1"/>
-          </a:fillRef>
-          <a:effectRef idx="2">
-            <a:schemeClr val="accent1"/>
-          </a:effectRef>
-          <a:fontRef idx="minor">
-            <a:schemeClr val="lt1"/>
-          </a:fontRef>
-        </p:style>
-        <p:txBody>
-          <a:bodyPr rtlCol="0" anchor="ctr"/>
-          <a:lstStyle/>
-          <a:p>
-            <a:pPr algn="ctr"/>
-          </a:p>
-        </p:txBody>
-      </p:sp>
-      <p:sp>
-        <p:nvSpPr>
-          <p:cNvPr id="14" name="TextBox 13"/>
-          <p:cNvSpPr txBox="1"/>
-          <p:nvPr/>
-        </p:nvSpPr>
-        <p:spPr>
-          <a:xfrm>
-            <a:off x="594360" y="5285232"/>
-            <a:ext cx="11064240" cy="886968"/>
-          </a:xfrm>
-          <a:prstGeom prst="rect">
-            <a:avLst/>
-          </a:prstGeom>
-          <a:noFill/>
-        </p:spPr>
-        <p:txBody>
-          <a:bodyPr wrap="square">
-            <a:spAutoFit/>
-          </a:bodyPr>
-          <a:lstStyle/>
-          <a:p>
-            <a:pPr algn="l"/>
-            <a:r>
-              <a:rPr sz="1600" b="1">
-                <a:solidFill>
-                  <a:srgbClr val="FFFFFF"/>
-                </a:solidFill>
-              </a:rPr>
-              <a:t>✓  Firebase (Auth + Firestore)</a:t>
-            </a:r>
-          </a:p>
-        </p:txBody>
-      </p:sp>
-    </p:spTree>
-  </p:cSld>
-  <p:clrMapOvr>
-    <a:masterClrMapping/>
-  </p:clrMapOvr>
-</p:sld>
-</file>
-
-<file path=ppt/slides/slide15.xml><?xml version="1.0" encoding="utf-8"?>
-<p:sld xmlns:a="http://schemas.openxmlformats.org/drawingml/2006/main" xmlns:p="http://schemas.openxmlformats.org/presentationml/2006/main" xmlns:r="http://schemas.openxmlformats.org/officeDocument/2006/relationships">
-  <p:cSld>
-    <p:spTree>
-      <p:nvGrpSpPr>
-        <p:cNvPr id="1" name=""/>
-        <p:cNvGrpSpPr/>
-        <p:nvPr/>
-      </p:nvGrpSpPr>
-      <p:grpSpPr/>
-      <p:sp>
-        <p:nvSpPr>
-          <p:cNvPr id="2" name="Rectangle 1"/>
-          <p:cNvSpPr/>
-          <p:nvPr/>
-        </p:nvSpPr>
-        <p:spPr>
-          <a:xfrm>
-            <a:off x="0" y="0"/>
-            <a:ext cx="12188952" cy="6858000"/>
-          </a:xfrm>
-          <a:prstGeom prst="rect">
-            <a:avLst/>
-          </a:prstGeom>
-          <a:solidFill>
-            <a:srgbClr val="FFFFFF"/>
-          </a:solidFill>
-          <a:ln>
-            <a:noFill/>
-          </a:ln>
-        </p:spPr>
-        <p:style>
-          <a:lnRef idx="1">
-            <a:schemeClr val="accent1"/>
-          </a:lnRef>
-          <a:fillRef idx="3">
-            <a:schemeClr val="accent1"/>
-          </a:fillRef>
-          <a:effectRef idx="2">
-            <a:schemeClr val="accent1"/>
-          </a:effectRef>
-          <a:fontRef idx="minor">
-            <a:schemeClr val="lt1"/>
-          </a:fontRef>
-        </p:style>
-        <p:txBody>
-          <a:bodyPr rtlCol="0" anchor="ctr"/>
-          <a:lstStyle/>
-          <a:p>
-            <a:pPr algn="ctr"/>
-          </a:p>
-        </p:txBody>
-      </p:sp>
-      <p:sp>
-        <p:nvSpPr>
-          <p:cNvPr id="3" name="Rectangle 2"/>
-          <p:cNvSpPr/>
-          <p:nvPr/>
-        </p:nvSpPr>
-        <p:spPr>
-          <a:xfrm>
-            <a:off x="0" y="4663440"/>
-            <a:ext cx="12188952" cy="45720"/>
-          </a:xfrm>
-          <a:prstGeom prst="rect">
-            <a:avLst/>
-          </a:prstGeom>
-          <a:solidFill>
-            <a:srgbClr val="3F51B5"/>
-          </a:solidFill>
-          <a:ln>
-            <a:noFill/>
-          </a:ln>
-        </p:spPr>
-        <p:style>
-          <a:lnRef idx="1">
-            <a:schemeClr val="accent1"/>
-          </a:lnRef>
-          <a:fillRef idx="3">
-            <a:schemeClr val="accent1"/>
-          </a:fillRef>
-          <a:effectRef idx="2">
-            <a:schemeClr val="accent1"/>
-          </a:effectRef>
-          <a:fontRef idx="minor">
-            <a:schemeClr val="lt1"/>
-          </a:fontRef>
-        </p:style>
-        <p:txBody>
-          <a:bodyPr rtlCol="0" anchor="ctr"/>
-          <a:lstStyle/>
-          <a:p>
-            <a:pPr algn="ctr"/>
-          </a:p>
-        </p:txBody>
-      </p:sp>
-      <p:sp>
-        <p:nvSpPr>
           <p:cNvPr id="4" name="Rectangle 3"/>
           <p:cNvSpPr/>
           <p:nvPr/>
@@ -7764,7 +7394,7 @@
                   <a:srgbClr val="9E9E9E"/>
                 </a:solidFill>
               </a:rPr>
-              <a:t>Portfolio Tracker  ·  Jooseonghyeon  ·  2026.06</a:t>
+              <a:t>Portfolio Tracker  ·  2026.06</a:t>
             </a:r>
           </a:p>
         </p:txBody>
@@ -7798,7 +7428,7 @@
                   <a:srgbClr val="9E9E9E"/>
                 </a:solidFill>
               </a:rPr>
-              <a:t>15 / 15</a:t>
+              <a:t>14 / 14</a:t>
             </a:r>
           </a:p>
         </p:txBody>
@@ -8002,7 +7632,7 @@
                   <a:srgbClr val="9E9E9E"/>
                 </a:solidFill>
               </a:rPr>
-              <a:t>2 / 15</a:t>
+              <a:t>2 / 14</a:t>
             </a:r>
           </a:p>
         </p:txBody>
@@ -8790,7 +8420,7 @@
                   <a:srgbClr val="9E9E9E"/>
                 </a:solidFill>
               </a:rPr>
-              <a:t>3 / 15</a:t>
+              <a:t>3 / 14</a:t>
             </a:r>
           </a:p>
         </p:txBody>
@@ -10248,7 +9878,7 @@
                   <a:srgbClr val="9E9E9E"/>
                 </a:solidFill>
               </a:rPr>
-              <a:t>4 / 15</a:t>
+              <a:t>4 / 14</a:t>
             </a:r>
           </a:p>
         </p:txBody>
@@ -11430,7 +11060,7 @@
                   <a:srgbClr val="9E9E9E"/>
                 </a:solidFill>
               </a:rPr>
-              <a:t>5 / 15</a:t>
+              <a:t>5 / 14</a:t>
             </a:r>
           </a:p>
         </p:txBody>
@@ -12940,7 +12570,7 @@
                   <a:srgbClr val="9E9E9E"/>
                 </a:solidFill>
               </a:rPr>
-              <a:t>6 / 15</a:t>
+              <a:t>6 / 14</a:t>
             </a:r>
           </a:p>
         </p:txBody>
@@ -14539,7 +14169,7 @@
                   <a:srgbClr val="9E9E9E"/>
                 </a:solidFill>
               </a:rPr>
-              <a:t>7 / 15</a:t>
+              <a:t>7 / 14</a:t>
             </a:r>
           </a:p>
         </p:txBody>
@@ -15173,48 +14803,14 @@
                   <a:srgbClr val="3F51B5"/>
                 </a:solidFill>
               </a:rPr>
-              <a:t>7.  남은 일정</a:t>
-            </a:r>
-          </a:p>
-        </p:txBody>
-      </p:sp>
-      <p:sp>
-        <p:nvSpPr>
-          <p:cNvPr id="4" name="TextBox 3"/>
-          <p:cNvSpPr txBox="1"/>
-          <p:nvPr/>
-        </p:nvSpPr>
-        <p:spPr>
-          <a:xfrm>
-            <a:off x="457200" y="621792"/>
-            <a:ext cx="10972800" cy="274320"/>
-          </a:xfrm>
-          <a:prstGeom prst="rect">
-            <a:avLst/>
-          </a:prstGeom>
-          <a:noFill/>
-        </p:spPr>
-        <p:txBody>
-          <a:bodyPr wrap="square">
-            <a:spAutoFit/>
-          </a:bodyPr>
-          <a:lstStyle/>
-          <a:p>
-            <a:pPr algn="l"/>
-            <a:r>
-              <a:rPr sz="1100" b="0">
-                <a:solidFill>
-                  <a:srgbClr val="9E9E9E"/>
-                </a:solidFill>
-              </a:rPr>
-              <a:t>13 ~ 15주차 우선순위</a:t>
-            </a:r>
-          </a:p>
-        </p:txBody>
-      </p:sp>
-      <p:sp>
-        <p:nvSpPr>
-          <p:cNvPr id="5" name="Rectangle 4"/>
+              <a:t>7.  어려운 점 / 도움 요청</a:t>
+            </a:r>
+          </a:p>
+        </p:txBody>
+      </p:sp>
+      <p:sp>
+        <p:nvSpPr>
+          <p:cNvPr id="4" name="Rectangle 3"/>
           <p:cNvSpPr/>
           <p:nvPr/>
         </p:nvSpPr>
@@ -15257,7 +14853,7 @@
       </p:sp>
       <p:sp>
         <p:nvSpPr>
-          <p:cNvPr id="6" name="TextBox 5"/>
+          <p:cNvPr id="5" name="TextBox 4"/>
           <p:cNvSpPr txBox="1"/>
           <p:nvPr/>
         </p:nvSpPr>
@@ -15284,20 +14880,20 @@
                   <a:srgbClr val="9E9E9E"/>
                 </a:solidFill>
               </a:rPr>
-              <a:t>8 / 15</a:t>
-            </a:r>
-          </a:p>
-        </p:txBody>
-      </p:sp>
-      <p:sp>
-        <p:nvSpPr>
-          <p:cNvPr id="7" name="Rectangle 6"/>
+              <a:t>8 / 14</a:t>
+            </a:r>
+          </a:p>
+        </p:txBody>
+      </p:sp>
+      <p:sp>
+        <p:nvSpPr>
+          <p:cNvPr id="6" name="Rectangle 5"/>
           <p:cNvSpPr/>
           <p:nvPr/>
         </p:nvSpPr>
         <p:spPr>
           <a:xfrm>
-            <a:off x="457200" y="1097280"/>
+            <a:off x="457200" y="1051560"/>
             <a:ext cx="11247120" cy="1417320"/>
           </a:xfrm>
           <a:prstGeom prst="rect">
@@ -15334,20 +14930,20 @@
       </p:sp>
       <p:sp>
         <p:nvSpPr>
-          <p:cNvPr id="8" name="Rectangle 7"/>
+          <p:cNvPr id="7" name="Rectangle 6"/>
           <p:cNvSpPr/>
           <p:nvPr/>
         </p:nvSpPr>
         <p:spPr>
           <a:xfrm>
-            <a:off x="457200" y="1097280"/>
-            <a:ext cx="2560320" cy="1417320"/>
+            <a:off x="457200" y="1051560"/>
+            <a:ext cx="54864" cy="1417320"/>
           </a:xfrm>
           <a:prstGeom prst="rect">
             <a:avLst/>
           </a:prstGeom>
           <a:solidFill>
-            <a:srgbClr val="3F51B5"/>
+            <a:srgbClr val="E65C00"/>
           </a:solidFill>
           <a:ln>
             <a:noFill/>
@@ -15377,82 +14973,48 @@
       </p:sp>
       <p:sp>
         <p:nvSpPr>
+          <p:cNvPr id="8" name="TextBox 7"/>
+          <p:cNvSpPr txBox="1"/>
+          <p:nvPr/>
+        </p:nvSpPr>
+        <p:spPr>
+          <a:xfrm>
+            <a:off x="658368" y="1188719"/>
+            <a:ext cx="10972800" cy="411480"/>
+          </a:xfrm>
+          <a:prstGeom prst="rect">
+            <a:avLst/>
+          </a:prstGeom>
+          <a:noFill/>
+        </p:spPr>
+        <p:txBody>
+          <a:bodyPr wrap="square">
+            <a:spAutoFit/>
+          </a:bodyPr>
+          <a:lstStyle/>
+          <a:p>
+            <a:pPr algn="l"/>
+            <a:r>
+              <a:rPr sz="1400" b="1">
+                <a:solidFill>
+                  <a:srgbClr val="212121"/>
+                </a:solidFill>
+              </a:rPr>
+              <a:t>iOS 빌드 불가</a:t>
+            </a:r>
+          </a:p>
+        </p:txBody>
+      </p:sp>
+      <p:sp>
+        <p:nvSpPr>
           <p:cNvPr id="9" name="TextBox 8"/>
           <p:cNvSpPr txBox="1"/>
           <p:nvPr/>
         </p:nvSpPr>
         <p:spPr>
           <a:xfrm>
-            <a:off x="621792" y="1298448"/>
-            <a:ext cx="2240280" cy="475488"/>
-          </a:xfrm>
-          <a:prstGeom prst="rect">
-            <a:avLst/>
-          </a:prstGeom>
-          <a:noFill/>
-        </p:spPr>
-        <p:txBody>
-          <a:bodyPr wrap="square">
-            <a:spAutoFit/>
-          </a:bodyPr>
-          <a:lstStyle/>
-          <a:p>
-            <a:pPr algn="ctr"/>
-            <a:r>
-              <a:rPr sz="1800" b="1">
-                <a:solidFill>
-                  <a:srgbClr val="FFFFFF"/>
-                </a:solidFill>
-              </a:rPr>
-              <a:t>13주차</a:t>
-            </a:r>
-          </a:p>
-        </p:txBody>
-      </p:sp>
-      <p:sp>
-        <p:nvSpPr>
-          <p:cNvPr id="10" name="TextBox 9"/>
-          <p:cNvSpPr txBox="1"/>
-          <p:nvPr/>
-        </p:nvSpPr>
-        <p:spPr>
-          <a:xfrm>
-            <a:off x="621792" y="1810512"/>
-            <a:ext cx="2240280" cy="347472"/>
-          </a:xfrm>
-          <a:prstGeom prst="rect">
-            <a:avLst/>
-          </a:prstGeom>
-          <a:noFill/>
-        </p:spPr>
-        <p:txBody>
-          <a:bodyPr wrap="square">
-            <a:spAutoFit/>
-          </a:bodyPr>
-          <a:lstStyle/>
-          <a:p>
-            <a:pPr algn="ctr"/>
-            <a:r>
-              <a:rPr sz="1000" b="0">
-                <a:solidFill>
-                  <a:srgbClr val="C5CAE9"/>
-                </a:solidFill>
-              </a:rPr>
-              <a:t>2026-05-26 ~ 05-30</a:t>
-            </a:r>
-          </a:p>
-        </p:txBody>
-      </p:sp>
-      <p:sp>
-        <p:nvSpPr>
-          <p:cNvPr id="11" name="TextBox 10"/>
-          <p:cNvSpPr txBox="1"/>
-          <p:nvPr/>
-        </p:nvSpPr>
-        <p:spPr>
-          <a:xfrm>
-            <a:off x="3200400" y="1353312"/>
-            <a:ext cx="8229600" cy="914400"/>
+            <a:off x="658368" y="1618488"/>
+            <a:ext cx="10789920" cy="749808"/>
           </a:xfrm>
           <a:prstGeom prst="rect">
             <a:avLst/>
@@ -15467,26 +15029,26 @@
           <a:p>
             <a:pPr algn="l"/>
             <a:r>
-              <a:rPr sz="1400" b="0">
+              <a:rPr sz="1300" b="0">
                 <a:solidFill>
                   <a:srgbClr val="212121"/>
                 </a:solidFill>
               </a:rPr>
-              <a:t>setup.md / deploy.md / testing.md 문서 완성
-README 최종 완비</a:t>
-            </a:r>
-          </a:p>
-        </p:txBody>
-      </p:sp>
-      <p:sp>
-        <p:nvSpPr>
-          <p:cNvPr id="12" name="Rectangle 11"/>
+              <a:t>Mac 환경 없음 → iOS 시뮬레이터·실기기 테스트 불가
+Android APK만 제출 예정</a:t>
+            </a:r>
+          </a:p>
+        </p:txBody>
+      </p:sp>
+      <p:sp>
+        <p:nvSpPr>
+          <p:cNvPr id="10" name="Rectangle 9"/>
           <p:cNvSpPr/>
           <p:nvPr/>
         </p:nvSpPr>
         <p:spPr>
           <a:xfrm>
-            <a:off x="457200" y="2743200"/>
+            <a:off x="457200" y="2715768"/>
             <a:ext cx="11247120" cy="1417320"/>
           </a:xfrm>
           <a:prstGeom prst="rect">
@@ -15523,20 +15085,20 @@
       </p:sp>
       <p:sp>
         <p:nvSpPr>
-          <p:cNvPr id="13" name="Rectangle 12"/>
+          <p:cNvPr id="11" name="Rectangle 10"/>
           <p:cNvSpPr/>
           <p:nvPr/>
         </p:nvSpPr>
         <p:spPr>
           <a:xfrm>
-            <a:off x="457200" y="2743200"/>
-            <a:ext cx="2560320" cy="1417320"/>
+            <a:off x="457200" y="2715768"/>
+            <a:ext cx="54864" cy="1417320"/>
           </a:xfrm>
           <a:prstGeom prst="rect">
             <a:avLst/>
           </a:prstGeom>
           <a:solidFill>
-            <a:srgbClr val="3F51B5"/>
+            <a:srgbClr val="E65C00"/>
           </a:solidFill>
           <a:ln>
             <a:noFill/>
@@ -15566,82 +15128,14 @@
       </p:sp>
       <p:sp>
         <p:nvSpPr>
-          <p:cNvPr id="14" name="TextBox 13"/>
-          <p:cNvSpPr txBox="1"/>
-          <p:nvPr/>
-        </p:nvSpPr>
-        <p:spPr>
-          <a:xfrm>
-            <a:off x="621792" y="2944368"/>
-            <a:ext cx="2240280" cy="475488"/>
-          </a:xfrm>
-          <a:prstGeom prst="rect">
-            <a:avLst/>
-          </a:prstGeom>
-          <a:noFill/>
-        </p:spPr>
-        <p:txBody>
-          <a:bodyPr wrap="square">
-            <a:spAutoFit/>
-          </a:bodyPr>
-          <a:lstStyle/>
-          <a:p>
-            <a:pPr algn="ctr"/>
-            <a:r>
-              <a:rPr sz="1800" b="1">
-                <a:solidFill>
-                  <a:srgbClr val="FFFFFF"/>
-                </a:solidFill>
-              </a:rPr>
-              <a:t>14주차</a:t>
-            </a:r>
-          </a:p>
-        </p:txBody>
-      </p:sp>
-      <p:sp>
-        <p:nvSpPr>
-          <p:cNvPr id="15" name="TextBox 14"/>
-          <p:cNvSpPr txBox="1"/>
-          <p:nvPr/>
-        </p:nvSpPr>
-        <p:spPr>
-          <a:xfrm>
-            <a:off x="621792" y="3456432"/>
-            <a:ext cx="2240280" cy="347472"/>
-          </a:xfrm>
-          <a:prstGeom prst="rect">
-            <a:avLst/>
-          </a:prstGeom>
-          <a:noFill/>
-        </p:spPr>
-        <p:txBody>
-          <a:bodyPr wrap="square">
-            <a:spAutoFit/>
-          </a:bodyPr>
-          <a:lstStyle/>
-          <a:p>
-            <a:pPr algn="ctr"/>
-            <a:r>
-              <a:rPr sz="1000" b="0">
-                <a:solidFill>
-                  <a:srgbClr val="C5CAE9"/>
-                </a:solidFill>
-              </a:rPr>
-              <a:t>2026-06-02 ~ 06-06</a:t>
-            </a:r>
-          </a:p>
-        </p:txBody>
-      </p:sp>
-      <p:sp>
-        <p:nvSpPr>
-          <p:cNvPr id="16" name="TextBox 15"/>
-          <p:cNvSpPr txBox="1"/>
-          <p:nvPr/>
-        </p:nvSpPr>
-        <p:spPr>
-          <a:xfrm>
-            <a:off x="3200400" y="2999232"/>
-            <a:ext cx="8229600" cy="914400"/>
+          <p:cNvPr id="12" name="TextBox 11"/>
+          <p:cNvSpPr txBox="1"/>
+          <p:nvPr/>
+        </p:nvSpPr>
+        <p:spPr>
+          <a:xfrm>
+            <a:off x="658368" y="2852927"/>
+            <a:ext cx="10972800" cy="411480"/>
           </a:xfrm>
           <a:prstGeom prst="rect">
             <a:avLst/>
@@ -15656,26 +15150,60 @@
           <a:p>
             <a:pPr algn="l"/>
             <a:r>
-              <a:rPr sz="1400" b="0">
+              <a:rPr sz="1400" b="1">
                 <a:solidFill>
                   <a:srgbClr val="212121"/>
                 </a:solidFill>
               </a:rPr>
-              <a:t>Android APK 빌드 및 설치 테스트
-최종 발표 슬라이드 완성</a:t>
-            </a:r>
-          </a:p>
-        </p:txBody>
-      </p:sp>
-      <p:sp>
-        <p:nvSpPr>
-          <p:cNvPr id="17" name="Rectangle 16"/>
+              <a:t>Firebase Security Rules</a:t>
+            </a:r>
+          </a:p>
+        </p:txBody>
+      </p:sp>
+      <p:sp>
+        <p:nvSpPr>
+          <p:cNvPr id="13" name="TextBox 12"/>
+          <p:cNvSpPr txBox="1"/>
+          <p:nvPr/>
+        </p:nvSpPr>
+        <p:spPr>
+          <a:xfrm>
+            <a:off x="658368" y="3282696"/>
+            <a:ext cx="10789920" cy="749808"/>
+          </a:xfrm>
+          <a:prstGeom prst="rect">
+            <a:avLst/>
+          </a:prstGeom>
+          <a:noFill/>
+        </p:spPr>
+        <p:txBody>
+          <a:bodyPr wrap="square">
+            <a:spAutoFit/>
+          </a:bodyPr>
+          <a:lstStyle/>
+          <a:p>
+            <a:pPr algn="l"/>
+            <a:r>
+              <a:rPr sz="1300" b="0">
+                <a:solidFill>
+                  <a:srgbClr val="212121"/>
+                </a:solidFill>
+              </a:rPr>
+              <a:t>Firestore 보안 규칙 검증 어려움 — 다른 사용자가 타 계정 데이터에
+접근하지 못하도록 규칙을 작성했으나 침투 테스트 환경 없음</a:t>
+            </a:r>
+          </a:p>
+        </p:txBody>
+      </p:sp>
+      <p:sp>
+        <p:nvSpPr>
+          <p:cNvPr id="14" name="Rectangle 13"/>
           <p:cNvSpPr/>
           <p:nvPr/>
         </p:nvSpPr>
         <p:spPr>
           <a:xfrm>
-            <a:off x="457200" y="4389120"/>
+            <a:off x="457200" y="4379976"/>
             <a:ext cx="11247120" cy="1417320"/>
           </a:xfrm>
           <a:prstGeom prst="rect">
@@ -15712,20 +15240,20 @@
       </p:sp>
       <p:sp>
         <p:nvSpPr>
-          <p:cNvPr id="18" name="Rectangle 17"/>
+          <p:cNvPr id="15" name="Rectangle 14"/>
           <p:cNvSpPr/>
           <p:nvPr/>
         </p:nvSpPr>
         <p:spPr>
           <a:xfrm>
-            <a:off x="457200" y="4389120"/>
-            <a:ext cx="2560320" cy="1417320"/>
+            <a:off x="457200" y="4379976"/>
+            <a:ext cx="54864" cy="1417320"/>
           </a:xfrm>
           <a:prstGeom prst="rect">
             <a:avLst/>
           </a:prstGeom>
           <a:solidFill>
-            <a:srgbClr val="3F51B5"/>
+            <a:srgbClr val="E65C00"/>
           </a:solidFill>
           <a:ln>
             <a:noFill/>
@@ -15755,82 +15283,14 @@
       </p:sp>
       <p:sp>
         <p:nvSpPr>
-          <p:cNvPr id="19" name="TextBox 18"/>
-          <p:cNvSpPr txBox="1"/>
-          <p:nvPr/>
-        </p:nvSpPr>
-        <p:spPr>
-          <a:xfrm>
-            <a:off x="621792" y="4590288"/>
-            <a:ext cx="2240280" cy="475488"/>
-          </a:xfrm>
-          <a:prstGeom prst="rect">
-            <a:avLst/>
-          </a:prstGeom>
-          <a:noFill/>
-        </p:spPr>
-        <p:txBody>
-          <a:bodyPr wrap="square">
-            <a:spAutoFit/>
-          </a:bodyPr>
-          <a:lstStyle/>
-          <a:p>
-            <a:pPr algn="ctr"/>
-            <a:r>
-              <a:rPr sz="1800" b="1">
-                <a:solidFill>
-                  <a:srgbClr val="FFFFFF"/>
-                </a:solidFill>
-              </a:rPr>
-              <a:t>15주차</a:t>
-            </a:r>
-          </a:p>
-        </p:txBody>
-      </p:sp>
-      <p:sp>
-        <p:nvSpPr>
-          <p:cNvPr id="20" name="TextBox 19"/>
-          <p:cNvSpPr txBox="1"/>
-          <p:nvPr/>
-        </p:nvSpPr>
-        <p:spPr>
-          <a:xfrm>
-            <a:off x="621792" y="5102352"/>
-            <a:ext cx="2240280" cy="347472"/>
-          </a:xfrm>
-          <a:prstGeom prst="rect">
-            <a:avLst/>
-          </a:prstGeom>
-          <a:noFill/>
-        </p:spPr>
-        <p:txBody>
-          <a:bodyPr wrap="square">
-            <a:spAutoFit/>
-          </a:bodyPr>
-          <a:lstStyle/>
-          <a:p>
-            <a:pPr algn="ctr"/>
-            <a:r>
-              <a:rPr sz="1000" b="0">
-                <a:solidFill>
-                  <a:srgbClr val="C5CAE9"/>
-                </a:solidFill>
-              </a:rPr>
-              <a:t>2026-06-09 ~ 06-13</a:t>
-            </a:r>
-          </a:p>
-        </p:txBody>
-      </p:sp>
-      <p:sp>
-        <p:nvSpPr>
-          <p:cNvPr id="21" name="TextBox 20"/>
-          <p:cNvSpPr txBox="1"/>
-          <p:nvPr/>
-        </p:nvSpPr>
-        <p:spPr>
-          <a:xfrm>
-            <a:off x="3200400" y="4645152"/>
-            <a:ext cx="8229600" cy="914400"/>
+          <p:cNvPr id="16" name="TextBox 15"/>
+          <p:cNvSpPr txBox="1"/>
+          <p:nvPr/>
+        </p:nvSpPr>
+        <p:spPr>
+          <a:xfrm>
+            <a:off x="658368" y="4517136"/>
+            <a:ext cx="10972800" cy="411480"/>
           </a:xfrm>
           <a:prstGeom prst="rect">
             <a:avLst/>
@@ -15845,12 +15305,47 @@
           <a:p>
             <a:pPr algn="l"/>
             <a:r>
-              <a:rPr sz="1400" b="0">
+              <a:rPr sz="1400" b="1">
                 <a:solidFill>
                   <a:srgbClr val="212121"/>
                 </a:solidFill>
               </a:rPr>
-              <a:t>최종 발표</a:t>
+              <a:t>앱 배포 경험 없음</a:t>
+            </a:r>
+          </a:p>
+        </p:txBody>
+      </p:sp>
+      <p:sp>
+        <p:nvSpPr>
+          <p:cNvPr id="17" name="TextBox 16"/>
+          <p:cNvSpPr txBox="1"/>
+          <p:nvPr/>
+        </p:nvSpPr>
+        <p:spPr>
+          <a:xfrm>
+            <a:off x="658368" y="4946904"/>
+            <a:ext cx="10789920" cy="749808"/>
+          </a:xfrm>
+          <a:prstGeom prst="rect">
+            <a:avLst/>
+          </a:prstGeom>
+          <a:noFill/>
+        </p:spPr>
+        <p:txBody>
+          <a:bodyPr wrap="square">
+            <a:spAutoFit/>
+          </a:bodyPr>
+          <a:lstStyle/>
+          <a:p>
+            <a:pPr algn="l"/>
+            <a:r>
+              <a:rPr sz="1300" b="0">
+                <a:solidFill>
+                  <a:srgbClr val="212121"/>
+                </a:solidFill>
+              </a:rPr>
+              <a:t>Google Play Console 등록 절차 및 APK 서명 과정 첫 시도
+배포 오류 발생 시 대응 방법 조언 필요</a:t>
             </a:r>
           </a:p>
         </p:txBody>
@@ -15943,14 +15438,48 @@
                   <a:srgbClr val="3F51B5"/>
                 </a:solidFill>
               </a:rPr>
-              <a:t>8.  어려운 점 / 도움 요청</a:t>
-            </a:r>
-          </a:p>
-        </p:txBody>
-      </p:sp>
-      <p:sp>
-        <p:nvSpPr>
-          <p:cNvPr id="4" name="Rectangle 3"/>
+              <a:t>8.  개발 방식 — AI 워크플로우</a:t>
+            </a:r>
+          </a:p>
+        </p:txBody>
+      </p:sp>
+      <p:sp>
+        <p:nvSpPr>
+          <p:cNvPr id="4" name="TextBox 3"/>
+          <p:cNvSpPr txBox="1"/>
+          <p:nvPr/>
+        </p:nvSpPr>
+        <p:spPr>
+          <a:xfrm>
+            <a:off x="457200" y="621792"/>
+            <a:ext cx="10972800" cy="274320"/>
+          </a:xfrm>
+          <a:prstGeom prst="rect">
+            <a:avLst/>
+          </a:prstGeom>
+          <a:noFill/>
+        </p:spPr>
+        <p:txBody>
+          <a:bodyPr wrap="square">
+            <a:spAutoFit/>
+          </a:bodyPr>
+          <a:lstStyle/>
+          <a:p>
+            <a:pPr algn="l"/>
+            <a:r>
+              <a:rPr sz="1100" b="0">
+                <a:solidFill>
+                  <a:srgbClr val="9E9E9E"/>
+                </a:solidFill>
+              </a:rPr>
+              <a:t>팀원 A  ·  가산점 A+1 · B+2 · C+1</a:t>
+            </a:r>
+          </a:p>
+        </p:txBody>
+      </p:sp>
+      <p:sp>
+        <p:nvSpPr>
+          <p:cNvPr id="5" name="Rectangle 4"/>
           <p:cNvSpPr/>
           <p:nvPr/>
         </p:nvSpPr>
@@ -15993,7 +15522,7 @@
       </p:sp>
       <p:sp>
         <p:nvSpPr>
-          <p:cNvPr id="5" name="TextBox 4"/>
+          <p:cNvPr id="6" name="TextBox 5"/>
           <p:cNvSpPr txBox="1"/>
           <p:nvPr/>
         </p:nvSpPr>
@@ -16020,21 +15549,21 @@
                   <a:srgbClr val="9E9E9E"/>
                 </a:solidFill>
               </a:rPr>
-              <a:t>9 / 15</a:t>
-            </a:r>
-          </a:p>
-        </p:txBody>
-      </p:sp>
-      <p:sp>
-        <p:nvSpPr>
-          <p:cNvPr id="6" name="Rectangle 5"/>
+              <a:t>9 / 14</a:t>
+            </a:r>
+          </a:p>
+        </p:txBody>
+      </p:sp>
+      <p:sp>
+        <p:nvSpPr>
+          <p:cNvPr id="7" name="Rectangle 6"/>
           <p:cNvSpPr/>
           <p:nvPr/>
         </p:nvSpPr>
         <p:spPr>
           <a:xfrm>
-            <a:off x="457200" y="1051560"/>
-            <a:ext cx="11247120" cy="1417320"/>
+            <a:off x="457200" y="1005840"/>
+            <a:ext cx="11247120" cy="1143000"/>
           </a:xfrm>
           <a:prstGeom prst="rect">
             <a:avLst/>
@@ -16070,14 +15599,14 @@
       </p:sp>
       <p:sp>
         <p:nvSpPr>
-          <p:cNvPr id="7" name="Rectangle 6"/>
+          <p:cNvPr id="8" name="Rectangle 7"/>
           <p:cNvSpPr/>
           <p:nvPr/>
         </p:nvSpPr>
         <p:spPr>
           <a:xfrm>
-            <a:off x="457200" y="1051560"/>
-            <a:ext cx="54864" cy="1417320"/>
+            <a:off x="457200" y="1005840"/>
+            <a:ext cx="54864" cy="1143000"/>
           </a:xfrm>
           <a:prstGeom prst="rect">
             <a:avLst/>
@@ -16113,92 +15642,23 @@
       </p:sp>
       <p:sp>
         <p:nvSpPr>
-          <p:cNvPr id="8" name="TextBox 7"/>
-          <p:cNvSpPr txBox="1"/>
-          <p:nvPr/>
-        </p:nvSpPr>
-        <p:spPr>
-          <a:xfrm>
-            <a:off x="658368" y="1188719"/>
-            <a:ext cx="10972800" cy="411480"/>
-          </a:xfrm>
-          <a:prstGeom prst="rect">
-            <a:avLst/>
-          </a:prstGeom>
-          <a:noFill/>
-        </p:spPr>
-        <p:txBody>
-          <a:bodyPr wrap="square">
-            <a:spAutoFit/>
-          </a:bodyPr>
-          <a:lstStyle/>
-          <a:p>
-            <a:pPr algn="l"/>
-            <a:r>
-              <a:rPr sz="1400" b="1">
-                <a:solidFill>
-                  <a:srgbClr val="212121"/>
-                </a:solidFill>
-              </a:rPr>
-              <a:t>iOS 빌드 불가</a:t>
-            </a:r>
-          </a:p>
-        </p:txBody>
-      </p:sp>
-      <p:sp>
-        <p:nvSpPr>
-          <p:cNvPr id="9" name="TextBox 8"/>
-          <p:cNvSpPr txBox="1"/>
-          <p:nvPr/>
-        </p:nvSpPr>
-        <p:spPr>
-          <a:xfrm>
-            <a:off x="658368" y="1618488"/>
-            <a:ext cx="10789920" cy="749808"/>
-          </a:xfrm>
-          <a:prstGeom prst="rect">
-            <a:avLst/>
-          </a:prstGeom>
-          <a:noFill/>
-        </p:spPr>
-        <p:txBody>
-          <a:bodyPr wrap="square">
-            <a:spAutoFit/>
-          </a:bodyPr>
-          <a:lstStyle/>
-          <a:p>
-            <a:pPr algn="l"/>
-            <a:r>
-              <a:rPr sz="1300" b="0">
-                <a:solidFill>
-                  <a:srgbClr val="212121"/>
-                </a:solidFill>
-              </a:rPr>
-              <a:t>Mac 환경 없음 → iOS 시뮬레이터·실기기 테스트 불가
-Android APK만 제출 예정</a:t>
-            </a:r>
-          </a:p>
-        </p:txBody>
-      </p:sp>
-      <p:sp>
-        <p:nvSpPr>
-          <p:cNvPr id="10" name="Rectangle 9"/>
+          <p:cNvPr id="9" name="Rectangle 8"/>
           <p:cNvSpPr/>
           <p:nvPr/>
         </p:nvSpPr>
         <p:spPr>
           <a:xfrm>
-            <a:off x="457200" y="2715768"/>
-            <a:ext cx="11247120" cy="1417320"/>
-          </a:xfrm>
-          <a:prstGeom prst="rect">
-            <a:avLst/>
-          </a:prstGeom>
-          <a:noFill/>
-          <a:ln w="10160">
-            <a:solidFill>
-              <a:srgbClr val="E0E0E0"/>
-            </a:solidFill>
+            <a:off x="457200" y="1005840"/>
+            <a:ext cx="11247120" cy="402336"/>
+          </a:xfrm>
+          <a:prstGeom prst="rect">
+            <a:avLst/>
+          </a:prstGeom>
+          <a:solidFill>
+            <a:srgbClr val="F5F5F5"/>
+          </a:solidFill>
+          <a:ln>
+            <a:noFill/>
           </a:ln>
         </p:spPr>
         <p:style>
@@ -16225,14 +15685,14 @@
       </p:sp>
       <p:sp>
         <p:nvSpPr>
-          <p:cNvPr id="11" name="Rectangle 10"/>
+          <p:cNvPr id="10" name="Rectangle 9"/>
           <p:cNvSpPr/>
           <p:nvPr/>
         </p:nvSpPr>
         <p:spPr>
           <a:xfrm>
-            <a:off x="457200" y="2715768"/>
-            <a:ext cx="54864" cy="1417320"/>
+            <a:off x="10241280" y="1060704"/>
+            <a:ext cx="1234440" cy="292608"/>
           </a:xfrm>
           <a:prstGeom prst="rect">
             <a:avLst/>
@@ -16268,14 +15728,48 @@
       </p:sp>
       <p:sp>
         <p:nvSpPr>
+          <p:cNvPr id="11" name="TextBox 10"/>
+          <p:cNvSpPr txBox="1"/>
+          <p:nvPr/>
+        </p:nvSpPr>
+        <p:spPr>
+          <a:xfrm>
+            <a:off x="10241280" y="1060704"/>
+            <a:ext cx="1234440" cy="292608"/>
+          </a:xfrm>
+          <a:prstGeom prst="rect">
+            <a:avLst/>
+          </a:prstGeom>
+          <a:noFill/>
+        </p:spPr>
+        <p:txBody>
+          <a:bodyPr wrap="square">
+            <a:spAutoFit/>
+          </a:bodyPr>
+          <a:lstStyle/>
+          <a:p>
+            <a:pPr algn="ctr"/>
+            <a:r>
+              <a:rPr sz="1100" b="1">
+                <a:solidFill>
+                  <a:srgbClr val="FFFFFF"/>
+                </a:solidFill>
+              </a:rPr>
+              <a:t>A  +1</a:t>
+            </a:r>
+          </a:p>
+        </p:txBody>
+      </p:sp>
+      <p:sp>
+        <p:nvSpPr>
           <p:cNvPr id="12" name="TextBox 11"/>
           <p:cNvSpPr txBox="1"/>
           <p:nvPr/>
         </p:nvSpPr>
         <p:spPr>
           <a:xfrm>
-            <a:off x="658368" y="2852927"/>
-            <a:ext cx="10972800" cy="411480"/>
+            <a:off x="658368" y="1060704"/>
+            <a:ext cx="9418320" cy="320040"/>
           </a:xfrm>
           <a:prstGeom prst="rect">
             <a:avLst/>
@@ -16290,47 +15784,47 @@
           <a:p>
             <a:pPr algn="l"/>
             <a:r>
-              <a:rPr sz="1400" b="1">
+              <a:rPr sz="1300" b="1">
+                <a:solidFill>
+                  <a:srgbClr val="3F51B5"/>
+                </a:solidFill>
+              </a:rPr>
+              <a:t>feature-debugger 에이전트 직접 제작 + /dg 실사용</a:t>
+            </a:r>
+          </a:p>
+        </p:txBody>
+      </p:sp>
+      <p:sp>
+        <p:nvSpPr>
+          <p:cNvPr id="13" name="TextBox 12"/>
+          <p:cNvSpPr txBox="1"/>
+          <p:nvPr/>
+        </p:nvSpPr>
+        <p:spPr>
+          <a:xfrm>
+            <a:off x="658368" y="1499616"/>
+            <a:ext cx="10789920" cy="594360"/>
+          </a:xfrm>
+          <a:prstGeom prst="rect">
+            <a:avLst/>
+          </a:prstGeom>
+          <a:noFill/>
+        </p:spPr>
+        <p:txBody>
+          <a:bodyPr wrap="square">
+            <a:spAutoFit/>
+          </a:bodyPr>
+          <a:lstStyle/>
+          <a:p>
+            <a:pPr algn="l"/>
+            <a:r>
+              <a:rPr sz="1100" b="0">
                 <a:solidFill>
                   <a:srgbClr val="212121"/>
                 </a:solidFill>
               </a:rPr>
-              <a:t>Firebase Security Rules</a:t>
-            </a:r>
-          </a:p>
-        </p:txBody>
-      </p:sp>
-      <p:sp>
-        <p:nvSpPr>
-          <p:cNvPr id="13" name="TextBox 12"/>
-          <p:cNvSpPr txBox="1"/>
-          <p:nvPr/>
-        </p:nvSpPr>
-        <p:spPr>
-          <a:xfrm>
-            <a:off x="658368" y="3282696"/>
-            <a:ext cx="10789920" cy="749808"/>
-          </a:xfrm>
-          <a:prstGeom prst="rect">
-            <a:avLst/>
-          </a:prstGeom>
-          <a:noFill/>
-        </p:spPr>
-        <p:txBody>
-          <a:bodyPr wrap="square">
-            <a:spAutoFit/>
-          </a:bodyPr>
-          <a:lstStyle/>
-          <a:p>
-            <a:pPr algn="l"/>
-            <a:r>
-              <a:rPr sz="1300" b="0">
-                <a:solidFill>
-                  <a:srgbClr val="212121"/>
-                </a:solidFill>
-              </a:rPr>
-              <a:t>Firestore 보안 규칙 검증 어려움 — 다른 사용자가 타 계정 데이터에
-접근하지 못하도록 규칙을 작성했으나 침투 테스트 환경 없음</a:t>
+              <a:t>.claude/agents/feature-debugger.md  직접 제작
+앱 기능 6개 영역(인증 · 계좌 · 포지션 · 차트 · 대시보드 · Firebase)을 /dg 명령어 하나로 반복 점검 수행</a:t>
             </a:r>
           </a:p>
         </p:txBody>
@@ -16343,8 +15837,8 @@
         </p:nvSpPr>
         <p:spPr>
           <a:xfrm>
-            <a:off x="457200" y="4379976"/>
-            <a:ext cx="11247120" cy="1417320"/>
+            <a:off x="457200" y="2267712"/>
+            <a:ext cx="11247120" cy="1143000"/>
           </a:xfrm>
           <a:prstGeom prst="rect">
             <a:avLst/>
@@ -16386,14 +15880,14 @@
         </p:nvSpPr>
         <p:spPr>
           <a:xfrm>
-            <a:off x="457200" y="4379976"/>
-            <a:ext cx="54864" cy="1417320"/>
+            <a:off x="457200" y="2267712"/>
+            <a:ext cx="54864" cy="1143000"/>
           </a:xfrm>
           <a:prstGeom prst="rect">
             <a:avLst/>
           </a:prstGeom>
           <a:solidFill>
-            <a:srgbClr val="E65C00"/>
+            <a:srgbClr val="3F51B5"/>
           </a:solidFill>
           <a:ln>
             <a:noFill/>
@@ -16423,14 +15917,134 @@
       </p:sp>
       <p:sp>
         <p:nvSpPr>
-          <p:cNvPr id="16" name="TextBox 15"/>
-          <p:cNvSpPr txBox="1"/>
-          <p:nvPr/>
-        </p:nvSpPr>
-        <p:spPr>
-          <a:xfrm>
-            <a:off x="658368" y="4517136"/>
-            <a:ext cx="10972800" cy="411480"/>
+          <p:cNvPr id="16" name="Rectangle 15"/>
+          <p:cNvSpPr/>
+          <p:nvPr/>
+        </p:nvSpPr>
+        <p:spPr>
+          <a:xfrm>
+            <a:off x="457200" y="2267712"/>
+            <a:ext cx="11247120" cy="402336"/>
+          </a:xfrm>
+          <a:prstGeom prst="rect">
+            <a:avLst/>
+          </a:prstGeom>
+          <a:solidFill>
+            <a:srgbClr val="F5F5F5"/>
+          </a:solidFill>
+          <a:ln>
+            <a:noFill/>
+          </a:ln>
+        </p:spPr>
+        <p:style>
+          <a:lnRef idx="1">
+            <a:schemeClr val="accent1"/>
+          </a:lnRef>
+          <a:fillRef idx="3">
+            <a:schemeClr val="accent1"/>
+          </a:fillRef>
+          <a:effectRef idx="2">
+            <a:schemeClr val="accent1"/>
+          </a:effectRef>
+          <a:fontRef idx="minor">
+            <a:schemeClr val="lt1"/>
+          </a:fontRef>
+        </p:style>
+        <p:txBody>
+          <a:bodyPr rtlCol="0" anchor="ctr"/>
+          <a:lstStyle/>
+          <a:p>
+            <a:pPr algn="ctr"/>
+          </a:p>
+        </p:txBody>
+      </p:sp>
+      <p:sp>
+        <p:nvSpPr>
+          <p:cNvPr id="17" name="Rectangle 16"/>
+          <p:cNvSpPr/>
+          <p:nvPr/>
+        </p:nvSpPr>
+        <p:spPr>
+          <a:xfrm>
+            <a:off x="10241280" y="2322576"/>
+            <a:ext cx="1234440" cy="292608"/>
+          </a:xfrm>
+          <a:prstGeom prst="rect">
+            <a:avLst/>
+          </a:prstGeom>
+          <a:solidFill>
+            <a:srgbClr val="3F51B5"/>
+          </a:solidFill>
+          <a:ln>
+            <a:noFill/>
+          </a:ln>
+        </p:spPr>
+        <p:style>
+          <a:lnRef idx="1">
+            <a:schemeClr val="accent1"/>
+          </a:lnRef>
+          <a:fillRef idx="3">
+            <a:schemeClr val="accent1"/>
+          </a:fillRef>
+          <a:effectRef idx="2">
+            <a:schemeClr val="accent1"/>
+          </a:effectRef>
+          <a:fontRef idx="minor">
+            <a:schemeClr val="lt1"/>
+          </a:fontRef>
+        </p:style>
+        <p:txBody>
+          <a:bodyPr rtlCol="0" anchor="ctr"/>
+          <a:lstStyle/>
+          <a:p>
+            <a:pPr algn="ctr"/>
+          </a:p>
+        </p:txBody>
+      </p:sp>
+      <p:sp>
+        <p:nvSpPr>
+          <p:cNvPr id="18" name="TextBox 17"/>
+          <p:cNvSpPr txBox="1"/>
+          <p:nvPr/>
+        </p:nvSpPr>
+        <p:spPr>
+          <a:xfrm>
+            <a:off x="10241280" y="2322576"/>
+            <a:ext cx="1234440" cy="292608"/>
+          </a:xfrm>
+          <a:prstGeom prst="rect">
+            <a:avLst/>
+          </a:prstGeom>
+          <a:noFill/>
+        </p:spPr>
+        <p:txBody>
+          <a:bodyPr wrap="square">
+            <a:spAutoFit/>
+          </a:bodyPr>
+          <a:lstStyle/>
+          <a:p>
+            <a:pPr algn="ctr"/>
+            <a:r>
+              <a:rPr sz="1100" b="1">
+                <a:solidFill>
+                  <a:srgbClr val="FFFFFF"/>
+                </a:solidFill>
+              </a:rPr>
+              <a:t>B  +2</a:t>
+            </a:r>
+          </a:p>
+        </p:txBody>
+      </p:sp>
+      <p:sp>
+        <p:nvSpPr>
+          <p:cNvPr id="19" name="TextBox 18"/>
+          <p:cNvSpPr txBox="1"/>
+          <p:nvPr/>
+        </p:nvSpPr>
+        <p:spPr>
+          <a:xfrm>
+            <a:off x="658368" y="2322576"/>
+            <a:ext cx="9418320" cy="320040"/>
           </a:xfrm>
           <a:prstGeom prst="rect">
             <a:avLst/>
@@ -16445,26 +16059,267 @@
           <a:p>
             <a:pPr algn="l"/>
             <a:r>
-              <a:rPr sz="1400" b="1">
+              <a:rPr sz="1300" b="1">
+                <a:solidFill>
+                  <a:srgbClr val="3F51B5"/>
+                </a:solidFill>
+              </a:rPr>
+              <a:t>기법 1  —  단일 md 부트스트랩</a:t>
+            </a:r>
+          </a:p>
+        </p:txBody>
+      </p:sp>
+      <p:sp>
+        <p:nvSpPr>
+          <p:cNvPr id="20" name="TextBox 19"/>
+          <p:cNvSpPr txBox="1"/>
+          <p:nvPr/>
+        </p:nvSpPr>
+        <p:spPr>
+          <a:xfrm>
+            <a:off x="658368" y="2761488"/>
+            <a:ext cx="10789920" cy="594360"/>
+          </a:xfrm>
+          <a:prstGeom prst="rect">
+            <a:avLst/>
+          </a:prstGeom>
+          <a:noFill/>
+        </p:spPr>
+        <p:txBody>
+          <a:bodyPr wrap="square">
+            <a:spAutoFit/>
+          </a:bodyPr>
+          <a:lstStyle/>
+          <a:p>
+            <a:pPr algn="l"/>
+            <a:r>
+              <a:rPr sz="1100" b="0">
                 <a:solidFill>
                   <a:srgbClr val="212121"/>
                 </a:solidFill>
               </a:rPr>
-              <a:t>앱 배포 경험 없음</a:t>
-            </a:r>
-          </a:p>
-        </p:txBody>
-      </p:sp>
-      <p:sp>
-        <p:nvSpPr>
-          <p:cNvPr id="17" name="TextBox 16"/>
-          <p:cNvSpPr txBox="1"/>
-          <p:nvPr/>
-        </p:nvSpPr>
-        <p:spPr>
-          <a:xfrm>
-            <a:off x="658368" y="4946904"/>
-            <a:ext cx="10789920" cy="749808"/>
+              <a:t>AUTHORING.Jooseonghyeon.v0.1.0.md 하나로 Rules · Skills · Commands 전체 자동 세팅
+새 프로젝트에 이 파일 하나만 주면 AI 운영 체계 즉시 구성</a:t>
+            </a:r>
+          </a:p>
+        </p:txBody>
+      </p:sp>
+      <p:sp>
+        <p:nvSpPr>
+          <p:cNvPr id="21" name="Rectangle 20"/>
+          <p:cNvSpPr/>
+          <p:nvPr/>
+        </p:nvSpPr>
+        <p:spPr>
+          <a:xfrm>
+            <a:off x="457200" y="3529584"/>
+            <a:ext cx="11247120" cy="1143000"/>
+          </a:xfrm>
+          <a:prstGeom prst="rect">
+            <a:avLst/>
+          </a:prstGeom>
+          <a:noFill/>
+          <a:ln w="10160">
+            <a:solidFill>
+              <a:srgbClr val="E0E0E0"/>
+            </a:solidFill>
+          </a:ln>
+        </p:spPr>
+        <p:style>
+          <a:lnRef idx="1">
+            <a:schemeClr val="accent1"/>
+          </a:lnRef>
+          <a:fillRef idx="3">
+            <a:schemeClr val="accent1"/>
+          </a:fillRef>
+          <a:effectRef idx="2">
+            <a:schemeClr val="accent1"/>
+          </a:effectRef>
+          <a:fontRef idx="minor">
+            <a:schemeClr val="lt1"/>
+          </a:fontRef>
+        </p:style>
+        <p:txBody>
+          <a:bodyPr rtlCol="0" anchor="ctr"/>
+          <a:lstStyle/>
+          <a:p>
+            <a:pPr algn="ctr"/>
+          </a:p>
+        </p:txBody>
+      </p:sp>
+      <p:sp>
+        <p:nvSpPr>
+          <p:cNvPr id="22" name="Rectangle 21"/>
+          <p:cNvSpPr/>
+          <p:nvPr/>
+        </p:nvSpPr>
+        <p:spPr>
+          <a:xfrm>
+            <a:off x="457200" y="3529584"/>
+            <a:ext cx="54864" cy="1143000"/>
+          </a:xfrm>
+          <a:prstGeom prst="rect">
+            <a:avLst/>
+          </a:prstGeom>
+          <a:solidFill>
+            <a:srgbClr val="3F51B5"/>
+          </a:solidFill>
+          <a:ln>
+            <a:noFill/>
+          </a:ln>
+        </p:spPr>
+        <p:style>
+          <a:lnRef idx="1">
+            <a:schemeClr val="accent1"/>
+          </a:lnRef>
+          <a:fillRef idx="3">
+            <a:schemeClr val="accent1"/>
+          </a:fillRef>
+          <a:effectRef idx="2">
+            <a:schemeClr val="accent1"/>
+          </a:effectRef>
+          <a:fontRef idx="minor">
+            <a:schemeClr val="lt1"/>
+          </a:fontRef>
+        </p:style>
+        <p:txBody>
+          <a:bodyPr rtlCol="0" anchor="ctr"/>
+          <a:lstStyle/>
+          <a:p>
+            <a:pPr algn="ctr"/>
+          </a:p>
+        </p:txBody>
+      </p:sp>
+      <p:sp>
+        <p:nvSpPr>
+          <p:cNvPr id="23" name="Rectangle 22"/>
+          <p:cNvSpPr/>
+          <p:nvPr/>
+        </p:nvSpPr>
+        <p:spPr>
+          <a:xfrm>
+            <a:off x="457200" y="3529584"/>
+            <a:ext cx="11247120" cy="402336"/>
+          </a:xfrm>
+          <a:prstGeom prst="rect">
+            <a:avLst/>
+          </a:prstGeom>
+          <a:solidFill>
+            <a:srgbClr val="F5F5F5"/>
+          </a:solidFill>
+          <a:ln>
+            <a:noFill/>
+          </a:ln>
+        </p:spPr>
+        <p:style>
+          <a:lnRef idx="1">
+            <a:schemeClr val="accent1"/>
+          </a:lnRef>
+          <a:fillRef idx="3">
+            <a:schemeClr val="accent1"/>
+          </a:fillRef>
+          <a:effectRef idx="2">
+            <a:schemeClr val="accent1"/>
+          </a:effectRef>
+          <a:fontRef idx="minor">
+            <a:schemeClr val="lt1"/>
+          </a:fontRef>
+        </p:style>
+        <p:txBody>
+          <a:bodyPr rtlCol="0" anchor="ctr"/>
+          <a:lstStyle/>
+          <a:p>
+            <a:pPr algn="ctr"/>
+          </a:p>
+        </p:txBody>
+      </p:sp>
+      <p:sp>
+        <p:nvSpPr>
+          <p:cNvPr id="24" name="Rectangle 23"/>
+          <p:cNvSpPr/>
+          <p:nvPr/>
+        </p:nvSpPr>
+        <p:spPr>
+          <a:xfrm>
+            <a:off x="10241280" y="3584448"/>
+            <a:ext cx="1234440" cy="292608"/>
+          </a:xfrm>
+          <a:prstGeom prst="rect">
+            <a:avLst/>
+          </a:prstGeom>
+          <a:solidFill>
+            <a:srgbClr val="3F51B5"/>
+          </a:solidFill>
+          <a:ln>
+            <a:noFill/>
+          </a:ln>
+        </p:spPr>
+        <p:style>
+          <a:lnRef idx="1">
+            <a:schemeClr val="accent1"/>
+          </a:lnRef>
+          <a:fillRef idx="3">
+            <a:schemeClr val="accent1"/>
+          </a:fillRef>
+          <a:effectRef idx="2">
+            <a:schemeClr val="accent1"/>
+          </a:effectRef>
+          <a:fontRef idx="minor">
+            <a:schemeClr val="lt1"/>
+          </a:fontRef>
+        </p:style>
+        <p:txBody>
+          <a:bodyPr rtlCol="0" anchor="ctr"/>
+          <a:lstStyle/>
+          <a:p>
+            <a:pPr algn="ctr"/>
+          </a:p>
+        </p:txBody>
+      </p:sp>
+      <p:sp>
+        <p:nvSpPr>
+          <p:cNvPr id="25" name="TextBox 24"/>
+          <p:cNvSpPr txBox="1"/>
+          <p:nvPr/>
+        </p:nvSpPr>
+        <p:spPr>
+          <a:xfrm>
+            <a:off x="10241280" y="3584448"/>
+            <a:ext cx="1234440" cy="292608"/>
+          </a:xfrm>
+          <a:prstGeom prst="rect">
+            <a:avLst/>
+          </a:prstGeom>
+          <a:noFill/>
+        </p:spPr>
+        <p:txBody>
+          <a:bodyPr wrap="square">
+            <a:spAutoFit/>
+          </a:bodyPr>
+          <a:lstStyle/>
+          <a:p>
+            <a:pPr algn="ctr"/>
+            <a:r>
+              <a:rPr sz="1100" b="1">
+                <a:solidFill>
+                  <a:srgbClr val="FFFFFF"/>
+                </a:solidFill>
+              </a:rPr>
+              <a:t>B  +2</a:t>
+            </a:r>
+          </a:p>
+        </p:txBody>
+      </p:sp>
+      <p:sp>
+        <p:nvSpPr>
+          <p:cNvPr id="26" name="TextBox 25"/>
+          <p:cNvSpPr txBox="1"/>
+          <p:nvPr/>
+        </p:nvSpPr>
+        <p:spPr>
+          <a:xfrm>
+            <a:off x="658368" y="3584448"/>
+            <a:ext cx="9418320" cy="320040"/>
           </a:xfrm>
           <a:prstGeom prst="rect">
             <a:avLst/>
@@ -16479,13 +16334,322 @@
           <a:p>
             <a:pPr algn="l"/>
             <a:r>
-              <a:rPr sz="1300" b="0">
+              <a:rPr sz="1300" b="1">
+                <a:solidFill>
+                  <a:srgbClr val="3F51B5"/>
+                </a:solidFill>
+              </a:rPr>
+              <a:t>기법 3  —  단계별 개발 계획 · 진행</a:t>
+            </a:r>
+          </a:p>
+        </p:txBody>
+      </p:sp>
+      <p:sp>
+        <p:nvSpPr>
+          <p:cNvPr id="27" name="TextBox 26"/>
+          <p:cNvSpPr txBox="1"/>
+          <p:nvPr/>
+        </p:nvSpPr>
+        <p:spPr>
+          <a:xfrm>
+            <a:off x="658368" y="4023360"/>
+            <a:ext cx="10789920" cy="594360"/>
+          </a:xfrm>
+          <a:prstGeom prst="rect">
+            <a:avLst/>
+          </a:prstGeom>
+          <a:noFill/>
+        </p:spPr>
+        <p:txBody>
+          <a:bodyPr wrap="square">
+            <a:spAutoFit/>
+          </a:bodyPr>
+          <a:lstStyle/>
+          <a:p>
+            <a:pPr algn="l"/>
+            <a:r>
+              <a:rPr sz="1100" b="0">
                 <a:solidFill>
                   <a:srgbClr val="212121"/>
                 </a:solidFill>
               </a:rPr>
-              <a:t>Google Play Console 등록 절차 및 APK 서명 과정 첫 시도
-배포 오류 발생 시 대응 방법 조언 필요</a:t>
+              <a:t>개발 전 단계별 계획 수립 → AI 구현 → 직접 점검 · 이해 → 다음 단계 진행
+AI 의존 개발에서 코드 이해도를 유지하기 위한 개인 워크플로우</a:t>
+            </a:r>
+          </a:p>
+        </p:txBody>
+      </p:sp>
+      <p:sp>
+        <p:nvSpPr>
+          <p:cNvPr id="28" name="Rectangle 27"/>
+          <p:cNvSpPr/>
+          <p:nvPr/>
+        </p:nvSpPr>
+        <p:spPr>
+          <a:xfrm>
+            <a:off x="457200" y="4791456"/>
+            <a:ext cx="11247120" cy="1143000"/>
+          </a:xfrm>
+          <a:prstGeom prst="rect">
+            <a:avLst/>
+          </a:prstGeom>
+          <a:noFill/>
+          <a:ln w="10160">
+            <a:solidFill>
+              <a:srgbClr val="E0E0E0"/>
+            </a:solidFill>
+          </a:ln>
+        </p:spPr>
+        <p:style>
+          <a:lnRef idx="1">
+            <a:schemeClr val="accent1"/>
+          </a:lnRef>
+          <a:fillRef idx="3">
+            <a:schemeClr val="accent1"/>
+          </a:fillRef>
+          <a:effectRef idx="2">
+            <a:schemeClr val="accent1"/>
+          </a:effectRef>
+          <a:fontRef idx="minor">
+            <a:schemeClr val="lt1"/>
+          </a:fontRef>
+        </p:style>
+        <p:txBody>
+          <a:bodyPr rtlCol="0" anchor="ctr"/>
+          <a:lstStyle/>
+          <a:p>
+            <a:pPr algn="ctr"/>
+          </a:p>
+        </p:txBody>
+      </p:sp>
+      <p:sp>
+        <p:nvSpPr>
+          <p:cNvPr id="29" name="Rectangle 28"/>
+          <p:cNvSpPr/>
+          <p:nvPr/>
+        </p:nvSpPr>
+        <p:spPr>
+          <a:xfrm>
+            <a:off x="457200" y="4791456"/>
+            <a:ext cx="54864" cy="1143000"/>
+          </a:xfrm>
+          <a:prstGeom prst="rect">
+            <a:avLst/>
+          </a:prstGeom>
+          <a:solidFill>
+            <a:srgbClr val="2E7D32"/>
+          </a:solidFill>
+          <a:ln>
+            <a:noFill/>
+          </a:ln>
+        </p:spPr>
+        <p:style>
+          <a:lnRef idx="1">
+            <a:schemeClr val="accent1"/>
+          </a:lnRef>
+          <a:fillRef idx="3">
+            <a:schemeClr val="accent1"/>
+          </a:fillRef>
+          <a:effectRef idx="2">
+            <a:schemeClr val="accent1"/>
+          </a:effectRef>
+          <a:fontRef idx="minor">
+            <a:schemeClr val="lt1"/>
+          </a:fontRef>
+        </p:style>
+        <p:txBody>
+          <a:bodyPr rtlCol="0" anchor="ctr"/>
+          <a:lstStyle/>
+          <a:p>
+            <a:pPr algn="ctr"/>
+          </a:p>
+        </p:txBody>
+      </p:sp>
+      <p:sp>
+        <p:nvSpPr>
+          <p:cNvPr id="30" name="Rectangle 29"/>
+          <p:cNvSpPr/>
+          <p:nvPr/>
+        </p:nvSpPr>
+        <p:spPr>
+          <a:xfrm>
+            <a:off x="457200" y="4791456"/>
+            <a:ext cx="11247120" cy="402336"/>
+          </a:xfrm>
+          <a:prstGeom prst="rect">
+            <a:avLst/>
+          </a:prstGeom>
+          <a:solidFill>
+            <a:srgbClr val="F5F5F5"/>
+          </a:solidFill>
+          <a:ln>
+            <a:noFill/>
+          </a:ln>
+        </p:spPr>
+        <p:style>
+          <a:lnRef idx="1">
+            <a:schemeClr val="accent1"/>
+          </a:lnRef>
+          <a:fillRef idx="3">
+            <a:schemeClr val="accent1"/>
+          </a:fillRef>
+          <a:effectRef idx="2">
+            <a:schemeClr val="accent1"/>
+          </a:effectRef>
+          <a:fontRef idx="minor">
+            <a:schemeClr val="lt1"/>
+          </a:fontRef>
+        </p:style>
+        <p:txBody>
+          <a:bodyPr rtlCol="0" anchor="ctr"/>
+          <a:lstStyle/>
+          <a:p>
+            <a:pPr algn="ctr"/>
+          </a:p>
+        </p:txBody>
+      </p:sp>
+      <p:sp>
+        <p:nvSpPr>
+          <p:cNvPr id="31" name="Rectangle 30"/>
+          <p:cNvSpPr/>
+          <p:nvPr/>
+        </p:nvSpPr>
+        <p:spPr>
+          <a:xfrm>
+            <a:off x="10241280" y="4846320"/>
+            <a:ext cx="1234440" cy="292608"/>
+          </a:xfrm>
+          <a:prstGeom prst="rect">
+            <a:avLst/>
+          </a:prstGeom>
+          <a:solidFill>
+            <a:srgbClr val="2E7D32"/>
+          </a:solidFill>
+          <a:ln>
+            <a:noFill/>
+          </a:ln>
+        </p:spPr>
+        <p:style>
+          <a:lnRef idx="1">
+            <a:schemeClr val="accent1"/>
+          </a:lnRef>
+          <a:fillRef idx="3">
+            <a:schemeClr val="accent1"/>
+          </a:fillRef>
+          <a:effectRef idx="2">
+            <a:schemeClr val="accent1"/>
+          </a:effectRef>
+          <a:fontRef idx="minor">
+            <a:schemeClr val="lt1"/>
+          </a:fontRef>
+        </p:style>
+        <p:txBody>
+          <a:bodyPr rtlCol="0" anchor="ctr"/>
+          <a:lstStyle/>
+          <a:p>
+            <a:pPr algn="ctr"/>
+          </a:p>
+        </p:txBody>
+      </p:sp>
+      <p:sp>
+        <p:nvSpPr>
+          <p:cNvPr id="32" name="TextBox 31"/>
+          <p:cNvSpPr txBox="1"/>
+          <p:nvPr/>
+        </p:nvSpPr>
+        <p:spPr>
+          <a:xfrm>
+            <a:off x="10241280" y="4846320"/>
+            <a:ext cx="1234440" cy="292608"/>
+          </a:xfrm>
+          <a:prstGeom prst="rect">
+            <a:avLst/>
+          </a:prstGeom>
+          <a:noFill/>
+        </p:spPr>
+        <p:txBody>
+          <a:bodyPr wrap="square">
+            <a:spAutoFit/>
+          </a:bodyPr>
+          <a:lstStyle/>
+          <a:p>
+            <a:pPr algn="ctr"/>
+            <a:r>
+              <a:rPr sz="1100" b="1">
+                <a:solidFill>
+                  <a:srgbClr val="FFFFFF"/>
+                </a:solidFill>
+              </a:rPr>
+              <a:t>C  +1</a:t>
+            </a:r>
+          </a:p>
+        </p:txBody>
+      </p:sp>
+      <p:sp>
+        <p:nvSpPr>
+          <p:cNvPr id="33" name="TextBox 32"/>
+          <p:cNvSpPr txBox="1"/>
+          <p:nvPr/>
+        </p:nvSpPr>
+        <p:spPr>
+          <a:xfrm>
+            <a:off x="658368" y="4846320"/>
+            <a:ext cx="9418320" cy="320040"/>
+          </a:xfrm>
+          <a:prstGeom prst="rect">
+            <a:avLst/>
+          </a:prstGeom>
+          <a:noFill/>
+        </p:spPr>
+        <p:txBody>
+          <a:bodyPr wrap="square">
+            <a:spAutoFit/>
+          </a:bodyPr>
+          <a:lstStyle/>
+          <a:p>
+            <a:pPr algn="l"/>
+            <a:r>
+              <a:rPr sz="1300" b="1">
+                <a:solidFill>
+                  <a:srgbClr val="3F51B5"/>
+                </a:solidFill>
+              </a:rPr>
+              <a:t>LLM Wiki  —  암묵지 운영  (notes/llm-wiki.md)</a:t>
+            </a:r>
+          </a:p>
+        </p:txBody>
+      </p:sp>
+      <p:sp>
+        <p:nvSpPr>
+          <p:cNvPr id="34" name="TextBox 33"/>
+          <p:cNvSpPr txBox="1"/>
+          <p:nvPr/>
+        </p:nvSpPr>
+        <p:spPr>
+          <a:xfrm>
+            <a:off x="658368" y="5285232"/>
+            <a:ext cx="10789920" cy="594360"/>
+          </a:xfrm>
+          <a:prstGeom prst="rect">
+            <a:avLst/>
+          </a:prstGeom>
+          <a:noFill/>
+        </p:spPr>
+        <p:txBody>
+          <a:bodyPr wrap="square">
+            <a:spAutoFit/>
+          </a:bodyPr>
+          <a:lstStyle/>
+          <a:p>
+            <a:pPr algn="l"/>
+            <a:r>
+              <a:rPr sz="1100" b="0">
+                <a:solidFill>
+                  <a:srgbClr val="212121"/>
+                </a:solidFill>
+              </a:rPr>
+              <a:t>개발 중 배운 AI 사용 인사이트 11개 항목 직접 기록
+Flutter 실행 환경 / 에이전트 호출법 / ADR 개념 / python-pptx 단위 변환 등</a:t>
             </a:r>
           </a:p>
         </p:txBody>

--- a/portfolio-tracker/presentation/portfolio-tracker-final.pptx
+++ b/portfolio-tracker/presentation/portfolio-tracker-final.pptx
@@ -3522,7 +3522,7 @@
                   <a:srgbClr val="9E9E9E"/>
                 </a:solidFill>
               </a:rPr>
-              <a:t>팀원 B  ·  가산점 B+2</a:t>
+              <a:t>팀원 B  ·  가산점 A+1 · B+2 · C+1 · D+2</a:t>
             </a:r>
           </a:p>
         </p:txBody>
@@ -3612,8 +3612,8 @@
         </p:nvSpPr>
         <p:spPr>
           <a:xfrm>
-            <a:off x="457200" y="1234440"/>
-            <a:ext cx="11247120" cy="1554480"/>
+            <a:off x="457200" y="987552"/>
+            <a:ext cx="11247120" cy="1024128"/>
           </a:xfrm>
           <a:prstGeom prst="rect">
             <a:avLst/>
@@ -3655,8 +3655,283 @@
         </p:nvSpPr>
         <p:spPr>
           <a:xfrm>
-            <a:off x="457200" y="1234440"/>
-            <a:ext cx="54864" cy="1554480"/>
+            <a:off x="457200" y="987552"/>
+            <a:ext cx="54864" cy="1024128"/>
+          </a:xfrm>
+          <a:prstGeom prst="rect">
+            <a:avLst/>
+          </a:prstGeom>
+          <a:solidFill>
+            <a:srgbClr val="E65C00"/>
+          </a:solidFill>
+          <a:ln>
+            <a:noFill/>
+          </a:ln>
+        </p:spPr>
+        <p:style>
+          <a:lnRef idx="1">
+            <a:schemeClr val="accent1"/>
+          </a:lnRef>
+          <a:fillRef idx="3">
+            <a:schemeClr val="accent1"/>
+          </a:fillRef>
+          <a:effectRef idx="2">
+            <a:schemeClr val="accent1"/>
+          </a:effectRef>
+          <a:fontRef idx="minor">
+            <a:schemeClr val="lt1"/>
+          </a:fontRef>
+        </p:style>
+        <p:txBody>
+          <a:bodyPr rtlCol="0" anchor="ctr"/>
+          <a:lstStyle/>
+          <a:p>
+            <a:pPr algn="ctr"/>
+          </a:p>
+        </p:txBody>
+      </p:sp>
+      <p:sp>
+        <p:nvSpPr>
+          <p:cNvPr id="9" name="Rectangle 8"/>
+          <p:cNvSpPr/>
+          <p:nvPr/>
+        </p:nvSpPr>
+        <p:spPr>
+          <a:xfrm>
+            <a:off x="457200" y="987552"/>
+            <a:ext cx="11247120" cy="365760"/>
+          </a:xfrm>
+          <a:prstGeom prst="rect">
+            <a:avLst/>
+          </a:prstGeom>
+          <a:solidFill>
+            <a:srgbClr val="F5F5F5"/>
+          </a:solidFill>
+          <a:ln>
+            <a:noFill/>
+          </a:ln>
+        </p:spPr>
+        <p:style>
+          <a:lnRef idx="1">
+            <a:schemeClr val="accent1"/>
+          </a:lnRef>
+          <a:fillRef idx="3">
+            <a:schemeClr val="accent1"/>
+          </a:fillRef>
+          <a:effectRef idx="2">
+            <a:schemeClr val="accent1"/>
+          </a:effectRef>
+          <a:fontRef idx="minor">
+            <a:schemeClr val="lt1"/>
+          </a:fontRef>
+        </p:style>
+        <p:txBody>
+          <a:bodyPr rtlCol="0" anchor="ctr"/>
+          <a:lstStyle/>
+          <a:p>
+            <a:pPr algn="ctr"/>
+          </a:p>
+        </p:txBody>
+      </p:sp>
+      <p:sp>
+        <p:nvSpPr>
+          <p:cNvPr id="10" name="Rectangle 9"/>
+          <p:cNvSpPr/>
+          <p:nvPr/>
+        </p:nvSpPr>
+        <p:spPr>
+          <a:xfrm>
+            <a:off x="10241280" y="1033272"/>
+            <a:ext cx="1234440" cy="274320"/>
+          </a:xfrm>
+          <a:prstGeom prst="rect">
+            <a:avLst/>
+          </a:prstGeom>
+          <a:solidFill>
+            <a:srgbClr val="E65C00"/>
+          </a:solidFill>
+          <a:ln>
+            <a:noFill/>
+          </a:ln>
+        </p:spPr>
+        <p:style>
+          <a:lnRef idx="1">
+            <a:schemeClr val="accent1"/>
+          </a:lnRef>
+          <a:fillRef idx="3">
+            <a:schemeClr val="accent1"/>
+          </a:fillRef>
+          <a:effectRef idx="2">
+            <a:schemeClr val="accent1"/>
+          </a:effectRef>
+          <a:fontRef idx="minor">
+            <a:schemeClr val="lt1"/>
+          </a:fontRef>
+        </p:style>
+        <p:txBody>
+          <a:bodyPr rtlCol="0" anchor="ctr"/>
+          <a:lstStyle/>
+          <a:p>
+            <a:pPr algn="ctr"/>
+          </a:p>
+        </p:txBody>
+      </p:sp>
+      <p:sp>
+        <p:nvSpPr>
+          <p:cNvPr id="11" name="TextBox 10"/>
+          <p:cNvSpPr txBox="1"/>
+          <p:nvPr/>
+        </p:nvSpPr>
+        <p:spPr>
+          <a:xfrm>
+            <a:off x="10241280" y="1033272"/>
+            <a:ext cx="1234440" cy="274320"/>
+          </a:xfrm>
+          <a:prstGeom prst="rect">
+            <a:avLst/>
+          </a:prstGeom>
+          <a:noFill/>
+        </p:spPr>
+        <p:txBody>
+          <a:bodyPr wrap="square">
+            <a:spAutoFit/>
+          </a:bodyPr>
+          <a:lstStyle/>
+          <a:p>
+            <a:pPr algn="ctr"/>
+            <a:r>
+              <a:rPr sz="1000" b="1">
+                <a:solidFill>
+                  <a:srgbClr val="FFFFFF"/>
+                </a:solidFill>
+              </a:rPr>
+              <a:t>A  +1</a:t>
+            </a:r>
+          </a:p>
+        </p:txBody>
+      </p:sp>
+      <p:sp>
+        <p:nvSpPr>
+          <p:cNvPr id="12" name="TextBox 11"/>
+          <p:cNvSpPr txBox="1"/>
+          <p:nvPr/>
+        </p:nvSpPr>
+        <p:spPr>
+          <a:xfrm>
+            <a:off x="658368" y="1033272"/>
+            <a:ext cx="9418320" cy="292608"/>
+          </a:xfrm>
+          <a:prstGeom prst="rect">
+            <a:avLst/>
+          </a:prstGeom>
+          <a:noFill/>
+        </p:spPr>
+        <p:txBody>
+          <a:bodyPr wrap="square">
+            <a:spAutoFit/>
+          </a:bodyPr>
+          <a:lstStyle/>
+          <a:p>
+            <a:pPr algn="l"/>
+            <a:r>
+              <a:rPr sz="1200" b="1">
+                <a:solidFill>
+                  <a:srgbClr val="3F51B5"/>
+                </a:solidFill>
+              </a:rPr>
+              <a:t>pre-presentation-checker 에이전트 직접 제작 + /pc 실사용</a:t>
+            </a:r>
+          </a:p>
+        </p:txBody>
+      </p:sp>
+      <p:sp>
+        <p:nvSpPr>
+          <p:cNvPr id="13" name="TextBox 12"/>
+          <p:cNvSpPr txBox="1"/>
+          <p:nvPr/>
+        </p:nvSpPr>
+        <p:spPr>
+          <a:xfrm>
+            <a:off x="658368" y="1426464"/>
+            <a:ext cx="10789920" cy="530352"/>
+          </a:xfrm>
+          <a:prstGeom prst="rect">
+            <a:avLst/>
+          </a:prstGeom>
+          <a:noFill/>
+        </p:spPr>
+        <p:txBody>
+          <a:bodyPr wrap="square">
+            <a:spAutoFit/>
+          </a:bodyPr>
+          <a:lstStyle/>
+          <a:p>
+            <a:pPr algn="l"/>
+            <a:r>
+              <a:rPr sz="1000" b="0">
+                <a:solidFill>
+                  <a:srgbClr val="212121"/>
+                </a:solidFill>
+              </a:rPr>
+              <a:t>.claude/agents/pre-presentation-checker.md  직접 제작
+발표 전 제출 서류 · 가산점 · 앱 상태를 평가 루브릭 기준으로 자동 점검 → 미완료 항목 우선 보고</a:t>
+            </a:r>
+          </a:p>
+        </p:txBody>
+      </p:sp>
+      <p:sp>
+        <p:nvSpPr>
+          <p:cNvPr id="14" name="Rectangle 13"/>
+          <p:cNvSpPr/>
+          <p:nvPr/>
+        </p:nvSpPr>
+        <p:spPr>
+          <a:xfrm>
+            <a:off x="457200" y="2112264"/>
+            <a:ext cx="11247120" cy="1024128"/>
+          </a:xfrm>
+          <a:prstGeom prst="rect">
+            <a:avLst/>
+          </a:prstGeom>
+          <a:noFill/>
+          <a:ln w="10160">
+            <a:solidFill>
+              <a:srgbClr val="E0E0E0"/>
+            </a:solidFill>
+          </a:ln>
+        </p:spPr>
+        <p:style>
+          <a:lnRef idx="1">
+            <a:schemeClr val="accent1"/>
+          </a:lnRef>
+          <a:fillRef idx="3">
+            <a:schemeClr val="accent1"/>
+          </a:fillRef>
+          <a:effectRef idx="2">
+            <a:schemeClr val="accent1"/>
+          </a:effectRef>
+          <a:fontRef idx="minor">
+            <a:schemeClr val="lt1"/>
+          </a:fontRef>
+        </p:style>
+        <p:txBody>
+          <a:bodyPr rtlCol="0" anchor="ctr"/>
+          <a:lstStyle/>
+          <a:p>
+            <a:pPr algn="ctr"/>
+          </a:p>
+        </p:txBody>
+      </p:sp>
+      <p:sp>
+        <p:nvSpPr>
+          <p:cNvPr id="15" name="Rectangle 14"/>
+          <p:cNvSpPr/>
+          <p:nvPr/>
+        </p:nvSpPr>
+        <p:spPr>
+          <a:xfrm>
+            <a:off x="457200" y="2112264"/>
+            <a:ext cx="54864" cy="1024128"/>
           </a:xfrm>
           <a:prstGeom prst="rect">
             <a:avLst/>
@@ -3692,14 +3967,14 @@
       </p:sp>
       <p:sp>
         <p:nvSpPr>
-          <p:cNvPr id="9" name="Rectangle 8"/>
+          <p:cNvPr id="16" name="Rectangle 15"/>
           <p:cNvSpPr/>
           <p:nvPr/>
         </p:nvSpPr>
         <p:spPr>
           <a:xfrm>
-            <a:off x="457200" y="1234440"/>
-            <a:ext cx="11247120" cy="438912"/>
+            <a:off x="457200" y="2112264"/>
+            <a:ext cx="11247120" cy="365760"/>
           </a:xfrm>
           <a:prstGeom prst="rect">
             <a:avLst/>
@@ -3735,14 +4010,14 @@
       </p:sp>
       <p:sp>
         <p:nvSpPr>
-          <p:cNvPr id="10" name="Rectangle 9"/>
+          <p:cNvPr id="17" name="Rectangle 16"/>
           <p:cNvSpPr/>
           <p:nvPr/>
         </p:nvSpPr>
         <p:spPr>
           <a:xfrm>
-            <a:off x="10241280" y="1307592"/>
-            <a:ext cx="1234440" cy="292608"/>
+            <a:off x="10241280" y="2157984"/>
+            <a:ext cx="1234440" cy="274320"/>
           </a:xfrm>
           <a:prstGeom prst="rect">
             <a:avLst/>
@@ -3778,29 +4053,29 @@
       </p:sp>
       <p:sp>
         <p:nvSpPr>
-          <p:cNvPr id="11" name="TextBox 10"/>
-          <p:cNvSpPr txBox="1"/>
-          <p:nvPr/>
-        </p:nvSpPr>
-        <p:spPr>
-          <a:xfrm>
-            <a:off x="10241280" y="1307592"/>
-            <a:ext cx="1234440" cy="292608"/>
-          </a:xfrm>
-          <a:prstGeom prst="rect">
-            <a:avLst/>
-          </a:prstGeom>
-          <a:noFill/>
-        </p:spPr>
-        <p:txBody>
-          <a:bodyPr wrap="square">
-            <a:spAutoFit/>
-          </a:bodyPr>
-          <a:lstStyle/>
-          <a:p>
-            <a:pPr algn="ctr"/>
-            <a:r>
-              <a:rPr sz="1100" b="1">
+          <p:cNvPr id="18" name="TextBox 17"/>
+          <p:cNvSpPr txBox="1"/>
+          <p:nvPr/>
+        </p:nvSpPr>
+        <p:spPr>
+          <a:xfrm>
+            <a:off x="10241280" y="2157984"/>
+            <a:ext cx="1234440" cy="274320"/>
+          </a:xfrm>
+          <a:prstGeom prst="rect">
+            <a:avLst/>
+          </a:prstGeom>
+          <a:noFill/>
+        </p:spPr>
+        <p:txBody>
+          <a:bodyPr wrap="square">
+            <a:spAutoFit/>
+          </a:bodyPr>
+          <a:lstStyle/>
+          <a:p>
+            <a:pPr algn="ctr"/>
+            <a:r>
+              <a:rPr sz="1000" b="1">
                 <a:solidFill>
                   <a:srgbClr val="FFFFFF"/>
                 </a:solidFill>
@@ -3812,14 +4087,14 @@
       </p:sp>
       <p:sp>
         <p:nvSpPr>
-          <p:cNvPr id="12" name="TextBox 11"/>
-          <p:cNvSpPr txBox="1"/>
-          <p:nvPr/>
-        </p:nvSpPr>
-        <p:spPr>
-          <a:xfrm>
-            <a:off x="658368" y="1307592"/>
-            <a:ext cx="9418320" cy="320040"/>
+          <p:cNvPr id="19" name="TextBox 18"/>
+          <p:cNvSpPr txBox="1"/>
+          <p:nvPr/>
+        </p:nvSpPr>
+        <p:spPr>
+          <a:xfrm>
+            <a:off x="658368" y="2157984"/>
+            <a:ext cx="9418320" cy="292608"/>
           </a:xfrm>
           <a:prstGeom prst="rect">
             <a:avLst/>
@@ -3834,26 +4109,26 @@
           <a:p>
             <a:pPr algn="l"/>
             <a:r>
-              <a:rPr sz="1300" b="1">
+              <a:rPr sz="1200" b="1">
                 <a:solidFill>
                   <a:srgbClr val="3F51B5"/>
                 </a:solidFill>
               </a:rPr>
-              <a:t>기법 1  —  단일 md 부트스트랩</a:t>
-            </a:r>
-          </a:p>
-        </p:txBody>
-      </p:sp>
-      <p:sp>
-        <p:nvSpPr>
-          <p:cNvPr id="13" name="TextBox 12"/>
-          <p:cNvSpPr txBox="1"/>
-          <p:nvPr/>
-        </p:nvSpPr>
-        <p:spPr>
-          <a:xfrm>
-            <a:off x="658368" y="1801368"/>
-            <a:ext cx="10789920" cy="896112"/>
+              <a:t>기법 1  —  단일 md 부트스트랩  (AUTHORING.jeongkyeongwoo.v0.1.0.md)</a:t>
+            </a:r>
+          </a:p>
+        </p:txBody>
+      </p:sp>
+      <p:sp>
+        <p:nvSpPr>
+          <p:cNvPr id="20" name="TextBox 19"/>
+          <p:cNvSpPr txBox="1"/>
+          <p:nvPr/>
+        </p:nvSpPr>
+        <p:spPr>
+          <a:xfrm>
+            <a:off x="658368" y="2551176"/>
+            <a:ext cx="10789920" cy="530352"/>
           </a:xfrm>
           <a:prstGeom prst="rect">
             <a:avLst/>
@@ -3868,12 +4143,12 @@
           <a:p>
             <a:pPr algn="l"/>
             <a:r>
-              <a:rPr sz="1200" b="0">
+              <a:rPr sz="1000" b="0">
                 <a:solidFill>
                   <a:srgbClr val="212121"/>
                 </a:solidFill>
               </a:rPr>
-              <a:t>AUTHORING.jeongkyeongwoo.v0.1.0.md 하나로 Rules · Skills · Commands 전체 자동 세팅
+              <a:t>Rules · Skills · Commands 전체를 파일 하나로 자동 세팅
 새 프로젝트에 이 파일 하나만 주면 AI 운영 체계 즉시 구성</a:t>
             </a:r>
           </a:p>
@@ -3881,14 +4156,14 @@
       </p:sp>
       <p:sp>
         <p:nvSpPr>
-          <p:cNvPr id="14" name="Rectangle 13"/>
+          <p:cNvPr id="21" name="Rectangle 20"/>
           <p:cNvSpPr/>
           <p:nvPr/>
         </p:nvSpPr>
         <p:spPr>
           <a:xfrm>
-            <a:off x="457200" y="3017520"/>
-            <a:ext cx="11247120" cy="1554480"/>
+            <a:off x="457200" y="3236976"/>
+            <a:ext cx="11247120" cy="1024128"/>
           </a:xfrm>
           <a:prstGeom prst="rect">
             <a:avLst/>
@@ -3924,14 +4199,14 @@
       </p:sp>
       <p:sp>
         <p:nvSpPr>
-          <p:cNvPr id="15" name="Rectangle 14"/>
+          <p:cNvPr id="22" name="Rectangle 21"/>
           <p:cNvSpPr/>
           <p:nvPr/>
         </p:nvSpPr>
         <p:spPr>
           <a:xfrm>
-            <a:off x="457200" y="3017520"/>
-            <a:ext cx="54864" cy="1554480"/>
+            <a:off x="457200" y="3236976"/>
+            <a:ext cx="54864" cy="1024128"/>
           </a:xfrm>
           <a:prstGeom prst="rect">
             <a:avLst/>
@@ -3967,14 +4242,14 @@
       </p:sp>
       <p:sp>
         <p:nvSpPr>
-          <p:cNvPr id="16" name="Rectangle 15"/>
+          <p:cNvPr id="23" name="Rectangle 22"/>
           <p:cNvSpPr/>
           <p:nvPr/>
         </p:nvSpPr>
         <p:spPr>
           <a:xfrm>
-            <a:off x="457200" y="3017520"/>
-            <a:ext cx="11247120" cy="438912"/>
+            <a:off x="457200" y="3236976"/>
+            <a:ext cx="11247120" cy="365760"/>
           </a:xfrm>
           <a:prstGeom prst="rect">
             <a:avLst/>
@@ -4010,14 +4285,14 @@
       </p:sp>
       <p:sp>
         <p:nvSpPr>
-          <p:cNvPr id="17" name="Rectangle 16"/>
+          <p:cNvPr id="24" name="Rectangle 23"/>
           <p:cNvSpPr/>
           <p:nvPr/>
         </p:nvSpPr>
         <p:spPr>
           <a:xfrm>
-            <a:off x="10241280" y="3090672"/>
-            <a:ext cx="1234440" cy="292608"/>
+            <a:off x="10241280" y="3282696"/>
+            <a:ext cx="1234440" cy="274320"/>
           </a:xfrm>
           <a:prstGeom prst="rect">
             <a:avLst/>
@@ -4053,29 +4328,29 @@
       </p:sp>
       <p:sp>
         <p:nvSpPr>
-          <p:cNvPr id="18" name="TextBox 17"/>
-          <p:cNvSpPr txBox="1"/>
-          <p:nvPr/>
-        </p:nvSpPr>
-        <p:spPr>
-          <a:xfrm>
-            <a:off x="10241280" y="3090672"/>
-            <a:ext cx="1234440" cy="292608"/>
-          </a:xfrm>
-          <a:prstGeom prst="rect">
-            <a:avLst/>
-          </a:prstGeom>
-          <a:noFill/>
-        </p:spPr>
-        <p:txBody>
-          <a:bodyPr wrap="square">
-            <a:spAutoFit/>
-          </a:bodyPr>
-          <a:lstStyle/>
-          <a:p>
-            <a:pPr algn="ctr"/>
-            <a:r>
-              <a:rPr sz="1100" b="1">
+          <p:cNvPr id="25" name="TextBox 24"/>
+          <p:cNvSpPr txBox="1"/>
+          <p:nvPr/>
+        </p:nvSpPr>
+        <p:spPr>
+          <a:xfrm>
+            <a:off x="10241280" y="3282696"/>
+            <a:ext cx="1234440" cy="274320"/>
+          </a:xfrm>
+          <a:prstGeom prst="rect">
+            <a:avLst/>
+          </a:prstGeom>
+          <a:noFill/>
+        </p:spPr>
+        <p:txBody>
+          <a:bodyPr wrap="square">
+            <a:spAutoFit/>
+          </a:bodyPr>
+          <a:lstStyle/>
+          <a:p>
+            <a:pPr algn="ctr"/>
+            <a:r>
+              <a:rPr sz="1000" b="1">
                 <a:solidFill>
                   <a:srgbClr val="FFFFFF"/>
                 </a:solidFill>
@@ -4087,14 +4362,14 @@
       </p:sp>
       <p:sp>
         <p:nvSpPr>
-          <p:cNvPr id="19" name="TextBox 18"/>
-          <p:cNvSpPr txBox="1"/>
-          <p:nvPr/>
-        </p:nvSpPr>
-        <p:spPr>
-          <a:xfrm>
-            <a:off x="658368" y="3090672"/>
-            <a:ext cx="9418320" cy="320040"/>
+          <p:cNvPr id="26" name="TextBox 25"/>
+          <p:cNvSpPr txBox="1"/>
+          <p:nvPr/>
+        </p:nvSpPr>
+        <p:spPr>
+          <a:xfrm>
+            <a:off x="658368" y="3282696"/>
+            <a:ext cx="9418320" cy="292608"/>
           </a:xfrm>
           <a:prstGeom prst="rect">
             <a:avLst/>
@@ -4109,26 +4384,26 @@
           <a:p>
             <a:pPr algn="l"/>
             <a:r>
-              <a:rPr sz="1300" b="1">
+              <a:rPr sz="1200" b="1">
                 <a:solidFill>
                   <a:srgbClr val="3F51B5"/>
                 </a:solidFill>
               </a:rPr>
-              <a:t>기법 2  —  pre-presentation-checker 직접 제작 + /pc 실사용</a:t>
-            </a:r>
-          </a:p>
-        </p:txBody>
-      </p:sp>
-      <p:sp>
-        <p:nvSpPr>
-          <p:cNvPr id="20" name="TextBox 19"/>
-          <p:cNvSpPr txBox="1"/>
-          <p:nvPr/>
-        </p:nvSpPr>
-        <p:spPr>
-          <a:xfrm>
-            <a:off x="658368" y="3584448"/>
-            <a:ext cx="10789920" cy="896112"/>
+              <a:t>기법 3  —  단계별 보고 방식</a:t>
+            </a:r>
+          </a:p>
+        </p:txBody>
+      </p:sp>
+      <p:sp>
+        <p:nvSpPr>
+          <p:cNvPr id="27" name="TextBox 26"/>
+          <p:cNvSpPr txBox="1"/>
+          <p:nvPr/>
+        </p:nvSpPr>
+        <p:spPr>
+          <a:xfrm>
+            <a:off x="658368" y="3675887"/>
+            <a:ext cx="10789920" cy="530352"/>
           </a:xfrm>
           <a:prstGeom prst="rect">
             <a:avLst/>
@@ -4143,27 +4418,27 @@
           <a:p>
             <a:pPr algn="l"/>
             <a:r>
-              <a:rPr sz="1200" b="0">
+              <a:rPr sz="1000" b="0">
                 <a:solidFill>
                   <a:srgbClr val="212121"/>
                 </a:solidFill>
               </a:rPr>
-              <a:t>.claude/agents/pre-presentation-checker.md  직접 제작  ·  /pc 명령어로 호출
-발표 전 제출 서류 · 가산점 · 앱 상태를 평가 루브릭 기준으로 자동 점검 → 미완료 항목 우선 보고</a:t>
-            </a:r>
-          </a:p>
-        </p:txBody>
-      </p:sp>
-      <p:sp>
-        <p:nvSpPr>
-          <p:cNvPr id="21" name="Rectangle 20"/>
+              <a:t>각 구현 단계 완료 후 AI에게 결과 보고받기 → 코드 이해도 유지
+"방금 만든 기능을 3줄로 설명해줘" → 내용 이해 후 다음 단계 진행  ·  Q&amp;A 즉답 가능</a:t>
+            </a:r>
+          </a:p>
+        </p:txBody>
+      </p:sp>
+      <p:sp>
+        <p:nvSpPr>
+          <p:cNvPr id="28" name="Rectangle 27"/>
           <p:cNvSpPr/>
           <p:nvPr/>
         </p:nvSpPr>
         <p:spPr>
           <a:xfrm>
-            <a:off x="457200" y="4800600"/>
-            <a:ext cx="11247120" cy="1554480"/>
+            <a:off x="457200" y="4361688"/>
+            <a:ext cx="11247120" cy="1024128"/>
           </a:xfrm>
           <a:prstGeom prst="rect">
             <a:avLst/>
@@ -4199,20 +4474,20 @@
       </p:sp>
       <p:sp>
         <p:nvSpPr>
-          <p:cNvPr id="22" name="Rectangle 21"/>
+          <p:cNvPr id="29" name="Rectangle 28"/>
           <p:cNvSpPr/>
           <p:nvPr/>
         </p:nvSpPr>
         <p:spPr>
           <a:xfrm>
-            <a:off x="457200" y="4800600"/>
-            <a:ext cx="54864" cy="1554480"/>
+            <a:off x="457200" y="4361688"/>
+            <a:ext cx="54864" cy="1024128"/>
           </a:xfrm>
           <a:prstGeom prst="rect">
             <a:avLst/>
           </a:prstGeom>
           <a:solidFill>
-            <a:srgbClr val="3F51B5"/>
+            <a:srgbClr val="2E7D32"/>
           </a:solidFill>
           <a:ln>
             <a:noFill/>
@@ -4242,14 +4517,14 @@
       </p:sp>
       <p:sp>
         <p:nvSpPr>
-          <p:cNvPr id="23" name="Rectangle 22"/>
+          <p:cNvPr id="30" name="Rectangle 29"/>
           <p:cNvSpPr/>
           <p:nvPr/>
         </p:nvSpPr>
         <p:spPr>
           <a:xfrm>
-            <a:off x="457200" y="4800600"/>
-            <a:ext cx="11247120" cy="438912"/>
+            <a:off x="457200" y="4361688"/>
+            <a:ext cx="11247120" cy="365760"/>
           </a:xfrm>
           <a:prstGeom prst="rect">
             <a:avLst/>
@@ -4285,20 +4560,20 @@
       </p:sp>
       <p:sp>
         <p:nvSpPr>
-          <p:cNvPr id="24" name="Rectangle 23"/>
+          <p:cNvPr id="31" name="Rectangle 30"/>
           <p:cNvSpPr/>
           <p:nvPr/>
         </p:nvSpPr>
         <p:spPr>
           <a:xfrm>
-            <a:off x="10241280" y="4873752"/>
-            <a:ext cx="1234440" cy="292608"/>
+            <a:off x="10241280" y="4407407"/>
+            <a:ext cx="1234440" cy="274320"/>
           </a:xfrm>
           <a:prstGeom prst="rect">
             <a:avLst/>
           </a:prstGeom>
           <a:solidFill>
-            <a:srgbClr val="3F51B5"/>
+            <a:srgbClr val="2E7D32"/>
           </a:solidFill>
           <a:ln>
             <a:noFill/>
@@ -4328,48 +4603,48 @@
       </p:sp>
       <p:sp>
         <p:nvSpPr>
-          <p:cNvPr id="25" name="TextBox 24"/>
-          <p:cNvSpPr txBox="1"/>
-          <p:nvPr/>
-        </p:nvSpPr>
-        <p:spPr>
-          <a:xfrm>
-            <a:off x="10241280" y="4873752"/>
-            <a:ext cx="1234440" cy="292608"/>
-          </a:xfrm>
-          <a:prstGeom prst="rect">
-            <a:avLst/>
-          </a:prstGeom>
-          <a:noFill/>
-        </p:spPr>
-        <p:txBody>
-          <a:bodyPr wrap="square">
-            <a:spAutoFit/>
-          </a:bodyPr>
-          <a:lstStyle/>
-          <a:p>
-            <a:pPr algn="ctr"/>
-            <a:r>
-              <a:rPr sz="1100" b="1">
+          <p:cNvPr id="32" name="TextBox 31"/>
+          <p:cNvSpPr txBox="1"/>
+          <p:nvPr/>
+        </p:nvSpPr>
+        <p:spPr>
+          <a:xfrm>
+            <a:off x="10241280" y="4407407"/>
+            <a:ext cx="1234440" cy="274320"/>
+          </a:xfrm>
+          <a:prstGeom prst="rect">
+            <a:avLst/>
+          </a:prstGeom>
+          <a:noFill/>
+        </p:spPr>
+        <p:txBody>
+          <a:bodyPr wrap="square">
+            <a:spAutoFit/>
+          </a:bodyPr>
+          <a:lstStyle/>
+          <a:p>
+            <a:pPr algn="ctr"/>
+            <a:r>
+              <a:rPr sz="1000" b="1">
                 <a:solidFill>
                   <a:srgbClr val="FFFFFF"/>
                 </a:solidFill>
               </a:rPr>
-              <a:t>B  +2</a:t>
-            </a:r>
-          </a:p>
-        </p:txBody>
-      </p:sp>
-      <p:sp>
-        <p:nvSpPr>
-          <p:cNvPr id="26" name="TextBox 25"/>
-          <p:cNvSpPr txBox="1"/>
-          <p:nvPr/>
-        </p:nvSpPr>
-        <p:spPr>
-          <a:xfrm>
-            <a:off x="658368" y="4873752"/>
-            <a:ext cx="9418320" cy="320040"/>
+              <a:t>C  +1</a:t>
+            </a:r>
+          </a:p>
+        </p:txBody>
+      </p:sp>
+      <p:sp>
+        <p:nvSpPr>
+          <p:cNvPr id="33" name="TextBox 32"/>
+          <p:cNvSpPr txBox="1"/>
+          <p:nvPr/>
+        </p:nvSpPr>
+        <p:spPr>
+          <a:xfrm>
+            <a:off x="658368" y="4407407"/>
+            <a:ext cx="9418320" cy="292608"/>
           </a:xfrm>
           <a:prstGeom prst="rect">
             <a:avLst/>
@@ -4384,26 +4659,26 @@
           <a:p>
             <a:pPr algn="l"/>
             <a:r>
-              <a:rPr sz="1300" b="1">
+              <a:rPr sz="1200" b="1">
                 <a:solidFill>
                   <a:srgbClr val="3F51B5"/>
                 </a:solidFill>
               </a:rPr>
-              <a:t>기법 3  —  단계별 보고 방식</a:t>
-            </a:r>
-          </a:p>
-        </p:txBody>
-      </p:sp>
-      <p:sp>
-        <p:nvSpPr>
-          <p:cNvPr id="27" name="TextBox 26"/>
-          <p:cNvSpPr txBox="1"/>
-          <p:nvPr/>
-        </p:nvSpPr>
-        <p:spPr>
-          <a:xfrm>
-            <a:off x="658368" y="5367528"/>
-            <a:ext cx="10789920" cy="896112"/>
+              <a:t>LLM Wiki  —  암묵지 운영  (notes/llm-wiki.md · 11개 항목)</a:t>
+            </a:r>
+          </a:p>
+        </p:txBody>
+      </p:sp>
+      <p:sp>
+        <p:nvSpPr>
+          <p:cNvPr id="34" name="TextBox 33"/>
+          <p:cNvSpPr txBox="1"/>
+          <p:nvPr/>
+        </p:nvSpPr>
+        <p:spPr>
+          <a:xfrm>
+            <a:off x="658368" y="4800600"/>
+            <a:ext cx="10789920" cy="530352"/>
           </a:xfrm>
           <a:prstGeom prst="rect">
             <a:avLst/>
@@ -4418,13 +4693,288 @@
           <a:p>
             <a:pPr algn="l"/>
             <a:r>
-              <a:rPr sz="1200" b="0">
+              <a:rPr sz="1000" b="0">
                 <a:solidFill>
                   <a:srgbClr val="212121"/>
                 </a:solidFill>
               </a:rPr>
-              <a:t>각 구현 단계 완료 후 AI에게 결과 보고받기 → 코드 이해도 유지
-"방금 만든 기능을 3줄로 설명해줘" → 내용 이해 후 다음 단계 진행  ·  Q&amp;A 즉답 가능</a:t>
+              <a:t>개발 중 배운 AI 사용 인사이트 직접 기록
+Flutter 실행 환경 / 에이전트 호출법 / ADR 개념 / python-pptx 단위 변환 등</a:t>
+            </a:r>
+          </a:p>
+        </p:txBody>
+      </p:sp>
+      <p:sp>
+        <p:nvSpPr>
+          <p:cNvPr id="35" name="Rectangle 34"/>
+          <p:cNvSpPr/>
+          <p:nvPr/>
+        </p:nvSpPr>
+        <p:spPr>
+          <a:xfrm>
+            <a:off x="457200" y="5486400"/>
+            <a:ext cx="11247120" cy="1024128"/>
+          </a:xfrm>
+          <a:prstGeom prst="rect">
+            <a:avLst/>
+          </a:prstGeom>
+          <a:noFill/>
+          <a:ln w="10160">
+            <a:solidFill>
+              <a:srgbClr val="E0E0E0"/>
+            </a:solidFill>
+          </a:ln>
+        </p:spPr>
+        <p:style>
+          <a:lnRef idx="1">
+            <a:schemeClr val="accent1"/>
+          </a:lnRef>
+          <a:fillRef idx="3">
+            <a:schemeClr val="accent1"/>
+          </a:fillRef>
+          <a:effectRef idx="2">
+            <a:schemeClr val="accent1"/>
+          </a:effectRef>
+          <a:fontRef idx="minor">
+            <a:schemeClr val="lt1"/>
+          </a:fontRef>
+        </p:style>
+        <p:txBody>
+          <a:bodyPr rtlCol="0" anchor="ctr"/>
+          <a:lstStyle/>
+          <a:p>
+            <a:pPr algn="ctr"/>
+          </a:p>
+        </p:txBody>
+      </p:sp>
+      <p:sp>
+        <p:nvSpPr>
+          <p:cNvPr id="36" name="Rectangle 35"/>
+          <p:cNvSpPr/>
+          <p:nvPr/>
+        </p:nvSpPr>
+        <p:spPr>
+          <a:xfrm>
+            <a:off x="457200" y="5486400"/>
+            <a:ext cx="54864" cy="1024128"/>
+          </a:xfrm>
+          <a:prstGeom prst="rect">
+            <a:avLst/>
+          </a:prstGeom>
+          <a:solidFill>
+            <a:srgbClr val="6A1B9A"/>
+          </a:solidFill>
+          <a:ln>
+            <a:noFill/>
+          </a:ln>
+        </p:spPr>
+        <p:style>
+          <a:lnRef idx="1">
+            <a:schemeClr val="accent1"/>
+          </a:lnRef>
+          <a:fillRef idx="3">
+            <a:schemeClr val="accent1"/>
+          </a:fillRef>
+          <a:effectRef idx="2">
+            <a:schemeClr val="accent1"/>
+          </a:effectRef>
+          <a:fontRef idx="minor">
+            <a:schemeClr val="lt1"/>
+          </a:fontRef>
+        </p:style>
+        <p:txBody>
+          <a:bodyPr rtlCol="0" anchor="ctr"/>
+          <a:lstStyle/>
+          <a:p>
+            <a:pPr algn="ctr"/>
+          </a:p>
+        </p:txBody>
+      </p:sp>
+      <p:sp>
+        <p:nvSpPr>
+          <p:cNvPr id="37" name="Rectangle 36"/>
+          <p:cNvSpPr/>
+          <p:nvPr/>
+        </p:nvSpPr>
+        <p:spPr>
+          <a:xfrm>
+            <a:off x="457200" y="5486400"/>
+            <a:ext cx="11247120" cy="365760"/>
+          </a:xfrm>
+          <a:prstGeom prst="rect">
+            <a:avLst/>
+          </a:prstGeom>
+          <a:solidFill>
+            <a:srgbClr val="F5F5F5"/>
+          </a:solidFill>
+          <a:ln>
+            <a:noFill/>
+          </a:ln>
+        </p:spPr>
+        <p:style>
+          <a:lnRef idx="1">
+            <a:schemeClr val="accent1"/>
+          </a:lnRef>
+          <a:fillRef idx="3">
+            <a:schemeClr val="accent1"/>
+          </a:fillRef>
+          <a:effectRef idx="2">
+            <a:schemeClr val="accent1"/>
+          </a:effectRef>
+          <a:fontRef idx="minor">
+            <a:schemeClr val="lt1"/>
+          </a:fontRef>
+        </p:style>
+        <p:txBody>
+          <a:bodyPr rtlCol="0" anchor="ctr"/>
+          <a:lstStyle/>
+          <a:p>
+            <a:pPr algn="ctr"/>
+          </a:p>
+        </p:txBody>
+      </p:sp>
+      <p:sp>
+        <p:nvSpPr>
+          <p:cNvPr id="38" name="Rectangle 37"/>
+          <p:cNvSpPr/>
+          <p:nvPr/>
+        </p:nvSpPr>
+        <p:spPr>
+          <a:xfrm>
+            <a:off x="10241280" y="5532120"/>
+            <a:ext cx="1234440" cy="274320"/>
+          </a:xfrm>
+          <a:prstGeom prst="rect">
+            <a:avLst/>
+          </a:prstGeom>
+          <a:solidFill>
+            <a:srgbClr val="6A1B9A"/>
+          </a:solidFill>
+          <a:ln>
+            <a:noFill/>
+          </a:ln>
+        </p:spPr>
+        <p:style>
+          <a:lnRef idx="1">
+            <a:schemeClr val="accent1"/>
+          </a:lnRef>
+          <a:fillRef idx="3">
+            <a:schemeClr val="accent1"/>
+          </a:fillRef>
+          <a:effectRef idx="2">
+            <a:schemeClr val="accent1"/>
+          </a:effectRef>
+          <a:fontRef idx="minor">
+            <a:schemeClr val="lt1"/>
+          </a:fontRef>
+        </p:style>
+        <p:txBody>
+          <a:bodyPr rtlCol="0" anchor="ctr"/>
+          <a:lstStyle/>
+          <a:p>
+            <a:pPr algn="ctr"/>
+          </a:p>
+        </p:txBody>
+      </p:sp>
+      <p:sp>
+        <p:nvSpPr>
+          <p:cNvPr id="39" name="TextBox 38"/>
+          <p:cNvSpPr txBox="1"/>
+          <p:nvPr/>
+        </p:nvSpPr>
+        <p:spPr>
+          <a:xfrm>
+            <a:off x="10241280" y="5532120"/>
+            <a:ext cx="1234440" cy="274320"/>
+          </a:xfrm>
+          <a:prstGeom prst="rect">
+            <a:avLst/>
+          </a:prstGeom>
+          <a:noFill/>
+        </p:spPr>
+        <p:txBody>
+          <a:bodyPr wrap="square">
+            <a:spAutoFit/>
+          </a:bodyPr>
+          <a:lstStyle/>
+          <a:p>
+            <a:pPr algn="ctr"/>
+            <a:r>
+              <a:rPr sz="1000" b="1">
+                <a:solidFill>
+                  <a:srgbClr val="FFFFFF"/>
+                </a:solidFill>
+              </a:rPr>
+              <a:t>D  +2</a:t>
+            </a:r>
+          </a:p>
+        </p:txBody>
+      </p:sp>
+      <p:sp>
+        <p:nvSpPr>
+          <p:cNvPr id="40" name="TextBox 39"/>
+          <p:cNvSpPr txBox="1"/>
+          <p:nvPr/>
+        </p:nvSpPr>
+        <p:spPr>
+          <a:xfrm>
+            <a:off x="658368" y="5532120"/>
+            <a:ext cx="9418320" cy="292608"/>
+          </a:xfrm>
+          <a:prstGeom prst="rect">
+            <a:avLst/>
+          </a:prstGeom>
+          <a:noFill/>
+        </p:spPr>
+        <p:txBody>
+          <a:bodyPr wrap="square">
+            <a:spAutoFit/>
+          </a:bodyPr>
+          <a:lstStyle/>
+          <a:p>
+            <a:pPr algn="l"/>
+            <a:r>
+              <a:rPr sz="1200" b="1">
+                <a:solidFill>
+                  <a:srgbClr val="3F51B5"/>
+                </a:solidFill>
+              </a:rPr>
+              <a:t>AI Agent 리포트  —  이 발표에서 Claude Code 활용 사례 직접 발표</a:t>
+            </a:r>
+          </a:p>
+        </p:txBody>
+      </p:sp>
+      <p:sp>
+        <p:nvSpPr>
+          <p:cNvPr id="41" name="TextBox 40"/>
+          <p:cNvSpPr txBox="1"/>
+          <p:nvPr/>
+        </p:nvSpPr>
+        <p:spPr>
+          <a:xfrm>
+            <a:off x="658368" y="5925312"/>
+            <a:ext cx="10789920" cy="530352"/>
+          </a:xfrm>
+          <a:prstGeom prst="rect">
+            <a:avLst/>
+          </a:prstGeom>
+          <a:noFill/>
+        </p:spPr>
+        <p:txBody>
+          <a:bodyPr wrap="square">
+            <a:spAutoFit/>
+          </a:bodyPr>
+          <a:lstStyle/>
+          <a:p>
+            <a:pPr algn="l"/>
+            <a:r>
+              <a:rPr sz="1000" b="0">
+                <a:solidFill>
+                  <a:srgbClr val="212121"/>
+                </a:solidFill>
+              </a:rPr>
+              <a:t>Claude Code(Anthropic, 2024~)로 서브에이전트 제작 · 커스텀 명령어 운영 · 단계별 보고 방식 수행
+최근 6개월 이내 지속 업데이트 도구 · 출처: claude.ai/code  (공식 문서)</a:t>
             </a:r>
           </a:p>
         </p:txBody>
@@ -15562,8 +16112,8 @@
         </p:nvSpPr>
         <p:spPr>
           <a:xfrm>
-            <a:off x="457200" y="1005840"/>
-            <a:ext cx="11247120" cy="1143000"/>
+            <a:off x="457200" y="987552"/>
+            <a:ext cx="11247120" cy="1024128"/>
           </a:xfrm>
           <a:prstGeom prst="rect">
             <a:avLst/>
@@ -15605,8 +16155,8 @@
         </p:nvSpPr>
         <p:spPr>
           <a:xfrm>
-            <a:off x="457200" y="1005840"/>
-            <a:ext cx="54864" cy="1143000"/>
+            <a:off x="457200" y="987552"/>
+            <a:ext cx="54864" cy="1024128"/>
           </a:xfrm>
           <a:prstGeom prst="rect">
             <a:avLst/>
@@ -15648,8 +16198,8 @@
         </p:nvSpPr>
         <p:spPr>
           <a:xfrm>
-            <a:off x="457200" y="1005840"/>
-            <a:ext cx="11247120" cy="402336"/>
+            <a:off x="457200" y="987552"/>
+            <a:ext cx="11247120" cy="365760"/>
           </a:xfrm>
           <a:prstGeom prst="rect">
             <a:avLst/>
@@ -15691,8 +16241,8 @@
         </p:nvSpPr>
         <p:spPr>
           <a:xfrm>
-            <a:off x="10241280" y="1060704"/>
-            <a:ext cx="1234440" cy="292608"/>
+            <a:off x="10241280" y="1033272"/>
+            <a:ext cx="1234440" cy="274320"/>
           </a:xfrm>
           <a:prstGeom prst="rect">
             <a:avLst/>
@@ -15734,23 +16284,23 @@
         </p:nvSpPr>
         <p:spPr>
           <a:xfrm>
-            <a:off x="10241280" y="1060704"/>
-            <a:ext cx="1234440" cy="292608"/>
-          </a:xfrm>
-          <a:prstGeom prst="rect">
-            <a:avLst/>
-          </a:prstGeom>
-          <a:noFill/>
-        </p:spPr>
-        <p:txBody>
-          <a:bodyPr wrap="square">
-            <a:spAutoFit/>
-          </a:bodyPr>
-          <a:lstStyle/>
-          <a:p>
-            <a:pPr algn="ctr"/>
-            <a:r>
-              <a:rPr sz="1100" b="1">
+            <a:off x="10241280" y="1033272"/>
+            <a:ext cx="1234440" cy="274320"/>
+          </a:xfrm>
+          <a:prstGeom prst="rect">
+            <a:avLst/>
+          </a:prstGeom>
+          <a:noFill/>
+        </p:spPr>
+        <p:txBody>
+          <a:bodyPr wrap="square">
+            <a:spAutoFit/>
+          </a:bodyPr>
+          <a:lstStyle/>
+          <a:p>
+            <a:pPr algn="ctr"/>
+            <a:r>
+              <a:rPr sz="1000" b="1">
                 <a:solidFill>
                   <a:srgbClr val="FFFFFF"/>
                 </a:solidFill>
@@ -15768,8 +16318,8 @@
         </p:nvSpPr>
         <p:spPr>
           <a:xfrm>
-            <a:off x="658368" y="1060704"/>
-            <a:ext cx="9418320" cy="320040"/>
+            <a:off x="658368" y="1033272"/>
+            <a:ext cx="9418320" cy="292608"/>
           </a:xfrm>
           <a:prstGeom prst="rect">
             <a:avLst/>
@@ -15784,7 +16334,7 @@
           <a:p>
             <a:pPr algn="l"/>
             <a:r>
-              <a:rPr sz="1300" b="1">
+              <a:rPr sz="1200" b="1">
                 <a:solidFill>
                   <a:srgbClr val="3F51B5"/>
                 </a:solidFill>
@@ -15802,8 +16352,8 @@
         </p:nvSpPr>
         <p:spPr>
           <a:xfrm>
-            <a:off x="658368" y="1499616"/>
-            <a:ext cx="10789920" cy="594360"/>
+            <a:off x="658368" y="1426464"/>
+            <a:ext cx="10789920" cy="530352"/>
           </a:xfrm>
           <a:prstGeom prst="rect">
             <a:avLst/>
@@ -15818,7 +16368,7 @@
           <a:p>
             <a:pPr algn="l"/>
             <a:r>
-              <a:rPr sz="1100" b="0">
+              <a:rPr sz="1000" b="0">
                 <a:solidFill>
                   <a:srgbClr val="212121"/>
                 </a:solidFill>
@@ -15837,8 +16387,8 @@
         </p:nvSpPr>
         <p:spPr>
           <a:xfrm>
-            <a:off x="457200" y="2267712"/>
-            <a:ext cx="11247120" cy="1143000"/>
+            <a:off x="457200" y="2112264"/>
+            <a:ext cx="11247120" cy="1024128"/>
           </a:xfrm>
           <a:prstGeom prst="rect">
             <a:avLst/>
@@ -15880,8 +16430,8 @@
         </p:nvSpPr>
         <p:spPr>
           <a:xfrm>
-            <a:off x="457200" y="2267712"/>
-            <a:ext cx="54864" cy="1143000"/>
+            <a:off x="457200" y="2112264"/>
+            <a:ext cx="54864" cy="1024128"/>
           </a:xfrm>
           <a:prstGeom prst="rect">
             <a:avLst/>
@@ -15923,8 +16473,8 @@
         </p:nvSpPr>
         <p:spPr>
           <a:xfrm>
-            <a:off x="457200" y="2267712"/>
-            <a:ext cx="11247120" cy="402336"/>
+            <a:off x="457200" y="2112264"/>
+            <a:ext cx="11247120" cy="365760"/>
           </a:xfrm>
           <a:prstGeom prst="rect">
             <a:avLst/>
@@ -15966,8 +16516,8 @@
         </p:nvSpPr>
         <p:spPr>
           <a:xfrm>
-            <a:off x="10241280" y="2322576"/>
-            <a:ext cx="1234440" cy="292608"/>
+            <a:off x="10241280" y="2157984"/>
+            <a:ext cx="1234440" cy="274320"/>
           </a:xfrm>
           <a:prstGeom prst="rect">
             <a:avLst/>
@@ -16009,23 +16559,23 @@
         </p:nvSpPr>
         <p:spPr>
           <a:xfrm>
-            <a:off x="10241280" y="2322576"/>
-            <a:ext cx="1234440" cy="292608"/>
-          </a:xfrm>
-          <a:prstGeom prst="rect">
-            <a:avLst/>
-          </a:prstGeom>
-          <a:noFill/>
-        </p:spPr>
-        <p:txBody>
-          <a:bodyPr wrap="square">
-            <a:spAutoFit/>
-          </a:bodyPr>
-          <a:lstStyle/>
-          <a:p>
-            <a:pPr algn="ctr"/>
-            <a:r>
-              <a:rPr sz="1100" b="1">
+            <a:off x="10241280" y="2157984"/>
+            <a:ext cx="1234440" cy="274320"/>
+          </a:xfrm>
+          <a:prstGeom prst="rect">
+            <a:avLst/>
+          </a:prstGeom>
+          <a:noFill/>
+        </p:spPr>
+        <p:txBody>
+          <a:bodyPr wrap="square">
+            <a:spAutoFit/>
+          </a:bodyPr>
+          <a:lstStyle/>
+          <a:p>
+            <a:pPr algn="ctr"/>
+            <a:r>
+              <a:rPr sz="1000" b="1">
                 <a:solidFill>
                   <a:srgbClr val="FFFFFF"/>
                 </a:solidFill>
@@ -16043,8 +16593,8 @@
         </p:nvSpPr>
         <p:spPr>
           <a:xfrm>
-            <a:off x="658368" y="2322576"/>
-            <a:ext cx="9418320" cy="320040"/>
+            <a:off x="658368" y="2157984"/>
+            <a:ext cx="9418320" cy="292608"/>
           </a:xfrm>
           <a:prstGeom prst="rect">
             <a:avLst/>
@@ -16059,12 +16609,12 @@
           <a:p>
             <a:pPr algn="l"/>
             <a:r>
-              <a:rPr sz="1300" b="1">
+              <a:rPr sz="1200" b="1">
                 <a:solidFill>
                   <a:srgbClr val="3F51B5"/>
                 </a:solidFill>
               </a:rPr>
-              <a:t>기법 1  —  단일 md 부트스트랩</a:t>
+              <a:t>기법 1  —  단일 md 부트스트랩  (AUTHORING.Jooseonghyeon.v0.1.0.md)</a:t>
             </a:r>
           </a:p>
         </p:txBody>
@@ -16077,8 +16627,8 @@
         </p:nvSpPr>
         <p:spPr>
           <a:xfrm>
-            <a:off x="658368" y="2761488"/>
-            <a:ext cx="10789920" cy="594360"/>
+            <a:off x="658368" y="2551176"/>
+            <a:ext cx="10789920" cy="530352"/>
           </a:xfrm>
           <a:prstGeom prst="rect">
             <a:avLst/>
@@ -16093,12 +16643,12 @@
           <a:p>
             <a:pPr algn="l"/>
             <a:r>
-              <a:rPr sz="1100" b="0">
+              <a:rPr sz="1000" b="0">
                 <a:solidFill>
                   <a:srgbClr val="212121"/>
                 </a:solidFill>
               </a:rPr>
-              <a:t>AUTHORING.Jooseonghyeon.v0.1.0.md 하나로 Rules · Skills · Commands 전체 자동 세팅
+              <a:t>Rules · Skills · Commands 전체를 파일 하나로 자동 세팅
 새 프로젝트에 이 파일 하나만 주면 AI 운영 체계 즉시 구성</a:t>
             </a:r>
           </a:p>
@@ -16112,8 +16662,8 @@
         </p:nvSpPr>
         <p:spPr>
           <a:xfrm>
-            <a:off x="457200" y="3529584"/>
-            <a:ext cx="11247120" cy="1143000"/>
+            <a:off x="457200" y="3236976"/>
+            <a:ext cx="11247120" cy="1024128"/>
           </a:xfrm>
           <a:prstGeom prst="rect">
             <a:avLst/>
@@ -16155,8 +16705,8 @@
         </p:nvSpPr>
         <p:spPr>
           <a:xfrm>
-            <a:off x="457200" y="3529584"/>
-            <a:ext cx="54864" cy="1143000"/>
+            <a:off x="457200" y="3236976"/>
+            <a:ext cx="54864" cy="1024128"/>
           </a:xfrm>
           <a:prstGeom prst="rect">
             <a:avLst/>
@@ -16198,8 +16748,8 @@
         </p:nvSpPr>
         <p:spPr>
           <a:xfrm>
-            <a:off x="457200" y="3529584"/>
-            <a:ext cx="11247120" cy="402336"/>
+            <a:off x="457200" y="3236976"/>
+            <a:ext cx="11247120" cy="365760"/>
           </a:xfrm>
           <a:prstGeom prst="rect">
             <a:avLst/>
@@ -16241,8 +16791,8 @@
         </p:nvSpPr>
         <p:spPr>
           <a:xfrm>
-            <a:off x="10241280" y="3584448"/>
-            <a:ext cx="1234440" cy="292608"/>
+            <a:off x="10241280" y="3282696"/>
+            <a:ext cx="1234440" cy="274320"/>
           </a:xfrm>
           <a:prstGeom prst="rect">
             <a:avLst/>
@@ -16284,23 +16834,23 @@
         </p:nvSpPr>
         <p:spPr>
           <a:xfrm>
-            <a:off x="10241280" y="3584448"/>
-            <a:ext cx="1234440" cy="292608"/>
-          </a:xfrm>
-          <a:prstGeom prst="rect">
-            <a:avLst/>
-          </a:prstGeom>
-          <a:noFill/>
-        </p:spPr>
-        <p:txBody>
-          <a:bodyPr wrap="square">
-            <a:spAutoFit/>
-          </a:bodyPr>
-          <a:lstStyle/>
-          <a:p>
-            <a:pPr algn="ctr"/>
-            <a:r>
-              <a:rPr sz="1100" b="1">
+            <a:off x="10241280" y="3282696"/>
+            <a:ext cx="1234440" cy="274320"/>
+          </a:xfrm>
+          <a:prstGeom prst="rect">
+            <a:avLst/>
+          </a:prstGeom>
+          <a:noFill/>
+        </p:spPr>
+        <p:txBody>
+          <a:bodyPr wrap="square">
+            <a:spAutoFit/>
+          </a:bodyPr>
+          <a:lstStyle/>
+          <a:p>
+            <a:pPr algn="ctr"/>
+            <a:r>
+              <a:rPr sz="1000" b="1">
                 <a:solidFill>
                   <a:srgbClr val="FFFFFF"/>
                 </a:solidFill>
@@ -16318,8 +16868,8 @@
         </p:nvSpPr>
         <p:spPr>
           <a:xfrm>
-            <a:off x="658368" y="3584448"/>
-            <a:ext cx="9418320" cy="320040"/>
+            <a:off x="658368" y="3282696"/>
+            <a:ext cx="9418320" cy="292608"/>
           </a:xfrm>
           <a:prstGeom prst="rect">
             <a:avLst/>
@@ -16334,7 +16884,7 @@
           <a:p>
             <a:pPr algn="l"/>
             <a:r>
-              <a:rPr sz="1300" b="1">
+              <a:rPr sz="1200" b="1">
                 <a:solidFill>
                   <a:srgbClr val="3F51B5"/>
                 </a:solidFill>
@@ -16352,8 +16902,8 @@
         </p:nvSpPr>
         <p:spPr>
           <a:xfrm>
-            <a:off x="658368" y="4023360"/>
-            <a:ext cx="10789920" cy="594360"/>
+            <a:off x="658368" y="3675887"/>
+            <a:ext cx="10789920" cy="530352"/>
           </a:xfrm>
           <a:prstGeom prst="rect">
             <a:avLst/>
@@ -16368,7 +16918,7 @@
           <a:p>
             <a:pPr algn="l"/>
             <a:r>
-              <a:rPr sz="1100" b="0">
+              <a:rPr sz="1000" b="0">
                 <a:solidFill>
                   <a:srgbClr val="212121"/>
                 </a:solidFill>
@@ -16387,8 +16937,8 @@
         </p:nvSpPr>
         <p:spPr>
           <a:xfrm>
-            <a:off x="457200" y="4791456"/>
-            <a:ext cx="11247120" cy="1143000"/>
+            <a:off x="457200" y="4361688"/>
+            <a:ext cx="11247120" cy="1024128"/>
           </a:xfrm>
           <a:prstGeom prst="rect">
             <a:avLst/>
@@ -16430,8 +16980,8 @@
         </p:nvSpPr>
         <p:spPr>
           <a:xfrm>
-            <a:off x="457200" y="4791456"/>
-            <a:ext cx="54864" cy="1143000"/>
+            <a:off x="457200" y="4361688"/>
+            <a:ext cx="54864" cy="1024128"/>
           </a:xfrm>
           <a:prstGeom prst="rect">
             <a:avLst/>
@@ -16473,8 +17023,8 @@
         </p:nvSpPr>
         <p:spPr>
           <a:xfrm>
-            <a:off x="457200" y="4791456"/>
-            <a:ext cx="11247120" cy="402336"/>
+            <a:off x="457200" y="4361688"/>
+            <a:ext cx="11247120" cy="365760"/>
           </a:xfrm>
           <a:prstGeom prst="rect">
             <a:avLst/>
@@ -16516,8 +17066,8 @@
         </p:nvSpPr>
         <p:spPr>
           <a:xfrm>
-            <a:off x="10241280" y="4846320"/>
-            <a:ext cx="1234440" cy="292608"/>
+            <a:off x="10241280" y="4407407"/>
+            <a:ext cx="1234440" cy="274320"/>
           </a:xfrm>
           <a:prstGeom prst="rect">
             <a:avLst/>
@@ -16559,23 +17109,23 @@
         </p:nvSpPr>
         <p:spPr>
           <a:xfrm>
-            <a:off x="10241280" y="4846320"/>
-            <a:ext cx="1234440" cy="292608"/>
-          </a:xfrm>
-          <a:prstGeom prst="rect">
-            <a:avLst/>
-          </a:prstGeom>
-          <a:noFill/>
-        </p:spPr>
-        <p:txBody>
-          <a:bodyPr wrap="square">
-            <a:spAutoFit/>
-          </a:bodyPr>
-          <a:lstStyle/>
-          <a:p>
-            <a:pPr algn="ctr"/>
-            <a:r>
-              <a:rPr sz="1100" b="1">
+            <a:off x="10241280" y="4407407"/>
+            <a:ext cx="1234440" cy="274320"/>
+          </a:xfrm>
+          <a:prstGeom prst="rect">
+            <a:avLst/>
+          </a:prstGeom>
+          <a:noFill/>
+        </p:spPr>
+        <p:txBody>
+          <a:bodyPr wrap="square">
+            <a:spAutoFit/>
+          </a:bodyPr>
+          <a:lstStyle/>
+          <a:p>
+            <a:pPr algn="ctr"/>
+            <a:r>
+              <a:rPr sz="1000" b="1">
                 <a:solidFill>
                   <a:srgbClr val="FFFFFF"/>
                 </a:solidFill>
@@ -16593,8 +17143,8 @@
         </p:nvSpPr>
         <p:spPr>
           <a:xfrm>
-            <a:off x="658368" y="4846320"/>
-            <a:ext cx="9418320" cy="320040"/>
+            <a:off x="658368" y="4407407"/>
+            <a:ext cx="9418320" cy="292608"/>
           </a:xfrm>
           <a:prstGeom prst="rect">
             <a:avLst/>
@@ -16609,12 +17159,12 @@
           <a:p>
             <a:pPr algn="l"/>
             <a:r>
-              <a:rPr sz="1300" b="1">
+              <a:rPr sz="1200" b="1">
                 <a:solidFill>
                   <a:srgbClr val="3F51B5"/>
                 </a:solidFill>
               </a:rPr>
-              <a:t>LLM Wiki  —  암묵지 운영  (notes/llm-wiki.md)</a:t>
+              <a:t>LLM Wiki  —  암묵지 운영  (notes/llm-wiki.md · 11개 항목)</a:t>
             </a:r>
           </a:p>
         </p:txBody>
@@ -16627,8 +17177,8 @@
         </p:nvSpPr>
         <p:spPr>
           <a:xfrm>
-            <a:off x="658368" y="5285232"/>
-            <a:ext cx="10789920" cy="594360"/>
+            <a:off x="658368" y="4800600"/>
+            <a:ext cx="10789920" cy="530352"/>
           </a:xfrm>
           <a:prstGeom prst="rect">
             <a:avLst/>
@@ -16643,13 +17193,288 @@
           <a:p>
             <a:pPr algn="l"/>
             <a:r>
-              <a:rPr sz="1100" b="0">
+              <a:rPr sz="1000" b="0">
                 <a:solidFill>
                   <a:srgbClr val="212121"/>
                 </a:solidFill>
               </a:rPr>
-              <a:t>개발 중 배운 AI 사용 인사이트 11개 항목 직접 기록
+              <a:t>개발 중 배운 AI 사용 인사이트 직접 기록
 Flutter 실행 환경 / 에이전트 호출법 / ADR 개념 / python-pptx 단위 변환 등</a:t>
+            </a:r>
+          </a:p>
+        </p:txBody>
+      </p:sp>
+      <p:sp>
+        <p:nvSpPr>
+          <p:cNvPr id="35" name="Rectangle 34"/>
+          <p:cNvSpPr/>
+          <p:nvPr/>
+        </p:nvSpPr>
+        <p:spPr>
+          <a:xfrm>
+            <a:off x="457200" y="5486400"/>
+            <a:ext cx="11247120" cy="1024128"/>
+          </a:xfrm>
+          <a:prstGeom prst="rect">
+            <a:avLst/>
+          </a:prstGeom>
+          <a:noFill/>
+          <a:ln w="10160">
+            <a:solidFill>
+              <a:srgbClr val="E0E0E0"/>
+            </a:solidFill>
+          </a:ln>
+        </p:spPr>
+        <p:style>
+          <a:lnRef idx="1">
+            <a:schemeClr val="accent1"/>
+          </a:lnRef>
+          <a:fillRef idx="3">
+            <a:schemeClr val="accent1"/>
+          </a:fillRef>
+          <a:effectRef idx="2">
+            <a:schemeClr val="accent1"/>
+          </a:effectRef>
+          <a:fontRef idx="minor">
+            <a:schemeClr val="lt1"/>
+          </a:fontRef>
+        </p:style>
+        <p:txBody>
+          <a:bodyPr rtlCol="0" anchor="ctr"/>
+          <a:lstStyle/>
+          <a:p>
+            <a:pPr algn="ctr"/>
+          </a:p>
+        </p:txBody>
+      </p:sp>
+      <p:sp>
+        <p:nvSpPr>
+          <p:cNvPr id="36" name="Rectangle 35"/>
+          <p:cNvSpPr/>
+          <p:nvPr/>
+        </p:nvSpPr>
+        <p:spPr>
+          <a:xfrm>
+            <a:off x="457200" y="5486400"/>
+            <a:ext cx="54864" cy="1024128"/>
+          </a:xfrm>
+          <a:prstGeom prst="rect">
+            <a:avLst/>
+          </a:prstGeom>
+          <a:solidFill>
+            <a:srgbClr val="6A1B9A"/>
+          </a:solidFill>
+          <a:ln>
+            <a:noFill/>
+          </a:ln>
+        </p:spPr>
+        <p:style>
+          <a:lnRef idx="1">
+            <a:schemeClr val="accent1"/>
+          </a:lnRef>
+          <a:fillRef idx="3">
+            <a:schemeClr val="accent1"/>
+          </a:fillRef>
+          <a:effectRef idx="2">
+            <a:schemeClr val="accent1"/>
+          </a:effectRef>
+          <a:fontRef idx="minor">
+            <a:schemeClr val="lt1"/>
+          </a:fontRef>
+        </p:style>
+        <p:txBody>
+          <a:bodyPr rtlCol="0" anchor="ctr"/>
+          <a:lstStyle/>
+          <a:p>
+            <a:pPr algn="ctr"/>
+          </a:p>
+        </p:txBody>
+      </p:sp>
+      <p:sp>
+        <p:nvSpPr>
+          <p:cNvPr id="37" name="Rectangle 36"/>
+          <p:cNvSpPr/>
+          <p:nvPr/>
+        </p:nvSpPr>
+        <p:spPr>
+          <a:xfrm>
+            <a:off x="457200" y="5486400"/>
+            <a:ext cx="11247120" cy="365760"/>
+          </a:xfrm>
+          <a:prstGeom prst="rect">
+            <a:avLst/>
+          </a:prstGeom>
+          <a:solidFill>
+            <a:srgbClr val="F5F5F5"/>
+          </a:solidFill>
+          <a:ln>
+            <a:noFill/>
+          </a:ln>
+        </p:spPr>
+        <p:style>
+          <a:lnRef idx="1">
+            <a:schemeClr val="accent1"/>
+          </a:lnRef>
+          <a:fillRef idx="3">
+            <a:schemeClr val="accent1"/>
+          </a:fillRef>
+          <a:effectRef idx="2">
+            <a:schemeClr val="accent1"/>
+          </a:effectRef>
+          <a:fontRef idx="minor">
+            <a:schemeClr val="lt1"/>
+          </a:fontRef>
+        </p:style>
+        <p:txBody>
+          <a:bodyPr rtlCol="0" anchor="ctr"/>
+          <a:lstStyle/>
+          <a:p>
+            <a:pPr algn="ctr"/>
+          </a:p>
+        </p:txBody>
+      </p:sp>
+      <p:sp>
+        <p:nvSpPr>
+          <p:cNvPr id="38" name="Rectangle 37"/>
+          <p:cNvSpPr/>
+          <p:nvPr/>
+        </p:nvSpPr>
+        <p:spPr>
+          <a:xfrm>
+            <a:off x="10241280" y="5532120"/>
+            <a:ext cx="1234440" cy="274320"/>
+          </a:xfrm>
+          <a:prstGeom prst="rect">
+            <a:avLst/>
+          </a:prstGeom>
+          <a:solidFill>
+            <a:srgbClr val="6A1B9A"/>
+          </a:solidFill>
+          <a:ln>
+            <a:noFill/>
+          </a:ln>
+        </p:spPr>
+        <p:style>
+          <a:lnRef idx="1">
+            <a:schemeClr val="accent1"/>
+          </a:lnRef>
+          <a:fillRef idx="3">
+            <a:schemeClr val="accent1"/>
+          </a:fillRef>
+          <a:effectRef idx="2">
+            <a:schemeClr val="accent1"/>
+          </a:effectRef>
+          <a:fontRef idx="minor">
+            <a:schemeClr val="lt1"/>
+          </a:fontRef>
+        </p:style>
+        <p:txBody>
+          <a:bodyPr rtlCol="0" anchor="ctr"/>
+          <a:lstStyle/>
+          <a:p>
+            <a:pPr algn="ctr"/>
+          </a:p>
+        </p:txBody>
+      </p:sp>
+      <p:sp>
+        <p:nvSpPr>
+          <p:cNvPr id="39" name="TextBox 38"/>
+          <p:cNvSpPr txBox="1"/>
+          <p:nvPr/>
+        </p:nvSpPr>
+        <p:spPr>
+          <a:xfrm>
+            <a:off x="10241280" y="5532120"/>
+            <a:ext cx="1234440" cy="274320"/>
+          </a:xfrm>
+          <a:prstGeom prst="rect">
+            <a:avLst/>
+          </a:prstGeom>
+          <a:noFill/>
+        </p:spPr>
+        <p:txBody>
+          <a:bodyPr wrap="square">
+            <a:spAutoFit/>
+          </a:bodyPr>
+          <a:lstStyle/>
+          <a:p>
+            <a:pPr algn="ctr"/>
+            <a:r>
+              <a:rPr sz="1000" b="1">
+                <a:solidFill>
+                  <a:srgbClr val="FFFFFF"/>
+                </a:solidFill>
+              </a:rPr>
+              <a:t>D  +2</a:t>
+            </a:r>
+          </a:p>
+        </p:txBody>
+      </p:sp>
+      <p:sp>
+        <p:nvSpPr>
+          <p:cNvPr id="40" name="TextBox 39"/>
+          <p:cNvSpPr txBox="1"/>
+          <p:nvPr/>
+        </p:nvSpPr>
+        <p:spPr>
+          <a:xfrm>
+            <a:off x="658368" y="5532120"/>
+            <a:ext cx="9418320" cy="292608"/>
+          </a:xfrm>
+          <a:prstGeom prst="rect">
+            <a:avLst/>
+          </a:prstGeom>
+          <a:noFill/>
+        </p:spPr>
+        <p:txBody>
+          <a:bodyPr wrap="square">
+            <a:spAutoFit/>
+          </a:bodyPr>
+          <a:lstStyle/>
+          <a:p>
+            <a:pPr algn="l"/>
+            <a:r>
+              <a:rPr sz="1200" b="1">
+                <a:solidFill>
+                  <a:srgbClr val="3F51B5"/>
+                </a:solidFill>
+              </a:rPr>
+              <a:t>AI Agent 리포트  —  이 발표에서 Claude Code 활용 사례 직접 발표</a:t>
+            </a:r>
+          </a:p>
+        </p:txBody>
+      </p:sp>
+      <p:sp>
+        <p:nvSpPr>
+          <p:cNvPr id="41" name="TextBox 40"/>
+          <p:cNvSpPr txBox="1"/>
+          <p:nvPr/>
+        </p:nvSpPr>
+        <p:spPr>
+          <a:xfrm>
+            <a:off x="658368" y="5925312"/>
+            <a:ext cx="10789920" cy="530352"/>
+          </a:xfrm>
+          <a:prstGeom prst="rect">
+            <a:avLst/>
+          </a:prstGeom>
+          <a:noFill/>
+        </p:spPr>
+        <p:txBody>
+          <a:bodyPr wrap="square">
+            <a:spAutoFit/>
+          </a:bodyPr>
+          <a:lstStyle/>
+          <a:p>
+            <a:pPr algn="l"/>
+            <a:r>
+              <a:rPr sz="1000" b="0">
+                <a:solidFill>
+                  <a:srgbClr val="212121"/>
+                </a:solidFill>
+              </a:rPr>
+              <a:t>Claude Code(Anthropic, 2024~)로 서브에이전트 제작 · 커스텀 명령어 운영 · 단계별 개발 수행
+최근 6개월 이내 지속 업데이트 도구 · 출처: claude.ai/code  (공식 문서)</a:t>
             </a:r>
           </a:p>
         </p:txBody>

--- a/portfolio-tracker/presentation/portfolio-tracker-final.pptx
+++ b/portfolio-tracker/presentation/portfolio-tracker-final.pptx
@@ -16022,7 +16022,7 @@
                   <a:srgbClr val="9E9E9E"/>
                 </a:solidFill>
               </a:rPr>
-              <a:t>팀원 A  ·  가산점 A+1 · B+2 · C+1</a:t>
+              <a:t>팀원 A  ·  가산점 A+1 · B+2 · C+1 · D+2</a:t>
             </a:r>
           </a:p>
         </p:txBody>

--- a/portfolio-tracker/presentation/portfolio-tracker-final.pptx
+++ b/portfolio-tracker/presentation/portfolio-tracker-final.pptx
@@ -3522,7 +3522,7 @@
                   <a:srgbClr val="9E9E9E"/>
                 </a:solidFill>
               </a:rPr>
-              <a:t>팀원 B  ·  가산점 A+1 · B+2 · C+1 · D+2</a:t>
+              <a:t>팀원 B</a:t>
             </a:r>
           </a:p>
         </p:txBody>
@@ -3656,49 +3656,6 @@
         <p:spPr>
           <a:xfrm>
             <a:off x="457200" y="987552"/>
-            <a:ext cx="54864" cy="1024128"/>
-          </a:xfrm>
-          <a:prstGeom prst="rect">
-            <a:avLst/>
-          </a:prstGeom>
-          <a:solidFill>
-            <a:srgbClr val="E65C00"/>
-          </a:solidFill>
-          <a:ln>
-            <a:noFill/>
-          </a:ln>
-        </p:spPr>
-        <p:style>
-          <a:lnRef idx="1">
-            <a:schemeClr val="accent1"/>
-          </a:lnRef>
-          <a:fillRef idx="3">
-            <a:schemeClr val="accent1"/>
-          </a:fillRef>
-          <a:effectRef idx="2">
-            <a:schemeClr val="accent1"/>
-          </a:effectRef>
-          <a:fontRef idx="minor">
-            <a:schemeClr val="lt1"/>
-          </a:fontRef>
-        </p:style>
-        <p:txBody>
-          <a:bodyPr rtlCol="0" anchor="ctr"/>
-          <a:lstStyle/>
-          <a:p>
-            <a:pPr algn="ctr"/>
-          </a:p>
-        </p:txBody>
-      </p:sp>
-      <p:sp>
-        <p:nvSpPr>
-          <p:cNvPr id="9" name="Rectangle 8"/>
-          <p:cNvSpPr/>
-          <p:nvPr/>
-        </p:nvSpPr>
-        <p:spPr>
-          <a:xfrm>
-            <a:off x="457200" y="987552"/>
             <a:ext cx="11247120" cy="365760"/>
           </a:xfrm>
           <a:prstGeom prst="rect">
@@ -3735,23 +3692,92 @@
       </p:sp>
       <p:sp>
         <p:nvSpPr>
-          <p:cNvPr id="10" name="Rectangle 9"/>
+          <p:cNvPr id="9" name="TextBox 8"/>
+          <p:cNvSpPr txBox="1"/>
+          <p:nvPr/>
+        </p:nvSpPr>
+        <p:spPr>
+          <a:xfrm>
+            <a:off x="658368" y="1033272"/>
+            <a:ext cx="10972800" cy="292608"/>
+          </a:xfrm>
+          <a:prstGeom prst="rect">
+            <a:avLst/>
+          </a:prstGeom>
+          <a:noFill/>
+        </p:spPr>
+        <p:txBody>
+          <a:bodyPr wrap="square">
+            <a:spAutoFit/>
+          </a:bodyPr>
+          <a:lstStyle/>
+          <a:p>
+            <a:pPr algn="l"/>
+            <a:r>
+              <a:rPr sz="1200" b="1">
+                <a:solidFill>
+                  <a:srgbClr val="3F51B5"/>
+                </a:solidFill>
+              </a:rPr>
+              <a:t>pre-presentation-checker 에이전트 직접 제작 + /pc 실사용</a:t>
+            </a:r>
+          </a:p>
+        </p:txBody>
+      </p:sp>
+      <p:sp>
+        <p:nvSpPr>
+          <p:cNvPr id="10" name="TextBox 9"/>
+          <p:cNvSpPr txBox="1"/>
+          <p:nvPr/>
+        </p:nvSpPr>
+        <p:spPr>
+          <a:xfrm>
+            <a:off x="658368" y="1426464"/>
+            <a:ext cx="10972800" cy="530352"/>
+          </a:xfrm>
+          <a:prstGeom prst="rect">
+            <a:avLst/>
+          </a:prstGeom>
+          <a:noFill/>
+        </p:spPr>
+        <p:txBody>
+          <a:bodyPr wrap="square">
+            <a:spAutoFit/>
+          </a:bodyPr>
+          <a:lstStyle/>
+          <a:p>
+            <a:pPr algn="l"/>
+            <a:r>
+              <a:rPr sz="1000" b="0">
+                <a:solidFill>
+                  <a:srgbClr val="212121"/>
+                </a:solidFill>
+              </a:rPr>
+              <a:t>.claude/agents/pre-presentation-checker.md  직접 제작
+발표 전 제출 서류 · 가산점 · 앱 상태를 평가 루브릭 기준으로 자동 점검 → 미완료 항목 우선 보고</a:t>
+            </a:r>
+          </a:p>
+        </p:txBody>
+      </p:sp>
+      <p:sp>
+        <p:nvSpPr>
+          <p:cNvPr id="11" name="Rectangle 10"/>
           <p:cNvSpPr/>
           <p:nvPr/>
         </p:nvSpPr>
         <p:spPr>
           <a:xfrm>
-            <a:off x="10241280" y="1033272"/>
-            <a:ext cx="1234440" cy="274320"/>
-          </a:xfrm>
-          <a:prstGeom prst="rect">
-            <a:avLst/>
-          </a:prstGeom>
-          <a:solidFill>
-            <a:srgbClr val="E65C00"/>
-          </a:solidFill>
-          <a:ln>
-            <a:noFill/>
+            <a:off x="457200" y="2112264"/>
+            <a:ext cx="11247120" cy="1024128"/>
+          </a:xfrm>
+          <a:prstGeom prst="rect">
+            <a:avLst/>
+          </a:prstGeom>
+          <a:noFill/>
+          <a:ln w="10160">
+            <a:solidFill>
+              <a:srgbClr val="E0E0E0"/>
+            </a:solidFill>
           </a:ln>
         </p:spPr>
         <p:style>
@@ -3778,196 +3804,7 @@
       </p:sp>
       <p:sp>
         <p:nvSpPr>
-          <p:cNvPr id="11" name="TextBox 10"/>
-          <p:cNvSpPr txBox="1"/>
-          <p:nvPr/>
-        </p:nvSpPr>
-        <p:spPr>
-          <a:xfrm>
-            <a:off x="10241280" y="1033272"/>
-            <a:ext cx="1234440" cy="274320"/>
-          </a:xfrm>
-          <a:prstGeom prst="rect">
-            <a:avLst/>
-          </a:prstGeom>
-          <a:noFill/>
-        </p:spPr>
-        <p:txBody>
-          <a:bodyPr wrap="square">
-            <a:spAutoFit/>
-          </a:bodyPr>
-          <a:lstStyle/>
-          <a:p>
-            <a:pPr algn="ctr"/>
-            <a:r>
-              <a:rPr sz="1000" b="1">
-                <a:solidFill>
-                  <a:srgbClr val="FFFFFF"/>
-                </a:solidFill>
-              </a:rPr>
-              <a:t>A  +1</a:t>
-            </a:r>
-          </a:p>
-        </p:txBody>
-      </p:sp>
-      <p:sp>
-        <p:nvSpPr>
-          <p:cNvPr id="12" name="TextBox 11"/>
-          <p:cNvSpPr txBox="1"/>
-          <p:nvPr/>
-        </p:nvSpPr>
-        <p:spPr>
-          <a:xfrm>
-            <a:off x="658368" y="1033272"/>
-            <a:ext cx="9418320" cy="292608"/>
-          </a:xfrm>
-          <a:prstGeom prst="rect">
-            <a:avLst/>
-          </a:prstGeom>
-          <a:noFill/>
-        </p:spPr>
-        <p:txBody>
-          <a:bodyPr wrap="square">
-            <a:spAutoFit/>
-          </a:bodyPr>
-          <a:lstStyle/>
-          <a:p>
-            <a:pPr algn="l"/>
-            <a:r>
-              <a:rPr sz="1200" b="1">
-                <a:solidFill>
-                  <a:srgbClr val="3F51B5"/>
-                </a:solidFill>
-              </a:rPr>
-              <a:t>pre-presentation-checker 에이전트 직접 제작 + /pc 실사용</a:t>
-            </a:r>
-          </a:p>
-        </p:txBody>
-      </p:sp>
-      <p:sp>
-        <p:nvSpPr>
-          <p:cNvPr id="13" name="TextBox 12"/>
-          <p:cNvSpPr txBox="1"/>
-          <p:nvPr/>
-        </p:nvSpPr>
-        <p:spPr>
-          <a:xfrm>
-            <a:off x="658368" y="1426464"/>
-            <a:ext cx="10789920" cy="530352"/>
-          </a:xfrm>
-          <a:prstGeom prst="rect">
-            <a:avLst/>
-          </a:prstGeom>
-          <a:noFill/>
-        </p:spPr>
-        <p:txBody>
-          <a:bodyPr wrap="square">
-            <a:spAutoFit/>
-          </a:bodyPr>
-          <a:lstStyle/>
-          <a:p>
-            <a:pPr algn="l"/>
-            <a:r>
-              <a:rPr sz="1000" b="0">
-                <a:solidFill>
-                  <a:srgbClr val="212121"/>
-                </a:solidFill>
-              </a:rPr>
-              <a:t>.claude/agents/pre-presentation-checker.md  직접 제작
-발표 전 제출 서류 · 가산점 · 앱 상태를 평가 루브릭 기준으로 자동 점검 → 미완료 항목 우선 보고</a:t>
-            </a:r>
-          </a:p>
-        </p:txBody>
-      </p:sp>
-      <p:sp>
-        <p:nvSpPr>
-          <p:cNvPr id="14" name="Rectangle 13"/>
-          <p:cNvSpPr/>
-          <p:nvPr/>
-        </p:nvSpPr>
-        <p:spPr>
-          <a:xfrm>
-            <a:off x="457200" y="2112264"/>
-            <a:ext cx="11247120" cy="1024128"/>
-          </a:xfrm>
-          <a:prstGeom prst="rect">
-            <a:avLst/>
-          </a:prstGeom>
-          <a:noFill/>
-          <a:ln w="10160">
-            <a:solidFill>
-              <a:srgbClr val="E0E0E0"/>
-            </a:solidFill>
-          </a:ln>
-        </p:spPr>
-        <p:style>
-          <a:lnRef idx="1">
-            <a:schemeClr val="accent1"/>
-          </a:lnRef>
-          <a:fillRef idx="3">
-            <a:schemeClr val="accent1"/>
-          </a:fillRef>
-          <a:effectRef idx="2">
-            <a:schemeClr val="accent1"/>
-          </a:effectRef>
-          <a:fontRef idx="minor">
-            <a:schemeClr val="lt1"/>
-          </a:fontRef>
-        </p:style>
-        <p:txBody>
-          <a:bodyPr rtlCol="0" anchor="ctr"/>
-          <a:lstStyle/>
-          <a:p>
-            <a:pPr algn="ctr"/>
-          </a:p>
-        </p:txBody>
-      </p:sp>
-      <p:sp>
-        <p:nvSpPr>
-          <p:cNvPr id="15" name="Rectangle 14"/>
-          <p:cNvSpPr/>
-          <p:nvPr/>
-        </p:nvSpPr>
-        <p:spPr>
-          <a:xfrm>
-            <a:off x="457200" y="2112264"/>
-            <a:ext cx="54864" cy="1024128"/>
-          </a:xfrm>
-          <a:prstGeom prst="rect">
-            <a:avLst/>
-          </a:prstGeom>
-          <a:solidFill>
-            <a:srgbClr val="3F51B5"/>
-          </a:solidFill>
-          <a:ln>
-            <a:noFill/>
-          </a:ln>
-        </p:spPr>
-        <p:style>
-          <a:lnRef idx="1">
-            <a:schemeClr val="accent1"/>
-          </a:lnRef>
-          <a:fillRef idx="3">
-            <a:schemeClr val="accent1"/>
-          </a:fillRef>
-          <a:effectRef idx="2">
-            <a:schemeClr val="accent1"/>
-          </a:effectRef>
-          <a:fontRef idx="minor">
-            <a:schemeClr val="lt1"/>
-          </a:fontRef>
-        </p:style>
-        <p:txBody>
-          <a:bodyPr rtlCol="0" anchor="ctr"/>
-          <a:lstStyle/>
-          <a:p>
-            <a:pPr algn="ctr"/>
-          </a:p>
-        </p:txBody>
-      </p:sp>
-      <p:sp>
-        <p:nvSpPr>
-          <p:cNvPr id="16" name="Rectangle 15"/>
+          <p:cNvPr id="12" name="Rectangle 11"/>
           <p:cNvSpPr/>
           <p:nvPr/>
         </p:nvSpPr>
@@ -4010,23 +3847,92 @@
       </p:sp>
       <p:sp>
         <p:nvSpPr>
-          <p:cNvPr id="17" name="Rectangle 16"/>
+          <p:cNvPr id="13" name="TextBox 12"/>
+          <p:cNvSpPr txBox="1"/>
+          <p:nvPr/>
+        </p:nvSpPr>
+        <p:spPr>
+          <a:xfrm>
+            <a:off x="658368" y="2157984"/>
+            <a:ext cx="10972800" cy="292608"/>
+          </a:xfrm>
+          <a:prstGeom prst="rect">
+            <a:avLst/>
+          </a:prstGeom>
+          <a:noFill/>
+        </p:spPr>
+        <p:txBody>
+          <a:bodyPr wrap="square">
+            <a:spAutoFit/>
+          </a:bodyPr>
+          <a:lstStyle/>
+          <a:p>
+            <a:pPr algn="l"/>
+            <a:r>
+              <a:rPr sz="1200" b="1">
+                <a:solidFill>
+                  <a:srgbClr val="3F51B5"/>
+                </a:solidFill>
+              </a:rPr>
+              <a:t>기법 1  —  단일 md 부트스트랩  (AUTHORING.jeongkyeongwoo.v0.1.0.md)</a:t>
+            </a:r>
+          </a:p>
+        </p:txBody>
+      </p:sp>
+      <p:sp>
+        <p:nvSpPr>
+          <p:cNvPr id="14" name="TextBox 13"/>
+          <p:cNvSpPr txBox="1"/>
+          <p:nvPr/>
+        </p:nvSpPr>
+        <p:spPr>
+          <a:xfrm>
+            <a:off x="658368" y="2551176"/>
+            <a:ext cx="10972800" cy="530352"/>
+          </a:xfrm>
+          <a:prstGeom prst="rect">
+            <a:avLst/>
+          </a:prstGeom>
+          <a:noFill/>
+        </p:spPr>
+        <p:txBody>
+          <a:bodyPr wrap="square">
+            <a:spAutoFit/>
+          </a:bodyPr>
+          <a:lstStyle/>
+          <a:p>
+            <a:pPr algn="l"/>
+            <a:r>
+              <a:rPr sz="1000" b="0">
+                <a:solidFill>
+                  <a:srgbClr val="212121"/>
+                </a:solidFill>
+              </a:rPr>
+              <a:t>Rules · Skills · Commands 전체를 파일 하나로 자동 세팅
+새 프로젝트에 이 파일 하나만 주면 AI 운영 체계 즉시 구성</a:t>
+            </a:r>
+          </a:p>
+        </p:txBody>
+      </p:sp>
+      <p:sp>
+        <p:nvSpPr>
+          <p:cNvPr id="15" name="Rectangle 14"/>
           <p:cNvSpPr/>
           <p:nvPr/>
         </p:nvSpPr>
         <p:spPr>
           <a:xfrm>
-            <a:off x="10241280" y="2157984"/>
-            <a:ext cx="1234440" cy="274320"/>
-          </a:xfrm>
-          <a:prstGeom prst="rect">
-            <a:avLst/>
-          </a:prstGeom>
-          <a:solidFill>
-            <a:srgbClr val="3F51B5"/>
-          </a:solidFill>
-          <a:ln>
-            <a:noFill/>
+            <a:off x="457200" y="3236976"/>
+            <a:ext cx="11247120" cy="1024128"/>
+          </a:xfrm>
+          <a:prstGeom prst="rect">
+            <a:avLst/>
+          </a:prstGeom>
+          <a:noFill/>
+          <a:ln w="10160">
+            <a:solidFill>
+              <a:srgbClr val="E0E0E0"/>
+            </a:solidFill>
           </a:ln>
         </p:spPr>
         <p:style>
@@ -4053,196 +3959,7 @@
       </p:sp>
       <p:sp>
         <p:nvSpPr>
-          <p:cNvPr id="18" name="TextBox 17"/>
-          <p:cNvSpPr txBox="1"/>
-          <p:nvPr/>
-        </p:nvSpPr>
-        <p:spPr>
-          <a:xfrm>
-            <a:off x="10241280" y="2157984"/>
-            <a:ext cx="1234440" cy="274320"/>
-          </a:xfrm>
-          <a:prstGeom prst="rect">
-            <a:avLst/>
-          </a:prstGeom>
-          <a:noFill/>
-        </p:spPr>
-        <p:txBody>
-          <a:bodyPr wrap="square">
-            <a:spAutoFit/>
-          </a:bodyPr>
-          <a:lstStyle/>
-          <a:p>
-            <a:pPr algn="ctr"/>
-            <a:r>
-              <a:rPr sz="1000" b="1">
-                <a:solidFill>
-                  <a:srgbClr val="FFFFFF"/>
-                </a:solidFill>
-              </a:rPr>
-              <a:t>B  +2</a:t>
-            </a:r>
-          </a:p>
-        </p:txBody>
-      </p:sp>
-      <p:sp>
-        <p:nvSpPr>
-          <p:cNvPr id="19" name="TextBox 18"/>
-          <p:cNvSpPr txBox="1"/>
-          <p:nvPr/>
-        </p:nvSpPr>
-        <p:spPr>
-          <a:xfrm>
-            <a:off x="658368" y="2157984"/>
-            <a:ext cx="9418320" cy="292608"/>
-          </a:xfrm>
-          <a:prstGeom prst="rect">
-            <a:avLst/>
-          </a:prstGeom>
-          <a:noFill/>
-        </p:spPr>
-        <p:txBody>
-          <a:bodyPr wrap="square">
-            <a:spAutoFit/>
-          </a:bodyPr>
-          <a:lstStyle/>
-          <a:p>
-            <a:pPr algn="l"/>
-            <a:r>
-              <a:rPr sz="1200" b="1">
-                <a:solidFill>
-                  <a:srgbClr val="3F51B5"/>
-                </a:solidFill>
-              </a:rPr>
-              <a:t>기법 1  —  단일 md 부트스트랩  (AUTHORING.jeongkyeongwoo.v0.1.0.md)</a:t>
-            </a:r>
-          </a:p>
-        </p:txBody>
-      </p:sp>
-      <p:sp>
-        <p:nvSpPr>
-          <p:cNvPr id="20" name="TextBox 19"/>
-          <p:cNvSpPr txBox="1"/>
-          <p:nvPr/>
-        </p:nvSpPr>
-        <p:spPr>
-          <a:xfrm>
-            <a:off x="658368" y="2551176"/>
-            <a:ext cx="10789920" cy="530352"/>
-          </a:xfrm>
-          <a:prstGeom prst="rect">
-            <a:avLst/>
-          </a:prstGeom>
-          <a:noFill/>
-        </p:spPr>
-        <p:txBody>
-          <a:bodyPr wrap="square">
-            <a:spAutoFit/>
-          </a:bodyPr>
-          <a:lstStyle/>
-          <a:p>
-            <a:pPr algn="l"/>
-            <a:r>
-              <a:rPr sz="1000" b="0">
-                <a:solidFill>
-                  <a:srgbClr val="212121"/>
-                </a:solidFill>
-              </a:rPr>
-              <a:t>Rules · Skills · Commands 전체를 파일 하나로 자동 세팅
-새 프로젝트에 이 파일 하나만 주면 AI 운영 체계 즉시 구성</a:t>
-            </a:r>
-          </a:p>
-        </p:txBody>
-      </p:sp>
-      <p:sp>
-        <p:nvSpPr>
-          <p:cNvPr id="21" name="Rectangle 20"/>
-          <p:cNvSpPr/>
-          <p:nvPr/>
-        </p:nvSpPr>
-        <p:spPr>
-          <a:xfrm>
-            <a:off x="457200" y="3236976"/>
-            <a:ext cx="11247120" cy="1024128"/>
-          </a:xfrm>
-          <a:prstGeom prst="rect">
-            <a:avLst/>
-          </a:prstGeom>
-          <a:noFill/>
-          <a:ln w="10160">
-            <a:solidFill>
-              <a:srgbClr val="E0E0E0"/>
-            </a:solidFill>
-          </a:ln>
-        </p:spPr>
-        <p:style>
-          <a:lnRef idx="1">
-            <a:schemeClr val="accent1"/>
-          </a:lnRef>
-          <a:fillRef idx="3">
-            <a:schemeClr val="accent1"/>
-          </a:fillRef>
-          <a:effectRef idx="2">
-            <a:schemeClr val="accent1"/>
-          </a:effectRef>
-          <a:fontRef idx="minor">
-            <a:schemeClr val="lt1"/>
-          </a:fontRef>
-        </p:style>
-        <p:txBody>
-          <a:bodyPr rtlCol="0" anchor="ctr"/>
-          <a:lstStyle/>
-          <a:p>
-            <a:pPr algn="ctr"/>
-          </a:p>
-        </p:txBody>
-      </p:sp>
-      <p:sp>
-        <p:nvSpPr>
-          <p:cNvPr id="22" name="Rectangle 21"/>
-          <p:cNvSpPr/>
-          <p:nvPr/>
-        </p:nvSpPr>
-        <p:spPr>
-          <a:xfrm>
-            <a:off x="457200" y="3236976"/>
-            <a:ext cx="54864" cy="1024128"/>
-          </a:xfrm>
-          <a:prstGeom prst="rect">
-            <a:avLst/>
-          </a:prstGeom>
-          <a:solidFill>
-            <a:srgbClr val="3F51B5"/>
-          </a:solidFill>
-          <a:ln>
-            <a:noFill/>
-          </a:ln>
-        </p:spPr>
-        <p:style>
-          <a:lnRef idx="1">
-            <a:schemeClr val="accent1"/>
-          </a:lnRef>
-          <a:fillRef idx="3">
-            <a:schemeClr val="accent1"/>
-          </a:fillRef>
-          <a:effectRef idx="2">
-            <a:schemeClr val="accent1"/>
-          </a:effectRef>
-          <a:fontRef idx="minor">
-            <a:schemeClr val="lt1"/>
-          </a:fontRef>
-        </p:style>
-        <p:txBody>
-          <a:bodyPr rtlCol="0" anchor="ctr"/>
-          <a:lstStyle/>
-          <a:p>
-            <a:pPr algn="ctr"/>
-          </a:p>
-        </p:txBody>
-      </p:sp>
-      <p:sp>
-        <p:nvSpPr>
-          <p:cNvPr id="23" name="Rectangle 22"/>
+          <p:cNvPr id="16" name="Rectangle 15"/>
           <p:cNvSpPr/>
           <p:nvPr/>
         </p:nvSpPr>
@@ -4285,23 +4002,92 @@
       </p:sp>
       <p:sp>
         <p:nvSpPr>
-          <p:cNvPr id="24" name="Rectangle 23"/>
+          <p:cNvPr id="17" name="TextBox 16"/>
+          <p:cNvSpPr txBox="1"/>
+          <p:nvPr/>
+        </p:nvSpPr>
+        <p:spPr>
+          <a:xfrm>
+            <a:off x="658368" y="3282696"/>
+            <a:ext cx="10972800" cy="292608"/>
+          </a:xfrm>
+          <a:prstGeom prst="rect">
+            <a:avLst/>
+          </a:prstGeom>
+          <a:noFill/>
+        </p:spPr>
+        <p:txBody>
+          <a:bodyPr wrap="square">
+            <a:spAutoFit/>
+          </a:bodyPr>
+          <a:lstStyle/>
+          <a:p>
+            <a:pPr algn="l"/>
+            <a:r>
+              <a:rPr sz="1200" b="1">
+                <a:solidFill>
+                  <a:srgbClr val="3F51B5"/>
+                </a:solidFill>
+              </a:rPr>
+              <a:t>기법 3  —  단계별 보고 방식</a:t>
+            </a:r>
+          </a:p>
+        </p:txBody>
+      </p:sp>
+      <p:sp>
+        <p:nvSpPr>
+          <p:cNvPr id="18" name="TextBox 17"/>
+          <p:cNvSpPr txBox="1"/>
+          <p:nvPr/>
+        </p:nvSpPr>
+        <p:spPr>
+          <a:xfrm>
+            <a:off x="658368" y="3675887"/>
+            <a:ext cx="10972800" cy="530352"/>
+          </a:xfrm>
+          <a:prstGeom prst="rect">
+            <a:avLst/>
+          </a:prstGeom>
+          <a:noFill/>
+        </p:spPr>
+        <p:txBody>
+          <a:bodyPr wrap="square">
+            <a:spAutoFit/>
+          </a:bodyPr>
+          <a:lstStyle/>
+          <a:p>
+            <a:pPr algn="l"/>
+            <a:r>
+              <a:rPr sz="1000" b="0">
+                <a:solidFill>
+                  <a:srgbClr val="212121"/>
+                </a:solidFill>
+              </a:rPr>
+              <a:t>각 구현 단계 완료 후 AI에게 결과 보고받기 → 코드 이해도 유지
+"방금 만든 기능을 3줄로 설명해줘" → 내용 이해 후 다음 단계 진행  ·  Q&amp;A 즉답 가능</a:t>
+            </a:r>
+          </a:p>
+        </p:txBody>
+      </p:sp>
+      <p:sp>
+        <p:nvSpPr>
+          <p:cNvPr id="19" name="Rectangle 18"/>
           <p:cNvSpPr/>
           <p:nvPr/>
         </p:nvSpPr>
         <p:spPr>
           <a:xfrm>
-            <a:off x="10241280" y="3282696"/>
-            <a:ext cx="1234440" cy="274320"/>
-          </a:xfrm>
-          <a:prstGeom prst="rect">
-            <a:avLst/>
-          </a:prstGeom>
-          <a:solidFill>
-            <a:srgbClr val="3F51B5"/>
-          </a:solidFill>
-          <a:ln>
-            <a:noFill/>
+            <a:off x="457200" y="4361688"/>
+            <a:ext cx="11247120" cy="1024128"/>
+          </a:xfrm>
+          <a:prstGeom prst="rect">
+            <a:avLst/>
+          </a:prstGeom>
+          <a:noFill/>
+          <a:ln w="10160">
+            <a:solidFill>
+              <a:srgbClr val="E0E0E0"/>
+            </a:solidFill>
           </a:ln>
         </p:spPr>
         <p:style>
@@ -4328,196 +4114,7 @@
       </p:sp>
       <p:sp>
         <p:nvSpPr>
-          <p:cNvPr id="25" name="TextBox 24"/>
-          <p:cNvSpPr txBox="1"/>
-          <p:nvPr/>
-        </p:nvSpPr>
-        <p:spPr>
-          <a:xfrm>
-            <a:off x="10241280" y="3282696"/>
-            <a:ext cx="1234440" cy="274320"/>
-          </a:xfrm>
-          <a:prstGeom prst="rect">
-            <a:avLst/>
-          </a:prstGeom>
-          <a:noFill/>
-        </p:spPr>
-        <p:txBody>
-          <a:bodyPr wrap="square">
-            <a:spAutoFit/>
-          </a:bodyPr>
-          <a:lstStyle/>
-          <a:p>
-            <a:pPr algn="ctr"/>
-            <a:r>
-              <a:rPr sz="1000" b="1">
-                <a:solidFill>
-                  <a:srgbClr val="FFFFFF"/>
-                </a:solidFill>
-              </a:rPr>
-              <a:t>B  +2</a:t>
-            </a:r>
-          </a:p>
-        </p:txBody>
-      </p:sp>
-      <p:sp>
-        <p:nvSpPr>
-          <p:cNvPr id="26" name="TextBox 25"/>
-          <p:cNvSpPr txBox="1"/>
-          <p:nvPr/>
-        </p:nvSpPr>
-        <p:spPr>
-          <a:xfrm>
-            <a:off x="658368" y="3282696"/>
-            <a:ext cx="9418320" cy="292608"/>
-          </a:xfrm>
-          <a:prstGeom prst="rect">
-            <a:avLst/>
-          </a:prstGeom>
-          <a:noFill/>
-        </p:spPr>
-        <p:txBody>
-          <a:bodyPr wrap="square">
-            <a:spAutoFit/>
-          </a:bodyPr>
-          <a:lstStyle/>
-          <a:p>
-            <a:pPr algn="l"/>
-            <a:r>
-              <a:rPr sz="1200" b="1">
-                <a:solidFill>
-                  <a:srgbClr val="3F51B5"/>
-                </a:solidFill>
-              </a:rPr>
-              <a:t>기법 3  —  단계별 보고 방식</a:t>
-            </a:r>
-          </a:p>
-        </p:txBody>
-      </p:sp>
-      <p:sp>
-        <p:nvSpPr>
-          <p:cNvPr id="27" name="TextBox 26"/>
-          <p:cNvSpPr txBox="1"/>
-          <p:nvPr/>
-        </p:nvSpPr>
-        <p:spPr>
-          <a:xfrm>
-            <a:off x="658368" y="3675887"/>
-            <a:ext cx="10789920" cy="530352"/>
-          </a:xfrm>
-          <a:prstGeom prst="rect">
-            <a:avLst/>
-          </a:prstGeom>
-          <a:noFill/>
-        </p:spPr>
-        <p:txBody>
-          <a:bodyPr wrap="square">
-            <a:spAutoFit/>
-          </a:bodyPr>
-          <a:lstStyle/>
-          <a:p>
-            <a:pPr algn="l"/>
-            <a:r>
-              <a:rPr sz="1000" b="0">
-                <a:solidFill>
-                  <a:srgbClr val="212121"/>
-                </a:solidFill>
-              </a:rPr>
-              <a:t>각 구현 단계 완료 후 AI에게 결과 보고받기 → 코드 이해도 유지
-"방금 만든 기능을 3줄로 설명해줘" → 내용 이해 후 다음 단계 진행  ·  Q&amp;A 즉답 가능</a:t>
-            </a:r>
-          </a:p>
-        </p:txBody>
-      </p:sp>
-      <p:sp>
-        <p:nvSpPr>
-          <p:cNvPr id="28" name="Rectangle 27"/>
-          <p:cNvSpPr/>
-          <p:nvPr/>
-        </p:nvSpPr>
-        <p:spPr>
-          <a:xfrm>
-            <a:off x="457200" y="4361688"/>
-            <a:ext cx="11247120" cy="1024128"/>
-          </a:xfrm>
-          <a:prstGeom prst="rect">
-            <a:avLst/>
-          </a:prstGeom>
-          <a:noFill/>
-          <a:ln w="10160">
-            <a:solidFill>
-              <a:srgbClr val="E0E0E0"/>
-            </a:solidFill>
-          </a:ln>
-        </p:spPr>
-        <p:style>
-          <a:lnRef idx="1">
-            <a:schemeClr val="accent1"/>
-          </a:lnRef>
-          <a:fillRef idx="3">
-            <a:schemeClr val="accent1"/>
-          </a:fillRef>
-          <a:effectRef idx="2">
-            <a:schemeClr val="accent1"/>
-          </a:effectRef>
-          <a:fontRef idx="minor">
-            <a:schemeClr val="lt1"/>
-          </a:fontRef>
-        </p:style>
-        <p:txBody>
-          <a:bodyPr rtlCol="0" anchor="ctr"/>
-          <a:lstStyle/>
-          <a:p>
-            <a:pPr algn="ctr"/>
-          </a:p>
-        </p:txBody>
-      </p:sp>
-      <p:sp>
-        <p:nvSpPr>
-          <p:cNvPr id="29" name="Rectangle 28"/>
-          <p:cNvSpPr/>
-          <p:nvPr/>
-        </p:nvSpPr>
-        <p:spPr>
-          <a:xfrm>
-            <a:off x="457200" y="4361688"/>
-            <a:ext cx="54864" cy="1024128"/>
-          </a:xfrm>
-          <a:prstGeom prst="rect">
-            <a:avLst/>
-          </a:prstGeom>
-          <a:solidFill>
-            <a:srgbClr val="2E7D32"/>
-          </a:solidFill>
-          <a:ln>
-            <a:noFill/>
-          </a:ln>
-        </p:spPr>
-        <p:style>
-          <a:lnRef idx="1">
-            <a:schemeClr val="accent1"/>
-          </a:lnRef>
-          <a:fillRef idx="3">
-            <a:schemeClr val="accent1"/>
-          </a:fillRef>
-          <a:effectRef idx="2">
-            <a:schemeClr val="accent1"/>
-          </a:effectRef>
-          <a:fontRef idx="minor">
-            <a:schemeClr val="lt1"/>
-          </a:fontRef>
-        </p:style>
-        <p:txBody>
-          <a:bodyPr rtlCol="0" anchor="ctr"/>
-          <a:lstStyle/>
-          <a:p>
-            <a:pPr algn="ctr"/>
-          </a:p>
-        </p:txBody>
-      </p:sp>
-      <p:sp>
-        <p:nvSpPr>
-          <p:cNvPr id="30" name="Rectangle 29"/>
+          <p:cNvPr id="20" name="Rectangle 19"/>
           <p:cNvSpPr/>
           <p:nvPr/>
         </p:nvSpPr>
@@ -4560,23 +4157,92 @@
       </p:sp>
       <p:sp>
         <p:nvSpPr>
-          <p:cNvPr id="31" name="Rectangle 30"/>
+          <p:cNvPr id="21" name="TextBox 20"/>
+          <p:cNvSpPr txBox="1"/>
+          <p:nvPr/>
+        </p:nvSpPr>
+        <p:spPr>
+          <a:xfrm>
+            <a:off x="658368" y="4407407"/>
+            <a:ext cx="10972800" cy="292608"/>
+          </a:xfrm>
+          <a:prstGeom prst="rect">
+            <a:avLst/>
+          </a:prstGeom>
+          <a:noFill/>
+        </p:spPr>
+        <p:txBody>
+          <a:bodyPr wrap="square">
+            <a:spAutoFit/>
+          </a:bodyPr>
+          <a:lstStyle/>
+          <a:p>
+            <a:pPr algn="l"/>
+            <a:r>
+              <a:rPr sz="1200" b="1">
+                <a:solidFill>
+                  <a:srgbClr val="3F51B5"/>
+                </a:solidFill>
+              </a:rPr>
+              <a:t>LLM Wiki  —  암묵지 운영  (notes/llm-wiki.md · 11개 항목)</a:t>
+            </a:r>
+          </a:p>
+        </p:txBody>
+      </p:sp>
+      <p:sp>
+        <p:nvSpPr>
+          <p:cNvPr id="22" name="TextBox 21"/>
+          <p:cNvSpPr txBox="1"/>
+          <p:nvPr/>
+        </p:nvSpPr>
+        <p:spPr>
+          <a:xfrm>
+            <a:off x="658368" y="4800600"/>
+            <a:ext cx="10972800" cy="530352"/>
+          </a:xfrm>
+          <a:prstGeom prst="rect">
+            <a:avLst/>
+          </a:prstGeom>
+          <a:noFill/>
+        </p:spPr>
+        <p:txBody>
+          <a:bodyPr wrap="square">
+            <a:spAutoFit/>
+          </a:bodyPr>
+          <a:lstStyle/>
+          <a:p>
+            <a:pPr algn="l"/>
+            <a:r>
+              <a:rPr sz="1000" b="0">
+                <a:solidFill>
+                  <a:srgbClr val="212121"/>
+                </a:solidFill>
+              </a:rPr>
+              <a:t>개발 중 배운 AI 사용 인사이트 직접 기록
+Flutter 실행 환경 / 에이전트 호출법 / ADR 개념 / python-pptx 단위 변환 등</a:t>
+            </a:r>
+          </a:p>
+        </p:txBody>
+      </p:sp>
+      <p:sp>
+        <p:nvSpPr>
+          <p:cNvPr id="23" name="Rectangle 22"/>
           <p:cNvSpPr/>
           <p:nvPr/>
         </p:nvSpPr>
         <p:spPr>
           <a:xfrm>
-            <a:off x="10241280" y="4407407"/>
-            <a:ext cx="1234440" cy="274320"/>
-          </a:xfrm>
-          <a:prstGeom prst="rect">
-            <a:avLst/>
-          </a:prstGeom>
-          <a:solidFill>
-            <a:srgbClr val="2E7D32"/>
-          </a:solidFill>
-          <a:ln>
-            <a:noFill/>
+            <a:off x="457200" y="5486400"/>
+            <a:ext cx="11247120" cy="1024128"/>
+          </a:xfrm>
+          <a:prstGeom prst="rect">
+            <a:avLst/>
+          </a:prstGeom>
+          <a:noFill/>
+          <a:ln w="10160">
+            <a:solidFill>
+              <a:srgbClr val="E0E0E0"/>
+            </a:solidFill>
           </a:ln>
         </p:spPr>
         <p:style>
@@ -4603,196 +4269,7 @@
       </p:sp>
       <p:sp>
         <p:nvSpPr>
-          <p:cNvPr id="32" name="TextBox 31"/>
-          <p:cNvSpPr txBox="1"/>
-          <p:nvPr/>
-        </p:nvSpPr>
-        <p:spPr>
-          <a:xfrm>
-            <a:off x="10241280" y="4407407"/>
-            <a:ext cx="1234440" cy="274320"/>
-          </a:xfrm>
-          <a:prstGeom prst="rect">
-            <a:avLst/>
-          </a:prstGeom>
-          <a:noFill/>
-        </p:spPr>
-        <p:txBody>
-          <a:bodyPr wrap="square">
-            <a:spAutoFit/>
-          </a:bodyPr>
-          <a:lstStyle/>
-          <a:p>
-            <a:pPr algn="ctr"/>
-            <a:r>
-              <a:rPr sz="1000" b="1">
-                <a:solidFill>
-                  <a:srgbClr val="FFFFFF"/>
-                </a:solidFill>
-              </a:rPr>
-              <a:t>C  +1</a:t>
-            </a:r>
-          </a:p>
-        </p:txBody>
-      </p:sp>
-      <p:sp>
-        <p:nvSpPr>
-          <p:cNvPr id="33" name="TextBox 32"/>
-          <p:cNvSpPr txBox="1"/>
-          <p:nvPr/>
-        </p:nvSpPr>
-        <p:spPr>
-          <a:xfrm>
-            <a:off x="658368" y="4407407"/>
-            <a:ext cx="9418320" cy="292608"/>
-          </a:xfrm>
-          <a:prstGeom prst="rect">
-            <a:avLst/>
-          </a:prstGeom>
-          <a:noFill/>
-        </p:spPr>
-        <p:txBody>
-          <a:bodyPr wrap="square">
-            <a:spAutoFit/>
-          </a:bodyPr>
-          <a:lstStyle/>
-          <a:p>
-            <a:pPr algn="l"/>
-            <a:r>
-              <a:rPr sz="1200" b="1">
-                <a:solidFill>
-                  <a:srgbClr val="3F51B5"/>
-                </a:solidFill>
-              </a:rPr>
-              <a:t>LLM Wiki  —  암묵지 운영  (notes/llm-wiki.md · 11개 항목)</a:t>
-            </a:r>
-          </a:p>
-        </p:txBody>
-      </p:sp>
-      <p:sp>
-        <p:nvSpPr>
-          <p:cNvPr id="34" name="TextBox 33"/>
-          <p:cNvSpPr txBox="1"/>
-          <p:nvPr/>
-        </p:nvSpPr>
-        <p:spPr>
-          <a:xfrm>
-            <a:off x="658368" y="4800600"/>
-            <a:ext cx="10789920" cy="530352"/>
-          </a:xfrm>
-          <a:prstGeom prst="rect">
-            <a:avLst/>
-          </a:prstGeom>
-          <a:noFill/>
-        </p:spPr>
-        <p:txBody>
-          <a:bodyPr wrap="square">
-            <a:spAutoFit/>
-          </a:bodyPr>
-          <a:lstStyle/>
-          <a:p>
-            <a:pPr algn="l"/>
-            <a:r>
-              <a:rPr sz="1000" b="0">
-                <a:solidFill>
-                  <a:srgbClr val="212121"/>
-                </a:solidFill>
-              </a:rPr>
-              <a:t>개발 중 배운 AI 사용 인사이트 직접 기록
-Flutter 실행 환경 / 에이전트 호출법 / ADR 개념 / python-pptx 단위 변환 등</a:t>
-            </a:r>
-          </a:p>
-        </p:txBody>
-      </p:sp>
-      <p:sp>
-        <p:nvSpPr>
-          <p:cNvPr id="35" name="Rectangle 34"/>
-          <p:cNvSpPr/>
-          <p:nvPr/>
-        </p:nvSpPr>
-        <p:spPr>
-          <a:xfrm>
-            <a:off x="457200" y="5486400"/>
-            <a:ext cx="11247120" cy="1024128"/>
-          </a:xfrm>
-          <a:prstGeom prst="rect">
-            <a:avLst/>
-          </a:prstGeom>
-          <a:noFill/>
-          <a:ln w="10160">
-            <a:solidFill>
-              <a:srgbClr val="E0E0E0"/>
-            </a:solidFill>
-          </a:ln>
-        </p:spPr>
-        <p:style>
-          <a:lnRef idx="1">
-            <a:schemeClr val="accent1"/>
-          </a:lnRef>
-          <a:fillRef idx="3">
-            <a:schemeClr val="accent1"/>
-          </a:fillRef>
-          <a:effectRef idx="2">
-            <a:schemeClr val="accent1"/>
-          </a:effectRef>
-          <a:fontRef idx="minor">
-            <a:schemeClr val="lt1"/>
-          </a:fontRef>
-        </p:style>
-        <p:txBody>
-          <a:bodyPr rtlCol="0" anchor="ctr"/>
-          <a:lstStyle/>
-          <a:p>
-            <a:pPr algn="ctr"/>
-          </a:p>
-        </p:txBody>
-      </p:sp>
-      <p:sp>
-        <p:nvSpPr>
-          <p:cNvPr id="36" name="Rectangle 35"/>
-          <p:cNvSpPr/>
-          <p:nvPr/>
-        </p:nvSpPr>
-        <p:spPr>
-          <a:xfrm>
-            <a:off x="457200" y="5486400"/>
-            <a:ext cx="54864" cy="1024128"/>
-          </a:xfrm>
-          <a:prstGeom prst="rect">
-            <a:avLst/>
-          </a:prstGeom>
-          <a:solidFill>
-            <a:srgbClr val="6A1B9A"/>
-          </a:solidFill>
-          <a:ln>
-            <a:noFill/>
-          </a:ln>
-        </p:spPr>
-        <p:style>
-          <a:lnRef idx="1">
-            <a:schemeClr val="accent1"/>
-          </a:lnRef>
-          <a:fillRef idx="3">
-            <a:schemeClr val="accent1"/>
-          </a:fillRef>
-          <a:effectRef idx="2">
-            <a:schemeClr val="accent1"/>
-          </a:effectRef>
-          <a:fontRef idx="minor">
-            <a:schemeClr val="lt1"/>
-          </a:fontRef>
-        </p:style>
-        <p:txBody>
-          <a:bodyPr rtlCol="0" anchor="ctr"/>
-          <a:lstStyle/>
-          <a:p>
-            <a:pPr algn="ctr"/>
-          </a:p>
-        </p:txBody>
-      </p:sp>
-      <p:sp>
-        <p:nvSpPr>
-          <p:cNvPr id="37" name="Rectangle 36"/>
+          <p:cNvPr id="24" name="Rectangle 23"/>
           <p:cNvSpPr/>
           <p:nvPr/>
         </p:nvSpPr>
@@ -4835,91 +4312,14 @@
       </p:sp>
       <p:sp>
         <p:nvSpPr>
-          <p:cNvPr id="38" name="Rectangle 37"/>
-          <p:cNvSpPr/>
-          <p:nvPr/>
-        </p:nvSpPr>
-        <p:spPr>
-          <a:xfrm>
-            <a:off x="10241280" y="5532120"/>
-            <a:ext cx="1234440" cy="274320"/>
-          </a:xfrm>
-          <a:prstGeom prst="rect">
-            <a:avLst/>
-          </a:prstGeom>
-          <a:solidFill>
-            <a:srgbClr val="6A1B9A"/>
-          </a:solidFill>
-          <a:ln>
-            <a:noFill/>
-          </a:ln>
-        </p:spPr>
-        <p:style>
-          <a:lnRef idx="1">
-            <a:schemeClr val="accent1"/>
-          </a:lnRef>
-          <a:fillRef idx="3">
-            <a:schemeClr val="accent1"/>
-          </a:fillRef>
-          <a:effectRef idx="2">
-            <a:schemeClr val="accent1"/>
-          </a:effectRef>
-          <a:fontRef idx="minor">
-            <a:schemeClr val="lt1"/>
-          </a:fontRef>
-        </p:style>
-        <p:txBody>
-          <a:bodyPr rtlCol="0" anchor="ctr"/>
-          <a:lstStyle/>
-          <a:p>
-            <a:pPr algn="ctr"/>
-          </a:p>
-        </p:txBody>
-      </p:sp>
-      <p:sp>
-        <p:nvSpPr>
-          <p:cNvPr id="39" name="TextBox 38"/>
-          <p:cNvSpPr txBox="1"/>
-          <p:nvPr/>
-        </p:nvSpPr>
-        <p:spPr>
-          <a:xfrm>
-            <a:off x="10241280" y="5532120"/>
-            <a:ext cx="1234440" cy="274320"/>
-          </a:xfrm>
-          <a:prstGeom prst="rect">
-            <a:avLst/>
-          </a:prstGeom>
-          <a:noFill/>
-        </p:spPr>
-        <p:txBody>
-          <a:bodyPr wrap="square">
-            <a:spAutoFit/>
-          </a:bodyPr>
-          <a:lstStyle/>
-          <a:p>
-            <a:pPr algn="ctr"/>
-            <a:r>
-              <a:rPr sz="1000" b="1">
-                <a:solidFill>
-                  <a:srgbClr val="FFFFFF"/>
-                </a:solidFill>
-              </a:rPr>
-              <a:t>D  +2</a:t>
-            </a:r>
-          </a:p>
-        </p:txBody>
-      </p:sp>
-      <p:sp>
-        <p:nvSpPr>
-          <p:cNvPr id="40" name="TextBox 39"/>
+          <p:cNvPr id="25" name="TextBox 24"/>
           <p:cNvSpPr txBox="1"/>
           <p:nvPr/>
         </p:nvSpPr>
         <p:spPr>
           <a:xfrm>
             <a:off x="658368" y="5532120"/>
-            <a:ext cx="9418320" cy="292608"/>
+            <a:ext cx="10972800" cy="292608"/>
           </a:xfrm>
           <a:prstGeom prst="rect">
             <a:avLst/>
@@ -4946,14 +4346,14 @@
       </p:sp>
       <p:sp>
         <p:nvSpPr>
-          <p:cNvPr id="41" name="TextBox 40"/>
+          <p:cNvPr id="26" name="TextBox 25"/>
           <p:cNvSpPr txBox="1"/>
           <p:nvPr/>
         </p:nvSpPr>
         <p:spPr>
           <a:xfrm>
             <a:off x="658368" y="5925312"/>
-            <a:ext cx="10789920" cy="530352"/>
+            <a:ext cx="10972800" cy="530352"/>
           </a:xfrm>
           <a:prstGeom prst="rect">
             <a:avLst/>
@@ -16022,7 +15422,7 @@
                   <a:srgbClr val="9E9E9E"/>
                 </a:solidFill>
               </a:rPr>
-              <a:t>팀원 A  ·  가산점 A+1 · B+2 · C+1 · D+2</a:t>
+              <a:t>팀원 A</a:t>
             </a:r>
           </a:p>
         </p:txBody>
@@ -16156,49 +15556,6 @@
         <p:spPr>
           <a:xfrm>
             <a:off x="457200" y="987552"/>
-            <a:ext cx="54864" cy="1024128"/>
-          </a:xfrm>
-          <a:prstGeom prst="rect">
-            <a:avLst/>
-          </a:prstGeom>
-          <a:solidFill>
-            <a:srgbClr val="E65C00"/>
-          </a:solidFill>
-          <a:ln>
-            <a:noFill/>
-          </a:ln>
-        </p:spPr>
-        <p:style>
-          <a:lnRef idx="1">
-            <a:schemeClr val="accent1"/>
-          </a:lnRef>
-          <a:fillRef idx="3">
-            <a:schemeClr val="accent1"/>
-          </a:fillRef>
-          <a:effectRef idx="2">
-            <a:schemeClr val="accent1"/>
-          </a:effectRef>
-          <a:fontRef idx="minor">
-            <a:schemeClr val="lt1"/>
-          </a:fontRef>
-        </p:style>
-        <p:txBody>
-          <a:bodyPr rtlCol="0" anchor="ctr"/>
-          <a:lstStyle/>
-          <a:p>
-            <a:pPr algn="ctr"/>
-          </a:p>
-        </p:txBody>
-      </p:sp>
-      <p:sp>
-        <p:nvSpPr>
-          <p:cNvPr id="9" name="Rectangle 8"/>
-          <p:cNvSpPr/>
-          <p:nvPr/>
-        </p:nvSpPr>
-        <p:spPr>
-          <a:xfrm>
-            <a:off x="457200" y="987552"/>
             <a:ext cx="11247120" cy="365760"/>
           </a:xfrm>
           <a:prstGeom prst="rect">
@@ -16235,23 +15592,92 @@
       </p:sp>
       <p:sp>
         <p:nvSpPr>
-          <p:cNvPr id="10" name="Rectangle 9"/>
+          <p:cNvPr id="9" name="TextBox 8"/>
+          <p:cNvSpPr txBox="1"/>
+          <p:nvPr/>
+        </p:nvSpPr>
+        <p:spPr>
+          <a:xfrm>
+            <a:off x="658368" y="1033272"/>
+            <a:ext cx="10972800" cy="292608"/>
+          </a:xfrm>
+          <a:prstGeom prst="rect">
+            <a:avLst/>
+          </a:prstGeom>
+          <a:noFill/>
+        </p:spPr>
+        <p:txBody>
+          <a:bodyPr wrap="square">
+            <a:spAutoFit/>
+          </a:bodyPr>
+          <a:lstStyle/>
+          <a:p>
+            <a:pPr algn="l"/>
+            <a:r>
+              <a:rPr sz="1200" b="1">
+                <a:solidFill>
+                  <a:srgbClr val="3F51B5"/>
+                </a:solidFill>
+              </a:rPr>
+              <a:t>feature-debugger 에이전트 직접 제작 + /dg 실사용</a:t>
+            </a:r>
+          </a:p>
+        </p:txBody>
+      </p:sp>
+      <p:sp>
+        <p:nvSpPr>
+          <p:cNvPr id="10" name="TextBox 9"/>
+          <p:cNvSpPr txBox="1"/>
+          <p:nvPr/>
+        </p:nvSpPr>
+        <p:spPr>
+          <a:xfrm>
+            <a:off x="658368" y="1426464"/>
+            <a:ext cx="10972800" cy="530352"/>
+          </a:xfrm>
+          <a:prstGeom prst="rect">
+            <a:avLst/>
+          </a:prstGeom>
+          <a:noFill/>
+        </p:spPr>
+        <p:txBody>
+          <a:bodyPr wrap="square">
+            <a:spAutoFit/>
+          </a:bodyPr>
+          <a:lstStyle/>
+          <a:p>
+            <a:pPr algn="l"/>
+            <a:r>
+              <a:rPr sz="1000" b="0">
+                <a:solidFill>
+                  <a:srgbClr val="212121"/>
+                </a:solidFill>
+              </a:rPr>
+              <a:t>.claude/agents/feature-debugger.md  직접 제작
+앱 기능 6개 영역(인증 · 계좌 · 포지션 · 차트 · 대시보드 · Firebase)을 /dg 명령어 하나로 반복 점검 수행</a:t>
+            </a:r>
+          </a:p>
+        </p:txBody>
+      </p:sp>
+      <p:sp>
+        <p:nvSpPr>
+          <p:cNvPr id="11" name="Rectangle 10"/>
           <p:cNvSpPr/>
           <p:nvPr/>
         </p:nvSpPr>
         <p:spPr>
           <a:xfrm>
-            <a:off x="10241280" y="1033272"/>
-            <a:ext cx="1234440" cy="274320"/>
-          </a:xfrm>
-          <a:prstGeom prst="rect">
-            <a:avLst/>
-          </a:prstGeom>
-          <a:solidFill>
-            <a:srgbClr val="E65C00"/>
-          </a:solidFill>
-          <a:ln>
-            <a:noFill/>
+            <a:off x="457200" y="2112264"/>
+            <a:ext cx="11247120" cy="1024128"/>
+          </a:xfrm>
+          <a:prstGeom prst="rect">
+            <a:avLst/>
+          </a:prstGeom>
+          <a:noFill/>
+          <a:ln w="10160">
+            <a:solidFill>
+              <a:srgbClr val="E0E0E0"/>
+            </a:solidFill>
           </a:ln>
         </p:spPr>
         <p:style>
@@ -16278,196 +15704,7 @@
       </p:sp>
       <p:sp>
         <p:nvSpPr>
-          <p:cNvPr id="11" name="TextBox 10"/>
-          <p:cNvSpPr txBox="1"/>
-          <p:nvPr/>
-        </p:nvSpPr>
-        <p:spPr>
-          <a:xfrm>
-            <a:off x="10241280" y="1033272"/>
-            <a:ext cx="1234440" cy="274320"/>
-          </a:xfrm>
-          <a:prstGeom prst="rect">
-            <a:avLst/>
-          </a:prstGeom>
-          <a:noFill/>
-        </p:spPr>
-        <p:txBody>
-          <a:bodyPr wrap="square">
-            <a:spAutoFit/>
-          </a:bodyPr>
-          <a:lstStyle/>
-          <a:p>
-            <a:pPr algn="ctr"/>
-            <a:r>
-              <a:rPr sz="1000" b="1">
-                <a:solidFill>
-                  <a:srgbClr val="FFFFFF"/>
-                </a:solidFill>
-              </a:rPr>
-              <a:t>A  +1</a:t>
-            </a:r>
-          </a:p>
-        </p:txBody>
-      </p:sp>
-      <p:sp>
-        <p:nvSpPr>
-          <p:cNvPr id="12" name="TextBox 11"/>
-          <p:cNvSpPr txBox="1"/>
-          <p:nvPr/>
-        </p:nvSpPr>
-        <p:spPr>
-          <a:xfrm>
-            <a:off x="658368" y="1033272"/>
-            <a:ext cx="9418320" cy="292608"/>
-          </a:xfrm>
-          <a:prstGeom prst="rect">
-            <a:avLst/>
-          </a:prstGeom>
-          <a:noFill/>
-        </p:spPr>
-        <p:txBody>
-          <a:bodyPr wrap="square">
-            <a:spAutoFit/>
-          </a:bodyPr>
-          <a:lstStyle/>
-          <a:p>
-            <a:pPr algn="l"/>
-            <a:r>
-              <a:rPr sz="1200" b="1">
-                <a:solidFill>
-                  <a:srgbClr val="3F51B5"/>
-                </a:solidFill>
-              </a:rPr>
-              <a:t>feature-debugger 에이전트 직접 제작 + /dg 실사용</a:t>
-            </a:r>
-          </a:p>
-        </p:txBody>
-      </p:sp>
-      <p:sp>
-        <p:nvSpPr>
-          <p:cNvPr id="13" name="TextBox 12"/>
-          <p:cNvSpPr txBox="1"/>
-          <p:nvPr/>
-        </p:nvSpPr>
-        <p:spPr>
-          <a:xfrm>
-            <a:off x="658368" y="1426464"/>
-            <a:ext cx="10789920" cy="530352"/>
-          </a:xfrm>
-          <a:prstGeom prst="rect">
-            <a:avLst/>
-          </a:prstGeom>
-          <a:noFill/>
-        </p:spPr>
-        <p:txBody>
-          <a:bodyPr wrap="square">
-            <a:spAutoFit/>
-          </a:bodyPr>
-          <a:lstStyle/>
-          <a:p>
-            <a:pPr algn="l"/>
-            <a:r>
-              <a:rPr sz="1000" b="0">
-                <a:solidFill>
-                  <a:srgbClr val="212121"/>
-                </a:solidFill>
-              </a:rPr>
-              <a:t>.claude/agents/feature-debugger.md  직접 제작
-앱 기능 6개 영역(인증 · 계좌 · 포지션 · 차트 · 대시보드 · Firebase)을 /dg 명령어 하나로 반복 점검 수행</a:t>
-            </a:r>
-          </a:p>
-        </p:txBody>
-      </p:sp>
-      <p:sp>
-        <p:nvSpPr>
-          <p:cNvPr id="14" name="Rectangle 13"/>
-          <p:cNvSpPr/>
-          <p:nvPr/>
-        </p:nvSpPr>
-        <p:spPr>
-          <a:xfrm>
-            <a:off x="457200" y="2112264"/>
-            <a:ext cx="11247120" cy="1024128"/>
-          </a:xfrm>
-          <a:prstGeom prst="rect">
-            <a:avLst/>
-          </a:prstGeom>
-          <a:noFill/>
-          <a:ln w="10160">
-            <a:solidFill>
-              <a:srgbClr val="E0E0E0"/>
-            </a:solidFill>
-          </a:ln>
-        </p:spPr>
-        <p:style>
-          <a:lnRef idx="1">
-            <a:schemeClr val="accent1"/>
-          </a:lnRef>
-          <a:fillRef idx="3">
-            <a:schemeClr val="accent1"/>
-          </a:fillRef>
-          <a:effectRef idx="2">
-            <a:schemeClr val="accent1"/>
-          </a:effectRef>
-          <a:fontRef idx="minor">
-            <a:schemeClr val="lt1"/>
-          </a:fontRef>
-        </p:style>
-        <p:txBody>
-          <a:bodyPr rtlCol="0" anchor="ctr"/>
-          <a:lstStyle/>
-          <a:p>
-            <a:pPr algn="ctr"/>
-          </a:p>
-        </p:txBody>
-      </p:sp>
-      <p:sp>
-        <p:nvSpPr>
-          <p:cNvPr id="15" name="Rectangle 14"/>
-          <p:cNvSpPr/>
-          <p:nvPr/>
-        </p:nvSpPr>
-        <p:spPr>
-          <a:xfrm>
-            <a:off x="457200" y="2112264"/>
-            <a:ext cx="54864" cy="1024128"/>
-          </a:xfrm>
-          <a:prstGeom prst="rect">
-            <a:avLst/>
-          </a:prstGeom>
-          <a:solidFill>
-            <a:srgbClr val="3F51B5"/>
-          </a:solidFill>
-          <a:ln>
-            <a:noFill/>
-          </a:ln>
-        </p:spPr>
-        <p:style>
-          <a:lnRef idx="1">
-            <a:schemeClr val="accent1"/>
-          </a:lnRef>
-          <a:fillRef idx="3">
-            <a:schemeClr val="accent1"/>
-          </a:fillRef>
-          <a:effectRef idx="2">
-            <a:schemeClr val="accent1"/>
-          </a:effectRef>
-          <a:fontRef idx="minor">
-            <a:schemeClr val="lt1"/>
-          </a:fontRef>
-        </p:style>
-        <p:txBody>
-          <a:bodyPr rtlCol="0" anchor="ctr"/>
-          <a:lstStyle/>
-          <a:p>
-            <a:pPr algn="ctr"/>
-          </a:p>
-        </p:txBody>
-      </p:sp>
-      <p:sp>
-        <p:nvSpPr>
-          <p:cNvPr id="16" name="Rectangle 15"/>
+          <p:cNvPr id="12" name="Rectangle 11"/>
           <p:cNvSpPr/>
           <p:nvPr/>
         </p:nvSpPr>
@@ -16510,23 +15747,92 @@
       </p:sp>
       <p:sp>
         <p:nvSpPr>
-          <p:cNvPr id="17" name="Rectangle 16"/>
+          <p:cNvPr id="13" name="TextBox 12"/>
+          <p:cNvSpPr txBox="1"/>
+          <p:nvPr/>
+        </p:nvSpPr>
+        <p:spPr>
+          <a:xfrm>
+            <a:off x="658368" y="2157984"/>
+            <a:ext cx="10972800" cy="292608"/>
+          </a:xfrm>
+          <a:prstGeom prst="rect">
+            <a:avLst/>
+          </a:prstGeom>
+          <a:noFill/>
+        </p:spPr>
+        <p:txBody>
+          <a:bodyPr wrap="square">
+            <a:spAutoFit/>
+          </a:bodyPr>
+          <a:lstStyle/>
+          <a:p>
+            <a:pPr algn="l"/>
+            <a:r>
+              <a:rPr sz="1200" b="1">
+                <a:solidFill>
+                  <a:srgbClr val="3F51B5"/>
+                </a:solidFill>
+              </a:rPr>
+              <a:t>기법 1  —  단일 md 부트스트랩  (AUTHORING.Jooseonghyeon.v0.1.0.md)</a:t>
+            </a:r>
+          </a:p>
+        </p:txBody>
+      </p:sp>
+      <p:sp>
+        <p:nvSpPr>
+          <p:cNvPr id="14" name="TextBox 13"/>
+          <p:cNvSpPr txBox="1"/>
+          <p:nvPr/>
+        </p:nvSpPr>
+        <p:spPr>
+          <a:xfrm>
+            <a:off x="658368" y="2551176"/>
+            <a:ext cx="10972800" cy="530352"/>
+          </a:xfrm>
+          <a:prstGeom prst="rect">
+            <a:avLst/>
+          </a:prstGeom>
+          <a:noFill/>
+        </p:spPr>
+        <p:txBody>
+          <a:bodyPr wrap="square">
+            <a:spAutoFit/>
+          </a:bodyPr>
+          <a:lstStyle/>
+          <a:p>
+            <a:pPr algn="l"/>
+            <a:r>
+              <a:rPr sz="1000" b="0">
+                <a:solidFill>
+                  <a:srgbClr val="212121"/>
+                </a:solidFill>
+              </a:rPr>
+              <a:t>Rules · Skills · Commands 전체를 파일 하나로 자동 세팅
+새 프로젝트에 이 파일 하나만 주면 AI 운영 체계 즉시 구성</a:t>
+            </a:r>
+          </a:p>
+        </p:txBody>
+      </p:sp>
+      <p:sp>
+        <p:nvSpPr>
+          <p:cNvPr id="15" name="Rectangle 14"/>
           <p:cNvSpPr/>
           <p:nvPr/>
         </p:nvSpPr>
         <p:spPr>
           <a:xfrm>
-            <a:off x="10241280" y="2157984"/>
-            <a:ext cx="1234440" cy="274320"/>
-          </a:xfrm>
-          <a:prstGeom prst="rect">
-            <a:avLst/>
-          </a:prstGeom>
-          <a:solidFill>
-            <a:srgbClr val="3F51B5"/>
-          </a:solidFill>
-          <a:ln>
-            <a:noFill/>
+            <a:off x="457200" y="3236976"/>
+            <a:ext cx="11247120" cy="1024128"/>
+          </a:xfrm>
+          <a:prstGeom prst="rect">
+            <a:avLst/>
+          </a:prstGeom>
+          <a:noFill/>
+          <a:ln w="10160">
+            <a:solidFill>
+              <a:srgbClr val="E0E0E0"/>
+            </a:solidFill>
           </a:ln>
         </p:spPr>
         <p:style>
@@ -16553,196 +15859,7 @@
       </p:sp>
       <p:sp>
         <p:nvSpPr>
-          <p:cNvPr id="18" name="TextBox 17"/>
-          <p:cNvSpPr txBox="1"/>
-          <p:nvPr/>
-        </p:nvSpPr>
-        <p:spPr>
-          <a:xfrm>
-            <a:off x="10241280" y="2157984"/>
-            <a:ext cx="1234440" cy="274320"/>
-          </a:xfrm>
-          <a:prstGeom prst="rect">
-            <a:avLst/>
-          </a:prstGeom>
-          <a:noFill/>
-        </p:spPr>
-        <p:txBody>
-          <a:bodyPr wrap="square">
-            <a:spAutoFit/>
-          </a:bodyPr>
-          <a:lstStyle/>
-          <a:p>
-            <a:pPr algn="ctr"/>
-            <a:r>
-              <a:rPr sz="1000" b="1">
-                <a:solidFill>
-                  <a:srgbClr val="FFFFFF"/>
-                </a:solidFill>
-              </a:rPr>
-              <a:t>B  +2</a:t>
-            </a:r>
-          </a:p>
-        </p:txBody>
-      </p:sp>
-      <p:sp>
-        <p:nvSpPr>
-          <p:cNvPr id="19" name="TextBox 18"/>
-          <p:cNvSpPr txBox="1"/>
-          <p:nvPr/>
-        </p:nvSpPr>
-        <p:spPr>
-          <a:xfrm>
-            <a:off x="658368" y="2157984"/>
-            <a:ext cx="9418320" cy="292608"/>
-          </a:xfrm>
-          <a:prstGeom prst="rect">
-            <a:avLst/>
-          </a:prstGeom>
-          <a:noFill/>
-        </p:spPr>
-        <p:txBody>
-          <a:bodyPr wrap="square">
-            <a:spAutoFit/>
-          </a:bodyPr>
-          <a:lstStyle/>
-          <a:p>
-            <a:pPr algn="l"/>
-            <a:r>
-              <a:rPr sz="1200" b="1">
-                <a:solidFill>
-                  <a:srgbClr val="3F51B5"/>
-                </a:solidFill>
-              </a:rPr>
-              <a:t>기법 1  —  단일 md 부트스트랩  (AUTHORING.Jooseonghyeon.v0.1.0.md)</a:t>
-            </a:r>
-          </a:p>
-        </p:txBody>
-      </p:sp>
-      <p:sp>
-        <p:nvSpPr>
-          <p:cNvPr id="20" name="TextBox 19"/>
-          <p:cNvSpPr txBox="1"/>
-          <p:nvPr/>
-        </p:nvSpPr>
-        <p:spPr>
-          <a:xfrm>
-            <a:off x="658368" y="2551176"/>
-            <a:ext cx="10789920" cy="530352"/>
-          </a:xfrm>
-          <a:prstGeom prst="rect">
-            <a:avLst/>
-          </a:prstGeom>
-          <a:noFill/>
-        </p:spPr>
-        <p:txBody>
-          <a:bodyPr wrap="square">
-            <a:spAutoFit/>
-          </a:bodyPr>
-          <a:lstStyle/>
-          <a:p>
-            <a:pPr algn="l"/>
-            <a:r>
-              <a:rPr sz="1000" b="0">
-                <a:solidFill>
-                  <a:srgbClr val="212121"/>
-                </a:solidFill>
-              </a:rPr>
-              <a:t>Rules · Skills · Commands 전체를 파일 하나로 자동 세팅
-새 프로젝트에 이 파일 하나만 주면 AI 운영 체계 즉시 구성</a:t>
-            </a:r>
-          </a:p>
-        </p:txBody>
-      </p:sp>
-      <p:sp>
-        <p:nvSpPr>
-          <p:cNvPr id="21" name="Rectangle 20"/>
-          <p:cNvSpPr/>
-          <p:nvPr/>
-        </p:nvSpPr>
-        <p:spPr>
-          <a:xfrm>
-            <a:off x="457200" y="3236976"/>
-            <a:ext cx="11247120" cy="1024128"/>
-          </a:xfrm>
-          <a:prstGeom prst="rect">
-            <a:avLst/>
-          </a:prstGeom>
-          <a:noFill/>
-          <a:ln w="10160">
-            <a:solidFill>
-              <a:srgbClr val="E0E0E0"/>
-            </a:solidFill>
-          </a:ln>
-        </p:spPr>
-        <p:style>
-          <a:lnRef idx="1">
-            <a:schemeClr val="accent1"/>
-          </a:lnRef>
-          <a:fillRef idx="3">
-            <a:schemeClr val="accent1"/>
-          </a:fillRef>
-          <a:effectRef idx="2">
-            <a:schemeClr val="accent1"/>
-          </a:effectRef>
-          <a:fontRef idx="minor">
-            <a:schemeClr val="lt1"/>
-          </a:fontRef>
-        </p:style>
-        <p:txBody>
-          <a:bodyPr rtlCol="0" anchor="ctr"/>
-          <a:lstStyle/>
-          <a:p>
-            <a:pPr algn="ctr"/>
-          </a:p>
-        </p:txBody>
-      </p:sp>
-      <p:sp>
-        <p:nvSpPr>
-          <p:cNvPr id="22" name="Rectangle 21"/>
-          <p:cNvSpPr/>
-          <p:nvPr/>
-        </p:nvSpPr>
-        <p:spPr>
-          <a:xfrm>
-            <a:off x="457200" y="3236976"/>
-            <a:ext cx="54864" cy="1024128"/>
-          </a:xfrm>
-          <a:prstGeom prst="rect">
-            <a:avLst/>
-          </a:prstGeom>
-          <a:solidFill>
-            <a:srgbClr val="3F51B5"/>
-          </a:solidFill>
-          <a:ln>
-            <a:noFill/>
-          </a:ln>
-        </p:spPr>
-        <p:style>
-          <a:lnRef idx="1">
-            <a:schemeClr val="accent1"/>
-          </a:lnRef>
-          <a:fillRef idx="3">
-            <a:schemeClr val="accent1"/>
-          </a:fillRef>
-          <a:effectRef idx="2">
-            <a:schemeClr val="accent1"/>
-          </a:effectRef>
-          <a:fontRef idx="minor">
-            <a:schemeClr val="lt1"/>
-          </a:fontRef>
-        </p:style>
-        <p:txBody>
-          <a:bodyPr rtlCol="0" anchor="ctr"/>
-          <a:lstStyle/>
-          <a:p>
-            <a:pPr algn="ctr"/>
-          </a:p>
-        </p:txBody>
-      </p:sp>
-      <p:sp>
-        <p:nvSpPr>
-          <p:cNvPr id="23" name="Rectangle 22"/>
+          <p:cNvPr id="16" name="Rectangle 15"/>
           <p:cNvSpPr/>
           <p:nvPr/>
         </p:nvSpPr>
@@ -16785,23 +15902,92 @@
       </p:sp>
       <p:sp>
         <p:nvSpPr>
-          <p:cNvPr id="24" name="Rectangle 23"/>
+          <p:cNvPr id="17" name="TextBox 16"/>
+          <p:cNvSpPr txBox="1"/>
+          <p:nvPr/>
+        </p:nvSpPr>
+        <p:spPr>
+          <a:xfrm>
+            <a:off x="658368" y="3282696"/>
+            <a:ext cx="10972800" cy="292608"/>
+          </a:xfrm>
+          <a:prstGeom prst="rect">
+            <a:avLst/>
+          </a:prstGeom>
+          <a:noFill/>
+        </p:spPr>
+        <p:txBody>
+          <a:bodyPr wrap="square">
+            <a:spAutoFit/>
+          </a:bodyPr>
+          <a:lstStyle/>
+          <a:p>
+            <a:pPr algn="l"/>
+            <a:r>
+              <a:rPr sz="1200" b="1">
+                <a:solidFill>
+                  <a:srgbClr val="3F51B5"/>
+                </a:solidFill>
+              </a:rPr>
+              <a:t>기법 3  —  단계별 개발 계획 · 진행</a:t>
+            </a:r>
+          </a:p>
+        </p:txBody>
+      </p:sp>
+      <p:sp>
+        <p:nvSpPr>
+          <p:cNvPr id="18" name="TextBox 17"/>
+          <p:cNvSpPr txBox="1"/>
+          <p:nvPr/>
+        </p:nvSpPr>
+        <p:spPr>
+          <a:xfrm>
+            <a:off x="658368" y="3675887"/>
+            <a:ext cx="10972800" cy="530352"/>
+          </a:xfrm>
+          <a:prstGeom prst="rect">
+            <a:avLst/>
+          </a:prstGeom>
+          <a:noFill/>
+        </p:spPr>
+        <p:txBody>
+          <a:bodyPr wrap="square">
+            <a:spAutoFit/>
+          </a:bodyPr>
+          <a:lstStyle/>
+          <a:p>
+            <a:pPr algn="l"/>
+            <a:r>
+              <a:rPr sz="1000" b="0">
+                <a:solidFill>
+                  <a:srgbClr val="212121"/>
+                </a:solidFill>
+              </a:rPr>
+              <a:t>개발 전 단계별 계획 수립 → AI 구현 → 직접 점검 · 이해 → 다음 단계 진행
+AI 의존 개발에서 코드 이해도를 유지하기 위한 개인 워크플로우</a:t>
+            </a:r>
+          </a:p>
+        </p:txBody>
+      </p:sp>
+      <p:sp>
+        <p:nvSpPr>
+          <p:cNvPr id="19" name="Rectangle 18"/>
           <p:cNvSpPr/>
           <p:nvPr/>
         </p:nvSpPr>
         <p:spPr>
           <a:xfrm>
-            <a:off x="10241280" y="3282696"/>
-            <a:ext cx="1234440" cy="274320"/>
-          </a:xfrm>
-          <a:prstGeom prst="rect">
-            <a:avLst/>
-          </a:prstGeom>
-          <a:solidFill>
-            <a:srgbClr val="3F51B5"/>
-          </a:solidFill>
-          <a:ln>
-            <a:noFill/>
+            <a:off x="457200" y="4361688"/>
+            <a:ext cx="11247120" cy="1024128"/>
+          </a:xfrm>
+          <a:prstGeom prst="rect">
+            <a:avLst/>
+          </a:prstGeom>
+          <a:noFill/>
+          <a:ln w="10160">
+            <a:solidFill>
+              <a:srgbClr val="E0E0E0"/>
+            </a:solidFill>
           </a:ln>
         </p:spPr>
         <p:style>
@@ -16828,196 +16014,7 @@
       </p:sp>
       <p:sp>
         <p:nvSpPr>
-          <p:cNvPr id="25" name="TextBox 24"/>
-          <p:cNvSpPr txBox="1"/>
-          <p:nvPr/>
-        </p:nvSpPr>
-        <p:spPr>
-          <a:xfrm>
-            <a:off x="10241280" y="3282696"/>
-            <a:ext cx="1234440" cy="274320"/>
-          </a:xfrm>
-          <a:prstGeom prst="rect">
-            <a:avLst/>
-          </a:prstGeom>
-          <a:noFill/>
-        </p:spPr>
-        <p:txBody>
-          <a:bodyPr wrap="square">
-            <a:spAutoFit/>
-          </a:bodyPr>
-          <a:lstStyle/>
-          <a:p>
-            <a:pPr algn="ctr"/>
-            <a:r>
-              <a:rPr sz="1000" b="1">
-                <a:solidFill>
-                  <a:srgbClr val="FFFFFF"/>
-                </a:solidFill>
-              </a:rPr>
-              <a:t>B  +2</a:t>
-            </a:r>
-          </a:p>
-        </p:txBody>
-      </p:sp>
-      <p:sp>
-        <p:nvSpPr>
-          <p:cNvPr id="26" name="TextBox 25"/>
-          <p:cNvSpPr txBox="1"/>
-          <p:nvPr/>
-        </p:nvSpPr>
-        <p:spPr>
-          <a:xfrm>
-            <a:off x="658368" y="3282696"/>
-            <a:ext cx="9418320" cy="292608"/>
-          </a:xfrm>
-          <a:prstGeom prst="rect">
-            <a:avLst/>
-          </a:prstGeom>
-          <a:noFill/>
-        </p:spPr>
-        <p:txBody>
-          <a:bodyPr wrap="square">
-            <a:spAutoFit/>
-          </a:bodyPr>
-          <a:lstStyle/>
-          <a:p>
-            <a:pPr algn="l"/>
-            <a:r>
-              <a:rPr sz="1200" b="1">
-                <a:solidFill>
-                  <a:srgbClr val="3F51B5"/>
-                </a:solidFill>
-              </a:rPr>
-              <a:t>기법 3  —  단계별 개발 계획 · 진행</a:t>
-            </a:r>
-          </a:p>
-        </p:txBody>
-      </p:sp>
-      <p:sp>
-        <p:nvSpPr>
-          <p:cNvPr id="27" name="TextBox 26"/>
-          <p:cNvSpPr txBox="1"/>
-          <p:nvPr/>
-        </p:nvSpPr>
-        <p:spPr>
-          <a:xfrm>
-            <a:off x="658368" y="3675887"/>
-            <a:ext cx="10789920" cy="530352"/>
-          </a:xfrm>
-          <a:prstGeom prst="rect">
-            <a:avLst/>
-          </a:prstGeom>
-          <a:noFill/>
-        </p:spPr>
-        <p:txBody>
-          <a:bodyPr wrap="square">
-            <a:spAutoFit/>
-          </a:bodyPr>
-          <a:lstStyle/>
-          <a:p>
-            <a:pPr algn="l"/>
-            <a:r>
-              <a:rPr sz="1000" b="0">
-                <a:solidFill>
-                  <a:srgbClr val="212121"/>
-                </a:solidFill>
-              </a:rPr>
-              <a:t>개발 전 단계별 계획 수립 → AI 구현 → 직접 점검 · 이해 → 다음 단계 진행
-AI 의존 개발에서 코드 이해도를 유지하기 위한 개인 워크플로우</a:t>
-            </a:r>
-          </a:p>
-        </p:txBody>
-      </p:sp>
-      <p:sp>
-        <p:nvSpPr>
-          <p:cNvPr id="28" name="Rectangle 27"/>
-          <p:cNvSpPr/>
-          <p:nvPr/>
-        </p:nvSpPr>
-        <p:spPr>
-          <a:xfrm>
-            <a:off x="457200" y="4361688"/>
-            <a:ext cx="11247120" cy="1024128"/>
-          </a:xfrm>
-          <a:prstGeom prst="rect">
-            <a:avLst/>
-          </a:prstGeom>
-          <a:noFill/>
-          <a:ln w="10160">
-            <a:solidFill>
-              <a:srgbClr val="E0E0E0"/>
-            </a:solidFill>
-          </a:ln>
-        </p:spPr>
-        <p:style>
-          <a:lnRef idx="1">
-            <a:schemeClr val="accent1"/>
-          </a:lnRef>
-          <a:fillRef idx="3">
-            <a:schemeClr val="accent1"/>
-          </a:fillRef>
-          <a:effectRef idx="2">
-            <a:schemeClr val="accent1"/>
-          </a:effectRef>
-          <a:fontRef idx="minor">
-            <a:schemeClr val="lt1"/>
-          </a:fontRef>
-        </p:style>
-        <p:txBody>
-          <a:bodyPr rtlCol="0" anchor="ctr"/>
-          <a:lstStyle/>
-          <a:p>
-            <a:pPr algn="ctr"/>
-          </a:p>
-        </p:txBody>
-      </p:sp>
-      <p:sp>
-        <p:nvSpPr>
-          <p:cNvPr id="29" name="Rectangle 28"/>
-          <p:cNvSpPr/>
-          <p:nvPr/>
-        </p:nvSpPr>
-        <p:spPr>
-          <a:xfrm>
-            <a:off x="457200" y="4361688"/>
-            <a:ext cx="54864" cy="1024128"/>
-          </a:xfrm>
-          <a:prstGeom prst="rect">
-            <a:avLst/>
-          </a:prstGeom>
-          <a:solidFill>
-            <a:srgbClr val="2E7D32"/>
-          </a:solidFill>
-          <a:ln>
-            <a:noFill/>
-          </a:ln>
-        </p:spPr>
-        <p:style>
-          <a:lnRef idx="1">
-            <a:schemeClr val="accent1"/>
-          </a:lnRef>
-          <a:fillRef idx="3">
-            <a:schemeClr val="accent1"/>
-          </a:fillRef>
-          <a:effectRef idx="2">
-            <a:schemeClr val="accent1"/>
-          </a:effectRef>
-          <a:fontRef idx="minor">
-            <a:schemeClr val="lt1"/>
-          </a:fontRef>
-        </p:style>
-        <p:txBody>
-          <a:bodyPr rtlCol="0" anchor="ctr"/>
-          <a:lstStyle/>
-          <a:p>
-            <a:pPr algn="ctr"/>
-          </a:p>
-        </p:txBody>
-      </p:sp>
-      <p:sp>
-        <p:nvSpPr>
-          <p:cNvPr id="30" name="Rectangle 29"/>
+          <p:cNvPr id="20" name="Rectangle 19"/>
           <p:cNvSpPr/>
           <p:nvPr/>
         </p:nvSpPr>
@@ -17060,23 +16057,92 @@
       </p:sp>
       <p:sp>
         <p:nvSpPr>
-          <p:cNvPr id="31" name="Rectangle 30"/>
+          <p:cNvPr id="21" name="TextBox 20"/>
+          <p:cNvSpPr txBox="1"/>
+          <p:nvPr/>
+        </p:nvSpPr>
+        <p:spPr>
+          <a:xfrm>
+            <a:off x="658368" y="4407407"/>
+            <a:ext cx="10972800" cy="292608"/>
+          </a:xfrm>
+          <a:prstGeom prst="rect">
+            <a:avLst/>
+          </a:prstGeom>
+          <a:noFill/>
+        </p:spPr>
+        <p:txBody>
+          <a:bodyPr wrap="square">
+            <a:spAutoFit/>
+          </a:bodyPr>
+          <a:lstStyle/>
+          <a:p>
+            <a:pPr algn="l"/>
+            <a:r>
+              <a:rPr sz="1200" b="1">
+                <a:solidFill>
+                  <a:srgbClr val="3F51B5"/>
+                </a:solidFill>
+              </a:rPr>
+              <a:t>LLM Wiki  —  암묵지 운영  (notes/llm-wiki.md · 11개 항목)</a:t>
+            </a:r>
+          </a:p>
+        </p:txBody>
+      </p:sp>
+      <p:sp>
+        <p:nvSpPr>
+          <p:cNvPr id="22" name="TextBox 21"/>
+          <p:cNvSpPr txBox="1"/>
+          <p:nvPr/>
+        </p:nvSpPr>
+        <p:spPr>
+          <a:xfrm>
+            <a:off x="658368" y="4800600"/>
+            <a:ext cx="10972800" cy="530352"/>
+          </a:xfrm>
+          <a:prstGeom prst="rect">
+            <a:avLst/>
+          </a:prstGeom>
+          <a:noFill/>
+        </p:spPr>
+        <p:txBody>
+          <a:bodyPr wrap="square">
+            <a:spAutoFit/>
+          </a:bodyPr>
+          <a:lstStyle/>
+          <a:p>
+            <a:pPr algn="l"/>
+            <a:r>
+              <a:rPr sz="1000" b="0">
+                <a:solidFill>
+                  <a:srgbClr val="212121"/>
+                </a:solidFill>
+              </a:rPr>
+              <a:t>개발 중 배운 AI 사용 인사이트 직접 기록
+Flutter 실행 환경 / 에이전트 호출법 / ADR 개념 / python-pptx 단위 변환 등</a:t>
+            </a:r>
+          </a:p>
+        </p:txBody>
+      </p:sp>
+      <p:sp>
+        <p:nvSpPr>
+          <p:cNvPr id="23" name="Rectangle 22"/>
           <p:cNvSpPr/>
           <p:nvPr/>
         </p:nvSpPr>
         <p:spPr>
           <a:xfrm>
-            <a:off x="10241280" y="4407407"/>
-            <a:ext cx="1234440" cy="274320"/>
-          </a:xfrm>
-          <a:prstGeom prst="rect">
-            <a:avLst/>
-          </a:prstGeom>
-          <a:solidFill>
-            <a:srgbClr val="2E7D32"/>
-          </a:solidFill>
-          <a:ln>
-            <a:noFill/>
+            <a:off x="457200" y="5486400"/>
+            <a:ext cx="11247120" cy="1024128"/>
+          </a:xfrm>
+          <a:prstGeom prst="rect">
+            <a:avLst/>
+          </a:prstGeom>
+          <a:noFill/>
+          <a:ln w="10160">
+            <a:solidFill>
+              <a:srgbClr val="E0E0E0"/>
+            </a:solidFill>
           </a:ln>
         </p:spPr>
         <p:style>
@@ -17103,196 +16169,7 @@
       </p:sp>
       <p:sp>
         <p:nvSpPr>
-          <p:cNvPr id="32" name="TextBox 31"/>
-          <p:cNvSpPr txBox="1"/>
-          <p:nvPr/>
-        </p:nvSpPr>
-        <p:spPr>
-          <a:xfrm>
-            <a:off x="10241280" y="4407407"/>
-            <a:ext cx="1234440" cy="274320"/>
-          </a:xfrm>
-          <a:prstGeom prst="rect">
-            <a:avLst/>
-          </a:prstGeom>
-          <a:noFill/>
-        </p:spPr>
-        <p:txBody>
-          <a:bodyPr wrap="square">
-            <a:spAutoFit/>
-          </a:bodyPr>
-          <a:lstStyle/>
-          <a:p>
-            <a:pPr algn="ctr"/>
-            <a:r>
-              <a:rPr sz="1000" b="1">
-                <a:solidFill>
-                  <a:srgbClr val="FFFFFF"/>
-                </a:solidFill>
-              </a:rPr>
-              <a:t>C  +1</a:t>
-            </a:r>
-          </a:p>
-        </p:txBody>
-      </p:sp>
-      <p:sp>
-        <p:nvSpPr>
-          <p:cNvPr id="33" name="TextBox 32"/>
-          <p:cNvSpPr txBox="1"/>
-          <p:nvPr/>
-        </p:nvSpPr>
-        <p:spPr>
-          <a:xfrm>
-            <a:off x="658368" y="4407407"/>
-            <a:ext cx="9418320" cy="292608"/>
-          </a:xfrm>
-          <a:prstGeom prst="rect">
-            <a:avLst/>
-          </a:prstGeom>
-          <a:noFill/>
-        </p:spPr>
-        <p:txBody>
-          <a:bodyPr wrap="square">
-            <a:spAutoFit/>
-          </a:bodyPr>
-          <a:lstStyle/>
-          <a:p>
-            <a:pPr algn="l"/>
-            <a:r>
-              <a:rPr sz="1200" b="1">
-                <a:solidFill>
-                  <a:srgbClr val="3F51B5"/>
-                </a:solidFill>
-              </a:rPr>
-              <a:t>LLM Wiki  —  암묵지 운영  (notes/llm-wiki.md · 11개 항목)</a:t>
-            </a:r>
-          </a:p>
-        </p:txBody>
-      </p:sp>
-      <p:sp>
-        <p:nvSpPr>
-          <p:cNvPr id="34" name="TextBox 33"/>
-          <p:cNvSpPr txBox="1"/>
-          <p:nvPr/>
-        </p:nvSpPr>
-        <p:spPr>
-          <a:xfrm>
-            <a:off x="658368" y="4800600"/>
-            <a:ext cx="10789920" cy="530352"/>
-          </a:xfrm>
-          <a:prstGeom prst="rect">
-            <a:avLst/>
-          </a:prstGeom>
-          <a:noFill/>
-        </p:spPr>
-        <p:txBody>
-          <a:bodyPr wrap="square">
-            <a:spAutoFit/>
-          </a:bodyPr>
-          <a:lstStyle/>
-          <a:p>
-            <a:pPr algn="l"/>
-            <a:r>
-              <a:rPr sz="1000" b="0">
-                <a:solidFill>
-                  <a:srgbClr val="212121"/>
-                </a:solidFill>
-              </a:rPr>
-              <a:t>개발 중 배운 AI 사용 인사이트 직접 기록
-Flutter 실행 환경 / 에이전트 호출법 / ADR 개념 / python-pptx 단위 변환 등</a:t>
-            </a:r>
-          </a:p>
-        </p:txBody>
-      </p:sp>
-      <p:sp>
-        <p:nvSpPr>
-          <p:cNvPr id="35" name="Rectangle 34"/>
-          <p:cNvSpPr/>
-          <p:nvPr/>
-        </p:nvSpPr>
-        <p:spPr>
-          <a:xfrm>
-            <a:off x="457200" y="5486400"/>
-            <a:ext cx="11247120" cy="1024128"/>
-          </a:xfrm>
-          <a:prstGeom prst="rect">
-            <a:avLst/>
-          </a:prstGeom>
-          <a:noFill/>
-          <a:ln w="10160">
-            <a:solidFill>
-              <a:srgbClr val="E0E0E0"/>
-            </a:solidFill>
-          </a:ln>
-        </p:spPr>
-        <p:style>
-          <a:lnRef idx="1">
-            <a:schemeClr val="accent1"/>
-          </a:lnRef>
-          <a:fillRef idx="3">
-            <a:schemeClr val="accent1"/>
-          </a:fillRef>
-          <a:effectRef idx="2">
-            <a:schemeClr val="accent1"/>
-          </a:effectRef>
-          <a:fontRef idx="minor">
-            <a:schemeClr val="lt1"/>
-          </a:fontRef>
-        </p:style>
-        <p:txBody>
-          <a:bodyPr rtlCol="0" anchor="ctr"/>
-          <a:lstStyle/>
-          <a:p>
-            <a:pPr algn="ctr"/>
-          </a:p>
-        </p:txBody>
-      </p:sp>
-      <p:sp>
-        <p:nvSpPr>
-          <p:cNvPr id="36" name="Rectangle 35"/>
-          <p:cNvSpPr/>
-          <p:nvPr/>
-        </p:nvSpPr>
-        <p:spPr>
-          <a:xfrm>
-            <a:off x="457200" y="5486400"/>
-            <a:ext cx="54864" cy="1024128"/>
-          </a:xfrm>
-          <a:prstGeom prst="rect">
-            <a:avLst/>
-          </a:prstGeom>
-          <a:solidFill>
-            <a:srgbClr val="6A1B9A"/>
-          </a:solidFill>
-          <a:ln>
-            <a:noFill/>
-          </a:ln>
-        </p:spPr>
-        <p:style>
-          <a:lnRef idx="1">
-            <a:schemeClr val="accent1"/>
-          </a:lnRef>
-          <a:fillRef idx="3">
-            <a:schemeClr val="accent1"/>
-          </a:fillRef>
-          <a:effectRef idx="2">
-            <a:schemeClr val="accent1"/>
-          </a:effectRef>
-          <a:fontRef idx="minor">
-            <a:schemeClr val="lt1"/>
-          </a:fontRef>
-        </p:style>
-        <p:txBody>
-          <a:bodyPr rtlCol="0" anchor="ctr"/>
-          <a:lstStyle/>
-          <a:p>
-            <a:pPr algn="ctr"/>
-          </a:p>
-        </p:txBody>
-      </p:sp>
-      <p:sp>
-        <p:nvSpPr>
-          <p:cNvPr id="37" name="Rectangle 36"/>
+          <p:cNvPr id="24" name="Rectangle 23"/>
           <p:cNvSpPr/>
           <p:nvPr/>
         </p:nvSpPr>
@@ -17335,91 +16212,14 @@
       </p:sp>
       <p:sp>
         <p:nvSpPr>
-          <p:cNvPr id="38" name="Rectangle 37"/>
-          <p:cNvSpPr/>
-          <p:nvPr/>
-        </p:nvSpPr>
-        <p:spPr>
-          <a:xfrm>
-            <a:off x="10241280" y="5532120"/>
-            <a:ext cx="1234440" cy="274320"/>
-          </a:xfrm>
-          <a:prstGeom prst="rect">
-            <a:avLst/>
-          </a:prstGeom>
-          <a:solidFill>
-            <a:srgbClr val="6A1B9A"/>
-          </a:solidFill>
-          <a:ln>
-            <a:noFill/>
-          </a:ln>
-        </p:spPr>
-        <p:style>
-          <a:lnRef idx="1">
-            <a:schemeClr val="accent1"/>
-          </a:lnRef>
-          <a:fillRef idx="3">
-            <a:schemeClr val="accent1"/>
-          </a:fillRef>
-          <a:effectRef idx="2">
-            <a:schemeClr val="accent1"/>
-          </a:effectRef>
-          <a:fontRef idx="minor">
-            <a:schemeClr val="lt1"/>
-          </a:fontRef>
-        </p:style>
-        <p:txBody>
-          <a:bodyPr rtlCol="0" anchor="ctr"/>
-          <a:lstStyle/>
-          <a:p>
-            <a:pPr algn="ctr"/>
-          </a:p>
-        </p:txBody>
-      </p:sp>
-      <p:sp>
-        <p:nvSpPr>
-          <p:cNvPr id="39" name="TextBox 38"/>
-          <p:cNvSpPr txBox="1"/>
-          <p:nvPr/>
-        </p:nvSpPr>
-        <p:spPr>
-          <a:xfrm>
-            <a:off x="10241280" y="5532120"/>
-            <a:ext cx="1234440" cy="274320"/>
-          </a:xfrm>
-          <a:prstGeom prst="rect">
-            <a:avLst/>
-          </a:prstGeom>
-          <a:noFill/>
-        </p:spPr>
-        <p:txBody>
-          <a:bodyPr wrap="square">
-            <a:spAutoFit/>
-          </a:bodyPr>
-          <a:lstStyle/>
-          <a:p>
-            <a:pPr algn="ctr"/>
-            <a:r>
-              <a:rPr sz="1000" b="1">
-                <a:solidFill>
-                  <a:srgbClr val="FFFFFF"/>
-                </a:solidFill>
-              </a:rPr>
-              <a:t>D  +2</a:t>
-            </a:r>
-          </a:p>
-        </p:txBody>
-      </p:sp>
-      <p:sp>
-        <p:nvSpPr>
-          <p:cNvPr id="40" name="TextBox 39"/>
+          <p:cNvPr id="25" name="TextBox 24"/>
           <p:cNvSpPr txBox="1"/>
           <p:nvPr/>
         </p:nvSpPr>
         <p:spPr>
           <a:xfrm>
             <a:off x="658368" y="5532120"/>
-            <a:ext cx="9418320" cy="292608"/>
+            <a:ext cx="10972800" cy="292608"/>
           </a:xfrm>
           <a:prstGeom prst="rect">
             <a:avLst/>
@@ -17446,14 +16246,14 @@
       </p:sp>
       <p:sp>
         <p:nvSpPr>
-          <p:cNvPr id="41" name="TextBox 40"/>
+          <p:cNvPr id="26" name="TextBox 25"/>
           <p:cNvSpPr txBox="1"/>
           <p:nvPr/>
         </p:nvSpPr>
         <p:spPr>
           <a:xfrm>
             <a:off x="658368" y="5925312"/>
-            <a:ext cx="10789920" cy="530352"/>
+            <a:ext cx="10972800" cy="530352"/>
           </a:xfrm>
           <a:prstGeom prst="rect">
             <a:avLst/>

--- a/portfolio-tracker/presentation/portfolio-tracker-final.pptx
+++ b/portfolio-tracker/presentation/portfolio-tracker-final.pptx
@@ -3522,7 +3522,7 @@
                   <a:srgbClr val="9E9E9E"/>
                 </a:solidFill>
               </a:rPr>
-              <a:t>팀원 B</a:t>
+              <a:t>정경우</a:t>
             </a:r>
           </a:p>
         </p:txBody>
@@ -15422,7 +15422,7 @@
                   <a:srgbClr val="9E9E9E"/>
                 </a:solidFill>
               </a:rPr>
-              <a:t>팀원 A</a:t>
+              <a:t>주성현</a:t>
             </a:r>
           </a:p>
         </p:txBody>

--- a/portfolio-tracker/presentation/portfolio-tracker-final.pptx
+++ b/portfolio-tracker/presentation/portfolio-tracker-final.pptx
@@ -19,6 +19,8 @@
     <p:sldId id="267" r:id="rId18"/>
     <p:sldId id="268" r:id="rId19"/>
     <p:sldId id="269" r:id="rId20"/>
+    <p:sldId id="270" r:id="rId21"/>
+    <p:sldId id="271" r:id="rId22"/>
   </p:sldIdLst>
   <p:sldSz cx="12188952" cy="6858000" type="screen4x3"/>
   <p:notesSz cx="6858000" cy="9144000"/>
@@ -3488,7 +3490,7 @@
                   <a:srgbClr val="3F51B5"/>
                 </a:solidFill>
               </a:rPr>
-              <a:t>9.  개발 방식 — AI 워크플로우</a:t>
+              <a:t>8.  개발 방식 — AI 워크플로우</a:t>
             </a:r>
           </a:p>
         </p:txBody>
@@ -3522,7 +3524,7 @@
                   <a:srgbClr val="9E9E9E"/>
                 </a:solidFill>
               </a:rPr>
-              <a:t>정경우</a:t>
+              <a:t>주성현  (2/2)</a:t>
             </a:r>
           </a:p>
         </p:txBody>
@@ -3599,7 +3601,7 @@
                   <a:srgbClr val="9E9E9E"/>
                 </a:solidFill>
               </a:rPr>
-              <a:t>10 / 14</a:t>
+              <a:t>10 / 16</a:t>
             </a:r>
           </a:p>
         </p:txBody>
@@ -3612,8 +3614,8 @@
         </p:nvSpPr>
         <p:spPr>
           <a:xfrm>
-            <a:off x="457200" y="987552"/>
-            <a:ext cx="11247120" cy="1024128"/>
+            <a:off x="457200" y="822960"/>
+            <a:ext cx="11247120" cy="2468880"/>
           </a:xfrm>
           <a:prstGeom prst="rect">
             <a:avLst/>
@@ -3655,8 +3657,8 @@
         </p:nvSpPr>
         <p:spPr>
           <a:xfrm>
-            <a:off x="457200" y="987552"/>
-            <a:ext cx="11247120" cy="365760"/>
+            <a:off x="457200" y="822960"/>
+            <a:ext cx="11247120" cy="402336"/>
           </a:xfrm>
           <a:prstGeom prst="rect">
             <a:avLst/>
@@ -3692,14 +3694,91 @@
       </p:sp>
       <p:sp>
         <p:nvSpPr>
-          <p:cNvPr id="9" name="TextBox 8"/>
-          <p:cNvSpPr txBox="1"/>
-          <p:nvPr/>
-        </p:nvSpPr>
-        <p:spPr>
-          <a:xfrm>
-            <a:off x="658368" y="1033272"/>
-            <a:ext cx="10972800" cy="292608"/>
+          <p:cNvPr id="9" name="Rectangle 8"/>
+          <p:cNvSpPr/>
+          <p:nvPr/>
+        </p:nvSpPr>
+        <p:spPr>
+          <a:xfrm>
+            <a:off x="457200" y="822960"/>
+            <a:ext cx="1463040" cy="402336"/>
+          </a:xfrm>
+          <a:prstGeom prst="rect">
+            <a:avLst/>
+          </a:prstGeom>
+          <a:solidFill>
+            <a:srgbClr val="2E7D32"/>
+          </a:solidFill>
+          <a:ln>
+            <a:noFill/>
+          </a:ln>
+        </p:spPr>
+        <p:style>
+          <a:lnRef idx="1">
+            <a:schemeClr val="accent1"/>
+          </a:lnRef>
+          <a:fillRef idx="3">
+            <a:schemeClr val="accent1"/>
+          </a:fillRef>
+          <a:effectRef idx="2">
+            <a:schemeClr val="accent1"/>
+          </a:effectRef>
+          <a:fontRef idx="minor">
+            <a:schemeClr val="lt1"/>
+          </a:fontRef>
+        </p:style>
+        <p:txBody>
+          <a:bodyPr rtlCol="0" anchor="ctr"/>
+          <a:lstStyle/>
+          <a:p>
+            <a:pPr algn="ctr"/>
+          </a:p>
+        </p:txBody>
+      </p:sp>
+      <p:sp>
+        <p:nvSpPr>
+          <p:cNvPr id="10" name="TextBox 9"/>
+          <p:cNvSpPr txBox="1"/>
+          <p:nvPr/>
+        </p:nvSpPr>
+        <p:spPr>
+          <a:xfrm>
+            <a:off x="457200" y="822960"/>
+            <a:ext cx="1463040" cy="402336"/>
+          </a:xfrm>
+          <a:prstGeom prst="rect">
+            <a:avLst/>
+          </a:prstGeom>
+          <a:noFill/>
+        </p:spPr>
+        <p:txBody>
+          <a:bodyPr wrap="square">
+            <a:spAutoFit/>
+          </a:bodyPr>
+          <a:lstStyle/>
+          <a:p>
+            <a:pPr algn="ctr"/>
+            <a:r>
+              <a:rPr sz="1100" b="1">
+                <a:solidFill>
+                  <a:srgbClr val="FFFFFF"/>
+                </a:solidFill>
+              </a:rPr>
+              <a:t>C  +1</a:t>
+            </a:r>
+          </a:p>
+        </p:txBody>
+      </p:sp>
+      <p:sp>
+        <p:nvSpPr>
+          <p:cNvPr id="11" name="TextBox 10"/>
+          <p:cNvSpPr txBox="1"/>
+          <p:nvPr/>
+        </p:nvSpPr>
+        <p:spPr>
+          <a:xfrm>
+            <a:off x="2057400" y="886968"/>
+            <a:ext cx="9509760" cy="274320"/>
           </a:xfrm>
           <a:prstGeom prst="rect">
             <a:avLst/>
@@ -3719,21 +3798,21 @@
                   <a:srgbClr val="3F51B5"/>
                 </a:solidFill>
               </a:rPr>
-              <a:t>pre-presentation-checker 에이전트 직접 제작 + /pc 실사용</a:t>
-            </a:r>
-          </a:p>
-        </p:txBody>
-      </p:sp>
-      <p:sp>
-        <p:nvSpPr>
-          <p:cNvPr id="10" name="TextBox 9"/>
-          <p:cNvSpPr txBox="1"/>
-          <p:nvPr/>
-        </p:nvSpPr>
-        <p:spPr>
-          <a:xfrm>
-            <a:off x="658368" y="1426464"/>
-            <a:ext cx="10972800" cy="530352"/>
+              <a:t>LLM Wiki  —  암묵지 운영  (notes/llm-wiki.md · 11개 항목)</a:t>
+            </a:r>
+          </a:p>
+        </p:txBody>
+      </p:sp>
+      <p:sp>
+        <p:nvSpPr>
+          <p:cNvPr id="12" name="TextBox 11"/>
+          <p:cNvSpPr txBox="1"/>
+          <p:nvPr/>
+        </p:nvSpPr>
+        <p:spPr>
+          <a:xfrm>
+            <a:off x="658368" y="1298448"/>
+            <a:ext cx="10789920" cy="1938528"/>
           </a:xfrm>
           <a:prstGeom prst="rect">
             <a:avLst/>
@@ -3748,27 +3827,27 @@
           <a:p>
             <a:pPr algn="l"/>
             <a:r>
-              <a:rPr sz="1000" b="0">
+              <a:rPr sz="1050" b="0">
                 <a:solidFill>
                   <a:srgbClr val="212121"/>
                 </a:solidFill>
               </a:rPr>
-              <a:t>.claude/agents/pre-presentation-checker.md  직접 제작
-발표 전 제출 서류 · 가산점 · 앱 상태를 평가 루브릭 기준으로 자동 점검 → 미완료 항목 우선 보고</a:t>
-            </a:r>
-          </a:p>
-        </p:txBody>
-      </p:sp>
-      <p:sp>
-        <p:nvSpPr>
-          <p:cNvPr id="11" name="Rectangle 10"/>
+              <a:t>개발 중 배운 AI 사용 인사이트 직접 기록
+Flutter 실행 환경 / 에이전트 호출법 / ADR 개념 / python-pptx 단위 변환 등</a:t>
+            </a:r>
+          </a:p>
+        </p:txBody>
+      </p:sp>
+      <p:sp>
+        <p:nvSpPr>
+          <p:cNvPr id="13" name="Rectangle 12"/>
           <p:cNvSpPr/>
           <p:nvPr/>
         </p:nvSpPr>
         <p:spPr>
           <a:xfrm>
-            <a:off x="457200" y="2112264"/>
-            <a:ext cx="11247120" cy="1024128"/>
+            <a:off x="457200" y="3520440"/>
+            <a:ext cx="11247120" cy="2468880"/>
           </a:xfrm>
           <a:prstGeom prst="rect">
             <a:avLst/>
@@ -3804,14 +3883,14 @@
       </p:sp>
       <p:sp>
         <p:nvSpPr>
-          <p:cNvPr id="12" name="Rectangle 11"/>
+          <p:cNvPr id="14" name="Rectangle 13"/>
           <p:cNvSpPr/>
           <p:nvPr/>
         </p:nvSpPr>
         <p:spPr>
           <a:xfrm>
-            <a:off x="457200" y="2112264"/>
-            <a:ext cx="11247120" cy="365760"/>
+            <a:off x="457200" y="3520440"/>
+            <a:ext cx="11247120" cy="402336"/>
           </a:xfrm>
           <a:prstGeom prst="rect">
             <a:avLst/>
@@ -3847,92 +3926,23 @@
       </p:sp>
       <p:sp>
         <p:nvSpPr>
-          <p:cNvPr id="13" name="TextBox 12"/>
-          <p:cNvSpPr txBox="1"/>
-          <p:nvPr/>
-        </p:nvSpPr>
-        <p:spPr>
-          <a:xfrm>
-            <a:off x="658368" y="2157984"/>
-            <a:ext cx="10972800" cy="292608"/>
-          </a:xfrm>
-          <a:prstGeom prst="rect">
-            <a:avLst/>
-          </a:prstGeom>
-          <a:noFill/>
-        </p:spPr>
-        <p:txBody>
-          <a:bodyPr wrap="square">
-            <a:spAutoFit/>
-          </a:bodyPr>
-          <a:lstStyle/>
-          <a:p>
-            <a:pPr algn="l"/>
-            <a:r>
-              <a:rPr sz="1200" b="1">
-                <a:solidFill>
-                  <a:srgbClr val="3F51B5"/>
-                </a:solidFill>
-              </a:rPr>
-              <a:t>기법 1  —  단일 md 부트스트랩  (AUTHORING.jeongkyeongwoo.v0.1.0.md)</a:t>
-            </a:r>
-          </a:p>
-        </p:txBody>
-      </p:sp>
-      <p:sp>
-        <p:nvSpPr>
-          <p:cNvPr id="14" name="TextBox 13"/>
-          <p:cNvSpPr txBox="1"/>
-          <p:nvPr/>
-        </p:nvSpPr>
-        <p:spPr>
-          <a:xfrm>
-            <a:off x="658368" y="2551176"/>
-            <a:ext cx="10972800" cy="530352"/>
-          </a:xfrm>
-          <a:prstGeom prst="rect">
-            <a:avLst/>
-          </a:prstGeom>
-          <a:noFill/>
-        </p:spPr>
-        <p:txBody>
-          <a:bodyPr wrap="square">
-            <a:spAutoFit/>
-          </a:bodyPr>
-          <a:lstStyle/>
-          <a:p>
-            <a:pPr algn="l"/>
-            <a:r>
-              <a:rPr sz="1000" b="0">
-                <a:solidFill>
-                  <a:srgbClr val="212121"/>
-                </a:solidFill>
-              </a:rPr>
-              <a:t>Rules · Skills · Commands 전체를 파일 하나로 자동 세팅
-새 프로젝트에 이 파일 하나만 주면 AI 운영 체계 즉시 구성</a:t>
-            </a:r>
-          </a:p>
-        </p:txBody>
-      </p:sp>
-      <p:sp>
-        <p:nvSpPr>
           <p:cNvPr id="15" name="Rectangle 14"/>
           <p:cNvSpPr/>
           <p:nvPr/>
         </p:nvSpPr>
         <p:spPr>
           <a:xfrm>
-            <a:off x="457200" y="3236976"/>
-            <a:ext cx="11247120" cy="1024128"/>
-          </a:xfrm>
-          <a:prstGeom prst="rect">
-            <a:avLst/>
-          </a:prstGeom>
-          <a:noFill/>
-          <a:ln w="10160">
-            <a:solidFill>
-              <a:srgbClr val="E0E0E0"/>
-            </a:solidFill>
+            <a:off x="457200" y="3520440"/>
+            <a:ext cx="1463040" cy="402336"/>
+          </a:xfrm>
+          <a:prstGeom prst="rect">
+            <a:avLst/>
+          </a:prstGeom>
+          <a:solidFill>
+            <a:srgbClr val="6A1B9A"/>
+          </a:solidFill>
+          <a:ln>
+            <a:noFill/>
           </a:ln>
         </p:spPr>
         <p:style>
@@ -3959,44 +3969,35 @@
       </p:sp>
       <p:sp>
         <p:nvSpPr>
-          <p:cNvPr id="16" name="Rectangle 15"/>
-          <p:cNvSpPr/>
-          <p:nvPr/>
-        </p:nvSpPr>
-        <p:spPr>
-          <a:xfrm>
-            <a:off x="457200" y="3236976"/>
-            <a:ext cx="11247120" cy="365760"/>
-          </a:xfrm>
-          <a:prstGeom prst="rect">
-            <a:avLst/>
-          </a:prstGeom>
-          <a:solidFill>
-            <a:srgbClr val="F5F5F5"/>
-          </a:solidFill>
-          <a:ln>
-            <a:noFill/>
-          </a:ln>
-        </p:spPr>
-        <p:style>
-          <a:lnRef idx="1">
-            <a:schemeClr val="accent1"/>
-          </a:lnRef>
-          <a:fillRef idx="3">
-            <a:schemeClr val="accent1"/>
-          </a:fillRef>
-          <a:effectRef idx="2">
-            <a:schemeClr val="accent1"/>
-          </a:effectRef>
-          <a:fontRef idx="minor">
-            <a:schemeClr val="lt1"/>
-          </a:fontRef>
-        </p:style>
-        <p:txBody>
-          <a:bodyPr rtlCol="0" anchor="ctr"/>
-          <a:lstStyle/>
-          <a:p>
-            <a:pPr algn="ctr"/>
+          <p:cNvPr id="16" name="TextBox 15"/>
+          <p:cNvSpPr txBox="1"/>
+          <p:nvPr/>
+        </p:nvSpPr>
+        <p:spPr>
+          <a:xfrm>
+            <a:off x="457200" y="3520440"/>
+            <a:ext cx="1463040" cy="402336"/>
+          </a:xfrm>
+          <a:prstGeom prst="rect">
+            <a:avLst/>
+          </a:prstGeom>
+          <a:noFill/>
+        </p:spPr>
+        <p:txBody>
+          <a:bodyPr wrap="square">
+            <a:spAutoFit/>
+          </a:bodyPr>
+          <a:lstStyle/>
+          <a:p>
+            <a:pPr algn="ctr"/>
+            <a:r>
+              <a:rPr sz="1100" b="1">
+                <a:solidFill>
+                  <a:srgbClr val="FFFFFF"/>
+                </a:solidFill>
+              </a:rPr>
+              <a:t>D  +2</a:t>
+            </a:r>
           </a:p>
         </p:txBody>
       </p:sp>
@@ -4008,8 +4009,8 @@
         </p:nvSpPr>
         <p:spPr>
           <a:xfrm>
-            <a:off x="658368" y="3282696"/>
-            <a:ext cx="10972800" cy="292608"/>
+            <a:off x="2057400" y="3584448"/>
+            <a:ext cx="9509760" cy="274320"/>
           </a:xfrm>
           <a:prstGeom prst="rect">
             <a:avLst/>
@@ -4029,7 +4030,7 @@
                   <a:srgbClr val="3F51B5"/>
                 </a:solidFill>
               </a:rPr>
-              <a:t>기법 3  —  단계별 보고 방식</a:t>
+              <a:t>AI Agent 리포트  —  Claude Code 활용 사례 발표</a:t>
             </a:r>
           </a:p>
         </p:txBody>
@@ -4042,8 +4043,8 @@
         </p:nvSpPr>
         <p:spPr>
           <a:xfrm>
-            <a:off x="658368" y="3675887"/>
-            <a:ext cx="10972800" cy="530352"/>
+            <a:off x="658368" y="3995928"/>
+            <a:ext cx="10789920" cy="1938528"/>
           </a:xfrm>
           <a:prstGeom prst="rect">
             <a:avLst/>
@@ -4058,322 +4059,12 @@
           <a:p>
             <a:pPr algn="l"/>
             <a:r>
-              <a:rPr sz="1000" b="0">
+              <a:rPr sz="1050" b="0">
                 <a:solidFill>
                   <a:srgbClr val="212121"/>
                 </a:solidFill>
               </a:rPr>
-              <a:t>각 구현 단계 완료 후 AI에게 결과 보고받기 → 코드 이해도 유지
-"방금 만든 기능을 3줄로 설명해줘" → 내용 이해 후 다음 단계 진행  ·  Q&amp;A 즉답 가능</a:t>
-            </a:r>
-          </a:p>
-        </p:txBody>
-      </p:sp>
-      <p:sp>
-        <p:nvSpPr>
-          <p:cNvPr id="19" name="Rectangle 18"/>
-          <p:cNvSpPr/>
-          <p:nvPr/>
-        </p:nvSpPr>
-        <p:spPr>
-          <a:xfrm>
-            <a:off x="457200" y="4361688"/>
-            <a:ext cx="11247120" cy="1024128"/>
-          </a:xfrm>
-          <a:prstGeom prst="rect">
-            <a:avLst/>
-          </a:prstGeom>
-          <a:noFill/>
-          <a:ln w="10160">
-            <a:solidFill>
-              <a:srgbClr val="E0E0E0"/>
-            </a:solidFill>
-          </a:ln>
-        </p:spPr>
-        <p:style>
-          <a:lnRef idx="1">
-            <a:schemeClr val="accent1"/>
-          </a:lnRef>
-          <a:fillRef idx="3">
-            <a:schemeClr val="accent1"/>
-          </a:fillRef>
-          <a:effectRef idx="2">
-            <a:schemeClr val="accent1"/>
-          </a:effectRef>
-          <a:fontRef idx="minor">
-            <a:schemeClr val="lt1"/>
-          </a:fontRef>
-        </p:style>
-        <p:txBody>
-          <a:bodyPr rtlCol="0" anchor="ctr"/>
-          <a:lstStyle/>
-          <a:p>
-            <a:pPr algn="ctr"/>
-          </a:p>
-        </p:txBody>
-      </p:sp>
-      <p:sp>
-        <p:nvSpPr>
-          <p:cNvPr id="20" name="Rectangle 19"/>
-          <p:cNvSpPr/>
-          <p:nvPr/>
-        </p:nvSpPr>
-        <p:spPr>
-          <a:xfrm>
-            <a:off x="457200" y="4361688"/>
-            <a:ext cx="11247120" cy="365760"/>
-          </a:xfrm>
-          <a:prstGeom prst="rect">
-            <a:avLst/>
-          </a:prstGeom>
-          <a:solidFill>
-            <a:srgbClr val="F5F5F5"/>
-          </a:solidFill>
-          <a:ln>
-            <a:noFill/>
-          </a:ln>
-        </p:spPr>
-        <p:style>
-          <a:lnRef idx="1">
-            <a:schemeClr val="accent1"/>
-          </a:lnRef>
-          <a:fillRef idx="3">
-            <a:schemeClr val="accent1"/>
-          </a:fillRef>
-          <a:effectRef idx="2">
-            <a:schemeClr val="accent1"/>
-          </a:effectRef>
-          <a:fontRef idx="minor">
-            <a:schemeClr val="lt1"/>
-          </a:fontRef>
-        </p:style>
-        <p:txBody>
-          <a:bodyPr rtlCol="0" anchor="ctr"/>
-          <a:lstStyle/>
-          <a:p>
-            <a:pPr algn="ctr"/>
-          </a:p>
-        </p:txBody>
-      </p:sp>
-      <p:sp>
-        <p:nvSpPr>
-          <p:cNvPr id="21" name="TextBox 20"/>
-          <p:cNvSpPr txBox="1"/>
-          <p:nvPr/>
-        </p:nvSpPr>
-        <p:spPr>
-          <a:xfrm>
-            <a:off x="658368" y="4407407"/>
-            <a:ext cx="10972800" cy="292608"/>
-          </a:xfrm>
-          <a:prstGeom prst="rect">
-            <a:avLst/>
-          </a:prstGeom>
-          <a:noFill/>
-        </p:spPr>
-        <p:txBody>
-          <a:bodyPr wrap="square">
-            <a:spAutoFit/>
-          </a:bodyPr>
-          <a:lstStyle/>
-          <a:p>
-            <a:pPr algn="l"/>
-            <a:r>
-              <a:rPr sz="1200" b="1">
-                <a:solidFill>
-                  <a:srgbClr val="3F51B5"/>
-                </a:solidFill>
-              </a:rPr>
-              <a:t>LLM Wiki  —  암묵지 운영  (notes/llm-wiki.md · 11개 항목)</a:t>
-            </a:r>
-          </a:p>
-        </p:txBody>
-      </p:sp>
-      <p:sp>
-        <p:nvSpPr>
-          <p:cNvPr id="22" name="TextBox 21"/>
-          <p:cNvSpPr txBox="1"/>
-          <p:nvPr/>
-        </p:nvSpPr>
-        <p:spPr>
-          <a:xfrm>
-            <a:off x="658368" y="4800600"/>
-            <a:ext cx="10972800" cy="530352"/>
-          </a:xfrm>
-          <a:prstGeom prst="rect">
-            <a:avLst/>
-          </a:prstGeom>
-          <a:noFill/>
-        </p:spPr>
-        <p:txBody>
-          <a:bodyPr wrap="square">
-            <a:spAutoFit/>
-          </a:bodyPr>
-          <a:lstStyle/>
-          <a:p>
-            <a:pPr algn="l"/>
-            <a:r>
-              <a:rPr sz="1000" b="0">
-                <a:solidFill>
-                  <a:srgbClr val="212121"/>
-                </a:solidFill>
-              </a:rPr>
-              <a:t>개발 중 배운 AI 사용 인사이트 직접 기록
-Flutter 실행 환경 / 에이전트 호출법 / ADR 개념 / python-pptx 단위 변환 등</a:t>
-            </a:r>
-          </a:p>
-        </p:txBody>
-      </p:sp>
-      <p:sp>
-        <p:nvSpPr>
-          <p:cNvPr id="23" name="Rectangle 22"/>
-          <p:cNvSpPr/>
-          <p:nvPr/>
-        </p:nvSpPr>
-        <p:spPr>
-          <a:xfrm>
-            <a:off x="457200" y="5486400"/>
-            <a:ext cx="11247120" cy="1024128"/>
-          </a:xfrm>
-          <a:prstGeom prst="rect">
-            <a:avLst/>
-          </a:prstGeom>
-          <a:noFill/>
-          <a:ln w="10160">
-            <a:solidFill>
-              <a:srgbClr val="E0E0E0"/>
-            </a:solidFill>
-          </a:ln>
-        </p:spPr>
-        <p:style>
-          <a:lnRef idx="1">
-            <a:schemeClr val="accent1"/>
-          </a:lnRef>
-          <a:fillRef idx="3">
-            <a:schemeClr val="accent1"/>
-          </a:fillRef>
-          <a:effectRef idx="2">
-            <a:schemeClr val="accent1"/>
-          </a:effectRef>
-          <a:fontRef idx="minor">
-            <a:schemeClr val="lt1"/>
-          </a:fontRef>
-        </p:style>
-        <p:txBody>
-          <a:bodyPr rtlCol="0" anchor="ctr"/>
-          <a:lstStyle/>
-          <a:p>
-            <a:pPr algn="ctr"/>
-          </a:p>
-        </p:txBody>
-      </p:sp>
-      <p:sp>
-        <p:nvSpPr>
-          <p:cNvPr id="24" name="Rectangle 23"/>
-          <p:cNvSpPr/>
-          <p:nvPr/>
-        </p:nvSpPr>
-        <p:spPr>
-          <a:xfrm>
-            <a:off x="457200" y="5486400"/>
-            <a:ext cx="11247120" cy="365760"/>
-          </a:xfrm>
-          <a:prstGeom prst="rect">
-            <a:avLst/>
-          </a:prstGeom>
-          <a:solidFill>
-            <a:srgbClr val="F5F5F5"/>
-          </a:solidFill>
-          <a:ln>
-            <a:noFill/>
-          </a:ln>
-        </p:spPr>
-        <p:style>
-          <a:lnRef idx="1">
-            <a:schemeClr val="accent1"/>
-          </a:lnRef>
-          <a:fillRef idx="3">
-            <a:schemeClr val="accent1"/>
-          </a:fillRef>
-          <a:effectRef idx="2">
-            <a:schemeClr val="accent1"/>
-          </a:effectRef>
-          <a:fontRef idx="minor">
-            <a:schemeClr val="lt1"/>
-          </a:fontRef>
-        </p:style>
-        <p:txBody>
-          <a:bodyPr rtlCol="0" anchor="ctr"/>
-          <a:lstStyle/>
-          <a:p>
-            <a:pPr algn="ctr"/>
-          </a:p>
-        </p:txBody>
-      </p:sp>
-      <p:sp>
-        <p:nvSpPr>
-          <p:cNvPr id="25" name="TextBox 24"/>
-          <p:cNvSpPr txBox="1"/>
-          <p:nvPr/>
-        </p:nvSpPr>
-        <p:spPr>
-          <a:xfrm>
-            <a:off x="658368" y="5532120"/>
-            <a:ext cx="10972800" cy="292608"/>
-          </a:xfrm>
-          <a:prstGeom prst="rect">
-            <a:avLst/>
-          </a:prstGeom>
-          <a:noFill/>
-        </p:spPr>
-        <p:txBody>
-          <a:bodyPr wrap="square">
-            <a:spAutoFit/>
-          </a:bodyPr>
-          <a:lstStyle/>
-          <a:p>
-            <a:pPr algn="l"/>
-            <a:r>
-              <a:rPr sz="1200" b="1">
-                <a:solidFill>
-                  <a:srgbClr val="3F51B5"/>
-                </a:solidFill>
-              </a:rPr>
-              <a:t>AI Agent 리포트  —  이 발표에서 Claude Code 활용 사례 직접 발표</a:t>
-            </a:r>
-          </a:p>
-        </p:txBody>
-      </p:sp>
-      <p:sp>
-        <p:nvSpPr>
-          <p:cNvPr id="26" name="TextBox 25"/>
-          <p:cNvSpPr txBox="1"/>
-          <p:nvPr/>
-        </p:nvSpPr>
-        <p:spPr>
-          <a:xfrm>
-            <a:off x="658368" y="5925312"/>
-            <a:ext cx="10972800" cy="530352"/>
-          </a:xfrm>
-          <a:prstGeom prst="rect">
-            <a:avLst/>
-          </a:prstGeom>
-          <a:noFill/>
-        </p:spPr>
-        <p:txBody>
-          <a:bodyPr wrap="square">
-            <a:spAutoFit/>
-          </a:bodyPr>
-          <a:lstStyle/>
-          <a:p>
-            <a:pPr algn="l"/>
-            <a:r>
-              <a:rPr sz="1000" b="0">
-                <a:solidFill>
-                  <a:srgbClr val="212121"/>
-                </a:solidFill>
-              </a:rPr>
-              <a:t>Claude Code(Anthropic, 2024~)로 서브에이전트 제작 · 커스텀 명령어 운영 · 단계별 보고 방식 수행
+              <a:t>Claude Code(Anthropic, 2024~)로 서브에이전트 제작 · 커스텀 명령어 운영 · 단계별 개발 수행
 최근 6개월 이내 지속 업데이트 도구 · 출처: claude.ai/code  (공식 문서)</a:t>
             </a:r>
           </a:p>
@@ -4467,14 +4158,48 @@
                   <a:srgbClr val="3F51B5"/>
                 </a:solidFill>
               </a:rPr>
-              <a:t>ADR-0001  —  모바일 프레임워크 선택</a:t>
-            </a:r>
-          </a:p>
-        </p:txBody>
-      </p:sp>
-      <p:sp>
-        <p:nvSpPr>
-          <p:cNvPr id="4" name="Rectangle 3"/>
+              <a:t>9.  개발 방식 — AI 워크플로우</a:t>
+            </a:r>
+          </a:p>
+        </p:txBody>
+      </p:sp>
+      <p:sp>
+        <p:nvSpPr>
+          <p:cNvPr id="4" name="TextBox 3"/>
+          <p:cNvSpPr txBox="1"/>
+          <p:nvPr/>
+        </p:nvSpPr>
+        <p:spPr>
+          <a:xfrm>
+            <a:off x="457200" y="621792"/>
+            <a:ext cx="10972800" cy="274320"/>
+          </a:xfrm>
+          <a:prstGeom prst="rect">
+            <a:avLst/>
+          </a:prstGeom>
+          <a:noFill/>
+        </p:spPr>
+        <p:txBody>
+          <a:bodyPr wrap="square">
+            <a:spAutoFit/>
+          </a:bodyPr>
+          <a:lstStyle/>
+          <a:p>
+            <a:pPr algn="l"/>
+            <a:r>
+              <a:rPr sz="1100" b="0">
+                <a:solidFill>
+                  <a:srgbClr val="9E9E9E"/>
+                </a:solidFill>
+              </a:rPr>
+              <a:t>정경우  (1/2)</a:t>
+            </a:r>
+          </a:p>
+        </p:txBody>
+      </p:sp>
+      <p:sp>
+        <p:nvSpPr>
+          <p:cNvPr id="5" name="Rectangle 4"/>
           <p:cNvSpPr/>
           <p:nvPr/>
         </p:nvSpPr>
@@ -4517,7 +4242,7 @@
       </p:sp>
       <p:sp>
         <p:nvSpPr>
-          <p:cNvPr id="5" name="TextBox 4"/>
+          <p:cNvPr id="6" name="TextBox 5"/>
           <p:cNvSpPr txBox="1"/>
           <p:nvPr/>
         </p:nvSpPr>
@@ -4544,41 +4269,7 @@
                   <a:srgbClr val="9E9E9E"/>
                 </a:solidFill>
               </a:rPr>
-              <a:t>11 / 14</a:t>
-            </a:r>
-          </a:p>
-        </p:txBody>
-      </p:sp>
-      <p:sp>
-        <p:nvSpPr>
-          <p:cNvPr id="6" name="TextBox 5"/>
-          <p:cNvSpPr txBox="1"/>
-          <p:nvPr/>
-        </p:nvSpPr>
-        <p:spPr>
-          <a:xfrm>
-            <a:off x="457200" y="987552"/>
-            <a:ext cx="10972800" cy="347472"/>
-          </a:xfrm>
-          <a:prstGeom prst="rect">
-            <a:avLst/>
-          </a:prstGeom>
-          <a:noFill/>
-        </p:spPr>
-        <p:txBody>
-          <a:bodyPr wrap="square">
-            <a:spAutoFit/>
-          </a:bodyPr>
-          <a:lstStyle/>
-          <a:p>
-            <a:pPr algn="l"/>
-            <a:r>
-              <a:rPr sz="1200" b="0">
-                <a:solidFill>
-                  <a:srgbClr val="9E9E9E"/>
-                </a:solidFill>
-              </a:rPr>
-              <a:t>선택지 비교</a:t>
+              <a:t>11 / 16</a:t>
             </a:r>
           </a:p>
         </p:txBody>
@@ -4591,8 +4282,8 @@
         </p:nvSpPr>
         <p:spPr>
           <a:xfrm>
-            <a:off x="457200" y="1389888"/>
-            <a:ext cx="11247120" cy="1024128"/>
+            <a:off x="457200" y="914400"/>
+            <a:ext cx="11247120" cy="1691640"/>
           </a:xfrm>
           <a:prstGeom prst="rect">
             <a:avLst/>
@@ -4628,35 +4319,44 @@
       </p:sp>
       <p:sp>
         <p:nvSpPr>
-          <p:cNvPr id="8" name="TextBox 7"/>
-          <p:cNvSpPr txBox="1"/>
-          <p:nvPr/>
-        </p:nvSpPr>
-        <p:spPr>
-          <a:xfrm>
-            <a:off x="594360" y="1499616"/>
-            <a:ext cx="11064240" cy="886968"/>
-          </a:xfrm>
-          <a:prstGeom prst="rect">
-            <a:avLst/>
-          </a:prstGeom>
-          <a:noFill/>
-        </p:spPr>
-        <p:txBody>
-          <a:bodyPr wrap="square">
-            <a:spAutoFit/>
-          </a:bodyPr>
-          <a:lstStyle/>
-          <a:p>
-            <a:pPr algn="l"/>
-            <a:r>
-              <a:rPr sz="1600" b="0">
-                <a:solidFill>
-                  <a:srgbClr val="9E9E9E"/>
-                </a:solidFill>
-              </a:rPr>
-              <a:t>React Native</a:t>
-            </a:r>
+          <p:cNvPr id="8" name="Rectangle 7"/>
+          <p:cNvSpPr/>
+          <p:nvPr/>
+        </p:nvSpPr>
+        <p:spPr>
+          <a:xfrm>
+            <a:off x="457200" y="914400"/>
+            <a:ext cx="11247120" cy="402336"/>
+          </a:xfrm>
+          <a:prstGeom prst="rect">
+            <a:avLst/>
+          </a:prstGeom>
+          <a:solidFill>
+            <a:srgbClr val="F5F5F5"/>
+          </a:solidFill>
+          <a:ln>
+            <a:noFill/>
+          </a:ln>
+        </p:spPr>
+        <p:style>
+          <a:lnRef idx="1">
+            <a:schemeClr val="accent1"/>
+          </a:lnRef>
+          <a:fillRef idx="3">
+            <a:schemeClr val="accent1"/>
+          </a:fillRef>
+          <a:effectRef idx="2">
+            <a:schemeClr val="accent1"/>
+          </a:effectRef>
+          <a:fontRef idx="minor">
+            <a:schemeClr val="lt1"/>
+          </a:fontRef>
+        </p:style>
+        <p:txBody>
+          <a:bodyPr rtlCol="0" anchor="ctr"/>
+          <a:lstStyle/>
+          <a:p>
+            <a:pPr algn="ctr"/>
           </a:p>
         </p:txBody>
       </p:sp>
@@ -4668,8 +4368,154 @@
         </p:nvSpPr>
         <p:spPr>
           <a:xfrm>
-            <a:off x="457200" y="2651760"/>
-            <a:ext cx="11247120" cy="1024128"/>
+            <a:off x="457200" y="914400"/>
+            <a:ext cx="1463040" cy="402336"/>
+          </a:xfrm>
+          <a:prstGeom prst="rect">
+            <a:avLst/>
+          </a:prstGeom>
+          <a:solidFill>
+            <a:srgbClr val="E65C00"/>
+          </a:solidFill>
+          <a:ln>
+            <a:noFill/>
+          </a:ln>
+        </p:spPr>
+        <p:style>
+          <a:lnRef idx="1">
+            <a:schemeClr val="accent1"/>
+          </a:lnRef>
+          <a:fillRef idx="3">
+            <a:schemeClr val="accent1"/>
+          </a:fillRef>
+          <a:effectRef idx="2">
+            <a:schemeClr val="accent1"/>
+          </a:effectRef>
+          <a:fontRef idx="minor">
+            <a:schemeClr val="lt1"/>
+          </a:fontRef>
+        </p:style>
+        <p:txBody>
+          <a:bodyPr rtlCol="0" anchor="ctr"/>
+          <a:lstStyle/>
+          <a:p>
+            <a:pPr algn="ctr"/>
+          </a:p>
+        </p:txBody>
+      </p:sp>
+      <p:sp>
+        <p:nvSpPr>
+          <p:cNvPr id="10" name="TextBox 9"/>
+          <p:cNvSpPr txBox="1"/>
+          <p:nvPr/>
+        </p:nvSpPr>
+        <p:spPr>
+          <a:xfrm>
+            <a:off x="457200" y="914400"/>
+            <a:ext cx="1463040" cy="402336"/>
+          </a:xfrm>
+          <a:prstGeom prst="rect">
+            <a:avLst/>
+          </a:prstGeom>
+          <a:noFill/>
+        </p:spPr>
+        <p:txBody>
+          <a:bodyPr wrap="square">
+            <a:spAutoFit/>
+          </a:bodyPr>
+          <a:lstStyle/>
+          <a:p>
+            <a:pPr algn="ctr"/>
+            <a:r>
+              <a:rPr sz="1100" b="1">
+                <a:solidFill>
+                  <a:srgbClr val="FFFFFF"/>
+                </a:solidFill>
+              </a:rPr>
+              <a:t>A  +1</a:t>
+            </a:r>
+          </a:p>
+        </p:txBody>
+      </p:sp>
+      <p:sp>
+        <p:nvSpPr>
+          <p:cNvPr id="11" name="TextBox 10"/>
+          <p:cNvSpPr txBox="1"/>
+          <p:nvPr/>
+        </p:nvSpPr>
+        <p:spPr>
+          <a:xfrm>
+            <a:off x="2057400" y="978408"/>
+            <a:ext cx="9509760" cy="274320"/>
+          </a:xfrm>
+          <a:prstGeom prst="rect">
+            <a:avLst/>
+          </a:prstGeom>
+          <a:noFill/>
+        </p:spPr>
+        <p:txBody>
+          <a:bodyPr wrap="square">
+            <a:spAutoFit/>
+          </a:bodyPr>
+          <a:lstStyle/>
+          <a:p>
+            <a:pPr algn="l"/>
+            <a:r>
+              <a:rPr sz="1200" b="1">
+                <a:solidFill>
+                  <a:srgbClr val="3F51B5"/>
+                </a:solidFill>
+              </a:rPr>
+              <a:t>pre-presentation-checker 에이전트 직접 제작 + /pc 실사용</a:t>
+            </a:r>
+          </a:p>
+        </p:txBody>
+      </p:sp>
+      <p:sp>
+        <p:nvSpPr>
+          <p:cNvPr id="12" name="TextBox 11"/>
+          <p:cNvSpPr txBox="1"/>
+          <p:nvPr/>
+        </p:nvSpPr>
+        <p:spPr>
+          <a:xfrm>
+            <a:off x="658368" y="1389888"/>
+            <a:ext cx="10789920" cy="1161288"/>
+          </a:xfrm>
+          <a:prstGeom prst="rect">
+            <a:avLst/>
+          </a:prstGeom>
+          <a:noFill/>
+        </p:spPr>
+        <p:txBody>
+          <a:bodyPr wrap="square">
+            <a:spAutoFit/>
+          </a:bodyPr>
+          <a:lstStyle/>
+          <a:p>
+            <a:pPr algn="l"/>
+            <a:r>
+              <a:rPr sz="1050" b="0">
+                <a:solidFill>
+                  <a:srgbClr val="212121"/>
+                </a:solidFill>
+              </a:rPr>
+              <a:t>.claude/agents/pre-presentation-checker.md  직접 제작
+발표 전 제출 서류 · 가산점 · 앱 상태를 평가 루브릭 기준으로 자동 점검 → 미완료 항목 우선 보고</a:t>
+            </a:r>
+          </a:p>
+        </p:txBody>
+      </p:sp>
+      <p:sp>
+        <p:nvSpPr>
+          <p:cNvPr id="13" name="Rectangle 12"/>
+          <p:cNvSpPr/>
+          <p:nvPr/>
+        </p:nvSpPr>
+        <p:spPr>
+          <a:xfrm>
+            <a:off x="457200" y="2743200"/>
+            <a:ext cx="11247120" cy="1691640"/>
           </a:xfrm>
           <a:prstGeom prst="rect">
             <a:avLst/>
@@ -4705,57 +4551,23 @@
       </p:sp>
       <p:sp>
         <p:nvSpPr>
-          <p:cNvPr id="10" name="TextBox 9"/>
-          <p:cNvSpPr txBox="1"/>
-          <p:nvPr/>
-        </p:nvSpPr>
-        <p:spPr>
-          <a:xfrm>
-            <a:off x="594360" y="2761488"/>
-            <a:ext cx="11064240" cy="886968"/>
-          </a:xfrm>
-          <a:prstGeom prst="rect">
-            <a:avLst/>
-          </a:prstGeom>
-          <a:noFill/>
-        </p:spPr>
-        <p:txBody>
-          <a:bodyPr wrap="square">
-            <a:spAutoFit/>
-          </a:bodyPr>
-          <a:lstStyle/>
-          <a:p>
-            <a:pPr algn="l"/>
-            <a:r>
-              <a:rPr sz="1600" b="0">
-                <a:solidFill>
-                  <a:srgbClr val="9E9E9E"/>
-                </a:solidFill>
-              </a:rPr>
-              <a:t>안드로이드 전용 개발</a:t>
-            </a:r>
-          </a:p>
-        </p:txBody>
-      </p:sp>
-      <p:sp>
-        <p:nvSpPr>
-          <p:cNvPr id="11" name="Rectangle 10"/>
+          <p:cNvPr id="14" name="Rectangle 13"/>
           <p:cNvSpPr/>
           <p:nvPr/>
         </p:nvSpPr>
         <p:spPr>
           <a:xfrm>
-            <a:off x="457200" y="3913631"/>
-            <a:ext cx="11247120" cy="1024128"/>
-          </a:xfrm>
-          <a:prstGeom prst="rect">
-            <a:avLst/>
-          </a:prstGeom>
-          <a:noFill/>
-          <a:ln w="10160">
-            <a:solidFill>
-              <a:srgbClr val="E0E0E0"/>
-            </a:solidFill>
+            <a:off x="457200" y="2743200"/>
+            <a:ext cx="11247120" cy="402336"/>
+          </a:xfrm>
+          <a:prstGeom prst="rect">
+            <a:avLst/>
+          </a:prstGeom>
+          <a:solidFill>
+            <a:srgbClr val="F5F5F5"/>
+          </a:solidFill>
+          <a:ln>
+            <a:noFill/>
           </a:ln>
         </p:spPr>
         <p:style>
@@ -4782,48 +4594,14 @@
       </p:sp>
       <p:sp>
         <p:nvSpPr>
-          <p:cNvPr id="12" name="TextBox 11"/>
-          <p:cNvSpPr txBox="1"/>
-          <p:nvPr/>
-        </p:nvSpPr>
-        <p:spPr>
-          <a:xfrm>
-            <a:off x="594360" y="4023359"/>
-            <a:ext cx="11064240" cy="886968"/>
-          </a:xfrm>
-          <a:prstGeom prst="rect">
-            <a:avLst/>
-          </a:prstGeom>
-          <a:noFill/>
-        </p:spPr>
-        <p:txBody>
-          <a:bodyPr wrap="square">
-            <a:spAutoFit/>
-          </a:bodyPr>
-          <a:lstStyle/>
-          <a:p>
-            <a:pPr algn="l"/>
-            <a:r>
-              <a:rPr sz="1600" b="0">
-                <a:solidFill>
-                  <a:srgbClr val="9E9E9E"/>
-                </a:solidFill>
-              </a:rPr>
-              <a:t>아이폰 전용 개발</a:t>
-            </a:r>
-          </a:p>
-        </p:txBody>
-      </p:sp>
-      <p:sp>
-        <p:nvSpPr>
-          <p:cNvPr id="13" name="Rectangle 12"/>
+          <p:cNvPr id="15" name="Rectangle 14"/>
           <p:cNvSpPr/>
           <p:nvPr/>
         </p:nvSpPr>
         <p:spPr>
           <a:xfrm>
-            <a:off x="457200" y="5175504"/>
-            <a:ext cx="11247120" cy="1024128"/>
+            <a:off x="457200" y="2743200"/>
+            <a:ext cx="1463040" cy="402336"/>
           </a:xfrm>
           <a:prstGeom prst="rect">
             <a:avLst/>
@@ -4859,14 +4637,48 @@
       </p:sp>
       <p:sp>
         <p:nvSpPr>
-          <p:cNvPr id="14" name="TextBox 13"/>
-          <p:cNvSpPr txBox="1"/>
-          <p:nvPr/>
-        </p:nvSpPr>
-        <p:spPr>
-          <a:xfrm>
-            <a:off x="594360" y="5285232"/>
-            <a:ext cx="11064240" cy="886968"/>
+          <p:cNvPr id="16" name="TextBox 15"/>
+          <p:cNvSpPr txBox="1"/>
+          <p:nvPr/>
+        </p:nvSpPr>
+        <p:spPr>
+          <a:xfrm>
+            <a:off x="457200" y="2743200"/>
+            <a:ext cx="1463040" cy="402336"/>
+          </a:xfrm>
+          <a:prstGeom prst="rect">
+            <a:avLst/>
+          </a:prstGeom>
+          <a:noFill/>
+        </p:spPr>
+        <p:txBody>
+          <a:bodyPr wrap="square">
+            <a:spAutoFit/>
+          </a:bodyPr>
+          <a:lstStyle/>
+          <a:p>
+            <a:pPr algn="ctr"/>
+            <a:r>
+              <a:rPr sz="1100" b="1">
+                <a:solidFill>
+                  <a:srgbClr val="FFFFFF"/>
+                </a:solidFill>
+              </a:rPr>
+              <a:t>B  +2</a:t>
+            </a:r>
+          </a:p>
+        </p:txBody>
+      </p:sp>
+      <p:sp>
+        <p:nvSpPr>
+          <p:cNvPr id="17" name="TextBox 16"/>
+          <p:cNvSpPr txBox="1"/>
+          <p:nvPr/>
+        </p:nvSpPr>
+        <p:spPr>
+          <a:xfrm>
+            <a:off x="2057400" y="2807208"/>
+            <a:ext cx="9509760" cy="274320"/>
           </a:xfrm>
           <a:prstGeom prst="rect">
             <a:avLst/>
@@ -4881,12 +4693,279 @@
           <a:p>
             <a:pPr algn="l"/>
             <a:r>
-              <a:rPr sz="1600" b="1">
+              <a:rPr sz="1200" b="1">
+                <a:solidFill>
+                  <a:srgbClr val="3F51B5"/>
+                </a:solidFill>
+              </a:rPr>
+              <a:t>기법 1  —  단일 md 부트스트랩  (AUTHORING.jeongkyeongwoo.v0.1.0.md)</a:t>
+            </a:r>
+          </a:p>
+        </p:txBody>
+      </p:sp>
+      <p:sp>
+        <p:nvSpPr>
+          <p:cNvPr id="18" name="TextBox 17"/>
+          <p:cNvSpPr txBox="1"/>
+          <p:nvPr/>
+        </p:nvSpPr>
+        <p:spPr>
+          <a:xfrm>
+            <a:off x="658368" y="3218688"/>
+            <a:ext cx="10789920" cy="1161288"/>
+          </a:xfrm>
+          <a:prstGeom prst="rect">
+            <a:avLst/>
+          </a:prstGeom>
+          <a:noFill/>
+        </p:spPr>
+        <p:txBody>
+          <a:bodyPr wrap="square">
+            <a:spAutoFit/>
+          </a:bodyPr>
+          <a:lstStyle/>
+          <a:p>
+            <a:pPr algn="l"/>
+            <a:r>
+              <a:rPr sz="1050" b="0">
+                <a:solidFill>
+                  <a:srgbClr val="212121"/>
+                </a:solidFill>
+              </a:rPr>
+              <a:t>Rules · Skills · Commands 전체를 파일 하나로 자동 세팅
+새 프로젝트에 이 파일 하나만 주면 AI 운영 체계 즉시 구성</a:t>
+            </a:r>
+          </a:p>
+        </p:txBody>
+      </p:sp>
+      <p:sp>
+        <p:nvSpPr>
+          <p:cNvPr id="19" name="Rectangle 18"/>
+          <p:cNvSpPr/>
+          <p:nvPr/>
+        </p:nvSpPr>
+        <p:spPr>
+          <a:xfrm>
+            <a:off x="457200" y="4572000"/>
+            <a:ext cx="11247120" cy="1691640"/>
+          </a:xfrm>
+          <a:prstGeom prst="rect">
+            <a:avLst/>
+          </a:prstGeom>
+          <a:noFill/>
+          <a:ln w="10160">
+            <a:solidFill>
+              <a:srgbClr val="E0E0E0"/>
+            </a:solidFill>
+          </a:ln>
+        </p:spPr>
+        <p:style>
+          <a:lnRef idx="1">
+            <a:schemeClr val="accent1"/>
+          </a:lnRef>
+          <a:fillRef idx="3">
+            <a:schemeClr val="accent1"/>
+          </a:fillRef>
+          <a:effectRef idx="2">
+            <a:schemeClr val="accent1"/>
+          </a:effectRef>
+          <a:fontRef idx="minor">
+            <a:schemeClr val="lt1"/>
+          </a:fontRef>
+        </p:style>
+        <p:txBody>
+          <a:bodyPr rtlCol="0" anchor="ctr"/>
+          <a:lstStyle/>
+          <a:p>
+            <a:pPr algn="ctr"/>
+          </a:p>
+        </p:txBody>
+      </p:sp>
+      <p:sp>
+        <p:nvSpPr>
+          <p:cNvPr id="20" name="Rectangle 19"/>
+          <p:cNvSpPr/>
+          <p:nvPr/>
+        </p:nvSpPr>
+        <p:spPr>
+          <a:xfrm>
+            <a:off x="457200" y="4572000"/>
+            <a:ext cx="11247120" cy="402336"/>
+          </a:xfrm>
+          <a:prstGeom prst="rect">
+            <a:avLst/>
+          </a:prstGeom>
+          <a:solidFill>
+            <a:srgbClr val="F5F5F5"/>
+          </a:solidFill>
+          <a:ln>
+            <a:noFill/>
+          </a:ln>
+        </p:spPr>
+        <p:style>
+          <a:lnRef idx="1">
+            <a:schemeClr val="accent1"/>
+          </a:lnRef>
+          <a:fillRef idx="3">
+            <a:schemeClr val="accent1"/>
+          </a:fillRef>
+          <a:effectRef idx="2">
+            <a:schemeClr val="accent1"/>
+          </a:effectRef>
+          <a:fontRef idx="minor">
+            <a:schemeClr val="lt1"/>
+          </a:fontRef>
+        </p:style>
+        <p:txBody>
+          <a:bodyPr rtlCol="0" anchor="ctr"/>
+          <a:lstStyle/>
+          <a:p>
+            <a:pPr algn="ctr"/>
+          </a:p>
+        </p:txBody>
+      </p:sp>
+      <p:sp>
+        <p:nvSpPr>
+          <p:cNvPr id="21" name="Rectangle 20"/>
+          <p:cNvSpPr/>
+          <p:nvPr/>
+        </p:nvSpPr>
+        <p:spPr>
+          <a:xfrm>
+            <a:off x="457200" y="4572000"/>
+            <a:ext cx="1463040" cy="402336"/>
+          </a:xfrm>
+          <a:prstGeom prst="rect">
+            <a:avLst/>
+          </a:prstGeom>
+          <a:solidFill>
+            <a:srgbClr val="3F51B5"/>
+          </a:solidFill>
+          <a:ln>
+            <a:noFill/>
+          </a:ln>
+        </p:spPr>
+        <p:style>
+          <a:lnRef idx="1">
+            <a:schemeClr val="accent1"/>
+          </a:lnRef>
+          <a:fillRef idx="3">
+            <a:schemeClr val="accent1"/>
+          </a:fillRef>
+          <a:effectRef idx="2">
+            <a:schemeClr val="accent1"/>
+          </a:effectRef>
+          <a:fontRef idx="minor">
+            <a:schemeClr val="lt1"/>
+          </a:fontRef>
+        </p:style>
+        <p:txBody>
+          <a:bodyPr rtlCol="0" anchor="ctr"/>
+          <a:lstStyle/>
+          <a:p>
+            <a:pPr algn="ctr"/>
+          </a:p>
+        </p:txBody>
+      </p:sp>
+      <p:sp>
+        <p:nvSpPr>
+          <p:cNvPr id="22" name="TextBox 21"/>
+          <p:cNvSpPr txBox="1"/>
+          <p:nvPr/>
+        </p:nvSpPr>
+        <p:spPr>
+          <a:xfrm>
+            <a:off x="457200" y="4572000"/>
+            <a:ext cx="1463040" cy="402336"/>
+          </a:xfrm>
+          <a:prstGeom prst="rect">
+            <a:avLst/>
+          </a:prstGeom>
+          <a:noFill/>
+        </p:spPr>
+        <p:txBody>
+          <a:bodyPr wrap="square">
+            <a:spAutoFit/>
+          </a:bodyPr>
+          <a:lstStyle/>
+          <a:p>
+            <a:pPr algn="ctr"/>
+            <a:r>
+              <a:rPr sz="1100" b="1">
                 <a:solidFill>
                   <a:srgbClr val="FFFFFF"/>
                 </a:solidFill>
               </a:rPr>
-              <a:t>✓  Flutter</a:t>
+              <a:t>B  +2</a:t>
+            </a:r>
+          </a:p>
+        </p:txBody>
+      </p:sp>
+      <p:sp>
+        <p:nvSpPr>
+          <p:cNvPr id="23" name="TextBox 22"/>
+          <p:cNvSpPr txBox="1"/>
+          <p:nvPr/>
+        </p:nvSpPr>
+        <p:spPr>
+          <a:xfrm>
+            <a:off x="2057400" y="4636008"/>
+            <a:ext cx="9509760" cy="274320"/>
+          </a:xfrm>
+          <a:prstGeom prst="rect">
+            <a:avLst/>
+          </a:prstGeom>
+          <a:noFill/>
+        </p:spPr>
+        <p:txBody>
+          <a:bodyPr wrap="square">
+            <a:spAutoFit/>
+          </a:bodyPr>
+          <a:lstStyle/>
+          <a:p>
+            <a:pPr algn="l"/>
+            <a:r>
+              <a:rPr sz="1200" b="1">
+                <a:solidFill>
+                  <a:srgbClr val="3F51B5"/>
+                </a:solidFill>
+              </a:rPr>
+              <a:t>기법 3  —  단계별 보고 방식</a:t>
+            </a:r>
+          </a:p>
+        </p:txBody>
+      </p:sp>
+      <p:sp>
+        <p:nvSpPr>
+          <p:cNvPr id="24" name="TextBox 23"/>
+          <p:cNvSpPr txBox="1"/>
+          <p:nvPr/>
+        </p:nvSpPr>
+        <p:spPr>
+          <a:xfrm>
+            <a:off x="658368" y="5047488"/>
+            <a:ext cx="10789920" cy="1161288"/>
+          </a:xfrm>
+          <a:prstGeom prst="rect">
+            <a:avLst/>
+          </a:prstGeom>
+          <a:noFill/>
+        </p:spPr>
+        <p:txBody>
+          <a:bodyPr wrap="square">
+            <a:spAutoFit/>
+          </a:bodyPr>
+          <a:lstStyle/>
+          <a:p>
+            <a:pPr algn="l"/>
+            <a:r>
+              <a:rPr sz="1050" b="0">
+                <a:solidFill>
+                  <a:srgbClr val="212121"/>
+                </a:solidFill>
+              </a:rPr>
+              <a:t>각 구현 단계 완료 후 AI에게 결과 보고받기 → 코드 이해도 유지
+"방금 만든 기능을 3줄로 설명해줘" → 내용 이해 후 다음 단계 진행  ·  Q&amp;A 즉답 가능</a:t>
             </a:r>
           </a:p>
         </p:txBody>
@@ -4979,14 +5058,48 @@
                   <a:srgbClr val="3F51B5"/>
                 </a:solidFill>
               </a:rPr>
-              <a:t>ADR-0002  —  아키텍처 패턴 선택</a:t>
-            </a:r>
-          </a:p>
-        </p:txBody>
-      </p:sp>
-      <p:sp>
-        <p:nvSpPr>
-          <p:cNvPr id="4" name="Rectangle 3"/>
+              <a:t>9.  개발 방식 — AI 워크플로우</a:t>
+            </a:r>
+          </a:p>
+        </p:txBody>
+      </p:sp>
+      <p:sp>
+        <p:nvSpPr>
+          <p:cNvPr id="4" name="TextBox 3"/>
+          <p:cNvSpPr txBox="1"/>
+          <p:nvPr/>
+        </p:nvSpPr>
+        <p:spPr>
+          <a:xfrm>
+            <a:off x="457200" y="621792"/>
+            <a:ext cx="10972800" cy="274320"/>
+          </a:xfrm>
+          <a:prstGeom prst="rect">
+            <a:avLst/>
+          </a:prstGeom>
+          <a:noFill/>
+        </p:spPr>
+        <p:txBody>
+          <a:bodyPr wrap="square">
+            <a:spAutoFit/>
+          </a:bodyPr>
+          <a:lstStyle/>
+          <a:p>
+            <a:pPr algn="l"/>
+            <a:r>
+              <a:rPr sz="1100" b="0">
+                <a:solidFill>
+                  <a:srgbClr val="9E9E9E"/>
+                </a:solidFill>
+              </a:rPr>
+              <a:t>정경우  (2/2)</a:t>
+            </a:r>
+          </a:p>
+        </p:txBody>
+      </p:sp>
+      <p:sp>
+        <p:nvSpPr>
+          <p:cNvPr id="5" name="Rectangle 4"/>
           <p:cNvSpPr/>
           <p:nvPr/>
         </p:nvSpPr>
@@ -5029,7 +5142,7 @@
       </p:sp>
       <p:sp>
         <p:nvSpPr>
-          <p:cNvPr id="5" name="TextBox 4"/>
+          <p:cNvPr id="6" name="TextBox 5"/>
           <p:cNvSpPr txBox="1"/>
           <p:nvPr/>
         </p:nvSpPr>
@@ -5056,41 +5169,7 @@
                   <a:srgbClr val="9E9E9E"/>
                 </a:solidFill>
               </a:rPr>
-              <a:t>12 / 14</a:t>
-            </a:r>
-          </a:p>
-        </p:txBody>
-      </p:sp>
-      <p:sp>
-        <p:nvSpPr>
-          <p:cNvPr id="6" name="TextBox 5"/>
-          <p:cNvSpPr txBox="1"/>
-          <p:nvPr/>
-        </p:nvSpPr>
-        <p:spPr>
-          <a:xfrm>
-            <a:off x="457200" y="987552"/>
-            <a:ext cx="5486400" cy="347472"/>
-          </a:xfrm>
-          <a:prstGeom prst="rect">
-            <a:avLst/>
-          </a:prstGeom>
-          <a:noFill/>
-        </p:spPr>
-        <p:txBody>
-          <a:bodyPr wrap="square">
-            <a:spAutoFit/>
-          </a:bodyPr>
-          <a:lstStyle/>
-          <a:p>
-            <a:pPr algn="l"/>
-            <a:r>
-              <a:rPr sz="1200" b="0">
-                <a:solidFill>
-                  <a:srgbClr val="9E9E9E"/>
-                </a:solidFill>
-              </a:rPr>
-              <a:t>선택지 비교</a:t>
+              <a:t>12 / 16</a:t>
             </a:r>
           </a:p>
         </p:txBody>
@@ -5103,8 +5182,8 @@
         </p:nvSpPr>
         <p:spPr>
           <a:xfrm>
-            <a:off x="457200" y="1389888"/>
-            <a:ext cx="5486400" cy="1024128"/>
+            <a:off x="457200" y="822960"/>
+            <a:ext cx="11247120" cy="2468880"/>
           </a:xfrm>
           <a:prstGeom prst="rect">
             <a:avLst/>
@@ -5140,35 +5219,44 @@
       </p:sp>
       <p:sp>
         <p:nvSpPr>
-          <p:cNvPr id="8" name="TextBox 7"/>
-          <p:cNvSpPr txBox="1"/>
-          <p:nvPr/>
-        </p:nvSpPr>
-        <p:spPr>
-          <a:xfrm>
-            <a:off x="594360" y="1499616"/>
-            <a:ext cx="5303520" cy="886968"/>
-          </a:xfrm>
-          <a:prstGeom prst="rect">
-            <a:avLst/>
-          </a:prstGeom>
-          <a:noFill/>
-        </p:spPr>
-        <p:txBody>
-          <a:bodyPr wrap="square">
-            <a:spAutoFit/>
-          </a:bodyPr>
-          <a:lstStyle/>
-          <a:p>
-            <a:pPr algn="l"/>
-            <a:r>
-              <a:rPr sz="1600" b="0">
-                <a:solidFill>
-                  <a:srgbClr val="9E9E9E"/>
-                </a:solidFill>
-              </a:rPr>
-              <a:t>역할 구분 없이 한 파일</a:t>
-            </a:r>
+          <p:cNvPr id="8" name="Rectangle 7"/>
+          <p:cNvSpPr/>
+          <p:nvPr/>
+        </p:nvSpPr>
+        <p:spPr>
+          <a:xfrm>
+            <a:off x="457200" y="822960"/>
+            <a:ext cx="11247120" cy="402336"/>
+          </a:xfrm>
+          <a:prstGeom prst="rect">
+            <a:avLst/>
+          </a:prstGeom>
+          <a:solidFill>
+            <a:srgbClr val="F5F5F5"/>
+          </a:solidFill>
+          <a:ln>
+            <a:noFill/>
+          </a:ln>
+        </p:spPr>
+        <p:style>
+          <a:lnRef idx="1">
+            <a:schemeClr val="accent1"/>
+          </a:lnRef>
+          <a:fillRef idx="3">
+            <a:schemeClr val="accent1"/>
+          </a:fillRef>
+          <a:effectRef idx="2">
+            <a:schemeClr val="accent1"/>
+          </a:effectRef>
+          <a:fontRef idx="minor">
+            <a:schemeClr val="lt1"/>
+          </a:fontRef>
+        </p:style>
+        <p:txBody>
+          <a:bodyPr rtlCol="0" anchor="ctr"/>
+          <a:lstStyle/>
+          <a:p>
+            <a:pPr algn="ctr"/>
           </a:p>
         </p:txBody>
       </p:sp>
@@ -5180,8 +5268,154 @@
         </p:nvSpPr>
         <p:spPr>
           <a:xfrm>
-            <a:off x="457200" y="2651760"/>
-            <a:ext cx="5486400" cy="1024128"/>
+            <a:off x="457200" y="822960"/>
+            <a:ext cx="1463040" cy="402336"/>
+          </a:xfrm>
+          <a:prstGeom prst="rect">
+            <a:avLst/>
+          </a:prstGeom>
+          <a:solidFill>
+            <a:srgbClr val="2E7D32"/>
+          </a:solidFill>
+          <a:ln>
+            <a:noFill/>
+          </a:ln>
+        </p:spPr>
+        <p:style>
+          <a:lnRef idx="1">
+            <a:schemeClr val="accent1"/>
+          </a:lnRef>
+          <a:fillRef idx="3">
+            <a:schemeClr val="accent1"/>
+          </a:fillRef>
+          <a:effectRef idx="2">
+            <a:schemeClr val="accent1"/>
+          </a:effectRef>
+          <a:fontRef idx="minor">
+            <a:schemeClr val="lt1"/>
+          </a:fontRef>
+        </p:style>
+        <p:txBody>
+          <a:bodyPr rtlCol="0" anchor="ctr"/>
+          <a:lstStyle/>
+          <a:p>
+            <a:pPr algn="ctr"/>
+          </a:p>
+        </p:txBody>
+      </p:sp>
+      <p:sp>
+        <p:nvSpPr>
+          <p:cNvPr id="10" name="TextBox 9"/>
+          <p:cNvSpPr txBox="1"/>
+          <p:nvPr/>
+        </p:nvSpPr>
+        <p:spPr>
+          <a:xfrm>
+            <a:off x="457200" y="822960"/>
+            <a:ext cx="1463040" cy="402336"/>
+          </a:xfrm>
+          <a:prstGeom prst="rect">
+            <a:avLst/>
+          </a:prstGeom>
+          <a:noFill/>
+        </p:spPr>
+        <p:txBody>
+          <a:bodyPr wrap="square">
+            <a:spAutoFit/>
+          </a:bodyPr>
+          <a:lstStyle/>
+          <a:p>
+            <a:pPr algn="ctr"/>
+            <a:r>
+              <a:rPr sz="1100" b="1">
+                <a:solidFill>
+                  <a:srgbClr val="FFFFFF"/>
+                </a:solidFill>
+              </a:rPr>
+              <a:t>C  +1</a:t>
+            </a:r>
+          </a:p>
+        </p:txBody>
+      </p:sp>
+      <p:sp>
+        <p:nvSpPr>
+          <p:cNvPr id="11" name="TextBox 10"/>
+          <p:cNvSpPr txBox="1"/>
+          <p:nvPr/>
+        </p:nvSpPr>
+        <p:spPr>
+          <a:xfrm>
+            <a:off x="2057400" y="886968"/>
+            <a:ext cx="9509760" cy="274320"/>
+          </a:xfrm>
+          <a:prstGeom prst="rect">
+            <a:avLst/>
+          </a:prstGeom>
+          <a:noFill/>
+        </p:spPr>
+        <p:txBody>
+          <a:bodyPr wrap="square">
+            <a:spAutoFit/>
+          </a:bodyPr>
+          <a:lstStyle/>
+          <a:p>
+            <a:pPr algn="l"/>
+            <a:r>
+              <a:rPr sz="1200" b="1">
+                <a:solidFill>
+                  <a:srgbClr val="3F51B5"/>
+                </a:solidFill>
+              </a:rPr>
+              <a:t>LLM Wiki  —  암묵지 운영  (notes/llm-wiki.md · 11개 항목)</a:t>
+            </a:r>
+          </a:p>
+        </p:txBody>
+      </p:sp>
+      <p:sp>
+        <p:nvSpPr>
+          <p:cNvPr id="12" name="TextBox 11"/>
+          <p:cNvSpPr txBox="1"/>
+          <p:nvPr/>
+        </p:nvSpPr>
+        <p:spPr>
+          <a:xfrm>
+            <a:off x="658368" y="1298448"/>
+            <a:ext cx="10789920" cy="1938528"/>
+          </a:xfrm>
+          <a:prstGeom prst="rect">
+            <a:avLst/>
+          </a:prstGeom>
+          <a:noFill/>
+        </p:spPr>
+        <p:txBody>
+          <a:bodyPr wrap="square">
+            <a:spAutoFit/>
+          </a:bodyPr>
+          <a:lstStyle/>
+          <a:p>
+            <a:pPr algn="l"/>
+            <a:r>
+              <a:rPr sz="1050" b="0">
+                <a:solidFill>
+                  <a:srgbClr val="212121"/>
+                </a:solidFill>
+              </a:rPr>
+              <a:t>개발 중 배운 AI 사용 인사이트 직접 기록
+Flutter 실행 환경 / 에이전트 호출법 / ADR 개념 / python-pptx 단위 변환 등</a:t>
+            </a:r>
+          </a:p>
+        </p:txBody>
+      </p:sp>
+      <p:sp>
+        <p:nvSpPr>
+          <p:cNvPr id="13" name="Rectangle 12"/>
+          <p:cNvSpPr/>
+          <p:nvPr/>
+        </p:nvSpPr>
+        <p:spPr>
+          <a:xfrm>
+            <a:off x="457200" y="3520440"/>
+            <a:ext cx="11247120" cy="2468880"/>
           </a:xfrm>
           <a:prstGeom prst="rect">
             <a:avLst/>
@@ -5217,57 +5451,23 @@
       </p:sp>
       <p:sp>
         <p:nvSpPr>
-          <p:cNvPr id="10" name="TextBox 9"/>
-          <p:cNvSpPr txBox="1"/>
-          <p:nvPr/>
-        </p:nvSpPr>
-        <p:spPr>
-          <a:xfrm>
-            <a:off x="594360" y="2761488"/>
-            <a:ext cx="5303520" cy="886968"/>
-          </a:xfrm>
-          <a:prstGeom prst="rect">
-            <a:avLst/>
-          </a:prstGeom>
-          <a:noFill/>
-        </p:spPr>
-        <p:txBody>
-          <a:bodyPr wrap="square">
-            <a:spAutoFit/>
-          </a:bodyPr>
-          <a:lstStyle/>
-          <a:p>
-            <a:pPr algn="l"/>
-            <a:r>
-              <a:rPr sz="1600" b="0">
-                <a:solidFill>
-                  <a:srgbClr val="9E9E9E"/>
-                </a:solidFill>
-              </a:rPr>
-              <a:t>MVC 방식</a:t>
-            </a:r>
-          </a:p>
-        </p:txBody>
-      </p:sp>
-      <p:sp>
-        <p:nvSpPr>
-          <p:cNvPr id="11" name="Rectangle 10"/>
+          <p:cNvPr id="14" name="Rectangle 13"/>
           <p:cNvSpPr/>
           <p:nvPr/>
         </p:nvSpPr>
         <p:spPr>
           <a:xfrm>
-            <a:off x="457200" y="3913631"/>
-            <a:ext cx="5486400" cy="1024128"/>
-          </a:xfrm>
-          <a:prstGeom prst="rect">
-            <a:avLst/>
-          </a:prstGeom>
-          <a:noFill/>
-          <a:ln w="10160">
-            <a:solidFill>
-              <a:srgbClr val="E0E0E0"/>
-            </a:solidFill>
+            <a:off x="457200" y="3520440"/>
+            <a:ext cx="11247120" cy="402336"/>
+          </a:xfrm>
+          <a:prstGeom prst="rect">
+            <a:avLst/>
+          </a:prstGeom>
+          <a:solidFill>
+            <a:srgbClr val="F5F5F5"/>
+          </a:solidFill>
+          <a:ln>
+            <a:noFill/>
           </a:ln>
         </p:spPr>
         <p:style>
@@ -5294,54 +5494,20 @@
       </p:sp>
       <p:sp>
         <p:nvSpPr>
-          <p:cNvPr id="12" name="TextBox 11"/>
-          <p:cNvSpPr txBox="1"/>
-          <p:nvPr/>
-        </p:nvSpPr>
-        <p:spPr>
-          <a:xfrm>
-            <a:off x="594360" y="4023359"/>
-            <a:ext cx="5303520" cy="886968"/>
-          </a:xfrm>
-          <a:prstGeom prst="rect">
-            <a:avLst/>
-          </a:prstGeom>
-          <a:noFill/>
-        </p:spPr>
-        <p:txBody>
-          <a:bodyPr wrap="square">
-            <a:spAutoFit/>
-          </a:bodyPr>
-          <a:lstStyle/>
-          <a:p>
-            <a:pPr algn="l"/>
-            <a:r>
-              <a:rPr sz="1600" b="0">
-                <a:solidFill>
-                  <a:srgbClr val="9E9E9E"/>
-                </a:solidFill>
-              </a:rPr>
-              <a:t>6 ~ 8개 레이어</a:t>
-            </a:r>
-          </a:p>
-        </p:txBody>
-      </p:sp>
-      <p:sp>
-        <p:nvSpPr>
-          <p:cNvPr id="13" name="Rectangle 12"/>
+          <p:cNvPr id="15" name="Rectangle 14"/>
           <p:cNvSpPr/>
           <p:nvPr/>
         </p:nvSpPr>
         <p:spPr>
           <a:xfrm>
-            <a:off x="457200" y="5175504"/>
-            <a:ext cx="5486400" cy="1024128"/>
+            <a:off x="457200" y="3520440"/>
+            <a:ext cx="1463040" cy="402336"/>
           </a:xfrm>
           <a:prstGeom prst="rect">
             <a:avLst/>
           </a:prstGeom>
           <a:solidFill>
-            <a:srgbClr val="3F51B5"/>
+            <a:srgbClr val="6A1B9A"/>
           </a:solidFill>
           <a:ln>
             <a:noFill/>
@@ -5371,14 +5537,48 @@
       </p:sp>
       <p:sp>
         <p:nvSpPr>
-          <p:cNvPr id="14" name="TextBox 13"/>
-          <p:cNvSpPr txBox="1"/>
-          <p:nvPr/>
-        </p:nvSpPr>
-        <p:spPr>
-          <a:xfrm>
-            <a:off x="594360" y="5285232"/>
-            <a:ext cx="5303520" cy="886968"/>
+          <p:cNvPr id="16" name="TextBox 15"/>
+          <p:cNvSpPr txBox="1"/>
+          <p:nvPr/>
+        </p:nvSpPr>
+        <p:spPr>
+          <a:xfrm>
+            <a:off x="457200" y="3520440"/>
+            <a:ext cx="1463040" cy="402336"/>
+          </a:xfrm>
+          <a:prstGeom prst="rect">
+            <a:avLst/>
+          </a:prstGeom>
+          <a:noFill/>
+        </p:spPr>
+        <p:txBody>
+          <a:bodyPr wrap="square">
+            <a:spAutoFit/>
+          </a:bodyPr>
+          <a:lstStyle/>
+          <a:p>
+            <a:pPr algn="ctr"/>
+            <a:r>
+              <a:rPr sz="1100" b="1">
+                <a:solidFill>
+                  <a:srgbClr val="FFFFFF"/>
+                </a:solidFill>
+              </a:rPr>
+              <a:t>D  +2</a:t>
+            </a:r>
+          </a:p>
+        </p:txBody>
+      </p:sp>
+      <p:sp>
+        <p:nvSpPr>
+          <p:cNvPr id="17" name="TextBox 16"/>
+          <p:cNvSpPr txBox="1"/>
+          <p:nvPr/>
+        </p:nvSpPr>
+        <p:spPr>
+          <a:xfrm>
+            <a:off x="2057400" y="3584448"/>
+            <a:ext cx="9509760" cy="274320"/>
           </a:xfrm>
           <a:prstGeom prst="rect">
             <a:avLst/>
@@ -5393,26 +5593,26 @@
           <a:p>
             <a:pPr algn="l"/>
             <a:r>
-              <a:rPr sz="1600" b="1">
-                <a:solidFill>
-                  <a:srgbClr val="FFFFFF"/>
-                </a:solidFill>
-              </a:rPr>
-              <a:t>✓  4레이어 구조</a:t>
-            </a:r>
-          </a:p>
-        </p:txBody>
-      </p:sp>
-      <p:sp>
-        <p:nvSpPr>
-          <p:cNvPr id="15" name="TextBox 14"/>
-          <p:cNvSpPr txBox="1"/>
-          <p:nvPr/>
-        </p:nvSpPr>
-        <p:spPr>
-          <a:xfrm>
-            <a:off x="6400800" y="987552"/>
-            <a:ext cx="5394960" cy="347472"/>
+              <a:rPr sz="1200" b="1">
+                <a:solidFill>
+                  <a:srgbClr val="3F51B5"/>
+                </a:solidFill>
+              </a:rPr>
+              <a:t>AI Agent 리포트  —  Claude Code 활용 사례 발표</a:t>
+            </a:r>
+          </a:p>
+        </p:txBody>
+      </p:sp>
+      <p:sp>
+        <p:nvSpPr>
+          <p:cNvPr id="18" name="TextBox 17"/>
+          <p:cNvSpPr txBox="1"/>
+          <p:nvPr/>
+        </p:nvSpPr>
+        <p:spPr>
+          <a:xfrm>
+            <a:off x="658368" y="3995928"/>
+            <a:ext cx="10789920" cy="1938528"/>
           </a:xfrm>
           <a:prstGeom prst="rect">
             <a:avLst/>
@@ -5427,1197 +5627,13 @@
           <a:p>
             <a:pPr algn="l"/>
             <a:r>
-              <a:rPr sz="1200" b="0">
-                <a:solidFill>
-                  <a:srgbClr val="9E9E9E"/>
-                </a:solidFill>
-              </a:rPr>
-              <a:t>선택된 4레이어 구조</a:t>
-            </a:r>
-          </a:p>
-        </p:txBody>
-      </p:sp>
-      <p:sp>
-        <p:nvSpPr>
-          <p:cNvPr id="16" name="Rectangle 15"/>
-          <p:cNvSpPr/>
-          <p:nvPr/>
-        </p:nvSpPr>
-        <p:spPr>
-          <a:xfrm>
-            <a:off x="6400800" y="1389888"/>
-            <a:ext cx="1371600" cy="822960"/>
-          </a:xfrm>
-          <a:prstGeom prst="rect">
-            <a:avLst/>
-          </a:prstGeom>
-          <a:solidFill>
-            <a:srgbClr val="F5F5F5"/>
-          </a:solidFill>
-          <a:ln w="10160">
-            <a:solidFill>
-              <a:srgbClr val="E0E0E0"/>
-            </a:solidFill>
-          </a:ln>
-        </p:spPr>
-        <p:style>
-          <a:lnRef idx="1">
-            <a:schemeClr val="accent1"/>
-          </a:lnRef>
-          <a:fillRef idx="3">
-            <a:schemeClr val="accent1"/>
-          </a:fillRef>
-          <a:effectRef idx="2">
-            <a:schemeClr val="accent1"/>
-          </a:effectRef>
-          <a:fontRef idx="minor">
-            <a:schemeClr val="lt1"/>
-          </a:fontRef>
-        </p:style>
-        <p:txBody>
-          <a:bodyPr rtlCol="0" anchor="ctr"/>
-          <a:lstStyle/>
-          <a:p>
-            <a:pPr algn="ctr"/>
-          </a:p>
-        </p:txBody>
-      </p:sp>
-      <p:sp>
-        <p:nvSpPr>
-          <p:cNvPr id="17" name="TextBox 16"/>
-          <p:cNvSpPr txBox="1"/>
-          <p:nvPr/>
-        </p:nvSpPr>
-        <p:spPr>
-          <a:xfrm>
-            <a:off x="6510528" y="1591056"/>
-            <a:ext cx="1188720" cy="438912"/>
-          </a:xfrm>
-          <a:prstGeom prst="rect">
-            <a:avLst/>
-          </a:prstGeom>
-          <a:noFill/>
-        </p:spPr>
-        <p:txBody>
-          <a:bodyPr wrap="square">
-            <a:spAutoFit/>
-          </a:bodyPr>
-          <a:lstStyle/>
-          <a:p>
-            <a:pPr algn="l"/>
-            <a:r>
-              <a:rPr sz="1200" b="1">
-                <a:solidFill>
-                  <a:srgbClr val="3F51B5"/>
-                </a:solidFill>
-              </a:rPr>
-              <a:t>레이어</a:t>
-            </a:r>
-          </a:p>
-        </p:txBody>
-      </p:sp>
-      <p:sp>
-        <p:nvSpPr>
-          <p:cNvPr id="18" name="Rectangle 17"/>
-          <p:cNvSpPr/>
-          <p:nvPr/>
-        </p:nvSpPr>
-        <p:spPr>
-          <a:xfrm>
-            <a:off x="7818120" y="1389888"/>
-            <a:ext cx="2560320" cy="822960"/>
-          </a:xfrm>
-          <a:prstGeom prst="rect">
-            <a:avLst/>
-          </a:prstGeom>
-          <a:solidFill>
-            <a:srgbClr val="F5F5F5"/>
-          </a:solidFill>
-          <a:ln w="10160">
-            <a:solidFill>
-              <a:srgbClr val="E0E0E0"/>
-            </a:solidFill>
-          </a:ln>
-        </p:spPr>
-        <p:style>
-          <a:lnRef idx="1">
-            <a:schemeClr val="accent1"/>
-          </a:lnRef>
-          <a:fillRef idx="3">
-            <a:schemeClr val="accent1"/>
-          </a:fillRef>
-          <a:effectRef idx="2">
-            <a:schemeClr val="accent1"/>
-          </a:effectRef>
-          <a:fontRef idx="minor">
-            <a:schemeClr val="lt1"/>
-          </a:fontRef>
-        </p:style>
-        <p:txBody>
-          <a:bodyPr rtlCol="0" anchor="ctr"/>
-          <a:lstStyle/>
-          <a:p>
-            <a:pPr algn="ctr"/>
-          </a:p>
-        </p:txBody>
-      </p:sp>
-      <p:sp>
-        <p:nvSpPr>
-          <p:cNvPr id="19" name="TextBox 18"/>
-          <p:cNvSpPr txBox="1"/>
-          <p:nvPr/>
-        </p:nvSpPr>
-        <p:spPr>
-          <a:xfrm>
-            <a:off x="7927848" y="1591056"/>
-            <a:ext cx="2377439" cy="438912"/>
-          </a:xfrm>
-          <a:prstGeom prst="rect">
-            <a:avLst/>
-          </a:prstGeom>
-          <a:noFill/>
-        </p:spPr>
-        <p:txBody>
-          <a:bodyPr wrap="square">
-            <a:spAutoFit/>
-          </a:bodyPr>
-          <a:lstStyle/>
-          <a:p>
-            <a:pPr algn="l"/>
-            <a:r>
-              <a:rPr sz="1200" b="1">
-                <a:solidFill>
-                  <a:srgbClr val="3F51B5"/>
-                </a:solidFill>
-              </a:rPr>
-              <a:t>역할</a:t>
-            </a:r>
-          </a:p>
-        </p:txBody>
-      </p:sp>
-      <p:sp>
-        <p:nvSpPr>
-          <p:cNvPr id="20" name="Rectangle 19"/>
-          <p:cNvSpPr/>
-          <p:nvPr/>
-        </p:nvSpPr>
-        <p:spPr>
-          <a:xfrm>
-            <a:off x="10424160" y="1389888"/>
-            <a:ext cx="1737360" cy="822960"/>
-          </a:xfrm>
-          <a:prstGeom prst="rect">
-            <a:avLst/>
-          </a:prstGeom>
-          <a:solidFill>
-            <a:srgbClr val="F5F5F5"/>
-          </a:solidFill>
-          <a:ln w="10160">
-            <a:solidFill>
-              <a:srgbClr val="E0E0E0"/>
-            </a:solidFill>
-          </a:ln>
-        </p:spPr>
-        <p:style>
-          <a:lnRef idx="1">
-            <a:schemeClr val="accent1"/>
-          </a:lnRef>
-          <a:fillRef idx="3">
-            <a:schemeClr val="accent1"/>
-          </a:fillRef>
-          <a:effectRef idx="2">
-            <a:schemeClr val="accent1"/>
-          </a:effectRef>
-          <a:fontRef idx="minor">
-            <a:schemeClr val="lt1"/>
-          </a:fontRef>
-        </p:style>
-        <p:txBody>
-          <a:bodyPr rtlCol="0" anchor="ctr"/>
-          <a:lstStyle/>
-          <a:p>
-            <a:pPr algn="ctr"/>
-          </a:p>
-        </p:txBody>
-      </p:sp>
-      <p:sp>
-        <p:nvSpPr>
-          <p:cNvPr id="21" name="TextBox 20"/>
-          <p:cNvSpPr txBox="1"/>
-          <p:nvPr/>
-        </p:nvSpPr>
-        <p:spPr>
-          <a:xfrm>
-            <a:off x="10533888" y="1591056"/>
-            <a:ext cx="1554480" cy="438912"/>
-          </a:xfrm>
-          <a:prstGeom prst="rect">
-            <a:avLst/>
-          </a:prstGeom>
-          <a:noFill/>
-        </p:spPr>
-        <p:txBody>
-          <a:bodyPr wrap="square">
-            <a:spAutoFit/>
-          </a:bodyPr>
-          <a:lstStyle/>
-          <a:p>
-            <a:pPr algn="l"/>
-            <a:r>
-              <a:rPr sz="1200" b="1">
-                <a:solidFill>
-                  <a:srgbClr val="3F51B5"/>
-                </a:solidFill>
-              </a:rPr>
-              <a:t>위치</a:t>
-            </a:r>
-          </a:p>
-        </p:txBody>
-      </p:sp>
-      <p:sp>
-        <p:nvSpPr>
-          <p:cNvPr id="22" name="Rectangle 21"/>
-          <p:cNvSpPr/>
-          <p:nvPr/>
-        </p:nvSpPr>
-        <p:spPr>
-          <a:xfrm>
-            <a:off x="6400800" y="2395728"/>
-            <a:ext cx="1371600" cy="822960"/>
-          </a:xfrm>
-          <a:prstGeom prst="rect">
-            <a:avLst/>
-          </a:prstGeom>
-          <a:solidFill>
-            <a:srgbClr val="FFFFFF"/>
-          </a:solidFill>
-          <a:ln w="10160">
-            <a:solidFill>
-              <a:srgbClr val="E0E0E0"/>
-            </a:solidFill>
-          </a:ln>
-        </p:spPr>
-        <p:style>
-          <a:lnRef idx="1">
-            <a:schemeClr val="accent1"/>
-          </a:lnRef>
-          <a:fillRef idx="3">
-            <a:schemeClr val="accent1"/>
-          </a:fillRef>
-          <a:effectRef idx="2">
-            <a:schemeClr val="accent1"/>
-          </a:effectRef>
-          <a:fontRef idx="minor">
-            <a:schemeClr val="lt1"/>
-          </a:fontRef>
-        </p:style>
-        <p:txBody>
-          <a:bodyPr rtlCol="0" anchor="ctr"/>
-          <a:lstStyle/>
-          <a:p>
-            <a:pPr algn="ctr"/>
-          </a:p>
-        </p:txBody>
-      </p:sp>
-      <p:sp>
-        <p:nvSpPr>
-          <p:cNvPr id="23" name="TextBox 22"/>
-          <p:cNvSpPr txBox="1"/>
-          <p:nvPr/>
-        </p:nvSpPr>
-        <p:spPr>
-          <a:xfrm>
-            <a:off x="6510528" y="2596896"/>
-            <a:ext cx="1188720" cy="438912"/>
-          </a:xfrm>
-          <a:prstGeom prst="rect">
-            <a:avLst/>
-          </a:prstGeom>
-          <a:noFill/>
-        </p:spPr>
-        <p:txBody>
-          <a:bodyPr wrap="square">
-            <a:spAutoFit/>
-          </a:bodyPr>
-          <a:lstStyle/>
-          <a:p>
-            <a:pPr algn="l"/>
-            <a:r>
-              <a:rPr sz="1200" b="0">
+              <a:rPr sz="1050" b="0">
                 <a:solidFill>
                   <a:srgbClr val="212121"/>
                 </a:solidFill>
               </a:rPr>
-              <a:t>화면</a:t>
-            </a:r>
-          </a:p>
-        </p:txBody>
-      </p:sp>
-      <p:sp>
-        <p:nvSpPr>
-          <p:cNvPr id="24" name="Rectangle 23"/>
-          <p:cNvSpPr/>
-          <p:nvPr/>
-        </p:nvSpPr>
-        <p:spPr>
-          <a:xfrm>
-            <a:off x="7818120" y="2395728"/>
-            <a:ext cx="2560320" cy="822960"/>
-          </a:xfrm>
-          <a:prstGeom prst="rect">
-            <a:avLst/>
-          </a:prstGeom>
-          <a:solidFill>
-            <a:srgbClr val="FFFFFF"/>
-          </a:solidFill>
-          <a:ln w="10160">
-            <a:solidFill>
-              <a:srgbClr val="E0E0E0"/>
-            </a:solidFill>
-          </a:ln>
-        </p:spPr>
-        <p:style>
-          <a:lnRef idx="1">
-            <a:schemeClr val="accent1"/>
-          </a:lnRef>
-          <a:fillRef idx="3">
-            <a:schemeClr val="accent1"/>
-          </a:fillRef>
-          <a:effectRef idx="2">
-            <a:schemeClr val="accent1"/>
-          </a:effectRef>
-          <a:fontRef idx="minor">
-            <a:schemeClr val="lt1"/>
-          </a:fontRef>
-        </p:style>
-        <p:txBody>
-          <a:bodyPr rtlCol="0" anchor="ctr"/>
-          <a:lstStyle/>
-          <a:p>
-            <a:pPr algn="ctr"/>
-          </a:p>
-        </p:txBody>
-      </p:sp>
-      <p:sp>
-        <p:nvSpPr>
-          <p:cNvPr id="25" name="TextBox 24"/>
-          <p:cNvSpPr txBox="1"/>
-          <p:nvPr/>
-        </p:nvSpPr>
-        <p:spPr>
-          <a:xfrm>
-            <a:off x="7927848" y="2596896"/>
-            <a:ext cx="2377439" cy="438912"/>
-          </a:xfrm>
-          <a:prstGeom prst="rect">
-            <a:avLst/>
-          </a:prstGeom>
-          <a:noFill/>
-        </p:spPr>
-        <p:txBody>
-          <a:bodyPr wrap="square">
-            <a:spAutoFit/>
-          </a:bodyPr>
-          <a:lstStyle/>
-          <a:p>
-            <a:pPr algn="l"/>
-            <a:r>
-              <a:rPr sz="1200" b="0">
-                <a:solidFill>
-                  <a:srgbClr val="212121"/>
-                </a:solidFill>
-              </a:rPr>
-              <a:t>버튼·목록·입력창</a:t>
-            </a:r>
-          </a:p>
-        </p:txBody>
-      </p:sp>
-      <p:sp>
-        <p:nvSpPr>
-          <p:cNvPr id="26" name="Rectangle 25"/>
-          <p:cNvSpPr/>
-          <p:nvPr/>
-        </p:nvSpPr>
-        <p:spPr>
-          <a:xfrm>
-            <a:off x="10424160" y="2395728"/>
-            <a:ext cx="1737360" cy="822960"/>
-          </a:xfrm>
-          <a:prstGeom prst="rect">
-            <a:avLst/>
-          </a:prstGeom>
-          <a:solidFill>
-            <a:srgbClr val="FFFFFF"/>
-          </a:solidFill>
-          <a:ln w="10160">
-            <a:solidFill>
-              <a:srgbClr val="E0E0E0"/>
-            </a:solidFill>
-          </a:ln>
-        </p:spPr>
-        <p:style>
-          <a:lnRef idx="1">
-            <a:schemeClr val="accent1"/>
-          </a:lnRef>
-          <a:fillRef idx="3">
-            <a:schemeClr val="accent1"/>
-          </a:fillRef>
-          <a:effectRef idx="2">
-            <a:schemeClr val="accent1"/>
-          </a:effectRef>
-          <a:fontRef idx="minor">
-            <a:schemeClr val="lt1"/>
-          </a:fontRef>
-        </p:style>
-        <p:txBody>
-          <a:bodyPr rtlCol="0" anchor="ctr"/>
-          <a:lstStyle/>
-          <a:p>
-            <a:pPr algn="ctr"/>
-          </a:p>
-        </p:txBody>
-      </p:sp>
-      <p:sp>
-        <p:nvSpPr>
-          <p:cNvPr id="27" name="TextBox 26"/>
-          <p:cNvSpPr txBox="1"/>
-          <p:nvPr/>
-        </p:nvSpPr>
-        <p:spPr>
-          <a:xfrm>
-            <a:off x="10533888" y="2596896"/>
-            <a:ext cx="1554480" cy="438912"/>
-          </a:xfrm>
-          <a:prstGeom prst="rect">
-            <a:avLst/>
-          </a:prstGeom>
-          <a:noFill/>
-        </p:spPr>
-        <p:txBody>
-          <a:bodyPr wrap="square">
-            <a:spAutoFit/>
-          </a:bodyPr>
-          <a:lstStyle/>
-          <a:p>
-            <a:pPr algn="l"/>
-            <a:r>
-              <a:rPr sz="1200" b="0">
-                <a:solidFill>
-                  <a:srgbClr val="212121"/>
-                </a:solidFill>
-              </a:rPr>
-              <a:t>screens/</a:t>
-            </a:r>
-          </a:p>
-        </p:txBody>
-      </p:sp>
-      <p:sp>
-        <p:nvSpPr>
-          <p:cNvPr id="28" name="Rectangle 27"/>
-          <p:cNvSpPr/>
-          <p:nvPr/>
-        </p:nvSpPr>
-        <p:spPr>
-          <a:xfrm>
-            <a:off x="6400800" y="3401568"/>
-            <a:ext cx="1371600" cy="822960"/>
-          </a:xfrm>
-          <a:prstGeom prst="rect">
-            <a:avLst/>
-          </a:prstGeom>
-          <a:solidFill>
-            <a:srgbClr val="FFFFFF"/>
-          </a:solidFill>
-          <a:ln w="10160">
-            <a:solidFill>
-              <a:srgbClr val="E0E0E0"/>
-            </a:solidFill>
-          </a:ln>
-        </p:spPr>
-        <p:style>
-          <a:lnRef idx="1">
-            <a:schemeClr val="accent1"/>
-          </a:lnRef>
-          <a:fillRef idx="3">
-            <a:schemeClr val="accent1"/>
-          </a:fillRef>
-          <a:effectRef idx="2">
-            <a:schemeClr val="accent1"/>
-          </a:effectRef>
-          <a:fontRef idx="minor">
-            <a:schemeClr val="lt1"/>
-          </a:fontRef>
-        </p:style>
-        <p:txBody>
-          <a:bodyPr rtlCol="0" anchor="ctr"/>
-          <a:lstStyle/>
-          <a:p>
-            <a:pPr algn="ctr"/>
-          </a:p>
-        </p:txBody>
-      </p:sp>
-      <p:sp>
-        <p:nvSpPr>
-          <p:cNvPr id="29" name="TextBox 28"/>
-          <p:cNvSpPr txBox="1"/>
-          <p:nvPr/>
-        </p:nvSpPr>
-        <p:spPr>
-          <a:xfrm>
-            <a:off x="6510528" y="3602736"/>
-            <a:ext cx="1188720" cy="438912"/>
-          </a:xfrm>
-          <a:prstGeom prst="rect">
-            <a:avLst/>
-          </a:prstGeom>
-          <a:noFill/>
-        </p:spPr>
-        <p:txBody>
-          <a:bodyPr wrap="square">
-            <a:spAutoFit/>
-          </a:bodyPr>
-          <a:lstStyle/>
-          <a:p>
-            <a:pPr algn="l"/>
-            <a:r>
-              <a:rPr sz="1200" b="0">
-                <a:solidFill>
-                  <a:srgbClr val="212121"/>
-                </a:solidFill>
-              </a:rPr>
-              <a:t>흐름</a:t>
-            </a:r>
-          </a:p>
-        </p:txBody>
-      </p:sp>
-      <p:sp>
-        <p:nvSpPr>
-          <p:cNvPr id="30" name="Rectangle 29"/>
-          <p:cNvSpPr/>
-          <p:nvPr/>
-        </p:nvSpPr>
-        <p:spPr>
-          <a:xfrm>
-            <a:off x="7818120" y="3401568"/>
-            <a:ext cx="2560320" cy="822960"/>
-          </a:xfrm>
-          <a:prstGeom prst="rect">
-            <a:avLst/>
-          </a:prstGeom>
-          <a:solidFill>
-            <a:srgbClr val="FFFFFF"/>
-          </a:solidFill>
-          <a:ln w="10160">
-            <a:solidFill>
-              <a:srgbClr val="E0E0E0"/>
-            </a:solidFill>
-          </a:ln>
-        </p:spPr>
-        <p:style>
-          <a:lnRef idx="1">
-            <a:schemeClr val="accent1"/>
-          </a:lnRef>
-          <a:fillRef idx="3">
-            <a:schemeClr val="accent1"/>
-          </a:fillRef>
-          <a:effectRef idx="2">
-            <a:schemeClr val="accent1"/>
-          </a:effectRef>
-          <a:fontRef idx="minor">
-            <a:schemeClr val="lt1"/>
-          </a:fontRef>
-        </p:style>
-        <p:txBody>
-          <a:bodyPr rtlCol="0" anchor="ctr"/>
-          <a:lstStyle/>
-          <a:p>
-            <a:pPr algn="ctr"/>
-          </a:p>
-        </p:txBody>
-      </p:sp>
-      <p:sp>
-        <p:nvSpPr>
-          <p:cNvPr id="31" name="TextBox 30"/>
-          <p:cNvSpPr txBox="1"/>
-          <p:nvPr/>
-        </p:nvSpPr>
-        <p:spPr>
-          <a:xfrm>
-            <a:off x="7927848" y="3602736"/>
-            <a:ext cx="2377439" cy="438912"/>
-          </a:xfrm>
-          <a:prstGeom prst="rect">
-            <a:avLst/>
-          </a:prstGeom>
-          <a:noFill/>
-        </p:spPr>
-        <p:txBody>
-          <a:bodyPr wrap="square">
-            <a:spAutoFit/>
-          </a:bodyPr>
-          <a:lstStyle/>
-          <a:p>
-            <a:pPr algn="l"/>
-            <a:r>
-              <a:rPr sz="1200" b="0">
-                <a:solidFill>
-                  <a:srgbClr val="212121"/>
-                </a:solidFill>
-              </a:rPr>
-              <a:t>화면-데이터 연결 처리</a:t>
-            </a:r>
-          </a:p>
-        </p:txBody>
-      </p:sp>
-      <p:sp>
-        <p:nvSpPr>
-          <p:cNvPr id="32" name="Rectangle 31"/>
-          <p:cNvSpPr/>
-          <p:nvPr/>
-        </p:nvSpPr>
-        <p:spPr>
-          <a:xfrm>
-            <a:off x="10424160" y="3401568"/>
-            <a:ext cx="1737360" cy="822960"/>
-          </a:xfrm>
-          <a:prstGeom prst="rect">
-            <a:avLst/>
-          </a:prstGeom>
-          <a:solidFill>
-            <a:srgbClr val="FFFFFF"/>
-          </a:solidFill>
-          <a:ln w="10160">
-            <a:solidFill>
-              <a:srgbClr val="E0E0E0"/>
-            </a:solidFill>
-          </a:ln>
-        </p:spPr>
-        <p:style>
-          <a:lnRef idx="1">
-            <a:schemeClr val="accent1"/>
-          </a:lnRef>
-          <a:fillRef idx="3">
-            <a:schemeClr val="accent1"/>
-          </a:fillRef>
-          <a:effectRef idx="2">
-            <a:schemeClr val="accent1"/>
-          </a:effectRef>
-          <a:fontRef idx="minor">
-            <a:schemeClr val="lt1"/>
-          </a:fontRef>
-        </p:style>
-        <p:txBody>
-          <a:bodyPr rtlCol="0" anchor="ctr"/>
-          <a:lstStyle/>
-          <a:p>
-            <a:pPr algn="ctr"/>
-          </a:p>
-        </p:txBody>
-      </p:sp>
-      <p:sp>
-        <p:nvSpPr>
-          <p:cNvPr id="33" name="TextBox 32"/>
-          <p:cNvSpPr txBox="1"/>
-          <p:nvPr/>
-        </p:nvSpPr>
-        <p:spPr>
-          <a:xfrm>
-            <a:off x="10533888" y="3602736"/>
-            <a:ext cx="1554480" cy="438912"/>
-          </a:xfrm>
-          <a:prstGeom prst="rect">
-            <a:avLst/>
-          </a:prstGeom>
-          <a:noFill/>
-        </p:spPr>
-        <p:txBody>
-          <a:bodyPr wrap="square">
-            <a:spAutoFit/>
-          </a:bodyPr>
-          <a:lstStyle/>
-          <a:p>
-            <a:pPr algn="l"/>
-            <a:r>
-              <a:rPr sz="1200" b="0">
-                <a:solidFill>
-                  <a:srgbClr val="212121"/>
-                </a:solidFill>
-              </a:rPr>
-              <a:t/>
-            </a:r>
-          </a:p>
-        </p:txBody>
-      </p:sp>
-      <p:sp>
-        <p:nvSpPr>
-          <p:cNvPr id="34" name="Rectangle 33"/>
-          <p:cNvSpPr/>
-          <p:nvPr/>
-        </p:nvSpPr>
-        <p:spPr>
-          <a:xfrm>
-            <a:off x="6400800" y="4407408"/>
-            <a:ext cx="1371600" cy="822960"/>
-          </a:xfrm>
-          <a:prstGeom prst="rect">
-            <a:avLst/>
-          </a:prstGeom>
-          <a:solidFill>
-            <a:srgbClr val="FFFFFF"/>
-          </a:solidFill>
-          <a:ln w="10160">
-            <a:solidFill>
-              <a:srgbClr val="E0E0E0"/>
-            </a:solidFill>
-          </a:ln>
-        </p:spPr>
-        <p:style>
-          <a:lnRef idx="1">
-            <a:schemeClr val="accent1"/>
-          </a:lnRef>
-          <a:fillRef idx="3">
-            <a:schemeClr val="accent1"/>
-          </a:fillRef>
-          <a:effectRef idx="2">
-            <a:schemeClr val="accent1"/>
-          </a:effectRef>
-          <a:fontRef idx="minor">
-            <a:schemeClr val="lt1"/>
-          </a:fontRef>
-        </p:style>
-        <p:txBody>
-          <a:bodyPr rtlCol="0" anchor="ctr"/>
-          <a:lstStyle/>
-          <a:p>
-            <a:pPr algn="ctr"/>
-          </a:p>
-        </p:txBody>
-      </p:sp>
-      <p:sp>
-        <p:nvSpPr>
-          <p:cNvPr id="35" name="TextBox 34"/>
-          <p:cNvSpPr txBox="1"/>
-          <p:nvPr/>
-        </p:nvSpPr>
-        <p:spPr>
-          <a:xfrm>
-            <a:off x="6510528" y="4608576"/>
-            <a:ext cx="1188720" cy="438912"/>
-          </a:xfrm>
-          <a:prstGeom prst="rect">
-            <a:avLst/>
-          </a:prstGeom>
-          <a:noFill/>
-        </p:spPr>
-        <p:txBody>
-          <a:bodyPr wrap="square">
-            <a:spAutoFit/>
-          </a:bodyPr>
-          <a:lstStyle/>
-          <a:p>
-            <a:pPr algn="l"/>
-            <a:r>
-              <a:rPr sz="1200" b="0">
-                <a:solidFill>
-                  <a:srgbClr val="212121"/>
-                </a:solidFill>
-              </a:rPr>
-              <a:t>규칙</a:t>
-            </a:r>
-          </a:p>
-        </p:txBody>
-      </p:sp>
-      <p:sp>
-        <p:nvSpPr>
-          <p:cNvPr id="36" name="Rectangle 35"/>
-          <p:cNvSpPr/>
-          <p:nvPr/>
-        </p:nvSpPr>
-        <p:spPr>
-          <a:xfrm>
-            <a:off x="7818120" y="4407408"/>
-            <a:ext cx="2560320" cy="822960"/>
-          </a:xfrm>
-          <a:prstGeom prst="rect">
-            <a:avLst/>
-          </a:prstGeom>
-          <a:solidFill>
-            <a:srgbClr val="FFFFFF"/>
-          </a:solidFill>
-          <a:ln w="10160">
-            <a:solidFill>
-              <a:srgbClr val="E0E0E0"/>
-            </a:solidFill>
-          </a:ln>
-        </p:spPr>
-        <p:style>
-          <a:lnRef idx="1">
-            <a:schemeClr val="accent1"/>
-          </a:lnRef>
-          <a:fillRef idx="3">
-            <a:schemeClr val="accent1"/>
-          </a:fillRef>
-          <a:effectRef idx="2">
-            <a:schemeClr val="accent1"/>
-          </a:effectRef>
-          <a:fontRef idx="minor">
-            <a:schemeClr val="lt1"/>
-          </a:fontRef>
-        </p:style>
-        <p:txBody>
-          <a:bodyPr rtlCol="0" anchor="ctr"/>
-          <a:lstStyle/>
-          <a:p>
-            <a:pPr algn="ctr"/>
-          </a:p>
-        </p:txBody>
-      </p:sp>
-      <p:sp>
-        <p:nvSpPr>
-          <p:cNvPr id="37" name="TextBox 36"/>
-          <p:cNvSpPr txBox="1"/>
-          <p:nvPr/>
-        </p:nvSpPr>
-        <p:spPr>
-          <a:xfrm>
-            <a:off x="7927848" y="4608576"/>
-            <a:ext cx="2377439" cy="438912"/>
-          </a:xfrm>
-          <a:prstGeom prst="rect">
-            <a:avLst/>
-          </a:prstGeom>
-          <a:noFill/>
-        </p:spPr>
-        <p:txBody>
-          <a:bodyPr wrap="square">
-            <a:spAutoFit/>
-          </a:bodyPr>
-          <a:lstStyle/>
-          <a:p>
-            <a:pPr algn="l"/>
-            <a:r>
-              <a:rPr sz="1200" b="0">
-                <a:solidFill>
-                  <a:srgbClr val="212121"/>
-                </a:solidFill>
-              </a:rPr>
-              <a:t>잔액·수익률 계산</a:t>
-            </a:r>
-          </a:p>
-        </p:txBody>
-      </p:sp>
-      <p:sp>
-        <p:nvSpPr>
-          <p:cNvPr id="38" name="Rectangle 37"/>
-          <p:cNvSpPr/>
-          <p:nvPr/>
-        </p:nvSpPr>
-        <p:spPr>
-          <a:xfrm>
-            <a:off x="10424160" y="4407408"/>
-            <a:ext cx="1737360" cy="822960"/>
-          </a:xfrm>
-          <a:prstGeom prst="rect">
-            <a:avLst/>
-          </a:prstGeom>
-          <a:solidFill>
-            <a:srgbClr val="FFFFFF"/>
-          </a:solidFill>
-          <a:ln w="10160">
-            <a:solidFill>
-              <a:srgbClr val="E0E0E0"/>
-            </a:solidFill>
-          </a:ln>
-        </p:spPr>
-        <p:style>
-          <a:lnRef idx="1">
-            <a:schemeClr val="accent1"/>
-          </a:lnRef>
-          <a:fillRef idx="3">
-            <a:schemeClr val="accent1"/>
-          </a:fillRef>
-          <a:effectRef idx="2">
-            <a:schemeClr val="accent1"/>
-          </a:effectRef>
-          <a:fontRef idx="minor">
-            <a:schemeClr val="lt1"/>
-          </a:fontRef>
-        </p:style>
-        <p:txBody>
-          <a:bodyPr rtlCol="0" anchor="ctr"/>
-          <a:lstStyle/>
-          <a:p>
-            <a:pPr algn="ctr"/>
-          </a:p>
-        </p:txBody>
-      </p:sp>
-      <p:sp>
-        <p:nvSpPr>
-          <p:cNvPr id="39" name="TextBox 38"/>
-          <p:cNvSpPr txBox="1"/>
-          <p:nvPr/>
-        </p:nvSpPr>
-        <p:spPr>
-          <a:xfrm>
-            <a:off x="10533888" y="4608576"/>
-            <a:ext cx="1554480" cy="438912"/>
-          </a:xfrm>
-          <a:prstGeom prst="rect">
-            <a:avLst/>
-          </a:prstGeom>
-          <a:noFill/>
-        </p:spPr>
-        <p:txBody>
-          <a:bodyPr wrap="square">
-            <a:spAutoFit/>
-          </a:bodyPr>
-          <a:lstStyle/>
-          <a:p>
-            <a:pPr algn="l"/>
-            <a:r>
-              <a:rPr sz="1200" b="0">
-                <a:solidFill>
-                  <a:srgbClr val="212121"/>
-                </a:solidFill>
-              </a:rPr>
-              <a:t>models/</a:t>
-            </a:r>
-          </a:p>
-        </p:txBody>
-      </p:sp>
-      <p:sp>
-        <p:nvSpPr>
-          <p:cNvPr id="40" name="Rectangle 39"/>
-          <p:cNvSpPr/>
-          <p:nvPr/>
-        </p:nvSpPr>
-        <p:spPr>
-          <a:xfrm>
-            <a:off x="6400800" y="5413248"/>
-            <a:ext cx="1371600" cy="822960"/>
-          </a:xfrm>
-          <a:prstGeom prst="rect">
-            <a:avLst/>
-          </a:prstGeom>
-          <a:solidFill>
-            <a:srgbClr val="FFFFFF"/>
-          </a:solidFill>
-          <a:ln w="10160">
-            <a:solidFill>
-              <a:srgbClr val="E0E0E0"/>
-            </a:solidFill>
-          </a:ln>
-        </p:spPr>
-        <p:style>
-          <a:lnRef idx="1">
-            <a:schemeClr val="accent1"/>
-          </a:lnRef>
-          <a:fillRef idx="3">
-            <a:schemeClr val="accent1"/>
-          </a:fillRef>
-          <a:effectRef idx="2">
-            <a:schemeClr val="accent1"/>
-          </a:effectRef>
-          <a:fontRef idx="minor">
-            <a:schemeClr val="lt1"/>
-          </a:fontRef>
-        </p:style>
-        <p:txBody>
-          <a:bodyPr rtlCol="0" anchor="ctr"/>
-          <a:lstStyle/>
-          <a:p>
-            <a:pPr algn="ctr"/>
-          </a:p>
-        </p:txBody>
-      </p:sp>
-      <p:sp>
-        <p:nvSpPr>
-          <p:cNvPr id="41" name="TextBox 40"/>
-          <p:cNvSpPr txBox="1"/>
-          <p:nvPr/>
-        </p:nvSpPr>
-        <p:spPr>
-          <a:xfrm>
-            <a:off x="6510528" y="5614416"/>
-            <a:ext cx="1188720" cy="438912"/>
-          </a:xfrm>
-          <a:prstGeom prst="rect">
-            <a:avLst/>
-          </a:prstGeom>
-          <a:noFill/>
-        </p:spPr>
-        <p:txBody>
-          <a:bodyPr wrap="square">
-            <a:spAutoFit/>
-          </a:bodyPr>
-          <a:lstStyle/>
-          <a:p>
-            <a:pPr algn="l"/>
-            <a:r>
-              <a:rPr sz="1200" b="0">
-                <a:solidFill>
-                  <a:srgbClr val="212121"/>
-                </a:solidFill>
-              </a:rPr>
-              <a:t>저장</a:t>
-            </a:r>
-          </a:p>
-        </p:txBody>
-      </p:sp>
-      <p:sp>
-        <p:nvSpPr>
-          <p:cNvPr id="42" name="Rectangle 41"/>
-          <p:cNvSpPr/>
-          <p:nvPr/>
-        </p:nvSpPr>
-        <p:spPr>
-          <a:xfrm>
-            <a:off x="7818120" y="5413248"/>
-            <a:ext cx="2560320" cy="822960"/>
-          </a:xfrm>
-          <a:prstGeom prst="rect">
-            <a:avLst/>
-          </a:prstGeom>
-          <a:solidFill>
-            <a:srgbClr val="FFFFFF"/>
-          </a:solidFill>
-          <a:ln w="10160">
-            <a:solidFill>
-              <a:srgbClr val="E0E0E0"/>
-            </a:solidFill>
-          </a:ln>
-        </p:spPr>
-        <p:style>
-          <a:lnRef idx="1">
-            <a:schemeClr val="accent1"/>
-          </a:lnRef>
-          <a:fillRef idx="3">
-            <a:schemeClr val="accent1"/>
-          </a:fillRef>
-          <a:effectRef idx="2">
-            <a:schemeClr val="accent1"/>
-          </a:effectRef>
-          <a:fontRef idx="minor">
-            <a:schemeClr val="lt1"/>
-          </a:fontRef>
-        </p:style>
-        <p:txBody>
-          <a:bodyPr rtlCol="0" anchor="ctr"/>
-          <a:lstStyle/>
-          <a:p>
-            <a:pPr algn="ctr"/>
-          </a:p>
-        </p:txBody>
-      </p:sp>
-      <p:sp>
-        <p:nvSpPr>
-          <p:cNvPr id="43" name="TextBox 42"/>
-          <p:cNvSpPr txBox="1"/>
-          <p:nvPr/>
-        </p:nvSpPr>
-        <p:spPr>
-          <a:xfrm>
-            <a:off x="7927848" y="5614416"/>
-            <a:ext cx="2377439" cy="438912"/>
-          </a:xfrm>
-          <a:prstGeom prst="rect">
-            <a:avLst/>
-          </a:prstGeom>
-          <a:noFill/>
-        </p:spPr>
-        <p:txBody>
-          <a:bodyPr wrap="square">
-            <a:spAutoFit/>
-          </a:bodyPr>
-          <a:lstStyle/>
-          <a:p>
-            <a:pPr algn="l"/>
-            <a:r>
-              <a:rPr sz="1200" b="0">
-                <a:solidFill>
-                  <a:srgbClr val="212121"/>
-                </a:solidFill>
-              </a:rPr>
-              <a:t>Firestore 입출력</a:t>
-            </a:r>
-          </a:p>
-        </p:txBody>
-      </p:sp>
-      <p:sp>
-        <p:nvSpPr>
-          <p:cNvPr id="44" name="Rectangle 43"/>
-          <p:cNvSpPr/>
-          <p:nvPr/>
-        </p:nvSpPr>
-        <p:spPr>
-          <a:xfrm>
-            <a:off x="10424160" y="5413248"/>
-            <a:ext cx="1737360" cy="822960"/>
-          </a:xfrm>
-          <a:prstGeom prst="rect">
-            <a:avLst/>
-          </a:prstGeom>
-          <a:solidFill>
-            <a:srgbClr val="FFFFFF"/>
-          </a:solidFill>
-          <a:ln w="10160">
-            <a:solidFill>
-              <a:srgbClr val="E0E0E0"/>
-            </a:solidFill>
-          </a:ln>
-        </p:spPr>
-        <p:style>
-          <a:lnRef idx="1">
-            <a:schemeClr val="accent1"/>
-          </a:lnRef>
-          <a:fillRef idx="3">
-            <a:schemeClr val="accent1"/>
-          </a:fillRef>
-          <a:effectRef idx="2">
-            <a:schemeClr val="accent1"/>
-          </a:effectRef>
-          <a:fontRef idx="minor">
-            <a:schemeClr val="lt1"/>
-          </a:fontRef>
-        </p:style>
-        <p:txBody>
-          <a:bodyPr rtlCol="0" anchor="ctr"/>
-          <a:lstStyle/>
-          <a:p>
-            <a:pPr algn="ctr"/>
-          </a:p>
-        </p:txBody>
-      </p:sp>
-      <p:sp>
-        <p:nvSpPr>
-          <p:cNvPr id="45" name="TextBox 44"/>
-          <p:cNvSpPr txBox="1"/>
-          <p:nvPr/>
-        </p:nvSpPr>
-        <p:spPr>
-          <a:xfrm>
-            <a:off x="10533888" y="5614416"/>
-            <a:ext cx="1554480" cy="438912"/>
-          </a:xfrm>
-          <a:prstGeom prst="rect">
-            <a:avLst/>
-          </a:prstGeom>
-          <a:noFill/>
-        </p:spPr>
-        <p:txBody>
-          <a:bodyPr wrap="square">
-            <a:spAutoFit/>
-          </a:bodyPr>
-          <a:lstStyle/>
-          <a:p>
-            <a:pPr algn="l"/>
-            <a:r>
-              <a:rPr sz="1200" b="0">
-                <a:solidFill>
-                  <a:srgbClr val="212121"/>
-                </a:solidFill>
-              </a:rPr>
-              <a:t>services/</a:t>
+              <a:t>Claude Code(Anthropic, 2024~)로 서브에이전트 제작 · 커스텀 명령어 운영 · 단계별 보고 방식 수행
+최근 6개월 이내 지속 업데이트 도구 · 출처: claude.ai/code  (공식 문서)</a:t>
             </a:r>
           </a:p>
         </p:txBody>
@@ -6710,7 +5726,7 @@
                   <a:srgbClr val="3F51B5"/>
                 </a:solidFill>
               </a:rPr>
-              <a:t>ADR-0003  —  백엔드 서비스 선택</a:t>
+              <a:t>ADR-0001  —  모바일 프레임워크 선택</a:t>
             </a:r>
           </a:p>
         </p:txBody>
@@ -6787,7 +5803,7 @@
                   <a:srgbClr val="9E9E9E"/>
                 </a:solidFill>
               </a:rPr>
-              <a:t>13 / 14</a:t>
+              <a:t>13 / 16</a:t>
             </a:r>
           </a:p>
         </p:txBody>
@@ -6898,7 +5914,7 @@
                   <a:srgbClr val="9E9E9E"/>
                 </a:solidFill>
               </a:rPr>
-              <a:t>Supabase</a:t>
+              <a:t>React Native</a:t>
             </a:r>
           </a:p>
         </p:txBody>
@@ -6975,7 +5991,7 @@
                   <a:srgbClr val="9E9E9E"/>
                 </a:solidFill>
               </a:rPr>
-              <a:t>폰 내부 저장 (SQLite 등)</a:t>
+              <a:t>안드로이드 전용 개발</a:t>
             </a:r>
           </a:p>
         </p:txBody>
@@ -7052,7 +6068,7 @@
                   <a:srgbClr val="9E9E9E"/>
                 </a:solidFill>
               </a:rPr>
-              <a:t>직접 서버 구축</a:t>
+              <a:t>아이폰 전용 개발</a:t>
             </a:r>
           </a:p>
         </p:txBody>
@@ -7129,7 +6145,7 @@
                   <a:srgbClr val="FFFFFF"/>
                 </a:solidFill>
               </a:rPr>
-              <a:t>✓  Firebase (Auth + Firestore)</a:t>
+              <a:t>✓  Flutter</a:t>
             </a:r>
           </a:p>
         </p:txBody>
@@ -7161,6 +6177,2249 @@
         <p:spPr>
           <a:xfrm>
             <a:off x="0" y="0"/>
+            <a:ext cx="12188952" cy="914400"/>
+          </a:xfrm>
+          <a:prstGeom prst="rect">
+            <a:avLst/>
+          </a:prstGeom>
+          <a:noFill/>
+          <a:ln>
+            <a:noFill/>
+          </a:ln>
+        </p:spPr>
+        <p:style>
+          <a:lnRef idx="1">
+            <a:schemeClr val="accent1"/>
+          </a:lnRef>
+          <a:fillRef idx="3">
+            <a:schemeClr val="accent1"/>
+          </a:fillRef>
+          <a:effectRef idx="2">
+            <a:schemeClr val="accent1"/>
+          </a:effectRef>
+          <a:fontRef idx="minor">
+            <a:schemeClr val="lt1"/>
+          </a:fontRef>
+        </p:style>
+        <p:txBody>
+          <a:bodyPr rtlCol="0" anchor="ctr"/>
+          <a:lstStyle/>
+          <a:p>
+            <a:pPr algn="ctr"/>
+          </a:p>
+        </p:txBody>
+      </p:sp>
+      <p:sp>
+        <p:nvSpPr>
+          <p:cNvPr id="3" name="TextBox 2"/>
+          <p:cNvSpPr txBox="1"/>
+          <p:nvPr/>
+        </p:nvSpPr>
+        <p:spPr>
+          <a:xfrm>
+            <a:off x="457200" y="73152"/>
+            <a:ext cx="10972800" cy="566928"/>
+          </a:xfrm>
+          <a:prstGeom prst="rect">
+            <a:avLst/>
+          </a:prstGeom>
+          <a:noFill/>
+        </p:spPr>
+        <p:txBody>
+          <a:bodyPr wrap="square">
+            <a:spAutoFit/>
+          </a:bodyPr>
+          <a:lstStyle/>
+          <a:p>
+            <a:pPr algn="l"/>
+            <a:r>
+              <a:rPr sz="2400" b="1">
+                <a:solidFill>
+                  <a:srgbClr val="3F51B5"/>
+                </a:solidFill>
+              </a:rPr>
+              <a:t>ADR-0002  —  아키텍처 패턴 선택</a:t>
+            </a:r>
+          </a:p>
+        </p:txBody>
+      </p:sp>
+      <p:sp>
+        <p:nvSpPr>
+          <p:cNvPr id="4" name="Rectangle 3"/>
+          <p:cNvSpPr/>
+          <p:nvPr/>
+        </p:nvSpPr>
+        <p:spPr>
+          <a:xfrm>
+            <a:off x="0" y="868680"/>
+            <a:ext cx="12188952" cy="45720"/>
+          </a:xfrm>
+          <a:prstGeom prst="rect">
+            <a:avLst/>
+          </a:prstGeom>
+          <a:solidFill>
+            <a:srgbClr val="3F51B5"/>
+          </a:solidFill>
+          <a:ln>
+            <a:noFill/>
+          </a:ln>
+        </p:spPr>
+        <p:style>
+          <a:lnRef idx="1">
+            <a:schemeClr val="accent1"/>
+          </a:lnRef>
+          <a:fillRef idx="3">
+            <a:schemeClr val="accent1"/>
+          </a:fillRef>
+          <a:effectRef idx="2">
+            <a:schemeClr val="accent1"/>
+          </a:effectRef>
+          <a:fontRef idx="minor">
+            <a:schemeClr val="lt1"/>
+          </a:fontRef>
+        </p:style>
+        <p:txBody>
+          <a:bodyPr rtlCol="0" anchor="ctr"/>
+          <a:lstStyle/>
+          <a:p>
+            <a:pPr algn="ctr"/>
+          </a:p>
+        </p:txBody>
+      </p:sp>
+      <p:sp>
+        <p:nvSpPr>
+          <p:cNvPr id="5" name="TextBox 4"/>
+          <p:cNvSpPr txBox="1"/>
+          <p:nvPr/>
+        </p:nvSpPr>
+        <p:spPr>
+          <a:xfrm>
+            <a:off x="11247120" y="6492240"/>
+            <a:ext cx="822960" cy="274320"/>
+          </a:xfrm>
+          <a:prstGeom prst="rect">
+            <a:avLst/>
+          </a:prstGeom>
+          <a:noFill/>
+        </p:spPr>
+        <p:txBody>
+          <a:bodyPr wrap="square">
+            <a:spAutoFit/>
+          </a:bodyPr>
+          <a:lstStyle/>
+          <a:p>
+            <a:pPr algn="ctr"/>
+            <a:r>
+              <a:rPr sz="1000" b="0">
+                <a:solidFill>
+                  <a:srgbClr val="9E9E9E"/>
+                </a:solidFill>
+              </a:rPr>
+              <a:t>14 / 16</a:t>
+            </a:r>
+          </a:p>
+        </p:txBody>
+      </p:sp>
+      <p:sp>
+        <p:nvSpPr>
+          <p:cNvPr id="6" name="TextBox 5"/>
+          <p:cNvSpPr txBox="1"/>
+          <p:nvPr/>
+        </p:nvSpPr>
+        <p:spPr>
+          <a:xfrm>
+            <a:off x="457200" y="987552"/>
+            <a:ext cx="5486400" cy="347472"/>
+          </a:xfrm>
+          <a:prstGeom prst="rect">
+            <a:avLst/>
+          </a:prstGeom>
+          <a:noFill/>
+        </p:spPr>
+        <p:txBody>
+          <a:bodyPr wrap="square">
+            <a:spAutoFit/>
+          </a:bodyPr>
+          <a:lstStyle/>
+          <a:p>
+            <a:pPr algn="l"/>
+            <a:r>
+              <a:rPr sz="1200" b="0">
+                <a:solidFill>
+                  <a:srgbClr val="9E9E9E"/>
+                </a:solidFill>
+              </a:rPr>
+              <a:t>선택지 비교</a:t>
+            </a:r>
+          </a:p>
+        </p:txBody>
+      </p:sp>
+      <p:sp>
+        <p:nvSpPr>
+          <p:cNvPr id="7" name="Rectangle 6"/>
+          <p:cNvSpPr/>
+          <p:nvPr/>
+        </p:nvSpPr>
+        <p:spPr>
+          <a:xfrm>
+            <a:off x="457200" y="1389888"/>
+            <a:ext cx="5486400" cy="1024128"/>
+          </a:xfrm>
+          <a:prstGeom prst="rect">
+            <a:avLst/>
+          </a:prstGeom>
+          <a:noFill/>
+          <a:ln w="10160">
+            <a:solidFill>
+              <a:srgbClr val="E0E0E0"/>
+            </a:solidFill>
+          </a:ln>
+        </p:spPr>
+        <p:style>
+          <a:lnRef idx="1">
+            <a:schemeClr val="accent1"/>
+          </a:lnRef>
+          <a:fillRef idx="3">
+            <a:schemeClr val="accent1"/>
+          </a:fillRef>
+          <a:effectRef idx="2">
+            <a:schemeClr val="accent1"/>
+          </a:effectRef>
+          <a:fontRef idx="minor">
+            <a:schemeClr val="lt1"/>
+          </a:fontRef>
+        </p:style>
+        <p:txBody>
+          <a:bodyPr rtlCol="0" anchor="ctr"/>
+          <a:lstStyle/>
+          <a:p>
+            <a:pPr algn="ctr"/>
+          </a:p>
+        </p:txBody>
+      </p:sp>
+      <p:sp>
+        <p:nvSpPr>
+          <p:cNvPr id="8" name="TextBox 7"/>
+          <p:cNvSpPr txBox="1"/>
+          <p:nvPr/>
+        </p:nvSpPr>
+        <p:spPr>
+          <a:xfrm>
+            <a:off x="594360" y="1499616"/>
+            <a:ext cx="5303520" cy="886968"/>
+          </a:xfrm>
+          <a:prstGeom prst="rect">
+            <a:avLst/>
+          </a:prstGeom>
+          <a:noFill/>
+        </p:spPr>
+        <p:txBody>
+          <a:bodyPr wrap="square">
+            <a:spAutoFit/>
+          </a:bodyPr>
+          <a:lstStyle/>
+          <a:p>
+            <a:pPr algn="l"/>
+            <a:r>
+              <a:rPr sz="1600" b="0">
+                <a:solidFill>
+                  <a:srgbClr val="9E9E9E"/>
+                </a:solidFill>
+              </a:rPr>
+              <a:t>역할 구분 없이 한 파일</a:t>
+            </a:r>
+          </a:p>
+        </p:txBody>
+      </p:sp>
+      <p:sp>
+        <p:nvSpPr>
+          <p:cNvPr id="9" name="Rectangle 8"/>
+          <p:cNvSpPr/>
+          <p:nvPr/>
+        </p:nvSpPr>
+        <p:spPr>
+          <a:xfrm>
+            <a:off x="457200" y="2651760"/>
+            <a:ext cx="5486400" cy="1024128"/>
+          </a:xfrm>
+          <a:prstGeom prst="rect">
+            <a:avLst/>
+          </a:prstGeom>
+          <a:noFill/>
+          <a:ln w="10160">
+            <a:solidFill>
+              <a:srgbClr val="E0E0E0"/>
+            </a:solidFill>
+          </a:ln>
+        </p:spPr>
+        <p:style>
+          <a:lnRef idx="1">
+            <a:schemeClr val="accent1"/>
+          </a:lnRef>
+          <a:fillRef idx="3">
+            <a:schemeClr val="accent1"/>
+          </a:fillRef>
+          <a:effectRef idx="2">
+            <a:schemeClr val="accent1"/>
+          </a:effectRef>
+          <a:fontRef idx="minor">
+            <a:schemeClr val="lt1"/>
+          </a:fontRef>
+        </p:style>
+        <p:txBody>
+          <a:bodyPr rtlCol="0" anchor="ctr"/>
+          <a:lstStyle/>
+          <a:p>
+            <a:pPr algn="ctr"/>
+          </a:p>
+        </p:txBody>
+      </p:sp>
+      <p:sp>
+        <p:nvSpPr>
+          <p:cNvPr id="10" name="TextBox 9"/>
+          <p:cNvSpPr txBox="1"/>
+          <p:nvPr/>
+        </p:nvSpPr>
+        <p:spPr>
+          <a:xfrm>
+            <a:off x="594360" y="2761488"/>
+            <a:ext cx="5303520" cy="886968"/>
+          </a:xfrm>
+          <a:prstGeom prst="rect">
+            <a:avLst/>
+          </a:prstGeom>
+          <a:noFill/>
+        </p:spPr>
+        <p:txBody>
+          <a:bodyPr wrap="square">
+            <a:spAutoFit/>
+          </a:bodyPr>
+          <a:lstStyle/>
+          <a:p>
+            <a:pPr algn="l"/>
+            <a:r>
+              <a:rPr sz="1600" b="0">
+                <a:solidFill>
+                  <a:srgbClr val="9E9E9E"/>
+                </a:solidFill>
+              </a:rPr>
+              <a:t>MVC 방식</a:t>
+            </a:r>
+          </a:p>
+        </p:txBody>
+      </p:sp>
+      <p:sp>
+        <p:nvSpPr>
+          <p:cNvPr id="11" name="Rectangle 10"/>
+          <p:cNvSpPr/>
+          <p:nvPr/>
+        </p:nvSpPr>
+        <p:spPr>
+          <a:xfrm>
+            <a:off x="457200" y="3913631"/>
+            <a:ext cx="5486400" cy="1024128"/>
+          </a:xfrm>
+          <a:prstGeom prst="rect">
+            <a:avLst/>
+          </a:prstGeom>
+          <a:noFill/>
+          <a:ln w="10160">
+            <a:solidFill>
+              <a:srgbClr val="E0E0E0"/>
+            </a:solidFill>
+          </a:ln>
+        </p:spPr>
+        <p:style>
+          <a:lnRef idx="1">
+            <a:schemeClr val="accent1"/>
+          </a:lnRef>
+          <a:fillRef idx="3">
+            <a:schemeClr val="accent1"/>
+          </a:fillRef>
+          <a:effectRef idx="2">
+            <a:schemeClr val="accent1"/>
+          </a:effectRef>
+          <a:fontRef idx="minor">
+            <a:schemeClr val="lt1"/>
+          </a:fontRef>
+        </p:style>
+        <p:txBody>
+          <a:bodyPr rtlCol="0" anchor="ctr"/>
+          <a:lstStyle/>
+          <a:p>
+            <a:pPr algn="ctr"/>
+          </a:p>
+        </p:txBody>
+      </p:sp>
+      <p:sp>
+        <p:nvSpPr>
+          <p:cNvPr id="12" name="TextBox 11"/>
+          <p:cNvSpPr txBox="1"/>
+          <p:nvPr/>
+        </p:nvSpPr>
+        <p:spPr>
+          <a:xfrm>
+            <a:off x="594360" y="4023359"/>
+            <a:ext cx="5303520" cy="886968"/>
+          </a:xfrm>
+          <a:prstGeom prst="rect">
+            <a:avLst/>
+          </a:prstGeom>
+          <a:noFill/>
+        </p:spPr>
+        <p:txBody>
+          <a:bodyPr wrap="square">
+            <a:spAutoFit/>
+          </a:bodyPr>
+          <a:lstStyle/>
+          <a:p>
+            <a:pPr algn="l"/>
+            <a:r>
+              <a:rPr sz="1600" b="0">
+                <a:solidFill>
+                  <a:srgbClr val="9E9E9E"/>
+                </a:solidFill>
+              </a:rPr>
+              <a:t>6 ~ 8개 레이어</a:t>
+            </a:r>
+          </a:p>
+        </p:txBody>
+      </p:sp>
+      <p:sp>
+        <p:nvSpPr>
+          <p:cNvPr id="13" name="Rectangle 12"/>
+          <p:cNvSpPr/>
+          <p:nvPr/>
+        </p:nvSpPr>
+        <p:spPr>
+          <a:xfrm>
+            <a:off x="457200" y="5175504"/>
+            <a:ext cx="5486400" cy="1024128"/>
+          </a:xfrm>
+          <a:prstGeom prst="rect">
+            <a:avLst/>
+          </a:prstGeom>
+          <a:solidFill>
+            <a:srgbClr val="3F51B5"/>
+          </a:solidFill>
+          <a:ln>
+            <a:noFill/>
+          </a:ln>
+        </p:spPr>
+        <p:style>
+          <a:lnRef idx="1">
+            <a:schemeClr val="accent1"/>
+          </a:lnRef>
+          <a:fillRef idx="3">
+            <a:schemeClr val="accent1"/>
+          </a:fillRef>
+          <a:effectRef idx="2">
+            <a:schemeClr val="accent1"/>
+          </a:effectRef>
+          <a:fontRef idx="minor">
+            <a:schemeClr val="lt1"/>
+          </a:fontRef>
+        </p:style>
+        <p:txBody>
+          <a:bodyPr rtlCol="0" anchor="ctr"/>
+          <a:lstStyle/>
+          <a:p>
+            <a:pPr algn="ctr"/>
+          </a:p>
+        </p:txBody>
+      </p:sp>
+      <p:sp>
+        <p:nvSpPr>
+          <p:cNvPr id="14" name="TextBox 13"/>
+          <p:cNvSpPr txBox="1"/>
+          <p:nvPr/>
+        </p:nvSpPr>
+        <p:spPr>
+          <a:xfrm>
+            <a:off x="594360" y="5285232"/>
+            <a:ext cx="5303520" cy="886968"/>
+          </a:xfrm>
+          <a:prstGeom prst="rect">
+            <a:avLst/>
+          </a:prstGeom>
+          <a:noFill/>
+        </p:spPr>
+        <p:txBody>
+          <a:bodyPr wrap="square">
+            <a:spAutoFit/>
+          </a:bodyPr>
+          <a:lstStyle/>
+          <a:p>
+            <a:pPr algn="l"/>
+            <a:r>
+              <a:rPr sz="1600" b="1">
+                <a:solidFill>
+                  <a:srgbClr val="FFFFFF"/>
+                </a:solidFill>
+              </a:rPr>
+              <a:t>✓  4레이어 구조</a:t>
+            </a:r>
+          </a:p>
+        </p:txBody>
+      </p:sp>
+      <p:sp>
+        <p:nvSpPr>
+          <p:cNvPr id="15" name="TextBox 14"/>
+          <p:cNvSpPr txBox="1"/>
+          <p:nvPr/>
+        </p:nvSpPr>
+        <p:spPr>
+          <a:xfrm>
+            <a:off x="6400800" y="987552"/>
+            <a:ext cx="5394960" cy="347472"/>
+          </a:xfrm>
+          <a:prstGeom prst="rect">
+            <a:avLst/>
+          </a:prstGeom>
+          <a:noFill/>
+        </p:spPr>
+        <p:txBody>
+          <a:bodyPr wrap="square">
+            <a:spAutoFit/>
+          </a:bodyPr>
+          <a:lstStyle/>
+          <a:p>
+            <a:pPr algn="l"/>
+            <a:r>
+              <a:rPr sz="1200" b="0">
+                <a:solidFill>
+                  <a:srgbClr val="9E9E9E"/>
+                </a:solidFill>
+              </a:rPr>
+              <a:t>선택된 4레이어 구조</a:t>
+            </a:r>
+          </a:p>
+        </p:txBody>
+      </p:sp>
+      <p:sp>
+        <p:nvSpPr>
+          <p:cNvPr id="16" name="Rectangle 15"/>
+          <p:cNvSpPr/>
+          <p:nvPr/>
+        </p:nvSpPr>
+        <p:spPr>
+          <a:xfrm>
+            <a:off x="6400800" y="1389888"/>
+            <a:ext cx="1371600" cy="822960"/>
+          </a:xfrm>
+          <a:prstGeom prst="rect">
+            <a:avLst/>
+          </a:prstGeom>
+          <a:solidFill>
+            <a:srgbClr val="F5F5F5"/>
+          </a:solidFill>
+          <a:ln w="10160">
+            <a:solidFill>
+              <a:srgbClr val="E0E0E0"/>
+            </a:solidFill>
+          </a:ln>
+        </p:spPr>
+        <p:style>
+          <a:lnRef idx="1">
+            <a:schemeClr val="accent1"/>
+          </a:lnRef>
+          <a:fillRef idx="3">
+            <a:schemeClr val="accent1"/>
+          </a:fillRef>
+          <a:effectRef idx="2">
+            <a:schemeClr val="accent1"/>
+          </a:effectRef>
+          <a:fontRef idx="minor">
+            <a:schemeClr val="lt1"/>
+          </a:fontRef>
+        </p:style>
+        <p:txBody>
+          <a:bodyPr rtlCol="0" anchor="ctr"/>
+          <a:lstStyle/>
+          <a:p>
+            <a:pPr algn="ctr"/>
+          </a:p>
+        </p:txBody>
+      </p:sp>
+      <p:sp>
+        <p:nvSpPr>
+          <p:cNvPr id="17" name="TextBox 16"/>
+          <p:cNvSpPr txBox="1"/>
+          <p:nvPr/>
+        </p:nvSpPr>
+        <p:spPr>
+          <a:xfrm>
+            <a:off x="6510528" y="1591056"/>
+            <a:ext cx="1188720" cy="438912"/>
+          </a:xfrm>
+          <a:prstGeom prst="rect">
+            <a:avLst/>
+          </a:prstGeom>
+          <a:noFill/>
+        </p:spPr>
+        <p:txBody>
+          <a:bodyPr wrap="square">
+            <a:spAutoFit/>
+          </a:bodyPr>
+          <a:lstStyle/>
+          <a:p>
+            <a:pPr algn="l"/>
+            <a:r>
+              <a:rPr sz="1200" b="1">
+                <a:solidFill>
+                  <a:srgbClr val="3F51B5"/>
+                </a:solidFill>
+              </a:rPr>
+              <a:t>레이어</a:t>
+            </a:r>
+          </a:p>
+        </p:txBody>
+      </p:sp>
+      <p:sp>
+        <p:nvSpPr>
+          <p:cNvPr id="18" name="Rectangle 17"/>
+          <p:cNvSpPr/>
+          <p:nvPr/>
+        </p:nvSpPr>
+        <p:spPr>
+          <a:xfrm>
+            <a:off x="7818120" y="1389888"/>
+            <a:ext cx="2560320" cy="822960"/>
+          </a:xfrm>
+          <a:prstGeom prst="rect">
+            <a:avLst/>
+          </a:prstGeom>
+          <a:solidFill>
+            <a:srgbClr val="F5F5F5"/>
+          </a:solidFill>
+          <a:ln w="10160">
+            <a:solidFill>
+              <a:srgbClr val="E0E0E0"/>
+            </a:solidFill>
+          </a:ln>
+        </p:spPr>
+        <p:style>
+          <a:lnRef idx="1">
+            <a:schemeClr val="accent1"/>
+          </a:lnRef>
+          <a:fillRef idx="3">
+            <a:schemeClr val="accent1"/>
+          </a:fillRef>
+          <a:effectRef idx="2">
+            <a:schemeClr val="accent1"/>
+          </a:effectRef>
+          <a:fontRef idx="minor">
+            <a:schemeClr val="lt1"/>
+          </a:fontRef>
+        </p:style>
+        <p:txBody>
+          <a:bodyPr rtlCol="0" anchor="ctr"/>
+          <a:lstStyle/>
+          <a:p>
+            <a:pPr algn="ctr"/>
+          </a:p>
+        </p:txBody>
+      </p:sp>
+      <p:sp>
+        <p:nvSpPr>
+          <p:cNvPr id="19" name="TextBox 18"/>
+          <p:cNvSpPr txBox="1"/>
+          <p:nvPr/>
+        </p:nvSpPr>
+        <p:spPr>
+          <a:xfrm>
+            <a:off x="7927848" y="1591056"/>
+            <a:ext cx="2377439" cy="438912"/>
+          </a:xfrm>
+          <a:prstGeom prst="rect">
+            <a:avLst/>
+          </a:prstGeom>
+          <a:noFill/>
+        </p:spPr>
+        <p:txBody>
+          <a:bodyPr wrap="square">
+            <a:spAutoFit/>
+          </a:bodyPr>
+          <a:lstStyle/>
+          <a:p>
+            <a:pPr algn="l"/>
+            <a:r>
+              <a:rPr sz="1200" b="1">
+                <a:solidFill>
+                  <a:srgbClr val="3F51B5"/>
+                </a:solidFill>
+              </a:rPr>
+              <a:t>역할</a:t>
+            </a:r>
+          </a:p>
+        </p:txBody>
+      </p:sp>
+      <p:sp>
+        <p:nvSpPr>
+          <p:cNvPr id="20" name="Rectangle 19"/>
+          <p:cNvSpPr/>
+          <p:nvPr/>
+        </p:nvSpPr>
+        <p:spPr>
+          <a:xfrm>
+            <a:off x="10424160" y="1389888"/>
+            <a:ext cx="1737360" cy="822960"/>
+          </a:xfrm>
+          <a:prstGeom prst="rect">
+            <a:avLst/>
+          </a:prstGeom>
+          <a:solidFill>
+            <a:srgbClr val="F5F5F5"/>
+          </a:solidFill>
+          <a:ln w="10160">
+            <a:solidFill>
+              <a:srgbClr val="E0E0E0"/>
+            </a:solidFill>
+          </a:ln>
+        </p:spPr>
+        <p:style>
+          <a:lnRef idx="1">
+            <a:schemeClr val="accent1"/>
+          </a:lnRef>
+          <a:fillRef idx="3">
+            <a:schemeClr val="accent1"/>
+          </a:fillRef>
+          <a:effectRef idx="2">
+            <a:schemeClr val="accent1"/>
+          </a:effectRef>
+          <a:fontRef idx="minor">
+            <a:schemeClr val="lt1"/>
+          </a:fontRef>
+        </p:style>
+        <p:txBody>
+          <a:bodyPr rtlCol="0" anchor="ctr"/>
+          <a:lstStyle/>
+          <a:p>
+            <a:pPr algn="ctr"/>
+          </a:p>
+        </p:txBody>
+      </p:sp>
+      <p:sp>
+        <p:nvSpPr>
+          <p:cNvPr id="21" name="TextBox 20"/>
+          <p:cNvSpPr txBox="1"/>
+          <p:nvPr/>
+        </p:nvSpPr>
+        <p:spPr>
+          <a:xfrm>
+            <a:off x="10533888" y="1591056"/>
+            <a:ext cx="1554480" cy="438912"/>
+          </a:xfrm>
+          <a:prstGeom prst="rect">
+            <a:avLst/>
+          </a:prstGeom>
+          <a:noFill/>
+        </p:spPr>
+        <p:txBody>
+          <a:bodyPr wrap="square">
+            <a:spAutoFit/>
+          </a:bodyPr>
+          <a:lstStyle/>
+          <a:p>
+            <a:pPr algn="l"/>
+            <a:r>
+              <a:rPr sz="1200" b="1">
+                <a:solidFill>
+                  <a:srgbClr val="3F51B5"/>
+                </a:solidFill>
+              </a:rPr>
+              <a:t>위치</a:t>
+            </a:r>
+          </a:p>
+        </p:txBody>
+      </p:sp>
+      <p:sp>
+        <p:nvSpPr>
+          <p:cNvPr id="22" name="Rectangle 21"/>
+          <p:cNvSpPr/>
+          <p:nvPr/>
+        </p:nvSpPr>
+        <p:spPr>
+          <a:xfrm>
+            <a:off x="6400800" y="2395728"/>
+            <a:ext cx="1371600" cy="822960"/>
+          </a:xfrm>
+          <a:prstGeom prst="rect">
+            <a:avLst/>
+          </a:prstGeom>
+          <a:solidFill>
+            <a:srgbClr val="FFFFFF"/>
+          </a:solidFill>
+          <a:ln w="10160">
+            <a:solidFill>
+              <a:srgbClr val="E0E0E0"/>
+            </a:solidFill>
+          </a:ln>
+        </p:spPr>
+        <p:style>
+          <a:lnRef idx="1">
+            <a:schemeClr val="accent1"/>
+          </a:lnRef>
+          <a:fillRef idx="3">
+            <a:schemeClr val="accent1"/>
+          </a:fillRef>
+          <a:effectRef idx="2">
+            <a:schemeClr val="accent1"/>
+          </a:effectRef>
+          <a:fontRef idx="minor">
+            <a:schemeClr val="lt1"/>
+          </a:fontRef>
+        </p:style>
+        <p:txBody>
+          <a:bodyPr rtlCol="0" anchor="ctr"/>
+          <a:lstStyle/>
+          <a:p>
+            <a:pPr algn="ctr"/>
+          </a:p>
+        </p:txBody>
+      </p:sp>
+      <p:sp>
+        <p:nvSpPr>
+          <p:cNvPr id="23" name="TextBox 22"/>
+          <p:cNvSpPr txBox="1"/>
+          <p:nvPr/>
+        </p:nvSpPr>
+        <p:spPr>
+          <a:xfrm>
+            <a:off x="6510528" y="2596896"/>
+            <a:ext cx="1188720" cy="438912"/>
+          </a:xfrm>
+          <a:prstGeom prst="rect">
+            <a:avLst/>
+          </a:prstGeom>
+          <a:noFill/>
+        </p:spPr>
+        <p:txBody>
+          <a:bodyPr wrap="square">
+            <a:spAutoFit/>
+          </a:bodyPr>
+          <a:lstStyle/>
+          <a:p>
+            <a:pPr algn="l"/>
+            <a:r>
+              <a:rPr sz="1200" b="0">
+                <a:solidFill>
+                  <a:srgbClr val="212121"/>
+                </a:solidFill>
+              </a:rPr>
+              <a:t>화면</a:t>
+            </a:r>
+          </a:p>
+        </p:txBody>
+      </p:sp>
+      <p:sp>
+        <p:nvSpPr>
+          <p:cNvPr id="24" name="Rectangle 23"/>
+          <p:cNvSpPr/>
+          <p:nvPr/>
+        </p:nvSpPr>
+        <p:spPr>
+          <a:xfrm>
+            <a:off x="7818120" y="2395728"/>
+            <a:ext cx="2560320" cy="822960"/>
+          </a:xfrm>
+          <a:prstGeom prst="rect">
+            <a:avLst/>
+          </a:prstGeom>
+          <a:solidFill>
+            <a:srgbClr val="FFFFFF"/>
+          </a:solidFill>
+          <a:ln w="10160">
+            <a:solidFill>
+              <a:srgbClr val="E0E0E0"/>
+            </a:solidFill>
+          </a:ln>
+        </p:spPr>
+        <p:style>
+          <a:lnRef idx="1">
+            <a:schemeClr val="accent1"/>
+          </a:lnRef>
+          <a:fillRef idx="3">
+            <a:schemeClr val="accent1"/>
+          </a:fillRef>
+          <a:effectRef idx="2">
+            <a:schemeClr val="accent1"/>
+          </a:effectRef>
+          <a:fontRef idx="minor">
+            <a:schemeClr val="lt1"/>
+          </a:fontRef>
+        </p:style>
+        <p:txBody>
+          <a:bodyPr rtlCol="0" anchor="ctr"/>
+          <a:lstStyle/>
+          <a:p>
+            <a:pPr algn="ctr"/>
+          </a:p>
+        </p:txBody>
+      </p:sp>
+      <p:sp>
+        <p:nvSpPr>
+          <p:cNvPr id="25" name="TextBox 24"/>
+          <p:cNvSpPr txBox="1"/>
+          <p:nvPr/>
+        </p:nvSpPr>
+        <p:spPr>
+          <a:xfrm>
+            <a:off x="7927848" y="2596896"/>
+            <a:ext cx="2377439" cy="438912"/>
+          </a:xfrm>
+          <a:prstGeom prst="rect">
+            <a:avLst/>
+          </a:prstGeom>
+          <a:noFill/>
+        </p:spPr>
+        <p:txBody>
+          <a:bodyPr wrap="square">
+            <a:spAutoFit/>
+          </a:bodyPr>
+          <a:lstStyle/>
+          <a:p>
+            <a:pPr algn="l"/>
+            <a:r>
+              <a:rPr sz="1200" b="0">
+                <a:solidFill>
+                  <a:srgbClr val="212121"/>
+                </a:solidFill>
+              </a:rPr>
+              <a:t>버튼·목록·입력창</a:t>
+            </a:r>
+          </a:p>
+        </p:txBody>
+      </p:sp>
+      <p:sp>
+        <p:nvSpPr>
+          <p:cNvPr id="26" name="Rectangle 25"/>
+          <p:cNvSpPr/>
+          <p:nvPr/>
+        </p:nvSpPr>
+        <p:spPr>
+          <a:xfrm>
+            <a:off x="10424160" y="2395728"/>
+            <a:ext cx="1737360" cy="822960"/>
+          </a:xfrm>
+          <a:prstGeom prst="rect">
+            <a:avLst/>
+          </a:prstGeom>
+          <a:solidFill>
+            <a:srgbClr val="FFFFFF"/>
+          </a:solidFill>
+          <a:ln w="10160">
+            <a:solidFill>
+              <a:srgbClr val="E0E0E0"/>
+            </a:solidFill>
+          </a:ln>
+        </p:spPr>
+        <p:style>
+          <a:lnRef idx="1">
+            <a:schemeClr val="accent1"/>
+          </a:lnRef>
+          <a:fillRef idx="3">
+            <a:schemeClr val="accent1"/>
+          </a:fillRef>
+          <a:effectRef idx="2">
+            <a:schemeClr val="accent1"/>
+          </a:effectRef>
+          <a:fontRef idx="minor">
+            <a:schemeClr val="lt1"/>
+          </a:fontRef>
+        </p:style>
+        <p:txBody>
+          <a:bodyPr rtlCol="0" anchor="ctr"/>
+          <a:lstStyle/>
+          <a:p>
+            <a:pPr algn="ctr"/>
+          </a:p>
+        </p:txBody>
+      </p:sp>
+      <p:sp>
+        <p:nvSpPr>
+          <p:cNvPr id="27" name="TextBox 26"/>
+          <p:cNvSpPr txBox="1"/>
+          <p:nvPr/>
+        </p:nvSpPr>
+        <p:spPr>
+          <a:xfrm>
+            <a:off x="10533888" y="2596896"/>
+            <a:ext cx="1554480" cy="438912"/>
+          </a:xfrm>
+          <a:prstGeom prst="rect">
+            <a:avLst/>
+          </a:prstGeom>
+          <a:noFill/>
+        </p:spPr>
+        <p:txBody>
+          <a:bodyPr wrap="square">
+            <a:spAutoFit/>
+          </a:bodyPr>
+          <a:lstStyle/>
+          <a:p>
+            <a:pPr algn="l"/>
+            <a:r>
+              <a:rPr sz="1200" b="0">
+                <a:solidFill>
+                  <a:srgbClr val="212121"/>
+                </a:solidFill>
+              </a:rPr>
+              <a:t>screens/</a:t>
+            </a:r>
+          </a:p>
+        </p:txBody>
+      </p:sp>
+      <p:sp>
+        <p:nvSpPr>
+          <p:cNvPr id="28" name="Rectangle 27"/>
+          <p:cNvSpPr/>
+          <p:nvPr/>
+        </p:nvSpPr>
+        <p:spPr>
+          <a:xfrm>
+            <a:off x="6400800" y="3401568"/>
+            <a:ext cx="1371600" cy="822960"/>
+          </a:xfrm>
+          <a:prstGeom prst="rect">
+            <a:avLst/>
+          </a:prstGeom>
+          <a:solidFill>
+            <a:srgbClr val="FFFFFF"/>
+          </a:solidFill>
+          <a:ln w="10160">
+            <a:solidFill>
+              <a:srgbClr val="E0E0E0"/>
+            </a:solidFill>
+          </a:ln>
+        </p:spPr>
+        <p:style>
+          <a:lnRef idx="1">
+            <a:schemeClr val="accent1"/>
+          </a:lnRef>
+          <a:fillRef idx="3">
+            <a:schemeClr val="accent1"/>
+          </a:fillRef>
+          <a:effectRef idx="2">
+            <a:schemeClr val="accent1"/>
+          </a:effectRef>
+          <a:fontRef idx="minor">
+            <a:schemeClr val="lt1"/>
+          </a:fontRef>
+        </p:style>
+        <p:txBody>
+          <a:bodyPr rtlCol="0" anchor="ctr"/>
+          <a:lstStyle/>
+          <a:p>
+            <a:pPr algn="ctr"/>
+          </a:p>
+        </p:txBody>
+      </p:sp>
+      <p:sp>
+        <p:nvSpPr>
+          <p:cNvPr id="29" name="TextBox 28"/>
+          <p:cNvSpPr txBox="1"/>
+          <p:nvPr/>
+        </p:nvSpPr>
+        <p:spPr>
+          <a:xfrm>
+            <a:off x="6510528" y="3602736"/>
+            <a:ext cx="1188720" cy="438912"/>
+          </a:xfrm>
+          <a:prstGeom prst="rect">
+            <a:avLst/>
+          </a:prstGeom>
+          <a:noFill/>
+        </p:spPr>
+        <p:txBody>
+          <a:bodyPr wrap="square">
+            <a:spAutoFit/>
+          </a:bodyPr>
+          <a:lstStyle/>
+          <a:p>
+            <a:pPr algn="l"/>
+            <a:r>
+              <a:rPr sz="1200" b="0">
+                <a:solidFill>
+                  <a:srgbClr val="212121"/>
+                </a:solidFill>
+              </a:rPr>
+              <a:t>흐름</a:t>
+            </a:r>
+          </a:p>
+        </p:txBody>
+      </p:sp>
+      <p:sp>
+        <p:nvSpPr>
+          <p:cNvPr id="30" name="Rectangle 29"/>
+          <p:cNvSpPr/>
+          <p:nvPr/>
+        </p:nvSpPr>
+        <p:spPr>
+          <a:xfrm>
+            <a:off x="7818120" y="3401568"/>
+            <a:ext cx="2560320" cy="822960"/>
+          </a:xfrm>
+          <a:prstGeom prst="rect">
+            <a:avLst/>
+          </a:prstGeom>
+          <a:solidFill>
+            <a:srgbClr val="FFFFFF"/>
+          </a:solidFill>
+          <a:ln w="10160">
+            <a:solidFill>
+              <a:srgbClr val="E0E0E0"/>
+            </a:solidFill>
+          </a:ln>
+        </p:spPr>
+        <p:style>
+          <a:lnRef idx="1">
+            <a:schemeClr val="accent1"/>
+          </a:lnRef>
+          <a:fillRef idx="3">
+            <a:schemeClr val="accent1"/>
+          </a:fillRef>
+          <a:effectRef idx="2">
+            <a:schemeClr val="accent1"/>
+          </a:effectRef>
+          <a:fontRef idx="minor">
+            <a:schemeClr val="lt1"/>
+          </a:fontRef>
+        </p:style>
+        <p:txBody>
+          <a:bodyPr rtlCol="0" anchor="ctr"/>
+          <a:lstStyle/>
+          <a:p>
+            <a:pPr algn="ctr"/>
+          </a:p>
+        </p:txBody>
+      </p:sp>
+      <p:sp>
+        <p:nvSpPr>
+          <p:cNvPr id="31" name="TextBox 30"/>
+          <p:cNvSpPr txBox="1"/>
+          <p:nvPr/>
+        </p:nvSpPr>
+        <p:spPr>
+          <a:xfrm>
+            <a:off x="7927848" y="3602736"/>
+            <a:ext cx="2377439" cy="438912"/>
+          </a:xfrm>
+          <a:prstGeom prst="rect">
+            <a:avLst/>
+          </a:prstGeom>
+          <a:noFill/>
+        </p:spPr>
+        <p:txBody>
+          <a:bodyPr wrap="square">
+            <a:spAutoFit/>
+          </a:bodyPr>
+          <a:lstStyle/>
+          <a:p>
+            <a:pPr algn="l"/>
+            <a:r>
+              <a:rPr sz="1200" b="0">
+                <a:solidFill>
+                  <a:srgbClr val="212121"/>
+                </a:solidFill>
+              </a:rPr>
+              <a:t>화면-데이터 연결 처리</a:t>
+            </a:r>
+          </a:p>
+        </p:txBody>
+      </p:sp>
+      <p:sp>
+        <p:nvSpPr>
+          <p:cNvPr id="32" name="Rectangle 31"/>
+          <p:cNvSpPr/>
+          <p:nvPr/>
+        </p:nvSpPr>
+        <p:spPr>
+          <a:xfrm>
+            <a:off x="10424160" y="3401568"/>
+            <a:ext cx="1737360" cy="822960"/>
+          </a:xfrm>
+          <a:prstGeom prst="rect">
+            <a:avLst/>
+          </a:prstGeom>
+          <a:solidFill>
+            <a:srgbClr val="FFFFFF"/>
+          </a:solidFill>
+          <a:ln w="10160">
+            <a:solidFill>
+              <a:srgbClr val="E0E0E0"/>
+            </a:solidFill>
+          </a:ln>
+        </p:spPr>
+        <p:style>
+          <a:lnRef idx="1">
+            <a:schemeClr val="accent1"/>
+          </a:lnRef>
+          <a:fillRef idx="3">
+            <a:schemeClr val="accent1"/>
+          </a:fillRef>
+          <a:effectRef idx="2">
+            <a:schemeClr val="accent1"/>
+          </a:effectRef>
+          <a:fontRef idx="minor">
+            <a:schemeClr val="lt1"/>
+          </a:fontRef>
+        </p:style>
+        <p:txBody>
+          <a:bodyPr rtlCol="0" anchor="ctr"/>
+          <a:lstStyle/>
+          <a:p>
+            <a:pPr algn="ctr"/>
+          </a:p>
+        </p:txBody>
+      </p:sp>
+      <p:sp>
+        <p:nvSpPr>
+          <p:cNvPr id="33" name="TextBox 32"/>
+          <p:cNvSpPr txBox="1"/>
+          <p:nvPr/>
+        </p:nvSpPr>
+        <p:spPr>
+          <a:xfrm>
+            <a:off x="10533888" y="3602736"/>
+            <a:ext cx="1554480" cy="438912"/>
+          </a:xfrm>
+          <a:prstGeom prst="rect">
+            <a:avLst/>
+          </a:prstGeom>
+          <a:noFill/>
+        </p:spPr>
+        <p:txBody>
+          <a:bodyPr wrap="square">
+            <a:spAutoFit/>
+          </a:bodyPr>
+          <a:lstStyle/>
+          <a:p>
+            <a:pPr algn="l"/>
+            <a:r>
+              <a:rPr sz="1200" b="0">
+                <a:solidFill>
+                  <a:srgbClr val="212121"/>
+                </a:solidFill>
+              </a:rPr>
+              <a:t/>
+            </a:r>
+          </a:p>
+        </p:txBody>
+      </p:sp>
+      <p:sp>
+        <p:nvSpPr>
+          <p:cNvPr id="34" name="Rectangle 33"/>
+          <p:cNvSpPr/>
+          <p:nvPr/>
+        </p:nvSpPr>
+        <p:spPr>
+          <a:xfrm>
+            <a:off x="6400800" y="4407408"/>
+            <a:ext cx="1371600" cy="822960"/>
+          </a:xfrm>
+          <a:prstGeom prst="rect">
+            <a:avLst/>
+          </a:prstGeom>
+          <a:solidFill>
+            <a:srgbClr val="FFFFFF"/>
+          </a:solidFill>
+          <a:ln w="10160">
+            <a:solidFill>
+              <a:srgbClr val="E0E0E0"/>
+            </a:solidFill>
+          </a:ln>
+        </p:spPr>
+        <p:style>
+          <a:lnRef idx="1">
+            <a:schemeClr val="accent1"/>
+          </a:lnRef>
+          <a:fillRef idx="3">
+            <a:schemeClr val="accent1"/>
+          </a:fillRef>
+          <a:effectRef idx="2">
+            <a:schemeClr val="accent1"/>
+          </a:effectRef>
+          <a:fontRef idx="minor">
+            <a:schemeClr val="lt1"/>
+          </a:fontRef>
+        </p:style>
+        <p:txBody>
+          <a:bodyPr rtlCol="0" anchor="ctr"/>
+          <a:lstStyle/>
+          <a:p>
+            <a:pPr algn="ctr"/>
+          </a:p>
+        </p:txBody>
+      </p:sp>
+      <p:sp>
+        <p:nvSpPr>
+          <p:cNvPr id="35" name="TextBox 34"/>
+          <p:cNvSpPr txBox="1"/>
+          <p:nvPr/>
+        </p:nvSpPr>
+        <p:spPr>
+          <a:xfrm>
+            <a:off x="6510528" y="4608576"/>
+            <a:ext cx="1188720" cy="438912"/>
+          </a:xfrm>
+          <a:prstGeom prst="rect">
+            <a:avLst/>
+          </a:prstGeom>
+          <a:noFill/>
+        </p:spPr>
+        <p:txBody>
+          <a:bodyPr wrap="square">
+            <a:spAutoFit/>
+          </a:bodyPr>
+          <a:lstStyle/>
+          <a:p>
+            <a:pPr algn="l"/>
+            <a:r>
+              <a:rPr sz="1200" b="0">
+                <a:solidFill>
+                  <a:srgbClr val="212121"/>
+                </a:solidFill>
+              </a:rPr>
+              <a:t>규칙</a:t>
+            </a:r>
+          </a:p>
+        </p:txBody>
+      </p:sp>
+      <p:sp>
+        <p:nvSpPr>
+          <p:cNvPr id="36" name="Rectangle 35"/>
+          <p:cNvSpPr/>
+          <p:nvPr/>
+        </p:nvSpPr>
+        <p:spPr>
+          <a:xfrm>
+            <a:off x="7818120" y="4407408"/>
+            <a:ext cx="2560320" cy="822960"/>
+          </a:xfrm>
+          <a:prstGeom prst="rect">
+            <a:avLst/>
+          </a:prstGeom>
+          <a:solidFill>
+            <a:srgbClr val="FFFFFF"/>
+          </a:solidFill>
+          <a:ln w="10160">
+            <a:solidFill>
+              <a:srgbClr val="E0E0E0"/>
+            </a:solidFill>
+          </a:ln>
+        </p:spPr>
+        <p:style>
+          <a:lnRef idx="1">
+            <a:schemeClr val="accent1"/>
+          </a:lnRef>
+          <a:fillRef idx="3">
+            <a:schemeClr val="accent1"/>
+          </a:fillRef>
+          <a:effectRef idx="2">
+            <a:schemeClr val="accent1"/>
+          </a:effectRef>
+          <a:fontRef idx="minor">
+            <a:schemeClr val="lt1"/>
+          </a:fontRef>
+        </p:style>
+        <p:txBody>
+          <a:bodyPr rtlCol="0" anchor="ctr"/>
+          <a:lstStyle/>
+          <a:p>
+            <a:pPr algn="ctr"/>
+          </a:p>
+        </p:txBody>
+      </p:sp>
+      <p:sp>
+        <p:nvSpPr>
+          <p:cNvPr id="37" name="TextBox 36"/>
+          <p:cNvSpPr txBox="1"/>
+          <p:nvPr/>
+        </p:nvSpPr>
+        <p:spPr>
+          <a:xfrm>
+            <a:off x="7927848" y="4608576"/>
+            <a:ext cx="2377439" cy="438912"/>
+          </a:xfrm>
+          <a:prstGeom prst="rect">
+            <a:avLst/>
+          </a:prstGeom>
+          <a:noFill/>
+        </p:spPr>
+        <p:txBody>
+          <a:bodyPr wrap="square">
+            <a:spAutoFit/>
+          </a:bodyPr>
+          <a:lstStyle/>
+          <a:p>
+            <a:pPr algn="l"/>
+            <a:r>
+              <a:rPr sz="1200" b="0">
+                <a:solidFill>
+                  <a:srgbClr val="212121"/>
+                </a:solidFill>
+              </a:rPr>
+              <a:t>잔액·수익률 계산</a:t>
+            </a:r>
+          </a:p>
+        </p:txBody>
+      </p:sp>
+      <p:sp>
+        <p:nvSpPr>
+          <p:cNvPr id="38" name="Rectangle 37"/>
+          <p:cNvSpPr/>
+          <p:nvPr/>
+        </p:nvSpPr>
+        <p:spPr>
+          <a:xfrm>
+            <a:off x="10424160" y="4407408"/>
+            <a:ext cx="1737360" cy="822960"/>
+          </a:xfrm>
+          <a:prstGeom prst="rect">
+            <a:avLst/>
+          </a:prstGeom>
+          <a:solidFill>
+            <a:srgbClr val="FFFFFF"/>
+          </a:solidFill>
+          <a:ln w="10160">
+            <a:solidFill>
+              <a:srgbClr val="E0E0E0"/>
+            </a:solidFill>
+          </a:ln>
+        </p:spPr>
+        <p:style>
+          <a:lnRef idx="1">
+            <a:schemeClr val="accent1"/>
+          </a:lnRef>
+          <a:fillRef idx="3">
+            <a:schemeClr val="accent1"/>
+          </a:fillRef>
+          <a:effectRef idx="2">
+            <a:schemeClr val="accent1"/>
+          </a:effectRef>
+          <a:fontRef idx="minor">
+            <a:schemeClr val="lt1"/>
+          </a:fontRef>
+        </p:style>
+        <p:txBody>
+          <a:bodyPr rtlCol="0" anchor="ctr"/>
+          <a:lstStyle/>
+          <a:p>
+            <a:pPr algn="ctr"/>
+          </a:p>
+        </p:txBody>
+      </p:sp>
+      <p:sp>
+        <p:nvSpPr>
+          <p:cNvPr id="39" name="TextBox 38"/>
+          <p:cNvSpPr txBox="1"/>
+          <p:nvPr/>
+        </p:nvSpPr>
+        <p:spPr>
+          <a:xfrm>
+            <a:off x="10533888" y="4608576"/>
+            <a:ext cx="1554480" cy="438912"/>
+          </a:xfrm>
+          <a:prstGeom prst="rect">
+            <a:avLst/>
+          </a:prstGeom>
+          <a:noFill/>
+        </p:spPr>
+        <p:txBody>
+          <a:bodyPr wrap="square">
+            <a:spAutoFit/>
+          </a:bodyPr>
+          <a:lstStyle/>
+          <a:p>
+            <a:pPr algn="l"/>
+            <a:r>
+              <a:rPr sz="1200" b="0">
+                <a:solidFill>
+                  <a:srgbClr val="212121"/>
+                </a:solidFill>
+              </a:rPr>
+              <a:t>models/</a:t>
+            </a:r>
+          </a:p>
+        </p:txBody>
+      </p:sp>
+      <p:sp>
+        <p:nvSpPr>
+          <p:cNvPr id="40" name="Rectangle 39"/>
+          <p:cNvSpPr/>
+          <p:nvPr/>
+        </p:nvSpPr>
+        <p:spPr>
+          <a:xfrm>
+            <a:off x="6400800" y="5413248"/>
+            <a:ext cx="1371600" cy="822960"/>
+          </a:xfrm>
+          <a:prstGeom prst="rect">
+            <a:avLst/>
+          </a:prstGeom>
+          <a:solidFill>
+            <a:srgbClr val="FFFFFF"/>
+          </a:solidFill>
+          <a:ln w="10160">
+            <a:solidFill>
+              <a:srgbClr val="E0E0E0"/>
+            </a:solidFill>
+          </a:ln>
+        </p:spPr>
+        <p:style>
+          <a:lnRef idx="1">
+            <a:schemeClr val="accent1"/>
+          </a:lnRef>
+          <a:fillRef idx="3">
+            <a:schemeClr val="accent1"/>
+          </a:fillRef>
+          <a:effectRef idx="2">
+            <a:schemeClr val="accent1"/>
+          </a:effectRef>
+          <a:fontRef idx="minor">
+            <a:schemeClr val="lt1"/>
+          </a:fontRef>
+        </p:style>
+        <p:txBody>
+          <a:bodyPr rtlCol="0" anchor="ctr"/>
+          <a:lstStyle/>
+          <a:p>
+            <a:pPr algn="ctr"/>
+          </a:p>
+        </p:txBody>
+      </p:sp>
+      <p:sp>
+        <p:nvSpPr>
+          <p:cNvPr id="41" name="TextBox 40"/>
+          <p:cNvSpPr txBox="1"/>
+          <p:nvPr/>
+        </p:nvSpPr>
+        <p:spPr>
+          <a:xfrm>
+            <a:off x="6510528" y="5614416"/>
+            <a:ext cx="1188720" cy="438912"/>
+          </a:xfrm>
+          <a:prstGeom prst="rect">
+            <a:avLst/>
+          </a:prstGeom>
+          <a:noFill/>
+        </p:spPr>
+        <p:txBody>
+          <a:bodyPr wrap="square">
+            <a:spAutoFit/>
+          </a:bodyPr>
+          <a:lstStyle/>
+          <a:p>
+            <a:pPr algn="l"/>
+            <a:r>
+              <a:rPr sz="1200" b="0">
+                <a:solidFill>
+                  <a:srgbClr val="212121"/>
+                </a:solidFill>
+              </a:rPr>
+              <a:t>저장</a:t>
+            </a:r>
+          </a:p>
+        </p:txBody>
+      </p:sp>
+      <p:sp>
+        <p:nvSpPr>
+          <p:cNvPr id="42" name="Rectangle 41"/>
+          <p:cNvSpPr/>
+          <p:nvPr/>
+        </p:nvSpPr>
+        <p:spPr>
+          <a:xfrm>
+            <a:off x="7818120" y="5413248"/>
+            <a:ext cx="2560320" cy="822960"/>
+          </a:xfrm>
+          <a:prstGeom prst="rect">
+            <a:avLst/>
+          </a:prstGeom>
+          <a:solidFill>
+            <a:srgbClr val="FFFFFF"/>
+          </a:solidFill>
+          <a:ln w="10160">
+            <a:solidFill>
+              <a:srgbClr val="E0E0E0"/>
+            </a:solidFill>
+          </a:ln>
+        </p:spPr>
+        <p:style>
+          <a:lnRef idx="1">
+            <a:schemeClr val="accent1"/>
+          </a:lnRef>
+          <a:fillRef idx="3">
+            <a:schemeClr val="accent1"/>
+          </a:fillRef>
+          <a:effectRef idx="2">
+            <a:schemeClr val="accent1"/>
+          </a:effectRef>
+          <a:fontRef idx="minor">
+            <a:schemeClr val="lt1"/>
+          </a:fontRef>
+        </p:style>
+        <p:txBody>
+          <a:bodyPr rtlCol="0" anchor="ctr"/>
+          <a:lstStyle/>
+          <a:p>
+            <a:pPr algn="ctr"/>
+          </a:p>
+        </p:txBody>
+      </p:sp>
+      <p:sp>
+        <p:nvSpPr>
+          <p:cNvPr id="43" name="TextBox 42"/>
+          <p:cNvSpPr txBox="1"/>
+          <p:nvPr/>
+        </p:nvSpPr>
+        <p:spPr>
+          <a:xfrm>
+            <a:off x="7927848" y="5614416"/>
+            <a:ext cx="2377439" cy="438912"/>
+          </a:xfrm>
+          <a:prstGeom prst="rect">
+            <a:avLst/>
+          </a:prstGeom>
+          <a:noFill/>
+        </p:spPr>
+        <p:txBody>
+          <a:bodyPr wrap="square">
+            <a:spAutoFit/>
+          </a:bodyPr>
+          <a:lstStyle/>
+          <a:p>
+            <a:pPr algn="l"/>
+            <a:r>
+              <a:rPr sz="1200" b="0">
+                <a:solidFill>
+                  <a:srgbClr val="212121"/>
+                </a:solidFill>
+              </a:rPr>
+              <a:t>Firestore 입출력</a:t>
+            </a:r>
+          </a:p>
+        </p:txBody>
+      </p:sp>
+      <p:sp>
+        <p:nvSpPr>
+          <p:cNvPr id="44" name="Rectangle 43"/>
+          <p:cNvSpPr/>
+          <p:nvPr/>
+        </p:nvSpPr>
+        <p:spPr>
+          <a:xfrm>
+            <a:off x="10424160" y="5413248"/>
+            <a:ext cx="1737360" cy="822960"/>
+          </a:xfrm>
+          <a:prstGeom prst="rect">
+            <a:avLst/>
+          </a:prstGeom>
+          <a:solidFill>
+            <a:srgbClr val="FFFFFF"/>
+          </a:solidFill>
+          <a:ln w="10160">
+            <a:solidFill>
+              <a:srgbClr val="E0E0E0"/>
+            </a:solidFill>
+          </a:ln>
+        </p:spPr>
+        <p:style>
+          <a:lnRef idx="1">
+            <a:schemeClr val="accent1"/>
+          </a:lnRef>
+          <a:fillRef idx="3">
+            <a:schemeClr val="accent1"/>
+          </a:fillRef>
+          <a:effectRef idx="2">
+            <a:schemeClr val="accent1"/>
+          </a:effectRef>
+          <a:fontRef idx="minor">
+            <a:schemeClr val="lt1"/>
+          </a:fontRef>
+        </p:style>
+        <p:txBody>
+          <a:bodyPr rtlCol="0" anchor="ctr"/>
+          <a:lstStyle/>
+          <a:p>
+            <a:pPr algn="ctr"/>
+          </a:p>
+        </p:txBody>
+      </p:sp>
+      <p:sp>
+        <p:nvSpPr>
+          <p:cNvPr id="45" name="TextBox 44"/>
+          <p:cNvSpPr txBox="1"/>
+          <p:nvPr/>
+        </p:nvSpPr>
+        <p:spPr>
+          <a:xfrm>
+            <a:off x="10533888" y="5614416"/>
+            <a:ext cx="1554480" cy="438912"/>
+          </a:xfrm>
+          <a:prstGeom prst="rect">
+            <a:avLst/>
+          </a:prstGeom>
+          <a:noFill/>
+        </p:spPr>
+        <p:txBody>
+          <a:bodyPr wrap="square">
+            <a:spAutoFit/>
+          </a:bodyPr>
+          <a:lstStyle/>
+          <a:p>
+            <a:pPr algn="l"/>
+            <a:r>
+              <a:rPr sz="1200" b="0">
+                <a:solidFill>
+                  <a:srgbClr val="212121"/>
+                </a:solidFill>
+              </a:rPr>
+              <a:t>services/</a:t>
+            </a:r>
+          </a:p>
+        </p:txBody>
+      </p:sp>
+    </p:spTree>
+  </p:cSld>
+  <p:clrMapOvr>
+    <a:masterClrMapping/>
+  </p:clrMapOvr>
+</p:sld>
+</file>
+
+<file path=ppt/slides/slide15.xml><?xml version="1.0" encoding="utf-8"?>
+<p:sld xmlns:a="http://schemas.openxmlformats.org/drawingml/2006/main" xmlns:p="http://schemas.openxmlformats.org/presentationml/2006/main" xmlns:r="http://schemas.openxmlformats.org/officeDocument/2006/relationships">
+  <p:cSld>
+    <p:spTree>
+      <p:nvGrpSpPr>
+        <p:cNvPr id="1" name=""/>
+        <p:cNvGrpSpPr/>
+        <p:nvPr/>
+      </p:nvGrpSpPr>
+      <p:grpSpPr/>
+      <p:sp>
+        <p:nvSpPr>
+          <p:cNvPr id="2" name="Rectangle 1"/>
+          <p:cNvSpPr/>
+          <p:nvPr/>
+        </p:nvSpPr>
+        <p:spPr>
+          <a:xfrm>
+            <a:off x="0" y="0"/>
+            <a:ext cx="12188952" cy="914400"/>
+          </a:xfrm>
+          <a:prstGeom prst="rect">
+            <a:avLst/>
+          </a:prstGeom>
+          <a:noFill/>
+          <a:ln>
+            <a:noFill/>
+          </a:ln>
+        </p:spPr>
+        <p:style>
+          <a:lnRef idx="1">
+            <a:schemeClr val="accent1"/>
+          </a:lnRef>
+          <a:fillRef idx="3">
+            <a:schemeClr val="accent1"/>
+          </a:fillRef>
+          <a:effectRef idx="2">
+            <a:schemeClr val="accent1"/>
+          </a:effectRef>
+          <a:fontRef idx="minor">
+            <a:schemeClr val="lt1"/>
+          </a:fontRef>
+        </p:style>
+        <p:txBody>
+          <a:bodyPr rtlCol="0" anchor="ctr"/>
+          <a:lstStyle/>
+          <a:p>
+            <a:pPr algn="ctr"/>
+          </a:p>
+        </p:txBody>
+      </p:sp>
+      <p:sp>
+        <p:nvSpPr>
+          <p:cNvPr id="3" name="TextBox 2"/>
+          <p:cNvSpPr txBox="1"/>
+          <p:nvPr/>
+        </p:nvSpPr>
+        <p:spPr>
+          <a:xfrm>
+            <a:off x="457200" y="73152"/>
+            <a:ext cx="10972800" cy="566928"/>
+          </a:xfrm>
+          <a:prstGeom prst="rect">
+            <a:avLst/>
+          </a:prstGeom>
+          <a:noFill/>
+        </p:spPr>
+        <p:txBody>
+          <a:bodyPr wrap="square">
+            <a:spAutoFit/>
+          </a:bodyPr>
+          <a:lstStyle/>
+          <a:p>
+            <a:pPr algn="l"/>
+            <a:r>
+              <a:rPr sz="2400" b="1">
+                <a:solidFill>
+                  <a:srgbClr val="3F51B5"/>
+                </a:solidFill>
+              </a:rPr>
+              <a:t>ADR-0003  —  백엔드 서비스 선택</a:t>
+            </a:r>
+          </a:p>
+        </p:txBody>
+      </p:sp>
+      <p:sp>
+        <p:nvSpPr>
+          <p:cNvPr id="4" name="Rectangle 3"/>
+          <p:cNvSpPr/>
+          <p:nvPr/>
+        </p:nvSpPr>
+        <p:spPr>
+          <a:xfrm>
+            <a:off x="0" y="868680"/>
+            <a:ext cx="12188952" cy="45720"/>
+          </a:xfrm>
+          <a:prstGeom prst="rect">
+            <a:avLst/>
+          </a:prstGeom>
+          <a:solidFill>
+            <a:srgbClr val="3F51B5"/>
+          </a:solidFill>
+          <a:ln>
+            <a:noFill/>
+          </a:ln>
+        </p:spPr>
+        <p:style>
+          <a:lnRef idx="1">
+            <a:schemeClr val="accent1"/>
+          </a:lnRef>
+          <a:fillRef idx="3">
+            <a:schemeClr val="accent1"/>
+          </a:fillRef>
+          <a:effectRef idx="2">
+            <a:schemeClr val="accent1"/>
+          </a:effectRef>
+          <a:fontRef idx="minor">
+            <a:schemeClr val="lt1"/>
+          </a:fontRef>
+        </p:style>
+        <p:txBody>
+          <a:bodyPr rtlCol="0" anchor="ctr"/>
+          <a:lstStyle/>
+          <a:p>
+            <a:pPr algn="ctr"/>
+          </a:p>
+        </p:txBody>
+      </p:sp>
+      <p:sp>
+        <p:nvSpPr>
+          <p:cNvPr id="5" name="TextBox 4"/>
+          <p:cNvSpPr txBox="1"/>
+          <p:nvPr/>
+        </p:nvSpPr>
+        <p:spPr>
+          <a:xfrm>
+            <a:off x="11247120" y="6492240"/>
+            <a:ext cx="822960" cy="274320"/>
+          </a:xfrm>
+          <a:prstGeom prst="rect">
+            <a:avLst/>
+          </a:prstGeom>
+          <a:noFill/>
+        </p:spPr>
+        <p:txBody>
+          <a:bodyPr wrap="square">
+            <a:spAutoFit/>
+          </a:bodyPr>
+          <a:lstStyle/>
+          <a:p>
+            <a:pPr algn="ctr"/>
+            <a:r>
+              <a:rPr sz="1000" b="0">
+                <a:solidFill>
+                  <a:srgbClr val="9E9E9E"/>
+                </a:solidFill>
+              </a:rPr>
+              <a:t>15 / 16</a:t>
+            </a:r>
+          </a:p>
+        </p:txBody>
+      </p:sp>
+      <p:sp>
+        <p:nvSpPr>
+          <p:cNvPr id="6" name="TextBox 5"/>
+          <p:cNvSpPr txBox="1"/>
+          <p:nvPr/>
+        </p:nvSpPr>
+        <p:spPr>
+          <a:xfrm>
+            <a:off x="457200" y="987552"/>
+            <a:ext cx="10972800" cy="347472"/>
+          </a:xfrm>
+          <a:prstGeom prst="rect">
+            <a:avLst/>
+          </a:prstGeom>
+          <a:noFill/>
+        </p:spPr>
+        <p:txBody>
+          <a:bodyPr wrap="square">
+            <a:spAutoFit/>
+          </a:bodyPr>
+          <a:lstStyle/>
+          <a:p>
+            <a:pPr algn="l"/>
+            <a:r>
+              <a:rPr sz="1200" b="0">
+                <a:solidFill>
+                  <a:srgbClr val="9E9E9E"/>
+                </a:solidFill>
+              </a:rPr>
+              <a:t>선택지 비교</a:t>
+            </a:r>
+          </a:p>
+        </p:txBody>
+      </p:sp>
+      <p:sp>
+        <p:nvSpPr>
+          <p:cNvPr id="7" name="Rectangle 6"/>
+          <p:cNvSpPr/>
+          <p:nvPr/>
+        </p:nvSpPr>
+        <p:spPr>
+          <a:xfrm>
+            <a:off x="457200" y="1389888"/>
+            <a:ext cx="11247120" cy="1024128"/>
+          </a:xfrm>
+          <a:prstGeom prst="rect">
+            <a:avLst/>
+          </a:prstGeom>
+          <a:noFill/>
+          <a:ln w="10160">
+            <a:solidFill>
+              <a:srgbClr val="E0E0E0"/>
+            </a:solidFill>
+          </a:ln>
+        </p:spPr>
+        <p:style>
+          <a:lnRef idx="1">
+            <a:schemeClr val="accent1"/>
+          </a:lnRef>
+          <a:fillRef idx="3">
+            <a:schemeClr val="accent1"/>
+          </a:fillRef>
+          <a:effectRef idx="2">
+            <a:schemeClr val="accent1"/>
+          </a:effectRef>
+          <a:fontRef idx="minor">
+            <a:schemeClr val="lt1"/>
+          </a:fontRef>
+        </p:style>
+        <p:txBody>
+          <a:bodyPr rtlCol="0" anchor="ctr"/>
+          <a:lstStyle/>
+          <a:p>
+            <a:pPr algn="ctr"/>
+          </a:p>
+        </p:txBody>
+      </p:sp>
+      <p:sp>
+        <p:nvSpPr>
+          <p:cNvPr id="8" name="TextBox 7"/>
+          <p:cNvSpPr txBox="1"/>
+          <p:nvPr/>
+        </p:nvSpPr>
+        <p:spPr>
+          <a:xfrm>
+            <a:off x="594360" y="1499616"/>
+            <a:ext cx="11064240" cy="886968"/>
+          </a:xfrm>
+          <a:prstGeom prst="rect">
+            <a:avLst/>
+          </a:prstGeom>
+          <a:noFill/>
+        </p:spPr>
+        <p:txBody>
+          <a:bodyPr wrap="square">
+            <a:spAutoFit/>
+          </a:bodyPr>
+          <a:lstStyle/>
+          <a:p>
+            <a:pPr algn="l"/>
+            <a:r>
+              <a:rPr sz="1600" b="0">
+                <a:solidFill>
+                  <a:srgbClr val="9E9E9E"/>
+                </a:solidFill>
+              </a:rPr>
+              <a:t>Supabase</a:t>
+            </a:r>
+          </a:p>
+        </p:txBody>
+      </p:sp>
+      <p:sp>
+        <p:nvSpPr>
+          <p:cNvPr id="9" name="Rectangle 8"/>
+          <p:cNvSpPr/>
+          <p:nvPr/>
+        </p:nvSpPr>
+        <p:spPr>
+          <a:xfrm>
+            <a:off x="457200" y="2651760"/>
+            <a:ext cx="11247120" cy="1024128"/>
+          </a:xfrm>
+          <a:prstGeom prst="rect">
+            <a:avLst/>
+          </a:prstGeom>
+          <a:noFill/>
+          <a:ln w="10160">
+            <a:solidFill>
+              <a:srgbClr val="E0E0E0"/>
+            </a:solidFill>
+          </a:ln>
+        </p:spPr>
+        <p:style>
+          <a:lnRef idx="1">
+            <a:schemeClr val="accent1"/>
+          </a:lnRef>
+          <a:fillRef idx="3">
+            <a:schemeClr val="accent1"/>
+          </a:fillRef>
+          <a:effectRef idx="2">
+            <a:schemeClr val="accent1"/>
+          </a:effectRef>
+          <a:fontRef idx="minor">
+            <a:schemeClr val="lt1"/>
+          </a:fontRef>
+        </p:style>
+        <p:txBody>
+          <a:bodyPr rtlCol="0" anchor="ctr"/>
+          <a:lstStyle/>
+          <a:p>
+            <a:pPr algn="ctr"/>
+          </a:p>
+        </p:txBody>
+      </p:sp>
+      <p:sp>
+        <p:nvSpPr>
+          <p:cNvPr id="10" name="TextBox 9"/>
+          <p:cNvSpPr txBox="1"/>
+          <p:nvPr/>
+        </p:nvSpPr>
+        <p:spPr>
+          <a:xfrm>
+            <a:off x="594360" y="2761488"/>
+            <a:ext cx="11064240" cy="886968"/>
+          </a:xfrm>
+          <a:prstGeom prst="rect">
+            <a:avLst/>
+          </a:prstGeom>
+          <a:noFill/>
+        </p:spPr>
+        <p:txBody>
+          <a:bodyPr wrap="square">
+            <a:spAutoFit/>
+          </a:bodyPr>
+          <a:lstStyle/>
+          <a:p>
+            <a:pPr algn="l"/>
+            <a:r>
+              <a:rPr sz="1600" b="0">
+                <a:solidFill>
+                  <a:srgbClr val="9E9E9E"/>
+                </a:solidFill>
+              </a:rPr>
+              <a:t>폰 내부 저장 (SQLite 등)</a:t>
+            </a:r>
+          </a:p>
+        </p:txBody>
+      </p:sp>
+      <p:sp>
+        <p:nvSpPr>
+          <p:cNvPr id="11" name="Rectangle 10"/>
+          <p:cNvSpPr/>
+          <p:nvPr/>
+        </p:nvSpPr>
+        <p:spPr>
+          <a:xfrm>
+            <a:off x="457200" y="3913631"/>
+            <a:ext cx="11247120" cy="1024128"/>
+          </a:xfrm>
+          <a:prstGeom prst="rect">
+            <a:avLst/>
+          </a:prstGeom>
+          <a:noFill/>
+          <a:ln w="10160">
+            <a:solidFill>
+              <a:srgbClr val="E0E0E0"/>
+            </a:solidFill>
+          </a:ln>
+        </p:spPr>
+        <p:style>
+          <a:lnRef idx="1">
+            <a:schemeClr val="accent1"/>
+          </a:lnRef>
+          <a:fillRef idx="3">
+            <a:schemeClr val="accent1"/>
+          </a:fillRef>
+          <a:effectRef idx="2">
+            <a:schemeClr val="accent1"/>
+          </a:effectRef>
+          <a:fontRef idx="minor">
+            <a:schemeClr val="lt1"/>
+          </a:fontRef>
+        </p:style>
+        <p:txBody>
+          <a:bodyPr rtlCol="0" anchor="ctr"/>
+          <a:lstStyle/>
+          <a:p>
+            <a:pPr algn="ctr"/>
+          </a:p>
+        </p:txBody>
+      </p:sp>
+      <p:sp>
+        <p:nvSpPr>
+          <p:cNvPr id="12" name="TextBox 11"/>
+          <p:cNvSpPr txBox="1"/>
+          <p:nvPr/>
+        </p:nvSpPr>
+        <p:spPr>
+          <a:xfrm>
+            <a:off x="594360" y="4023359"/>
+            <a:ext cx="11064240" cy="886968"/>
+          </a:xfrm>
+          <a:prstGeom prst="rect">
+            <a:avLst/>
+          </a:prstGeom>
+          <a:noFill/>
+        </p:spPr>
+        <p:txBody>
+          <a:bodyPr wrap="square">
+            <a:spAutoFit/>
+          </a:bodyPr>
+          <a:lstStyle/>
+          <a:p>
+            <a:pPr algn="l"/>
+            <a:r>
+              <a:rPr sz="1600" b="0">
+                <a:solidFill>
+                  <a:srgbClr val="9E9E9E"/>
+                </a:solidFill>
+              </a:rPr>
+              <a:t>직접 서버 구축</a:t>
+            </a:r>
+          </a:p>
+        </p:txBody>
+      </p:sp>
+      <p:sp>
+        <p:nvSpPr>
+          <p:cNvPr id="13" name="Rectangle 12"/>
+          <p:cNvSpPr/>
+          <p:nvPr/>
+        </p:nvSpPr>
+        <p:spPr>
+          <a:xfrm>
+            <a:off x="457200" y="5175504"/>
+            <a:ext cx="11247120" cy="1024128"/>
+          </a:xfrm>
+          <a:prstGeom prst="rect">
+            <a:avLst/>
+          </a:prstGeom>
+          <a:solidFill>
+            <a:srgbClr val="3F51B5"/>
+          </a:solidFill>
+          <a:ln>
+            <a:noFill/>
+          </a:ln>
+        </p:spPr>
+        <p:style>
+          <a:lnRef idx="1">
+            <a:schemeClr val="accent1"/>
+          </a:lnRef>
+          <a:fillRef idx="3">
+            <a:schemeClr val="accent1"/>
+          </a:fillRef>
+          <a:effectRef idx="2">
+            <a:schemeClr val="accent1"/>
+          </a:effectRef>
+          <a:fontRef idx="minor">
+            <a:schemeClr val="lt1"/>
+          </a:fontRef>
+        </p:style>
+        <p:txBody>
+          <a:bodyPr rtlCol="0" anchor="ctr"/>
+          <a:lstStyle/>
+          <a:p>
+            <a:pPr algn="ctr"/>
+          </a:p>
+        </p:txBody>
+      </p:sp>
+      <p:sp>
+        <p:nvSpPr>
+          <p:cNvPr id="14" name="TextBox 13"/>
+          <p:cNvSpPr txBox="1"/>
+          <p:nvPr/>
+        </p:nvSpPr>
+        <p:spPr>
+          <a:xfrm>
+            <a:off x="594360" y="5285232"/>
+            <a:ext cx="11064240" cy="886968"/>
+          </a:xfrm>
+          <a:prstGeom prst="rect">
+            <a:avLst/>
+          </a:prstGeom>
+          <a:noFill/>
+        </p:spPr>
+        <p:txBody>
+          <a:bodyPr wrap="square">
+            <a:spAutoFit/>
+          </a:bodyPr>
+          <a:lstStyle/>
+          <a:p>
+            <a:pPr algn="l"/>
+            <a:r>
+              <a:rPr sz="1600" b="1">
+                <a:solidFill>
+                  <a:srgbClr val="FFFFFF"/>
+                </a:solidFill>
+              </a:rPr>
+              <a:t>✓  Firebase (Auth + Firestore)</a:t>
+            </a:r>
+          </a:p>
+        </p:txBody>
+      </p:sp>
+    </p:spTree>
+  </p:cSld>
+  <p:clrMapOvr>
+    <a:masterClrMapping/>
+  </p:clrMapOvr>
+</p:sld>
+</file>
+
+<file path=ppt/slides/slide16.xml><?xml version="1.0" encoding="utf-8"?>
+<p:sld xmlns:a="http://schemas.openxmlformats.org/drawingml/2006/main" xmlns:p="http://schemas.openxmlformats.org/presentationml/2006/main" xmlns:r="http://schemas.openxmlformats.org/officeDocument/2006/relationships">
+  <p:cSld>
+    <p:spTree>
+      <p:nvGrpSpPr>
+        <p:cNvPr id="1" name=""/>
+        <p:cNvGrpSpPr/>
+        <p:nvPr/>
+      </p:nvGrpSpPr>
+      <p:grpSpPr/>
+      <p:sp>
+        <p:nvSpPr>
+          <p:cNvPr id="2" name="Rectangle 1"/>
+          <p:cNvSpPr/>
+          <p:nvPr/>
+        </p:nvSpPr>
+        <p:spPr>
+          <a:xfrm>
+            <a:off x="0" y="0"/>
             <a:ext cx="12188952" cy="6858000"/>
           </a:xfrm>
           <a:prstGeom prst="rect">
@@ -7378,7 +8637,7 @@
                   <a:srgbClr val="9E9E9E"/>
                 </a:solidFill>
               </a:rPr>
-              <a:t>14 / 14</a:t>
+              <a:t>16 / 16</a:t>
             </a:r>
           </a:p>
         </p:txBody>
@@ -7582,7 +8841,7 @@
                   <a:srgbClr val="9E9E9E"/>
                 </a:solidFill>
               </a:rPr>
-              <a:t>2 / 14</a:t>
+              <a:t>2 / 16</a:t>
             </a:r>
           </a:p>
         </p:txBody>
@@ -8370,7 +9629,7 @@
                   <a:srgbClr val="9E9E9E"/>
                 </a:solidFill>
               </a:rPr>
-              <a:t>3 / 14</a:t>
+              <a:t>3 / 16</a:t>
             </a:r>
           </a:p>
         </p:txBody>
@@ -9828,7 +11087,7 @@
                   <a:srgbClr val="9E9E9E"/>
                 </a:solidFill>
               </a:rPr>
-              <a:t>4 / 14</a:t>
+              <a:t>4 / 16</a:t>
             </a:r>
           </a:p>
         </p:txBody>
@@ -11010,7 +12269,7 @@
                   <a:srgbClr val="9E9E9E"/>
                 </a:solidFill>
               </a:rPr>
-              <a:t>5 / 14</a:t>
+              <a:t>5 / 16</a:t>
             </a:r>
           </a:p>
         </p:txBody>
@@ -12520,7 +13779,7 @@
                   <a:srgbClr val="9E9E9E"/>
                 </a:solidFill>
               </a:rPr>
-              <a:t>6 / 14</a:t>
+              <a:t>6 / 16</a:t>
             </a:r>
           </a:p>
         </p:txBody>
@@ -14119,7 +15378,7 @@
                   <a:srgbClr val="9E9E9E"/>
                 </a:solidFill>
               </a:rPr>
-              <a:t>7 / 14</a:t>
+              <a:t>7 / 16</a:t>
             </a:r>
           </a:p>
         </p:txBody>
@@ -14830,7 +16089,7 @@
                   <a:srgbClr val="9E9E9E"/>
                 </a:solidFill>
               </a:rPr>
-              <a:t>8 / 14</a:t>
+              <a:t>8 / 16</a:t>
             </a:r>
           </a:p>
         </p:txBody>
@@ -15422,7 +16681,7 @@
                   <a:srgbClr val="9E9E9E"/>
                 </a:solidFill>
               </a:rPr>
-              <a:t>주성현</a:t>
+              <a:t>주성현  (1/2)</a:t>
             </a:r>
           </a:p>
         </p:txBody>
@@ -15499,7 +16758,7 @@
                   <a:srgbClr val="9E9E9E"/>
                 </a:solidFill>
               </a:rPr>
-              <a:t>9 / 14</a:t>
+              <a:t>9 / 16</a:t>
             </a:r>
           </a:p>
         </p:txBody>
@@ -15512,8 +16771,8 @@
         </p:nvSpPr>
         <p:spPr>
           <a:xfrm>
-            <a:off x="457200" y="987552"/>
-            <a:ext cx="11247120" cy="1024128"/>
+            <a:off x="457200" y="914400"/>
+            <a:ext cx="11247120" cy="1691640"/>
           </a:xfrm>
           <a:prstGeom prst="rect">
             <a:avLst/>
@@ -15555,8 +16814,8 @@
         </p:nvSpPr>
         <p:spPr>
           <a:xfrm>
-            <a:off x="457200" y="987552"/>
-            <a:ext cx="11247120" cy="365760"/>
+            <a:off x="457200" y="914400"/>
+            <a:ext cx="11247120" cy="402336"/>
           </a:xfrm>
           <a:prstGeom prst="rect">
             <a:avLst/>
@@ -15592,14 +16851,91 @@
       </p:sp>
       <p:sp>
         <p:nvSpPr>
-          <p:cNvPr id="9" name="TextBox 8"/>
-          <p:cNvSpPr txBox="1"/>
-          <p:nvPr/>
-        </p:nvSpPr>
-        <p:spPr>
-          <a:xfrm>
-            <a:off x="658368" y="1033272"/>
-            <a:ext cx="10972800" cy="292608"/>
+          <p:cNvPr id="9" name="Rectangle 8"/>
+          <p:cNvSpPr/>
+          <p:nvPr/>
+        </p:nvSpPr>
+        <p:spPr>
+          <a:xfrm>
+            <a:off x="457200" y="914400"/>
+            <a:ext cx="1463040" cy="402336"/>
+          </a:xfrm>
+          <a:prstGeom prst="rect">
+            <a:avLst/>
+          </a:prstGeom>
+          <a:solidFill>
+            <a:srgbClr val="E65C00"/>
+          </a:solidFill>
+          <a:ln>
+            <a:noFill/>
+          </a:ln>
+        </p:spPr>
+        <p:style>
+          <a:lnRef idx="1">
+            <a:schemeClr val="accent1"/>
+          </a:lnRef>
+          <a:fillRef idx="3">
+            <a:schemeClr val="accent1"/>
+          </a:fillRef>
+          <a:effectRef idx="2">
+            <a:schemeClr val="accent1"/>
+          </a:effectRef>
+          <a:fontRef idx="minor">
+            <a:schemeClr val="lt1"/>
+          </a:fontRef>
+        </p:style>
+        <p:txBody>
+          <a:bodyPr rtlCol="0" anchor="ctr"/>
+          <a:lstStyle/>
+          <a:p>
+            <a:pPr algn="ctr"/>
+          </a:p>
+        </p:txBody>
+      </p:sp>
+      <p:sp>
+        <p:nvSpPr>
+          <p:cNvPr id="10" name="TextBox 9"/>
+          <p:cNvSpPr txBox="1"/>
+          <p:nvPr/>
+        </p:nvSpPr>
+        <p:spPr>
+          <a:xfrm>
+            <a:off x="457200" y="914400"/>
+            <a:ext cx="1463040" cy="402336"/>
+          </a:xfrm>
+          <a:prstGeom prst="rect">
+            <a:avLst/>
+          </a:prstGeom>
+          <a:noFill/>
+        </p:spPr>
+        <p:txBody>
+          <a:bodyPr wrap="square">
+            <a:spAutoFit/>
+          </a:bodyPr>
+          <a:lstStyle/>
+          <a:p>
+            <a:pPr algn="ctr"/>
+            <a:r>
+              <a:rPr sz="1100" b="1">
+                <a:solidFill>
+                  <a:srgbClr val="FFFFFF"/>
+                </a:solidFill>
+              </a:rPr>
+              <a:t>A  +1</a:t>
+            </a:r>
+          </a:p>
+        </p:txBody>
+      </p:sp>
+      <p:sp>
+        <p:nvSpPr>
+          <p:cNvPr id="11" name="TextBox 10"/>
+          <p:cNvSpPr txBox="1"/>
+          <p:nvPr/>
+        </p:nvSpPr>
+        <p:spPr>
+          <a:xfrm>
+            <a:off x="2057400" y="978408"/>
+            <a:ext cx="9509760" cy="274320"/>
           </a:xfrm>
           <a:prstGeom prst="rect">
             <a:avLst/>
@@ -15626,14 +16962,14 @@
       </p:sp>
       <p:sp>
         <p:nvSpPr>
-          <p:cNvPr id="10" name="TextBox 9"/>
-          <p:cNvSpPr txBox="1"/>
-          <p:nvPr/>
-        </p:nvSpPr>
-        <p:spPr>
-          <a:xfrm>
-            <a:off x="658368" y="1426464"/>
-            <a:ext cx="10972800" cy="530352"/>
+          <p:cNvPr id="12" name="TextBox 11"/>
+          <p:cNvSpPr txBox="1"/>
+          <p:nvPr/>
+        </p:nvSpPr>
+        <p:spPr>
+          <a:xfrm>
+            <a:off x="658368" y="1389888"/>
+            <a:ext cx="10789920" cy="1161288"/>
           </a:xfrm>
           <a:prstGeom prst="rect">
             <a:avLst/>
@@ -15648,7 +16984,7 @@
           <a:p>
             <a:pPr algn="l"/>
             <a:r>
-              <a:rPr sz="1000" b="0">
+              <a:rPr sz="1050" b="0">
                 <a:solidFill>
                   <a:srgbClr val="212121"/>
                 </a:solidFill>
@@ -15661,14 +16997,14 @@
       </p:sp>
       <p:sp>
         <p:nvSpPr>
-          <p:cNvPr id="11" name="Rectangle 10"/>
+          <p:cNvPr id="13" name="Rectangle 12"/>
           <p:cNvSpPr/>
           <p:nvPr/>
         </p:nvSpPr>
         <p:spPr>
           <a:xfrm>
-            <a:off x="457200" y="2112264"/>
-            <a:ext cx="11247120" cy="1024128"/>
+            <a:off x="457200" y="2743200"/>
+            <a:ext cx="11247120" cy="1691640"/>
           </a:xfrm>
           <a:prstGeom prst="rect">
             <a:avLst/>
@@ -15704,14 +17040,14 @@
       </p:sp>
       <p:sp>
         <p:nvSpPr>
-          <p:cNvPr id="12" name="Rectangle 11"/>
+          <p:cNvPr id="14" name="Rectangle 13"/>
           <p:cNvSpPr/>
           <p:nvPr/>
         </p:nvSpPr>
         <p:spPr>
           <a:xfrm>
-            <a:off x="457200" y="2112264"/>
-            <a:ext cx="11247120" cy="365760"/>
+            <a:off x="457200" y="2743200"/>
+            <a:ext cx="11247120" cy="402336"/>
           </a:xfrm>
           <a:prstGeom prst="rect">
             <a:avLst/>
@@ -15747,14 +17083,91 @@
       </p:sp>
       <p:sp>
         <p:nvSpPr>
-          <p:cNvPr id="13" name="TextBox 12"/>
-          <p:cNvSpPr txBox="1"/>
-          <p:nvPr/>
-        </p:nvSpPr>
-        <p:spPr>
-          <a:xfrm>
-            <a:off x="658368" y="2157984"/>
-            <a:ext cx="10972800" cy="292608"/>
+          <p:cNvPr id="15" name="Rectangle 14"/>
+          <p:cNvSpPr/>
+          <p:nvPr/>
+        </p:nvSpPr>
+        <p:spPr>
+          <a:xfrm>
+            <a:off x="457200" y="2743200"/>
+            <a:ext cx="1463040" cy="402336"/>
+          </a:xfrm>
+          <a:prstGeom prst="rect">
+            <a:avLst/>
+          </a:prstGeom>
+          <a:solidFill>
+            <a:srgbClr val="3F51B5"/>
+          </a:solidFill>
+          <a:ln>
+            <a:noFill/>
+          </a:ln>
+        </p:spPr>
+        <p:style>
+          <a:lnRef idx="1">
+            <a:schemeClr val="accent1"/>
+          </a:lnRef>
+          <a:fillRef idx="3">
+            <a:schemeClr val="accent1"/>
+          </a:fillRef>
+          <a:effectRef idx="2">
+            <a:schemeClr val="accent1"/>
+          </a:effectRef>
+          <a:fontRef idx="minor">
+            <a:schemeClr val="lt1"/>
+          </a:fontRef>
+        </p:style>
+        <p:txBody>
+          <a:bodyPr rtlCol="0" anchor="ctr"/>
+          <a:lstStyle/>
+          <a:p>
+            <a:pPr algn="ctr"/>
+          </a:p>
+        </p:txBody>
+      </p:sp>
+      <p:sp>
+        <p:nvSpPr>
+          <p:cNvPr id="16" name="TextBox 15"/>
+          <p:cNvSpPr txBox="1"/>
+          <p:nvPr/>
+        </p:nvSpPr>
+        <p:spPr>
+          <a:xfrm>
+            <a:off x="457200" y="2743200"/>
+            <a:ext cx="1463040" cy="402336"/>
+          </a:xfrm>
+          <a:prstGeom prst="rect">
+            <a:avLst/>
+          </a:prstGeom>
+          <a:noFill/>
+        </p:spPr>
+        <p:txBody>
+          <a:bodyPr wrap="square">
+            <a:spAutoFit/>
+          </a:bodyPr>
+          <a:lstStyle/>
+          <a:p>
+            <a:pPr algn="ctr"/>
+            <a:r>
+              <a:rPr sz="1100" b="1">
+                <a:solidFill>
+                  <a:srgbClr val="FFFFFF"/>
+                </a:solidFill>
+              </a:rPr>
+              <a:t>B  +2</a:t>
+            </a:r>
+          </a:p>
+        </p:txBody>
+      </p:sp>
+      <p:sp>
+        <p:nvSpPr>
+          <p:cNvPr id="17" name="TextBox 16"/>
+          <p:cNvSpPr txBox="1"/>
+          <p:nvPr/>
+        </p:nvSpPr>
+        <p:spPr>
+          <a:xfrm>
+            <a:off x="2057400" y="2807208"/>
+            <a:ext cx="9509760" cy="274320"/>
           </a:xfrm>
           <a:prstGeom prst="rect">
             <a:avLst/>
@@ -15781,14 +17194,14 @@
       </p:sp>
       <p:sp>
         <p:nvSpPr>
-          <p:cNvPr id="14" name="TextBox 13"/>
-          <p:cNvSpPr txBox="1"/>
-          <p:nvPr/>
-        </p:nvSpPr>
-        <p:spPr>
-          <a:xfrm>
-            <a:off x="658368" y="2551176"/>
-            <a:ext cx="10972800" cy="530352"/>
+          <p:cNvPr id="18" name="TextBox 17"/>
+          <p:cNvSpPr txBox="1"/>
+          <p:nvPr/>
+        </p:nvSpPr>
+        <p:spPr>
+          <a:xfrm>
+            <a:off x="658368" y="3218688"/>
+            <a:ext cx="10789920" cy="1161288"/>
           </a:xfrm>
           <a:prstGeom prst="rect">
             <a:avLst/>
@@ -15803,7 +17216,7 @@
           <a:p>
             <a:pPr algn="l"/>
             <a:r>
-              <a:rPr sz="1000" b="0">
+              <a:rPr sz="1050" b="0">
                 <a:solidFill>
                   <a:srgbClr val="212121"/>
                 </a:solidFill>
@@ -15816,14 +17229,14 @@
       </p:sp>
       <p:sp>
         <p:nvSpPr>
-          <p:cNvPr id="15" name="Rectangle 14"/>
+          <p:cNvPr id="19" name="Rectangle 18"/>
           <p:cNvSpPr/>
           <p:nvPr/>
         </p:nvSpPr>
         <p:spPr>
           <a:xfrm>
-            <a:off x="457200" y="3236976"/>
-            <a:ext cx="11247120" cy="1024128"/>
+            <a:off x="457200" y="4572000"/>
+            <a:ext cx="11247120" cy="1691640"/>
           </a:xfrm>
           <a:prstGeom prst="rect">
             <a:avLst/>
@@ -15859,14 +17272,14 @@
       </p:sp>
       <p:sp>
         <p:nvSpPr>
-          <p:cNvPr id="16" name="Rectangle 15"/>
+          <p:cNvPr id="20" name="Rectangle 19"/>
           <p:cNvSpPr/>
           <p:nvPr/>
         </p:nvSpPr>
         <p:spPr>
           <a:xfrm>
-            <a:off x="457200" y="3236976"/>
-            <a:ext cx="11247120" cy="365760"/>
+            <a:off x="457200" y="4572000"/>
+            <a:ext cx="11247120" cy="402336"/>
           </a:xfrm>
           <a:prstGeom prst="rect">
             <a:avLst/>
@@ -15902,92 +17315,23 @@
       </p:sp>
       <p:sp>
         <p:nvSpPr>
-          <p:cNvPr id="17" name="TextBox 16"/>
-          <p:cNvSpPr txBox="1"/>
-          <p:nvPr/>
-        </p:nvSpPr>
-        <p:spPr>
-          <a:xfrm>
-            <a:off x="658368" y="3282696"/>
-            <a:ext cx="10972800" cy="292608"/>
-          </a:xfrm>
-          <a:prstGeom prst="rect">
-            <a:avLst/>
-          </a:prstGeom>
-          <a:noFill/>
-        </p:spPr>
-        <p:txBody>
-          <a:bodyPr wrap="square">
-            <a:spAutoFit/>
-          </a:bodyPr>
-          <a:lstStyle/>
-          <a:p>
-            <a:pPr algn="l"/>
-            <a:r>
-              <a:rPr sz="1200" b="1">
-                <a:solidFill>
-                  <a:srgbClr val="3F51B5"/>
-                </a:solidFill>
-              </a:rPr>
-              <a:t>기법 3  —  단계별 개발 계획 · 진행</a:t>
-            </a:r>
-          </a:p>
-        </p:txBody>
-      </p:sp>
-      <p:sp>
-        <p:nvSpPr>
-          <p:cNvPr id="18" name="TextBox 17"/>
-          <p:cNvSpPr txBox="1"/>
-          <p:nvPr/>
-        </p:nvSpPr>
-        <p:spPr>
-          <a:xfrm>
-            <a:off x="658368" y="3675887"/>
-            <a:ext cx="10972800" cy="530352"/>
-          </a:xfrm>
-          <a:prstGeom prst="rect">
-            <a:avLst/>
-          </a:prstGeom>
-          <a:noFill/>
-        </p:spPr>
-        <p:txBody>
-          <a:bodyPr wrap="square">
-            <a:spAutoFit/>
-          </a:bodyPr>
-          <a:lstStyle/>
-          <a:p>
-            <a:pPr algn="l"/>
-            <a:r>
-              <a:rPr sz="1000" b="0">
-                <a:solidFill>
-                  <a:srgbClr val="212121"/>
-                </a:solidFill>
-              </a:rPr>
-              <a:t>개발 전 단계별 계획 수립 → AI 구현 → 직접 점검 · 이해 → 다음 단계 진행
-AI 의존 개발에서 코드 이해도를 유지하기 위한 개인 워크플로우</a:t>
-            </a:r>
-          </a:p>
-        </p:txBody>
-      </p:sp>
-      <p:sp>
-        <p:nvSpPr>
-          <p:cNvPr id="19" name="Rectangle 18"/>
+          <p:cNvPr id="21" name="Rectangle 20"/>
           <p:cNvSpPr/>
           <p:nvPr/>
         </p:nvSpPr>
         <p:spPr>
           <a:xfrm>
-            <a:off x="457200" y="4361688"/>
-            <a:ext cx="11247120" cy="1024128"/>
-          </a:xfrm>
-          <a:prstGeom prst="rect">
-            <a:avLst/>
-          </a:prstGeom>
-          <a:noFill/>
-          <a:ln w="10160">
-            <a:solidFill>
-              <a:srgbClr val="E0E0E0"/>
-            </a:solidFill>
+            <a:off x="457200" y="4572000"/>
+            <a:ext cx="1463040" cy="402336"/>
+          </a:xfrm>
+          <a:prstGeom prst="rect">
+            <a:avLst/>
+          </a:prstGeom>
+          <a:solidFill>
+            <a:srgbClr val="3F51B5"/>
+          </a:solidFill>
+          <a:ln>
+            <a:noFill/>
           </a:ln>
         </p:spPr>
         <p:style>
@@ -16014,57 +17358,48 @@
       </p:sp>
       <p:sp>
         <p:nvSpPr>
-          <p:cNvPr id="20" name="Rectangle 19"/>
-          <p:cNvSpPr/>
-          <p:nvPr/>
-        </p:nvSpPr>
-        <p:spPr>
-          <a:xfrm>
-            <a:off x="457200" y="4361688"/>
-            <a:ext cx="11247120" cy="365760"/>
-          </a:xfrm>
-          <a:prstGeom prst="rect">
-            <a:avLst/>
-          </a:prstGeom>
-          <a:solidFill>
-            <a:srgbClr val="F5F5F5"/>
-          </a:solidFill>
-          <a:ln>
-            <a:noFill/>
-          </a:ln>
-        </p:spPr>
-        <p:style>
-          <a:lnRef idx="1">
-            <a:schemeClr val="accent1"/>
-          </a:lnRef>
-          <a:fillRef idx="3">
-            <a:schemeClr val="accent1"/>
-          </a:fillRef>
-          <a:effectRef idx="2">
-            <a:schemeClr val="accent1"/>
-          </a:effectRef>
-          <a:fontRef idx="minor">
-            <a:schemeClr val="lt1"/>
-          </a:fontRef>
-        </p:style>
-        <p:txBody>
-          <a:bodyPr rtlCol="0" anchor="ctr"/>
-          <a:lstStyle/>
-          <a:p>
-            <a:pPr algn="ctr"/>
-          </a:p>
-        </p:txBody>
-      </p:sp>
-      <p:sp>
-        <p:nvSpPr>
-          <p:cNvPr id="21" name="TextBox 20"/>
-          <p:cNvSpPr txBox="1"/>
-          <p:nvPr/>
-        </p:nvSpPr>
-        <p:spPr>
-          <a:xfrm>
-            <a:off x="658368" y="4407407"/>
-            <a:ext cx="10972800" cy="292608"/>
+          <p:cNvPr id="22" name="TextBox 21"/>
+          <p:cNvSpPr txBox="1"/>
+          <p:nvPr/>
+        </p:nvSpPr>
+        <p:spPr>
+          <a:xfrm>
+            <a:off x="457200" y="4572000"/>
+            <a:ext cx="1463040" cy="402336"/>
+          </a:xfrm>
+          <a:prstGeom prst="rect">
+            <a:avLst/>
+          </a:prstGeom>
+          <a:noFill/>
+        </p:spPr>
+        <p:txBody>
+          <a:bodyPr wrap="square">
+            <a:spAutoFit/>
+          </a:bodyPr>
+          <a:lstStyle/>
+          <a:p>
+            <a:pPr algn="ctr"/>
+            <a:r>
+              <a:rPr sz="1100" b="1">
+                <a:solidFill>
+                  <a:srgbClr val="FFFFFF"/>
+                </a:solidFill>
+              </a:rPr>
+              <a:t>B  +2</a:t>
+            </a:r>
+          </a:p>
+        </p:txBody>
+      </p:sp>
+      <p:sp>
+        <p:nvSpPr>
+          <p:cNvPr id="23" name="TextBox 22"/>
+          <p:cNvSpPr txBox="1"/>
+          <p:nvPr/>
+        </p:nvSpPr>
+        <p:spPr>
+          <a:xfrm>
+            <a:off x="2057400" y="4636008"/>
+            <a:ext cx="9509760" cy="274320"/>
           </a:xfrm>
           <a:prstGeom prst="rect">
             <a:avLst/>
@@ -16084,21 +17419,21 @@
                   <a:srgbClr val="3F51B5"/>
                 </a:solidFill>
               </a:rPr>
-              <a:t>LLM Wiki  —  암묵지 운영  (notes/llm-wiki.md · 11개 항목)</a:t>
-            </a:r>
-          </a:p>
-        </p:txBody>
-      </p:sp>
-      <p:sp>
-        <p:nvSpPr>
-          <p:cNvPr id="22" name="TextBox 21"/>
-          <p:cNvSpPr txBox="1"/>
-          <p:nvPr/>
-        </p:nvSpPr>
-        <p:spPr>
-          <a:xfrm>
-            <a:off x="658368" y="4800600"/>
-            <a:ext cx="10972800" cy="530352"/>
+              <a:t>기법 3  —  단계별 개발 계획 · 진행</a:t>
+            </a:r>
+          </a:p>
+        </p:txBody>
+      </p:sp>
+      <p:sp>
+        <p:nvSpPr>
+          <p:cNvPr id="24" name="TextBox 23"/>
+          <p:cNvSpPr txBox="1"/>
+          <p:nvPr/>
+        </p:nvSpPr>
+        <p:spPr>
+          <a:xfrm>
+            <a:off x="658368" y="5047488"/>
+            <a:ext cx="10789920" cy="1161288"/>
           </a:xfrm>
           <a:prstGeom prst="rect">
             <a:avLst/>
@@ -16113,168 +17448,13 @@
           <a:p>
             <a:pPr algn="l"/>
             <a:r>
-              <a:rPr sz="1000" b="0">
+              <a:rPr sz="1050" b="0">
                 <a:solidFill>
                   <a:srgbClr val="212121"/>
                 </a:solidFill>
               </a:rPr>
-              <a:t>개발 중 배운 AI 사용 인사이트 직접 기록
-Flutter 실행 환경 / 에이전트 호출법 / ADR 개념 / python-pptx 단위 변환 등</a:t>
-            </a:r>
-          </a:p>
-        </p:txBody>
-      </p:sp>
-      <p:sp>
-        <p:nvSpPr>
-          <p:cNvPr id="23" name="Rectangle 22"/>
-          <p:cNvSpPr/>
-          <p:nvPr/>
-        </p:nvSpPr>
-        <p:spPr>
-          <a:xfrm>
-            <a:off x="457200" y="5486400"/>
-            <a:ext cx="11247120" cy="1024128"/>
-          </a:xfrm>
-          <a:prstGeom prst="rect">
-            <a:avLst/>
-          </a:prstGeom>
-          <a:noFill/>
-          <a:ln w="10160">
-            <a:solidFill>
-              <a:srgbClr val="E0E0E0"/>
-            </a:solidFill>
-          </a:ln>
-        </p:spPr>
-        <p:style>
-          <a:lnRef idx="1">
-            <a:schemeClr val="accent1"/>
-          </a:lnRef>
-          <a:fillRef idx="3">
-            <a:schemeClr val="accent1"/>
-          </a:fillRef>
-          <a:effectRef idx="2">
-            <a:schemeClr val="accent1"/>
-          </a:effectRef>
-          <a:fontRef idx="minor">
-            <a:schemeClr val="lt1"/>
-          </a:fontRef>
-        </p:style>
-        <p:txBody>
-          <a:bodyPr rtlCol="0" anchor="ctr"/>
-          <a:lstStyle/>
-          <a:p>
-            <a:pPr algn="ctr"/>
-          </a:p>
-        </p:txBody>
-      </p:sp>
-      <p:sp>
-        <p:nvSpPr>
-          <p:cNvPr id="24" name="Rectangle 23"/>
-          <p:cNvSpPr/>
-          <p:nvPr/>
-        </p:nvSpPr>
-        <p:spPr>
-          <a:xfrm>
-            <a:off x="457200" y="5486400"/>
-            <a:ext cx="11247120" cy="365760"/>
-          </a:xfrm>
-          <a:prstGeom prst="rect">
-            <a:avLst/>
-          </a:prstGeom>
-          <a:solidFill>
-            <a:srgbClr val="F5F5F5"/>
-          </a:solidFill>
-          <a:ln>
-            <a:noFill/>
-          </a:ln>
-        </p:spPr>
-        <p:style>
-          <a:lnRef idx="1">
-            <a:schemeClr val="accent1"/>
-          </a:lnRef>
-          <a:fillRef idx="3">
-            <a:schemeClr val="accent1"/>
-          </a:fillRef>
-          <a:effectRef idx="2">
-            <a:schemeClr val="accent1"/>
-          </a:effectRef>
-          <a:fontRef idx="minor">
-            <a:schemeClr val="lt1"/>
-          </a:fontRef>
-        </p:style>
-        <p:txBody>
-          <a:bodyPr rtlCol="0" anchor="ctr"/>
-          <a:lstStyle/>
-          <a:p>
-            <a:pPr algn="ctr"/>
-          </a:p>
-        </p:txBody>
-      </p:sp>
-      <p:sp>
-        <p:nvSpPr>
-          <p:cNvPr id="25" name="TextBox 24"/>
-          <p:cNvSpPr txBox="1"/>
-          <p:nvPr/>
-        </p:nvSpPr>
-        <p:spPr>
-          <a:xfrm>
-            <a:off x="658368" y="5532120"/>
-            <a:ext cx="10972800" cy="292608"/>
-          </a:xfrm>
-          <a:prstGeom prst="rect">
-            <a:avLst/>
-          </a:prstGeom>
-          <a:noFill/>
-        </p:spPr>
-        <p:txBody>
-          <a:bodyPr wrap="square">
-            <a:spAutoFit/>
-          </a:bodyPr>
-          <a:lstStyle/>
-          <a:p>
-            <a:pPr algn="l"/>
-            <a:r>
-              <a:rPr sz="1200" b="1">
-                <a:solidFill>
-                  <a:srgbClr val="3F51B5"/>
-                </a:solidFill>
-              </a:rPr>
-              <a:t>AI Agent 리포트  —  이 발표에서 Claude Code 활용 사례 직접 발표</a:t>
-            </a:r>
-          </a:p>
-        </p:txBody>
-      </p:sp>
-      <p:sp>
-        <p:nvSpPr>
-          <p:cNvPr id="26" name="TextBox 25"/>
-          <p:cNvSpPr txBox="1"/>
-          <p:nvPr/>
-        </p:nvSpPr>
-        <p:spPr>
-          <a:xfrm>
-            <a:off x="658368" y="5925312"/>
-            <a:ext cx="10972800" cy="530352"/>
-          </a:xfrm>
-          <a:prstGeom prst="rect">
-            <a:avLst/>
-          </a:prstGeom>
-          <a:noFill/>
-        </p:spPr>
-        <p:txBody>
-          <a:bodyPr wrap="square">
-            <a:spAutoFit/>
-          </a:bodyPr>
-          <a:lstStyle/>
-          <a:p>
-            <a:pPr algn="l"/>
-            <a:r>
-              <a:rPr sz="1000" b="0">
-                <a:solidFill>
-                  <a:srgbClr val="212121"/>
-                </a:solidFill>
-              </a:rPr>
-              <a:t>Claude Code(Anthropic, 2024~)로 서브에이전트 제작 · 커스텀 명령어 운영 · 단계별 개발 수행
-최근 6개월 이내 지속 업데이트 도구 · 출처: claude.ai/code  (공식 문서)</a:t>
+              <a:t>개발 전 단계별 계획 수립 → AI 구현 → 직접 점검 · 이해 → 다음 단계 진행
+AI 의존 개발에서 코드 이해도를 유지하기 위한 개인 워크플로우</a:t>
             </a:r>
           </a:p>
         </p:txBody>

--- a/portfolio-tracker/presentation/portfolio-tracker-final.pptx
+++ b/portfolio-tracker/presentation/portfolio-tracker-final.pptx
@@ -5168,7 +5168,8 @@
                   <a:srgbClr val="FFFFFF"/>
                 </a:solidFill>
               </a:rPr>
-              <a:t>A  +1</a:t>
+              <a:t>AI 워크플로우
+활용  +1</a:t>
             </a:r>
           </a:p>
         </p:txBody>
@@ -5400,7 +5401,8 @@
                   <a:srgbClr val="FFFFFF"/>
                 </a:solidFill>
               </a:rPr>
-              <a:t>B  +2</a:t>
+              <a:t>본인 기법
+구성  +2</a:t>
             </a:r>
           </a:p>
         </p:txBody>
@@ -5632,7 +5634,8 @@
                   <a:srgbClr val="FFFFFF"/>
                 </a:solidFill>
               </a:rPr>
-              <a:t>B  +2</a:t>
+              <a:t>본인 기법
+구성  +2</a:t>
             </a:r>
           </a:p>
         </p:txBody>
@@ -6068,7 +6071,8 @@
                   <a:srgbClr val="FFFFFF"/>
                 </a:solidFill>
               </a:rPr>
-              <a:t>C  +1</a:t>
+              <a:t>LLM Wiki
+암묵지  +1</a:t>
             </a:r>
           </a:p>
         </p:txBody>
@@ -6300,7 +6304,8 @@
                   <a:srgbClr val="FFFFFF"/>
                 </a:solidFill>
               </a:rPr>
-              <a:t>D  +2</a:t>
+              <a:t>AI 리포트
+발표  +2</a:t>
             </a:r>
           </a:p>
         </p:txBody>
@@ -6736,7 +6741,8 @@
                   <a:srgbClr val="FFFFFF"/>
                 </a:solidFill>
               </a:rPr>
-              <a:t>A  +1</a:t>
+              <a:t>AI 워크플로우
+활용  +1</a:t>
             </a:r>
           </a:p>
         </p:txBody>
@@ -6968,7 +6974,8 @@
                   <a:srgbClr val="FFFFFF"/>
                 </a:solidFill>
               </a:rPr>
-              <a:t>B  +2</a:t>
+              <a:t>본인 기법
+구성  +2</a:t>
             </a:r>
           </a:p>
         </p:txBody>
@@ -7200,7 +7207,8 @@
                   <a:srgbClr val="FFFFFF"/>
                 </a:solidFill>
               </a:rPr>
-              <a:t>B  +2</a:t>
+              <a:t>본인 기법
+구성  +2</a:t>
             </a:r>
           </a:p>
         </p:txBody>
@@ -7636,7 +7644,8 @@
                   <a:srgbClr val="FFFFFF"/>
                 </a:solidFill>
               </a:rPr>
-              <a:t>C  +1</a:t>
+              <a:t>LLM Wiki
+암묵지  +1</a:t>
             </a:r>
           </a:p>
         </p:txBody>
@@ -7868,7 +7877,8 @@
                   <a:srgbClr val="FFFFFF"/>
                 </a:solidFill>
               </a:rPr>
-              <a:t>D  +2</a:t>
+              <a:t>AI 리포트
+발표  +2</a:t>
             </a:r>
           </a:p>
         </p:txBody>
@@ -16770,7 +16780,7 @@
                   <a:srgbClr val="3F51B5"/>
                 </a:solidFill>
               </a:rPr>
-              <a:t>6.  진행 상황  (WBS)</a:t>
+              <a:t>6.  데모</a:t>
             </a:r>
           </a:p>
         </p:txBody>
@@ -16804,7 +16814,7 @@
                   <a:srgbClr val="9E9E9E"/>
                 </a:solidFill>
               </a:rPr>
-              <a:t>Must 기능 기준 진척도</a:t>
+              <a:t>라이브 시연 — 핵심 화면 2가지</a:t>
             </a:r>
           </a:p>
         </p:txBody>
@@ -16894,8 +16904,8 @@
         </p:nvSpPr>
         <p:spPr>
           <a:xfrm>
-            <a:off x="457200" y="1051560"/>
-            <a:ext cx="11247120" cy="621792"/>
+            <a:off x="457200" y="1097280"/>
+            <a:ext cx="11247120" cy="1920240"/>
           </a:xfrm>
           <a:prstGeom prst="rect">
             <a:avLst/>
@@ -16937,14 +16947,14 @@
         </p:nvSpPr>
         <p:spPr>
           <a:xfrm>
-            <a:off x="457200" y="1051560"/>
-            <a:ext cx="54864" cy="621792"/>
+            <a:off x="457200" y="1097280"/>
+            <a:ext cx="54864" cy="1920240"/>
           </a:xfrm>
           <a:prstGeom prst="rect">
             <a:avLst/>
           </a:prstGeom>
           <a:solidFill>
-            <a:srgbClr val="2E7D32"/>
+            <a:srgbClr val="3F51B5"/>
           </a:solidFill>
           <a:ln>
             <a:noFill/>
@@ -16974,14 +16984,57 @@
       </p:sp>
       <p:sp>
         <p:nvSpPr>
-          <p:cNvPr id="9" name="TextBox 8"/>
-          <p:cNvSpPr txBox="1"/>
-          <p:nvPr/>
-        </p:nvSpPr>
-        <p:spPr>
-          <a:xfrm>
-            <a:off x="594360" y="1197863"/>
-            <a:ext cx="1188720" cy="347472"/>
+          <p:cNvPr id="9" name="Rectangle 8"/>
+          <p:cNvSpPr/>
+          <p:nvPr/>
+        </p:nvSpPr>
+        <p:spPr>
+          <a:xfrm>
+            <a:off x="457200" y="1097280"/>
+            <a:ext cx="11247120" cy="475488"/>
+          </a:xfrm>
+          <a:prstGeom prst="rect">
+            <a:avLst/>
+          </a:prstGeom>
+          <a:solidFill>
+            <a:srgbClr val="F5F5F5"/>
+          </a:solidFill>
+          <a:ln>
+            <a:noFill/>
+          </a:ln>
+        </p:spPr>
+        <p:style>
+          <a:lnRef idx="1">
+            <a:schemeClr val="accent1"/>
+          </a:lnRef>
+          <a:fillRef idx="3">
+            <a:schemeClr val="accent1"/>
+          </a:fillRef>
+          <a:effectRef idx="2">
+            <a:schemeClr val="accent1"/>
+          </a:effectRef>
+          <a:fontRef idx="minor">
+            <a:schemeClr val="lt1"/>
+          </a:fontRef>
+        </p:style>
+        <p:txBody>
+          <a:bodyPr rtlCol="0" anchor="ctr"/>
+          <a:lstStyle/>
+          <a:p>
+            <a:pPr algn="ctr"/>
+          </a:p>
+        </p:txBody>
+      </p:sp>
+      <p:sp>
+        <p:nvSpPr>
+          <p:cNvPr id="10" name="TextBox 9"/>
+          <p:cNvSpPr txBox="1"/>
+          <p:nvPr/>
+        </p:nvSpPr>
+        <p:spPr>
+          <a:xfrm>
+            <a:off x="658368" y="1188720"/>
+            <a:ext cx="1828800" cy="320040"/>
           </a:xfrm>
           <a:prstGeom prst="rect">
             <a:avLst/>
@@ -16996,26 +17049,26 @@
           <a:p>
             <a:pPr algn="l"/>
             <a:r>
-              <a:rPr sz="1100" b="0">
-                <a:solidFill>
-                  <a:srgbClr val="2E7D32"/>
-                </a:solidFill>
-              </a:rPr>
-              <a:t>✅ 완료</a:t>
-            </a:r>
-          </a:p>
-        </p:txBody>
-      </p:sp>
-      <p:sp>
-        <p:nvSpPr>
-          <p:cNvPr id="10" name="TextBox 9"/>
-          <p:cNvSpPr txBox="1"/>
-          <p:nvPr/>
-        </p:nvSpPr>
-        <p:spPr>
-          <a:xfrm>
-            <a:off x="1920240" y="1197863"/>
-            <a:ext cx="2103120" cy="347472"/>
+              <a:rPr sz="1100" b="1">
+                <a:solidFill>
+                  <a:srgbClr val="3F51B5"/>
+                </a:solidFill>
+              </a:rPr>
+              <a:t>시나리오 A</a:t>
+            </a:r>
+          </a:p>
+        </p:txBody>
+      </p:sp>
+      <p:sp>
+        <p:nvSpPr>
+          <p:cNvPr id="11" name="TextBox 10"/>
+          <p:cNvSpPr txBox="1"/>
+          <p:nvPr/>
+        </p:nvSpPr>
+        <p:spPr>
+          <a:xfrm>
+            <a:off x="2606040" y="1188720"/>
+            <a:ext cx="8961120" cy="320040"/>
           </a:xfrm>
           <a:prstGeom prst="rect">
             <a:avLst/>
@@ -17030,26 +17083,26 @@
           <a:p>
             <a:pPr algn="l"/>
             <a:r>
-              <a:rPr sz="1200" b="1">
+              <a:rPr sz="1400" b="1">
                 <a:solidFill>
                   <a:srgbClr val="212121"/>
                 </a:solidFill>
               </a:rPr>
-              <a:t>인증</a:t>
-            </a:r>
-          </a:p>
-        </p:txBody>
-      </p:sp>
-      <p:sp>
-        <p:nvSpPr>
-          <p:cNvPr id="11" name="TextBox 10"/>
-          <p:cNvSpPr txBox="1"/>
-          <p:nvPr/>
-        </p:nvSpPr>
-        <p:spPr>
-          <a:xfrm>
-            <a:off x="4114800" y="1197863"/>
-            <a:ext cx="7406640" cy="347472"/>
+              <a:t>계좌 관리 흐름</a:t>
+            </a:r>
+          </a:p>
+        </p:txBody>
+      </p:sp>
+      <p:sp>
+        <p:nvSpPr>
+          <p:cNvPr id="12" name="TextBox 11"/>
+          <p:cNvSpPr txBox="1"/>
+          <p:nvPr/>
+        </p:nvSpPr>
+        <p:spPr>
+          <a:xfrm>
+            <a:off x="658368" y="1737360"/>
+            <a:ext cx="10881360" cy="1097280"/>
           </a:xfrm>
           <a:prstGeom prst="rect">
             <a:avLst/>
@@ -17064,26 +17117,26 @@
           <a:p>
             <a:pPr algn="l"/>
             <a:r>
-              <a:rPr sz="1200" b="0">
+              <a:rPr sz="1300" b="0">
                 <a:solidFill>
                   <a:srgbClr val="212121"/>
                 </a:solidFill>
               </a:rPr>
-              <a:t>회원가입 / 로그인 / 자동 로그인</a:t>
-            </a:r>
-          </a:p>
-        </p:txBody>
-      </p:sp>
-      <p:sp>
-        <p:nvSpPr>
-          <p:cNvPr id="12" name="Rectangle 11"/>
+              <a:t>① 계좌 등록 (주식·코인 선택, 통화 선택)  → ② 입금 기록  → ③ 잔액 자동 계산 확인</a:t>
+            </a:r>
+          </a:p>
+        </p:txBody>
+      </p:sp>
+      <p:sp>
+        <p:nvSpPr>
+          <p:cNvPr id="13" name="Rectangle 12"/>
           <p:cNvSpPr/>
           <p:nvPr/>
         </p:nvSpPr>
         <p:spPr>
           <a:xfrm>
-            <a:off x="457200" y="1783080"/>
-            <a:ext cx="11247120" cy="621792"/>
+            <a:off x="457200" y="3383280"/>
+            <a:ext cx="11247120" cy="1920240"/>
           </a:xfrm>
           <a:prstGeom prst="rect">
             <a:avLst/>
@@ -17119,20 +17172,20 @@
       </p:sp>
       <p:sp>
         <p:nvSpPr>
-          <p:cNvPr id="13" name="Rectangle 12"/>
+          <p:cNvPr id="14" name="Rectangle 13"/>
           <p:cNvSpPr/>
           <p:nvPr/>
         </p:nvSpPr>
         <p:spPr>
           <a:xfrm>
-            <a:off x="457200" y="1783080"/>
-            <a:ext cx="54864" cy="621792"/>
+            <a:off x="457200" y="3383280"/>
+            <a:ext cx="54864" cy="1920240"/>
           </a:xfrm>
           <a:prstGeom prst="rect">
             <a:avLst/>
           </a:prstGeom>
           <a:solidFill>
-            <a:srgbClr val="2E7D32"/>
+            <a:srgbClr val="3F51B5"/>
           </a:solidFill>
           <a:ln>
             <a:noFill/>
@@ -17162,125 +17215,23 @@
       </p:sp>
       <p:sp>
         <p:nvSpPr>
-          <p:cNvPr id="14" name="TextBox 13"/>
-          <p:cNvSpPr txBox="1"/>
-          <p:nvPr/>
-        </p:nvSpPr>
-        <p:spPr>
-          <a:xfrm>
-            <a:off x="594360" y="1929384"/>
-            <a:ext cx="1188720" cy="347472"/>
-          </a:xfrm>
-          <a:prstGeom prst="rect">
-            <a:avLst/>
-          </a:prstGeom>
-          <a:noFill/>
-        </p:spPr>
-        <p:txBody>
-          <a:bodyPr wrap="square">
-            <a:spAutoFit/>
-          </a:bodyPr>
-          <a:lstStyle/>
-          <a:p>
-            <a:pPr algn="l"/>
-            <a:r>
-              <a:rPr sz="1100" b="0">
-                <a:solidFill>
-                  <a:srgbClr val="2E7D32"/>
-                </a:solidFill>
-              </a:rPr>
-              <a:t>✅ 완료</a:t>
-            </a:r>
-          </a:p>
-        </p:txBody>
-      </p:sp>
-      <p:sp>
-        <p:nvSpPr>
-          <p:cNvPr id="15" name="TextBox 14"/>
-          <p:cNvSpPr txBox="1"/>
-          <p:nvPr/>
-        </p:nvSpPr>
-        <p:spPr>
-          <a:xfrm>
-            <a:off x="1920240" y="1929384"/>
-            <a:ext cx="2103120" cy="347472"/>
-          </a:xfrm>
-          <a:prstGeom prst="rect">
-            <a:avLst/>
-          </a:prstGeom>
-          <a:noFill/>
-        </p:spPr>
-        <p:txBody>
-          <a:bodyPr wrap="square">
-            <a:spAutoFit/>
-          </a:bodyPr>
-          <a:lstStyle/>
-          <a:p>
-            <a:pPr algn="l"/>
-            <a:r>
-              <a:rPr sz="1200" b="1">
-                <a:solidFill>
-                  <a:srgbClr val="212121"/>
-                </a:solidFill>
-              </a:rPr>
-              <a:t>계좌 관리</a:t>
-            </a:r>
-          </a:p>
-        </p:txBody>
-      </p:sp>
-      <p:sp>
-        <p:nvSpPr>
-          <p:cNvPr id="16" name="TextBox 15"/>
-          <p:cNvSpPr txBox="1"/>
-          <p:nvPr/>
-        </p:nvSpPr>
-        <p:spPr>
-          <a:xfrm>
-            <a:off x="4114800" y="1929384"/>
-            <a:ext cx="7406640" cy="347472"/>
-          </a:xfrm>
-          <a:prstGeom prst="rect">
-            <a:avLst/>
-          </a:prstGeom>
-          <a:noFill/>
-        </p:spPr>
-        <p:txBody>
-          <a:bodyPr wrap="square">
-            <a:spAutoFit/>
-          </a:bodyPr>
-          <a:lstStyle/>
-          <a:p>
-            <a:pPr algn="l"/>
-            <a:r>
-              <a:rPr sz="1200" b="0">
-                <a:solidFill>
-                  <a:srgbClr val="212121"/>
-                </a:solidFill>
-              </a:rPr>
-              <a:t>계좌 등록 / 입출금 기록 / 잔액 자동 계산</a:t>
-            </a:r>
-          </a:p>
-        </p:txBody>
-      </p:sp>
-      <p:sp>
-        <p:nvSpPr>
-          <p:cNvPr id="17" name="Rectangle 16"/>
+          <p:cNvPr id="15" name="Rectangle 14"/>
           <p:cNvSpPr/>
           <p:nvPr/>
         </p:nvSpPr>
         <p:spPr>
           <a:xfrm>
-            <a:off x="457200" y="2514600"/>
-            <a:ext cx="11247120" cy="621792"/>
-          </a:xfrm>
-          <a:prstGeom prst="rect">
-            <a:avLst/>
-          </a:prstGeom>
-          <a:noFill/>
-          <a:ln w="10160">
-            <a:solidFill>
-              <a:srgbClr val="E0E0E0"/>
-            </a:solidFill>
+            <a:off x="457200" y="3383280"/>
+            <a:ext cx="11247120" cy="475488"/>
+          </a:xfrm>
+          <a:prstGeom prst="rect">
+            <a:avLst/>
+          </a:prstGeom>
+          <a:solidFill>
+            <a:srgbClr val="F5F5F5"/>
+          </a:solidFill>
+          <a:ln>
+            <a:noFill/>
           </a:ln>
         </p:spPr>
         <p:style>
@@ -17307,911 +17258,116 @@
       </p:sp>
       <p:sp>
         <p:nvSpPr>
-          <p:cNvPr id="18" name="Rectangle 17"/>
+          <p:cNvPr id="16" name="TextBox 15"/>
+          <p:cNvSpPr txBox="1"/>
+          <p:nvPr/>
+        </p:nvSpPr>
+        <p:spPr>
+          <a:xfrm>
+            <a:off x="658368" y="3474720"/>
+            <a:ext cx="1828800" cy="320040"/>
+          </a:xfrm>
+          <a:prstGeom prst="rect">
+            <a:avLst/>
+          </a:prstGeom>
+          <a:noFill/>
+        </p:spPr>
+        <p:txBody>
+          <a:bodyPr wrap="square">
+            <a:spAutoFit/>
+          </a:bodyPr>
+          <a:lstStyle/>
+          <a:p>
+            <a:pPr algn="l"/>
+            <a:r>
+              <a:rPr sz="1100" b="1">
+                <a:solidFill>
+                  <a:srgbClr val="3F51B5"/>
+                </a:solidFill>
+              </a:rPr>
+              <a:t>시나리오 B</a:t>
+            </a:r>
+          </a:p>
+        </p:txBody>
+      </p:sp>
+      <p:sp>
+        <p:nvSpPr>
+          <p:cNvPr id="17" name="TextBox 16"/>
+          <p:cNvSpPr txBox="1"/>
+          <p:nvPr/>
+        </p:nvSpPr>
+        <p:spPr>
+          <a:xfrm>
+            <a:off x="2606040" y="3474720"/>
+            <a:ext cx="8961120" cy="320040"/>
+          </a:xfrm>
+          <a:prstGeom prst="rect">
+            <a:avLst/>
+          </a:prstGeom>
+          <a:noFill/>
+        </p:spPr>
+        <p:txBody>
+          <a:bodyPr wrap="square">
+            <a:spAutoFit/>
+          </a:bodyPr>
+          <a:lstStyle/>
+          <a:p>
+            <a:pPr algn="l"/>
+            <a:r>
+              <a:rPr sz="1400" b="1">
+                <a:solidFill>
+                  <a:srgbClr val="212121"/>
+                </a:solidFill>
+              </a:rPr>
+              <a:t>포지션 기록 + 복기</a:t>
+            </a:r>
+          </a:p>
+        </p:txBody>
+      </p:sp>
+      <p:sp>
+        <p:nvSpPr>
+          <p:cNvPr id="18" name="TextBox 17"/>
+          <p:cNvSpPr txBox="1"/>
+          <p:nvPr/>
+        </p:nvSpPr>
+        <p:spPr>
+          <a:xfrm>
+            <a:off x="658368" y="4023360"/>
+            <a:ext cx="10881360" cy="1097280"/>
+          </a:xfrm>
+          <a:prstGeom prst="rect">
+            <a:avLst/>
+          </a:prstGeom>
+          <a:noFill/>
+        </p:spPr>
+        <p:txBody>
+          <a:bodyPr wrap="square">
+            <a:spAutoFit/>
+          </a:bodyPr>
+          <a:lstStyle/>
+          <a:p>
+            <a:pPr algn="l"/>
+            <a:r>
+              <a:rPr sz="1300" b="0">
+                <a:solidFill>
+                  <a:srgbClr val="212121"/>
+                </a:solidFill>
+              </a:rPr>
+              <a:t>① 포지션 진입 기록 (종목·진입가·수량·매수 근거)  → ② 포지션 정리 (매도가·손익·수익률 자동 계산)  → ③ 복기 메모 조회</a:t>
+            </a:r>
+          </a:p>
+        </p:txBody>
+      </p:sp>
+      <p:sp>
+        <p:nvSpPr>
+          <p:cNvPr id="19" name="Rectangle 18"/>
           <p:cNvSpPr/>
           <p:nvPr/>
         </p:nvSpPr>
         <p:spPr>
           <a:xfrm>
-            <a:off x="457200" y="2514600"/>
-            <a:ext cx="54864" cy="621792"/>
-          </a:xfrm>
-          <a:prstGeom prst="rect">
-            <a:avLst/>
-          </a:prstGeom>
-          <a:solidFill>
-            <a:srgbClr val="2E7D32"/>
-          </a:solidFill>
-          <a:ln>
-            <a:noFill/>
-          </a:ln>
-        </p:spPr>
-        <p:style>
-          <a:lnRef idx="1">
-            <a:schemeClr val="accent1"/>
-          </a:lnRef>
-          <a:fillRef idx="3">
-            <a:schemeClr val="accent1"/>
-          </a:fillRef>
-          <a:effectRef idx="2">
-            <a:schemeClr val="accent1"/>
-          </a:effectRef>
-          <a:fontRef idx="minor">
-            <a:schemeClr val="lt1"/>
-          </a:fontRef>
-        </p:style>
-        <p:txBody>
-          <a:bodyPr rtlCol="0" anchor="ctr"/>
-          <a:lstStyle/>
-          <a:p>
-            <a:pPr algn="ctr"/>
-          </a:p>
-        </p:txBody>
-      </p:sp>
-      <p:sp>
-        <p:nvSpPr>
-          <p:cNvPr id="19" name="TextBox 18"/>
-          <p:cNvSpPr txBox="1"/>
-          <p:nvPr/>
-        </p:nvSpPr>
-        <p:spPr>
-          <a:xfrm>
-            <a:off x="594360" y="2660904"/>
-            <a:ext cx="1188720" cy="347472"/>
-          </a:xfrm>
-          <a:prstGeom prst="rect">
-            <a:avLst/>
-          </a:prstGeom>
-          <a:noFill/>
-        </p:spPr>
-        <p:txBody>
-          <a:bodyPr wrap="square">
-            <a:spAutoFit/>
-          </a:bodyPr>
-          <a:lstStyle/>
-          <a:p>
-            <a:pPr algn="l"/>
-            <a:r>
-              <a:rPr sz="1100" b="0">
-                <a:solidFill>
-                  <a:srgbClr val="2E7D32"/>
-                </a:solidFill>
-              </a:rPr>
-              <a:t>✅ 완료</a:t>
-            </a:r>
-          </a:p>
-        </p:txBody>
-      </p:sp>
-      <p:sp>
-        <p:nvSpPr>
-          <p:cNvPr id="20" name="TextBox 19"/>
-          <p:cNvSpPr txBox="1"/>
-          <p:nvPr/>
-        </p:nvSpPr>
-        <p:spPr>
-          <a:xfrm>
-            <a:off x="1920240" y="2660904"/>
-            <a:ext cx="2103120" cy="347472"/>
-          </a:xfrm>
-          <a:prstGeom prst="rect">
-            <a:avLst/>
-          </a:prstGeom>
-          <a:noFill/>
-        </p:spPr>
-        <p:txBody>
-          <a:bodyPr wrap="square">
-            <a:spAutoFit/>
-          </a:bodyPr>
-          <a:lstStyle/>
-          <a:p>
-            <a:pPr algn="l"/>
-            <a:r>
-              <a:rPr sz="1200" b="1">
-                <a:solidFill>
-                  <a:srgbClr val="212121"/>
-                </a:solidFill>
-              </a:rPr>
-              <a:t>포지션 관리</a:t>
-            </a:r>
-          </a:p>
-        </p:txBody>
-      </p:sp>
-      <p:sp>
-        <p:nvSpPr>
-          <p:cNvPr id="21" name="TextBox 20"/>
-          <p:cNvSpPr txBox="1"/>
-          <p:nvPr/>
-        </p:nvSpPr>
-        <p:spPr>
-          <a:xfrm>
-            <a:off x="4114800" y="2660904"/>
-            <a:ext cx="7406640" cy="347472"/>
-          </a:xfrm>
-          <a:prstGeom prst="rect">
-            <a:avLst/>
-          </a:prstGeom>
-          <a:noFill/>
-        </p:spPr>
-        <p:txBody>
-          <a:bodyPr wrap="square">
-            <a:spAutoFit/>
-          </a:bodyPr>
-          <a:lstStyle/>
-          <a:p>
-            <a:pPr algn="l"/>
-            <a:r>
-              <a:rPr sz="1200" b="0">
-                <a:solidFill>
-                  <a:srgbClr val="212121"/>
-                </a:solidFill>
-              </a:rPr>
-              <a:t>진입·정리 / 수익률·손익 계산 / 복기 메모</a:t>
-            </a:r>
-          </a:p>
-        </p:txBody>
-      </p:sp>
-      <p:sp>
-        <p:nvSpPr>
-          <p:cNvPr id="22" name="Rectangle 21"/>
-          <p:cNvSpPr/>
-          <p:nvPr/>
-        </p:nvSpPr>
-        <p:spPr>
-          <a:xfrm>
-            <a:off x="457200" y="3246120"/>
-            <a:ext cx="11247120" cy="621792"/>
-          </a:xfrm>
-          <a:prstGeom prst="rect">
-            <a:avLst/>
-          </a:prstGeom>
-          <a:noFill/>
-          <a:ln w="10160">
-            <a:solidFill>
-              <a:srgbClr val="E0E0E0"/>
-            </a:solidFill>
-          </a:ln>
-        </p:spPr>
-        <p:style>
-          <a:lnRef idx="1">
-            <a:schemeClr val="accent1"/>
-          </a:lnRef>
-          <a:fillRef idx="3">
-            <a:schemeClr val="accent1"/>
-          </a:fillRef>
-          <a:effectRef idx="2">
-            <a:schemeClr val="accent1"/>
-          </a:effectRef>
-          <a:fontRef idx="minor">
-            <a:schemeClr val="lt1"/>
-          </a:fontRef>
-        </p:style>
-        <p:txBody>
-          <a:bodyPr rtlCol="0" anchor="ctr"/>
-          <a:lstStyle/>
-          <a:p>
-            <a:pPr algn="ctr"/>
-          </a:p>
-        </p:txBody>
-      </p:sp>
-      <p:sp>
-        <p:nvSpPr>
-          <p:cNvPr id="23" name="Rectangle 22"/>
-          <p:cNvSpPr/>
-          <p:nvPr/>
-        </p:nvSpPr>
-        <p:spPr>
-          <a:xfrm>
-            <a:off x="457200" y="3246120"/>
-            <a:ext cx="54864" cy="621792"/>
-          </a:xfrm>
-          <a:prstGeom prst="rect">
-            <a:avLst/>
-          </a:prstGeom>
-          <a:solidFill>
-            <a:srgbClr val="2E7D32"/>
-          </a:solidFill>
-          <a:ln>
-            <a:noFill/>
-          </a:ln>
-        </p:spPr>
-        <p:style>
-          <a:lnRef idx="1">
-            <a:schemeClr val="accent1"/>
-          </a:lnRef>
-          <a:fillRef idx="3">
-            <a:schemeClr val="accent1"/>
-          </a:fillRef>
-          <a:effectRef idx="2">
-            <a:schemeClr val="accent1"/>
-          </a:effectRef>
-          <a:fontRef idx="minor">
-            <a:schemeClr val="lt1"/>
-          </a:fontRef>
-        </p:style>
-        <p:txBody>
-          <a:bodyPr rtlCol="0" anchor="ctr"/>
-          <a:lstStyle/>
-          <a:p>
-            <a:pPr algn="ctr"/>
-          </a:p>
-        </p:txBody>
-      </p:sp>
-      <p:sp>
-        <p:nvSpPr>
-          <p:cNvPr id="24" name="TextBox 23"/>
-          <p:cNvSpPr txBox="1"/>
-          <p:nvPr/>
-        </p:nvSpPr>
-        <p:spPr>
-          <a:xfrm>
-            <a:off x="594360" y="3392424"/>
-            <a:ext cx="1188720" cy="347472"/>
-          </a:xfrm>
-          <a:prstGeom prst="rect">
-            <a:avLst/>
-          </a:prstGeom>
-          <a:noFill/>
-        </p:spPr>
-        <p:txBody>
-          <a:bodyPr wrap="square">
-            <a:spAutoFit/>
-          </a:bodyPr>
-          <a:lstStyle/>
-          <a:p>
-            <a:pPr algn="l"/>
-            <a:r>
-              <a:rPr sz="1100" b="0">
-                <a:solidFill>
-                  <a:srgbClr val="2E7D32"/>
-                </a:solidFill>
-              </a:rPr>
-              <a:t>✅ 완료</a:t>
-            </a:r>
-          </a:p>
-        </p:txBody>
-      </p:sp>
-      <p:sp>
-        <p:nvSpPr>
-          <p:cNvPr id="25" name="TextBox 24"/>
-          <p:cNvSpPr txBox="1"/>
-          <p:nvPr/>
-        </p:nvSpPr>
-        <p:spPr>
-          <a:xfrm>
-            <a:off x="1920240" y="3392424"/>
-            <a:ext cx="2103120" cy="347472"/>
-          </a:xfrm>
-          <a:prstGeom prst="rect">
-            <a:avLst/>
-          </a:prstGeom>
-          <a:noFill/>
-        </p:spPr>
-        <p:txBody>
-          <a:bodyPr wrap="square">
-            <a:spAutoFit/>
-          </a:bodyPr>
-          <a:lstStyle/>
-          <a:p>
-            <a:pPr algn="l"/>
-            <a:r>
-              <a:rPr sz="1200" b="1">
-                <a:solidFill>
-                  <a:srgbClr val="212121"/>
-                </a:solidFill>
-              </a:rPr>
-              <a:t>시각화</a:t>
-            </a:r>
-          </a:p>
-        </p:txBody>
-      </p:sp>
-      <p:sp>
-        <p:nvSpPr>
-          <p:cNvPr id="26" name="TextBox 25"/>
-          <p:cNvSpPr txBox="1"/>
-          <p:nvPr/>
-        </p:nvSpPr>
-        <p:spPr>
-          <a:xfrm>
-            <a:off x="4114800" y="3392424"/>
-            <a:ext cx="7406640" cy="347472"/>
-          </a:xfrm>
-          <a:prstGeom prst="rect">
-            <a:avLst/>
-          </a:prstGeom>
-          <a:noFill/>
-        </p:spPr>
-        <p:txBody>
-          <a:bodyPr wrap="square">
-            <a:spAutoFit/>
-          </a:bodyPr>
-          <a:lstStyle/>
-          <a:p>
-            <a:pPr algn="l"/>
-            <a:r>
-              <a:rPr sz="1200" b="0">
-                <a:solidFill>
-                  <a:srgbClr val="212121"/>
-                </a:solidFill>
-              </a:rPr>
-              <a:t>수익률 막대 차트 / 누적 손익 라인 차트 / 기간 필터</a:t>
-            </a:r>
-          </a:p>
-        </p:txBody>
-      </p:sp>
-      <p:sp>
-        <p:nvSpPr>
-          <p:cNvPr id="27" name="Rectangle 26"/>
-          <p:cNvSpPr/>
-          <p:nvPr/>
-        </p:nvSpPr>
-        <p:spPr>
-          <a:xfrm>
-            <a:off x="457200" y="3977639"/>
-            <a:ext cx="11247120" cy="621792"/>
-          </a:xfrm>
-          <a:prstGeom prst="rect">
-            <a:avLst/>
-          </a:prstGeom>
-          <a:noFill/>
-          <a:ln w="10160">
-            <a:solidFill>
-              <a:srgbClr val="E0E0E0"/>
-            </a:solidFill>
-          </a:ln>
-        </p:spPr>
-        <p:style>
-          <a:lnRef idx="1">
-            <a:schemeClr val="accent1"/>
-          </a:lnRef>
-          <a:fillRef idx="3">
-            <a:schemeClr val="accent1"/>
-          </a:fillRef>
-          <a:effectRef idx="2">
-            <a:schemeClr val="accent1"/>
-          </a:effectRef>
-          <a:fontRef idx="minor">
-            <a:schemeClr val="lt1"/>
-          </a:fontRef>
-        </p:style>
-        <p:txBody>
-          <a:bodyPr rtlCol="0" anchor="ctr"/>
-          <a:lstStyle/>
-          <a:p>
-            <a:pPr algn="ctr"/>
-          </a:p>
-        </p:txBody>
-      </p:sp>
-      <p:sp>
-        <p:nvSpPr>
-          <p:cNvPr id="28" name="Rectangle 27"/>
-          <p:cNvSpPr/>
-          <p:nvPr/>
-        </p:nvSpPr>
-        <p:spPr>
-          <a:xfrm>
-            <a:off x="457200" y="3977639"/>
-            <a:ext cx="54864" cy="621792"/>
-          </a:xfrm>
-          <a:prstGeom prst="rect">
-            <a:avLst/>
-          </a:prstGeom>
-          <a:solidFill>
-            <a:srgbClr val="2E7D32"/>
-          </a:solidFill>
-          <a:ln>
-            <a:noFill/>
-          </a:ln>
-        </p:spPr>
-        <p:style>
-          <a:lnRef idx="1">
-            <a:schemeClr val="accent1"/>
-          </a:lnRef>
-          <a:fillRef idx="3">
-            <a:schemeClr val="accent1"/>
-          </a:fillRef>
-          <a:effectRef idx="2">
-            <a:schemeClr val="accent1"/>
-          </a:effectRef>
-          <a:fontRef idx="minor">
-            <a:schemeClr val="lt1"/>
-          </a:fontRef>
-        </p:style>
-        <p:txBody>
-          <a:bodyPr rtlCol="0" anchor="ctr"/>
-          <a:lstStyle/>
-          <a:p>
-            <a:pPr algn="ctr"/>
-          </a:p>
-        </p:txBody>
-      </p:sp>
-      <p:sp>
-        <p:nvSpPr>
-          <p:cNvPr id="29" name="TextBox 28"/>
-          <p:cNvSpPr txBox="1"/>
-          <p:nvPr/>
-        </p:nvSpPr>
-        <p:spPr>
-          <a:xfrm>
-            <a:off x="594360" y="4123944"/>
-            <a:ext cx="1188720" cy="347472"/>
-          </a:xfrm>
-          <a:prstGeom prst="rect">
-            <a:avLst/>
-          </a:prstGeom>
-          <a:noFill/>
-        </p:spPr>
-        <p:txBody>
-          <a:bodyPr wrap="square">
-            <a:spAutoFit/>
-          </a:bodyPr>
-          <a:lstStyle/>
-          <a:p>
-            <a:pPr algn="l"/>
-            <a:r>
-              <a:rPr sz="1100" b="0">
-                <a:solidFill>
-                  <a:srgbClr val="2E7D32"/>
-                </a:solidFill>
-              </a:rPr>
-              <a:t>✅ 완료</a:t>
-            </a:r>
-          </a:p>
-        </p:txBody>
-      </p:sp>
-      <p:sp>
-        <p:nvSpPr>
-          <p:cNvPr id="30" name="TextBox 29"/>
-          <p:cNvSpPr txBox="1"/>
-          <p:nvPr/>
-        </p:nvSpPr>
-        <p:spPr>
-          <a:xfrm>
-            <a:off x="1920240" y="4123944"/>
-            <a:ext cx="2103120" cy="347472"/>
-          </a:xfrm>
-          <a:prstGeom prst="rect">
-            <a:avLst/>
-          </a:prstGeom>
-          <a:noFill/>
-        </p:spPr>
-        <p:txBody>
-          <a:bodyPr wrap="square">
-            <a:spAutoFit/>
-          </a:bodyPr>
-          <a:lstStyle/>
-          <a:p>
-            <a:pPr algn="l"/>
-            <a:r>
-              <a:rPr sz="1200" b="1">
-                <a:solidFill>
-                  <a:srgbClr val="212121"/>
-                </a:solidFill>
-              </a:rPr>
-              <a:t>대시보드</a:t>
-            </a:r>
-          </a:p>
-        </p:txBody>
-      </p:sp>
-      <p:sp>
-        <p:nvSpPr>
-          <p:cNvPr id="31" name="TextBox 30"/>
-          <p:cNvSpPr txBox="1"/>
-          <p:nvPr/>
-        </p:nvSpPr>
-        <p:spPr>
-          <a:xfrm>
-            <a:off x="4114800" y="4123944"/>
-            <a:ext cx="7406640" cy="347472"/>
-          </a:xfrm>
-          <a:prstGeom prst="rect">
-            <a:avLst/>
-          </a:prstGeom>
-          <a:noFill/>
-        </p:spPr>
-        <p:txBody>
-          <a:bodyPr wrap="square">
-            <a:spAutoFit/>
-          </a:bodyPr>
-          <a:lstStyle/>
-          <a:p>
-            <a:pPr algn="l"/>
-            <a:r>
-              <a:rPr sz="1200" b="0">
-                <a:solidFill>
-                  <a:srgbClr val="212121"/>
-                </a:solidFill>
-              </a:rPr>
-              <a:t>총 잔액 / 누적 손익 / 승률 / 최근 포지션 목록</a:t>
-            </a:r>
-          </a:p>
-        </p:txBody>
-      </p:sp>
-      <p:sp>
-        <p:nvSpPr>
-          <p:cNvPr id="32" name="Rectangle 31"/>
-          <p:cNvSpPr/>
-          <p:nvPr/>
-        </p:nvSpPr>
-        <p:spPr>
-          <a:xfrm>
-            <a:off x="457200" y="4709160"/>
-            <a:ext cx="11247120" cy="621792"/>
-          </a:xfrm>
-          <a:prstGeom prst="rect">
-            <a:avLst/>
-          </a:prstGeom>
-          <a:noFill/>
-          <a:ln w="10160">
-            <a:solidFill>
-              <a:srgbClr val="E0E0E0"/>
-            </a:solidFill>
-          </a:ln>
-        </p:spPr>
-        <p:style>
-          <a:lnRef idx="1">
-            <a:schemeClr val="accent1"/>
-          </a:lnRef>
-          <a:fillRef idx="3">
-            <a:schemeClr val="accent1"/>
-          </a:fillRef>
-          <a:effectRef idx="2">
-            <a:schemeClr val="accent1"/>
-          </a:effectRef>
-          <a:fontRef idx="minor">
-            <a:schemeClr val="lt1"/>
-          </a:fontRef>
-        </p:style>
-        <p:txBody>
-          <a:bodyPr rtlCol="0" anchor="ctr"/>
-          <a:lstStyle/>
-          <a:p>
-            <a:pPr algn="ctr"/>
-          </a:p>
-        </p:txBody>
-      </p:sp>
-      <p:sp>
-        <p:nvSpPr>
-          <p:cNvPr id="33" name="Rectangle 32"/>
-          <p:cNvSpPr/>
-          <p:nvPr/>
-        </p:nvSpPr>
-        <p:spPr>
-          <a:xfrm>
-            <a:off x="457200" y="4709160"/>
-            <a:ext cx="54864" cy="621792"/>
-          </a:xfrm>
-          <a:prstGeom prst="rect">
-            <a:avLst/>
-          </a:prstGeom>
-          <a:solidFill>
-            <a:srgbClr val="2E7D32"/>
-          </a:solidFill>
-          <a:ln>
-            <a:noFill/>
-          </a:ln>
-        </p:spPr>
-        <p:style>
-          <a:lnRef idx="1">
-            <a:schemeClr val="accent1"/>
-          </a:lnRef>
-          <a:fillRef idx="3">
-            <a:schemeClr val="accent1"/>
-          </a:fillRef>
-          <a:effectRef idx="2">
-            <a:schemeClr val="accent1"/>
-          </a:effectRef>
-          <a:fontRef idx="minor">
-            <a:schemeClr val="lt1"/>
-          </a:fontRef>
-        </p:style>
-        <p:txBody>
-          <a:bodyPr rtlCol="0" anchor="ctr"/>
-          <a:lstStyle/>
-          <a:p>
-            <a:pPr algn="ctr"/>
-          </a:p>
-        </p:txBody>
-      </p:sp>
-      <p:sp>
-        <p:nvSpPr>
-          <p:cNvPr id="34" name="TextBox 33"/>
-          <p:cNvSpPr txBox="1"/>
-          <p:nvPr/>
-        </p:nvSpPr>
-        <p:spPr>
-          <a:xfrm>
-            <a:off x="594360" y="4855464"/>
-            <a:ext cx="1188720" cy="347472"/>
-          </a:xfrm>
-          <a:prstGeom prst="rect">
-            <a:avLst/>
-          </a:prstGeom>
-          <a:noFill/>
-        </p:spPr>
-        <p:txBody>
-          <a:bodyPr wrap="square">
-            <a:spAutoFit/>
-          </a:bodyPr>
-          <a:lstStyle/>
-          <a:p>
-            <a:pPr algn="l"/>
-            <a:r>
-              <a:rPr sz="1100" b="0">
-                <a:solidFill>
-                  <a:srgbClr val="2E7D32"/>
-                </a:solidFill>
-              </a:rPr>
-              <a:t>✅ 완료</a:t>
-            </a:r>
-          </a:p>
-        </p:txBody>
-      </p:sp>
-      <p:sp>
-        <p:nvSpPr>
-          <p:cNvPr id="35" name="TextBox 34"/>
-          <p:cNvSpPr txBox="1"/>
-          <p:nvPr/>
-        </p:nvSpPr>
-        <p:spPr>
-          <a:xfrm>
-            <a:off x="1920240" y="4855464"/>
-            <a:ext cx="2103120" cy="347472"/>
-          </a:xfrm>
-          <a:prstGeom prst="rect">
-            <a:avLst/>
-          </a:prstGeom>
-          <a:noFill/>
-        </p:spPr>
-        <p:txBody>
-          <a:bodyPr wrap="square">
-            <a:spAutoFit/>
-          </a:bodyPr>
-          <a:lstStyle/>
-          <a:p>
-            <a:pPr algn="l"/>
-            <a:r>
-              <a:rPr sz="1200" b="1">
-                <a:solidFill>
-                  <a:srgbClr val="212121"/>
-                </a:solidFill>
-              </a:rPr>
-              <a:t>문서·배포</a:t>
-            </a:r>
-          </a:p>
-        </p:txBody>
-      </p:sp>
-      <p:sp>
-        <p:nvSpPr>
-          <p:cNvPr id="36" name="TextBox 35"/>
-          <p:cNvSpPr txBox="1"/>
-          <p:nvPr/>
-        </p:nvSpPr>
-        <p:spPr>
-          <a:xfrm>
-            <a:off x="4114800" y="4855464"/>
-            <a:ext cx="7406640" cy="347472"/>
-          </a:xfrm>
-          <a:prstGeom prst="rect">
-            <a:avLst/>
-          </a:prstGeom>
-          <a:noFill/>
-        </p:spPr>
-        <p:txBody>
-          <a:bodyPr wrap="square">
-            <a:spAutoFit/>
-          </a:bodyPr>
-          <a:lstStyle/>
-          <a:p>
-            <a:pPr algn="l"/>
-            <a:r>
-              <a:rPr sz="1200" b="0">
-                <a:solidFill>
-                  <a:srgbClr val="212121"/>
-                </a:solidFill>
-              </a:rPr>
-              <a:t>setup·testing 문서 / README 완비</a:t>
-            </a:r>
-          </a:p>
-        </p:txBody>
-      </p:sp>
-      <p:sp>
-        <p:nvSpPr>
-          <p:cNvPr id="37" name="Rectangle 36"/>
-          <p:cNvSpPr/>
-          <p:nvPr/>
-        </p:nvSpPr>
-        <p:spPr>
-          <a:xfrm>
-            <a:off x="457200" y="5440680"/>
-            <a:ext cx="11247120" cy="621792"/>
-          </a:xfrm>
-          <a:prstGeom prst="rect">
-            <a:avLst/>
-          </a:prstGeom>
-          <a:noFill/>
-          <a:ln w="10160">
-            <a:solidFill>
-              <a:srgbClr val="E0E0E0"/>
-            </a:solidFill>
-          </a:ln>
-        </p:spPr>
-        <p:style>
-          <a:lnRef idx="1">
-            <a:schemeClr val="accent1"/>
-          </a:lnRef>
-          <a:fillRef idx="3">
-            <a:schemeClr val="accent1"/>
-          </a:fillRef>
-          <a:effectRef idx="2">
-            <a:schemeClr val="accent1"/>
-          </a:effectRef>
-          <a:fontRef idx="minor">
-            <a:schemeClr val="lt1"/>
-          </a:fontRef>
-        </p:style>
-        <p:txBody>
-          <a:bodyPr rtlCol="0" anchor="ctr"/>
-          <a:lstStyle/>
-          <a:p>
-            <a:pPr algn="ctr"/>
-          </a:p>
-        </p:txBody>
-      </p:sp>
-      <p:sp>
-        <p:nvSpPr>
-          <p:cNvPr id="38" name="Rectangle 37"/>
-          <p:cNvSpPr/>
-          <p:nvPr/>
-        </p:nvSpPr>
-        <p:spPr>
-          <a:xfrm>
-            <a:off x="457200" y="5440680"/>
-            <a:ext cx="54864" cy="621792"/>
-          </a:xfrm>
-          <a:prstGeom prst="rect">
-            <a:avLst/>
-          </a:prstGeom>
-          <a:solidFill>
-            <a:srgbClr val="9E9E9E"/>
-          </a:solidFill>
-          <a:ln>
-            <a:noFill/>
-          </a:ln>
-        </p:spPr>
-        <p:style>
-          <a:lnRef idx="1">
-            <a:schemeClr val="accent1"/>
-          </a:lnRef>
-          <a:fillRef idx="3">
-            <a:schemeClr val="accent1"/>
-          </a:fillRef>
-          <a:effectRef idx="2">
-            <a:schemeClr val="accent1"/>
-          </a:effectRef>
-          <a:fontRef idx="minor">
-            <a:schemeClr val="lt1"/>
-          </a:fontRef>
-        </p:style>
-        <p:txBody>
-          <a:bodyPr rtlCol="0" anchor="ctr"/>
-          <a:lstStyle/>
-          <a:p>
-            <a:pPr algn="ctr"/>
-          </a:p>
-        </p:txBody>
-      </p:sp>
-      <p:sp>
-        <p:nvSpPr>
-          <p:cNvPr id="39" name="TextBox 38"/>
-          <p:cNvSpPr txBox="1"/>
-          <p:nvPr/>
-        </p:nvSpPr>
-        <p:spPr>
-          <a:xfrm>
-            <a:off x="594360" y="5586984"/>
-            <a:ext cx="1188720" cy="347472"/>
-          </a:xfrm>
-          <a:prstGeom prst="rect">
-            <a:avLst/>
-          </a:prstGeom>
-          <a:noFill/>
-        </p:spPr>
-        <p:txBody>
-          <a:bodyPr wrap="square">
-            <a:spAutoFit/>
-          </a:bodyPr>
-          <a:lstStyle/>
-          <a:p>
-            <a:pPr algn="l"/>
-            <a:r>
-              <a:rPr sz="1100" b="0">
-                <a:solidFill>
-                  <a:srgbClr val="9E9E9E"/>
-                </a:solidFill>
-              </a:rPr>
-              <a:t>⏳ 예정</a:t>
-            </a:r>
-          </a:p>
-        </p:txBody>
-      </p:sp>
-      <p:sp>
-        <p:nvSpPr>
-          <p:cNvPr id="40" name="TextBox 39"/>
-          <p:cNvSpPr txBox="1"/>
-          <p:nvPr/>
-        </p:nvSpPr>
-        <p:spPr>
-          <a:xfrm>
-            <a:off x="1920240" y="5586984"/>
-            <a:ext cx="2103120" cy="347472"/>
-          </a:xfrm>
-          <a:prstGeom prst="rect">
-            <a:avLst/>
-          </a:prstGeom>
-          <a:noFill/>
-        </p:spPr>
-        <p:txBody>
-          <a:bodyPr wrap="square">
-            <a:spAutoFit/>
-          </a:bodyPr>
-          <a:lstStyle/>
-          <a:p>
-            <a:pPr algn="l"/>
-            <a:r>
-              <a:rPr sz="1200" b="1">
-                <a:solidFill>
-                  <a:srgbClr val="212121"/>
-                </a:solidFill>
-              </a:rPr>
-              <a:t>앱 빌드</a:t>
-            </a:r>
-          </a:p>
-        </p:txBody>
-      </p:sp>
-      <p:sp>
-        <p:nvSpPr>
-          <p:cNvPr id="41" name="TextBox 40"/>
-          <p:cNvSpPr txBox="1"/>
-          <p:nvPr/>
-        </p:nvSpPr>
-        <p:spPr>
-          <a:xfrm>
-            <a:off x="4114800" y="5586984"/>
-            <a:ext cx="7406640" cy="347472"/>
-          </a:xfrm>
-          <a:prstGeom prst="rect">
-            <a:avLst/>
-          </a:prstGeom>
-          <a:noFill/>
-        </p:spPr>
-        <p:txBody>
-          <a:bodyPr wrap="square">
-            <a:spAutoFit/>
-          </a:bodyPr>
-          <a:lstStyle/>
-          <a:p>
-            <a:pPr algn="l"/>
-            <a:r>
-              <a:rPr sz="1200" b="0">
-                <a:solidFill>
-                  <a:srgbClr val="212121"/>
-                </a:solidFill>
-              </a:rPr>
-              <a:t>Android APK 빌드 및 설치 파일 생성</a:t>
-            </a:r>
-          </a:p>
-        </p:txBody>
-      </p:sp>
-      <p:sp>
-        <p:nvSpPr>
-          <p:cNvPr id="42" name="Rectangle 41"/>
-          <p:cNvSpPr/>
-          <p:nvPr/>
-        </p:nvSpPr>
-        <p:spPr>
-          <a:xfrm>
-            <a:off x="457200" y="5605272"/>
-            <a:ext cx="11247120" cy="566928"/>
+            <a:off x="457200" y="5806440"/>
+            <a:ext cx="11247120" cy="658368"/>
           </a:xfrm>
           <a:prstGeom prst="rect">
             <a:avLst/>
@@ -18249,14 +17405,14 @@
       </p:sp>
       <p:sp>
         <p:nvSpPr>
-          <p:cNvPr id="43" name="TextBox 42"/>
-          <p:cNvSpPr txBox="1"/>
-          <p:nvPr/>
-        </p:nvSpPr>
-        <p:spPr>
-          <a:xfrm>
-            <a:off x="658368" y="5760720"/>
-            <a:ext cx="10972800" cy="384048"/>
+          <p:cNvPr id="20" name="TextBox 19"/>
+          <p:cNvSpPr txBox="1"/>
+          <p:nvPr/>
+        </p:nvSpPr>
+        <p:spPr>
+          <a:xfrm>
+            <a:off x="658368" y="5971032"/>
+            <a:ext cx="10972800" cy="411480"/>
           </a:xfrm>
           <a:prstGeom prst="rect">
             <a:avLst/>
@@ -18271,12 +17427,12 @@
           <a:p>
             <a:pPr algn="l"/>
             <a:r>
-              <a:rPr sz="1300" b="1">
-                <a:solidFill>
-                  <a:srgbClr val="3F51B5"/>
-                </a:solidFill>
-              </a:rPr>
-              <a:t>전체 진척  ·  Must 기능 99% 완료  (6단계 완료 / Android APK 빌드 예정)</a:t>
+              <a:rPr sz="1200" b="0">
+                <a:solidFill>
+                  <a:srgbClr val="9E9E9E"/>
+                </a:solidFill>
+              </a:rPr>
+              <a:t>데모 백업  ·  Wi-Fi 없는 환경 대비 → 로컬 데이터 캐시 + 화면 녹화 영상 준비</a:t>
             </a:r>
           </a:p>
         </p:txBody>
@@ -18369,7 +17525,7 @@
                   <a:srgbClr val="3F51B5"/>
                 </a:solidFill>
               </a:rPr>
-              <a:t>7.  데모</a:t>
+              <a:t>7.  포트폴리오 분석 화면</a:t>
             </a:r>
           </a:p>
         </p:txBody>
@@ -18403,7 +17559,7 @@
                   <a:srgbClr val="9E9E9E"/>
                 </a:solidFill>
               </a:rPr>
-              <a:t>라이브 시연 — 핵심 화면 2가지</a:t>
+              <a:t>종목별 수익률 &amp; 누적 실현 손익 — 앱 차트 기능</a:t>
             </a:r>
           </a:p>
         </p:txBody>
@@ -18485,49 +17641,30 @@
           </a:p>
         </p:txBody>
       </p:sp>
-      <p:sp>
-        <p:nvSpPr>
-          <p:cNvPr id="7" name="Rectangle 6"/>
-          <p:cNvSpPr/>
-          <p:nvPr/>
-        </p:nvSpPr>
-        <p:spPr>
-          <a:xfrm>
-            <a:off x="457200" y="1097280"/>
-            <a:ext cx="11247120" cy="1920240"/>
-          </a:xfrm>
-          <a:prstGeom prst="rect">
-            <a:avLst/>
-          </a:prstGeom>
-          <a:noFill/>
-          <a:ln w="10160">
-            <a:solidFill>
-              <a:srgbClr val="E0E0E0"/>
-            </a:solidFill>
-          </a:ln>
-        </p:spPr>
-        <p:style>
-          <a:lnRef idx="1">
-            <a:schemeClr val="accent1"/>
-          </a:lnRef>
-          <a:fillRef idx="3">
-            <a:schemeClr val="accent1"/>
-          </a:fillRef>
-          <a:effectRef idx="2">
-            <a:schemeClr val="accent1"/>
-          </a:effectRef>
-          <a:fontRef idx="minor">
-            <a:schemeClr val="lt1"/>
-          </a:fontRef>
-        </p:style>
-        <p:txBody>
-          <a:bodyPr rtlCol="0" anchor="ctr"/>
-          <a:lstStyle/>
-          <a:p>
-            <a:pPr algn="ctr"/>
-          </a:p>
-        </p:txBody>
-      </p:sp>
+      <p:pic>
+        <p:nvPicPr>
+          <p:cNvPr id="7" name="Picture 6" descr="chart_screenshot.png"/>
+          <p:cNvPicPr>
+            <a:picLocks noChangeAspect="1"/>
+          </p:cNvPicPr>
+          <p:nvPr/>
+        </p:nvPicPr>
+        <p:blipFill>
+          <a:blip r:embed="rId2"/>
+          <a:stretch>
+            <a:fillRect/>
+          </a:stretch>
+        </p:blipFill>
+        <p:spPr>
+          <a:xfrm>
+            <a:off x="1979676" y="1188720"/>
+            <a:ext cx="8229600" cy="17809698"/>
+          </a:xfrm>
+          <a:prstGeom prst="rect">
+            <a:avLst/>
+          </a:prstGeom>
+        </p:spPr>
+      </p:pic>
       <p:sp>
         <p:nvSpPr>
           <p:cNvPr id="8" name="Rectangle 7"/>
@@ -18536,427 +17673,8 @@
         </p:nvSpPr>
         <p:spPr>
           <a:xfrm>
-            <a:off x="457200" y="1097280"/>
-            <a:ext cx="54864" cy="1920240"/>
-          </a:xfrm>
-          <a:prstGeom prst="rect">
-            <a:avLst/>
-          </a:prstGeom>
-          <a:solidFill>
-            <a:srgbClr val="3F51B5"/>
-          </a:solidFill>
-          <a:ln>
-            <a:noFill/>
-          </a:ln>
-        </p:spPr>
-        <p:style>
-          <a:lnRef idx="1">
-            <a:schemeClr val="accent1"/>
-          </a:lnRef>
-          <a:fillRef idx="3">
-            <a:schemeClr val="accent1"/>
-          </a:fillRef>
-          <a:effectRef idx="2">
-            <a:schemeClr val="accent1"/>
-          </a:effectRef>
-          <a:fontRef idx="minor">
-            <a:schemeClr val="lt1"/>
-          </a:fontRef>
-        </p:style>
-        <p:txBody>
-          <a:bodyPr rtlCol="0" anchor="ctr"/>
-          <a:lstStyle/>
-          <a:p>
-            <a:pPr algn="ctr"/>
-          </a:p>
-        </p:txBody>
-      </p:sp>
-      <p:sp>
-        <p:nvSpPr>
-          <p:cNvPr id="9" name="Rectangle 8"/>
-          <p:cNvSpPr/>
-          <p:nvPr/>
-        </p:nvSpPr>
-        <p:spPr>
-          <a:xfrm>
-            <a:off x="457200" y="1097280"/>
-            <a:ext cx="11247120" cy="475488"/>
-          </a:xfrm>
-          <a:prstGeom prst="rect">
-            <a:avLst/>
-          </a:prstGeom>
-          <a:solidFill>
-            <a:srgbClr val="F5F5F5"/>
-          </a:solidFill>
-          <a:ln>
-            <a:noFill/>
-          </a:ln>
-        </p:spPr>
-        <p:style>
-          <a:lnRef idx="1">
-            <a:schemeClr val="accent1"/>
-          </a:lnRef>
-          <a:fillRef idx="3">
-            <a:schemeClr val="accent1"/>
-          </a:fillRef>
-          <a:effectRef idx="2">
-            <a:schemeClr val="accent1"/>
-          </a:effectRef>
-          <a:fontRef idx="minor">
-            <a:schemeClr val="lt1"/>
-          </a:fontRef>
-        </p:style>
-        <p:txBody>
-          <a:bodyPr rtlCol="0" anchor="ctr"/>
-          <a:lstStyle/>
-          <a:p>
-            <a:pPr algn="ctr"/>
-          </a:p>
-        </p:txBody>
-      </p:sp>
-      <p:sp>
-        <p:nvSpPr>
-          <p:cNvPr id="10" name="TextBox 9"/>
-          <p:cNvSpPr txBox="1"/>
-          <p:nvPr/>
-        </p:nvSpPr>
-        <p:spPr>
-          <a:xfrm>
-            <a:off x="658368" y="1188720"/>
-            <a:ext cx="1828800" cy="320040"/>
-          </a:xfrm>
-          <a:prstGeom prst="rect">
-            <a:avLst/>
-          </a:prstGeom>
-          <a:noFill/>
-        </p:spPr>
-        <p:txBody>
-          <a:bodyPr wrap="square">
-            <a:spAutoFit/>
-          </a:bodyPr>
-          <a:lstStyle/>
-          <a:p>
-            <a:pPr algn="l"/>
-            <a:r>
-              <a:rPr sz="1100" b="1">
-                <a:solidFill>
-                  <a:srgbClr val="3F51B5"/>
-                </a:solidFill>
-              </a:rPr>
-              <a:t>시나리오 A</a:t>
-            </a:r>
-          </a:p>
-        </p:txBody>
-      </p:sp>
-      <p:sp>
-        <p:nvSpPr>
-          <p:cNvPr id="11" name="TextBox 10"/>
-          <p:cNvSpPr txBox="1"/>
-          <p:nvPr/>
-        </p:nvSpPr>
-        <p:spPr>
-          <a:xfrm>
-            <a:off x="2606040" y="1188720"/>
-            <a:ext cx="8961120" cy="320040"/>
-          </a:xfrm>
-          <a:prstGeom prst="rect">
-            <a:avLst/>
-          </a:prstGeom>
-          <a:noFill/>
-        </p:spPr>
-        <p:txBody>
-          <a:bodyPr wrap="square">
-            <a:spAutoFit/>
-          </a:bodyPr>
-          <a:lstStyle/>
-          <a:p>
-            <a:pPr algn="l"/>
-            <a:r>
-              <a:rPr sz="1400" b="1">
-                <a:solidFill>
-                  <a:srgbClr val="212121"/>
-                </a:solidFill>
-              </a:rPr>
-              <a:t>계좌 관리 흐름</a:t>
-            </a:r>
-          </a:p>
-        </p:txBody>
-      </p:sp>
-      <p:sp>
-        <p:nvSpPr>
-          <p:cNvPr id="12" name="TextBox 11"/>
-          <p:cNvSpPr txBox="1"/>
-          <p:nvPr/>
-        </p:nvSpPr>
-        <p:spPr>
-          <a:xfrm>
-            <a:off x="658368" y="1737360"/>
-            <a:ext cx="10881360" cy="1097280"/>
-          </a:xfrm>
-          <a:prstGeom prst="rect">
-            <a:avLst/>
-          </a:prstGeom>
-          <a:noFill/>
-        </p:spPr>
-        <p:txBody>
-          <a:bodyPr wrap="square">
-            <a:spAutoFit/>
-          </a:bodyPr>
-          <a:lstStyle/>
-          <a:p>
-            <a:pPr algn="l"/>
-            <a:r>
-              <a:rPr sz="1300" b="0">
-                <a:solidFill>
-                  <a:srgbClr val="212121"/>
-                </a:solidFill>
-              </a:rPr>
-              <a:t>① 계좌 등록 (주식·코인 선택, 통화 선택)  → ② 입금 기록  → ③ 잔액 자동 계산 확인</a:t>
-            </a:r>
-          </a:p>
-        </p:txBody>
-      </p:sp>
-      <p:sp>
-        <p:nvSpPr>
-          <p:cNvPr id="13" name="Rectangle 12"/>
-          <p:cNvSpPr/>
-          <p:nvPr/>
-        </p:nvSpPr>
-        <p:spPr>
-          <a:xfrm>
-            <a:off x="457200" y="3383280"/>
-            <a:ext cx="11247120" cy="1920240"/>
-          </a:xfrm>
-          <a:prstGeom prst="rect">
-            <a:avLst/>
-          </a:prstGeom>
-          <a:noFill/>
-          <a:ln w="10160">
-            <a:solidFill>
-              <a:srgbClr val="E0E0E0"/>
-            </a:solidFill>
-          </a:ln>
-        </p:spPr>
-        <p:style>
-          <a:lnRef idx="1">
-            <a:schemeClr val="accent1"/>
-          </a:lnRef>
-          <a:fillRef idx="3">
-            <a:schemeClr val="accent1"/>
-          </a:fillRef>
-          <a:effectRef idx="2">
-            <a:schemeClr val="accent1"/>
-          </a:effectRef>
-          <a:fontRef idx="minor">
-            <a:schemeClr val="lt1"/>
-          </a:fontRef>
-        </p:style>
-        <p:txBody>
-          <a:bodyPr rtlCol="0" anchor="ctr"/>
-          <a:lstStyle/>
-          <a:p>
-            <a:pPr algn="ctr"/>
-          </a:p>
-        </p:txBody>
-      </p:sp>
-      <p:sp>
-        <p:nvSpPr>
-          <p:cNvPr id="14" name="Rectangle 13"/>
-          <p:cNvSpPr/>
-          <p:nvPr/>
-        </p:nvSpPr>
-        <p:spPr>
-          <a:xfrm>
-            <a:off x="457200" y="3383280"/>
-            <a:ext cx="54864" cy="1920240"/>
-          </a:xfrm>
-          <a:prstGeom prst="rect">
-            <a:avLst/>
-          </a:prstGeom>
-          <a:solidFill>
-            <a:srgbClr val="3F51B5"/>
-          </a:solidFill>
-          <a:ln>
-            <a:noFill/>
-          </a:ln>
-        </p:spPr>
-        <p:style>
-          <a:lnRef idx="1">
-            <a:schemeClr val="accent1"/>
-          </a:lnRef>
-          <a:fillRef idx="3">
-            <a:schemeClr val="accent1"/>
-          </a:fillRef>
-          <a:effectRef idx="2">
-            <a:schemeClr val="accent1"/>
-          </a:effectRef>
-          <a:fontRef idx="minor">
-            <a:schemeClr val="lt1"/>
-          </a:fontRef>
-        </p:style>
-        <p:txBody>
-          <a:bodyPr rtlCol="0" anchor="ctr"/>
-          <a:lstStyle/>
-          <a:p>
-            <a:pPr algn="ctr"/>
-          </a:p>
-        </p:txBody>
-      </p:sp>
-      <p:sp>
-        <p:nvSpPr>
-          <p:cNvPr id="15" name="Rectangle 14"/>
-          <p:cNvSpPr/>
-          <p:nvPr/>
-        </p:nvSpPr>
-        <p:spPr>
-          <a:xfrm>
-            <a:off x="457200" y="3383280"/>
-            <a:ext cx="11247120" cy="475488"/>
-          </a:xfrm>
-          <a:prstGeom prst="rect">
-            <a:avLst/>
-          </a:prstGeom>
-          <a:solidFill>
-            <a:srgbClr val="F5F5F5"/>
-          </a:solidFill>
-          <a:ln>
-            <a:noFill/>
-          </a:ln>
-        </p:spPr>
-        <p:style>
-          <a:lnRef idx="1">
-            <a:schemeClr val="accent1"/>
-          </a:lnRef>
-          <a:fillRef idx="3">
-            <a:schemeClr val="accent1"/>
-          </a:fillRef>
-          <a:effectRef idx="2">
-            <a:schemeClr val="accent1"/>
-          </a:effectRef>
-          <a:fontRef idx="minor">
-            <a:schemeClr val="lt1"/>
-          </a:fontRef>
-        </p:style>
-        <p:txBody>
-          <a:bodyPr rtlCol="0" anchor="ctr"/>
-          <a:lstStyle/>
-          <a:p>
-            <a:pPr algn="ctr"/>
-          </a:p>
-        </p:txBody>
-      </p:sp>
-      <p:sp>
-        <p:nvSpPr>
-          <p:cNvPr id="16" name="TextBox 15"/>
-          <p:cNvSpPr txBox="1"/>
-          <p:nvPr/>
-        </p:nvSpPr>
-        <p:spPr>
-          <a:xfrm>
-            <a:off x="658368" y="3474720"/>
-            <a:ext cx="1828800" cy="320040"/>
-          </a:xfrm>
-          <a:prstGeom prst="rect">
-            <a:avLst/>
-          </a:prstGeom>
-          <a:noFill/>
-        </p:spPr>
-        <p:txBody>
-          <a:bodyPr wrap="square">
-            <a:spAutoFit/>
-          </a:bodyPr>
-          <a:lstStyle/>
-          <a:p>
-            <a:pPr algn="l"/>
-            <a:r>
-              <a:rPr sz="1100" b="1">
-                <a:solidFill>
-                  <a:srgbClr val="3F51B5"/>
-                </a:solidFill>
-              </a:rPr>
-              <a:t>시나리오 B</a:t>
-            </a:r>
-          </a:p>
-        </p:txBody>
-      </p:sp>
-      <p:sp>
-        <p:nvSpPr>
-          <p:cNvPr id="17" name="TextBox 16"/>
-          <p:cNvSpPr txBox="1"/>
-          <p:nvPr/>
-        </p:nvSpPr>
-        <p:spPr>
-          <a:xfrm>
-            <a:off x="2606040" y="3474720"/>
-            <a:ext cx="8961120" cy="320040"/>
-          </a:xfrm>
-          <a:prstGeom prst="rect">
-            <a:avLst/>
-          </a:prstGeom>
-          <a:noFill/>
-        </p:spPr>
-        <p:txBody>
-          <a:bodyPr wrap="square">
-            <a:spAutoFit/>
-          </a:bodyPr>
-          <a:lstStyle/>
-          <a:p>
-            <a:pPr algn="l"/>
-            <a:r>
-              <a:rPr sz="1400" b="1">
-                <a:solidFill>
-                  <a:srgbClr val="212121"/>
-                </a:solidFill>
-              </a:rPr>
-              <a:t>포지션 기록 + 복기</a:t>
-            </a:r>
-          </a:p>
-        </p:txBody>
-      </p:sp>
-      <p:sp>
-        <p:nvSpPr>
-          <p:cNvPr id="18" name="TextBox 17"/>
-          <p:cNvSpPr txBox="1"/>
-          <p:nvPr/>
-        </p:nvSpPr>
-        <p:spPr>
-          <a:xfrm>
-            <a:off x="658368" y="4023360"/>
-            <a:ext cx="10881360" cy="1097280"/>
-          </a:xfrm>
-          <a:prstGeom prst="rect">
-            <a:avLst/>
-          </a:prstGeom>
-          <a:noFill/>
-        </p:spPr>
-        <p:txBody>
-          <a:bodyPr wrap="square">
-            <a:spAutoFit/>
-          </a:bodyPr>
-          <a:lstStyle/>
-          <a:p>
-            <a:pPr algn="l"/>
-            <a:r>
-              <a:rPr sz="1300" b="0">
-                <a:solidFill>
-                  <a:srgbClr val="212121"/>
-                </a:solidFill>
-              </a:rPr>
-              <a:t>① 포지션 진입 기록 (종목·진입가·수량·매수 근거)  → ② 포지션 정리 (매도가·손익·수익률 자동 계산)  → ③ 복기 메모 조회</a:t>
-            </a:r>
-          </a:p>
-        </p:txBody>
-      </p:sp>
-      <p:sp>
-        <p:nvSpPr>
-          <p:cNvPr id="19" name="Rectangle 18"/>
-          <p:cNvSpPr/>
-          <p:nvPr/>
-        </p:nvSpPr>
-        <p:spPr>
-          <a:xfrm>
-            <a:off x="457200" y="5806440"/>
-            <a:ext cx="11247120" cy="658368"/>
+            <a:off x="365760" y="5989320"/>
+            <a:ext cx="11430000" cy="566928"/>
           </a:xfrm>
           <a:prstGeom prst="rect">
             <a:avLst/>
@@ -18994,14 +17712,14 @@
       </p:sp>
       <p:sp>
         <p:nvSpPr>
-          <p:cNvPr id="20" name="TextBox 19"/>
-          <p:cNvSpPr txBox="1"/>
-          <p:nvPr/>
-        </p:nvSpPr>
-        <p:spPr>
-          <a:xfrm>
-            <a:off x="658368" y="5971032"/>
-            <a:ext cx="10972800" cy="411480"/>
+          <p:cNvPr id="9" name="TextBox 8"/>
+          <p:cNvSpPr txBox="1"/>
+          <p:nvPr/>
+        </p:nvSpPr>
+        <p:spPr>
+          <a:xfrm>
+            <a:off x="548640" y="6108192"/>
+            <a:ext cx="11064240" cy="365760"/>
           </a:xfrm>
           <a:prstGeom prst="rect">
             <a:avLst/>
@@ -19016,12 +17734,12 @@
           <a:p>
             <a:pPr algn="l"/>
             <a:r>
-              <a:rPr sz="1200" b="0">
+              <a:rPr sz="1100" b="0">
                 <a:solidFill>
                   <a:srgbClr val="9E9E9E"/>
                 </a:solidFill>
               </a:rPr>
-              <a:t>데모 백업  ·  Wi-Fi 없는 환경 대비 → 로컬 데이터 캐시 + 화면 녹화 영상 준비</a:t>
+              <a:t>기간 필터(1주·1달·3달·6달·1년·전체) 적용 시 해당 기간 정리 포지션만 반영  ·  분할 매도 시 동일 종목 합산 표시</a:t>
             </a:r>
           </a:p>
         </p:txBody>

--- a/portfolio-tracker/presentation/portfolio-tracker-final.pptx
+++ b/portfolio-tracker/presentation/portfolio-tracker-final.pptx
@@ -7679,7 +7679,7 @@
                   <a:srgbClr val="3F51B5"/>
                 </a:solidFill>
               </a:rPr>
-              <a:t>LLM Wiki  —  암묵지 운영  (notes/llm-wiki.md · 11개 항목)</a:t>
+              <a:t>LLM Wiki  —  암묵지 운영  (notes/llm-wiki-jeongkyeongwoo.md · 10개 항목)</a:t>
             </a:r>
           </a:p>
         </p:txBody>
@@ -7714,7 +7714,7 @@
                 </a:solidFill>
               </a:rPr>
               <a:t>개발 중 배운 AI 사용 인사이트 직접 기록
-Flutter 실행 환경 / 에이전트 호출법 / ADR 개념 / python-pptx 단위 변환 등</a:t>
+AI 활용법 / Firebase 실전 경험 / Flutter 주의사항 / 에이전트 특화 운영 등</a:t>
             </a:r>
           </a:p>
         </p:txBody>
@@ -17657,8 +17657,8 @@
         </p:blipFill>
         <p:spPr>
           <a:xfrm>
-            <a:off x="1979676" y="1188720"/>
-            <a:ext cx="8229600" cy="17809698"/>
+            <a:off x="4210990" y="1143000"/>
+            <a:ext cx="3776114" cy="5486400"/>
           </a:xfrm>
           <a:prstGeom prst="rect">
             <a:avLst/>

--- a/portfolio-tracker/presentation/portfolio-tracker-final.pptx
+++ b/portfolio-tracker/presentation/portfolio-tracker-final.pptx
@@ -25,6 +25,7 @@
     <p:sldId id="273" r:id="rId24"/>
     <p:sldId id="274" r:id="rId25"/>
     <p:sldId id="275" r:id="rId26"/>
+    <p:sldId id="276" r:id="rId27"/>
   </p:sldIdLst>
   <p:sldSz cx="12188952" cy="6858000" type="screen4x3"/>
   <p:notesSz cx="6858000" cy="9144000"/>
@@ -3605,7 +3606,7 @@
                   <a:srgbClr val="9E9E9E"/>
                 </a:solidFill>
               </a:rPr>
-              <a:t>10 / 20</a:t>
+              <a:t>10 / 21</a:t>
             </a:r>
           </a:p>
         </p:txBody>
@@ -4371,7 +4372,7 @@
                   <a:srgbClr val="9E9E9E"/>
                 </a:solidFill>
               </a:rPr>
-              <a:t>11 / 20</a:t>
+              <a:t>11 / 21</a:t>
             </a:r>
           </a:p>
         </p:txBody>
@@ -5137,7 +5138,7 @@
                   <a:srgbClr val="9E9E9E"/>
                 </a:solidFill>
               </a:rPr>
-              <a:t>12 / 20</a:t>
+              <a:t>12 / 21</a:t>
             </a:r>
           </a:p>
         </p:txBody>
@@ -5695,7 +5696,7 @@
                   <a:srgbClr val="3F51B5"/>
                 </a:solidFill>
               </a:rPr>
-              <a:t>12.  개발 방식 — AI 워크플로우</a:t>
+              <a:t>12.  향후 계획 — 지속적 기술 습득</a:t>
             </a:r>
           </a:p>
         </p:txBody>
@@ -5729,7 +5730,7 @@
                   <a:srgbClr val="9E9E9E"/>
                 </a:solidFill>
               </a:rPr>
-              <a:t>주성현  (1/2)</a:t>
+              <a:t>실시간 주가 자동 조회 API 도입 예정</a:t>
             </a:r>
           </a:p>
         </p:txBody>
@@ -5806,7 +5807,7 @@
                   <a:srgbClr val="9E9E9E"/>
                 </a:solidFill>
               </a:rPr>
-              <a:t>13 / 20</a:t>
+              <a:t>13 / 21</a:t>
             </a:r>
           </a:p>
         </p:txBody>
@@ -5819,8 +5820,8 @@
         </p:nvSpPr>
         <p:spPr>
           <a:xfrm>
-            <a:off x="457200" y="914400"/>
-            <a:ext cx="11247120" cy="1691640"/>
+            <a:off x="457200" y="1051560"/>
+            <a:ext cx="11247120" cy="1417320"/>
           </a:xfrm>
           <a:prstGeom prst="rect">
             <a:avLst/>
@@ -5862,8 +5863,51 @@
         </p:nvSpPr>
         <p:spPr>
           <a:xfrm>
-            <a:off x="457200" y="914400"/>
-            <a:ext cx="11247120" cy="402336"/>
+            <a:off x="457200" y="1051560"/>
+            <a:ext cx="54864" cy="1417320"/>
+          </a:xfrm>
+          <a:prstGeom prst="rect">
+            <a:avLst/>
+          </a:prstGeom>
+          <a:solidFill>
+            <a:srgbClr val="3F51B5"/>
+          </a:solidFill>
+          <a:ln>
+            <a:noFill/>
+          </a:ln>
+        </p:spPr>
+        <p:style>
+          <a:lnRef idx="1">
+            <a:schemeClr val="accent1"/>
+          </a:lnRef>
+          <a:fillRef idx="3">
+            <a:schemeClr val="accent1"/>
+          </a:fillRef>
+          <a:effectRef idx="2">
+            <a:schemeClr val="accent1"/>
+          </a:effectRef>
+          <a:fontRef idx="minor">
+            <a:schemeClr val="lt1"/>
+          </a:fontRef>
+        </p:style>
+        <p:txBody>
+          <a:bodyPr rtlCol="0" anchor="ctr"/>
+          <a:lstStyle/>
+          <a:p>
+            <a:pPr algn="ctr"/>
+          </a:p>
+        </p:txBody>
+      </p:sp>
+      <p:sp>
+        <p:nvSpPr>
+          <p:cNvPr id="9" name="Rectangle 8"/>
+          <p:cNvSpPr/>
+          <p:nvPr/>
+        </p:nvSpPr>
+        <p:spPr>
+          <a:xfrm>
+            <a:off x="457200" y="1051560"/>
+            <a:ext cx="11247120" cy="438912"/>
           </a:xfrm>
           <a:prstGeom prst="rect">
             <a:avLst/>
@@ -5899,23 +5943,92 @@
       </p:sp>
       <p:sp>
         <p:nvSpPr>
-          <p:cNvPr id="9" name="Rectangle 8"/>
+          <p:cNvPr id="10" name="TextBox 9"/>
+          <p:cNvSpPr txBox="1"/>
+          <p:nvPr/>
+        </p:nvSpPr>
+        <p:spPr>
+          <a:xfrm>
+            <a:off x="658368" y="1143000"/>
+            <a:ext cx="10972800" cy="274320"/>
+          </a:xfrm>
+          <a:prstGeom prst="rect">
+            <a:avLst/>
+          </a:prstGeom>
+          <a:noFill/>
+        </p:spPr>
+        <p:txBody>
+          <a:bodyPr wrap="square">
+            <a:spAutoFit/>
+          </a:bodyPr>
+          <a:lstStyle/>
+          <a:p>
+            <a:pPr algn="l"/>
+            <a:r>
+              <a:rPr sz="1300" b="1">
+                <a:solidFill>
+                  <a:srgbClr val="3F51B5"/>
+                </a:solidFill>
+              </a:rPr>
+              <a:t>현재 한계</a:t>
+            </a:r>
+          </a:p>
+        </p:txBody>
+      </p:sp>
+      <p:sp>
+        <p:nvSpPr>
+          <p:cNvPr id="11" name="TextBox 10"/>
+          <p:cNvSpPr txBox="1"/>
+          <p:nvPr/>
+        </p:nvSpPr>
+        <p:spPr>
+          <a:xfrm>
+            <a:off x="658368" y="1563624"/>
+            <a:ext cx="10789920" cy="804672"/>
+          </a:xfrm>
+          <a:prstGeom prst="rect">
+            <a:avLst/>
+          </a:prstGeom>
+          <a:noFill/>
+        </p:spPr>
+        <p:txBody>
+          <a:bodyPr wrap="square">
+            <a:spAutoFit/>
+          </a:bodyPr>
+          <a:lstStyle/>
+          <a:p>
+            <a:pPr algn="l"/>
+            <a:r>
+              <a:rPr sz="1200" b="0">
+                <a:solidFill>
+                  <a:srgbClr val="212121"/>
+                </a:solidFill>
+              </a:rPr>
+              <a:t>포지션 등록 시 진입가·현재가를 사용자가 직접 입력해야 함
+수동 입력 → 오타·오류 가능성 / 실시간 시세 반영 불가</a:t>
+            </a:r>
+          </a:p>
+        </p:txBody>
+      </p:sp>
+      <p:sp>
+        <p:nvSpPr>
+          <p:cNvPr id="12" name="Rectangle 11"/>
           <p:cNvSpPr/>
           <p:nvPr/>
         </p:nvSpPr>
         <p:spPr>
           <a:xfrm>
-            <a:off x="457200" y="914400"/>
-            <a:ext cx="1463040" cy="402336"/>
-          </a:xfrm>
-          <a:prstGeom prst="rect">
-            <a:avLst/>
-          </a:prstGeom>
-          <a:solidFill>
-            <a:srgbClr val="E65C00"/>
-          </a:solidFill>
-          <a:ln>
-            <a:noFill/>
+            <a:off x="457200" y="2715768"/>
+            <a:ext cx="11247120" cy="1417320"/>
+          </a:xfrm>
+          <a:prstGeom prst="rect">
+            <a:avLst/>
+          </a:prstGeom>
+          <a:noFill/>
+          <a:ln w="10160">
+            <a:solidFill>
+              <a:srgbClr val="E0E0E0"/>
+            </a:solidFill>
           </a:ln>
         </p:spPr>
         <p:style>
@@ -5942,127 +6055,23 @@
       </p:sp>
       <p:sp>
         <p:nvSpPr>
-          <p:cNvPr id="10" name="TextBox 9"/>
-          <p:cNvSpPr txBox="1"/>
-          <p:nvPr/>
-        </p:nvSpPr>
-        <p:spPr>
-          <a:xfrm>
-            <a:off x="457200" y="914400"/>
-            <a:ext cx="1463040" cy="402336"/>
-          </a:xfrm>
-          <a:prstGeom prst="rect">
-            <a:avLst/>
-          </a:prstGeom>
-          <a:noFill/>
-        </p:spPr>
-        <p:txBody>
-          <a:bodyPr wrap="square">
-            <a:spAutoFit/>
-          </a:bodyPr>
-          <a:lstStyle/>
-          <a:p>
-            <a:pPr algn="ctr"/>
-            <a:r>
-              <a:rPr sz="1100" b="1">
-                <a:solidFill>
-                  <a:srgbClr val="FFFFFF"/>
-                </a:solidFill>
-              </a:rPr>
-              <a:t>AI 워크플로우
-활용  +1</a:t>
-            </a:r>
-          </a:p>
-        </p:txBody>
-      </p:sp>
-      <p:sp>
-        <p:nvSpPr>
-          <p:cNvPr id="11" name="TextBox 10"/>
-          <p:cNvSpPr txBox="1"/>
-          <p:nvPr/>
-        </p:nvSpPr>
-        <p:spPr>
-          <a:xfrm>
-            <a:off x="2057400" y="978408"/>
-            <a:ext cx="9509760" cy="274320"/>
-          </a:xfrm>
-          <a:prstGeom prst="rect">
-            <a:avLst/>
-          </a:prstGeom>
-          <a:noFill/>
-        </p:spPr>
-        <p:txBody>
-          <a:bodyPr wrap="square">
-            <a:spAutoFit/>
-          </a:bodyPr>
-          <a:lstStyle/>
-          <a:p>
-            <a:pPr algn="l"/>
-            <a:r>
-              <a:rPr sz="1200" b="1">
-                <a:solidFill>
-                  <a:srgbClr val="3F51B5"/>
-                </a:solidFill>
-              </a:rPr>
-              <a:t>feature-debugger 에이전트 직접 제작 + /dg 실사용</a:t>
-            </a:r>
-          </a:p>
-        </p:txBody>
-      </p:sp>
-      <p:sp>
-        <p:nvSpPr>
-          <p:cNvPr id="12" name="TextBox 11"/>
-          <p:cNvSpPr txBox="1"/>
-          <p:nvPr/>
-        </p:nvSpPr>
-        <p:spPr>
-          <a:xfrm>
-            <a:off x="658368" y="1389888"/>
-            <a:ext cx="10789920" cy="1161288"/>
-          </a:xfrm>
-          <a:prstGeom prst="rect">
-            <a:avLst/>
-          </a:prstGeom>
-          <a:noFill/>
-        </p:spPr>
-        <p:txBody>
-          <a:bodyPr wrap="square">
-            <a:spAutoFit/>
-          </a:bodyPr>
-          <a:lstStyle/>
-          <a:p>
-            <a:pPr algn="l"/>
-            <a:r>
-              <a:rPr sz="1050" b="0">
-                <a:solidFill>
-                  <a:srgbClr val="212121"/>
-                </a:solidFill>
-              </a:rPr>
-              <a:t>.claude/agents/feature-debugger.md  직접 제작
-앱 기능 6개 영역(인증 · 계좌 · 포지션 · 차트 · 대시보드 · Firebase)을 /dg 명령어 하나로 반복 점검 수행</a:t>
-            </a:r>
-          </a:p>
-        </p:txBody>
-      </p:sp>
-      <p:sp>
-        <p:nvSpPr>
           <p:cNvPr id="13" name="Rectangle 12"/>
           <p:cNvSpPr/>
           <p:nvPr/>
         </p:nvSpPr>
         <p:spPr>
           <a:xfrm>
-            <a:off x="457200" y="2743200"/>
-            <a:ext cx="11247120" cy="1691640"/>
-          </a:xfrm>
-          <a:prstGeom prst="rect">
-            <a:avLst/>
-          </a:prstGeom>
-          <a:noFill/>
-          <a:ln w="10160">
-            <a:solidFill>
-              <a:srgbClr val="E0E0E0"/>
-            </a:solidFill>
+            <a:off x="457200" y="2715768"/>
+            <a:ext cx="54864" cy="1417320"/>
+          </a:xfrm>
+          <a:prstGeom prst="rect">
+            <a:avLst/>
+          </a:prstGeom>
+          <a:solidFill>
+            <a:srgbClr val="3F51B5"/>
+          </a:solidFill>
+          <a:ln>
+            <a:noFill/>
           </a:ln>
         </p:spPr>
         <p:style>
@@ -6095,8 +6104,8 @@
         </p:nvSpPr>
         <p:spPr>
           <a:xfrm>
-            <a:off x="457200" y="2743200"/>
-            <a:ext cx="11247120" cy="402336"/>
+            <a:off x="457200" y="2715768"/>
+            <a:ext cx="11247120" cy="438912"/>
           </a:xfrm>
           <a:prstGeom prst="rect">
             <a:avLst/>
@@ -6132,14 +6141,126 @@
       </p:sp>
       <p:sp>
         <p:nvSpPr>
-          <p:cNvPr id="15" name="Rectangle 14"/>
+          <p:cNvPr id="15" name="TextBox 14"/>
+          <p:cNvSpPr txBox="1"/>
+          <p:nvPr/>
+        </p:nvSpPr>
+        <p:spPr>
+          <a:xfrm>
+            <a:off x="658368" y="2807208"/>
+            <a:ext cx="10972800" cy="274320"/>
+          </a:xfrm>
+          <a:prstGeom prst="rect">
+            <a:avLst/>
+          </a:prstGeom>
+          <a:noFill/>
+        </p:spPr>
+        <p:txBody>
+          <a:bodyPr wrap="square">
+            <a:spAutoFit/>
+          </a:bodyPr>
+          <a:lstStyle/>
+          <a:p>
+            <a:pPr algn="l"/>
+            <a:r>
+              <a:rPr sz="1300" b="1">
+                <a:solidFill>
+                  <a:srgbClr val="3F51B5"/>
+                </a:solidFill>
+              </a:rPr>
+              <a:t>도입 예정 기술</a:t>
+            </a:r>
+          </a:p>
+        </p:txBody>
+      </p:sp>
+      <p:sp>
+        <p:nvSpPr>
+          <p:cNvPr id="16" name="TextBox 15"/>
+          <p:cNvSpPr txBox="1"/>
+          <p:nvPr/>
+        </p:nvSpPr>
+        <p:spPr>
+          <a:xfrm>
+            <a:off x="658368" y="3227832"/>
+            <a:ext cx="10789920" cy="804672"/>
+          </a:xfrm>
+          <a:prstGeom prst="rect">
+            <a:avLst/>
+          </a:prstGeom>
+          <a:noFill/>
+        </p:spPr>
+        <p:txBody>
+          <a:bodyPr wrap="square">
+            <a:spAutoFit/>
+          </a:bodyPr>
+          <a:lstStyle/>
+          <a:p>
+            <a:pPr algn="l"/>
+            <a:r>
+              <a:rPr sz="1200" b="0">
+                <a:solidFill>
+                  <a:srgbClr val="212121"/>
+                </a:solidFill>
+              </a:rPr>
+              <a:t>Yahoo Finance API (무료) 또는 한국투자증권 Open API 연동
+종목명 입력 시 현재가 자동 조회 → 포지션 등록 화면에 자동 채움</a:t>
+            </a:r>
+          </a:p>
+        </p:txBody>
+      </p:sp>
+      <p:sp>
+        <p:nvSpPr>
+          <p:cNvPr id="17" name="Rectangle 16"/>
           <p:cNvSpPr/>
           <p:nvPr/>
         </p:nvSpPr>
         <p:spPr>
           <a:xfrm>
-            <a:off x="457200" y="2743200"/>
-            <a:ext cx="1463040" cy="402336"/>
+            <a:off x="457200" y="4379976"/>
+            <a:ext cx="11247120" cy="1417320"/>
+          </a:xfrm>
+          <a:prstGeom prst="rect">
+            <a:avLst/>
+          </a:prstGeom>
+          <a:noFill/>
+          <a:ln w="10160">
+            <a:solidFill>
+              <a:srgbClr val="E0E0E0"/>
+            </a:solidFill>
+          </a:ln>
+        </p:spPr>
+        <p:style>
+          <a:lnRef idx="1">
+            <a:schemeClr val="accent1"/>
+          </a:lnRef>
+          <a:fillRef idx="3">
+            <a:schemeClr val="accent1"/>
+          </a:fillRef>
+          <a:effectRef idx="2">
+            <a:schemeClr val="accent1"/>
+          </a:effectRef>
+          <a:fontRef idx="minor">
+            <a:schemeClr val="lt1"/>
+          </a:fontRef>
+        </p:style>
+        <p:txBody>
+          <a:bodyPr rtlCol="0" anchor="ctr"/>
+          <a:lstStyle/>
+          <a:p>
+            <a:pPr algn="ctr"/>
+          </a:p>
+        </p:txBody>
+      </p:sp>
+      <p:sp>
+        <p:nvSpPr>
+          <p:cNvPr id="18" name="Rectangle 17"/>
+          <p:cNvSpPr/>
+          <p:nvPr/>
+        </p:nvSpPr>
+        <p:spPr>
+          <a:xfrm>
+            <a:off x="457200" y="4379976"/>
+            <a:ext cx="54864" cy="1417320"/>
           </a:xfrm>
           <a:prstGeom prst="rect">
             <a:avLst/>
@@ -6175,161 +6296,14 @@
       </p:sp>
       <p:sp>
         <p:nvSpPr>
-          <p:cNvPr id="16" name="TextBox 15"/>
-          <p:cNvSpPr txBox="1"/>
-          <p:nvPr/>
-        </p:nvSpPr>
-        <p:spPr>
-          <a:xfrm>
-            <a:off x="457200" y="2743200"/>
-            <a:ext cx="1463040" cy="402336"/>
-          </a:xfrm>
-          <a:prstGeom prst="rect">
-            <a:avLst/>
-          </a:prstGeom>
-          <a:noFill/>
-        </p:spPr>
-        <p:txBody>
-          <a:bodyPr wrap="square">
-            <a:spAutoFit/>
-          </a:bodyPr>
-          <a:lstStyle/>
-          <a:p>
-            <a:pPr algn="ctr"/>
-            <a:r>
-              <a:rPr sz="1100" b="1">
-                <a:solidFill>
-                  <a:srgbClr val="FFFFFF"/>
-                </a:solidFill>
-              </a:rPr>
-              <a:t>본인 기법
-구성  +2</a:t>
-            </a:r>
-          </a:p>
-        </p:txBody>
-      </p:sp>
-      <p:sp>
-        <p:nvSpPr>
-          <p:cNvPr id="17" name="TextBox 16"/>
-          <p:cNvSpPr txBox="1"/>
-          <p:nvPr/>
-        </p:nvSpPr>
-        <p:spPr>
-          <a:xfrm>
-            <a:off x="2057400" y="2807208"/>
-            <a:ext cx="9509760" cy="274320"/>
-          </a:xfrm>
-          <a:prstGeom prst="rect">
-            <a:avLst/>
-          </a:prstGeom>
-          <a:noFill/>
-        </p:spPr>
-        <p:txBody>
-          <a:bodyPr wrap="square">
-            <a:spAutoFit/>
-          </a:bodyPr>
-          <a:lstStyle/>
-          <a:p>
-            <a:pPr algn="l"/>
-            <a:r>
-              <a:rPr sz="1200" b="1">
-                <a:solidFill>
-                  <a:srgbClr val="3F51B5"/>
-                </a:solidFill>
-              </a:rPr>
-              <a:t>기법 1  —  단일 md 부트스트랩  (AUTHORING.Jooseonghyeon.v0.1.0.md)</a:t>
-            </a:r>
-          </a:p>
-        </p:txBody>
-      </p:sp>
-      <p:sp>
-        <p:nvSpPr>
-          <p:cNvPr id="18" name="TextBox 17"/>
-          <p:cNvSpPr txBox="1"/>
-          <p:nvPr/>
-        </p:nvSpPr>
-        <p:spPr>
-          <a:xfrm>
-            <a:off x="658368" y="3218688"/>
-            <a:ext cx="10789920" cy="1161288"/>
-          </a:xfrm>
-          <a:prstGeom prst="rect">
-            <a:avLst/>
-          </a:prstGeom>
-          <a:noFill/>
-        </p:spPr>
-        <p:txBody>
-          <a:bodyPr wrap="square">
-            <a:spAutoFit/>
-          </a:bodyPr>
-          <a:lstStyle/>
-          <a:p>
-            <a:pPr algn="l"/>
-            <a:r>
-              <a:rPr sz="1050" b="0">
-                <a:solidFill>
-                  <a:srgbClr val="212121"/>
-                </a:solidFill>
-              </a:rPr>
-              <a:t>Rules · Skills · Commands 전체를 파일 하나로 자동 세팅
-새 프로젝트에 이 파일 하나만 주면 AI 운영 체계 즉시 구성</a:t>
-            </a:r>
-          </a:p>
-        </p:txBody>
-      </p:sp>
-      <p:sp>
-        <p:nvSpPr>
           <p:cNvPr id="19" name="Rectangle 18"/>
           <p:cNvSpPr/>
           <p:nvPr/>
         </p:nvSpPr>
         <p:spPr>
           <a:xfrm>
-            <a:off x="457200" y="4572000"/>
-            <a:ext cx="11247120" cy="1691640"/>
-          </a:xfrm>
-          <a:prstGeom prst="rect">
-            <a:avLst/>
-          </a:prstGeom>
-          <a:noFill/>
-          <a:ln w="10160">
-            <a:solidFill>
-              <a:srgbClr val="E0E0E0"/>
-            </a:solidFill>
-          </a:ln>
-        </p:spPr>
-        <p:style>
-          <a:lnRef idx="1">
-            <a:schemeClr val="accent1"/>
-          </a:lnRef>
-          <a:fillRef idx="3">
-            <a:schemeClr val="accent1"/>
-          </a:fillRef>
-          <a:effectRef idx="2">
-            <a:schemeClr val="accent1"/>
-          </a:effectRef>
-          <a:fontRef idx="minor">
-            <a:schemeClr val="lt1"/>
-          </a:fontRef>
-        </p:style>
-        <p:txBody>
-          <a:bodyPr rtlCol="0" anchor="ctr"/>
-          <a:lstStyle/>
-          <a:p>
-            <a:pPr algn="ctr"/>
-          </a:p>
-        </p:txBody>
-      </p:sp>
-      <p:sp>
-        <p:nvSpPr>
-          <p:cNvPr id="20" name="Rectangle 19"/>
-          <p:cNvSpPr/>
-          <p:nvPr/>
-        </p:nvSpPr>
-        <p:spPr>
-          <a:xfrm>
-            <a:off x="457200" y="4572000"/>
-            <a:ext cx="11247120" cy="402336"/>
+            <a:off x="457200" y="4379976"/>
+            <a:ext cx="11247120" cy="438912"/>
           </a:xfrm>
           <a:prstGeom prst="rect">
             <a:avLst/>
@@ -6365,23 +6339,94 @@
       </p:sp>
       <p:sp>
         <p:nvSpPr>
-          <p:cNvPr id="21" name="Rectangle 20"/>
+          <p:cNvPr id="20" name="TextBox 19"/>
+          <p:cNvSpPr txBox="1"/>
+          <p:nvPr/>
+        </p:nvSpPr>
+        <p:spPr>
+          <a:xfrm>
+            <a:off x="658368" y="4471416"/>
+            <a:ext cx="10972800" cy="274320"/>
+          </a:xfrm>
+          <a:prstGeom prst="rect">
+            <a:avLst/>
+          </a:prstGeom>
+          <a:noFill/>
+        </p:spPr>
+        <p:txBody>
+          <a:bodyPr wrap="square">
+            <a:spAutoFit/>
+          </a:bodyPr>
+          <a:lstStyle/>
+          <a:p>
+            <a:pPr algn="l"/>
+            <a:r>
+              <a:rPr sz="1300" b="1">
+                <a:solidFill>
+                  <a:srgbClr val="3F51B5"/>
+                </a:solidFill>
+              </a:rPr>
+              <a:t>학습 계획</a:t>
+            </a:r>
+          </a:p>
+        </p:txBody>
+      </p:sp>
+      <p:sp>
+        <p:nvSpPr>
+          <p:cNvPr id="21" name="TextBox 20"/>
+          <p:cNvSpPr txBox="1"/>
+          <p:nvPr/>
+        </p:nvSpPr>
+        <p:spPr>
+          <a:xfrm>
+            <a:off x="658368" y="4892040"/>
+            <a:ext cx="10789920" cy="804672"/>
+          </a:xfrm>
+          <a:prstGeom prst="rect">
+            <a:avLst/>
+          </a:prstGeom>
+          <a:noFill/>
+        </p:spPr>
+        <p:txBody>
+          <a:bodyPr wrap="square">
+            <a:spAutoFit/>
+          </a:bodyPr>
+          <a:lstStyle/>
+          <a:p>
+            <a:pPr algn="l"/>
+            <a:r>
+              <a:rPr sz="1200" b="0">
+                <a:solidFill>
+                  <a:srgbClr val="212121"/>
+                </a:solidFill>
+              </a:rPr>
+              <a:t>Flutter에서 REST API 비동기 호출 (http 패키지 · async/await 심화)
+API 키 보안 관리 (환경변수·flutter_dotenv) · JSON 파싱 처리</a:t>
+            </a:r>
+          </a:p>
+        </p:txBody>
+      </p:sp>
+      <p:sp>
+        <p:nvSpPr>
+          <p:cNvPr id="22" name="Rectangle 21"/>
           <p:cNvSpPr/>
           <p:nvPr/>
         </p:nvSpPr>
         <p:spPr>
           <a:xfrm>
-            <a:off x="457200" y="4572000"/>
-            <a:ext cx="1463040" cy="402336"/>
+            <a:off x="457200" y="6080760"/>
+            <a:ext cx="11247120" cy="502920"/>
           </a:xfrm>
           <a:prstGeom prst="rect">
             <a:avLst/>
           </a:prstGeom>
           <a:solidFill>
-            <a:srgbClr val="3F51B5"/>
+            <a:srgbClr val="E8EAF6"/>
           </a:solidFill>
-          <a:ln>
-            <a:noFill/>
+          <a:ln w="10160">
+            <a:solidFill>
+              <a:srgbClr val="E0E0E0"/>
+            </a:solidFill>
           </a:ln>
         </p:spPr>
         <p:style>
@@ -6408,49 +6453,14 @@
       </p:sp>
       <p:sp>
         <p:nvSpPr>
-          <p:cNvPr id="22" name="TextBox 21"/>
-          <p:cNvSpPr txBox="1"/>
-          <p:nvPr/>
-        </p:nvSpPr>
-        <p:spPr>
-          <a:xfrm>
-            <a:off x="457200" y="4572000"/>
-            <a:ext cx="1463040" cy="402336"/>
-          </a:xfrm>
-          <a:prstGeom prst="rect">
-            <a:avLst/>
-          </a:prstGeom>
-          <a:noFill/>
-        </p:spPr>
-        <p:txBody>
-          <a:bodyPr wrap="square">
-            <a:spAutoFit/>
-          </a:bodyPr>
-          <a:lstStyle/>
-          <a:p>
-            <a:pPr algn="ctr"/>
-            <a:r>
-              <a:rPr sz="1100" b="1">
-                <a:solidFill>
-                  <a:srgbClr val="FFFFFF"/>
-                </a:solidFill>
-              </a:rPr>
-              <a:t>본인 기법
-구성  +2</a:t>
-            </a:r>
-          </a:p>
-        </p:txBody>
-      </p:sp>
-      <p:sp>
-        <p:nvSpPr>
           <p:cNvPr id="23" name="TextBox 22"/>
           <p:cNvSpPr txBox="1"/>
           <p:nvPr/>
         </p:nvSpPr>
         <p:spPr>
           <a:xfrm>
-            <a:off x="2057400" y="4636008"/>
-            <a:ext cx="9509760" cy="274320"/>
+            <a:off x="658368" y="6172200"/>
+            <a:ext cx="10972800" cy="320040"/>
           </a:xfrm>
           <a:prstGeom prst="rect">
             <a:avLst/>
@@ -6470,42 +6480,7 @@
                   <a:srgbClr val="3F51B5"/>
                 </a:solidFill>
               </a:rPr>
-              <a:t>기법 3  —  단계별 개발 계획 · 진행</a:t>
-            </a:r>
-          </a:p>
-        </p:txBody>
-      </p:sp>
-      <p:sp>
-        <p:nvSpPr>
-          <p:cNvPr id="24" name="TextBox 23"/>
-          <p:cNvSpPr txBox="1"/>
-          <p:nvPr/>
-        </p:nvSpPr>
-        <p:spPr>
-          <a:xfrm>
-            <a:off x="658368" y="5047488"/>
-            <a:ext cx="10789920" cy="1161288"/>
-          </a:xfrm>
-          <a:prstGeom prst="rect">
-            <a:avLst/>
-          </a:prstGeom>
-          <a:noFill/>
-        </p:spPr>
-        <p:txBody>
-          <a:bodyPr wrap="square">
-            <a:spAutoFit/>
-          </a:bodyPr>
-          <a:lstStyle/>
-          <a:p>
-            <a:pPr algn="l"/>
-            <a:r>
-              <a:rPr sz="1050" b="0">
-                <a:solidFill>
-                  <a:srgbClr val="212121"/>
-                </a:solidFill>
-              </a:rPr>
-              <a:t>개발 전 단계별 계획 수립 → AI 구현 → 직접 점검 · 이해 → 다음 단계 진행
-AI 의존 개발에서 코드 이해도를 유지하기 위한 개인 워크플로우</a:t>
+              <a:t>"외부 API 연동과 보안 관리를 새로 학습해 적용할 예정입니다."</a:t>
             </a:r>
           </a:p>
         </p:txBody>
@@ -6632,7 +6607,7 @@
                   <a:srgbClr val="9E9E9E"/>
                 </a:solidFill>
               </a:rPr>
-              <a:t>주성현  (2/2)</a:t>
+              <a:t>주성현  (1/2)</a:t>
             </a:r>
           </a:p>
         </p:txBody>
@@ -6709,7 +6684,7 @@
                   <a:srgbClr val="9E9E9E"/>
                 </a:solidFill>
               </a:rPr>
-              <a:t>14 / 20</a:t>
+              <a:t>14 / 21</a:t>
             </a:r>
           </a:p>
         </p:txBody>
@@ -6722,8 +6697,8 @@
         </p:nvSpPr>
         <p:spPr>
           <a:xfrm>
-            <a:off x="457200" y="822960"/>
-            <a:ext cx="11247120" cy="2468880"/>
+            <a:off x="457200" y="914400"/>
+            <a:ext cx="11247120" cy="1691640"/>
           </a:xfrm>
           <a:prstGeom prst="rect">
             <a:avLst/>
@@ -6765,7 +6740,7 @@
         </p:nvSpPr>
         <p:spPr>
           <a:xfrm>
-            <a:off x="457200" y="822960"/>
+            <a:off x="457200" y="914400"/>
             <a:ext cx="11247120" cy="402336"/>
           </a:xfrm>
           <a:prstGeom prst="rect">
@@ -6808,14 +6783,14 @@
         </p:nvSpPr>
         <p:spPr>
           <a:xfrm>
-            <a:off x="457200" y="822960"/>
+            <a:off x="457200" y="914400"/>
             <a:ext cx="1463040" cy="402336"/>
           </a:xfrm>
           <a:prstGeom prst="rect">
             <a:avLst/>
           </a:prstGeom>
           <a:solidFill>
-            <a:srgbClr val="2E7D32"/>
+            <a:srgbClr val="E65C00"/>
           </a:solidFill>
           <a:ln>
             <a:noFill/>
@@ -6851,7 +6826,7 @@
         </p:nvSpPr>
         <p:spPr>
           <a:xfrm>
-            <a:off x="457200" y="822960"/>
+            <a:off x="457200" y="914400"/>
             <a:ext cx="1463040" cy="402336"/>
           </a:xfrm>
           <a:prstGeom prst="rect">
@@ -6872,8 +6847,8 @@
                   <a:srgbClr val="FFFFFF"/>
                 </a:solidFill>
               </a:rPr>
-              <a:t>LLM Wiki
-암묵지  +1</a:t>
+              <a:t>AI 워크플로우
+활용  +1</a:t>
             </a:r>
           </a:p>
         </p:txBody>
@@ -6886,7 +6861,7 @@
         </p:nvSpPr>
         <p:spPr>
           <a:xfrm>
-            <a:off x="2057400" y="886968"/>
+            <a:off x="2057400" y="978408"/>
             <a:ext cx="9509760" cy="274320"/>
           </a:xfrm>
           <a:prstGeom prst="rect">
@@ -6907,7 +6882,7 @@
                   <a:srgbClr val="3F51B5"/>
                 </a:solidFill>
               </a:rPr>
-              <a:t>LLM Wiki  —  암묵지 운영  (notes/llm-wiki.md · 11개 항목)</a:t>
+              <a:t>feature-debugger 에이전트 직접 제작 + /dg 실사용</a:t>
             </a:r>
           </a:p>
         </p:txBody>
@@ -6920,8 +6895,8 @@
         </p:nvSpPr>
         <p:spPr>
           <a:xfrm>
-            <a:off x="658368" y="1298448"/>
-            <a:ext cx="10789920" cy="1938528"/>
+            <a:off x="658368" y="1389888"/>
+            <a:ext cx="10789920" cy="1161288"/>
           </a:xfrm>
           <a:prstGeom prst="rect">
             <a:avLst/>
@@ -6941,8 +6916,8 @@
                   <a:srgbClr val="212121"/>
                 </a:solidFill>
               </a:rPr>
-              <a:t>개발 중 배운 AI 사용 인사이트 직접 기록
-Flutter 실행 환경 / 에이전트 호출법 / ADR 개념 / python-pptx 단위 변환 등</a:t>
+              <a:t>.claude/agents/feature-debugger.md  직접 제작
+앱 기능 6개 영역(인증 · 계좌 · 포지션 · 차트 · 대시보드 · Firebase)을 /dg 명령어 하나로 반복 점검 수행</a:t>
             </a:r>
           </a:p>
         </p:txBody>
@@ -6955,8 +6930,8 @@
         </p:nvSpPr>
         <p:spPr>
           <a:xfrm>
-            <a:off x="457200" y="3520440"/>
-            <a:ext cx="11247120" cy="2468880"/>
+            <a:off x="457200" y="2743200"/>
+            <a:ext cx="11247120" cy="1691640"/>
           </a:xfrm>
           <a:prstGeom prst="rect">
             <a:avLst/>
@@ -6998,7 +6973,7 @@
         </p:nvSpPr>
         <p:spPr>
           <a:xfrm>
-            <a:off x="457200" y="3520440"/>
+            <a:off x="457200" y="2743200"/>
             <a:ext cx="11247120" cy="402336"/>
           </a:xfrm>
           <a:prstGeom prst="rect">
@@ -7041,14 +7016,14 @@
         </p:nvSpPr>
         <p:spPr>
           <a:xfrm>
-            <a:off x="457200" y="3520440"/>
+            <a:off x="457200" y="2743200"/>
             <a:ext cx="1463040" cy="402336"/>
           </a:xfrm>
           <a:prstGeom prst="rect">
             <a:avLst/>
           </a:prstGeom>
           <a:solidFill>
-            <a:srgbClr val="6A1B9A"/>
+            <a:srgbClr val="3F51B5"/>
           </a:solidFill>
           <a:ln>
             <a:noFill/>
@@ -7084,7 +7059,7 @@
         </p:nvSpPr>
         <p:spPr>
           <a:xfrm>
-            <a:off x="457200" y="3520440"/>
+            <a:off x="457200" y="2743200"/>
             <a:ext cx="1463040" cy="402336"/>
           </a:xfrm>
           <a:prstGeom prst="rect">
@@ -7105,8 +7080,8 @@
                   <a:srgbClr val="FFFFFF"/>
                 </a:solidFill>
               </a:rPr>
-              <a:t>AI 리포트
-발표  +2</a:t>
+              <a:t>본인 기법
+구성  +2</a:t>
             </a:r>
           </a:p>
         </p:txBody>
@@ -7119,7 +7094,7 @@
         </p:nvSpPr>
         <p:spPr>
           <a:xfrm>
-            <a:off x="2057400" y="3584448"/>
+            <a:off x="2057400" y="2807208"/>
             <a:ext cx="9509760" cy="274320"/>
           </a:xfrm>
           <a:prstGeom prst="rect">
@@ -7140,7 +7115,7 @@
                   <a:srgbClr val="3F51B5"/>
                 </a:solidFill>
               </a:rPr>
-              <a:t>AI Agent 리포트  —  Claude Code 활용 사례 발표</a:t>
+              <a:t>기법 1  —  단일 md 부트스트랩  (AUTHORING.Jooseonghyeon.v0.1.0.md)</a:t>
             </a:r>
           </a:p>
         </p:txBody>
@@ -7153,8 +7128,8 @@
         </p:nvSpPr>
         <p:spPr>
           <a:xfrm>
-            <a:off x="658368" y="3995928"/>
-            <a:ext cx="10789920" cy="1938528"/>
+            <a:off x="658368" y="3218688"/>
+            <a:ext cx="10789920" cy="1161288"/>
           </a:xfrm>
           <a:prstGeom prst="rect">
             <a:avLst/>
@@ -7174,8 +7149,241 @@
                   <a:srgbClr val="212121"/>
                 </a:solidFill>
               </a:rPr>
-              <a:t>Claude Code(Anthropic, 2024~)로 서브에이전트 제작 · 커스텀 명령어 운영 · 단계별 개발 수행
-최근 6개월 이내 지속 업데이트 도구 · 출처: claude.ai/code  (공식 문서)</a:t>
+              <a:t>Rules · Skills · Commands 전체를 파일 하나로 자동 세팅
+새 프로젝트에 이 파일 하나만 주면 AI 운영 체계 즉시 구성</a:t>
+            </a:r>
+          </a:p>
+        </p:txBody>
+      </p:sp>
+      <p:sp>
+        <p:nvSpPr>
+          <p:cNvPr id="19" name="Rectangle 18"/>
+          <p:cNvSpPr/>
+          <p:nvPr/>
+        </p:nvSpPr>
+        <p:spPr>
+          <a:xfrm>
+            <a:off x="457200" y="4572000"/>
+            <a:ext cx="11247120" cy="1691640"/>
+          </a:xfrm>
+          <a:prstGeom prst="rect">
+            <a:avLst/>
+          </a:prstGeom>
+          <a:noFill/>
+          <a:ln w="10160">
+            <a:solidFill>
+              <a:srgbClr val="E0E0E0"/>
+            </a:solidFill>
+          </a:ln>
+        </p:spPr>
+        <p:style>
+          <a:lnRef idx="1">
+            <a:schemeClr val="accent1"/>
+          </a:lnRef>
+          <a:fillRef idx="3">
+            <a:schemeClr val="accent1"/>
+          </a:fillRef>
+          <a:effectRef idx="2">
+            <a:schemeClr val="accent1"/>
+          </a:effectRef>
+          <a:fontRef idx="minor">
+            <a:schemeClr val="lt1"/>
+          </a:fontRef>
+        </p:style>
+        <p:txBody>
+          <a:bodyPr rtlCol="0" anchor="ctr"/>
+          <a:lstStyle/>
+          <a:p>
+            <a:pPr algn="ctr"/>
+          </a:p>
+        </p:txBody>
+      </p:sp>
+      <p:sp>
+        <p:nvSpPr>
+          <p:cNvPr id="20" name="Rectangle 19"/>
+          <p:cNvSpPr/>
+          <p:nvPr/>
+        </p:nvSpPr>
+        <p:spPr>
+          <a:xfrm>
+            <a:off x="457200" y="4572000"/>
+            <a:ext cx="11247120" cy="402336"/>
+          </a:xfrm>
+          <a:prstGeom prst="rect">
+            <a:avLst/>
+          </a:prstGeom>
+          <a:solidFill>
+            <a:srgbClr val="F5F5F5"/>
+          </a:solidFill>
+          <a:ln>
+            <a:noFill/>
+          </a:ln>
+        </p:spPr>
+        <p:style>
+          <a:lnRef idx="1">
+            <a:schemeClr val="accent1"/>
+          </a:lnRef>
+          <a:fillRef idx="3">
+            <a:schemeClr val="accent1"/>
+          </a:fillRef>
+          <a:effectRef idx="2">
+            <a:schemeClr val="accent1"/>
+          </a:effectRef>
+          <a:fontRef idx="minor">
+            <a:schemeClr val="lt1"/>
+          </a:fontRef>
+        </p:style>
+        <p:txBody>
+          <a:bodyPr rtlCol="0" anchor="ctr"/>
+          <a:lstStyle/>
+          <a:p>
+            <a:pPr algn="ctr"/>
+          </a:p>
+        </p:txBody>
+      </p:sp>
+      <p:sp>
+        <p:nvSpPr>
+          <p:cNvPr id="21" name="Rectangle 20"/>
+          <p:cNvSpPr/>
+          <p:nvPr/>
+        </p:nvSpPr>
+        <p:spPr>
+          <a:xfrm>
+            <a:off x="457200" y="4572000"/>
+            <a:ext cx="1463040" cy="402336"/>
+          </a:xfrm>
+          <a:prstGeom prst="rect">
+            <a:avLst/>
+          </a:prstGeom>
+          <a:solidFill>
+            <a:srgbClr val="3F51B5"/>
+          </a:solidFill>
+          <a:ln>
+            <a:noFill/>
+          </a:ln>
+        </p:spPr>
+        <p:style>
+          <a:lnRef idx="1">
+            <a:schemeClr val="accent1"/>
+          </a:lnRef>
+          <a:fillRef idx="3">
+            <a:schemeClr val="accent1"/>
+          </a:fillRef>
+          <a:effectRef idx="2">
+            <a:schemeClr val="accent1"/>
+          </a:effectRef>
+          <a:fontRef idx="minor">
+            <a:schemeClr val="lt1"/>
+          </a:fontRef>
+        </p:style>
+        <p:txBody>
+          <a:bodyPr rtlCol="0" anchor="ctr"/>
+          <a:lstStyle/>
+          <a:p>
+            <a:pPr algn="ctr"/>
+          </a:p>
+        </p:txBody>
+      </p:sp>
+      <p:sp>
+        <p:nvSpPr>
+          <p:cNvPr id="22" name="TextBox 21"/>
+          <p:cNvSpPr txBox="1"/>
+          <p:nvPr/>
+        </p:nvSpPr>
+        <p:spPr>
+          <a:xfrm>
+            <a:off x="457200" y="4572000"/>
+            <a:ext cx="1463040" cy="402336"/>
+          </a:xfrm>
+          <a:prstGeom prst="rect">
+            <a:avLst/>
+          </a:prstGeom>
+          <a:noFill/>
+        </p:spPr>
+        <p:txBody>
+          <a:bodyPr wrap="square">
+            <a:spAutoFit/>
+          </a:bodyPr>
+          <a:lstStyle/>
+          <a:p>
+            <a:pPr algn="ctr"/>
+            <a:r>
+              <a:rPr sz="1100" b="1">
+                <a:solidFill>
+                  <a:srgbClr val="FFFFFF"/>
+                </a:solidFill>
+              </a:rPr>
+              <a:t>본인 기법
+구성  +2</a:t>
+            </a:r>
+          </a:p>
+        </p:txBody>
+      </p:sp>
+      <p:sp>
+        <p:nvSpPr>
+          <p:cNvPr id="23" name="TextBox 22"/>
+          <p:cNvSpPr txBox="1"/>
+          <p:nvPr/>
+        </p:nvSpPr>
+        <p:spPr>
+          <a:xfrm>
+            <a:off x="2057400" y="4636008"/>
+            <a:ext cx="9509760" cy="274320"/>
+          </a:xfrm>
+          <a:prstGeom prst="rect">
+            <a:avLst/>
+          </a:prstGeom>
+          <a:noFill/>
+        </p:spPr>
+        <p:txBody>
+          <a:bodyPr wrap="square">
+            <a:spAutoFit/>
+          </a:bodyPr>
+          <a:lstStyle/>
+          <a:p>
+            <a:pPr algn="l"/>
+            <a:r>
+              <a:rPr sz="1200" b="1">
+                <a:solidFill>
+                  <a:srgbClr val="3F51B5"/>
+                </a:solidFill>
+              </a:rPr>
+              <a:t>기법 3  —  단계별 개발 계획 · 진행</a:t>
+            </a:r>
+          </a:p>
+        </p:txBody>
+      </p:sp>
+      <p:sp>
+        <p:nvSpPr>
+          <p:cNvPr id="24" name="TextBox 23"/>
+          <p:cNvSpPr txBox="1"/>
+          <p:nvPr/>
+        </p:nvSpPr>
+        <p:spPr>
+          <a:xfrm>
+            <a:off x="658368" y="5047488"/>
+            <a:ext cx="10789920" cy="1161288"/>
+          </a:xfrm>
+          <a:prstGeom prst="rect">
+            <a:avLst/>
+          </a:prstGeom>
+          <a:noFill/>
+        </p:spPr>
+        <p:txBody>
+          <a:bodyPr wrap="square">
+            <a:spAutoFit/>
+          </a:bodyPr>
+          <a:lstStyle/>
+          <a:p>
+            <a:pPr algn="l"/>
+            <a:r>
+              <a:rPr sz="1050" b="0">
+                <a:solidFill>
+                  <a:srgbClr val="212121"/>
+                </a:solidFill>
+              </a:rPr>
+              <a:t>개발 전 단계별 계획 수립 → AI 구현 → 직접 점검 · 이해 → 다음 단계 진행
+AI 의존 개발에서 코드 이해도를 유지하기 위한 개인 워크플로우</a:t>
             </a:r>
           </a:p>
         </p:txBody>
@@ -7302,7 +7510,7 @@
                   <a:srgbClr val="9E9E9E"/>
                 </a:solidFill>
               </a:rPr>
-              <a:t>정경우  (1/2)</a:t>
+              <a:t>주성현  (2/2)</a:t>
             </a:r>
           </a:p>
         </p:txBody>
@@ -7379,7 +7587,7 @@
                   <a:srgbClr val="9E9E9E"/>
                 </a:solidFill>
               </a:rPr>
-              <a:t>15 / 20</a:t>
+              <a:t>15 / 21</a:t>
             </a:r>
           </a:p>
         </p:txBody>
@@ -7392,8 +7600,8 @@
         </p:nvSpPr>
         <p:spPr>
           <a:xfrm>
-            <a:off x="457200" y="914400"/>
-            <a:ext cx="11247120" cy="1691640"/>
+            <a:off x="457200" y="822960"/>
+            <a:ext cx="11247120" cy="2468880"/>
           </a:xfrm>
           <a:prstGeom prst="rect">
             <a:avLst/>
@@ -7435,7 +7643,7 @@
         </p:nvSpPr>
         <p:spPr>
           <a:xfrm>
-            <a:off x="457200" y="914400"/>
+            <a:off x="457200" y="822960"/>
             <a:ext cx="11247120" cy="402336"/>
           </a:xfrm>
           <a:prstGeom prst="rect">
@@ -7478,14 +7686,14 @@
         </p:nvSpPr>
         <p:spPr>
           <a:xfrm>
-            <a:off x="457200" y="914400"/>
+            <a:off x="457200" y="822960"/>
             <a:ext cx="1463040" cy="402336"/>
           </a:xfrm>
           <a:prstGeom prst="rect">
             <a:avLst/>
           </a:prstGeom>
           <a:solidFill>
-            <a:srgbClr val="E65C00"/>
+            <a:srgbClr val="2E7D32"/>
           </a:solidFill>
           <a:ln>
             <a:noFill/>
@@ -7521,7 +7729,7 @@
         </p:nvSpPr>
         <p:spPr>
           <a:xfrm>
-            <a:off x="457200" y="914400"/>
+            <a:off x="457200" y="822960"/>
             <a:ext cx="1463040" cy="402336"/>
           </a:xfrm>
           <a:prstGeom prst="rect">
@@ -7542,8 +7750,8 @@
                   <a:srgbClr val="FFFFFF"/>
                 </a:solidFill>
               </a:rPr>
-              <a:t>AI 워크플로우
-활용  +1</a:t>
+              <a:t>LLM Wiki
+암묵지  +1</a:t>
             </a:r>
           </a:p>
         </p:txBody>
@@ -7556,7 +7764,7 @@
         </p:nvSpPr>
         <p:spPr>
           <a:xfrm>
-            <a:off x="2057400" y="978408"/>
+            <a:off x="2057400" y="886968"/>
             <a:ext cx="9509760" cy="274320"/>
           </a:xfrm>
           <a:prstGeom prst="rect">
@@ -7577,7 +7785,7 @@
                   <a:srgbClr val="3F51B5"/>
                 </a:solidFill>
               </a:rPr>
-              <a:t>pre-presentation-checker 에이전트 직접 제작 + /pc 실사용</a:t>
+              <a:t>LLM Wiki  —  암묵지 운영  (notes/llm-wiki.md · 11개 항목)</a:t>
             </a:r>
           </a:p>
         </p:txBody>
@@ -7590,8 +7798,8 @@
         </p:nvSpPr>
         <p:spPr>
           <a:xfrm>
-            <a:off x="658368" y="1389888"/>
-            <a:ext cx="10789920" cy="1161288"/>
+            <a:off x="658368" y="1298448"/>
+            <a:ext cx="10789920" cy="1938528"/>
           </a:xfrm>
           <a:prstGeom prst="rect">
             <a:avLst/>
@@ -7611,8 +7819,8 @@
                   <a:srgbClr val="212121"/>
                 </a:solidFill>
               </a:rPr>
-              <a:t>.claude/agents/pre-presentation-checker.md  직접 제작
-발표 전 제출 서류 · 가산점 · 앱 상태를 평가 루브릭 기준으로 자동 점검 → 미완료 항목 우선 보고</a:t>
+              <a:t>개발 중 배운 AI 사용 인사이트 직접 기록
+Flutter 실행 환경 / 에이전트 호출법 / ADR 개념 / python-pptx 단위 변환 등</a:t>
             </a:r>
           </a:p>
         </p:txBody>
@@ -7625,8 +7833,8 @@
         </p:nvSpPr>
         <p:spPr>
           <a:xfrm>
-            <a:off x="457200" y="2743200"/>
-            <a:ext cx="11247120" cy="1691640"/>
+            <a:off x="457200" y="3520440"/>
+            <a:ext cx="11247120" cy="2468880"/>
           </a:xfrm>
           <a:prstGeom prst="rect">
             <a:avLst/>
@@ -7668,7 +7876,7 @@
         </p:nvSpPr>
         <p:spPr>
           <a:xfrm>
-            <a:off x="457200" y="2743200"/>
+            <a:off x="457200" y="3520440"/>
             <a:ext cx="11247120" cy="402336"/>
           </a:xfrm>
           <a:prstGeom prst="rect">
@@ -7711,14 +7919,14 @@
         </p:nvSpPr>
         <p:spPr>
           <a:xfrm>
-            <a:off x="457200" y="2743200"/>
+            <a:off x="457200" y="3520440"/>
             <a:ext cx="1463040" cy="402336"/>
           </a:xfrm>
           <a:prstGeom prst="rect">
             <a:avLst/>
           </a:prstGeom>
           <a:solidFill>
-            <a:srgbClr val="3F51B5"/>
+            <a:srgbClr val="6A1B9A"/>
           </a:solidFill>
           <a:ln>
             <a:noFill/>
@@ -7754,7 +7962,7 @@
         </p:nvSpPr>
         <p:spPr>
           <a:xfrm>
-            <a:off x="457200" y="2743200"/>
+            <a:off x="457200" y="3520440"/>
             <a:ext cx="1463040" cy="402336"/>
           </a:xfrm>
           <a:prstGeom prst="rect">
@@ -7775,8 +7983,8 @@
                   <a:srgbClr val="FFFFFF"/>
                 </a:solidFill>
               </a:rPr>
-              <a:t>본인 기법
-구성  +2</a:t>
+              <a:t>AI 리포트
+발표  +2</a:t>
             </a:r>
           </a:p>
         </p:txBody>
@@ -7789,7 +7997,7 @@
         </p:nvSpPr>
         <p:spPr>
           <a:xfrm>
-            <a:off x="2057400" y="2807208"/>
+            <a:off x="2057400" y="3584448"/>
             <a:ext cx="9509760" cy="274320"/>
           </a:xfrm>
           <a:prstGeom prst="rect">
@@ -7810,7 +8018,7 @@
                   <a:srgbClr val="3F51B5"/>
                 </a:solidFill>
               </a:rPr>
-              <a:t>기법 1  —  단일 md 부트스트랩  (AUTHORING.jeongkyeongwoo.v0.1.0.md)</a:t>
+              <a:t>AI Agent 리포트  —  Claude Code 활용 사례 발표</a:t>
             </a:r>
           </a:p>
         </p:txBody>
@@ -7823,8 +8031,8 @@
         </p:nvSpPr>
         <p:spPr>
           <a:xfrm>
-            <a:off x="658368" y="3218688"/>
-            <a:ext cx="10789920" cy="1161288"/>
+            <a:off x="658368" y="3995928"/>
+            <a:ext cx="10789920" cy="1938528"/>
           </a:xfrm>
           <a:prstGeom prst="rect">
             <a:avLst/>
@@ -7844,241 +8052,8 @@
                   <a:srgbClr val="212121"/>
                 </a:solidFill>
               </a:rPr>
-              <a:t>Rules · Skills · Commands 전체를 파일 하나로 자동 세팅
-새 프로젝트에 이 파일 하나만 주면 AI 운영 체계 즉시 구성</a:t>
-            </a:r>
-          </a:p>
-        </p:txBody>
-      </p:sp>
-      <p:sp>
-        <p:nvSpPr>
-          <p:cNvPr id="19" name="Rectangle 18"/>
-          <p:cNvSpPr/>
-          <p:nvPr/>
-        </p:nvSpPr>
-        <p:spPr>
-          <a:xfrm>
-            <a:off x="457200" y="4572000"/>
-            <a:ext cx="11247120" cy="1691640"/>
-          </a:xfrm>
-          <a:prstGeom prst="rect">
-            <a:avLst/>
-          </a:prstGeom>
-          <a:noFill/>
-          <a:ln w="10160">
-            <a:solidFill>
-              <a:srgbClr val="E0E0E0"/>
-            </a:solidFill>
-          </a:ln>
-        </p:spPr>
-        <p:style>
-          <a:lnRef idx="1">
-            <a:schemeClr val="accent1"/>
-          </a:lnRef>
-          <a:fillRef idx="3">
-            <a:schemeClr val="accent1"/>
-          </a:fillRef>
-          <a:effectRef idx="2">
-            <a:schemeClr val="accent1"/>
-          </a:effectRef>
-          <a:fontRef idx="minor">
-            <a:schemeClr val="lt1"/>
-          </a:fontRef>
-        </p:style>
-        <p:txBody>
-          <a:bodyPr rtlCol="0" anchor="ctr"/>
-          <a:lstStyle/>
-          <a:p>
-            <a:pPr algn="ctr"/>
-          </a:p>
-        </p:txBody>
-      </p:sp>
-      <p:sp>
-        <p:nvSpPr>
-          <p:cNvPr id="20" name="Rectangle 19"/>
-          <p:cNvSpPr/>
-          <p:nvPr/>
-        </p:nvSpPr>
-        <p:spPr>
-          <a:xfrm>
-            <a:off x="457200" y="4572000"/>
-            <a:ext cx="11247120" cy="402336"/>
-          </a:xfrm>
-          <a:prstGeom prst="rect">
-            <a:avLst/>
-          </a:prstGeom>
-          <a:solidFill>
-            <a:srgbClr val="F5F5F5"/>
-          </a:solidFill>
-          <a:ln>
-            <a:noFill/>
-          </a:ln>
-        </p:spPr>
-        <p:style>
-          <a:lnRef idx="1">
-            <a:schemeClr val="accent1"/>
-          </a:lnRef>
-          <a:fillRef idx="3">
-            <a:schemeClr val="accent1"/>
-          </a:fillRef>
-          <a:effectRef idx="2">
-            <a:schemeClr val="accent1"/>
-          </a:effectRef>
-          <a:fontRef idx="minor">
-            <a:schemeClr val="lt1"/>
-          </a:fontRef>
-        </p:style>
-        <p:txBody>
-          <a:bodyPr rtlCol="0" anchor="ctr"/>
-          <a:lstStyle/>
-          <a:p>
-            <a:pPr algn="ctr"/>
-          </a:p>
-        </p:txBody>
-      </p:sp>
-      <p:sp>
-        <p:nvSpPr>
-          <p:cNvPr id="21" name="Rectangle 20"/>
-          <p:cNvSpPr/>
-          <p:nvPr/>
-        </p:nvSpPr>
-        <p:spPr>
-          <a:xfrm>
-            <a:off x="457200" y="4572000"/>
-            <a:ext cx="1463040" cy="402336"/>
-          </a:xfrm>
-          <a:prstGeom prst="rect">
-            <a:avLst/>
-          </a:prstGeom>
-          <a:solidFill>
-            <a:srgbClr val="3F51B5"/>
-          </a:solidFill>
-          <a:ln>
-            <a:noFill/>
-          </a:ln>
-        </p:spPr>
-        <p:style>
-          <a:lnRef idx="1">
-            <a:schemeClr val="accent1"/>
-          </a:lnRef>
-          <a:fillRef idx="3">
-            <a:schemeClr val="accent1"/>
-          </a:fillRef>
-          <a:effectRef idx="2">
-            <a:schemeClr val="accent1"/>
-          </a:effectRef>
-          <a:fontRef idx="minor">
-            <a:schemeClr val="lt1"/>
-          </a:fontRef>
-        </p:style>
-        <p:txBody>
-          <a:bodyPr rtlCol="0" anchor="ctr"/>
-          <a:lstStyle/>
-          <a:p>
-            <a:pPr algn="ctr"/>
-          </a:p>
-        </p:txBody>
-      </p:sp>
-      <p:sp>
-        <p:nvSpPr>
-          <p:cNvPr id="22" name="TextBox 21"/>
-          <p:cNvSpPr txBox="1"/>
-          <p:nvPr/>
-        </p:nvSpPr>
-        <p:spPr>
-          <a:xfrm>
-            <a:off x="457200" y="4572000"/>
-            <a:ext cx="1463040" cy="402336"/>
-          </a:xfrm>
-          <a:prstGeom prst="rect">
-            <a:avLst/>
-          </a:prstGeom>
-          <a:noFill/>
-        </p:spPr>
-        <p:txBody>
-          <a:bodyPr wrap="square">
-            <a:spAutoFit/>
-          </a:bodyPr>
-          <a:lstStyle/>
-          <a:p>
-            <a:pPr algn="ctr"/>
-            <a:r>
-              <a:rPr sz="1100" b="1">
-                <a:solidFill>
-                  <a:srgbClr val="FFFFFF"/>
-                </a:solidFill>
-              </a:rPr>
-              <a:t>본인 기법
-구성  +2</a:t>
-            </a:r>
-          </a:p>
-        </p:txBody>
-      </p:sp>
-      <p:sp>
-        <p:nvSpPr>
-          <p:cNvPr id="23" name="TextBox 22"/>
-          <p:cNvSpPr txBox="1"/>
-          <p:nvPr/>
-        </p:nvSpPr>
-        <p:spPr>
-          <a:xfrm>
-            <a:off x="2057400" y="4636008"/>
-            <a:ext cx="9509760" cy="274320"/>
-          </a:xfrm>
-          <a:prstGeom prst="rect">
-            <a:avLst/>
-          </a:prstGeom>
-          <a:noFill/>
-        </p:spPr>
-        <p:txBody>
-          <a:bodyPr wrap="square">
-            <a:spAutoFit/>
-          </a:bodyPr>
-          <a:lstStyle/>
-          <a:p>
-            <a:pPr algn="l"/>
-            <a:r>
-              <a:rPr sz="1200" b="1">
-                <a:solidFill>
-                  <a:srgbClr val="3F51B5"/>
-                </a:solidFill>
-              </a:rPr>
-              <a:t>기법 3  —  단계별 보고 방식</a:t>
-            </a:r>
-          </a:p>
-        </p:txBody>
-      </p:sp>
-      <p:sp>
-        <p:nvSpPr>
-          <p:cNvPr id="24" name="TextBox 23"/>
-          <p:cNvSpPr txBox="1"/>
-          <p:nvPr/>
-        </p:nvSpPr>
-        <p:spPr>
-          <a:xfrm>
-            <a:off x="658368" y="5047488"/>
-            <a:ext cx="10789920" cy="1161288"/>
-          </a:xfrm>
-          <a:prstGeom prst="rect">
-            <a:avLst/>
-          </a:prstGeom>
-          <a:noFill/>
-        </p:spPr>
-        <p:txBody>
-          <a:bodyPr wrap="square">
-            <a:spAutoFit/>
-          </a:bodyPr>
-          <a:lstStyle/>
-          <a:p>
-            <a:pPr algn="l"/>
-            <a:r>
-              <a:rPr sz="1050" b="0">
-                <a:solidFill>
-                  <a:srgbClr val="212121"/>
-                </a:solidFill>
-              </a:rPr>
-              <a:t>각 구현 단계 완료 후 AI에게 결과 보고받기 → 코드 이해도 유지
-"방금 만든 기능을 3줄로 설명해줘" → 내용 이해 후 다음 단계 진행  ·  Q&amp;A 즉답 가능</a:t>
+              <a:t>Claude Code(Anthropic, 2024~)로 서브에이전트 제작 · 커스텀 명령어 운영 · 단계별 개발 수행
+최근 6개월 이내 지속 업데이트 도구 · 출처: claude.ai/code  (공식 문서)</a:t>
             </a:r>
           </a:p>
         </p:txBody>
@@ -8205,7 +8180,7 @@
                   <a:srgbClr val="9E9E9E"/>
                 </a:solidFill>
               </a:rPr>
-              <a:t>정경우  (2/2)</a:t>
+              <a:t>정경우  (1/2)</a:t>
             </a:r>
           </a:p>
         </p:txBody>
@@ -8282,7 +8257,7 @@
                   <a:srgbClr val="9E9E9E"/>
                 </a:solidFill>
               </a:rPr>
-              <a:t>16 / 20</a:t>
+              <a:t>16 / 21</a:t>
             </a:r>
           </a:p>
         </p:txBody>
@@ -8295,8 +8270,8 @@
         </p:nvSpPr>
         <p:spPr>
           <a:xfrm>
-            <a:off x="457200" y="822960"/>
-            <a:ext cx="11247120" cy="2468880"/>
+            <a:off x="457200" y="914400"/>
+            <a:ext cx="11247120" cy="1691640"/>
           </a:xfrm>
           <a:prstGeom prst="rect">
             <a:avLst/>
@@ -8338,7 +8313,7 @@
         </p:nvSpPr>
         <p:spPr>
           <a:xfrm>
-            <a:off x="457200" y="822960"/>
+            <a:off x="457200" y="914400"/>
             <a:ext cx="11247120" cy="402336"/>
           </a:xfrm>
           <a:prstGeom prst="rect">
@@ -8381,14 +8356,14 @@
         </p:nvSpPr>
         <p:spPr>
           <a:xfrm>
-            <a:off x="457200" y="822960"/>
+            <a:off x="457200" y="914400"/>
             <a:ext cx="1463040" cy="402336"/>
           </a:xfrm>
           <a:prstGeom prst="rect">
             <a:avLst/>
           </a:prstGeom>
           <a:solidFill>
-            <a:srgbClr val="2E7D32"/>
+            <a:srgbClr val="E65C00"/>
           </a:solidFill>
           <a:ln>
             <a:noFill/>
@@ -8424,7 +8399,7 @@
         </p:nvSpPr>
         <p:spPr>
           <a:xfrm>
-            <a:off x="457200" y="822960"/>
+            <a:off x="457200" y="914400"/>
             <a:ext cx="1463040" cy="402336"/>
           </a:xfrm>
           <a:prstGeom prst="rect">
@@ -8445,8 +8420,8 @@
                   <a:srgbClr val="FFFFFF"/>
                 </a:solidFill>
               </a:rPr>
-              <a:t>LLM Wiki
-암묵지  +1</a:t>
+              <a:t>AI 워크플로우
+활용  +1</a:t>
             </a:r>
           </a:p>
         </p:txBody>
@@ -8459,7 +8434,7 @@
         </p:nvSpPr>
         <p:spPr>
           <a:xfrm>
-            <a:off x="2057400" y="886968"/>
+            <a:off x="2057400" y="978408"/>
             <a:ext cx="9509760" cy="274320"/>
           </a:xfrm>
           <a:prstGeom prst="rect">
@@ -8480,7 +8455,7 @@
                   <a:srgbClr val="3F51B5"/>
                 </a:solidFill>
               </a:rPr>
-              <a:t>LLM Wiki  —  암묵지 운영  (notes/llm-wiki-jeongkyeongwoo.md · 10개 항목)</a:t>
+              <a:t>pre-presentation-checker 에이전트 직접 제작 + /pc 실사용</a:t>
             </a:r>
           </a:p>
         </p:txBody>
@@ -8493,8 +8468,8 @@
         </p:nvSpPr>
         <p:spPr>
           <a:xfrm>
-            <a:off x="658368" y="1298448"/>
-            <a:ext cx="10789920" cy="1938528"/>
+            <a:off x="658368" y="1389888"/>
+            <a:ext cx="10789920" cy="1161288"/>
           </a:xfrm>
           <a:prstGeom prst="rect">
             <a:avLst/>
@@ -8514,8 +8489,8 @@
                   <a:srgbClr val="212121"/>
                 </a:solidFill>
               </a:rPr>
-              <a:t>개발 중 배운 AI 사용 인사이트 직접 기록
-AI 활용법 / Firebase 실전 경험 / Flutter 주의사항 / 에이전트 특화 운영 등</a:t>
+              <a:t>.claude/agents/pre-presentation-checker.md  직접 제작
+발표 전 제출 서류 · 가산점 · 앱 상태를 평가 루브릭 기준으로 자동 점검 → 미완료 항목 우선 보고</a:t>
             </a:r>
           </a:p>
         </p:txBody>
@@ -8528,8 +8503,8 @@
         </p:nvSpPr>
         <p:spPr>
           <a:xfrm>
-            <a:off x="457200" y="3520440"/>
-            <a:ext cx="11247120" cy="2468880"/>
+            <a:off x="457200" y="2743200"/>
+            <a:ext cx="11247120" cy="1691640"/>
           </a:xfrm>
           <a:prstGeom prst="rect">
             <a:avLst/>
@@ -8571,7 +8546,7 @@
         </p:nvSpPr>
         <p:spPr>
           <a:xfrm>
-            <a:off x="457200" y="3520440"/>
+            <a:off x="457200" y="2743200"/>
             <a:ext cx="11247120" cy="402336"/>
           </a:xfrm>
           <a:prstGeom prst="rect">
@@ -8614,14 +8589,14 @@
         </p:nvSpPr>
         <p:spPr>
           <a:xfrm>
-            <a:off x="457200" y="3520440"/>
+            <a:off x="457200" y="2743200"/>
             <a:ext cx="1463040" cy="402336"/>
           </a:xfrm>
           <a:prstGeom prst="rect">
             <a:avLst/>
           </a:prstGeom>
           <a:solidFill>
-            <a:srgbClr val="6A1B9A"/>
+            <a:srgbClr val="3F51B5"/>
           </a:solidFill>
           <a:ln>
             <a:noFill/>
@@ -8657,7 +8632,7 @@
         </p:nvSpPr>
         <p:spPr>
           <a:xfrm>
-            <a:off x="457200" y="3520440"/>
+            <a:off x="457200" y="2743200"/>
             <a:ext cx="1463040" cy="402336"/>
           </a:xfrm>
           <a:prstGeom prst="rect">
@@ -8678,8 +8653,8 @@
                   <a:srgbClr val="FFFFFF"/>
                 </a:solidFill>
               </a:rPr>
-              <a:t>AI 리포트
-발표  +2</a:t>
+              <a:t>본인 기법
+구성  +2</a:t>
             </a:r>
           </a:p>
         </p:txBody>
@@ -8692,7 +8667,7 @@
         </p:nvSpPr>
         <p:spPr>
           <a:xfrm>
-            <a:off x="2057400" y="3584448"/>
+            <a:off x="2057400" y="2807208"/>
             <a:ext cx="9509760" cy="274320"/>
           </a:xfrm>
           <a:prstGeom prst="rect">
@@ -8713,7 +8688,7 @@
                   <a:srgbClr val="3F51B5"/>
                 </a:solidFill>
               </a:rPr>
-              <a:t>AI Agent 리포트  —  Claude Code 활용 사례 발표</a:t>
+              <a:t>기법 1  —  단일 md 부트스트랩  (AUTHORING.jeongkyeongwoo.v0.1.0.md)</a:t>
             </a:r>
           </a:p>
         </p:txBody>
@@ -8726,8 +8701,8 @@
         </p:nvSpPr>
         <p:spPr>
           <a:xfrm>
-            <a:off x="658368" y="3995928"/>
-            <a:ext cx="10789920" cy="1938528"/>
+            <a:off x="658368" y="3218688"/>
+            <a:ext cx="10789920" cy="1161288"/>
           </a:xfrm>
           <a:prstGeom prst="rect">
             <a:avLst/>
@@ -8747,8 +8722,241 @@
                   <a:srgbClr val="212121"/>
                 </a:solidFill>
               </a:rPr>
-              <a:t>Claude Code(Anthropic, 2024~)로 서브에이전트 제작 · 커스텀 명령어 운영 · 단계별 보고 방식 수행
-최근 6개월 이내 지속 업데이트 도구 · 출처: claude.ai/code  (공식 문서)</a:t>
+              <a:t>Rules · Skills · Commands 전체를 파일 하나로 자동 세팅
+새 프로젝트에 이 파일 하나만 주면 AI 운영 체계 즉시 구성</a:t>
+            </a:r>
+          </a:p>
+        </p:txBody>
+      </p:sp>
+      <p:sp>
+        <p:nvSpPr>
+          <p:cNvPr id="19" name="Rectangle 18"/>
+          <p:cNvSpPr/>
+          <p:nvPr/>
+        </p:nvSpPr>
+        <p:spPr>
+          <a:xfrm>
+            <a:off x="457200" y="4572000"/>
+            <a:ext cx="11247120" cy="1691640"/>
+          </a:xfrm>
+          <a:prstGeom prst="rect">
+            <a:avLst/>
+          </a:prstGeom>
+          <a:noFill/>
+          <a:ln w="10160">
+            <a:solidFill>
+              <a:srgbClr val="E0E0E0"/>
+            </a:solidFill>
+          </a:ln>
+        </p:spPr>
+        <p:style>
+          <a:lnRef idx="1">
+            <a:schemeClr val="accent1"/>
+          </a:lnRef>
+          <a:fillRef idx="3">
+            <a:schemeClr val="accent1"/>
+          </a:fillRef>
+          <a:effectRef idx="2">
+            <a:schemeClr val="accent1"/>
+          </a:effectRef>
+          <a:fontRef idx="minor">
+            <a:schemeClr val="lt1"/>
+          </a:fontRef>
+        </p:style>
+        <p:txBody>
+          <a:bodyPr rtlCol="0" anchor="ctr"/>
+          <a:lstStyle/>
+          <a:p>
+            <a:pPr algn="ctr"/>
+          </a:p>
+        </p:txBody>
+      </p:sp>
+      <p:sp>
+        <p:nvSpPr>
+          <p:cNvPr id="20" name="Rectangle 19"/>
+          <p:cNvSpPr/>
+          <p:nvPr/>
+        </p:nvSpPr>
+        <p:spPr>
+          <a:xfrm>
+            <a:off x="457200" y="4572000"/>
+            <a:ext cx="11247120" cy="402336"/>
+          </a:xfrm>
+          <a:prstGeom prst="rect">
+            <a:avLst/>
+          </a:prstGeom>
+          <a:solidFill>
+            <a:srgbClr val="F5F5F5"/>
+          </a:solidFill>
+          <a:ln>
+            <a:noFill/>
+          </a:ln>
+        </p:spPr>
+        <p:style>
+          <a:lnRef idx="1">
+            <a:schemeClr val="accent1"/>
+          </a:lnRef>
+          <a:fillRef idx="3">
+            <a:schemeClr val="accent1"/>
+          </a:fillRef>
+          <a:effectRef idx="2">
+            <a:schemeClr val="accent1"/>
+          </a:effectRef>
+          <a:fontRef idx="minor">
+            <a:schemeClr val="lt1"/>
+          </a:fontRef>
+        </p:style>
+        <p:txBody>
+          <a:bodyPr rtlCol="0" anchor="ctr"/>
+          <a:lstStyle/>
+          <a:p>
+            <a:pPr algn="ctr"/>
+          </a:p>
+        </p:txBody>
+      </p:sp>
+      <p:sp>
+        <p:nvSpPr>
+          <p:cNvPr id="21" name="Rectangle 20"/>
+          <p:cNvSpPr/>
+          <p:nvPr/>
+        </p:nvSpPr>
+        <p:spPr>
+          <a:xfrm>
+            <a:off x="457200" y="4572000"/>
+            <a:ext cx="1463040" cy="402336"/>
+          </a:xfrm>
+          <a:prstGeom prst="rect">
+            <a:avLst/>
+          </a:prstGeom>
+          <a:solidFill>
+            <a:srgbClr val="3F51B5"/>
+          </a:solidFill>
+          <a:ln>
+            <a:noFill/>
+          </a:ln>
+        </p:spPr>
+        <p:style>
+          <a:lnRef idx="1">
+            <a:schemeClr val="accent1"/>
+          </a:lnRef>
+          <a:fillRef idx="3">
+            <a:schemeClr val="accent1"/>
+          </a:fillRef>
+          <a:effectRef idx="2">
+            <a:schemeClr val="accent1"/>
+          </a:effectRef>
+          <a:fontRef idx="minor">
+            <a:schemeClr val="lt1"/>
+          </a:fontRef>
+        </p:style>
+        <p:txBody>
+          <a:bodyPr rtlCol="0" anchor="ctr"/>
+          <a:lstStyle/>
+          <a:p>
+            <a:pPr algn="ctr"/>
+          </a:p>
+        </p:txBody>
+      </p:sp>
+      <p:sp>
+        <p:nvSpPr>
+          <p:cNvPr id="22" name="TextBox 21"/>
+          <p:cNvSpPr txBox="1"/>
+          <p:nvPr/>
+        </p:nvSpPr>
+        <p:spPr>
+          <a:xfrm>
+            <a:off x="457200" y="4572000"/>
+            <a:ext cx="1463040" cy="402336"/>
+          </a:xfrm>
+          <a:prstGeom prst="rect">
+            <a:avLst/>
+          </a:prstGeom>
+          <a:noFill/>
+        </p:spPr>
+        <p:txBody>
+          <a:bodyPr wrap="square">
+            <a:spAutoFit/>
+          </a:bodyPr>
+          <a:lstStyle/>
+          <a:p>
+            <a:pPr algn="ctr"/>
+            <a:r>
+              <a:rPr sz="1100" b="1">
+                <a:solidFill>
+                  <a:srgbClr val="FFFFFF"/>
+                </a:solidFill>
+              </a:rPr>
+              <a:t>본인 기법
+구성  +2</a:t>
+            </a:r>
+          </a:p>
+        </p:txBody>
+      </p:sp>
+      <p:sp>
+        <p:nvSpPr>
+          <p:cNvPr id="23" name="TextBox 22"/>
+          <p:cNvSpPr txBox="1"/>
+          <p:nvPr/>
+        </p:nvSpPr>
+        <p:spPr>
+          <a:xfrm>
+            <a:off x="2057400" y="4636008"/>
+            <a:ext cx="9509760" cy="274320"/>
+          </a:xfrm>
+          <a:prstGeom prst="rect">
+            <a:avLst/>
+          </a:prstGeom>
+          <a:noFill/>
+        </p:spPr>
+        <p:txBody>
+          <a:bodyPr wrap="square">
+            <a:spAutoFit/>
+          </a:bodyPr>
+          <a:lstStyle/>
+          <a:p>
+            <a:pPr algn="l"/>
+            <a:r>
+              <a:rPr sz="1200" b="1">
+                <a:solidFill>
+                  <a:srgbClr val="3F51B5"/>
+                </a:solidFill>
+              </a:rPr>
+              <a:t>기법 3  —  단계별 보고 방식</a:t>
+            </a:r>
+          </a:p>
+        </p:txBody>
+      </p:sp>
+      <p:sp>
+        <p:nvSpPr>
+          <p:cNvPr id="24" name="TextBox 23"/>
+          <p:cNvSpPr txBox="1"/>
+          <p:nvPr/>
+        </p:nvSpPr>
+        <p:spPr>
+          <a:xfrm>
+            <a:off x="658368" y="5047488"/>
+            <a:ext cx="10789920" cy="1161288"/>
+          </a:xfrm>
+          <a:prstGeom prst="rect">
+            <a:avLst/>
+          </a:prstGeom>
+          <a:noFill/>
+        </p:spPr>
+        <p:txBody>
+          <a:bodyPr wrap="square">
+            <a:spAutoFit/>
+          </a:bodyPr>
+          <a:lstStyle/>
+          <a:p>
+            <a:pPr algn="l"/>
+            <a:r>
+              <a:rPr sz="1050" b="0">
+                <a:solidFill>
+                  <a:srgbClr val="212121"/>
+                </a:solidFill>
+              </a:rPr>
+              <a:t>각 구현 단계 완료 후 AI에게 결과 보고받기 → 코드 이해도 유지
+"방금 만든 기능을 3줄로 설명해줘" → 내용 이해 후 다음 단계 진행  ·  Q&amp;A 즉답 가능</a:t>
             </a:r>
           </a:p>
         </p:txBody>
@@ -8841,14 +9049,48 @@
                   <a:srgbClr val="3F51B5"/>
                 </a:solidFill>
               </a:rPr>
-              <a:t>ADR-0001  —  모바일 프레임워크 선택</a:t>
-            </a:r>
-          </a:p>
-        </p:txBody>
-      </p:sp>
-      <p:sp>
-        <p:nvSpPr>
-          <p:cNvPr id="4" name="Rectangle 3"/>
+              <a:t>16.  개발 방식 — AI 워크플로우</a:t>
+            </a:r>
+          </a:p>
+        </p:txBody>
+      </p:sp>
+      <p:sp>
+        <p:nvSpPr>
+          <p:cNvPr id="4" name="TextBox 3"/>
+          <p:cNvSpPr txBox="1"/>
+          <p:nvPr/>
+        </p:nvSpPr>
+        <p:spPr>
+          <a:xfrm>
+            <a:off x="457200" y="621792"/>
+            <a:ext cx="10972800" cy="274320"/>
+          </a:xfrm>
+          <a:prstGeom prst="rect">
+            <a:avLst/>
+          </a:prstGeom>
+          <a:noFill/>
+        </p:spPr>
+        <p:txBody>
+          <a:bodyPr wrap="square">
+            <a:spAutoFit/>
+          </a:bodyPr>
+          <a:lstStyle/>
+          <a:p>
+            <a:pPr algn="l"/>
+            <a:r>
+              <a:rPr sz="1100" b="0">
+                <a:solidFill>
+                  <a:srgbClr val="9E9E9E"/>
+                </a:solidFill>
+              </a:rPr>
+              <a:t>정경우  (2/2)</a:t>
+            </a:r>
+          </a:p>
+        </p:txBody>
+      </p:sp>
+      <p:sp>
+        <p:nvSpPr>
+          <p:cNvPr id="5" name="Rectangle 4"/>
           <p:cNvSpPr/>
           <p:nvPr/>
         </p:nvSpPr>
@@ -8891,7 +9133,7 @@
       </p:sp>
       <p:sp>
         <p:nvSpPr>
-          <p:cNvPr id="5" name="TextBox 4"/>
+          <p:cNvPr id="6" name="TextBox 5"/>
           <p:cNvSpPr txBox="1"/>
           <p:nvPr/>
         </p:nvSpPr>
@@ -8918,41 +9160,7 @@
                   <a:srgbClr val="9E9E9E"/>
                 </a:solidFill>
               </a:rPr>
-              <a:t>17 / 20</a:t>
-            </a:r>
-          </a:p>
-        </p:txBody>
-      </p:sp>
-      <p:sp>
-        <p:nvSpPr>
-          <p:cNvPr id="6" name="TextBox 5"/>
-          <p:cNvSpPr txBox="1"/>
-          <p:nvPr/>
-        </p:nvSpPr>
-        <p:spPr>
-          <a:xfrm>
-            <a:off x="457200" y="987552"/>
-            <a:ext cx="10972800" cy="347472"/>
-          </a:xfrm>
-          <a:prstGeom prst="rect">
-            <a:avLst/>
-          </a:prstGeom>
-          <a:noFill/>
-        </p:spPr>
-        <p:txBody>
-          <a:bodyPr wrap="square">
-            <a:spAutoFit/>
-          </a:bodyPr>
-          <a:lstStyle/>
-          <a:p>
-            <a:pPr algn="l"/>
-            <a:r>
-              <a:rPr sz="1200" b="0">
-                <a:solidFill>
-                  <a:srgbClr val="9E9E9E"/>
-                </a:solidFill>
-              </a:rPr>
-              <a:t>선택지 비교</a:t>
+              <a:t>17 / 21</a:t>
             </a:r>
           </a:p>
         </p:txBody>
@@ -8965,8 +9173,8 @@
         </p:nvSpPr>
         <p:spPr>
           <a:xfrm>
-            <a:off x="457200" y="1389888"/>
-            <a:ext cx="11247120" cy="1024128"/>
+            <a:off x="457200" y="822960"/>
+            <a:ext cx="11247120" cy="2468880"/>
           </a:xfrm>
           <a:prstGeom prst="rect">
             <a:avLst/>
@@ -9002,35 +9210,44 @@
       </p:sp>
       <p:sp>
         <p:nvSpPr>
-          <p:cNvPr id="8" name="TextBox 7"/>
-          <p:cNvSpPr txBox="1"/>
-          <p:nvPr/>
-        </p:nvSpPr>
-        <p:spPr>
-          <a:xfrm>
-            <a:off x="594360" y="1499616"/>
-            <a:ext cx="11064240" cy="886968"/>
-          </a:xfrm>
-          <a:prstGeom prst="rect">
-            <a:avLst/>
-          </a:prstGeom>
-          <a:noFill/>
-        </p:spPr>
-        <p:txBody>
-          <a:bodyPr wrap="square">
-            <a:spAutoFit/>
-          </a:bodyPr>
-          <a:lstStyle/>
-          <a:p>
-            <a:pPr algn="l"/>
-            <a:r>
-              <a:rPr sz="1600" b="0">
-                <a:solidFill>
-                  <a:srgbClr val="9E9E9E"/>
-                </a:solidFill>
-              </a:rPr>
-              <a:t>React Native</a:t>
-            </a:r>
+          <p:cNvPr id="8" name="Rectangle 7"/>
+          <p:cNvSpPr/>
+          <p:nvPr/>
+        </p:nvSpPr>
+        <p:spPr>
+          <a:xfrm>
+            <a:off x="457200" y="822960"/>
+            <a:ext cx="11247120" cy="402336"/>
+          </a:xfrm>
+          <a:prstGeom prst="rect">
+            <a:avLst/>
+          </a:prstGeom>
+          <a:solidFill>
+            <a:srgbClr val="F5F5F5"/>
+          </a:solidFill>
+          <a:ln>
+            <a:noFill/>
+          </a:ln>
+        </p:spPr>
+        <p:style>
+          <a:lnRef idx="1">
+            <a:schemeClr val="accent1"/>
+          </a:lnRef>
+          <a:fillRef idx="3">
+            <a:schemeClr val="accent1"/>
+          </a:fillRef>
+          <a:effectRef idx="2">
+            <a:schemeClr val="accent1"/>
+          </a:effectRef>
+          <a:fontRef idx="minor">
+            <a:schemeClr val="lt1"/>
+          </a:fontRef>
+        </p:style>
+        <p:txBody>
+          <a:bodyPr rtlCol="0" anchor="ctr"/>
+          <a:lstStyle/>
+          <a:p>
+            <a:pPr algn="ctr"/>
           </a:p>
         </p:txBody>
       </p:sp>
@@ -9042,8 +9259,155 @@
         </p:nvSpPr>
         <p:spPr>
           <a:xfrm>
-            <a:off x="457200" y="2651760"/>
-            <a:ext cx="11247120" cy="1024128"/>
+            <a:off x="457200" y="822960"/>
+            <a:ext cx="1463040" cy="402336"/>
+          </a:xfrm>
+          <a:prstGeom prst="rect">
+            <a:avLst/>
+          </a:prstGeom>
+          <a:solidFill>
+            <a:srgbClr val="2E7D32"/>
+          </a:solidFill>
+          <a:ln>
+            <a:noFill/>
+          </a:ln>
+        </p:spPr>
+        <p:style>
+          <a:lnRef idx="1">
+            <a:schemeClr val="accent1"/>
+          </a:lnRef>
+          <a:fillRef idx="3">
+            <a:schemeClr val="accent1"/>
+          </a:fillRef>
+          <a:effectRef idx="2">
+            <a:schemeClr val="accent1"/>
+          </a:effectRef>
+          <a:fontRef idx="minor">
+            <a:schemeClr val="lt1"/>
+          </a:fontRef>
+        </p:style>
+        <p:txBody>
+          <a:bodyPr rtlCol="0" anchor="ctr"/>
+          <a:lstStyle/>
+          <a:p>
+            <a:pPr algn="ctr"/>
+          </a:p>
+        </p:txBody>
+      </p:sp>
+      <p:sp>
+        <p:nvSpPr>
+          <p:cNvPr id="10" name="TextBox 9"/>
+          <p:cNvSpPr txBox="1"/>
+          <p:nvPr/>
+        </p:nvSpPr>
+        <p:spPr>
+          <a:xfrm>
+            <a:off x="457200" y="822960"/>
+            <a:ext cx="1463040" cy="402336"/>
+          </a:xfrm>
+          <a:prstGeom prst="rect">
+            <a:avLst/>
+          </a:prstGeom>
+          <a:noFill/>
+        </p:spPr>
+        <p:txBody>
+          <a:bodyPr wrap="square">
+            <a:spAutoFit/>
+          </a:bodyPr>
+          <a:lstStyle/>
+          <a:p>
+            <a:pPr algn="ctr"/>
+            <a:r>
+              <a:rPr sz="1100" b="1">
+                <a:solidFill>
+                  <a:srgbClr val="FFFFFF"/>
+                </a:solidFill>
+              </a:rPr>
+              <a:t>LLM Wiki
+암묵지  +1</a:t>
+            </a:r>
+          </a:p>
+        </p:txBody>
+      </p:sp>
+      <p:sp>
+        <p:nvSpPr>
+          <p:cNvPr id="11" name="TextBox 10"/>
+          <p:cNvSpPr txBox="1"/>
+          <p:nvPr/>
+        </p:nvSpPr>
+        <p:spPr>
+          <a:xfrm>
+            <a:off x="2057400" y="886968"/>
+            <a:ext cx="9509760" cy="274320"/>
+          </a:xfrm>
+          <a:prstGeom prst="rect">
+            <a:avLst/>
+          </a:prstGeom>
+          <a:noFill/>
+        </p:spPr>
+        <p:txBody>
+          <a:bodyPr wrap="square">
+            <a:spAutoFit/>
+          </a:bodyPr>
+          <a:lstStyle/>
+          <a:p>
+            <a:pPr algn="l"/>
+            <a:r>
+              <a:rPr sz="1200" b="1">
+                <a:solidFill>
+                  <a:srgbClr val="3F51B5"/>
+                </a:solidFill>
+              </a:rPr>
+              <a:t>LLM Wiki  —  암묵지 운영  (notes/llm-wiki-jeongkyeongwoo.md · 10개 항목)</a:t>
+            </a:r>
+          </a:p>
+        </p:txBody>
+      </p:sp>
+      <p:sp>
+        <p:nvSpPr>
+          <p:cNvPr id="12" name="TextBox 11"/>
+          <p:cNvSpPr txBox="1"/>
+          <p:nvPr/>
+        </p:nvSpPr>
+        <p:spPr>
+          <a:xfrm>
+            <a:off x="658368" y="1298448"/>
+            <a:ext cx="10789920" cy="1938528"/>
+          </a:xfrm>
+          <a:prstGeom prst="rect">
+            <a:avLst/>
+          </a:prstGeom>
+          <a:noFill/>
+        </p:spPr>
+        <p:txBody>
+          <a:bodyPr wrap="square">
+            <a:spAutoFit/>
+          </a:bodyPr>
+          <a:lstStyle/>
+          <a:p>
+            <a:pPr algn="l"/>
+            <a:r>
+              <a:rPr sz="1050" b="0">
+                <a:solidFill>
+                  <a:srgbClr val="212121"/>
+                </a:solidFill>
+              </a:rPr>
+              <a:t>개발 중 배운 AI 사용 인사이트 직접 기록
+AI 활용법 / Firebase 실전 경험 / Flutter 주의사항 / 에이전트 특화 운영 등</a:t>
+            </a:r>
+          </a:p>
+        </p:txBody>
+      </p:sp>
+      <p:sp>
+        <p:nvSpPr>
+          <p:cNvPr id="13" name="Rectangle 12"/>
+          <p:cNvSpPr/>
+          <p:nvPr/>
+        </p:nvSpPr>
+        <p:spPr>
+          <a:xfrm>
+            <a:off x="457200" y="3520440"/>
+            <a:ext cx="11247120" cy="2468880"/>
           </a:xfrm>
           <a:prstGeom prst="rect">
             <a:avLst/>
@@ -9079,57 +9443,23 @@
       </p:sp>
       <p:sp>
         <p:nvSpPr>
-          <p:cNvPr id="10" name="TextBox 9"/>
-          <p:cNvSpPr txBox="1"/>
-          <p:nvPr/>
-        </p:nvSpPr>
-        <p:spPr>
-          <a:xfrm>
-            <a:off x="594360" y="2761488"/>
-            <a:ext cx="11064240" cy="886968"/>
-          </a:xfrm>
-          <a:prstGeom prst="rect">
-            <a:avLst/>
-          </a:prstGeom>
-          <a:noFill/>
-        </p:spPr>
-        <p:txBody>
-          <a:bodyPr wrap="square">
-            <a:spAutoFit/>
-          </a:bodyPr>
-          <a:lstStyle/>
-          <a:p>
-            <a:pPr algn="l"/>
-            <a:r>
-              <a:rPr sz="1600" b="0">
-                <a:solidFill>
-                  <a:srgbClr val="9E9E9E"/>
-                </a:solidFill>
-              </a:rPr>
-              <a:t>안드로이드 전용 개발</a:t>
-            </a:r>
-          </a:p>
-        </p:txBody>
-      </p:sp>
-      <p:sp>
-        <p:nvSpPr>
-          <p:cNvPr id="11" name="Rectangle 10"/>
+          <p:cNvPr id="14" name="Rectangle 13"/>
           <p:cNvSpPr/>
           <p:nvPr/>
         </p:nvSpPr>
         <p:spPr>
           <a:xfrm>
-            <a:off x="457200" y="3913631"/>
-            <a:ext cx="11247120" cy="1024128"/>
-          </a:xfrm>
-          <a:prstGeom prst="rect">
-            <a:avLst/>
-          </a:prstGeom>
-          <a:noFill/>
-          <a:ln w="10160">
-            <a:solidFill>
-              <a:srgbClr val="E0E0E0"/>
-            </a:solidFill>
+            <a:off x="457200" y="3520440"/>
+            <a:ext cx="11247120" cy="402336"/>
+          </a:xfrm>
+          <a:prstGeom prst="rect">
+            <a:avLst/>
+          </a:prstGeom>
+          <a:solidFill>
+            <a:srgbClr val="F5F5F5"/>
+          </a:solidFill>
+          <a:ln>
+            <a:noFill/>
           </a:ln>
         </p:spPr>
         <p:style>
@@ -9156,54 +9486,20 @@
       </p:sp>
       <p:sp>
         <p:nvSpPr>
-          <p:cNvPr id="12" name="TextBox 11"/>
-          <p:cNvSpPr txBox="1"/>
-          <p:nvPr/>
-        </p:nvSpPr>
-        <p:spPr>
-          <a:xfrm>
-            <a:off x="594360" y="4023359"/>
-            <a:ext cx="11064240" cy="886968"/>
-          </a:xfrm>
-          <a:prstGeom prst="rect">
-            <a:avLst/>
-          </a:prstGeom>
-          <a:noFill/>
-        </p:spPr>
-        <p:txBody>
-          <a:bodyPr wrap="square">
-            <a:spAutoFit/>
-          </a:bodyPr>
-          <a:lstStyle/>
-          <a:p>
-            <a:pPr algn="l"/>
-            <a:r>
-              <a:rPr sz="1600" b="0">
-                <a:solidFill>
-                  <a:srgbClr val="9E9E9E"/>
-                </a:solidFill>
-              </a:rPr>
-              <a:t>아이폰 전용 개발</a:t>
-            </a:r>
-          </a:p>
-        </p:txBody>
-      </p:sp>
-      <p:sp>
-        <p:nvSpPr>
-          <p:cNvPr id="13" name="Rectangle 12"/>
+          <p:cNvPr id="15" name="Rectangle 14"/>
           <p:cNvSpPr/>
           <p:nvPr/>
         </p:nvSpPr>
         <p:spPr>
           <a:xfrm>
-            <a:off x="457200" y="5175504"/>
-            <a:ext cx="11247120" cy="1024128"/>
+            <a:off x="457200" y="3520440"/>
+            <a:ext cx="1463040" cy="402336"/>
           </a:xfrm>
           <a:prstGeom prst="rect">
             <a:avLst/>
           </a:prstGeom>
           <a:solidFill>
-            <a:srgbClr val="3F51B5"/>
+            <a:srgbClr val="6A1B9A"/>
           </a:solidFill>
           <a:ln>
             <a:noFill/>
@@ -9233,14 +9529,49 @@
       </p:sp>
       <p:sp>
         <p:nvSpPr>
-          <p:cNvPr id="14" name="TextBox 13"/>
-          <p:cNvSpPr txBox="1"/>
-          <p:nvPr/>
-        </p:nvSpPr>
-        <p:spPr>
-          <a:xfrm>
-            <a:off x="594360" y="5285232"/>
-            <a:ext cx="11064240" cy="886968"/>
+          <p:cNvPr id="16" name="TextBox 15"/>
+          <p:cNvSpPr txBox="1"/>
+          <p:nvPr/>
+        </p:nvSpPr>
+        <p:spPr>
+          <a:xfrm>
+            <a:off x="457200" y="3520440"/>
+            <a:ext cx="1463040" cy="402336"/>
+          </a:xfrm>
+          <a:prstGeom prst="rect">
+            <a:avLst/>
+          </a:prstGeom>
+          <a:noFill/>
+        </p:spPr>
+        <p:txBody>
+          <a:bodyPr wrap="square">
+            <a:spAutoFit/>
+          </a:bodyPr>
+          <a:lstStyle/>
+          <a:p>
+            <a:pPr algn="ctr"/>
+            <a:r>
+              <a:rPr sz="1100" b="1">
+                <a:solidFill>
+                  <a:srgbClr val="FFFFFF"/>
+                </a:solidFill>
+              </a:rPr>
+              <a:t>AI 리포트
+발표  +2</a:t>
+            </a:r>
+          </a:p>
+        </p:txBody>
+      </p:sp>
+      <p:sp>
+        <p:nvSpPr>
+          <p:cNvPr id="17" name="TextBox 16"/>
+          <p:cNvSpPr txBox="1"/>
+          <p:nvPr/>
+        </p:nvSpPr>
+        <p:spPr>
+          <a:xfrm>
+            <a:off x="2057400" y="3584448"/>
+            <a:ext cx="9509760" cy="274320"/>
           </a:xfrm>
           <a:prstGeom prst="rect">
             <a:avLst/>
@@ -9255,12 +9586,47 @@
           <a:p>
             <a:pPr algn="l"/>
             <a:r>
-              <a:rPr sz="1600" b="1">
-                <a:solidFill>
-                  <a:srgbClr val="FFFFFF"/>
-                </a:solidFill>
-              </a:rPr>
-              <a:t>✓  Flutter</a:t>
+              <a:rPr sz="1200" b="1">
+                <a:solidFill>
+                  <a:srgbClr val="3F51B5"/>
+                </a:solidFill>
+              </a:rPr>
+              <a:t>AI Agent 리포트  —  Claude Code 활용 사례 발표</a:t>
+            </a:r>
+          </a:p>
+        </p:txBody>
+      </p:sp>
+      <p:sp>
+        <p:nvSpPr>
+          <p:cNvPr id="18" name="TextBox 17"/>
+          <p:cNvSpPr txBox="1"/>
+          <p:nvPr/>
+        </p:nvSpPr>
+        <p:spPr>
+          <a:xfrm>
+            <a:off x="658368" y="3995928"/>
+            <a:ext cx="10789920" cy="1938528"/>
+          </a:xfrm>
+          <a:prstGeom prst="rect">
+            <a:avLst/>
+          </a:prstGeom>
+          <a:noFill/>
+        </p:spPr>
+        <p:txBody>
+          <a:bodyPr wrap="square">
+            <a:spAutoFit/>
+          </a:bodyPr>
+          <a:lstStyle/>
+          <a:p>
+            <a:pPr algn="l"/>
+            <a:r>
+              <a:rPr sz="1050" b="0">
+                <a:solidFill>
+                  <a:srgbClr val="212121"/>
+                </a:solidFill>
+              </a:rPr>
+              <a:t>Claude Code(Anthropic, 2024~)로 서브에이전트 제작 · 커스텀 명령어 운영 · 단계별 보고 방식 수행
+최근 6개월 이내 지속 업데이트 도구 · 출처: claude.ai/code  (공식 문서)</a:t>
             </a:r>
           </a:p>
         </p:txBody>
@@ -9353,7 +9719,7 @@
                   <a:srgbClr val="3F51B5"/>
                 </a:solidFill>
               </a:rPr>
-              <a:t>ADR-0002  —  아키텍처 패턴 선택</a:t>
+              <a:t>ADR-0001  —  모바일 프레임워크 선택</a:t>
             </a:r>
           </a:p>
         </p:txBody>
@@ -9430,7 +9796,7 @@
                   <a:srgbClr val="9E9E9E"/>
                 </a:solidFill>
               </a:rPr>
-              <a:t>18 / 20</a:t>
+              <a:t>18 / 21</a:t>
             </a:r>
           </a:p>
         </p:txBody>
@@ -9444,7 +9810,7 @@
         <p:spPr>
           <a:xfrm>
             <a:off x="457200" y="987552"/>
-            <a:ext cx="5486400" cy="347472"/>
+            <a:ext cx="10972800" cy="347472"/>
           </a:xfrm>
           <a:prstGeom prst="rect">
             <a:avLst/>
@@ -9478,7 +9844,7 @@
         <p:spPr>
           <a:xfrm>
             <a:off x="457200" y="1389888"/>
-            <a:ext cx="5486400" cy="1024128"/>
+            <a:ext cx="11247120" cy="1024128"/>
           </a:xfrm>
           <a:prstGeom prst="rect">
             <a:avLst/>
@@ -9521,7 +9887,7 @@
         <p:spPr>
           <a:xfrm>
             <a:off x="594360" y="1499616"/>
-            <a:ext cx="5303520" cy="886968"/>
+            <a:ext cx="11064240" cy="886968"/>
           </a:xfrm>
           <a:prstGeom prst="rect">
             <a:avLst/>
@@ -9541,7 +9907,7 @@
                   <a:srgbClr val="9E9E9E"/>
                 </a:solidFill>
               </a:rPr>
-              <a:t>역할 구분 없이 한 파일</a:t>
+              <a:t>React Native</a:t>
             </a:r>
           </a:p>
         </p:txBody>
@@ -9555,7 +9921,7 @@
         <p:spPr>
           <a:xfrm>
             <a:off x="457200" y="2651760"/>
-            <a:ext cx="5486400" cy="1024128"/>
+            <a:ext cx="11247120" cy="1024128"/>
           </a:xfrm>
           <a:prstGeom prst="rect">
             <a:avLst/>
@@ -9598,7 +9964,7 @@
         <p:spPr>
           <a:xfrm>
             <a:off x="594360" y="2761488"/>
-            <a:ext cx="5303520" cy="886968"/>
+            <a:ext cx="11064240" cy="886968"/>
           </a:xfrm>
           <a:prstGeom prst="rect">
             <a:avLst/>
@@ -9618,7 +9984,7 @@
                   <a:srgbClr val="9E9E9E"/>
                 </a:solidFill>
               </a:rPr>
-              <a:t>MVC 방식</a:t>
+              <a:t>안드로이드 전용 개발</a:t>
             </a:r>
           </a:p>
         </p:txBody>
@@ -9632,7 +9998,7 @@
         <p:spPr>
           <a:xfrm>
             <a:off x="457200" y="3913631"/>
-            <a:ext cx="5486400" cy="1024128"/>
+            <a:ext cx="11247120" cy="1024128"/>
           </a:xfrm>
           <a:prstGeom prst="rect">
             <a:avLst/>
@@ -9675,7 +10041,7 @@
         <p:spPr>
           <a:xfrm>
             <a:off x="594360" y="4023359"/>
-            <a:ext cx="5303520" cy="886968"/>
+            <a:ext cx="11064240" cy="886968"/>
           </a:xfrm>
           <a:prstGeom prst="rect">
             <a:avLst/>
@@ -9695,7 +10061,7 @@
                   <a:srgbClr val="9E9E9E"/>
                 </a:solidFill>
               </a:rPr>
-              <a:t>6 ~ 8개 레이어</a:t>
+              <a:t>아이폰 전용 개발</a:t>
             </a:r>
           </a:p>
         </p:txBody>
@@ -9709,7 +10075,7 @@
         <p:spPr>
           <a:xfrm>
             <a:off x="457200" y="5175504"/>
-            <a:ext cx="5486400" cy="1024128"/>
+            <a:ext cx="11247120" cy="1024128"/>
           </a:xfrm>
           <a:prstGeom prst="rect">
             <a:avLst/>
@@ -9752,7 +10118,7 @@
         <p:spPr>
           <a:xfrm>
             <a:off x="594360" y="5285232"/>
-            <a:ext cx="5303520" cy="886968"/>
+            <a:ext cx="11064240" cy="886968"/>
           </a:xfrm>
           <a:prstGeom prst="rect">
             <a:avLst/>
@@ -9772,1226 +10138,7 @@
                   <a:srgbClr val="FFFFFF"/>
                 </a:solidFill>
               </a:rPr>
-              <a:t>✓  4레이어 구조</a:t>
-            </a:r>
-          </a:p>
-        </p:txBody>
-      </p:sp>
-      <p:sp>
-        <p:nvSpPr>
-          <p:cNvPr id="15" name="TextBox 14"/>
-          <p:cNvSpPr txBox="1"/>
-          <p:nvPr/>
-        </p:nvSpPr>
-        <p:spPr>
-          <a:xfrm>
-            <a:off x="6400800" y="987552"/>
-            <a:ext cx="5394960" cy="347472"/>
-          </a:xfrm>
-          <a:prstGeom prst="rect">
-            <a:avLst/>
-          </a:prstGeom>
-          <a:noFill/>
-        </p:spPr>
-        <p:txBody>
-          <a:bodyPr wrap="square">
-            <a:spAutoFit/>
-          </a:bodyPr>
-          <a:lstStyle/>
-          <a:p>
-            <a:pPr algn="l"/>
-            <a:r>
-              <a:rPr sz="1200" b="0">
-                <a:solidFill>
-                  <a:srgbClr val="9E9E9E"/>
-                </a:solidFill>
-              </a:rPr>
-              <a:t>선택된 4레이어 구조</a:t>
-            </a:r>
-          </a:p>
-        </p:txBody>
-      </p:sp>
-      <p:sp>
-        <p:nvSpPr>
-          <p:cNvPr id="16" name="Rectangle 15"/>
-          <p:cNvSpPr/>
-          <p:nvPr/>
-        </p:nvSpPr>
-        <p:spPr>
-          <a:xfrm>
-            <a:off x="6400800" y="1389888"/>
-            <a:ext cx="1371600" cy="822960"/>
-          </a:xfrm>
-          <a:prstGeom prst="rect">
-            <a:avLst/>
-          </a:prstGeom>
-          <a:solidFill>
-            <a:srgbClr val="F5F5F5"/>
-          </a:solidFill>
-          <a:ln w="10160">
-            <a:solidFill>
-              <a:srgbClr val="E0E0E0"/>
-            </a:solidFill>
-          </a:ln>
-        </p:spPr>
-        <p:style>
-          <a:lnRef idx="1">
-            <a:schemeClr val="accent1"/>
-          </a:lnRef>
-          <a:fillRef idx="3">
-            <a:schemeClr val="accent1"/>
-          </a:fillRef>
-          <a:effectRef idx="2">
-            <a:schemeClr val="accent1"/>
-          </a:effectRef>
-          <a:fontRef idx="minor">
-            <a:schemeClr val="lt1"/>
-          </a:fontRef>
-        </p:style>
-        <p:txBody>
-          <a:bodyPr rtlCol="0" anchor="ctr"/>
-          <a:lstStyle/>
-          <a:p>
-            <a:pPr algn="ctr"/>
-          </a:p>
-        </p:txBody>
-      </p:sp>
-      <p:sp>
-        <p:nvSpPr>
-          <p:cNvPr id="17" name="TextBox 16"/>
-          <p:cNvSpPr txBox="1"/>
-          <p:nvPr/>
-        </p:nvSpPr>
-        <p:spPr>
-          <a:xfrm>
-            <a:off x="6510528" y="1591056"/>
-            <a:ext cx="1188720" cy="438912"/>
-          </a:xfrm>
-          <a:prstGeom prst="rect">
-            <a:avLst/>
-          </a:prstGeom>
-          <a:noFill/>
-        </p:spPr>
-        <p:txBody>
-          <a:bodyPr wrap="square">
-            <a:spAutoFit/>
-          </a:bodyPr>
-          <a:lstStyle/>
-          <a:p>
-            <a:pPr algn="l"/>
-            <a:r>
-              <a:rPr sz="1200" b="1">
-                <a:solidFill>
-                  <a:srgbClr val="3F51B5"/>
-                </a:solidFill>
-              </a:rPr>
-              <a:t>레이어</a:t>
-            </a:r>
-          </a:p>
-        </p:txBody>
-      </p:sp>
-      <p:sp>
-        <p:nvSpPr>
-          <p:cNvPr id="18" name="Rectangle 17"/>
-          <p:cNvSpPr/>
-          <p:nvPr/>
-        </p:nvSpPr>
-        <p:spPr>
-          <a:xfrm>
-            <a:off x="7818120" y="1389888"/>
-            <a:ext cx="2560320" cy="822960"/>
-          </a:xfrm>
-          <a:prstGeom prst="rect">
-            <a:avLst/>
-          </a:prstGeom>
-          <a:solidFill>
-            <a:srgbClr val="F5F5F5"/>
-          </a:solidFill>
-          <a:ln w="10160">
-            <a:solidFill>
-              <a:srgbClr val="E0E0E0"/>
-            </a:solidFill>
-          </a:ln>
-        </p:spPr>
-        <p:style>
-          <a:lnRef idx="1">
-            <a:schemeClr val="accent1"/>
-          </a:lnRef>
-          <a:fillRef idx="3">
-            <a:schemeClr val="accent1"/>
-          </a:fillRef>
-          <a:effectRef idx="2">
-            <a:schemeClr val="accent1"/>
-          </a:effectRef>
-          <a:fontRef idx="minor">
-            <a:schemeClr val="lt1"/>
-          </a:fontRef>
-        </p:style>
-        <p:txBody>
-          <a:bodyPr rtlCol="0" anchor="ctr"/>
-          <a:lstStyle/>
-          <a:p>
-            <a:pPr algn="ctr"/>
-          </a:p>
-        </p:txBody>
-      </p:sp>
-      <p:sp>
-        <p:nvSpPr>
-          <p:cNvPr id="19" name="TextBox 18"/>
-          <p:cNvSpPr txBox="1"/>
-          <p:nvPr/>
-        </p:nvSpPr>
-        <p:spPr>
-          <a:xfrm>
-            <a:off x="7927848" y="1591056"/>
-            <a:ext cx="2377439" cy="438912"/>
-          </a:xfrm>
-          <a:prstGeom prst="rect">
-            <a:avLst/>
-          </a:prstGeom>
-          <a:noFill/>
-        </p:spPr>
-        <p:txBody>
-          <a:bodyPr wrap="square">
-            <a:spAutoFit/>
-          </a:bodyPr>
-          <a:lstStyle/>
-          <a:p>
-            <a:pPr algn="l"/>
-            <a:r>
-              <a:rPr sz="1200" b="1">
-                <a:solidFill>
-                  <a:srgbClr val="3F51B5"/>
-                </a:solidFill>
-              </a:rPr>
-              <a:t>역할</a:t>
-            </a:r>
-          </a:p>
-        </p:txBody>
-      </p:sp>
-      <p:sp>
-        <p:nvSpPr>
-          <p:cNvPr id="20" name="Rectangle 19"/>
-          <p:cNvSpPr/>
-          <p:nvPr/>
-        </p:nvSpPr>
-        <p:spPr>
-          <a:xfrm>
-            <a:off x="10424160" y="1389888"/>
-            <a:ext cx="1737360" cy="822960"/>
-          </a:xfrm>
-          <a:prstGeom prst="rect">
-            <a:avLst/>
-          </a:prstGeom>
-          <a:solidFill>
-            <a:srgbClr val="F5F5F5"/>
-          </a:solidFill>
-          <a:ln w="10160">
-            <a:solidFill>
-              <a:srgbClr val="E0E0E0"/>
-            </a:solidFill>
-          </a:ln>
-        </p:spPr>
-        <p:style>
-          <a:lnRef idx="1">
-            <a:schemeClr val="accent1"/>
-          </a:lnRef>
-          <a:fillRef idx="3">
-            <a:schemeClr val="accent1"/>
-          </a:fillRef>
-          <a:effectRef idx="2">
-            <a:schemeClr val="accent1"/>
-          </a:effectRef>
-          <a:fontRef idx="minor">
-            <a:schemeClr val="lt1"/>
-          </a:fontRef>
-        </p:style>
-        <p:txBody>
-          <a:bodyPr rtlCol="0" anchor="ctr"/>
-          <a:lstStyle/>
-          <a:p>
-            <a:pPr algn="ctr"/>
-          </a:p>
-        </p:txBody>
-      </p:sp>
-      <p:sp>
-        <p:nvSpPr>
-          <p:cNvPr id="21" name="TextBox 20"/>
-          <p:cNvSpPr txBox="1"/>
-          <p:nvPr/>
-        </p:nvSpPr>
-        <p:spPr>
-          <a:xfrm>
-            <a:off x="10533888" y="1591056"/>
-            <a:ext cx="1554480" cy="438912"/>
-          </a:xfrm>
-          <a:prstGeom prst="rect">
-            <a:avLst/>
-          </a:prstGeom>
-          <a:noFill/>
-        </p:spPr>
-        <p:txBody>
-          <a:bodyPr wrap="square">
-            <a:spAutoFit/>
-          </a:bodyPr>
-          <a:lstStyle/>
-          <a:p>
-            <a:pPr algn="l"/>
-            <a:r>
-              <a:rPr sz="1200" b="1">
-                <a:solidFill>
-                  <a:srgbClr val="3F51B5"/>
-                </a:solidFill>
-              </a:rPr>
-              <a:t>위치</a:t>
-            </a:r>
-          </a:p>
-        </p:txBody>
-      </p:sp>
-      <p:sp>
-        <p:nvSpPr>
-          <p:cNvPr id="22" name="Rectangle 21"/>
-          <p:cNvSpPr/>
-          <p:nvPr/>
-        </p:nvSpPr>
-        <p:spPr>
-          <a:xfrm>
-            <a:off x="6400800" y="2395728"/>
-            <a:ext cx="1371600" cy="822960"/>
-          </a:xfrm>
-          <a:prstGeom prst="rect">
-            <a:avLst/>
-          </a:prstGeom>
-          <a:solidFill>
-            <a:srgbClr val="FFFFFF"/>
-          </a:solidFill>
-          <a:ln w="10160">
-            <a:solidFill>
-              <a:srgbClr val="E0E0E0"/>
-            </a:solidFill>
-          </a:ln>
-        </p:spPr>
-        <p:style>
-          <a:lnRef idx="1">
-            <a:schemeClr val="accent1"/>
-          </a:lnRef>
-          <a:fillRef idx="3">
-            <a:schemeClr val="accent1"/>
-          </a:fillRef>
-          <a:effectRef idx="2">
-            <a:schemeClr val="accent1"/>
-          </a:effectRef>
-          <a:fontRef idx="minor">
-            <a:schemeClr val="lt1"/>
-          </a:fontRef>
-        </p:style>
-        <p:txBody>
-          <a:bodyPr rtlCol="0" anchor="ctr"/>
-          <a:lstStyle/>
-          <a:p>
-            <a:pPr algn="ctr"/>
-          </a:p>
-        </p:txBody>
-      </p:sp>
-      <p:sp>
-        <p:nvSpPr>
-          <p:cNvPr id="23" name="TextBox 22"/>
-          <p:cNvSpPr txBox="1"/>
-          <p:nvPr/>
-        </p:nvSpPr>
-        <p:spPr>
-          <a:xfrm>
-            <a:off x="6510528" y="2596896"/>
-            <a:ext cx="1188720" cy="438912"/>
-          </a:xfrm>
-          <a:prstGeom prst="rect">
-            <a:avLst/>
-          </a:prstGeom>
-          <a:noFill/>
-        </p:spPr>
-        <p:txBody>
-          <a:bodyPr wrap="square">
-            <a:spAutoFit/>
-          </a:bodyPr>
-          <a:lstStyle/>
-          <a:p>
-            <a:pPr algn="l"/>
-            <a:r>
-              <a:rPr sz="1200" b="0">
-                <a:solidFill>
-                  <a:srgbClr val="212121"/>
-                </a:solidFill>
-              </a:rPr>
-              <a:t>화면</a:t>
-            </a:r>
-          </a:p>
-        </p:txBody>
-      </p:sp>
-      <p:sp>
-        <p:nvSpPr>
-          <p:cNvPr id="24" name="Rectangle 23"/>
-          <p:cNvSpPr/>
-          <p:nvPr/>
-        </p:nvSpPr>
-        <p:spPr>
-          <a:xfrm>
-            <a:off x="7818120" y="2395728"/>
-            <a:ext cx="2560320" cy="822960"/>
-          </a:xfrm>
-          <a:prstGeom prst="rect">
-            <a:avLst/>
-          </a:prstGeom>
-          <a:solidFill>
-            <a:srgbClr val="FFFFFF"/>
-          </a:solidFill>
-          <a:ln w="10160">
-            <a:solidFill>
-              <a:srgbClr val="E0E0E0"/>
-            </a:solidFill>
-          </a:ln>
-        </p:spPr>
-        <p:style>
-          <a:lnRef idx="1">
-            <a:schemeClr val="accent1"/>
-          </a:lnRef>
-          <a:fillRef idx="3">
-            <a:schemeClr val="accent1"/>
-          </a:fillRef>
-          <a:effectRef idx="2">
-            <a:schemeClr val="accent1"/>
-          </a:effectRef>
-          <a:fontRef idx="minor">
-            <a:schemeClr val="lt1"/>
-          </a:fontRef>
-        </p:style>
-        <p:txBody>
-          <a:bodyPr rtlCol="0" anchor="ctr"/>
-          <a:lstStyle/>
-          <a:p>
-            <a:pPr algn="ctr"/>
-          </a:p>
-        </p:txBody>
-      </p:sp>
-      <p:sp>
-        <p:nvSpPr>
-          <p:cNvPr id="25" name="TextBox 24"/>
-          <p:cNvSpPr txBox="1"/>
-          <p:nvPr/>
-        </p:nvSpPr>
-        <p:spPr>
-          <a:xfrm>
-            <a:off x="7927848" y="2596896"/>
-            <a:ext cx="2377439" cy="438912"/>
-          </a:xfrm>
-          <a:prstGeom prst="rect">
-            <a:avLst/>
-          </a:prstGeom>
-          <a:noFill/>
-        </p:spPr>
-        <p:txBody>
-          <a:bodyPr wrap="square">
-            <a:spAutoFit/>
-          </a:bodyPr>
-          <a:lstStyle/>
-          <a:p>
-            <a:pPr algn="l"/>
-            <a:r>
-              <a:rPr sz="1200" b="0">
-                <a:solidFill>
-                  <a:srgbClr val="212121"/>
-                </a:solidFill>
-              </a:rPr>
-              <a:t>버튼·목록·입력창</a:t>
-            </a:r>
-          </a:p>
-        </p:txBody>
-      </p:sp>
-      <p:sp>
-        <p:nvSpPr>
-          <p:cNvPr id="26" name="Rectangle 25"/>
-          <p:cNvSpPr/>
-          <p:nvPr/>
-        </p:nvSpPr>
-        <p:spPr>
-          <a:xfrm>
-            <a:off x="10424160" y="2395728"/>
-            <a:ext cx="1737360" cy="822960"/>
-          </a:xfrm>
-          <a:prstGeom prst="rect">
-            <a:avLst/>
-          </a:prstGeom>
-          <a:solidFill>
-            <a:srgbClr val="FFFFFF"/>
-          </a:solidFill>
-          <a:ln w="10160">
-            <a:solidFill>
-              <a:srgbClr val="E0E0E0"/>
-            </a:solidFill>
-          </a:ln>
-        </p:spPr>
-        <p:style>
-          <a:lnRef idx="1">
-            <a:schemeClr val="accent1"/>
-          </a:lnRef>
-          <a:fillRef idx="3">
-            <a:schemeClr val="accent1"/>
-          </a:fillRef>
-          <a:effectRef idx="2">
-            <a:schemeClr val="accent1"/>
-          </a:effectRef>
-          <a:fontRef idx="minor">
-            <a:schemeClr val="lt1"/>
-          </a:fontRef>
-        </p:style>
-        <p:txBody>
-          <a:bodyPr rtlCol="0" anchor="ctr"/>
-          <a:lstStyle/>
-          <a:p>
-            <a:pPr algn="ctr"/>
-          </a:p>
-        </p:txBody>
-      </p:sp>
-      <p:sp>
-        <p:nvSpPr>
-          <p:cNvPr id="27" name="TextBox 26"/>
-          <p:cNvSpPr txBox="1"/>
-          <p:nvPr/>
-        </p:nvSpPr>
-        <p:spPr>
-          <a:xfrm>
-            <a:off x="10533888" y="2596896"/>
-            <a:ext cx="1554480" cy="438912"/>
-          </a:xfrm>
-          <a:prstGeom prst="rect">
-            <a:avLst/>
-          </a:prstGeom>
-          <a:noFill/>
-        </p:spPr>
-        <p:txBody>
-          <a:bodyPr wrap="square">
-            <a:spAutoFit/>
-          </a:bodyPr>
-          <a:lstStyle/>
-          <a:p>
-            <a:pPr algn="l"/>
-            <a:r>
-              <a:rPr sz="1200" b="0">
-                <a:solidFill>
-                  <a:srgbClr val="212121"/>
-                </a:solidFill>
-              </a:rPr>
-              <a:t>screens/</a:t>
-            </a:r>
-          </a:p>
-        </p:txBody>
-      </p:sp>
-      <p:sp>
-        <p:nvSpPr>
-          <p:cNvPr id="28" name="Rectangle 27"/>
-          <p:cNvSpPr/>
-          <p:nvPr/>
-        </p:nvSpPr>
-        <p:spPr>
-          <a:xfrm>
-            <a:off x="6400800" y="3401568"/>
-            <a:ext cx="1371600" cy="822960"/>
-          </a:xfrm>
-          <a:prstGeom prst="rect">
-            <a:avLst/>
-          </a:prstGeom>
-          <a:solidFill>
-            <a:srgbClr val="FFFFFF"/>
-          </a:solidFill>
-          <a:ln w="10160">
-            <a:solidFill>
-              <a:srgbClr val="E0E0E0"/>
-            </a:solidFill>
-          </a:ln>
-        </p:spPr>
-        <p:style>
-          <a:lnRef idx="1">
-            <a:schemeClr val="accent1"/>
-          </a:lnRef>
-          <a:fillRef idx="3">
-            <a:schemeClr val="accent1"/>
-          </a:fillRef>
-          <a:effectRef idx="2">
-            <a:schemeClr val="accent1"/>
-          </a:effectRef>
-          <a:fontRef idx="minor">
-            <a:schemeClr val="lt1"/>
-          </a:fontRef>
-        </p:style>
-        <p:txBody>
-          <a:bodyPr rtlCol="0" anchor="ctr"/>
-          <a:lstStyle/>
-          <a:p>
-            <a:pPr algn="ctr"/>
-          </a:p>
-        </p:txBody>
-      </p:sp>
-      <p:sp>
-        <p:nvSpPr>
-          <p:cNvPr id="29" name="TextBox 28"/>
-          <p:cNvSpPr txBox="1"/>
-          <p:nvPr/>
-        </p:nvSpPr>
-        <p:spPr>
-          <a:xfrm>
-            <a:off x="6510528" y="3602736"/>
-            <a:ext cx="1188720" cy="438912"/>
-          </a:xfrm>
-          <a:prstGeom prst="rect">
-            <a:avLst/>
-          </a:prstGeom>
-          <a:noFill/>
-        </p:spPr>
-        <p:txBody>
-          <a:bodyPr wrap="square">
-            <a:spAutoFit/>
-          </a:bodyPr>
-          <a:lstStyle/>
-          <a:p>
-            <a:pPr algn="l"/>
-            <a:r>
-              <a:rPr sz="1200" b="0">
-                <a:solidFill>
-                  <a:srgbClr val="212121"/>
-                </a:solidFill>
-              </a:rPr>
-              <a:t>흐름</a:t>
-            </a:r>
-          </a:p>
-        </p:txBody>
-      </p:sp>
-      <p:sp>
-        <p:nvSpPr>
-          <p:cNvPr id="30" name="Rectangle 29"/>
-          <p:cNvSpPr/>
-          <p:nvPr/>
-        </p:nvSpPr>
-        <p:spPr>
-          <a:xfrm>
-            <a:off x="7818120" y="3401568"/>
-            <a:ext cx="2560320" cy="822960"/>
-          </a:xfrm>
-          <a:prstGeom prst="rect">
-            <a:avLst/>
-          </a:prstGeom>
-          <a:solidFill>
-            <a:srgbClr val="FFFFFF"/>
-          </a:solidFill>
-          <a:ln w="10160">
-            <a:solidFill>
-              <a:srgbClr val="E0E0E0"/>
-            </a:solidFill>
-          </a:ln>
-        </p:spPr>
-        <p:style>
-          <a:lnRef idx="1">
-            <a:schemeClr val="accent1"/>
-          </a:lnRef>
-          <a:fillRef idx="3">
-            <a:schemeClr val="accent1"/>
-          </a:fillRef>
-          <a:effectRef idx="2">
-            <a:schemeClr val="accent1"/>
-          </a:effectRef>
-          <a:fontRef idx="minor">
-            <a:schemeClr val="lt1"/>
-          </a:fontRef>
-        </p:style>
-        <p:txBody>
-          <a:bodyPr rtlCol="0" anchor="ctr"/>
-          <a:lstStyle/>
-          <a:p>
-            <a:pPr algn="ctr"/>
-          </a:p>
-        </p:txBody>
-      </p:sp>
-      <p:sp>
-        <p:nvSpPr>
-          <p:cNvPr id="31" name="TextBox 30"/>
-          <p:cNvSpPr txBox="1"/>
-          <p:nvPr/>
-        </p:nvSpPr>
-        <p:spPr>
-          <a:xfrm>
-            <a:off x="7927848" y="3602736"/>
-            <a:ext cx="2377439" cy="438912"/>
-          </a:xfrm>
-          <a:prstGeom prst="rect">
-            <a:avLst/>
-          </a:prstGeom>
-          <a:noFill/>
-        </p:spPr>
-        <p:txBody>
-          <a:bodyPr wrap="square">
-            <a:spAutoFit/>
-          </a:bodyPr>
-          <a:lstStyle/>
-          <a:p>
-            <a:pPr algn="l"/>
-            <a:r>
-              <a:rPr sz="1200" b="0">
-                <a:solidFill>
-                  <a:srgbClr val="212121"/>
-                </a:solidFill>
-              </a:rPr>
-              <a:t>화면-데이터 연결 처리</a:t>
-            </a:r>
-          </a:p>
-        </p:txBody>
-      </p:sp>
-      <p:sp>
-        <p:nvSpPr>
-          <p:cNvPr id="32" name="Rectangle 31"/>
-          <p:cNvSpPr/>
-          <p:nvPr/>
-        </p:nvSpPr>
-        <p:spPr>
-          <a:xfrm>
-            <a:off x="10424160" y="3401568"/>
-            <a:ext cx="1737360" cy="822960"/>
-          </a:xfrm>
-          <a:prstGeom prst="rect">
-            <a:avLst/>
-          </a:prstGeom>
-          <a:solidFill>
-            <a:srgbClr val="FFFFFF"/>
-          </a:solidFill>
-          <a:ln w="10160">
-            <a:solidFill>
-              <a:srgbClr val="E0E0E0"/>
-            </a:solidFill>
-          </a:ln>
-        </p:spPr>
-        <p:style>
-          <a:lnRef idx="1">
-            <a:schemeClr val="accent1"/>
-          </a:lnRef>
-          <a:fillRef idx="3">
-            <a:schemeClr val="accent1"/>
-          </a:fillRef>
-          <a:effectRef idx="2">
-            <a:schemeClr val="accent1"/>
-          </a:effectRef>
-          <a:fontRef idx="minor">
-            <a:schemeClr val="lt1"/>
-          </a:fontRef>
-        </p:style>
-        <p:txBody>
-          <a:bodyPr rtlCol="0" anchor="ctr"/>
-          <a:lstStyle/>
-          <a:p>
-            <a:pPr algn="ctr"/>
-          </a:p>
-        </p:txBody>
-      </p:sp>
-      <p:sp>
-        <p:nvSpPr>
-          <p:cNvPr id="33" name="TextBox 32"/>
-          <p:cNvSpPr txBox="1"/>
-          <p:nvPr/>
-        </p:nvSpPr>
-        <p:spPr>
-          <a:xfrm>
-            <a:off x="10533888" y="3602736"/>
-            <a:ext cx="1554480" cy="438912"/>
-          </a:xfrm>
-          <a:prstGeom prst="rect">
-            <a:avLst/>
-          </a:prstGeom>
-          <a:noFill/>
-        </p:spPr>
-        <p:txBody>
-          <a:bodyPr wrap="square">
-            <a:spAutoFit/>
-          </a:bodyPr>
-          <a:lstStyle/>
-          <a:p>
-            <a:pPr algn="l"/>
-            <a:r>
-              <a:rPr sz="1200" b="0">
-                <a:solidFill>
-                  <a:srgbClr val="212121"/>
-                </a:solidFill>
-              </a:rPr>
-              <a:t/>
-            </a:r>
-          </a:p>
-        </p:txBody>
-      </p:sp>
-      <p:sp>
-        <p:nvSpPr>
-          <p:cNvPr id="34" name="Rectangle 33"/>
-          <p:cNvSpPr/>
-          <p:nvPr/>
-        </p:nvSpPr>
-        <p:spPr>
-          <a:xfrm>
-            <a:off x="6400800" y="4407408"/>
-            <a:ext cx="1371600" cy="822960"/>
-          </a:xfrm>
-          <a:prstGeom prst="rect">
-            <a:avLst/>
-          </a:prstGeom>
-          <a:solidFill>
-            <a:srgbClr val="FFFFFF"/>
-          </a:solidFill>
-          <a:ln w="10160">
-            <a:solidFill>
-              <a:srgbClr val="E0E0E0"/>
-            </a:solidFill>
-          </a:ln>
-        </p:spPr>
-        <p:style>
-          <a:lnRef idx="1">
-            <a:schemeClr val="accent1"/>
-          </a:lnRef>
-          <a:fillRef idx="3">
-            <a:schemeClr val="accent1"/>
-          </a:fillRef>
-          <a:effectRef idx="2">
-            <a:schemeClr val="accent1"/>
-          </a:effectRef>
-          <a:fontRef idx="minor">
-            <a:schemeClr val="lt1"/>
-          </a:fontRef>
-        </p:style>
-        <p:txBody>
-          <a:bodyPr rtlCol="0" anchor="ctr"/>
-          <a:lstStyle/>
-          <a:p>
-            <a:pPr algn="ctr"/>
-          </a:p>
-        </p:txBody>
-      </p:sp>
-      <p:sp>
-        <p:nvSpPr>
-          <p:cNvPr id="35" name="TextBox 34"/>
-          <p:cNvSpPr txBox="1"/>
-          <p:nvPr/>
-        </p:nvSpPr>
-        <p:spPr>
-          <a:xfrm>
-            <a:off x="6510528" y="4608576"/>
-            <a:ext cx="1188720" cy="438912"/>
-          </a:xfrm>
-          <a:prstGeom prst="rect">
-            <a:avLst/>
-          </a:prstGeom>
-          <a:noFill/>
-        </p:spPr>
-        <p:txBody>
-          <a:bodyPr wrap="square">
-            <a:spAutoFit/>
-          </a:bodyPr>
-          <a:lstStyle/>
-          <a:p>
-            <a:pPr algn="l"/>
-            <a:r>
-              <a:rPr sz="1200" b="0">
-                <a:solidFill>
-                  <a:srgbClr val="212121"/>
-                </a:solidFill>
-              </a:rPr>
-              <a:t>규칙</a:t>
-            </a:r>
-          </a:p>
-        </p:txBody>
-      </p:sp>
-      <p:sp>
-        <p:nvSpPr>
-          <p:cNvPr id="36" name="Rectangle 35"/>
-          <p:cNvSpPr/>
-          <p:nvPr/>
-        </p:nvSpPr>
-        <p:spPr>
-          <a:xfrm>
-            <a:off x="7818120" y="4407408"/>
-            <a:ext cx="2560320" cy="822960"/>
-          </a:xfrm>
-          <a:prstGeom prst="rect">
-            <a:avLst/>
-          </a:prstGeom>
-          <a:solidFill>
-            <a:srgbClr val="FFFFFF"/>
-          </a:solidFill>
-          <a:ln w="10160">
-            <a:solidFill>
-              <a:srgbClr val="E0E0E0"/>
-            </a:solidFill>
-          </a:ln>
-        </p:spPr>
-        <p:style>
-          <a:lnRef idx="1">
-            <a:schemeClr val="accent1"/>
-          </a:lnRef>
-          <a:fillRef idx="3">
-            <a:schemeClr val="accent1"/>
-          </a:fillRef>
-          <a:effectRef idx="2">
-            <a:schemeClr val="accent1"/>
-          </a:effectRef>
-          <a:fontRef idx="minor">
-            <a:schemeClr val="lt1"/>
-          </a:fontRef>
-        </p:style>
-        <p:txBody>
-          <a:bodyPr rtlCol="0" anchor="ctr"/>
-          <a:lstStyle/>
-          <a:p>
-            <a:pPr algn="ctr"/>
-          </a:p>
-        </p:txBody>
-      </p:sp>
-      <p:sp>
-        <p:nvSpPr>
-          <p:cNvPr id="37" name="TextBox 36"/>
-          <p:cNvSpPr txBox="1"/>
-          <p:nvPr/>
-        </p:nvSpPr>
-        <p:spPr>
-          <a:xfrm>
-            <a:off x="7927848" y="4608576"/>
-            <a:ext cx="2377439" cy="438912"/>
-          </a:xfrm>
-          <a:prstGeom prst="rect">
-            <a:avLst/>
-          </a:prstGeom>
-          <a:noFill/>
-        </p:spPr>
-        <p:txBody>
-          <a:bodyPr wrap="square">
-            <a:spAutoFit/>
-          </a:bodyPr>
-          <a:lstStyle/>
-          <a:p>
-            <a:pPr algn="l"/>
-            <a:r>
-              <a:rPr sz="1200" b="0">
-                <a:solidFill>
-                  <a:srgbClr val="212121"/>
-                </a:solidFill>
-              </a:rPr>
-              <a:t>잔액·수익률 계산</a:t>
-            </a:r>
-          </a:p>
-        </p:txBody>
-      </p:sp>
-      <p:sp>
-        <p:nvSpPr>
-          <p:cNvPr id="38" name="Rectangle 37"/>
-          <p:cNvSpPr/>
-          <p:nvPr/>
-        </p:nvSpPr>
-        <p:spPr>
-          <a:xfrm>
-            <a:off x="10424160" y="4407408"/>
-            <a:ext cx="1737360" cy="822960"/>
-          </a:xfrm>
-          <a:prstGeom prst="rect">
-            <a:avLst/>
-          </a:prstGeom>
-          <a:solidFill>
-            <a:srgbClr val="FFFFFF"/>
-          </a:solidFill>
-          <a:ln w="10160">
-            <a:solidFill>
-              <a:srgbClr val="E0E0E0"/>
-            </a:solidFill>
-          </a:ln>
-        </p:spPr>
-        <p:style>
-          <a:lnRef idx="1">
-            <a:schemeClr val="accent1"/>
-          </a:lnRef>
-          <a:fillRef idx="3">
-            <a:schemeClr val="accent1"/>
-          </a:fillRef>
-          <a:effectRef idx="2">
-            <a:schemeClr val="accent1"/>
-          </a:effectRef>
-          <a:fontRef idx="minor">
-            <a:schemeClr val="lt1"/>
-          </a:fontRef>
-        </p:style>
-        <p:txBody>
-          <a:bodyPr rtlCol="0" anchor="ctr"/>
-          <a:lstStyle/>
-          <a:p>
-            <a:pPr algn="ctr"/>
-          </a:p>
-        </p:txBody>
-      </p:sp>
-      <p:sp>
-        <p:nvSpPr>
-          <p:cNvPr id="39" name="TextBox 38"/>
-          <p:cNvSpPr txBox="1"/>
-          <p:nvPr/>
-        </p:nvSpPr>
-        <p:spPr>
-          <a:xfrm>
-            <a:off x="10533888" y="4608576"/>
-            <a:ext cx="1554480" cy="438912"/>
-          </a:xfrm>
-          <a:prstGeom prst="rect">
-            <a:avLst/>
-          </a:prstGeom>
-          <a:noFill/>
-        </p:spPr>
-        <p:txBody>
-          <a:bodyPr wrap="square">
-            <a:spAutoFit/>
-          </a:bodyPr>
-          <a:lstStyle/>
-          <a:p>
-            <a:pPr algn="l"/>
-            <a:r>
-              <a:rPr sz="1200" b="0">
-                <a:solidFill>
-                  <a:srgbClr val="212121"/>
-                </a:solidFill>
-              </a:rPr>
-              <a:t>models/</a:t>
-            </a:r>
-          </a:p>
-        </p:txBody>
-      </p:sp>
-      <p:sp>
-        <p:nvSpPr>
-          <p:cNvPr id="40" name="Rectangle 39"/>
-          <p:cNvSpPr/>
-          <p:nvPr/>
-        </p:nvSpPr>
-        <p:spPr>
-          <a:xfrm>
-            <a:off x="6400800" y="5413248"/>
-            <a:ext cx="1371600" cy="822960"/>
-          </a:xfrm>
-          <a:prstGeom prst="rect">
-            <a:avLst/>
-          </a:prstGeom>
-          <a:solidFill>
-            <a:srgbClr val="FFFFFF"/>
-          </a:solidFill>
-          <a:ln w="10160">
-            <a:solidFill>
-              <a:srgbClr val="E0E0E0"/>
-            </a:solidFill>
-          </a:ln>
-        </p:spPr>
-        <p:style>
-          <a:lnRef idx="1">
-            <a:schemeClr val="accent1"/>
-          </a:lnRef>
-          <a:fillRef idx="3">
-            <a:schemeClr val="accent1"/>
-          </a:fillRef>
-          <a:effectRef idx="2">
-            <a:schemeClr val="accent1"/>
-          </a:effectRef>
-          <a:fontRef idx="minor">
-            <a:schemeClr val="lt1"/>
-          </a:fontRef>
-        </p:style>
-        <p:txBody>
-          <a:bodyPr rtlCol="0" anchor="ctr"/>
-          <a:lstStyle/>
-          <a:p>
-            <a:pPr algn="ctr"/>
-          </a:p>
-        </p:txBody>
-      </p:sp>
-      <p:sp>
-        <p:nvSpPr>
-          <p:cNvPr id="41" name="TextBox 40"/>
-          <p:cNvSpPr txBox="1"/>
-          <p:nvPr/>
-        </p:nvSpPr>
-        <p:spPr>
-          <a:xfrm>
-            <a:off x="6510528" y="5614416"/>
-            <a:ext cx="1188720" cy="438912"/>
-          </a:xfrm>
-          <a:prstGeom prst="rect">
-            <a:avLst/>
-          </a:prstGeom>
-          <a:noFill/>
-        </p:spPr>
-        <p:txBody>
-          <a:bodyPr wrap="square">
-            <a:spAutoFit/>
-          </a:bodyPr>
-          <a:lstStyle/>
-          <a:p>
-            <a:pPr algn="l"/>
-            <a:r>
-              <a:rPr sz="1200" b="0">
-                <a:solidFill>
-                  <a:srgbClr val="212121"/>
-                </a:solidFill>
-              </a:rPr>
-              <a:t>저장</a:t>
-            </a:r>
-          </a:p>
-        </p:txBody>
-      </p:sp>
-      <p:sp>
-        <p:nvSpPr>
-          <p:cNvPr id="42" name="Rectangle 41"/>
-          <p:cNvSpPr/>
-          <p:nvPr/>
-        </p:nvSpPr>
-        <p:spPr>
-          <a:xfrm>
-            <a:off x="7818120" y="5413248"/>
-            <a:ext cx="2560320" cy="822960"/>
-          </a:xfrm>
-          <a:prstGeom prst="rect">
-            <a:avLst/>
-          </a:prstGeom>
-          <a:solidFill>
-            <a:srgbClr val="FFFFFF"/>
-          </a:solidFill>
-          <a:ln w="10160">
-            <a:solidFill>
-              <a:srgbClr val="E0E0E0"/>
-            </a:solidFill>
-          </a:ln>
-        </p:spPr>
-        <p:style>
-          <a:lnRef idx="1">
-            <a:schemeClr val="accent1"/>
-          </a:lnRef>
-          <a:fillRef idx="3">
-            <a:schemeClr val="accent1"/>
-          </a:fillRef>
-          <a:effectRef idx="2">
-            <a:schemeClr val="accent1"/>
-          </a:effectRef>
-          <a:fontRef idx="minor">
-            <a:schemeClr val="lt1"/>
-          </a:fontRef>
-        </p:style>
-        <p:txBody>
-          <a:bodyPr rtlCol="0" anchor="ctr"/>
-          <a:lstStyle/>
-          <a:p>
-            <a:pPr algn="ctr"/>
-          </a:p>
-        </p:txBody>
-      </p:sp>
-      <p:sp>
-        <p:nvSpPr>
-          <p:cNvPr id="43" name="TextBox 42"/>
-          <p:cNvSpPr txBox="1"/>
-          <p:nvPr/>
-        </p:nvSpPr>
-        <p:spPr>
-          <a:xfrm>
-            <a:off x="7927848" y="5614416"/>
-            <a:ext cx="2377439" cy="438912"/>
-          </a:xfrm>
-          <a:prstGeom prst="rect">
-            <a:avLst/>
-          </a:prstGeom>
-          <a:noFill/>
-        </p:spPr>
-        <p:txBody>
-          <a:bodyPr wrap="square">
-            <a:spAutoFit/>
-          </a:bodyPr>
-          <a:lstStyle/>
-          <a:p>
-            <a:pPr algn="l"/>
-            <a:r>
-              <a:rPr sz="1200" b="0">
-                <a:solidFill>
-                  <a:srgbClr val="212121"/>
-                </a:solidFill>
-              </a:rPr>
-              <a:t>Firestore 입출력</a:t>
-            </a:r>
-          </a:p>
-        </p:txBody>
-      </p:sp>
-      <p:sp>
-        <p:nvSpPr>
-          <p:cNvPr id="44" name="Rectangle 43"/>
-          <p:cNvSpPr/>
-          <p:nvPr/>
-        </p:nvSpPr>
-        <p:spPr>
-          <a:xfrm>
-            <a:off x="10424160" y="5413248"/>
-            <a:ext cx="1737360" cy="822960"/>
-          </a:xfrm>
-          <a:prstGeom prst="rect">
-            <a:avLst/>
-          </a:prstGeom>
-          <a:solidFill>
-            <a:srgbClr val="FFFFFF"/>
-          </a:solidFill>
-          <a:ln w="10160">
-            <a:solidFill>
-              <a:srgbClr val="E0E0E0"/>
-            </a:solidFill>
-          </a:ln>
-        </p:spPr>
-        <p:style>
-          <a:lnRef idx="1">
-            <a:schemeClr val="accent1"/>
-          </a:lnRef>
-          <a:fillRef idx="3">
-            <a:schemeClr val="accent1"/>
-          </a:fillRef>
-          <a:effectRef idx="2">
-            <a:schemeClr val="accent1"/>
-          </a:effectRef>
-          <a:fontRef idx="minor">
-            <a:schemeClr val="lt1"/>
-          </a:fontRef>
-        </p:style>
-        <p:txBody>
-          <a:bodyPr rtlCol="0" anchor="ctr"/>
-          <a:lstStyle/>
-          <a:p>
-            <a:pPr algn="ctr"/>
-          </a:p>
-        </p:txBody>
-      </p:sp>
-      <p:sp>
-        <p:nvSpPr>
-          <p:cNvPr id="45" name="TextBox 44"/>
-          <p:cNvSpPr txBox="1"/>
-          <p:nvPr/>
-        </p:nvSpPr>
-        <p:spPr>
-          <a:xfrm>
-            <a:off x="10533888" y="5614416"/>
-            <a:ext cx="1554480" cy="438912"/>
-          </a:xfrm>
-          <a:prstGeom prst="rect">
-            <a:avLst/>
-          </a:prstGeom>
-          <a:noFill/>
-        </p:spPr>
-        <p:txBody>
-          <a:bodyPr wrap="square">
-            <a:spAutoFit/>
-          </a:bodyPr>
-          <a:lstStyle/>
-          <a:p>
-            <a:pPr algn="l"/>
-            <a:r>
-              <a:rPr sz="1200" b="0">
-                <a:solidFill>
-                  <a:srgbClr val="212121"/>
-                </a:solidFill>
-              </a:rPr>
-              <a:t>services/</a:t>
+              <a:t>✓  Flutter</a:t>
             </a:r>
           </a:p>
         </p:txBody>
@@ -11084,7 +10231,7 @@
                   <a:srgbClr val="3F51B5"/>
                 </a:solidFill>
               </a:rPr>
-              <a:t>ADR-0003  —  백엔드 서비스 선택</a:t>
+              <a:t>ADR-0002  —  아키텍처 패턴 선택</a:t>
             </a:r>
           </a:p>
         </p:txBody>
@@ -11161,7 +10308,7 @@
                   <a:srgbClr val="9E9E9E"/>
                 </a:solidFill>
               </a:rPr>
-              <a:t>19 / 20</a:t>
+              <a:t>19 / 21</a:t>
             </a:r>
           </a:p>
         </p:txBody>
@@ -11175,7 +10322,7 @@
         <p:spPr>
           <a:xfrm>
             <a:off x="457200" y="987552"/>
-            <a:ext cx="10972800" cy="347472"/>
+            <a:ext cx="5486400" cy="347472"/>
           </a:xfrm>
           <a:prstGeom prst="rect">
             <a:avLst/>
@@ -11209,7 +10356,7 @@
         <p:spPr>
           <a:xfrm>
             <a:off x="457200" y="1389888"/>
-            <a:ext cx="11247120" cy="1024128"/>
+            <a:ext cx="5486400" cy="1024128"/>
           </a:xfrm>
           <a:prstGeom prst="rect">
             <a:avLst/>
@@ -11252,7 +10399,7 @@
         <p:spPr>
           <a:xfrm>
             <a:off x="594360" y="1499616"/>
-            <a:ext cx="11064240" cy="886968"/>
+            <a:ext cx="5303520" cy="886968"/>
           </a:xfrm>
           <a:prstGeom prst="rect">
             <a:avLst/>
@@ -11272,7 +10419,7 @@
                   <a:srgbClr val="9E9E9E"/>
                 </a:solidFill>
               </a:rPr>
-              <a:t>Supabase</a:t>
+              <a:t>역할 구분 없이 한 파일</a:t>
             </a:r>
           </a:p>
         </p:txBody>
@@ -11286,7 +10433,7 @@
         <p:spPr>
           <a:xfrm>
             <a:off x="457200" y="2651760"/>
-            <a:ext cx="11247120" cy="1024128"/>
+            <a:ext cx="5486400" cy="1024128"/>
           </a:xfrm>
           <a:prstGeom prst="rect">
             <a:avLst/>
@@ -11329,7 +10476,7 @@
         <p:spPr>
           <a:xfrm>
             <a:off x="594360" y="2761488"/>
-            <a:ext cx="11064240" cy="886968"/>
+            <a:ext cx="5303520" cy="886968"/>
           </a:xfrm>
           <a:prstGeom prst="rect">
             <a:avLst/>
@@ -11349,7 +10496,7 @@
                   <a:srgbClr val="9E9E9E"/>
                 </a:solidFill>
               </a:rPr>
-              <a:t>폰 내부 저장 (SQLite 등)</a:t>
+              <a:t>MVC 방식</a:t>
             </a:r>
           </a:p>
         </p:txBody>
@@ -11363,7 +10510,7 @@
         <p:spPr>
           <a:xfrm>
             <a:off x="457200" y="3913631"/>
-            <a:ext cx="11247120" cy="1024128"/>
+            <a:ext cx="5486400" cy="1024128"/>
           </a:xfrm>
           <a:prstGeom prst="rect">
             <a:avLst/>
@@ -11406,7 +10553,7 @@
         <p:spPr>
           <a:xfrm>
             <a:off x="594360" y="4023359"/>
-            <a:ext cx="11064240" cy="886968"/>
+            <a:ext cx="5303520" cy="886968"/>
           </a:xfrm>
           <a:prstGeom prst="rect">
             <a:avLst/>
@@ -11426,7 +10573,7 @@
                   <a:srgbClr val="9E9E9E"/>
                 </a:solidFill>
               </a:rPr>
-              <a:t>직접 서버 구축</a:t>
+              <a:t>6 ~ 8개 레이어</a:t>
             </a:r>
           </a:p>
         </p:txBody>
@@ -11440,7 +10587,7 @@
         <p:spPr>
           <a:xfrm>
             <a:off x="457200" y="5175504"/>
-            <a:ext cx="11247120" cy="1024128"/>
+            <a:ext cx="5486400" cy="1024128"/>
           </a:xfrm>
           <a:prstGeom prst="rect">
             <a:avLst/>
@@ -11483,7 +10630,7 @@
         <p:spPr>
           <a:xfrm>
             <a:off x="594360" y="5285232"/>
-            <a:ext cx="11064240" cy="886968"/>
+            <a:ext cx="5303520" cy="886968"/>
           </a:xfrm>
           <a:prstGeom prst="rect">
             <a:avLst/>
@@ -11503,7 +10650,1226 @@
                   <a:srgbClr val="FFFFFF"/>
                 </a:solidFill>
               </a:rPr>
-              <a:t>✓  Firebase (Auth + Firestore)</a:t>
+              <a:t>✓  4레이어 구조</a:t>
+            </a:r>
+          </a:p>
+        </p:txBody>
+      </p:sp>
+      <p:sp>
+        <p:nvSpPr>
+          <p:cNvPr id="15" name="TextBox 14"/>
+          <p:cNvSpPr txBox="1"/>
+          <p:nvPr/>
+        </p:nvSpPr>
+        <p:spPr>
+          <a:xfrm>
+            <a:off x="6400800" y="987552"/>
+            <a:ext cx="5394960" cy="347472"/>
+          </a:xfrm>
+          <a:prstGeom prst="rect">
+            <a:avLst/>
+          </a:prstGeom>
+          <a:noFill/>
+        </p:spPr>
+        <p:txBody>
+          <a:bodyPr wrap="square">
+            <a:spAutoFit/>
+          </a:bodyPr>
+          <a:lstStyle/>
+          <a:p>
+            <a:pPr algn="l"/>
+            <a:r>
+              <a:rPr sz="1200" b="0">
+                <a:solidFill>
+                  <a:srgbClr val="9E9E9E"/>
+                </a:solidFill>
+              </a:rPr>
+              <a:t>선택된 4레이어 구조</a:t>
+            </a:r>
+          </a:p>
+        </p:txBody>
+      </p:sp>
+      <p:sp>
+        <p:nvSpPr>
+          <p:cNvPr id="16" name="Rectangle 15"/>
+          <p:cNvSpPr/>
+          <p:nvPr/>
+        </p:nvSpPr>
+        <p:spPr>
+          <a:xfrm>
+            <a:off x="6400800" y="1389888"/>
+            <a:ext cx="1371600" cy="822960"/>
+          </a:xfrm>
+          <a:prstGeom prst="rect">
+            <a:avLst/>
+          </a:prstGeom>
+          <a:solidFill>
+            <a:srgbClr val="F5F5F5"/>
+          </a:solidFill>
+          <a:ln w="10160">
+            <a:solidFill>
+              <a:srgbClr val="E0E0E0"/>
+            </a:solidFill>
+          </a:ln>
+        </p:spPr>
+        <p:style>
+          <a:lnRef idx="1">
+            <a:schemeClr val="accent1"/>
+          </a:lnRef>
+          <a:fillRef idx="3">
+            <a:schemeClr val="accent1"/>
+          </a:fillRef>
+          <a:effectRef idx="2">
+            <a:schemeClr val="accent1"/>
+          </a:effectRef>
+          <a:fontRef idx="minor">
+            <a:schemeClr val="lt1"/>
+          </a:fontRef>
+        </p:style>
+        <p:txBody>
+          <a:bodyPr rtlCol="0" anchor="ctr"/>
+          <a:lstStyle/>
+          <a:p>
+            <a:pPr algn="ctr"/>
+          </a:p>
+        </p:txBody>
+      </p:sp>
+      <p:sp>
+        <p:nvSpPr>
+          <p:cNvPr id="17" name="TextBox 16"/>
+          <p:cNvSpPr txBox="1"/>
+          <p:nvPr/>
+        </p:nvSpPr>
+        <p:spPr>
+          <a:xfrm>
+            <a:off x="6510528" y="1591056"/>
+            <a:ext cx="1188720" cy="438912"/>
+          </a:xfrm>
+          <a:prstGeom prst="rect">
+            <a:avLst/>
+          </a:prstGeom>
+          <a:noFill/>
+        </p:spPr>
+        <p:txBody>
+          <a:bodyPr wrap="square">
+            <a:spAutoFit/>
+          </a:bodyPr>
+          <a:lstStyle/>
+          <a:p>
+            <a:pPr algn="l"/>
+            <a:r>
+              <a:rPr sz="1200" b="1">
+                <a:solidFill>
+                  <a:srgbClr val="3F51B5"/>
+                </a:solidFill>
+              </a:rPr>
+              <a:t>레이어</a:t>
+            </a:r>
+          </a:p>
+        </p:txBody>
+      </p:sp>
+      <p:sp>
+        <p:nvSpPr>
+          <p:cNvPr id="18" name="Rectangle 17"/>
+          <p:cNvSpPr/>
+          <p:nvPr/>
+        </p:nvSpPr>
+        <p:spPr>
+          <a:xfrm>
+            <a:off x="7818120" y="1389888"/>
+            <a:ext cx="2560320" cy="822960"/>
+          </a:xfrm>
+          <a:prstGeom prst="rect">
+            <a:avLst/>
+          </a:prstGeom>
+          <a:solidFill>
+            <a:srgbClr val="F5F5F5"/>
+          </a:solidFill>
+          <a:ln w="10160">
+            <a:solidFill>
+              <a:srgbClr val="E0E0E0"/>
+            </a:solidFill>
+          </a:ln>
+        </p:spPr>
+        <p:style>
+          <a:lnRef idx="1">
+            <a:schemeClr val="accent1"/>
+          </a:lnRef>
+          <a:fillRef idx="3">
+            <a:schemeClr val="accent1"/>
+          </a:fillRef>
+          <a:effectRef idx="2">
+            <a:schemeClr val="accent1"/>
+          </a:effectRef>
+          <a:fontRef idx="minor">
+            <a:schemeClr val="lt1"/>
+          </a:fontRef>
+        </p:style>
+        <p:txBody>
+          <a:bodyPr rtlCol="0" anchor="ctr"/>
+          <a:lstStyle/>
+          <a:p>
+            <a:pPr algn="ctr"/>
+          </a:p>
+        </p:txBody>
+      </p:sp>
+      <p:sp>
+        <p:nvSpPr>
+          <p:cNvPr id="19" name="TextBox 18"/>
+          <p:cNvSpPr txBox="1"/>
+          <p:nvPr/>
+        </p:nvSpPr>
+        <p:spPr>
+          <a:xfrm>
+            <a:off x="7927848" y="1591056"/>
+            <a:ext cx="2377439" cy="438912"/>
+          </a:xfrm>
+          <a:prstGeom prst="rect">
+            <a:avLst/>
+          </a:prstGeom>
+          <a:noFill/>
+        </p:spPr>
+        <p:txBody>
+          <a:bodyPr wrap="square">
+            <a:spAutoFit/>
+          </a:bodyPr>
+          <a:lstStyle/>
+          <a:p>
+            <a:pPr algn="l"/>
+            <a:r>
+              <a:rPr sz="1200" b="1">
+                <a:solidFill>
+                  <a:srgbClr val="3F51B5"/>
+                </a:solidFill>
+              </a:rPr>
+              <a:t>역할</a:t>
+            </a:r>
+          </a:p>
+        </p:txBody>
+      </p:sp>
+      <p:sp>
+        <p:nvSpPr>
+          <p:cNvPr id="20" name="Rectangle 19"/>
+          <p:cNvSpPr/>
+          <p:nvPr/>
+        </p:nvSpPr>
+        <p:spPr>
+          <a:xfrm>
+            <a:off x="10424160" y="1389888"/>
+            <a:ext cx="1737360" cy="822960"/>
+          </a:xfrm>
+          <a:prstGeom prst="rect">
+            <a:avLst/>
+          </a:prstGeom>
+          <a:solidFill>
+            <a:srgbClr val="F5F5F5"/>
+          </a:solidFill>
+          <a:ln w="10160">
+            <a:solidFill>
+              <a:srgbClr val="E0E0E0"/>
+            </a:solidFill>
+          </a:ln>
+        </p:spPr>
+        <p:style>
+          <a:lnRef idx="1">
+            <a:schemeClr val="accent1"/>
+          </a:lnRef>
+          <a:fillRef idx="3">
+            <a:schemeClr val="accent1"/>
+          </a:fillRef>
+          <a:effectRef idx="2">
+            <a:schemeClr val="accent1"/>
+          </a:effectRef>
+          <a:fontRef idx="minor">
+            <a:schemeClr val="lt1"/>
+          </a:fontRef>
+        </p:style>
+        <p:txBody>
+          <a:bodyPr rtlCol="0" anchor="ctr"/>
+          <a:lstStyle/>
+          <a:p>
+            <a:pPr algn="ctr"/>
+          </a:p>
+        </p:txBody>
+      </p:sp>
+      <p:sp>
+        <p:nvSpPr>
+          <p:cNvPr id="21" name="TextBox 20"/>
+          <p:cNvSpPr txBox="1"/>
+          <p:nvPr/>
+        </p:nvSpPr>
+        <p:spPr>
+          <a:xfrm>
+            <a:off x="10533888" y="1591056"/>
+            <a:ext cx="1554480" cy="438912"/>
+          </a:xfrm>
+          <a:prstGeom prst="rect">
+            <a:avLst/>
+          </a:prstGeom>
+          <a:noFill/>
+        </p:spPr>
+        <p:txBody>
+          <a:bodyPr wrap="square">
+            <a:spAutoFit/>
+          </a:bodyPr>
+          <a:lstStyle/>
+          <a:p>
+            <a:pPr algn="l"/>
+            <a:r>
+              <a:rPr sz="1200" b="1">
+                <a:solidFill>
+                  <a:srgbClr val="3F51B5"/>
+                </a:solidFill>
+              </a:rPr>
+              <a:t>위치</a:t>
+            </a:r>
+          </a:p>
+        </p:txBody>
+      </p:sp>
+      <p:sp>
+        <p:nvSpPr>
+          <p:cNvPr id="22" name="Rectangle 21"/>
+          <p:cNvSpPr/>
+          <p:nvPr/>
+        </p:nvSpPr>
+        <p:spPr>
+          <a:xfrm>
+            <a:off x="6400800" y="2395728"/>
+            <a:ext cx="1371600" cy="822960"/>
+          </a:xfrm>
+          <a:prstGeom prst="rect">
+            <a:avLst/>
+          </a:prstGeom>
+          <a:solidFill>
+            <a:srgbClr val="FFFFFF"/>
+          </a:solidFill>
+          <a:ln w="10160">
+            <a:solidFill>
+              <a:srgbClr val="E0E0E0"/>
+            </a:solidFill>
+          </a:ln>
+        </p:spPr>
+        <p:style>
+          <a:lnRef idx="1">
+            <a:schemeClr val="accent1"/>
+          </a:lnRef>
+          <a:fillRef idx="3">
+            <a:schemeClr val="accent1"/>
+          </a:fillRef>
+          <a:effectRef idx="2">
+            <a:schemeClr val="accent1"/>
+          </a:effectRef>
+          <a:fontRef idx="minor">
+            <a:schemeClr val="lt1"/>
+          </a:fontRef>
+        </p:style>
+        <p:txBody>
+          <a:bodyPr rtlCol="0" anchor="ctr"/>
+          <a:lstStyle/>
+          <a:p>
+            <a:pPr algn="ctr"/>
+          </a:p>
+        </p:txBody>
+      </p:sp>
+      <p:sp>
+        <p:nvSpPr>
+          <p:cNvPr id="23" name="TextBox 22"/>
+          <p:cNvSpPr txBox="1"/>
+          <p:nvPr/>
+        </p:nvSpPr>
+        <p:spPr>
+          <a:xfrm>
+            <a:off x="6510528" y="2596896"/>
+            <a:ext cx="1188720" cy="438912"/>
+          </a:xfrm>
+          <a:prstGeom prst="rect">
+            <a:avLst/>
+          </a:prstGeom>
+          <a:noFill/>
+        </p:spPr>
+        <p:txBody>
+          <a:bodyPr wrap="square">
+            <a:spAutoFit/>
+          </a:bodyPr>
+          <a:lstStyle/>
+          <a:p>
+            <a:pPr algn="l"/>
+            <a:r>
+              <a:rPr sz="1200" b="0">
+                <a:solidFill>
+                  <a:srgbClr val="212121"/>
+                </a:solidFill>
+              </a:rPr>
+              <a:t>화면</a:t>
+            </a:r>
+          </a:p>
+        </p:txBody>
+      </p:sp>
+      <p:sp>
+        <p:nvSpPr>
+          <p:cNvPr id="24" name="Rectangle 23"/>
+          <p:cNvSpPr/>
+          <p:nvPr/>
+        </p:nvSpPr>
+        <p:spPr>
+          <a:xfrm>
+            <a:off x="7818120" y="2395728"/>
+            <a:ext cx="2560320" cy="822960"/>
+          </a:xfrm>
+          <a:prstGeom prst="rect">
+            <a:avLst/>
+          </a:prstGeom>
+          <a:solidFill>
+            <a:srgbClr val="FFFFFF"/>
+          </a:solidFill>
+          <a:ln w="10160">
+            <a:solidFill>
+              <a:srgbClr val="E0E0E0"/>
+            </a:solidFill>
+          </a:ln>
+        </p:spPr>
+        <p:style>
+          <a:lnRef idx="1">
+            <a:schemeClr val="accent1"/>
+          </a:lnRef>
+          <a:fillRef idx="3">
+            <a:schemeClr val="accent1"/>
+          </a:fillRef>
+          <a:effectRef idx="2">
+            <a:schemeClr val="accent1"/>
+          </a:effectRef>
+          <a:fontRef idx="minor">
+            <a:schemeClr val="lt1"/>
+          </a:fontRef>
+        </p:style>
+        <p:txBody>
+          <a:bodyPr rtlCol="0" anchor="ctr"/>
+          <a:lstStyle/>
+          <a:p>
+            <a:pPr algn="ctr"/>
+          </a:p>
+        </p:txBody>
+      </p:sp>
+      <p:sp>
+        <p:nvSpPr>
+          <p:cNvPr id="25" name="TextBox 24"/>
+          <p:cNvSpPr txBox="1"/>
+          <p:nvPr/>
+        </p:nvSpPr>
+        <p:spPr>
+          <a:xfrm>
+            <a:off x="7927848" y="2596896"/>
+            <a:ext cx="2377439" cy="438912"/>
+          </a:xfrm>
+          <a:prstGeom prst="rect">
+            <a:avLst/>
+          </a:prstGeom>
+          <a:noFill/>
+        </p:spPr>
+        <p:txBody>
+          <a:bodyPr wrap="square">
+            <a:spAutoFit/>
+          </a:bodyPr>
+          <a:lstStyle/>
+          <a:p>
+            <a:pPr algn="l"/>
+            <a:r>
+              <a:rPr sz="1200" b="0">
+                <a:solidFill>
+                  <a:srgbClr val="212121"/>
+                </a:solidFill>
+              </a:rPr>
+              <a:t>버튼·목록·입력창</a:t>
+            </a:r>
+          </a:p>
+        </p:txBody>
+      </p:sp>
+      <p:sp>
+        <p:nvSpPr>
+          <p:cNvPr id="26" name="Rectangle 25"/>
+          <p:cNvSpPr/>
+          <p:nvPr/>
+        </p:nvSpPr>
+        <p:spPr>
+          <a:xfrm>
+            <a:off x="10424160" y="2395728"/>
+            <a:ext cx="1737360" cy="822960"/>
+          </a:xfrm>
+          <a:prstGeom prst="rect">
+            <a:avLst/>
+          </a:prstGeom>
+          <a:solidFill>
+            <a:srgbClr val="FFFFFF"/>
+          </a:solidFill>
+          <a:ln w="10160">
+            <a:solidFill>
+              <a:srgbClr val="E0E0E0"/>
+            </a:solidFill>
+          </a:ln>
+        </p:spPr>
+        <p:style>
+          <a:lnRef idx="1">
+            <a:schemeClr val="accent1"/>
+          </a:lnRef>
+          <a:fillRef idx="3">
+            <a:schemeClr val="accent1"/>
+          </a:fillRef>
+          <a:effectRef idx="2">
+            <a:schemeClr val="accent1"/>
+          </a:effectRef>
+          <a:fontRef idx="minor">
+            <a:schemeClr val="lt1"/>
+          </a:fontRef>
+        </p:style>
+        <p:txBody>
+          <a:bodyPr rtlCol="0" anchor="ctr"/>
+          <a:lstStyle/>
+          <a:p>
+            <a:pPr algn="ctr"/>
+          </a:p>
+        </p:txBody>
+      </p:sp>
+      <p:sp>
+        <p:nvSpPr>
+          <p:cNvPr id="27" name="TextBox 26"/>
+          <p:cNvSpPr txBox="1"/>
+          <p:nvPr/>
+        </p:nvSpPr>
+        <p:spPr>
+          <a:xfrm>
+            <a:off x="10533888" y="2596896"/>
+            <a:ext cx="1554480" cy="438912"/>
+          </a:xfrm>
+          <a:prstGeom prst="rect">
+            <a:avLst/>
+          </a:prstGeom>
+          <a:noFill/>
+        </p:spPr>
+        <p:txBody>
+          <a:bodyPr wrap="square">
+            <a:spAutoFit/>
+          </a:bodyPr>
+          <a:lstStyle/>
+          <a:p>
+            <a:pPr algn="l"/>
+            <a:r>
+              <a:rPr sz="1200" b="0">
+                <a:solidFill>
+                  <a:srgbClr val="212121"/>
+                </a:solidFill>
+              </a:rPr>
+              <a:t>screens/</a:t>
+            </a:r>
+          </a:p>
+        </p:txBody>
+      </p:sp>
+      <p:sp>
+        <p:nvSpPr>
+          <p:cNvPr id="28" name="Rectangle 27"/>
+          <p:cNvSpPr/>
+          <p:nvPr/>
+        </p:nvSpPr>
+        <p:spPr>
+          <a:xfrm>
+            <a:off x="6400800" y="3401568"/>
+            <a:ext cx="1371600" cy="822960"/>
+          </a:xfrm>
+          <a:prstGeom prst="rect">
+            <a:avLst/>
+          </a:prstGeom>
+          <a:solidFill>
+            <a:srgbClr val="FFFFFF"/>
+          </a:solidFill>
+          <a:ln w="10160">
+            <a:solidFill>
+              <a:srgbClr val="E0E0E0"/>
+            </a:solidFill>
+          </a:ln>
+        </p:spPr>
+        <p:style>
+          <a:lnRef idx="1">
+            <a:schemeClr val="accent1"/>
+          </a:lnRef>
+          <a:fillRef idx="3">
+            <a:schemeClr val="accent1"/>
+          </a:fillRef>
+          <a:effectRef idx="2">
+            <a:schemeClr val="accent1"/>
+          </a:effectRef>
+          <a:fontRef idx="minor">
+            <a:schemeClr val="lt1"/>
+          </a:fontRef>
+        </p:style>
+        <p:txBody>
+          <a:bodyPr rtlCol="0" anchor="ctr"/>
+          <a:lstStyle/>
+          <a:p>
+            <a:pPr algn="ctr"/>
+          </a:p>
+        </p:txBody>
+      </p:sp>
+      <p:sp>
+        <p:nvSpPr>
+          <p:cNvPr id="29" name="TextBox 28"/>
+          <p:cNvSpPr txBox="1"/>
+          <p:nvPr/>
+        </p:nvSpPr>
+        <p:spPr>
+          <a:xfrm>
+            <a:off x="6510528" y="3602736"/>
+            <a:ext cx="1188720" cy="438912"/>
+          </a:xfrm>
+          <a:prstGeom prst="rect">
+            <a:avLst/>
+          </a:prstGeom>
+          <a:noFill/>
+        </p:spPr>
+        <p:txBody>
+          <a:bodyPr wrap="square">
+            <a:spAutoFit/>
+          </a:bodyPr>
+          <a:lstStyle/>
+          <a:p>
+            <a:pPr algn="l"/>
+            <a:r>
+              <a:rPr sz="1200" b="0">
+                <a:solidFill>
+                  <a:srgbClr val="212121"/>
+                </a:solidFill>
+              </a:rPr>
+              <a:t>흐름</a:t>
+            </a:r>
+          </a:p>
+        </p:txBody>
+      </p:sp>
+      <p:sp>
+        <p:nvSpPr>
+          <p:cNvPr id="30" name="Rectangle 29"/>
+          <p:cNvSpPr/>
+          <p:nvPr/>
+        </p:nvSpPr>
+        <p:spPr>
+          <a:xfrm>
+            <a:off x="7818120" y="3401568"/>
+            <a:ext cx="2560320" cy="822960"/>
+          </a:xfrm>
+          <a:prstGeom prst="rect">
+            <a:avLst/>
+          </a:prstGeom>
+          <a:solidFill>
+            <a:srgbClr val="FFFFFF"/>
+          </a:solidFill>
+          <a:ln w="10160">
+            <a:solidFill>
+              <a:srgbClr val="E0E0E0"/>
+            </a:solidFill>
+          </a:ln>
+        </p:spPr>
+        <p:style>
+          <a:lnRef idx="1">
+            <a:schemeClr val="accent1"/>
+          </a:lnRef>
+          <a:fillRef idx="3">
+            <a:schemeClr val="accent1"/>
+          </a:fillRef>
+          <a:effectRef idx="2">
+            <a:schemeClr val="accent1"/>
+          </a:effectRef>
+          <a:fontRef idx="minor">
+            <a:schemeClr val="lt1"/>
+          </a:fontRef>
+        </p:style>
+        <p:txBody>
+          <a:bodyPr rtlCol="0" anchor="ctr"/>
+          <a:lstStyle/>
+          <a:p>
+            <a:pPr algn="ctr"/>
+          </a:p>
+        </p:txBody>
+      </p:sp>
+      <p:sp>
+        <p:nvSpPr>
+          <p:cNvPr id="31" name="TextBox 30"/>
+          <p:cNvSpPr txBox="1"/>
+          <p:nvPr/>
+        </p:nvSpPr>
+        <p:spPr>
+          <a:xfrm>
+            <a:off x="7927848" y="3602736"/>
+            <a:ext cx="2377439" cy="438912"/>
+          </a:xfrm>
+          <a:prstGeom prst="rect">
+            <a:avLst/>
+          </a:prstGeom>
+          <a:noFill/>
+        </p:spPr>
+        <p:txBody>
+          <a:bodyPr wrap="square">
+            <a:spAutoFit/>
+          </a:bodyPr>
+          <a:lstStyle/>
+          <a:p>
+            <a:pPr algn="l"/>
+            <a:r>
+              <a:rPr sz="1200" b="0">
+                <a:solidFill>
+                  <a:srgbClr val="212121"/>
+                </a:solidFill>
+              </a:rPr>
+              <a:t>화면-데이터 연결 처리</a:t>
+            </a:r>
+          </a:p>
+        </p:txBody>
+      </p:sp>
+      <p:sp>
+        <p:nvSpPr>
+          <p:cNvPr id="32" name="Rectangle 31"/>
+          <p:cNvSpPr/>
+          <p:nvPr/>
+        </p:nvSpPr>
+        <p:spPr>
+          <a:xfrm>
+            <a:off x="10424160" y="3401568"/>
+            <a:ext cx="1737360" cy="822960"/>
+          </a:xfrm>
+          <a:prstGeom prst="rect">
+            <a:avLst/>
+          </a:prstGeom>
+          <a:solidFill>
+            <a:srgbClr val="FFFFFF"/>
+          </a:solidFill>
+          <a:ln w="10160">
+            <a:solidFill>
+              <a:srgbClr val="E0E0E0"/>
+            </a:solidFill>
+          </a:ln>
+        </p:spPr>
+        <p:style>
+          <a:lnRef idx="1">
+            <a:schemeClr val="accent1"/>
+          </a:lnRef>
+          <a:fillRef idx="3">
+            <a:schemeClr val="accent1"/>
+          </a:fillRef>
+          <a:effectRef idx="2">
+            <a:schemeClr val="accent1"/>
+          </a:effectRef>
+          <a:fontRef idx="minor">
+            <a:schemeClr val="lt1"/>
+          </a:fontRef>
+        </p:style>
+        <p:txBody>
+          <a:bodyPr rtlCol="0" anchor="ctr"/>
+          <a:lstStyle/>
+          <a:p>
+            <a:pPr algn="ctr"/>
+          </a:p>
+        </p:txBody>
+      </p:sp>
+      <p:sp>
+        <p:nvSpPr>
+          <p:cNvPr id="33" name="TextBox 32"/>
+          <p:cNvSpPr txBox="1"/>
+          <p:nvPr/>
+        </p:nvSpPr>
+        <p:spPr>
+          <a:xfrm>
+            <a:off x="10533888" y="3602736"/>
+            <a:ext cx="1554480" cy="438912"/>
+          </a:xfrm>
+          <a:prstGeom prst="rect">
+            <a:avLst/>
+          </a:prstGeom>
+          <a:noFill/>
+        </p:spPr>
+        <p:txBody>
+          <a:bodyPr wrap="square">
+            <a:spAutoFit/>
+          </a:bodyPr>
+          <a:lstStyle/>
+          <a:p>
+            <a:pPr algn="l"/>
+            <a:r>
+              <a:rPr sz="1200" b="0">
+                <a:solidFill>
+                  <a:srgbClr val="212121"/>
+                </a:solidFill>
+              </a:rPr>
+              <a:t/>
+            </a:r>
+          </a:p>
+        </p:txBody>
+      </p:sp>
+      <p:sp>
+        <p:nvSpPr>
+          <p:cNvPr id="34" name="Rectangle 33"/>
+          <p:cNvSpPr/>
+          <p:nvPr/>
+        </p:nvSpPr>
+        <p:spPr>
+          <a:xfrm>
+            <a:off x="6400800" y="4407408"/>
+            <a:ext cx="1371600" cy="822960"/>
+          </a:xfrm>
+          <a:prstGeom prst="rect">
+            <a:avLst/>
+          </a:prstGeom>
+          <a:solidFill>
+            <a:srgbClr val="FFFFFF"/>
+          </a:solidFill>
+          <a:ln w="10160">
+            <a:solidFill>
+              <a:srgbClr val="E0E0E0"/>
+            </a:solidFill>
+          </a:ln>
+        </p:spPr>
+        <p:style>
+          <a:lnRef idx="1">
+            <a:schemeClr val="accent1"/>
+          </a:lnRef>
+          <a:fillRef idx="3">
+            <a:schemeClr val="accent1"/>
+          </a:fillRef>
+          <a:effectRef idx="2">
+            <a:schemeClr val="accent1"/>
+          </a:effectRef>
+          <a:fontRef idx="minor">
+            <a:schemeClr val="lt1"/>
+          </a:fontRef>
+        </p:style>
+        <p:txBody>
+          <a:bodyPr rtlCol="0" anchor="ctr"/>
+          <a:lstStyle/>
+          <a:p>
+            <a:pPr algn="ctr"/>
+          </a:p>
+        </p:txBody>
+      </p:sp>
+      <p:sp>
+        <p:nvSpPr>
+          <p:cNvPr id="35" name="TextBox 34"/>
+          <p:cNvSpPr txBox="1"/>
+          <p:nvPr/>
+        </p:nvSpPr>
+        <p:spPr>
+          <a:xfrm>
+            <a:off x="6510528" y="4608576"/>
+            <a:ext cx="1188720" cy="438912"/>
+          </a:xfrm>
+          <a:prstGeom prst="rect">
+            <a:avLst/>
+          </a:prstGeom>
+          <a:noFill/>
+        </p:spPr>
+        <p:txBody>
+          <a:bodyPr wrap="square">
+            <a:spAutoFit/>
+          </a:bodyPr>
+          <a:lstStyle/>
+          <a:p>
+            <a:pPr algn="l"/>
+            <a:r>
+              <a:rPr sz="1200" b="0">
+                <a:solidFill>
+                  <a:srgbClr val="212121"/>
+                </a:solidFill>
+              </a:rPr>
+              <a:t>규칙</a:t>
+            </a:r>
+          </a:p>
+        </p:txBody>
+      </p:sp>
+      <p:sp>
+        <p:nvSpPr>
+          <p:cNvPr id="36" name="Rectangle 35"/>
+          <p:cNvSpPr/>
+          <p:nvPr/>
+        </p:nvSpPr>
+        <p:spPr>
+          <a:xfrm>
+            <a:off x="7818120" y="4407408"/>
+            <a:ext cx="2560320" cy="822960"/>
+          </a:xfrm>
+          <a:prstGeom prst="rect">
+            <a:avLst/>
+          </a:prstGeom>
+          <a:solidFill>
+            <a:srgbClr val="FFFFFF"/>
+          </a:solidFill>
+          <a:ln w="10160">
+            <a:solidFill>
+              <a:srgbClr val="E0E0E0"/>
+            </a:solidFill>
+          </a:ln>
+        </p:spPr>
+        <p:style>
+          <a:lnRef idx="1">
+            <a:schemeClr val="accent1"/>
+          </a:lnRef>
+          <a:fillRef idx="3">
+            <a:schemeClr val="accent1"/>
+          </a:fillRef>
+          <a:effectRef idx="2">
+            <a:schemeClr val="accent1"/>
+          </a:effectRef>
+          <a:fontRef idx="minor">
+            <a:schemeClr val="lt1"/>
+          </a:fontRef>
+        </p:style>
+        <p:txBody>
+          <a:bodyPr rtlCol="0" anchor="ctr"/>
+          <a:lstStyle/>
+          <a:p>
+            <a:pPr algn="ctr"/>
+          </a:p>
+        </p:txBody>
+      </p:sp>
+      <p:sp>
+        <p:nvSpPr>
+          <p:cNvPr id="37" name="TextBox 36"/>
+          <p:cNvSpPr txBox="1"/>
+          <p:nvPr/>
+        </p:nvSpPr>
+        <p:spPr>
+          <a:xfrm>
+            <a:off x="7927848" y="4608576"/>
+            <a:ext cx="2377439" cy="438912"/>
+          </a:xfrm>
+          <a:prstGeom prst="rect">
+            <a:avLst/>
+          </a:prstGeom>
+          <a:noFill/>
+        </p:spPr>
+        <p:txBody>
+          <a:bodyPr wrap="square">
+            <a:spAutoFit/>
+          </a:bodyPr>
+          <a:lstStyle/>
+          <a:p>
+            <a:pPr algn="l"/>
+            <a:r>
+              <a:rPr sz="1200" b="0">
+                <a:solidFill>
+                  <a:srgbClr val="212121"/>
+                </a:solidFill>
+              </a:rPr>
+              <a:t>잔액·수익률 계산</a:t>
+            </a:r>
+          </a:p>
+        </p:txBody>
+      </p:sp>
+      <p:sp>
+        <p:nvSpPr>
+          <p:cNvPr id="38" name="Rectangle 37"/>
+          <p:cNvSpPr/>
+          <p:nvPr/>
+        </p:nvSpPr>
+        <p:spPr>
+          <a:xfrm>
+            <a:off x="10424160" y="4407408"/>
+            <a:ext cx="1737360" cy="822960"/>
+          </a:xfrm>
+          <a:prstGeom prst="rect">
+            <a:avLst/>
+          </a:prstGeom>
+          <a:solidFill>
+            <a:srgbClr val="FFFFFF"/>
+          </a:solidFill>
+          <a:ln w="10160">
+            <a:solidFill>
+              <a:srgbClr val="E0E0E0"/>
+            </a:solidFill>
+          </a:ln>
+        </p:spPr>
+        <p:style>
+          <a:lnRef idx="1">
+            <a:schemeClr val="accent1"/>
+          </a:lnRef>
+          <a:fillRef idx="3">
+            <a:schemeClr val="accent1"/>
+          </a:fillRef>
+          <a:effectRef idx="2">
+            <a:schemeClr val="accent1"/>
+          </a:effectRef>
+          <a:fontRef idx="minor">
+            <a:schemeClr val="lt1"/>
+          </a:fontRef>
+        </p:style>
+        <p:txBody>
+          <a:bodyPr rtlCol="0" anchor="ctr"/>
+          <a:lstStyle/>
+          <a:p>
+            <a:pPr algn="ctr"/>
+          </a:p>
+        </p:txBody>
+      </p:sp>
+      <p:sp>
+        <p:nvSpPr>
+          <p:cNvPr id="39" name="TextBox 38"/>
+          <p:cNvSpPr txBox="1"/>
+          <p:nvPr/>
+        </p:nvSpPr>
+        <p:spPr>
+          <a:xfrm>
+            <a:off x="10533888" y="4608576"/>
+            <a:ext cx="1554480" cy="438912"/>
+          </a:xfrm>
+          <a:prstGeom prst="rect">
+            <a:avLst/>
+          </a:prstGeom>
+          <a:noFill/>
+        </p:spPr>
+        <p:txBody>
+          <a:bodyPr wrap="square">
+            <a:spAutoFit/>
+          </a:bodyPr>
+          <a:lstStyle/>
+          <a:p>
+            <a:pPr algn="l"/>
+            <a:r>
+              <a:rPr sz="1200" b="0">
+                <a:solidFill>
+                  <a:srgbClr val="212121"/>
+                </a:solidFill>
+              </a:rPr>
+              <a:t>models/</a:t>
+            </a:r>
+          </a:p>
+        </p:txBody>
+      </p:sp>
+      <p:sp>
+        <p:nvSpPr>
+          <p:cNvPr id="40" name="Rectangle 39"/>
+          <p:cNvSpPr/>
+          <p:nvPr/>
+        </p:nvSpPr>
+        <p:spPr>
+          <a:xfrm>
+            <a:off x="6400800" y="5413248"/>
+            <a:ext cx="1371600" cy="822960"/>
+          </a:xfrm>
+          <a:prstGeom prst="rect">
+            <a:avLst/>
+          </a:prstGeom>
+          <a:solidFill>
+            <a:srgbClr val="FFFFFF"/>
+          </a:solidFill>
+          <a:ln w="10160">
+            <a:solidFill>
+              <a:srgbClr val="E0E0E0"/>
+            </a:solidFill>
+          </a:ln>
+        </p:spPr>
+        <p:style>
+          <a:lnRef idx="1">
+            <a:schemeClr val="accent1"/>
+          </a:lnRef>
+          <a:fillRef idx="3">
+            <a:schemeClr val="accent1"/>
+          </a:fillRef>
+          <a:effectRef idx="2">
+            <a:schemeClr val="accent1"/>
+          </a:effectRef>
+          <a:fontRef idx="minor">
+            <a:schemeClr val="lt1"/>
+          </a:fontRef>
+        </p:style>
+        <p:txBody>
+          <a:bodyPr rtlCol="0" anchor="ctr"/>
+          <a:lstStyle/>
+          <a:p>
+            <a:pPr algn="ctr"/>
+          </a:p>
+        </p:txBody>
+      </p:sp>
+      <p:sp>
+        <p:nvSpPr>
+          <p:cNvPr id="41" name="TextBox 40"/>
+          <p:cNvSpPr txBox="1"/>
+          <p:nvPr/>
+        </p:nvSpPr>
+        <p:spPr>
+          <a:xfrm>
+            <a:off x="6510528" y="5614416"/>
+            <a:ext cx="1188720" cy="438912"/>
+          </a:xfrm>
+          <a:prstGeom prst="rect">
+            <a:avLst/>
+          </a:prstGeom>
+          <a:noFill/>
+        </p:spPr>
+        <p:txBody>
+          <a:bodyPr wrap="square">
+            <a:spAutoFit/>
+          </a:bodyPr>
+          <a:lstStyle/>
+          <a:p>
+            <a:pPr algn="l"/>
+            <a:r>
+              <a:rPr sz="1200" b="0">
+                <a:solidFill>
+                  <a:srgbClr val="212121"/>
+                </a:solidFill>
+              </a:rPr>
+              <a:t>저장</a:t>
+            </a:r>
+          </a:p>
+        </p:txBody>
+      </p:sp>
+      <p:sp>
+        <p:nvSpPr>
+          <p:cNvPr id="42" name="Rectangle 41"/>
+          <p:cNvSpPr/>
+          <p:nvPr/>
+        </p:nvSpPr>
+        <p:spPr>
+          <a:xfrm>
+            <a:off x="7818120" y="5413248"/>
+            <a:ext cx="2560320" cy="822960"/>
+          </a:xfrm>
+          <a:prstGeom prst="rect">
+            <a:avLst/>
+          </a:prstGeom>
+          <a:solidFill>
+            <a:srgbClr val="FFFFFF"/>
+          </a:solidFill>
+          <a:ln w="10160">
+            <a:solidFill>
+              <a:srgbClr val="E0E0E0"/>
+            </a:solidFill>
+          </a:ln>
+        </p:spPr>
+        <p:style>
+          <a:lnRef idx="1">
+            <a:schemeClr val="accent1"/>
+          </a:lnRef>
+          <a:fillRef idx="3">
+            <a:schemeClr val="accent1"/>
+          </a:fillRef>
+          <a:effectRef idx="2">
+            <a:schemeClr val="accent1"/>
+          </a:effectRef>
+          <a:fontRef idx="minor">
+            <a:schemeClr val="lt1"/>
+          </a:fontRef>
+        </p:style>
+        <p:txBody>
+          <a:bodyPr rtlCol="0" anchor="ctr"/>
+          <a:lstStyle/>
+          <a:p>
+            <a:pPr algn="ctr"/>
+          </a:p>
+        </p:txBody>
+      </p:sp>
+      <p:sp>
+        <p:nvSpPr>
+          <p:cNvPr id="43" name="TextBox 42"/>
+          <p:cNvSpPr txBox="1"/>
+          <p:nvPr/>
+        </p:nvSpPr>
+        <p:spPr>
+          <a:xfrm>
+            <a:off x="7927848" y="5614416"/>
+            <a:ext cx="2377439" cy="438912"/>
+          </a:xfrm>
+          <a:prstGeom prst="rect">
+            <a:avLst/>
+          </a:prstGeom>
+          <a:noFill/>
+        </p:spPr>
+        <p:txBody>
+          <a:bodyPr wrap="square">
+            <a:spAutoFit/>
+          </a:bodyPr>
+          <a:lstStyle/>
+          <a:p>
+            <a:pPr algn="l"/>
+            <a:r>
+              <a:rPr sz="1200" b="0">
+                <a:solidFill>
+                  <a:srgbClr val="212121"/>
+                </a:solidFill>
+              </a:rPr>
+              <a:t>Firestore 입출력</a:t>
+            </a:r>
+          </a:p>
+        </p:txBody>
+      </p:sp>
+      <p:sp>
+        <p:nvSpPr>
+          <p:cNvPr id="44" name="Rectangle 43"/>
+          <p:cNvSpPr/>
+          <p:nvPr/>
+        </p:nvSpPr>
+        <p:spPr>
+          <a:xfrm>
+            <a:off x="10424160" y="5413248"/>
+            <a:ext cx="1737360" cy="822960"/>
+          </a:xfrm>
+          <a:prstGeom prst="rect">
+            <a:avLst/>
+          </a:prstGeom>
+          <a:solidFill>
+            <a:srgbClr val="FFFFFF"/>
+          </a:solidFill>
+          <a:ln w="10160">
+            <a:solidFill>
+              <a:srgbClr val="E0E0E0"/>
+            </a:solidFill>
+          </a:ln>
+        </p:spPr>
+        <p:style>
+          <a:lnRef idx="1">
+            <a:schemeClr val="accent1"/>
+          </a:lnRef>
+          <a:fillRef idx="3">
+            <a:schemeClr val="accent1"/>
+          </a:fillRef>
+          <a:effectRef idx="2">
+            <a:schemeClr val="accent1"/>
+          </a:effectRef>
+          <a:fontRef idx="minor">
+            <a:schemeClr val="lt1"/>
+          </a:fontRef>
+        </p:style>
+        <p:txBody>
+          <a:bodyPr rtlCol="0" anchor="ctr"/>
+          <a:lstStyle/>
+          <a:p>
+            <a:pPr algn="ctr"/>
+          </a:p>
+        </p:txBody>
+      </p:sp>
+      <p:sp>
+        <p:nvSpPr>
+          <p:cNvPr id="45" name="TextBox 44"/>
+          <p:cNvSpPr txBox="1"/>
+          <p:nvPr/>
+        </p:nvSpPr>
+        <p:spPr>
+          <a:xfrm>
+            <a:off x="10533888" y="5614416"/>
+            <a:ext cx="1554480" cy="438912"/>
+          </a:xfrm>
+          <a:prstGeom prst="rect">
+            <a:avLst/>
+          </a:prstGeom>
+          <a:noFill/>
+        </p:spPr>
+        <p:txBody>
+          <a:bodyPr wrap="square">
+            <a:spAutoFit/>
+          </a:bodyPr>
+          <a:lstStyle/>
+          <a:p>
+            <a:pPr algn="l"/>
+            <a:r>
+              <a:rPr sz="1200" b="0">
+                <a:solidFill>
+                  <a:srgbClr val="212121"/>
+                </a:solidFill>
+              </a:rPr>
+              <a:t>services/</a:t>
             </a:r>
           </a:p>
         </p:txBody>
@@ -11707,7 +12073,7 @@
                   <a:srgbClr val="9E9E9E"/>
                 </a:solidFill>
               </a:rPr>
-              <a:t>2 / 20</a:t>
+              <a:t>2 / 21</a:t>
             </a:r>
           </a:p>
         </p:txBody>
@@ -12323,6 +12689,518 @@
         <p:spPr>
           <a:xfrm>
             <a:off x="0" y="0"/>
+            <a:ext cx="12188952" cy="914400"/>
+          </a:xfrm>
+          <a:prstGeom prst="rect">
+            <a:avLst/>
+          </a:prstGeom>
+          <a:noFill/>
+          <a:ln>
+            <a:noFill/>
+          </a:ln>
+        </p:spPr>
+        <p:style>
+          <a:lnRef idx="1">
+            <a:schemeClr val="accent1"/>
+          </a:lnRef>
+          <a:fillRef idx="3">
+            <a:schemeClr val="accent1"/>
+          </a:fillRef>
+          <a:effectRef idx="2">
+            <a:schemeClr val="accent1"/>
+          </a:effectRef>
+          <a:fontRef idx="minor">
+            <a:schemeClr val="lt1"/>
+          </a:fontRef>
+        </p:style>
+        <p:txBody>
+          <a:bodyPr rtlCol="0" anchor="ctr"/>
+          <a:lstStyle/>
+          <a:p>
+            <a:pPr algn="ctr"/>
+          </a:p>
+        </p:txBody>
+      </p:sp>
+      <p:sp>
+        <p:nvSpPr>
+          <p:cNvPr id="3" name="TextBox 2"/>
+          <p:cNvSpPr txBox="1"/>
+          <p:nvPr/>
+        </p:nvSpPr>
+        <p:spPr>
+          <a:xfrm>
+            <a:off x="457200" y="73152"/>
+            <a:ext cx="10972800" cy="566928"/>
+          </a:xfrm>
+          <a:prstGeom prst="rect">
+            <a:avLst/>
+          </a:prstGeom>
+          <a:noFill/>
+        </p:spPr>
+        <p:txBody>
+          <a:bodyPr wrap="square">
+            <a:spAutoFit/>
+          </a:bodyPr>
+          <a:lstStyle/>
+          <a:p>
+            <a:pPr algn="l"/>
+            <a:r>
+              <a:rPr sz="2400" b="1">
+                <a:solidFill>
+                  <a:srgbClr val="3F51B5"/>
+                </a:solidFill>
+              </a:rPr>
+              <a:t>ADR-0003  —  백엔드 서비스 선택</a:t>
+            </a:r>
+          </a:p>
+        </p:txBody>
+      </p:sp>
+      <p:sp>
+        <p:nvSpPr>
+          <p:cNvPr id="4" name="Rectangle 3"/>
+          <p:cNvSpPr/>
+          <p:nvPr/>
+        </p:nvSpPr>
+        <p:spPr>
+          <a:xfrm>
+            <a:off x="0" y="868680"/>
+            <a:ext cx="12188952" cy="45720"/>
+          </a:xfrm>
+          <a:prstGeom prst="rect">
+            <a:avLst/>
+          </a:prstGeom>
+          <a:solidFill>
+            <a:srgbClr val="3F51B5"/>
+          </a:solidFill>
+          <a:ln>
+            <a:noFill/>
+          </a:ln>
+        </p:spPr>
+        <p:style>
+          <a:lnRef idx="1">
+            <a:schemeClr val="accent1"/>
+          </a:lnRef>
+          <a:fillRef idx="3">
+            <a:schemeClr val="accent1"/>
+          </a:fillRef>
+          <a:effectRef idx="2">
+            <a:schemeClr val="accent1"/>
+          </a:effectRef>
+          <a:fontRef idx="minor">
+            <a:schemeClr val="lt1"/>
+          </a:fontRef>
+        </p:style>
+        <p:txBody>
+          <a:bodyPr rtlCol="0" anchor="ctr"/>
+          <a:lstStyle/>
+          <a:p>
+            <a:pPr algn="ctr"/>
+          </a:p>
+        </p:txBody>
+      </p:sp>
+      <p:sp>
+        <p:nvSpPr>
+          <p:cNvPr id="5" name="TextBox 4"/>
+          <p:cNvSpPr txBox="1"/>
+          <p:nvPr/>
+        </p:nvSpPr>
+        <p:spPr>
+          <a:xfrm>
+            <a:off x="11247120" y="6492240"/>
+            <a:ext cx="822960" cy="274320"/>
+          </a:xfrm>
+          <a:prstGeom prst="rect">
+            <a:avLst/>
+          </a:prstGeom>
+          <a:noFill/>
+        </p:spPr>
+        <p:txBody>
+          <a:bodyPr wrap="square">
+            <a:spAutoFit/>
+          </a:bodyPr>
+          <a:lstStyle/>
+          <a:p>
+            <a:pPr algn="ctr"/>
+            <a:r>
+              <a:rPr sz="1000" b="0">
+                <a:solidFill>
+                  <a:srgbClr val="9E9E9E"/>
+                </a:solidFill>
+              </a:rPr>
+              <a:t>20 / 21</a:t>
+            </a:r>
+          </a:p>
+        </p:txBody>
+      </p:sp>
+      <p:sp>
+        <p:nvSpPr>
+          <p:cNvPr id="6" name="TextBox 5"/>
+          <p:cNvSpPr txBox="1"/>
+          <p:nvPr/>
+        </p:nvSpPr>
+        <p:spPr>
+          <a:xfrm>
+            <a:off x="457200" y="987552"/>
+            <a:ext cx="10972800" cy="347472"/>
+          </a:xfrm>
+          <a:prstGeom prst="rect">
+            <a:avLst/>
+          </a:prstGeom>
+          <a:noFill/>
+        </p:spPr>
+        <p:txBody>
+          <a:bodyPr wrap="square">
+            <a:spAutoFit/>
+          </a:bodyPr>
+          <a:lstStyle/>
+          <a:p>
+            <a:pPr algn="l"/>
+            <a:r>
+              <a:rPr sz="1200" b="0">
+                <a:solidFill>
+                  <a:srgbClr val="9E9E9E"/>
+                </a:solidFill>
+              </a:rPr>
+              <a:t>선택지 비교</a:t>
+            </a:r>
+          </a:p>
+        </p:txBody>
+      </p:sp>
+      <p:sp>
+        <p:nvSpPr>
+          <p:cNvPr id="7" name="Rectangle 6"/>
+          <p:cNvSpPr/>
+          <p:nvPr/>
+        </p:nvSpPr>
+        <p:spPr>
+          <a:xfrm>
+            <a:off x="457200" y="1389888"/>
+            <a:ext cx="11247120" cy="1024128"/>
+          </a:xfrm>
+          <a:prstGeom prst="rect">
+            <a:avLst/>
+          </a:prstGeom>
+          <a:noFill/>
+          <a:ln w="10160">
+            <a:solidFill>
+              <a:srgbClr val="E0E0E0"/>
+            </a:solidFill>
+          </a:ln>
+        </p:spPr>
+        <p:style>
+          <a:lnRef idx="1">
+            <a:schemeClr val="accent1"/>
+          </a:lnRef>
+          <a:fillRef idx="3">
+            <a:schemeClr val="accent1"/>
+          </a:fillRef>
+          <a:effectRef idx="2">
+            <a:schemeClr val="accent1"/>
+          </a:effectRef>
+          <a:fontRef idx="minor">
+            <a:schemeClr val="lt1"/>
+          </a:fontRef>
+        </p:style>
+        <p:txBody>
+          <a:bodyPr rtlCol="0" anchor="ctr"/>
+          <a:lstStyle/>
+          <a:p>
+            <a:pPr algn="ctr"/>
+          </a:p>
+        </p:txBody>
+      </p:sp>
+      <p:sp>
+        <p:nvSpPr>
+          <p:cNvPr id="8" name="TextBox 7"/>
+          <p:cNvSpPr txBox="1"/>
+          <p:nvPr/>
+        </p:nvSpPr>
+        <p:spPr>
+          <a:xfrm>
+            <a:off x="594360" y="1499616"/>
+            <a:ext cx="11064240" cy="886968"/>
+          </a:xfrm>
+          <a:prstGeom prst="rect">
+            <a:avLst/>
+          </a:prstGeom>
+          <a:noFill/>
+        </p:spPr>
+        <p:txBody>
+          <a:bodyPr wrap="square">
+            <a:spAutoFit/>
+          </a:bodyPr>
+          <a:lstStyle/>
+          <a:p>
+            <a:pPr algn="l"/>
+            <a:r>
+              <a:rPr sz="1600" b="0">
+                <a:solidFill>
+                  <a:srgbClr val="9E9E9E"/>
+                </a:solidFill>
+              </a:rPr>
+              <a:t>Supabase</a:t>
+            </a:r>
+          </a:p>
+        </p:txBody>
+      </p:sp>
+      <p:sp>
+        <p:nvSpPr>
+          <p:cNvPr id="9" name="Rectangle 8"/>
+          <p:cNvSpPr/>
+          <p:nvPr/>
+        </p:nvSpPr>
+        <p:spPr>
+          <a:xfrm>
+            <a:off x="457200" y="2651760"/>
+            <a:ext cx="11247120" cy="1024128"/>
+          </a:xfrm>
+          <a:prstGeom prst="rect">
+            <a:avLst/>
+          </a:prstGeom>
+          <a:noFill/>
+          <a:ln w="10160">
+            <a:solidFill>
+              <a:srgbClr val="E0E0E0"/>
+            </a:solidFill>
+          </a:ln>
+        </p:spPr>
+        <p:style>
+          <a:lnRef idx="1">
+            <a:schemeClr val="accent1"/>
+          </a:lnRef>
+          <a:fillRef idx="3">
+            <a:schemeClr val="accent1"/>
+          </a:fillRef>
+          <a:effectRef idx="2">
+            <a:schemeClr val="accent1"/>
+          </a:effectRef>
+          <a:fontRef idx="minor">
+            <a:schemeClr val="lt1"/>
+          </a:fontRef>
+        </p:style>
+        <p:txBody>
+          <a:bodyPr rtlCol="0" anchor="ctr"/>
+          <a:lstStyle/>
+          <a:p>
+            <a:pPr algn="ctr"/>
+          </a:p>
+        </p:txBody>
+      </p:sp>
+      <p:sp>
+        <p:nvSpPr>
+          <p:cNvPr id="10" name="TextBox 9"/>
+          <p:cNvSpPr txBox="1"/>
+          <p:nvPr/>
+        </p:nvSpPr>
+        <p:spPr>
+          <a:xfrm>
+            <a:off x="594360" y="2761488"/>
+            <a:ext cx="11064240" cy="886968"/>
+          </a:xfrm>
+          <a:prstGeom prst="rect">
+            <a:avLst/>
+          </a:prstGeom>
+          <a:noFill/>
+        </p:spPr>
+        <p:txBody>
+          <a:bodyPr wrap="square">
+            <a:spAutoFit/>
+          </a:bodyPr>
+          <a:lstStyle/>
+          <a:p>
+            <a:pPr algn="l"/>
+            <a:r>
+              <a:rPr sz="1600" b="0">
+                <a:solidFill>
+                  <a:srgbClr val="9E9E9E"/>
+                </a:solidFill>
+              </a:rPr>
+              <a:t>폰 내부 저장 (SQLite 등)</a:t>
+            </a:r>
+          </a:p>
+        </p:txBody>
+      </p:sp>
+      <p:sp>
+        <p:nvSpPr>
+          <p:cNvPr id="11" name="Rectangle 10"/>
+          <p:cNvSpPr/>
+          <p:nvPr/>
+        </p:nvSpPr>
+        <p:spPr>
+          <a:xfrm>
+            <a:off x="457200" y="3913631"/>
+            <a:ext cx="11247120" cy="1024128"/>
+          </a:xfrm>
+          <a:prstGeom prst="rect">
+            <a:avLst/>
+          </a:prstGeom>
+          <a:noFill/>
+          <a:ln w="10160">
+            <a:solidFill>
+              <a:srgbClr val="E0E0E0"/>
+            </a:solidFill>
+          </a:ln>
+        </p:spPr>
+        <p:style>
+          <a:lnRef idx="1">
+            <a:schemeClr val="accent1"/>
+          </a:lnRef>
+          <a:fillRef idx="3">
+            <a:schemeClr val="accent1"/>
+          </a:fillRef>
+          <a:effectRef idx="2">
+            <a:schemeClr val="accent1"/>
+          </a:effectRef>
+          <a:fontRef idx="minor">
+            <a:schemeClr val="lt1"/>
+          </a:fontRef>
+        </p:style>
+        <p:txBody>
+          <a:bodyPr rtlCol="0" anchor="ctr"/>
+          <a:lstStyle/>
+          <a:p>
+            <a:pPr algn="ctr"/>
+          </a:p>
+        </p:txBody>
+      </p:sp>
+      <p:sp>
+        <p:nvSpPr>
+          <p:cNvPr id="12" name="TextBox 11"/>
+          <p:cNvSpPr txBox="1"/>
+          <p:nvPr/>
+        </p:nvSpPr>
+        <p:spPr>
+          <a:xfrm>
+            <a:off x="594360" y="4023359"/>
+            <a:ext cx="11064240" cy="886968"/>
+          </a:xfrm>
+          <a:prstGeom prst="rect">
+            <a:avLst/>
+          </a:prstGeom>
+          <a:noFill/>
+        </p:spPr>
+        <p:txBody>
+          <a:bodyPr wrap="square">
+            <a:spAutoFit/>
+          </a:bodyPr>
+          <a:lstStyle/>
+          <a:p>
+            <a:pPr algn="l"/>
+            <a:r>
+              <a:rPr sz="1600" b="0">
+                <a:solidFill>
+                  <a:srgbClr val="9E9E9E"/>
+                </a:solidFill>
+              </a:rPr>
+              <a:t>직접 서버 구축</a:t>
+            </a:r>
+          </a:p>
+        </p:txBody>
+      </p:sp>
+      <p:sp>
+        <p:nvSpPr>
+          <p:cNvPr id="13" name="Rectangle 12"/>
+          <p:cNvSpPr/>
+          <p:nvPr/>
+        </p:nvSpPr>
+        <p:spPr>
+          <a:xfrm>
+            <a:off x="457200" y="5175504"/>
+            <a:ext cx="11247120" cy="1024128"/>
+          </a:xfrm>
+          <a:prstGeom prst="rect">
+            <a:avLst/>
+          </a:prstGeom>
+          <a:solidFill>
+            <a:srgbClr val="3F51B5"/>
+          </a:solidFill>
+          <a:ln>
+            <a:noFill/>
+          </a:ln>
+        </p:spPr>
+        <p:style>
+          <a:lnRef idx="1">
+            <a:schemeClr val="accent1"/>
+          </a:lnRef>
+          <a:fillRef idx="3">
+            <a:schemeClr val="accent1"/>
+          </a:fillRef>
+          <a:effectRef idx="2">
+            <a:schemeClr val="accent1"/>
+          </a:effectRef>
+          <a:fontRef idx="minor">
+            <a:schemeClr val="lt1"/>
+          </a:fontRef>
+        </p:style>
+        <p:txBody>
+          <a:bodyPr rtlCol="0" anchor="ctr"/>
+          <a:lstStyle/>
+          <a:p>
+            <a:pPr algn="ctr"/>
+          </a:p>
+        </p:txBody>
+      </p:sp>
+      <p:sp>
+        <p:nvSpPr>
+          <p:cNvPr id="14" name="TextBox 13"/>
+          <p:cNvSpPr txBox="1"/>
+          <p:nvPr/>
+        </p:nvSpPr>
+        <p:spPr>
+          <a:xfrm>
+            <a:off x="594360" y="5285232"/>
+            <a:ext cx="11064240" cy="886968"/>
+          </a:xfrm>
+          <a:prstGeom prst="rect">
+            <a:avLst/>
+          </a:prstGeom>
+          <a:noFill/>
+        </p:spPr>
+        <p:txBody>
+          <a:bodyPr wrap="square">
+            <a:spAutoFit/>
+          </a:bodyPr>
+          <a:lstStyle/>
+          <a:p>
+            <a:pPr algn="l"/>
+            <a:r>
+              <a:rPr sz="1600" b="1">
+                <a:solidFill>
+                  <a:srgbClr val="FFFFFF"/>
+                </a:solidFill>
+              </a:rPr>
+              <a:t>✓  Firebase (Auth + Firestore)</a:t>
+            </a:r>
+          </a:p>
+        </p:txBody>
+      </p:sp>
+    </p:spTree>
+  </p:cSld>
+  <p:clrMapOvr>
+    <a:masterClrMapping/>
+  </p:clrMapOvr>
+</p:sld>
+</file>
+
+<file path=ppt/slides/slide21.xml><?xml version="1.0" encoding="utf-8"?>
+<p:sld xmlns:a="http://schemas.openxmlformats.org/drawingml/2006/main" xmlns:p="http://schemas.openxmlformats.org/presentationml/2006/main" xmlns:r="http://schemas.openxmlformats.org/officeDocument/2006/relationships">
+  <p:cSld>
+    <p:spTree>
+      <p:nvGrpSpPr>
+        <p:cNvPr id="1" name=""/>
+        <p:cNvGrpSpPr/>
+        <p:nvPr/>
+      </p:nvGrpSpPr>
+      <p:grpSpPr/>
+      <p:sp>
+        <p:nvSpPr>
+          <p:cNvPr id="2" name="Rectangle 1"/>
+          <p:cNvSpPr/>
+          <p:nvPr/>
+        </p:nvSpPr>
+        <p:spPr>
+          <a:xfrm>
+            <a:off x="0" y="0"/>
             <a:ext cx="12188952" cy="6858000"/>
           </a:xfrm>
           <a:prstGeom prst="rect">
@@ -12540,7 +13418,7 @@
                   <a:srgbClr val="9E9E9E"/>
                 </a:solidFill>
               </a:rPr>
-              <a:t>20 / 20</a:t>
+              <a:t>21 / 21</a:t>
             </a:r>
           </a:p>
         </p:txBody>
@@ -12744,7 +13622,7 @@
                   <a:srgbClr val="9E9E9E"/>
                 </a:solidFill>
               </a:rPr>
-              <a:t>3 / 20</a:t>
+              <a:t>3 / 21</a:t>
             </a:r>
           </a:p>
         </p:txBody>
@@ -13542,7 +14420,7 @@
                   <a:srgbClr val="9E9E9E"/>
                 </a:solidFill>
               </a:rPr>
-              <a:t>4 / 20</a:t>
+              <a:t>4 / 21</a:t>
             </a:r>
           </a:p>
         </p:txBody>
@@ -13770,7 +14648,7 @@
                   <a:srgbClr val="9E9E9E"/>
                 </a:solidFill>
               </a:rPr>
-              <a:t>5 / 20</a:t>
+              <a:t>5 / 21</a:t>
             </a:r>
           </a:p>
         </p:txBody>
@@ -15228,7 +16106,7 @@
                   <a:srgbClr val="9E9E9E"/>
                 </a:solidFill>
               </a:rPr>
-              <a:t>6 / 20</a:t>
+              <a:t>6 / 21</a:t>
             </a:r>
           </a:p>
         </p:txBody>
@@ -16410,7 +17288,7 @@
                   <a:srgbClr val="9E9E9E"/>
                 </a:solidFill>
               </a:rPr>
-              <a:t>7 / 20</a:t>
+              <a:t>7 / 21</a:t>
             </a:r>
           </a:p>
         </p:txBody>
@@ -17920,7 +18798,7 @@
                   <a:srgbClr val="9E9E9E"/>
                 </a:solidFill>
               </a:rPr>
-              <a:t>8 / 20</a:t>
+              <a:t>8 / 21</a:t>
             </a:r>
           </a:p>
         </p:txBody>
@@ -18665,7 +19543,7 @@
                   <a:srgbClr val="9E9E9E"/>
                 </a:solidFill>
               </a:rPr>
-              <a:t>9 / 20</a:t>
+              <a:t>9 / 21</a:t>
             </a:r>
           </a:p>
         </p:txBody>

--- a/portfolio-tracker/presentation/portfolio-tracker-final.pptx
+++ b/portfolio-tracker/presentation/portfolio-tracker-final.pptx
@@ -26,6 +26,7 @@
     <p:sldId id="274" r:id="rId25"/>
     <p:sldId id="275" r:id="rId26"/>
     <p:sldId id="276" r:id="rId27"/>
+    <p:sldId id="277" r:id="rId28"/>
   </p:sldIdLst>
   <p:sldSz cx="12188952" cy="6858000" type="screen4x3"/>
   <p:notesSz cx="6858000" cy="9144000"/>
@@ -13428,6 +13429,87 @@
   <p:clrMapOvr>
     <a:masterClrMapping/>
   </p:clrMapOvr>
+</p:sld>
+</file>
+
+<file path=ppt/slides/slide22.xml><?xml version="1.0" encoding="utf-8"?>
+<p:sld xmlns:a="http://schemas.openxmlformats.org/drawingml/2006/main" xmlns:p="http://schemas.openxmlformats.org/presentationml/2006/main" xmlns:r="http://schemas.openxmlformats.org/officeDocument/2006/relationships">
+  <p:cSld>
+    <p:bg>
+      <p:bgPr>
+        <a:solidFill>
+          <a:srgbClr val="000000"/>
+        </a:solidFill>
+        <a:effectLst/>
+      </p:bgPr>
+    </p:bg>
+    <p:spTree>
+      <p:nvGrpSpPr>
+        <p:cNvPr id="1" name=""/>
+        <p:cNvGrpSpPr/>
+        <p:nvPr/>
+      </p:nvGrpSpPr>
+      <p:grpSpPr/>
+      <p:pic>
+        <p:nvPicPr>
+          <p:cNvPr id="2" name="PortfolioTracker.mp4">
+            <a:hlinkClick r:id="" action="ppaction://media"/>
+          </p:cNvPr>
+          <p:cNvPicPr>
+            <a:picLocks noChangeAspect="1"/>
+          </p:cNvPicPr>
+          <p:nvPr>
+            <a:videoFile r:link="rId3"/>
+            <p:extLst>
+              <p:ext uri="{DAA4B4D4-6D71-4841-9C94-3DE7FCFB9230}">
+                <p14:media xmlns:p14="http://schemas.microsoft.com/office/powerpoint/2010/main" r:embed="rId2"/>
+              </p:ext>
+            </p:extLst>
+          </p:nvPr>
+        </p:nvPicPr>
+        <p:blipFill>
+          <a:blip r:embed="rId4"/>
+          <a:stretch>
+            <a:fillRect/>
+          </a:stretch>
+        </p:blipFill>
+        <p:spPr>
+          <a:xfrm>
+            <a:off x="0" y="0"/>
+            <a:ext cx="12188952" cy="6858000"/>
+          </a:xfrm>
+          <a:prstGeom prst="rect">
+            <a:avLst/>
+          </a:prstGeom>
+        </p:spPr>
+      </p:pic>
+    </p:spTree>
+  </p:cSld>
+  <p:clrMapOvr>
+    <a:masterClrMapping/>
+  </p:clrMapOvr>
+  <p:timing>
+    <p:tnLst>
+      <p:par>
+        <p:cTn id="1" dur="indefinite" restart="never" nodeType="tmRoot">
+          <p:childTnLst>
+            <p:video>
+              <p:cMediaNode vol="80000">
+                <p:cTn id="2" fill="hold" display="0">
+                  <p:stCondLst>
+                    <p:cond delay="indefinite"/>
+                  </p:stCondLst>
+                </p:cTn>
+                <p:tgtEl>
+                  <p:spTgt spid="2"/>
+                </p:tgtEl>
+              </p:cMediaNode>
+            </p:video>
+          </p:childTnLst>
+        </p:cTn>
+      </p:par>
+    </p:tnLst>
+  </p:timing>
 </p:sld>
 </file>
 

--- a/portfolio-tracker/presentation/portfolio-tracker-final.pptx
+++ b/portfolio-tracker/presentation/portfolio-tracker-final.pptx
@@ -25,8 +25,8 @@
     <p:sldId id="273" r:id="rId24"/>
     <p:sldId id="274" r:id="rId25"/>
     <p:sldId id="275" r:id="rId26"/>
+    <p:sldId id="277" r:id="rId28"/>
     <p:sldId id="276" r:id="rId27"/>
-    <p:sldId id="277" r:id="rId28"/>
   </p:sldIdLst>
   <p:sldSz cx="12188952" cy="6858000" type="screen4x3"/>
   <p:notesSz cx="6858000" cy="9144000"/>

--- a/portfolio-tracker/presentation/portfolio-tracker-final.pptx
+++ b/portfolio-tracker/presentation/portfolio-tracker-final.pptx
@@ -5,30 +5,31 @@
     <p:sldMasterId id="2147483648" r:id="rId1"/>
   </p:sldMasterIdLst>
   <p:sldIdLst>
-    <p:sldId id="256" r:id="rId7"/>
-    <p:sldId id="257" r:id="rId8"/>
-    <p:sldId id="258" r:id="rId9"/>
-    <p:sldId id="259" r:id="rId10"/>
-    <p:sldId id="260" r:id="rId11"/>
-    <p:sldId id="261" r:id="rId12"/>
-    <p:sldId id="262" r:id="rId13"/>
-    <p:sldId id="263" r:id="rId14"/>
-    <p:sldId id="264" r:id="rId15"/>
-    <p:sldId id="265" r:id="rId16"/>
-    <p:sldId id="266" r:id="rId17"/>
-    <p:sldId id="267" r:id="rId18"/>
-    <p:sldId id="268" r:id="rId19"/>
-    <p:sldId id="269" r:id="rId20"/>
-    <p:sldId id="270" r:id="rId21"/>
-    <p:sldId id="271" r:id="rId22"/>
-    <p:sldId id="272" r:id="rId23"/>
-    <p:sldId id="273" r:id="rId24"/>
-    <p:sldId id="274" r:id="rId25"/>
-    <p:sldId id="275" r:id="rId26"/>
-    <p:sldId id="277" r:id="rId28"/>
-    <p:sldId id="276" r:id="rId27"/>
+    <p:sldId id="256" r:id="rId2"/>
+    <p:sldId id="257" r:id="rId3"/>
+    <p:sldId id="259" r:id="rId5"/>
+    <p:sldId id="261" r:id="rId7"/>
+    <p:sldId id="269" r:id="rId15"/>
+    <p:sldId id="270" r:id="rId16"/>
+    <p:sldId id="271" r:id="rId17"/>
+    <p:sldId id="272" r:id="rId18"/>
+    <p:sldId id="262" r:id="rId8"/>
+    <p:sldId id="258" r:id="rId4"/>
+    <p:sldId id="273" r:id="rId19"/>
+    <p:sldId id="274" r:id="rId20"/>
+    <p:sldId id="275" r:id="rId21"/>
+    <p:sldId id="265" r:id="rId11"/>
+    <p:sldId id="267" r:id="rId13"/>
+    <p:sldId id="266" r:id="rId12"/>
+    <p:sldId id="278" r:id="rId28"/>
+    <p:sldId id="263" r:id="rId9"/>
+    <p:sldId id="260" r:id="rId6"/>
+    <p:sldId id="264" r:id="rId10"/>
+    <p:sldId id="268" r:id="rId14"/>
+    <p:sldId id="277" r:id="rId22"/>
+    <p:sldId id="276" r:id="rId23"/>
   </p:sldIdLst>
-  <p:sldSz cx="12188952" cy="6858000" type="screen4x3"/>
+  <p:sldSz cx="12188825" cy="6858000"/>
   <p:notesSz cx="6858000" cy="9144000"/>
   <p:defaultTextStyle>
     <a:defPPr>
@@ -125,6 +126,22 @@
       </a:defRPr>
     </a:lvl9pPr>
   </p:defaultTextStyle>
+  <p:extLst>
+    <p:ext uri="{EFAFB233-063F-42B5-8137-9DF3F51BA10A}">
+      <p15:sldGuideLst xmlns:p15="http://schemas.microsoft.com/office/powerpoint/2012/main">
+        <p15:guide id="1" orient="horz" pos="2160">
+          <p15:clr>
+            <a:srgbClr val="A4A3A4"/>
+          </p15:clr>
+        </p15:guide>
+        <p15:guide id="2" pos="2880">
+          <p15:clr>
+            <a:srgbClr val="A4A3A4"/>
+          </p15:clr>
+        </p15:guide>
+      </p15:sldGuideLst>
+    </p:ext>
+  </p:extLst>
 </p:presentation>
 </file>
 
@@ -166,10 +183,9 @@
           <a:lstStyle/>
           <a:p>
             <a:r>
-              <a:rPr lang="en-US" smtClean="0"/>
+              <a:rPr lang="en-US"/>
               <a:t>Click to edit Master title style</a:t>
             </a:r>
-            <a:endParaRPr lang="en-US"/>
           </a:p>
         </p:txBody>
       </p:sp>
@@ -285,10 +301,9 @@
           </a:lstStyle>
           <a:p>
             <a:r>
-              <a:rPr lang="en-US" smtClean="0"/>
+              <a:rPr lang="en-US"/>
               <a:t>Click to edit Master subtitle style</a:t>
             </a:r>
-            <a:endParaRPr lang="en-US"/>
           </a:p>
         </p:txBody>
       </p:sp>
@@ -309,7 +324,7 @@
           <a:p>
             <a:fld id="{5BCAD085-E8A6-8845-BD4E-CB4CCA059FC4}" type="datetimeFigureOut">
               <a:rPr lang="en-US" smtClean="0"/>
-              <a:t>1/27/13</a:t>
+              <a:t>6/15/2026</a:t>
             </a:fld>
             <a:endParaRPr lang="en-US"/>
           </a:p>
@@ -403,10 +418,9 @@
           <a:lstStyle/>
           <a:p>
             <a:r>
-              <a:rPr lang="en-US" smtClean="0"/>
+              <a:rPr lang="en-US"/>
               <a:t>Click to edit Master title style</a:t>
             </a:r>
-            <a:endParaRPr lang="en-US"/>
           </a:p>
         </p:txBody>
       </p:sp>
@@ -427,38 +441,37 @@
           <a:p>
             <a:pPr lvl="0"/>
             <a:r>
-              <a:rPr lang="en-US" smtClean="0"/>
+              <a:rPr lang="en-US"/>
               <a:t>Click to edit Master text styles</a:t>
             </a:r>
           </a:p>
           <a:p>
             <a:pPr lvl="1"/>
             <a:r>
-              <a:rPr lang="en-US" smtClean="0"/>
+              <a:rPr lang="en-US"/>
               <a:t>Second level</a:t>
             </a:r>
           </a:p>
           <a:p>
             <a:pPr lvl="2"/>
             <a:r>
-              <a:rPr lang="en-US" smtClean="0"/>
+              <a:rPr lang="en-US"/>
               <a:t>Third level</a:t>
             </a:r>
           </a:p>
           <a:p>
             <a:pPr lvl="3"/>
             <a:r>
-              <a:rPr lang="en-US" smtClean="0"/>
+              <a:rPr lang="en-US"/>
               <a:t>Fourth level</a:t>
             </a:r>
           </a:p>
           <a:p>
             <a:pPr lvl="4"/>
             <a:r>
-              <a:rPr lang="en-US" smtClean="0"/>
+              <a:rPr lang="en-US"/>
               <a:t>Fifth level</a:t>
             </a:r>
-            <a:endParaRPr lang="en-US"/>
           </a:p>
         </p:txBody>
       </p:sp>
@@ -479,7 +492,7 @@
           <a:p>
             <a:fld id="{5BCAD085-E8A6-8845-BD4E-CB4CCA059FC4}" type="datetimeFigureOut">
               <a:rPr lang="en-US" smtClean="0"/>
-              <a:t>1/27/13</a:t>
+              <a:t>6/15/2026</a:t>
             </a:fld>
             <a:endParaRPr lang="en-US"/>
           </a:p>
@@ -578,10 +591,9 @@
           <a:lstStyle/>
           <a:p>
             <a:r>
-              <a:rPr lang="en-US" smtClean="0"/>
+              <a:rPr lang="en-US"/>
               <a:t>Click to edit Master title style</a:t>
             </a:r>
-            <a:endParaRPr lang="en-US"/>
           </a:p>
         </p:txBody>
       </p:sp>
@@ -607,38 +619,37 @@
           <a:p>
             <a:pPr lvl="0"/>
             <a:r>
-              <a:rPr lang="en-US" smtClean="0"/>
+              <a:rPr lang="en-US"/>
               <a:t>Click to edit Master text styles</a:t>
             </a:r>
           </a:p>
           <a:p>
             <a:pPr lvl="1"/>
             <a:r>
-              <a:rPr lang="en-US" smtClean="0"/>
+              <a:rPr lang="en-US"/>
               <a:t>Second level</a:t>
             </a:r>
           </a:p>
           <a:p>
             <a:pPr lvl="2"/>
             <a:r>
-              <a:rPr lang="en-US" smtClean="0"/>
+              <a:rPr lang="en-US"/>
               <a:t>Third level</a:t>
             </a:r>
           </a:p>
           <a:p>
             <a:pPr lvl="3"/>
             <a:r>
-              <a:rPr lang="en-US" smtClean="0"/>
+              <a:rPr lang="en-US"/>
               <a:t>Fourth level</a:t>
             </a:r>
           </a:p>
           <a:p>
             <a:pPr lvl="4"/>
             <a:r>
-              <a:rPr lang="en-US" smtClean="0"/>
+              <a:rPr lang="en-US"/>
               <a:t>Fifth level</a:t>
             </a:r>
-            <a:endParaRPr lang="en-US"/>
           </a:p>
         </p:txBody>
       </p:sp>
@@ -659,7 +670,7 @@
           <a:p>
             <a:fld id="{5BCAD085-E8A6-8845-BD4E-CB4CCA059FC4}" type="datetimeFigureOut">
               <a:rPr lang="en-US" smtClean="0"/>
-              <a:t>1/27/13</a:t>
+              <a:t>6/15/2026</a:t>
             </a:fld>
             <a:endParaRPr lang="en-US"/>
           </a:p>
@@ -753,10 +764,9 @@
           <a:lstStyle/>
           <a:p>
             <a:r>
-              <a:rPr lang="en-US" smtClean="0"/>
+              <a:rPr lang="en-US"/>
               <a:t>Click to edit Master title style</a:t>
             </a:r>
-            <a:endParaRPr lang="en-US"/>
           </a:p>
         </p:txBody>
       </p:sp>
@@ -777,38 +787,37 @@
           <a:p>
             <a:pPr lvl="0"/>
             <a:r>
-              <a:rPr lang="en-US" smtClean="0"/>
+              <a:rPr lang="en-US"/>
               <a:t>Click to edit Master text styles</a:t>
             </a:r>
           </a:p>
           <a:p>
             <a:pPr lvl="1"/>
             <a:r>
-              <a:rPr lang="en-US" smtClean="0"/>
+              <a:rPr lang="en-US"/>
               <a:t>Second level</a:t>
             </a:r>
           </a:p>
           <a:p>
             <a:pPr lvl="2"/>
             <a:r>
-              <a:rPr lang="en-US" smtClean="0"/>
+              <a:rPr lang="en-US"/>
               <a:t>Third level</a:t>
             </a:r>
           </a:p>
           <a:p>
             <a:pPr lvl="3"/>
             <a:r>
-              <a:rPr lang="en-US" smtClean="0"/>
+              <a:rPr lang="en-US"/>
               <a:t>Fourth level</a:t>
             </a:r>
           </a:p>
           <a:p>
             <a:pPr lvl="4"/>
             <a:r>
-              <a:rPr lang="en-US" smtClean="0"/>
+              <a:rPr lang="en-US"/>
               <a:t>Fifth level</a:t>
             </a:r>
-            <a:endParaRPr lang="en-US"/>
           </a:p>
         </p:txBody>
       </p:sp>
@@ -829,7 +838,7 @@
           <a:p>
             <a:fld id="{5BCAD085-E8A6-8845-BD4E-CB4CCA059FC4}" type="datetimeFigureOut">
               <a:rPr lang="en-US" smtClean="0"/>
-              <a:t>1/27/13</a:t>
+              <a:t>6/15/2026</a:t>
             </a:fld>
             <a:endParaRPr lang="en-US"/>
           </a:p>
@@ -932,10 +941,9 @@
           </a:lstStyle>
           <a:p>
             <a:r>
-              <a:rPr lang="en-US" smtClean="0"/>
+              <a:rPr lang="en-US"/>
               <a:t>Click to edit Master title style</a:t>
             </a:r>
-            <a:endParaRPr lang="en-US"/>
           </a:p>
         </p:txBody>
       </p:sp>
@@ -1052,7 +1060,7 @@
           <a:p>
             <a:pPr lvl="0"/>
             <a:r>
-              <a:rPr lang="en-US" smtClean="0"/>
+              <a:rPr lang="en-US"/>
               <a:t>Click to edit Master text styles</a:t>
             </a:r>
           </a:p>
@@ -1075,7 +1083,7 @@
           <a:p>
             <a:fld id="{5BCAD085-E8A6-8845-BD4E-CB4CCA059FC4}" type="datetimeFigureOut">
               <a:rPr lang="en-US" smtClean="0"/>
-              <a:t>1/27/13</a:t>
+              <a:t>6/15/2026</a:t>
             </a:fld>
             <a:endParaRPr lang="en-US"/>
           </a:p>
@@ -1169,10 +1177,9 @@
           <a:lstStyle/>
           <a:p>
             <a:r>
-              <a:rPr lang="en-US" smtClean="0"/>
+              <a:rPr lang="en-US"/>
               <a:t>Click to edit Master title style</a:t>
             </a:r>
-            <a:endParaRPr lang="en-US"/>
           </a:p>
         </p:txBody>
       </p:sp>
@@ -1226,38 +1233,37 @@
           <a:p>
             <a:pPr lvl="0"/>
             <a:r>
-              <a:rPr lang="en-US" smtClean="0"/>
+              <a:rPr lang="en-US"/>
               <a:t>Click to edit Master text styles</a:t>
             </a:r>
           </a:p>
           <a:p>
             <a:pPr lvl="1"/>
             <a:r>
-              <a:rPr lang="en-US" smtClean="0"/>
+              <a:rPr lang="en-US"/>
               <a:t>Second level</a:t>
             </a:r>
           </a:p>
           <a:p>
             <a:pPr lvl="2"/>
             <a:r>
-              <a:rPr lang="en-US" smtClean="0"/>
+              <a:rPr lang="en-US"/>
               <a:t>Third level</a:t>
             </a:r>
           </a:p>
           <a:p>
             <a:pPr lvl="3"/>
             <a:r>
-              <a:rPr lang="en-US" smtClean="0"/>
+              <a:rPr lang="en-US"/>
               <a:t>Fourth level</a:t>
             </a:r>
           </a:p>
           <a:p>
             <a:pPr lvl="4"/>
             <a:r>
-              <a:rPr lang="en-US" smtClean="0"/>
+              <a:rPr lang="en-US"/>
               <a:t>Fifth level</a:t>
             </a:r>
-            <a:endParaRPr lang="en-US"/>
           </a:p>
         </p:txBody>
       </p:sp>
@@ -1311,38 +1317,37 @@
           <a:p>
             <a:pPr lvl="0"/>
             <a:r>
-              <a:rPr lang="en-US" smtClean="0"/>
+              <a:rPr lang="en-US"/>
               <a:t>Click to edit Master text styles</a:t>
             </a:r>
           </a:p>
           <a:p>
             <a:pPr lvl="1"/>
             <a:r>
-              <a:rPr lang="en-US" smtClean="0"/>
+              <a:rPr lang="en-US"/>
               <a:t>Second level</a:t>
             </a:r>
           </a:p>
           <a:p>
             <a:pPr lvl="2"/>
             <a:r>
-              <a:rPr lang="en-US" smtClean="0"/>
+              <a:rPr lang="en-US"/>
               <a:t>Third level</a:t>
             </a:r>
           </a:p>
           <a:p>
             <a:pPr lvl="3"/>
             <a:r>
-              <a:rPr lang="en-US" smtClean="0"/>
+              <a:rPr lang="en-US"/>
               <a:t>Fourth level</a:t>
             </a:r>
           </a:p>
           <a:p>
             <a:pPr lvl="4"/>
             <a:r>
-              <a:rPr lang="en-US" smtClean="0"/>
+              <a:rPr lang="en-US"/>
               <a:t>Fifth level</a:t>
             </a:r>
-            <a:endParaRPr lang="en-US"/>
           </a:p>
         </p:txBody>
       </p:sp>
@@ -1363,7 +1368,7 @@
           <a:p>
             <a:fld id="{5BCAD085-E8A6-8845-BD4E-CB4CCA059FC4}" type="datetimeFigureOut">
               <a:rPr lang="en-US" smtClean="0"/>
-              <a:t>1/27/13</a:t>
+              <a:t>6/15/2026</a:t>
             </a:fld>
             <a:endParaRPr lang="en-US"/>
           </a:p>
@@ -1461,10 +1466,9 @@
           </a:lstStyle>
           <a:p>
             <a:r>
-              <a:rPr lang="en-US" smtClean="0"/>
+              <a:rPr lang="en-US"/>
               <a:t>Click to edit Master title style</a:t>
             </a:r>
-            <a:endParaRPr lang="en-US"/>
           </a:p>
         </p:txBody>
       </p:sp>
@@ -1527,7 +1531,7 @@
           <a:p>
             <a:pPr lvl="0"/>
             <a:r>
-              <a:rPr lang="en-US" smtClean="0"/>
+              <a:rPr lang="en-US"/>
               <a:t>Click to edit Master text styles</a:t>
             </a:r>
           </a:p>
@@ -1583,38 +1587,37 @@
           <a:p>
             <a:pPr lvl="0"/>
             <a:r>
-              <a:rPr lang="en-US" smtClean="0"/>
+              <a:rPr lang="en-US"/>
               <a:t>Click to edit Master text styles</a:t>
             </a:r>
           </a:p>
           <a:p>
             <a:pPr lvl="1"/>
             <a:r>
-              <a:rPr lang="en-US" smtClean="0"/>
+              <a:rPr lang="en-US"/>
               <a:t>Second level</a:t>
             </a:r>
           </a:p>
           <a:p>
             <a:pPr lvl="2"/>
             <a:r>
-              <a:rPr lang="en-US" smtClean="0"/>
+              <a:rPr lang="en-US"/>
               <a:t>Third level</a:t>
             </a:r>
           </a:p>
           <a:p>
             <a:pPr lvl="3"/>
             <a:r>
-              <a:rPr lang="en-US" smtClean="0"/>
+              <a:rPr lang="en-US"/>
               <a:t>Fourth level</a:t>
             </a:r>
           </a:p>
           <a:p>
             <a:pPr lvl="4"/>
             <a:r>
-              <a:rPr lang="en-US" smtClean="0"/>
+              <a:rPr lang="en-US"/>
               <a:t>Fifth level</a:t>
             </a:r>
-            <a:endParaRPr lang="en-US"/>
           </a:p>
         </p:txBody>
       </p:sp>
@@ -1677,7 +1680,7 @@
           <a:p>
             <a:pPr lvl="0"/>
             <a:r>
-              <a:rPr lang="en-US" smtClean="0"/>
+              <a:rPr lang="en-US"/>
               <a:t>Click to edit Master text styles</a:t>
             </a:r>
           </a:p>
@@ -1733,38 +1736,37 @@
           <a:p>
             <a:pPr lvl="0"/>
             <a:r>
-              <a:rPr lang="en-US" smtClean="0"/>
+              <a:rPr lang="en-US"/>
               <a:t>Click to edit Master text styles</a:t>
             </a:r>
           </a:p>
           <a:p>
             <a:pPr lvl="1"/>
             <a:r>
-              <a:rPr lang="en-US" smtClean="0"/>
+              <a:rPr lang="en-US"/>
               <a:t>Second level</a:t>
             </a:r>
           </a:p>
           <a:p>
             <a:pPr lvl="2"/>
             <a:r>
-              <a:rPr lang="en-US" smtClean="0"/>
+              <a:rPr lang="en-US"/>
               <a:t>Third level</a:t>
             </a:r>
           </a:p>
           <a:p>
             <a:pPr lvl="3"/>
             <a:r>
-              <a:rPr lang="en-US" smtClean="0"/>
+              <a:rPr lang="en-US"/>
               <a:t>Fourth level</a:t>
             </a:r>
           </a:p>
           <a:p>
             <a:pPr lvl="4"/>
             <a:r>
-              <a:rPr lang="en-US" smtClean="0"/>
+              <a:rPr lang="en-US"/>
               <a:t>Fifth level</a:t>
             </a:r>
-            <a:endParaRPr lang="en-US"/>
           </a:p>
         </p:txBody>
       </p:sp>
@@ -1785,7 +1787,7 @@
           <a:p>
             <a:fld id="{5BCAD085-E8A6-8845-BD4E-CB4CCA059FC4}" type="datetimeFigureOut">
               <a:rPr lang="en-US" smtClean="0"/>
-              <a:t>1/27/13</a:t>
+              <a:t>6/15/2026</a:t>
             </a:fld>
             <a:endParaRPr lang="en-US"/>
           </a:p>
@@ -1879,10 +1881,9 @@
           <a:lstStyle/>
           <a:p>
             <a:r>
-              <a:rPr lang="en-US" smtClean="0"/>
+              <a:rPr lang="en-US"/>
               <a:t>Click to edit Master title style</a:t>
             </a:r>
-            <a:endParaRPr lang="en-US"/>
           </a:p>
         </p:txBody>
       </p:sp>
@@ -1903,7 +1904,7 @@
           <a:p>
             <a:fld id="{5BCAD085-E8A6-8845-BD4E-CB4CCA059FC4}" type="datetimeFigureOut">
               <a:rPr lang="en-US" smtClean="0"/>
-              <a:t>1/27/13</a:t>
+              <a:t>6/15/2026</a:t>
             </a:fld>
             <a:endParaRPr lang="en-US"/>
           </a:p>
@@ -1998,7 +1999,7 @@
           <a:p>
             <a:fld id="{5BCAD085-E8A6-8845-BD4E-CB4CCA059FC4}" type="datetimeFigureOut">
               <a:rPr lang="en-US" smtClean="0"/>
-              <a:t>1/27/13</a:t>
+              <a:t>6/15/2026</a:t>
             </a:fld>
             <a:endParaRPr lang="en-US"/>
           </a:p>
@@ -2101,10 +2102,9 @@
           </a:lstStyle>
           <a:p>
             <a:r>
-              <a:rPr lang="en-US" smtClean="0"/>
+              <a:rPr lang="en-US"/>
               <a:t>Click to edit Master title style</a:t>
             </a:r>
-            <a:endParaRPr lang="en-US"/>
           </a:p>
         </p:txBody>
       </p:sp>
@@ -2158,38 +2158,37 @@
           <a:p>
             <a:pPr lvl="0"/>
             <a:r>
-              <a:rPr lang="en-US" smtClean="0"/>
+              <a:rPr lang="en-US"/>
               <a:t>Click to edit Master text styles</a:t>
             </a:r>
           </a:p>
           <a:p>
             <a:pPr lvl="1"/>
             <a:r>
-              <a:rPr lang="en-US" smtClean="0"/>
+              <a:rPr lang="en-US"/>
               <a:t>Second level</a:t>
             </a:r>
           </a:p>
           <a:p>
             <a:pPr lvl="2"/>
             <a:r>
-              <a:rPr lang="en-US" smtClean="0"/>
+              <a:rPr lang="en-US"/>
               <a:t>Third level</a:t>
             </a:r>
           </a:p>
           <a:p>
             <a:pPr lvl="3"/>
             <a:r>
-              <a:rPr lang="en-US" smtClean="0"/>
+              <a:rPr lang="en-US"/>
               <a:t>Fourth level</a:t>
             </a:r>
           </a:p>
           <a:p>
             <a:pPr lvl="4"/>
             <a:r>
-              <a:rPr lang="en-US" smtClean="0"/>
+              <a:rPr lang="en-US"/>
               <a:t>Fifth level</a:t>
             </a:r>
-            <a:endParaRPr lang="en-US"/>
           </a:p>
         </p:txBody>
       </p:sp>
@@ -2252,7 +2251,7 @@
           <a:p>
             <a:pPr lvl="0"/>
             <a:r>
-              <a:rPr lang="en-US" smtClean="0"/>
+              <a:rPr lang="en-US"/>
               <a:t>Click to edit Master text styles</a:t>
             </a:r>
           </a:p>
@@ -2275,7 +2274,7 @@
           <a:p>
             <a:fld id="{5BCAD085-E8A6-8845-BD4E-CB4CCA059FC4}" type="datetimeFigureOut">
               <a:rPr lang="en-US" smtClean="0"/>
-              <a:t>1/27/13</a:t>
+              <a:t>6/15/2026</a:t>
             </a:fld>
             <a:endParaRPr lang="en-US"/>
           </a:p>
@@ -2378,10 +2377,9 @@
           </a:lstStyle>
           <a:p>
             <a:r>
-              <a:rPr lang="en-US" smtClean="0"/>
+              <a:rPr lang="en-US"/>
               <a:t>Click to edit Master title style</a:t>
             </a:r>
-            <a:endParaRPr lang="en-US"/>
           </a:p>
         </p:txBody>
       </p:sp>
@@ -2505,7 +2503,7 @@
           <a:p>
             <a:pPr lvl="0"/>
             <a:r>
-              <a:rPr lang="en-US" smtClean="0"/>
+              <a:rPr lang="en-US"/>
               <a:t>Click to edit Master text styles</a:t>
             </a:r>
           </a:p>
@@ -2528,7 +2526,7 @@
           <a:p>
             <a:fld id="{5BCAD085-E8A6-8845-BD4E-CB4CCA059FC4}" type="datetimeFigureOut">
               <a:rPr lang="en-US" smtClean="0"/>
-              <a:t>1/27/13</a:t>
+              <a:t>6/15/2026</a:t>
             </a:fld>
             <a:endParaRPr lang="en-US"/>
           </a:p>
@@ -2637,10 +2635,9 @@
           <a:lstStyle/>
           <a:p>
             <a:r>
-              <a:rPr lang="en-US" smtClean="0"/>
+              <a:rPr lang="en-US"/>
               <a:t>Click to edit Master title style</a:t>
             </a:r>
-            <a:endParaRPr lang="en-US"/>
           </a:p>
         </p:txBody>
       </p:sp>
@@ -2671,38 +2668,37 @@
           <a:p>
             <a:pPr lvl="0"/>
             <a:r>
-              <a:rPr lang="en-US" smtClean="0"/>
+              <a:rPr lang="en-US"/>
               <a:t>Click to edit Master text styles</a:t>
             </a:r>
           </a:p>
           <a:p>
             <a:pPr lvl="1"/>
             <a:r>
-              <a:rPr lang="en-US" smtClean="0"/>
+              <a:rPr lang="en-US"/>
               <a:t>Second level</a:t>
             </a:r>
           </a:p>
           <a:p>
             <a:pPr lvl="2"/>
             <a:r>
-              <a:rPr lang="en-US" smtClean="0"/>
+              <a:rPr lang="en-US"/>
               <a:t>Third level</a:t>
             </a:r>
           </a:p>
           <a:p>
             <a:pPr lvl="3"/>
             <a:r>
-              <a:rPr lang="en-US" smtClean="0"/>
+              <a:rPr lang="en-US"/>
               <a:t>Fourth level</a:t>
             </a:r>
           </a:p>
           <a:p>
             <a:pPr lvl="4"/>
             <a:r>
-              <a:rPr lang="en-US" smtClean="0"/>
+              <a:rPr lang="en-US"/>
               <a:t>Fifth level</a:t>
             </a:r>
-            <a:endParaRPr lang="en-US"/>
           </a:p>
         </p:txBody>
       </p:sp>
@@ -2741,7 +2737,7 @@
           <a:p>
             <a:fld id="{5BCAD085-E8A6-8845-BD4E-CB4CCA059FC4}" type="datetimeFigureOut">
               <a:rPr lang="en-US" smtClean="0"/>
-              <a:t>1/27/13</a:t>
+              <a:t>6/15/2026</a:t>
             </a:fld>
             <a:endParaRPr lang="en-US"/>
           </a:p>
@@ -3100,7 +3096,7 @@
 </file>
 
 <file path=ppt/slides/slide1.xml><?xml version="1.0" encoding="utf-8"?>
-<p:sld xmlns:a="http://schemas.openxmlformats.org/drawingml/2006/main" xmlns:p="http://schemas.openxmlformats.org/presentationml/2006/main" xmlns:r="http://schemas.openxmlformats.org/officeDocument/2006/relationships">
+<p:sld xmlns:a="http://schemas.openxmlformats.org/drawingml/2006/main" xmlns:r="http://schemas.openxmlformats.org/officeDocument/2006/relationships" xmlns:p="http://schemas.openxmlformats.org/presentationml/2006/main">
   <p:cSld>
     <p:spTree>
       <p:nvGrpSpPr>
@@ -3108,7 +3104,14 @@
         <p:cNvGrpSpPr/>
         <p:nvPr/>
       </p:nvGrpSpPr>
-      <p:grpSpPr/>
+      <p:grpSpPr>
+        <a:xfrm>
+          <a:off x="0" y="0"/>
+          <a:ext cx="0" cy="0"/>
+          <a:chOff x="0" y="0"/>
+          <a:chExt cx="0" cy="0"/>
+        </a:xfrm>
+      </p:grpSpPr>
       <p:sp>
         <p:nvSpPr>
           <p:cNvPr id="2" name="Rectangle 1"/>
@@ -3149,6 +3152,7 @@
           <a:lstStyle/>
           <a:p>
             <a:pPr algn="ctr"/>
+            <a:endParaRPr/>
           </a:p>
         </p:txBody>
       </p:sp>
@@ -3192,6 +3196,7 @@
           <a:lstStyle/>
           <a:p>
             <a:pPr algn="ctr"/>
+            <a:endParaRPr/>
           </a:p>
         </p:txBody>
       </p:sp>
@@ -3235,6 +3240,7 @@
           <a:lstStyle/>
           <a:p>
             <a:pPr algn="ctr"/>
+            <a:endParaRPr/>
           </a:p>
         </p:txBody>
       </p:sp>
@@ -3417,7 +3423,7 @@
 </file>
 
 <file path=ppt/slides/slide10.xml><?xml version="1.0" encoding="utf-8"?>
-<p:sld xmlns:a="http://schemas.openxmlformats.org/drawingml/2006/main" xmlns:p="http://schemas.openxmlformats.org/presentationml/2006/main" xmlns:r="http://schemas.openxmlformats.org/officeDocument/2006/relationships">
+<p:sld xmlns:a="http://schemas.openxmlformats.org/drawingml/2006/main" xmlns:r="http://schemas.openxmlformats.org/officeDocument/2006/relationships" xmlns:p="http://schemas.openxmlformats.org/presentationml/2006/main">
   <p:cSld>
     <p:spTree>
       <p:nvGrpSpPr>
@@ -3425,7 +3431,14 @@
         <p:cNvGrpSpPr/>
         <p:nvPr/>
       </p:nvGrpSpPr>
-      <p:grpSpPr/>
+      <p:grpSpPr>
+        <a:xfrm>
+          <a:off x="0" y="0"/>
+          <a:ext cx="0" cy="0"/>
+          <a:chOff x="0" y="0"/>
+          <a:chExt cx="0" cy="0"/>
+        </a:xfrm>
+      </p:grpSpPr>
       <p:sp>
         <p:nvSpPr>
           <p:cNvPr id="2" name="Rectangle 1"/>
@@ -3464,6 +3477,7 @@
           <a:lstStyle/>
           <a:p>
             <a:pPr algn="ctr"/>
+            <a:endParaRPr/>
           </a:p>
         </p:txBody>
       </p:sp>
@@ -3575,6 +3589,7 @@
           <a:lstStyle/>
           <a:p>
             <a:pPr algn="ctr"/>
+            <a:endParaRPr/>
           </a:p>
         </p:txBody>
       </p:sp>
@@ -3652,6 +3667,7 @@
           <a:lstStyle/>
           <a:p>
             <a:pPr algn="ctr"/>
+            <a:endParaRPr/>
           </a:p>
         </p:txBody>
       </p:sp>
@@ -3695,6 +3711,7 @@
           <a:lstStyle/>
           <a:p>
             <a:pPr algn="ctr"/>
+            <a:endParaRPr/>
           </a:p>
         </p:txBody>
       </p:sp>
@@ -3738,6 +3755,7 @@
           <a:lstStyle/>
           <a:p>
             <a:pPr algn="ctr"/>
+            <a:endParaRPr/>
           </a:p>
         </p:txBody>
       </p:sp>
@@ -3851,6 +3869,7 @@
           <a:lstStyle/>
           <a:p>
             <a:pPr algn="ctr"/>
+            <a:endParaRPr/>
           </a:p>
         </p:txBody>
       </p:sp>
@@ -3894,6 +3913,7 @@
           <a:lstStyle/>
           <a:p>
             <a:pPr algn="ctr"/>
+            <a:endParaRPr/>
           </a:p>
         </p:txBody>
       </p:sp>
@@ -3937,6 +3957,7 @@
           <a:lstStyle/>
           <a:p>
             <a:pPr algn="ctr"/>
+            <a:endParaRPr/>
           </a:p>
         </p:txBody>
       </p:sp>
@@ -4049,6 +4070,7 @@
           <a:lstStyle/>
           <a:p>
             <a:pPr algn="ctr"/>
+            <a:endParaRPr/>
           </a:p>
         </p:txBody>
       </p:sp>
@@ -4092,6 +4114,7 @@
           <a:lstStyle/>
           <a:p>
             <a:pPr algn="ctr"/>
+            <a:endParaRPr/>
           </a:p>
         </p:txBody>
       </p:sp>
@@ -4135,6 +4158,7 @@
           <a:lstStyle/>
           <a:p>
             <a:pPr algn="ctr"/>
+            <a:endParaRPr/>
           </a:p>
         </p:txBody>
       </p:sp>
@@ -4217,7 +4241,7 @@
 </file>
 
 <file path=ppt/slides/slide11.xml><?xml version="1.0" encoding="utf-8"?>
-<p:sld xmlns:a="http://schemas.openxmlformats.org/drawingml/2006/main" xmlns:p="http://schemas.openxmlformats.org/presentationml/2006/main" xmlns:r="http://schemas.openxmlformats.org/officeDocument/2006/relationships">
+<p:sld xmlns:a="http://schemas.openxmlformats.org/drawingml/2006/main" xmlns:r="http://schemas.openxmlformats.org/officeDocument/2006/relationships" xmlns:p="http://schemas.openxmlformats.org/presentationml/2006/main">
   <p:cSld>
     <p:spTree>
       <p:nvGrpSpPr>
@@ -4225,7 +4249,14 @@
         <p:cNvGrpSpPr/>
         <p:nvPr/>
       </p:nvGrpSpPr>
-      <p:grpSpPr/>
+      <p:grpSpPr>
+        <a:xfrm>
+          <a:off x="0" y="0"/>
+          <a:ext cx="0" cy="0"/>
+          <a:chOff x="0" y="0"/>
+          <a:chExt cx="0" cy="0"/>
+        </a:xfrm>
+      </p:grpSpPr>
       <p:sp>
         <p:nvSpPr>
           <p:cNvPr id="2" name="Rectangle 1"/>
@@ -4264,6 +4295,7 @@
           <a:lstStyle/>
           <a:p>
             <a:pPr algn="ctr"/>
+            <a:endParaRPr/>
           </a:p>
         </p:txBody>
       </p:sp>
@@ -4341,6 +4373,7 @@
           <a:lstStyle/>
           <a:p>
             <a:pPr algn="ctr"/>
+            <a:endParaRPr/>
           </a:p>
         </p:txBody>
       </p:sp>
@@ -4418,6 +4451,7 @@
           <a:lstStyle/>
           <a:p>
             <a:pPr algn="ctr"/>
+            <a:endParaRPr/>
           </a:p>
         </p:txBody>
       </p:sp>
@@ -4461,6 +4495,7 @@
           <a:lstStyle/>
           <a:p>
             <a:pPr algn="ctr"/>
+            <a:endParaRPr/>
           </a:p>
         </p:txBody>
       </p:sp>
@@ -4504,6 +4539,7 @@
           <a:lstStyle/>
           <a:p>
             <a:pPr algn="ctr"/>
+            <a:endParaRPr/>
           </a:p>
         </p:txBody>
       </p:sp>
@@ -4616,6 +4652,7 @@
           <a:lstStyle/>
           <a:p>
             <a:pPr algn="ctr"/>
+            <a:endParaRPr/>
           </a:p>
         </p:txBody>
       </p:sp>
@@ -4659,6 +4696,7 @@
           <a:lstStyle/>
           <a:p>
             <a:pPr algn="ctr"/>
+            <a:endParaRPr/>
           </a:p>
         </p:txBody>
       </p:sp>
@@ -4702,6 +4740,7 @@
           <a:lstStyle/>
           <a:p>
             <a:pPr algn="ctr"/>
+            <a:endParaRPr/>
           </a:p>
         </p:txBody>
       </p:sp>
@@ -4815,6 +4854,7 @@
           <a:lstStyle/>
           <a:p>
             <a:pPr algn="ctr"/>
+            <a:endParaRPr/>
           </a:p>
         </p:txBody>
       </p:sp>
@@ -4858,6 +4898,7 @@
           <a:lstStyle/>
           <a:p>
             <a:pPr algn="ctr"/>
+            <a:endParaRPr/>
           </a:p>
         </p:txBody>
       </p:sp>
@@ -4901,6 +4942,7 @@
           <a:lstStyle/>
           <a:p>
             <a:pPr algn="ctr"/>
+            <a:endParaRPr/>
           </a:p>
         </p:txBody>
       </p:sp>
@@ -4983,7 +5025,7 @@
 </file>
 
 <file path=ppt/slides/slide12.xml><?xml version="1.0" encoding="utf-8"?>
-<p:sld xmlns:a="http://schemas.openxmlformats.org/drawingml/2006/main" xmlns:p="http://schemas.openxmlformats.org/presentationml/2006/main" xmlns:r="http://schemas.openxmlformats.org/officeDocument/2006/relationships">
+<p:sld xmlns:a="http://schemas.openxmlformats.org/drawingml/2006/main" xmlns:r="http://schemas.openxmlformats.org/officeDocument/2006/relationships" xmlns:p="http://schemas.openxmlformats.org/presentationml/2006/main">
   <p:cSld>
     <p:spTree>
       <p:nvGrpSpPr>
@@ -4991,7 +5033,14 @@
         <p:cNvGrpSpPr/>
         <p:nvPr/>
       </p:nvGrpSpPr>
-      <p:grpSpPr/>
+      <p:grpSpPr>
+        <a:xfrm>
+          <a:off x="0" y="0"/>
+          <a:ext cx="0" cy="0"/>
+          <a:chOff x="0" y="0"/>
+          <a:chExt cx="0" cy="0"/>
+        </a:xfrm>
+      </p:grpSpPr>
       <p:sp>
         <p:nvSpPr>
           <p:cNvPr id="2" name="Rectangle 1"/>
@@ -5030,6 +5079,7 @@
           <a:lstStyle/>
           <a:p>
             <a:pPr algn="ctr"/>
+            <a:endParaRPr/>
           </a:p>
         </p:txBody>
       </p:sp>
@@ -5107,6 +5157,7 @@
           <a:lstStyle/>
           <a:p>
             <a:pPr algn="ctr"/>
+            <a:endParaRPr/>
           </a:p>
         </p:txBody>
       </p:sp>
@@ -5184,6 +5235,7 @@
           <a:lstStyle/>
           <a:p>
             <a:pPr algn="ctr"/>
+            <a:endParaRPr/>
           </a:p>
         </p:txBody>
       </p:sp>
@@ -5227,6 +5279,7 @@
           <a:lstStyle/>
           <a:p>
             <a:pPr algn="ctr"/>
+            <a:endParaRPr/>
           </a:p>
         </p:txBody>
       </p:sp>
@@ -5339,6 +5392,7 @@
           <a:lstStyle/>
           <a:p>
             <a:pPr algn="ctr"/>
+            <a:endParaRPr/>
           </a:p>
         </p:txBody>
       </p:sp>
@@ -5382,6 +5436,7 @@
           <a:lstStyle/>
           <a:p>
             <a:pPr algn="ctr"/>
+            <a:endParaRPr/>
           </a:p>
         </p:txBody>
       </p:sp>
@@ -5494,6 +5549,7 @@
           <a:lstStyle/>
           <a:p>
             <a:pPr algn="ctr"/>
+            <a:endParaRPr/>
           </a:p>
         </p:txBody>
       </p:sp>
@@ -5537,6 +5593,7 @@
           <a:lstStyle/>
           <a:p>
             <a:pPr algn="ctr"/>
+            <a:endParaRPr/>
           </a:p>
         </p:txBody>
       </p:sp>
@@ -5618,7 +5675,7 @@
 </file>
 
 <file path=ppt/slides/slide13.xml><?xml version="1.0" encoding="utf-8"?>
-<p:sld xmlns:a="http://schemas.openxmlformats.org/drawingml/2006/main" xmlns:p="http://schemas.openxmlformats.org/presentationml/2006/main" xmlns:r="http://schemas.openxmlformats.org/officeDocument/2006/relationships">
+<p:sld xmlns:a="http://schemas.openxmlformats.org/drawingml/2006/main" xmlns:r="http://schemas.openxmlformats.org/officeDocument/2006/relationships" xmlns:p="http://schemas.openxmlformats.org/presentationml/2006/main">
   <p:cSld>
     <p:spTree>
       <p:nvGrpSpPr>
@@ -5626,7 +5683,14 @@
         <p:cNvGrpSpPr/>
         <p:nvPr/>
       </p:nvGrpSpPr>
-      <p:grpSpPr/>
+      <p:grpSpPr>
+        <a:xfrm>
+          <a:off x="0" y="0"/>
+          <a:ext cx="0" cy="0"/>
+          <a:chOff x="0" y="0"/>
+          <a:chExt cx="0" cy="0"/>
+        </a:xfrm>
+      </p:grpSpPr>
       <p:sp>
         <p:nvSpPr>
           <p:cNvPr id="2" name="Rectangle 1"/>
@@ -5665,6 +5729,7 @@
           <a:lstStyle/>
           <a:p>
             <a:pPr algn="ctr"/>
+            <a:endParaRPr/>
           </a:p>
         </p:txBody>
       </p:sp>
@@ -5776,6 +5841,7 @@
           <a:lstStyle/>
           <a:p>
             <a:pPr algn="ctr"/>
+            <a:endParaRPr/>
           </a:p>
         </p:txBody>
       </p:sp>
@@ -5853,6 +5919,7 @@
           <a:lstStyle/>
           <a:p>
             <a:pPr algn="ctr"/>
+            <a:endParaRPr/>
           </a:p>
         </p:txBody>
       </p:sp>
@@ -5896,6 +5963,7 @@
           <a:lstStyle/>
           <a:p>
             <a:pPr algn="ctr"/>
+            <a:endParaRPr/>
           </a:p>
         </p:txBody>
       </p:sp>
@@ -5939,6 +6007,7 @@
           <a:lstStyle/>
           <a:p>
             <a:pPr algn="ctr"/>
+            <a:endParaRPr/>
           </a:p>
         </p:txBody>
       </p:sp>
@@ -6051,6 +6120,7 @@
           <a:lstStyle/>
           <a:p>
             <a:pPr algn="ctr"/>
+            <a:endParaRPr/>
           </a:p>
         </p:txBody>
       </p:sp>
@@ -6094,6 +6164,7 @@
           <a:lstStyle/>
           <a:p>
             <a:pPr algn="ctr"/>
+            <a:endParaRPr/>
           </a:p>
         </p:txBody>
       </p:sp>
@@ -6137,6 +6208,7 @@
           <a:lstStyle/>
           <a:p>
             <a:pPr algn="ctr"/>
+            <a:endParaRPr/>
           </a:p>
         </p:txBody>
       </p:sp>
@@ -6249,6 +6321,7 @@
           <a:lstStyle/>
           <a:p>
             <a:pPr algn="ctr"/>
+            <a:endParaRPr/>
           </a:p>
         </p:txBody>
       </p:sp>
@@ -6292,6 +6365,7 @@
           <a:lstStyle/>
           <a:p>
             <a:pPr algn="ctr"/>
+            <a:endParaRPr/>
           </a:p>
         </p:txBody>
       </p:sp>
@@ -6335,6 +6409,7 @@
           <a:lstStyle/>
           <a:p>
             <a:pPr algn="ctr"/>
+            <a:endParaRPr/>
           </a:p>
         </p:txBody>
       </p:sp>
@@ -6449,6 +6524,7 @@
           <a:lstStyle/>
           <a:p>
             <a:pPr algn="ctr"/>
+            <a:endParaRPr/>
           </a:p>
         </p:txBody>
       </p:sp>
@@ -6495,7 +6571,7 @@
 </file>
 
 <file path=ppt/slides/slide14.xml><?xml version="1.0" encoding="utf-8"?>
-<p:sld xmlns:a="http://schemas.openxmlformats.org/drawingml/2006/main" xmlns:p="http://schemas.openxmlformats.org/presentationml/2006/main" xmlns:r="http://schemas.openxmlformats.org/officeDocument/2006/relationships">
+<p:sld xmlns:a="http://schemas.openxmlformats.org/drawingml/2006/main" xmlns:r="http://schemas.openxmlformats.org/officeDocument/2006/relationships" xmlns:p="http://schemas.openxmlformats.org/presentationml/2006/main">
   <p:cSld>
     <p:spTree>
       <p:nvGrpSpPr>
@@ -6503,7 +6579,14 @@
         <p:cNvGrpSpPr/>
         <p:nvPr/>
       </p:nvGrpSpPr>
-      <p:grpSpPr/>
+      <p:grpSpPr>
+        <a:xfrm>
+          <a:off x="0" y="0"/>
+          <a:ext cx="0" cy="0"/>
+          <a:chOff x="0" y="0"/>
+          <a:chExt cx="0" cy="0"/>
+        </a:xfrm>
+      </p:grpSpPr>
       <p:sp>
         <p:nvSpPr>
           <p:cNvPr id="2" name="Rectangle 1"/>
@@ -6542,6 +6625,7 @@
           <a:lstStyle/>
           <a:p>
             <a:pPr algn="ctr"/>
+            <a:endParaRPr/>
           </a:p>
         </p:txBody>
       </p:sp>
@@ -6653,6 +6737,7 @@
           <a:lstStyle/>
           <a:p>
             <a:pPr algn="ctr"/>
+            <a:endParaRPr/>
           </a:p>
         </p:txBody>
       </p:sp>
@@ -6730,6 +6815,7 @@
           <a:lstStyle/>
           <a:p>
             <a:pPr algn="ctr"/>
+            <a:endParaRPr/>
           </a:p>
         </p:txBody>
       </p:sp>
@@ -6773,6 +6859,7 @@
           <a:lstStyle/>
           <a:p>
             <a:pPr algn="ctr"/>
+            <a:endParaRPr/>
           </a:p>
         </p:txBody>
       </p:sp>
@@ -6816,6 +6903,7 @@
           <a:lstStyle/>
           <a:p>
             <a:pPr algn="ctr"/>
+            <a:endParaRPr/>
           </a:p>
         </p:txBody>
       </p:sp>
@@ -6963,6 +7051,7 @@
           <a:lstStyle/>
           <a:p>
             <a:pPr algn="ctr"/>
+            <a:endParaRPr/>
           </a:p>
         </p:txBody>
       </p:sp>
@@ -7006,6 +7095,7 @@
           <a:lstStyle/>
           <a:p>
             <a:pPr algn="ctr"/>
+            <a:endParaRPr/>
           </a:p>
         </p:txBody>
       </p:sp>
@@ -7049,6 +7139,7 @@
           <a:lstStyle/>
           <a:p>
             <a:pPr algn="ctr"/>
+            <a:endParaRPr/>
           </a:p>
         </p:txBody>
       </p:sp>
@@ -7196,6 +7287,7 @@
           <a:lstStyle/>
           <a:p>
             <a:pPr algn="ctr"/>
+            <a:endParaRPr/>
           </a:p>
         </p:txBody>
       </p:sp>
@@ -7239,6 +7331,7 @@
           <a:lstStyle/>
           <a:p>
             <a:pPr algn="ctr"/>
+            <a:endParaRPr/>
           </a:p>
         </p:txBody>
       </p:sp>
@@ -7282,6 +7375,7 @@
           <a:lstStyle/>
           <a:p>
             <a:pPr algn="ctr"/>
+            <a:endParaRPr/>
           </a:p>
         </p:txBody>
       </p:sp>
@@ -7398,7 +7492,7 @@
 </file>
 
 <file path=ppt/slides/slide15.xml><?xml version="1.0" encoding="utf-8"?>
-<p:sld xmlns:a="http://schemas.openxmlformats.org/drawingml/2006/main" xmlns:p="http://schemas.openxmlformats.org/presentationml/2006/main" xmlns:r="http://schemas.openxmlformats.org/officeDocument/2006/relationships">
+<p:sld xmlns:a="http://schemas.openxmlformats.org/drawingml/2006/main" xmlns:r="http://schemas.openxmlformats.org/officeDocument/2006/relationships" xmlns:p="http://schemas.openxmlformats.org/presentationml/2006/main">
   <p:cSld>
     <p:spTree>
       <p:nvGrpSpPr>
@@ -7406,7 +7500,14 @@
         <p:cNvGrpSpPr/>
         <p:nvPr/>
       </p:nvGrpSpPr>
-      <p:grpSpPr/>
+      <p:grpSpPr>
+        <a:xfrm>
+          <a:off x="0" y="0"/>
+          <a:ext cx="0" cy="0"/>
+          <a:chOff x="0" y="0"/>
+          <a:chExt cx="0" cy="0"/>
+        </a:xfrm>
+      </p:grpSpPr>
       <p:sp>
         <p:nvSpPr>
           <p:cNvPr id="2" name="Rectangle 1"/>
@@ -7445,6 +7546,7 @@
           <a:lstStyle/>
           <a:p>
             <a:pPr algn="ctr"/>
+            <a:endParaRPr/>
           </a:p>
         </p:txBody>
       </p:sp>
@@ -7556,6 +7658,7 @@
           <a:lstStyle/>
           <a:p>
             <a:pPr algn="ctr"/>
+            <a:endParaRPr/>
           </a:p>
         </p:txBody>
       </p:sp>
@@ -7633,6 +7736,7 @@
           <a:lstStyle/>
           <a:p>
             <a:pPr algn="ctr"/>
+            <a:endParaRPr/>
           </a:p>
         </p:txBody>
       </p:sp>
@@ -7676,6 +7780,7 @@
           <a:lstStyle/>
           <a:p>
             <a:pPr algn="ctr"/>
+            <a:endParaRPr/>
           </a:p>
         </p:txBody>
       </p:sp>
@@ -7719,6 +7824,7 @@
           <a:lstStyle/>
           <a:p>
             <a:pPr algn="ctr"/>
+            <a:endParaRPr/>
           </a:p>
         </p:txBody>
       </p:sp>
@@ -7866,6 +7972,7 @@
           <a:lstStyle/>
           <a:p>
             <a:pPr algn="ctr"/>
+            <a:endParaRPr/>
           </a:p>
         </p:txBody>
       </p:sp>
@@ -7909,6 +8016,7 @@
           <a:lstStyle/>
           <a:p>
             <a:pPr algn="ctr"/>
+            <a:endParaRPr/>
           </a:p>
         </p:txBody>
       </p:sp>
@@ -7952,6 +8060,7 @@
           <a:lstStyle/>
           <a:p>
             <a:pPr algn="ctr"/>
+            <a:endParaRPr/>
           </a:p>
         </p:txBody>
       </p:sp>
@@ -8068,7 +8177,7 @@
 </file>
 
 <file path=ppt/slides/slide16.xml><?xml version="1.0" encoding="utf-8"?>
-<p:sld xmlns:a="http://schemas.openxmlformats.org/drawingml/2006/main" xmlns:p="http://schemas.openxmlformats.org/presentationml/2006/main" xmlns:r="http://schemas.openxmlformats.org/officeDocument/2006/relationships">
+<p:sld xmlns:a="http://schemas.openxmlformats.org/drawingml/2006/main" xmlns:r="http://schemas.openxmlformats.org/officeDocument/2006/relationships" xmlns:p="http://schemas.openxmlformats.org/presentationml/2006/main">
   <p:cSld>
     <p:spTree>
       <p:nvGrpSpPr>
@@ -8076,7 +8185,14 @@
         <p:cNvGrpSpPr/>
         <p:nvPr/>
       </p:nvGrpSpPr>
-      <p:grpSpPr/>
+      <p:grpSpPr>
+        <a:xfrm>
+          <a:off x="0" y="0"/>
+          <a:ext cx="0" cy="0"/>
+          <a:chOff x="0" y="0"/>
+          <a:chExt cx="0" cy="0"/>
+        </a:xfrm>
+      </p:grpSpPr>
       <p:sp>
         <p:nvSpPr>
           <p:cNvPr id="2" name="Rectangle 1"/>
@@ -8115,6 +8231,7 @@
           <a:lstStyle/>
           <a:p>
             <a:pPr algn="ctr"/>
+            <a:endParaRPr/>
           </a:p>
         </p:txBody>
       </p:sp>
@@ -8226,6 +8343,7 @@
           <a:lstStyle/>
           <a:p>
             <a:pPr algn="ctr"/>
+            <a:endParaRPr/>
           </a:p>
         </p:txBody>
       </p:sp>
@@ -8303,6 +8421,7 @@
           <a:lstStyle/>
           <a:p>
             <a:pPr algn="ctr"/>
+            <a:endParaRPr/>
           </a:p>
         </p:txBody>
       </p:sp>
@@ -8346,6 +8465,7 @@
           <a:lstStyle/>
           <a:p>
             <a:pPr algn="ctr"/>
+            <a:endParaRPr/>
           </a:p>
         </p:txBody>
       </p:sp>
@@ -8389,6 +8509,7 @@
           <a:lstStyle/>
           <a:p>
             <a:pPr algn="ctr"/>
+            <a:endParaRPr/>
           </a:p>
         </p:txBody>
       </p:sp>
@@ -8536,6 +8657,7 @@
           <a:lstStyle/>
           <a:p>
             <a:pPr algn="ctr"/>
+            <a:endParaRPr/>
           </a:p>
         </p:txBody>
       </p:sp>
@@ -8579,6 +8701,7 @@
           <a:lstStyle/>
           <a:p>
             <a:pPr algn="ctr"/>
+            <a:endParaRPr/>
           </a:p>
         </p:txBody>
       </p:sp>
@@ -8622,6 +8745,7 @@
           <a:lstStyle/>
           <a:p>
             <a:pPr algn="ctr"/>
+            <a:endParaRPr/>
           </a:p>
         </p:txBody>
       </p:sp>
@@ -8769,6 +8893,7 @@
           <a:lstStyle/>
           <a:p>
             <a:pPr algn="ctr"/>
+            <a:endParaRPr/>
           </a:p>
         </p:txBody>
       </p:sp>
@@ -8812,6 +8937,7 @@
           <a:lstStyle/>
           <a:p>
             <a:pPr algn="ctr"/>
+            <a:endParaRPr/>
           </a:p>
         </p:txBody>
       </p:sp>
@@ -8855,6 +8981,7 @@
           <a:lstStyle/>
           <a:p>
             <a:pPr algn="ctr"/>
+            <a:endParaRPr/>
           </a:p>
         </p:txBody>
       </p:sp>
@@ -8971,7 +9098,7 @@
 </file>
 
 <file path=ppt/slides/slide17.xml><?xml version="1.0" encoding="utf-8"?>
-<p:sld xmlns:a="http://schemas.openxmlformats.org/drawingml/2006/main" xmlns:p="http://schemas.openxmlformats.org/presentationml/2006/main" xmlns:r="http://schemas.openxmlformats.org/officeDocument/2006/relationships">
+<p:sld xmlns:a="http://schemas.openxmlformats.org/drawingml/2006/main" xmlns:r="http://schemas.openxmlformats.org/officeDocument/2006/relationships" xmlns:p="http://schemas.openxmlformats.org/presentationml/2006/main">
   <p:cSld>
     <p:spTree>
       <p:nvGrpSpPr>
@@ -8979,7 +9106,14 @@
         <p:cNvGrpSpPr/>
         <p:nvPr/>
       </p:nvGrpSpPr>
-      <p:grpSpPr/>
+      <p:grpSpPr>
+        <a:xfrm>
+          <a:off x="0" y="0"/>
+          <a:ext cx="0" cy="0"/>
+          <a:chOff x="0" y="0"/>
+          <a:chExt cx="0" cy="0"/>
+        </a:xfrm>
+      </p:grpSpPr>
       <p:sp>
         <p:nvSpPr>
           <p:cNvPr id="2" name="Rectangle 1"/>
@@ -9018,6 +9152,7 @@
           <a:lstStyle/>
           <a:p>
             <a:pPr algn="ctr"/>
+            <a:endParaRPr/>
           </a:p>
         </p:txBody>
       </p:sp>
@@ -9129,6 +9264,7 @@
           <a:lstStyle/>
           <a:p>
             <a:pPr algn="ctr"/>
+            <a:endParaRPr/>
           </a:p>
         </p:txBody>
       </p:sp>
@@ -9206,6 +9342,7 @@
           <a:lstStyle/>
           <a:p>
             <a:pPr algn="ctr"/>
+            <a:endParaRPr/>
           </a:p>
         </p:txBody>
       </p:sp>
@@ -9249,6 +9386,7 @@
           <a:lstStyle/>
           <a:p>
             <a:pPr algn="ctr"/>
+            <a:endParaRPr/>
           </a:p>
         </p:txBody>
       </p:sp>
@@ -9292,6 +9430,7 @@
           <a:lstStyle/>
           <a:p>
             <a:pPr algn="ctr"/>
+            <a:endParaRPr/>
           </a:p>
         </p:txBody>
       </p:sp>
@@ -9439,6 +9578,7 @@
           <a:lstStyle/>
           <a:p>
             <a:pPr algn="ctr"/>
+            <a:endParaRPr/>
           </a:p>
         </p:txBody>
       </p:sp>
@@ -9482,6 +9622,7 @@
           <a:lstStyle/>
           <a:p>
             <a:pPr algn="ctr"/>
+            <a:endParaRPr/>
           </a:p>
         </p:txBody>
       </p:sp>
@@ -9525,6 +9666,7 @@
           <a:lstStyle/>
           <a:p>
             <a:pPr algn="ctr"/>
+            <a:endParaRPr/>
           </a:p>
         </p:txBody>
       </p:sp>
@@ -9641,7 +9783,7 @@
 </file>
 
 <file path=ppt/slides/slide18.xml><?xml version="1.0" encoding="utf-8"?>
-<p:sld xmlns:a="http://schemas.openxmlformats.org/drawingml/2006/main" xmlns:p="http://schemas.openxmlformats.org/presentationml/2006/main" xmlns:r="http://schemas.openxmlformats.org/officeDocument/2006/relationships">
+<p:sld xmlns:a="http://schemas.openxmlformats.org/drawingml/2006/main" xmlns:r="http://schemas.openxmlformats.org/officeDocument/2006/relationships" xmlns:p="http://schemas.openxmlformats.org/presentationml/2006/main">
   <p:cSld>
     <p:spTree>
       <p:nvGrpSpPr>
@@ -9649,7 +9791,14 @@
         <p:cNvGrpSpPr/>
         <p:nvPr/>
       </p:nvGrpSpPr>
-      <p:grpSpPr/>
+      <p:grpSpPr>
+        <a:xfrm>
+          <a:off x="0" y="0"/>
+          <a:ext cx="0" cy="0"/>
+          <a:chOff x="0" y="0"/>
+          <a:chExt cx="0" cy="0"/>
+        </a:xfrm>
+      </p:grpSpPr>
       <p:sp>
         <p:nvSpPr>
           <p:cNvPr id="2" name="Rectangle 1"/>
@@ -9688,6 +9837,7 @@
           <a:lstStyle/>
           <a:p>
             <a:pPr algn="ctr"/>
+            <a:endParaRPr/>
           </a:p>
         </p:txBody>
       </p:sp>
@@ -9765,6 +9915,7 @@
           <a:lstStyle/>
           <a:p>
             <a:pPr algn="ctr"/>
+            <a:endParaRPr/>
           </a:p>
         </p:txBody>
       </p:sp>
@@ -9876,6 +10027,7 @@
           <a:lstStyle/>
           <a:p>
             <a:pPr algn="ctr"/>
+            <a:endParaRPr/>
           </a:p>
         </p:txBody>
       </p:sp>
@@ -9953,6 +10105,7 @@
           <a:lstStyle/>
           <a:p>
             <a:pPr algn="ctr"/>
+            <a:endParaRPr/>
           </a:p>
         </p:txBody>
       </p:sp>
@@ -10030,6 +10183,7 @@
           <a:lstStyle/>
           <a:p>
             <a:pPr algn="ctr"/>
+            <a:endParaRPr/>
           </a:p>
         </p:txBody>
       </p:sp>
@@ -10107,6 +10261,7 @@
           <a:lstStyle/>
           <a:p>
             <a:pPr algn="ctr"/>
+            <a:endParaRPr/>
           </a:p>
         </p:txBody>
       </p:sp>
@@ -10153,7 +10308,7 @@
 </file>
 
 <file path=ppt/slides/slide19.xml><?xml version="1.0" encoding="utf-8"?>
-<p:sld xmlns:a="http://schemas.openxmlformats.org/drawingml/2006/main" xmlns:p="http://schemas.openxmlformats.org/presentationml/2006/main" xmlns:r="http://schemas.openxmlformats.org/officeDocument/2006/relationships">
+<p:sld xmlns:a="http://schemas.openxmlformats.org/drawingml/2006/main" xmlns:r="http://schemas.openxmlformats.org/officeDocument/2006/relationships" xmlns:p="http://schemas.openxmlformats.org/presentationml/2006/main">
   <p:cSld>
     <p:spTree>
       <p:nvGrpSpPr>
@@ -10161,7 +10316,14 @@
         <p:cNvGrpSpPr/>
         <p:nvPr/>
       </p:nvGrpSpPr>
-      <p:grpSpPr/>
+      <p:grpSpPr>
+        <a:xfrm>
+          <a:off x="0" y="0"/>
+          <a:ext cx="0" cy="0"/>
+          <a:chOff x="0" y="0"/>
+          <a:chExt cx="0" cy="0"/>
+        </a:xfrm>
+      </p:grpSpPr>
       <p:sp>
         <p:nvSpPr>
           <p:cNvPr id="2" name="Rectangle 1"/>
@@ -10200,6 +10362,7 @@
           <a:lstStyle/>
           <a:p>
             <a:pPr algn="ctr"/>
+            <a:endParaRPr/>
           </a:p>
         </p:txBody>
       </p:sp>
@@ -10277,6 +10440,7 @@
           <a:lstStyle/>
           <a:p>
             <a:pPr algn="ctr"/>
+            <a:endParaRPr/>
           </a:p>
         </p:txBody>
       </p:sp>
@@ -10388,6 +10552,7 @@
           <a:lstStyle/>
           <a:p>
             <a:pPr algn="ctr"/>
+            <a:endParaRPr/>
           </a:p>
         </p:txBody>
       </p:sp>
@@ -10465,6 +10630,7 @@
           <a:lstStyle/>
           <a:p>
             <a:pPr algn="ctr"/>
+            <a:endParaRPr/>
           </a:p>
         </p:txBody>
       </p:sp>
@@ -10542,6 +10708,7 @@
           <a:lstStyle/>
           <a:p>
             <a:pPr algn="ctr"/>
+            <a:endParaRPr/>
           </a:p>
         </p:txBody>
       </p:sp>
@@ -10619,6 +10786,7 @@
           <a:lstStyle/>
           <a:p>
             <a:pPr algn="ctr"/>
+            <a:endParaRPr/>
           </a:p>
         </p:txBody>
       </p:sp>
@@ -10732,6 +10900,7 @@
           <a:lstStyle/>
           <a:p>
             <a:pPr algn="ctr"/>
+            <a:endParaRPr/>
           </a:p>
         </p:txBody>
       </p:sp>
@@ -10811,6 +10980,7 @@
           <a:lstStyle/>
           <a:p>
             <a:pPr algn="ctr"/>
+            <a:endParaRPr/>
           </a:p>
         </p:txBody>
       </p:sp>
@@ -10890,6 +11060,7 @@
           <a:lstStyle/>
           <a:p>
             <a:pPr algn="ctr"/>
+            <a:endParaRPr/>
           </a:p>
         </p:txBody>
       </p:sp>
@@ -10969,6 +11140,7 @@
           <a:lstStyle/>
           <a:p>
             <a:pPr algn="ctr"/>
+            <a:endParaRPr/>
           </a:p>
         </p:txBody>
       </p:sp>
@@ -11048,6 +11220,7 @@
           <a:lstStyle/>
           <a:p>
             <a:pPr algn="ctr"/>
+            <a:endParaRPr/>
           </a:p>
         </p:txBody>
       </p:sp>
@@ -11127,6 +11300,7 @@
           <a:lstStyle/>
           <a:p>
             <a:pPr algn="ctr"/>
+            <a:endParaRPr/>
           </a:p>
         </p:txBody>
       </p:sp>
@@ -11206,6 +11380,7 @@
           <a:lstStyle/>
           <a:p>
             <a:pPr algn="ctr"/>
+            <a:endParaRPr/>
           </a:p>
         </p:txBody>
       </p:sp>
@@ -11285,6 +11460,7 @@
           <a:lstStyle/>
           <a:p>
             <a:pPr algn="ctr"/>
+            <a:endParaRPr/>
           </a:p>
         </p:txBody>
       </p:sp>
@@ -11364,6 +11540,7 @@
           <a:lstStyle/>
           <a:p>
             <a:pPr algn="ctr"/>
+            <a:endParaRPr/>
           </a:p>
         </p:txBody>
       </p:sp>
@@ -11390,14 +11567,7 @@
           <a:lstStyle/>
           <a:p>
             <a:pPr algn="l"/>
-            <a:r>
-              <a:rPr sz="1200" b="0">
-                <a:solidFill>
-                  <a:srgbClr val="212121"/>
-                </a:solidFill>
-              </a:rPr>
-              <a:t/>
-            </a:r>
+            <a:endParaRPr/>
           </a:p>
         </p:txBody>
       </p:sp>
@@ -11443,6 +11613,7 @@
           <a:lstStyle/>
           <a:p>
             <a:pPr algn="ctr"/>
+            <a:endParaRPr/>
           </a:p>
         </p:txBody>
       </p:sp>
@@ -11522,6 +11693,7 @@
           <a:lstStyle/>
           <a:p>
             <a:pPr algn="ctr"/>
+            <a:endParaRPr/>
           </a:p>
         </p:txBody>
       </p:sp>
@@ -11601,6 +11773,7 @@
           <a:lstStyle/>
           <a:p>
             <a:pPr algn="ctr"/>
+            <a:endParaRPr/>
           </a:p>
         </p:txBody>
       </p:sp>
@@ -11680,6 +11853,7 @@
           <a:lstStyle/>
           <a:p>
             <a:pPr algn="ctr"/>
+            <a:endParaRPr/>
           </a:p>
         </p:txBody>
       </p:sp>
@@ -11759,6 +11933,7 @@
           <a:lstStyle/>
           <a:p>
             <a:pPr algn="ctr"/>
+            <a:endParaRPr/>
           </a:p>
         </p:txBody>
       </p:sp>
@@ -11838,6 +12013,7 @@
           <a:lstStyle/>
           <a:p>
             <a:pPr algn="ctr"/>
+            <a:endParaRPr/>
           </a:p>
         </p:txBody>
       </p:sp>
@@ -11884,7 +12060,7 @@
 </file>
 
 <file path=ppt/slides/slide2.xml><?xml version="1.0" encoding="utf-8"?>
-<p:sld xmlns:a="http://schemas.openxmlformats.org/drawingml/2006/main" xmlns:p="http://schemas.openxmlformats.org/presentationml/2006/main" xmlns:r="http://schemas.openxmlformats.org/officeDocument/2006/relationships">
+<p:sld xmlns:a="http://schemas.openxmlformats.org/drawingml/2006/main" xmlns:r="http://schemas.openxmlformats.org/officeDocument/2006/relationships" xmlns:p="http://schemas.openxmlformats.org/presentationml/2006/main">
   <p:cSld>
     <p:spTree>
       <p:nvGrpSpPr>
@@ -11892,7 +12068,14 @@
         <p:cNvGrpSpPr/>
         <p:nvPr/>
       </p:nvGrpSpPr>
-      <p:grpSpPr/>
+      <p:grpSpPr>
+        <a:xfrm>
+          <a:off x="0" y="0"/>
+          <a:ext cx="0" cy="0"/>
+          <a:chOff x="0" y="0"/>
+          <a:chExt cx="0" cy="0"/>
+        </a:xfrm>
+      </p:grpSpPr>
       <p:sp>
         <p:nvSpPr>
           <p:cNvPr id="2" name="Rectangle 1"/>
@@ -11931,6 +12114,7 @@
           <a:lstStyle/>
           <a:p>
             <a:pPr algn="ctr"/>
+            <a:endParaRPr/>
           </a:p>
         </p:txBody>
       </p:sp>
@@ -12042,6 +12226,7 @@
           <a:lstStyle/>
           <a:p>
             <a:pPr algn="ctr"/>
+            <a:endParaRPr/>
           </a:p>
         </p:txBody>
       </p:sp>
@@ -12119,6 +12304,7 @@
           <a:lstStyle/>
           <a:p>
             <a:pPr algn="ctr"/>
+            <a:endParaRPr/>
           </a:p>
         </p:txBody>
       </p:sp>
@@ -12162,6 +12348,7 @@
           <a:lstStyle/>
           <a:p>
             <a:pPr algn="ctr"/>
+            <a:endParaRPr/>
           </a:p>
         </p:txBody>
       </p:sp>
@@ -12273,6 +12460,7 @@
           <a:lstStyle/>
           <a:p>
             <a:pPr algn="ctr"/>
+            <a:endParaRPr/>
           </a:p>
         </p:txBody>
       </p:sp>
@@ -12316,6 +12504,7 @@
           <a:lstStyle/>
           <a:p>
             <a:pPr algn="ctr"/>
+            <a:endParaRPr/>
           </a:p>
         </p:txBody>
       </p:sp>
@@ -12427,6 +12616,7 @@
           <a:lstStyle/>
           <a:p>
             <a:pPr algn="ctr"/>
+            <a:endParaRPr/>
           </a:p>
         </p:txBody>
       </p:sp>
@@ -12470,6 +12660,7 @@
           <a:lstStyle/>
           <a:p>
             <a:pPr algn="ctr"/>
+            <a:endParaRPr/>
           </a:p>
         </p:txBody>
       </p:sp>
@@ -12583,6 +12774,7 @@
           <a:lstStyle/>
           <a:p>
             <a:pPr algn="ctr"/>
+            <a:endParaRPr/>
           </a:p>
         </p:txBody>
       </p:sp>
@@ -12626,6 +12818,7 @@
           <a:lstStyle/>
           <a:p>
             <a:pPr algn="ctr"/>
+            <a:endParaRPr/>
           </a:p>
         </p:txBody>
       </p:sp>
@@ -12672,7 +12865,7 @@
 </file>
 
 <file path=ppt/slides/slide20.xml><?xml version="1.0" encoding="utf-8"?>
-<p:sld xmlns:a="http://schemas.openxmlformats.org/drawingml/2006/main" xmlns:p="http://schemas.openxmlformats.org/presentationml/2006/main" xmlns:r="http://schemas.openxmlformats.org/officeDocument/2006/relationships">
+<p:sld xmlns:a="http://schemas.openxmlformats.org/drawingml/2006/main" xmlns:r="http://schemas.openxmlformats.org/officeDocument/2006/relationships" xmlns:p="http://schemas.openxmlformats.org/presentationml/2006/main">
   <p:cSld>
     <p:spTree>
       <p:nvGrpSpPr>
@@ -12680,7 +12873,14 @@
         <p:cNvGrpSpPr/>
         <p:nvPr/>
       </p:nvGrpSpPr>
-      <p:grpSpPr/>
+      <p:grpSpPr>
+        <a:xfrm>
+          <a:off x="0" y="0"/>
+          <a:ext cx="0" cy="0"/>
+          <a:chOff x="0" y="0"/>
+          <a:chExt cx="0" cy="0"/>
+        </a:xfrm>
+      </p:grpSpPr>
       <p:sp>
         <p:nvSpPr>
           <p:cNvPr id="2" name="Rectangle 1"/>
@@ -12719,6 +12919,7 @@
           <a:lstStyle/>
           <a:p>
             <a:pPr algn="ctr"/>
+            <a:endParaRPr/>
           </a:p>
         </p:txBody>
       </p:sp>
@@ -12796,6 +12997,7 @@
           <a:lstStyle/>
           <a:p>
             <a:pPr algn="ctr"/>
+            <a:endParaRPr/>
           </a:p>
         </p:txBody>
       </p:sp>
@@ -12907,6 +13109,7 @@
           <a:lstStyle/>
           <a:p>
             <a:pPr algn="ctr"/>
+            <a:endParaRPr/>
           </a:p>
         </p:txBody>
       </p:sp>
@@ -12984,6 +13187,7 @@
           <a:lstStyle/>
           <a:p>
             <a:pPr algn="ctr"/>
+            <a:endParaRPr/>
           </a:p>
         </p:txBody>
       </p:sp>
@@ -13061,6 +13265,7 @@
           <a:lstStyle/>
           <a:p>
             <a:pPr algn="ctr"/>
+            <a:endParaRPr/>
           </a:p>
         </p:txBody>
       </p:sp>
@@ -13138,6 +13343,7 @@
           <a:lstStyle/>
           <a:p>
             <a:pPr algn="ctr"/>
+            <a:endParaRPr/>
           </a:p>
         </p:txBody>
       </p:sp>
@@ -13184,256 +13390,7 @@
 </file>
 
 <file path=ppt/slides/slide21.xml><?xml version="1.0" encoding="utf-8"?>
-<p:sld xmlns:a="http://schemas.openxmlformats.org/drawingml/2006/main" xmlns:p="http://schemas.openxmlformats.org/presentationml/2006/main" xmlns:r="http://schemas.openxmlformats.org/officeDocument/2006/relationships">
-  <p:cSld>
-    <p:spTree>
-      <p:nvGrpSpPr>
-        <p:cNvPr id="1" name=""/>
-        <p:cNvGrpSpPr/>
-        <p:nvPr/>
-      </p:nvGrpSpPr>
-      <p:grpSpPr/>
-      <p:sp>
-        <p:nvSpPr>
-          <p:cNvPr id="2" name="Rectangle 1"/>
-          <p:cNvSpPr/>
-          <p:nvPr/>
-        </p:nvSpPr>
-        <p:spPr>
-          <a:xfrm>
-            <a:off x="0" y="0"/>
-            <a:ext cx="12188952" cy="6858000"/>
-          </a:xfrm>
-          <a:prstGeom prst="rect">
-            <a:avLst/>
-          </a:prstGeom>
-          <a:solidFill>
-            <a:srgbClr val="FFFFFF"/>
-          </a:solidFill>
-          <a:ln>
-            <a:noFill/>
-          </a:ln>
-        </p:spPr>
-        <p:style>
-          <a:lnRef idx="1">
-            <a:schemeClr val="accent1"/>
-          </a:lnRef>
-          <a:fillRef idx="3">
-            <a:schemeClr val="accent1"/>
-          </a:fillRef>
-          <a:effectRef idx="2">
-            <a:schemeClr val="accent1"/>
-          </a:effectRef>
-          <a:fontRef idx="minor">
-            <a:schemeClr val="lt1"/>
-          </a:fontRef>
-        </p:style>
-        <p:txBody>
-          <a:bodyPr rtlCol="0" anchor="ctr"/>
-          <a:lstStyle/>
-          <a:p>
-            <a:pPr algn="ctr"/>
-          </a:p>
-        </p:txBody>
-      </p:sp>
-      <p:sp>
-        <p:nvSpPr>
-          <p:cNvPr id="3" name="Rectangle 2"/>
-          <p:cNvSpPr/>
-          <p:nvPr/>
-        </p:nvSpPr>
-        <p:spPr>
-          <a:xfrm>
-            <a:off x="0" y="4663440"/>
-            <a:ext cx="12188952" cy="45720"/>
-          </a:xfrm>
-          <a:prstGeom prst="rect">
-            <a:avLst/>
-          </a:prstGeom>
-          <a:solidFill>
-            <a:srgbClr val="3F51B5"/>
-          </a:solidFill>
-          <a:ln>
-            <a:noFill/>
-          </a:ln>
-        </p:spPr>
-        <p:style>
-          <a:lnRef idx="1">
-            <a:schemeClr val="accent1"/>
-          </a:lnRef>
-          <a:fillRef idx="3">
-            <a:schemeClr val="accent1"/>
-          </a:fillRef>
-          <a:effectRef idx="2">
-            <a:schemeClr val="accent1"/>
-          </a:effectRef>
-          <a:fontRef idx="minor">
-            <a:schemeClr val="lt1"/>
-          </a:fontRef>
-        </p:style>
-        <p:txBody>
-          <a:bodyPr rtlCol="0" anchor="ctr"/>
-          <a:lstStyle/>
-          <a:p>
-            <a:pPr algn="ctr"/>
-          </a:p>
-        </p:txBody>
-      </p:sp>
-      <p:sp>
-        <p:nvSpPr>
-          <p:cNvPr id="4" name="Rectangle 3"/>
-          <p:cNvSpPr/>
-          <p:nvPr/>
-        </p:nvSpPr>
-        <p:spPr>
-          <a:xfrm>
-            <a:off x="0" y="4709160"/>
-            <a:ext cx="12188952" cy="2148840"/>
-          </a:xfrm>
-          <a:prstGeom prst="rect">
-            <a:avLst/>
-          </a:prstGeom>
-          <a:solidFill>
-            <a:srgbClr val="F5F5F5"/>
-          </a:solidFill>
-          <a:ln>
-            <a:noFill/>
-          </a:ln>
-        </p:spPr>
-        <p:style>
-          <a:lnRef idx="1">
-            <a:schemeClr val="accent1"/>
-          </a:lnRef>
-          <a:fillRef idx="3">
-            <a:schemeClr val="accent1"/>
-          </a:fillRef>
-          <a:effectRef idx="2">
-            <a:schemeClr val="accent1"/>
-          </a:effectRef>
-          <a:fontRef idx="minor">
-            <a:schemeClr val="lt1"/>
-          </a:fontRef>
-        </p:style>
-        <p:txBody>
-          <a:bodyPr rtlCol="0" anchor="ctr"/>
-          <a:lstStyle/>
-          <a:p>
-            <a:pPr algn="ctr"/>
-          </a:p>
-        </p:txBody>
-      </p:sp>
-      <p:sp>
-        <p:nvSpPr>
-          <p:cNvPr id="5" name="TextBox 4"/>
-          <p:cNvSpPr txBox="1"/>
-          <p:nvPr/>
-        </p:nvSpPr>
-        <p:spPr>
-          <a:xfrm>
-            <a:off x="914400" y="1463040"/>
-            <a:ext cx="10058400" cy="1371600"/>
-          </a:xfrm>
-          <a:prstGeom prst="rect">
-            <a:avLst/>
-          </a:prstGeom>
-          <a:noFill/>
-        </p:spPr>
-        <p:txBody>
-          <a:bodyPr wrap="square">
-            <a:spAutoFit/>
-          </a:bodyPr>
-          <a:lstStyle/>
-          <a:p>
-            <a:pPr algn="ctr"/>
-            <a:r>
-              <a:rPr sz="5200" b="1">
-                <a:solidFill>
-                  <a:srgbClr val="3F51B5"/>
-                </a:solidFill>
-              </a:rPr>
-              <a:t>감사합니다</a:t>
-            </a:r>
-          </a:p>
-        </p:txBody>
-      </p:sp>
-      <p:sp>
-        <p:nvSpPr>
-          <p:cNvPr id="6" name="TextBox 5"/>
-          <p:cNvSpPr txBox="1"/>
-          <p:nvPr/>
-        </p:nvSpPr>
-        <p:spPr>
-          <a:xfrm>
-            <a:off x="914400" y="5074920"/>
-            <a:ext cx="10058400" cy="457200"/>
-          </a:xfrm>
-          <a:prstGeom prst="rect">
-            <a:avLst/>
-          </a:prstGeom>
-          <a:noFill/>
-        </p:spPr>
-        <p:txBody>
-          <a:bodyPr wrap="square">
-            <a:spAutoFit/>
-          </a:bodyPr>
-          <a:lstStyle/>
-          <a:p>
-            <a:pPr algn="ctr"/>
-            <a:r>
-              <a:rPr sz="1300" b="0">
-                <a:solidFill>
-                  <a:srgbClr val="9E9E9E"/>
-                </a:solidFill>
-              </a:rPr>
-              <a:t>Portfolio Tracker  ·  2026.06</a:t>
-            </a:r>
-          </a:p>
-        </p:txBody>
-      </p:sp>
-      <p:sp>
-        <p:nvSpPr>
-          <p:cNvPr id="7" name="TextBox 6"/>
-          <p:cNvSpPr txBox="1"/>
-          <p:nvPr/>
-        </p:nvSpPr>
-        <p:spPr>
-          <a:xfrm>
-            <a:off x="11247120" y="6492240"/>
-            <a:ext cx="822960" cy="274320"/>
-          </a:xfrm>
-          <a:prstGeom prst="rect">
-            <a:avLst/>
-          </a:prstGeom>
-          <a:noFill/>
-        </p:spPr>
-        <p:txBody>
-          <a:bodyPr wrap="square">
-            <a:spAutoFit/>
-          </a:bodyPr>
-          <a:lstStyle/>
-          <a:p>
-            <a:pPr algn="ctr"/>
-            <a:r>
-              <a:rPr sz="1000" b="0">
-                <a:solidFill>
-                  <a:srgbClr val="9E9E9E"/>
-                </a:solidFill>
-              </a:rPr>
-              <a:t>21 / 21</a:t>
-            </a:r>
-          </a:p>
-        </p:txBody>
-      </p:sp>
-    </p:spTree>
-  </p:cSld>
-  <p:clrMapOvr>
-    <a:masterClrMapping/>
-  </p:clrMapOvr>
-</p:sld>
-</file>
-
-<file path=ppt/slides/slide22.xml><?xml version="1.0" encoding="utf-8"?>
-<p:sld xmlns:a="http://schemas.openxmlformats.org/drawingml/2006/main" xmlns:p="http://schemas.openxmlformats.org/presentationml/2006/main" xmlns:r="http://schemas.openxmlformats.org/officeDocument/2006/relationships">
+<p:sld xmlns:a="http://schemas.openxmlformats.org/drawingml/2006/main" xmlns:r="http://schemas.openxmlformats.org/officeDocument/2006/relationships" xmlns:p="http://schemas.openxmlformats.org/presentationml/2006/main">
   <p:cSld>
     <p:bg>
       <p:bgPr>
@@ -13449,7 +13406,14 @@
         <p:cNvGrpSpPr/>
         <p:nvPr/>
       </p:nvGrpSpPr>
-      <p:grpSpPr/>
+      <p:grpSpPr>
+        <a:xfrm>
+          <a:off x="0" y="0"/>
+          <a:ext cx="0" cy="0"/>
+          <a:chOff x="0" y="0"/>
+          <a:chExt cx="0" cy="0"/>
+        </a:xfrm>
+      </p:grpSpPr>
       <p:pic>
         <p:nvPicPr>
           <p:cNvPr id="2" name="PortfolioTracker.mp4">
@@ -13459,10 +13423,10 @@
             <a:picLocks noChangeAspect="1"/>
           </p:cNvPicPr>
           <p:nvPr>
-            <a:videoFile r:link="rId3"/>
+            <a:videoFile r:link="rId2"/>
             <p:extLst>
               <p:ext uri="{DAA4B4D4-6D71-4841-9C94-3DE7FCFB9230}">
-                <p14:media xmlns:p14="http://schemas.microsoft.com/office/powerpoint/2010/main" r:embed="rId2"/>
+                <p14:media xmlns:p14="http://schemas.microsoft.com/office/powerpoint/2010/main" r:embed="rId1"/>
               </p:ext>
             </p:extLst>
           </p:nvPr>
@@ -13475,8 +13439,8 @@
         </p:blipFill>
         <p:spPr>
           <a:xfrm>
-            <a:off x="0" y="0"/>
-            <a:ext cx="12188952" cy="6858000"/>
+            <a:off x="3931315" y="0"/>
+            <a:ext cx="4326194" cy="6858000"/>
           </a:xfrm>
           <a:prstGeom prst="rect">
             <a:avLst/>
@@ -13513,7 +13477,266 @@
 </p:sld>
 </file>
 
-<file path=ppt/slides/slide3.xml><?xml version="1.0" encoding="utf-8"?>
+<file path=ppt/slides/slide22.xml><?xml version="1.0" encoding="utf-8"?>
+<p:sld xmlns:a="http://schemas.openxmlformats.org/drawingml/2006/main" xmlns:r="http://schemas.openxmlformats.org/officeDocument/2006/relationships" xmlns:p="http://schemas.openxmlformats.org/presentationml/2006/main">
+  <p:cSld>
+    <p:spTree>
+      <p:nvGrpSpPr>
+        <p:cNvPr id="1" name=""/>
+        <p:cNvGrpSpPr/>
+        <p:nvPr/>
+      </p:nvGrpSpPr>
+      <p:grpSpPr>
+        <a:xfrm>
+          <a:off x="0" y="0"/>
+          <a:ext cx="0" cy="0"/>
+          <a:chOff x="0" y="0"/>
+          <a:chExt cx="0" cy="0"/>
+        </a:xfrm>
+      </p:grpSpPr>
+      <p:sp>
+        <p:nvSpPr>
+          <p:cNvPr id="2" name="Rectangle 1"/>
+          <p:cNvSpPr/>
+          <p:nvPr/>
+        </p:nvSpPr>
+        <p:spPr>
+          <a:xfrm>
+            <a:off x="0" y="0"/>
+            <a:ext cx="12188952" cy="6858000"/>
+          </a:xfrm>
+          <a:prstGeom prst="rect">
+            <a:avLst/>
+          </a:prstGeom>
+          <a:solidFill>
+            <a:srgbClr val="FFFFFF"/>
+          </a:solidFill>
+          <a:ln>
+            <a:noFill/>
+          </a:ln>
+        </p:spPr>
+        <p:style>
+          <a:lnRef idx="1">
+            <a:schemeClr val="accent1"/>
+          </a:lnRef>
+          <a:fillRef idx="3">
+            <a:schemeClr val="accent1"/>
+          </a:fillRef>
+          <a:effectRef idx="2">
+            <a:schemeClr val="accent1"/>
+          </a:effectRef>
+          <a:fontRef idx="minor">
+            <a:schemeClr val="lt1"/>
+          </a:fontRef>
+        </p:style>
+        <p:txBody>
+          <a:bodyPr rtlCol="0" anchor="ctr"/>
+          <a:lstStyle/>
+          <a:p>
+            <a:pPr algn="ctr"/>
+            <a:endParaRPr/>
+          </a:p>
+        </p:txBody>
+      </p:sp>
+      <p:sp>
+        <p:nvSpPr>
+          <p:cNvPr id="3" name="Rectangle 2"/>
+          <p:cNvSpPr/>
+          <p:nvPr/>
+        </p:nvSpPr>
+        <p:spPr>
+          <a:xfrm>
+            <a:off x="0" y="4663440"/>
+            <a:ext cx="12188952" cy="45720"/>
+          </a:xfrm>
+          <a:prstGeom prst="rect">
+            <a:avLst/>
+          </a:prstGeom>
+          <a:solidFill>
+            <a:srgbClr val="3F51B5"/>
+          </a:solidFill>
+          <a:ln>
+            <a:noFill/>
+          </a:ln>
+        </p:spPr>
+        <p:style>
+          <a:lnRef idx="1">
+            <a:schemeClr val="accent1"/>
+          </a:lnRef>
+          <a:fillRef idx="3">
+            <a:schemeClr val="accent1"/>
+          </a:fillRef>
+          <a:effectRef idx="2">
+            <a:schemeClr val="accent1"/>
+          </a:effectRef>
+          <a:fontRef idx="minor">
+            <a:schemeClr val="lt1"/>
+          </a:fontRef>
+        </p:style>
+        <p:txBody>
+          <a:bodyPr rtlCol="0" anchor="ctr"/>
+          <a:lstStyle/>
+          <a:p>
+            <a:pPr algn="ctr"/>
+            <a:endParaRPr/>
+          </a:p>
+        </p:txBody>
+      </p:sp>
+      <p:sp>
+        <p:nvSpPr>
+          <p:cNvPr id="4" name="Rectangle 3"/>
+          <p:cNvSpPr/>
+          <p:nvPr/>
+        </p:nvSpPr>
+        <p:spPr>
+          <a:xfrm>
+            <a:off x="0" y="4709160"/>
+            <a:ext cx="12188952" cy="2148840"/>
+          </a:xfrm>
+          <a:prstGeom prst="rect">
+            <a:avLst/>
+          </a:prstGeom>
+          <a:solidFill>
+            <a:srgbClr val="F5F5F5"/>
+          </a:solidFill>
+          <a:ln>
+            <a:noFill/>
+          </a:ln>
+        </p:spPr>
+        <p:style>
+          <a:lnRef idx="1">
+            <a:schemeClr val="accent1"/>
+          </a:lnRef>
+          <a:fillRef idx="3">
+            <a:schemeClr val="accent1"/>
+          </a:fillRef>
+          <a:effectRef idx="2">
+            <a:schemeClr val="accent1"/>
+          </a:effectRef>
+          <a:fontRef idx="minor">
+            <a:schemeClr val="lt1"/>
+          </a:fontRef>
+        </p:style>
+        <p:txBody>
+          <a:bodyPr rtlCol="0" anchor="ctr"/>
+          <a:lstStyle/>
+          <a:p>
+            <a:pPr algn="ctr"/>
+            <a:endParaRPr/>
+          </a:p>
+        </p:txBody>
+      </p:sp>
+      <p:sp>
+        <p:nvSpPr>
+          <p:cNvPr id="5" name="TextBox 4"/>
+          <p:cNvSpPr txBox="1"/>
+          <p:nvPr/>
+        </p:nvSpPr>
+        <p:spPr>
+          <a:xfrm>
+            <a:off x="914400" y="1463040"/>
+            <a:ext cx="10058400" cy="1371600"/>
+          </a:xfrm>
+          <a:prstGeom prst="rect">
+            <a:avLst/>
+          </a:prstGeom>
+          <a:noFill/>
+        </p:spPr>
+        <p:txBody>
+          <a:bodyPr wrap="square">
+            <a:spAutoFit/>
+          </a:bodyPr>
+          <a:lstStyle/>
+          <a:p>
+            <a:pPr algn="ctr"/>
+            <a:r>
+              <a:rPr sz="5200" b="1">
+                <a:solidFill>
+                  <a:srgbClr val="3F51B5"/>
+                </a:solidFill>
+              </a:rPr>
+              <a:t>감사합니다</a:t>
+            </a:r>
+          </a:p>
+        </p:txBody>
+      </p:sp>
+      <p:sp>
+        <p:nvSpPr>
+          <p:cNvPr id="6" name="TextBox 5"/>
+          <p:cNvSpPr txBox="1"/>
+          <p:nvPr/>
+        </p:nvSpPr>
+        <p:spPr>
+          <a:xfrm>
+            <a:off x="914400" y="5074920"/>
+            <a:ext cx="10058400" cy="457200"/>
+          </a:xfrm>
+          <a:prstGeom prst="rect">
+            <a:avLst/>
+          </a:prstGeom>
+          <a:noFill/>
+        </p:spPr>
+        <p:txBody>
+          <a:bodyPr wrap="square">
+            <a:spAutoFit/>
+          </a:bodyPr>
+          <a:lstStyle/>
+          <a:p>
+            <a:pPr algn="ctr"/>
+            <a:r>
+              <a:rPr sz="1300" b="0">
+                <a:solidFill>
+                  <a:srgbClr val="9E9E9E"/>
+                </a:solidFill>
+              </a:rPr>
+              <a:t>Portfolio Tracker  ·  2026.06</a:t>
+            </a:r>
+          </a:p>
+        </p:txBody>
+      </p:sp>
+      <p:sp>
+        <p:nvSpPr>
+          <p:cNvPr id="7" name="TextBox 6"/>
+          <p:cNvSpPr txBox="1"/>
+          <p:nvPr/>
+        </p:nvSpPr>
+        <p:spPr>
+          <a:xfrm>
+            <a:off x="11247120" y="6492240"/>
+            <a:ext cx="822960" cy="274320"/>
+          </a:xfrm>
+          <a:prstGeom prst="rect">
+            <a:avLst/>
+          </a:prstGeom>
+          <a:noFill/>
+        </p:spPr>
+        <p:txBody>
+          <a:bodyPr wrap="square">
+            <a:spAutoFit/>
+          </a:bodyPr>
+          <a:lstStyle/>
+          <a:p>
+            <a:pPr algn="ctr"/>
+            <a:r>
+              <a:rPr sz="1000" b="0">
+                <a:solidFill>
+                  <a:srgbClr val="9E9E9E"/>
+                </a:solidFill>
+              </a:rPr>
+              <a:t>21 / 21</a:t>
+            </a:r>
+          </a:p>
+        </p:txBody>
+      </p:sp>
+    </p:spTree>
+  </p:cSld>
+  <p:clrMapOvr>
+    <a:masterClrMapping/>
+  </p:clrMapOvr>
+</p:sld>
+</file>
+
+<file path=ppt/slides/slide23.xml><?xml version="1.0" encoding="utf-8"?>
 <p:sld xmlns:a="http://schemas.openxmlformats.org/drawingml/2006/main" xmlns:p="http://schemas.openxmlformats.org/presentationml/2006/main" xmlns:r="http://schemas.openxmlformats.org/officeDocument/2006/relationships">
   <p:cSld>
     <p:spTree>
@@ -13593,7 +13816,7 @@
                   <a:srgbClr val="3F51B5"/>
                 </a:solidFill>
               </a:rPr>
-              <a:t>2.  활용 방안 &amp; 기대 효과</a:t>
+              <a:t>GitHub 설치 가이드</a:t>
             </a:r>
           </a:p>
         </p:txBody>
@@ -13627,7 +13850,7 @@
                   <a:srgbClr val="9E9E9E"/>
                 </a:solidFill>
               </a:rPr>
-              <a:t>이 앱으로 무엇을 할 수 있는가</a:t>
+              <a:t>포트폴리오 트래커 앱 — 클론 · 설치 · 실행 방법</a:t>
             </a:r>
           </a:p>
         </p:txBody>
@@ -13683,6 +13906,755 @@
         </p:nvSpPr>
         <p:spPr>
           <a:xfrm>
+            <a:off x="11430000" y="6492240"/>
+            <a:ext cx="731520" cy="274320"/>
+          </a:xfrm>
+          <a:prstGeom prst="rect">
+            <a:avLst/>
+          </a:prstGeom>
+          <a:noFill/>
+        </p:spPr>
+        <p:txBody>
+          <a:bodyPr wrap="none">
+            <a:spAutoFit/>
+          </a:bodyPr>
+          <a:lstStyle/>
+          <a:p>
+            <a:r>
+              <a:rPr sz="1000">
+                <a:solidFill>
+                  <a:srgbClr val="9E9E9E"/>
+                </a:solidFill>
+              </a:rPr>
+              <a:t>17</a:t>
+            </a:r>
+          </a:p>
+        </p:txBody>
+      </p:sp>
+      <p:pic>
+        <p:nvPicPr>
+          <p:cNvPr id="7" name="Picture 6" descr="image.png"/>
+          <p:cNvPicPr>
+            <a:picLocks noChangeAspect="1"/>
+          </p:cNvPicPr>
+          <p:nvPr/>
+        </p:nvPicPr>
+        <p:blipFill>
+          <a:blip r:embed="rId2"/>
+          <a:stretch>
+            <a:fillRect/>
+          </a:stretch>
+        </p:blipFill>
+        <p:spPr>
+          <a:xfrm>
+            <a:off x="731520" y="1188720"/>
+            <a:ext cx="3200400" cy="3200400"/>
+          </a:xfrm>
+          <a:prstGeom prst="rect">
+            <a:avLst/>
+          </a:prstGeom>
+        </p:spPr>
+      </p:pic>
+      <p:sp>
+        <p:nvSpPr>
+          <p:cNvPr id="8" name="TextBox 7"/>
+          <p:cNvSpPr txBox="1"/>
+          <p:nvPr/>
+        </p:nvSpPr>
+        <p:spPr>
+          <a:xfrm>
+            <a:off x="365760" y="4480560"/>
+            <a:ext cx="4114800" cy="365760"/>
+          </a:xfrm>
+          <a:prstGeom prst="rect">
+            <a:avLst/>
+          </a:prstGeom>
+          <a:noFill/>
+        </p:spPr>
+        <p:txBody>
+          <a:bodyPr wrap="square">
+            <a:spAutoFit/>
+          </a:bodyPr>
+          <a:lstStyle/>
+          <a:p>
+            <a:pPr algn="ctr"/>
+            <a:r>
+              <a:rPr sz="900" b="0">
+                <a:solidFill>
+                  <a:srgbClr val="9E9E9E"/>
+                </a:solidFill>
+              </a:rPr>
+              <a:t>https://github.com/2022136020/project_c/tree/main/portfolio-tracker</a:t>
+            </a:r>
+          </a:p>
+        </p:txBody>
+      </p:sp>
+      <p:sp>
+        <p:nvSpPr>
+          <p:cNvPr id="9" name="TextBox 8"/>
+          <p:cNvSpPr txBox="1"/>
+          <p:nvPr/>
+        </p:nvSpPr>
+        <p:spPr>
+          <a:xfrm>
+            <a:off x="4572000" y="1143000"/>
+            <a:ext cx="7132320" cy="320040"/>
+          </a:xfrm>
+          <a:prstGeom prst="rect">
+            <a:avLst/>
+          </a:prstGeom>
+          <a:noFill/>
+        </p:spPr>
+        <p:txBody>
+          <a:bodyPr wrap="square">
+            <a:spAutoFit/>
+          </a:bodyPr>
+          <a:lstStyle/>
+          <a:p>
+            <a:pPr algn="l"/>
+            <a:r>
+              <a:rPr sz="1300" b="1">
+                <a:solidFill>
+                  <a:srgbClr val="3F51B5"/>
+                </a:solidFill>
+              </a:rPr>
+              <a:t>1.  저장소 클론</a:t>
+            </a:r>
+          </a:p>
+        </p:txBody>
+      </p:sp>
+      <p:sp>
+        <p:nvSpPr>
+          <p:cNvPr id="10" name="Rectangle 9"/>
+          <p:cNvSpPr/>
+          <p:nvPr/>
+        </p:nvSpPr>
+        <p:spPr>
+          <a:xfrm>
+            <a:off x="4572000" y="1463040"/>
+            <a:ext cx="7132320" cy="603504"/>
+          </a:xfrm>
+          <a:prstGeom prst="rect">
+            <a:avLst/>
+          </a:prstGeom>
+          <a:solidFill>
+            <a:srgbClr val="F5F5F5"/>
+          </a:solidFill>
+          <a:ln>
+            <a:noFill/>
+          </a:ln>
+        </p:spPr>
+        <p:style>
+          <a:lnRef idx="1">
+            <a:schemeClr val="accent1"/>
+          </a:lnRef>
+          <a:fillRef idx="3">
+            <a:schemeClr val="accent1"/>
+          </a:fillRef>
+          <a:effectRef idx="2">
+            <a:schemeClr val="accent1"/>
+          </a:effectRef>
+          <a:fontRef idx="minor">
+            <a:schemeClr val="lt1"/>
+          </a:fontRef>
+        </p:style>
+        <p:txBody>
+          <a:bodyPr rtlCol="0" anchor="ctr"/>
+          <a:lstStyle/>
+          <a:p>
+            <a:pPr algn="ctr"/>
+          </a:p>
+        </p:txBody>
+      </p:sp>
+      <p:sp>
+        <p:nvSpPr>
+          <p:cNvPr id="11" name="TextBox 10"/>
+          <p:cNvSpPr txBox="1"/>
+          <p:nvPr/>
+        </p:nvSpPr>
+        <p:spPr>
+          <a:xfrm>
+            <a:off x="4709160" y="1481328"/>
+            <a:ext cx="6858000" cy="603504"/>
+          </a:xfrm>
+          <a:prstGeom prst="rect">
+            <a:avLst/>
+          </a:prstGeom>
+          <a:noFill/>
+        </p:spPr>
+        <p:txBody>
+          <a:bodyPr wrap="square">
+            <a:spAutoFit/>
+          </a:bodyPr>
+          <a:lstStyle/>
+          <a:p>
+            <a:pPr algn="l"/>
+            <a:r>
+              <a:rPr sz="1000" b="0">
+                <a:solidFill>
+                  <a:srgbClr val="212121"/>
+                </a:solidFill>
+              </a:rPr>
+              <a:t>git clone https://github.com/2022136020/project_c.git
+cd project_c/portfolio-tracker</a:t>
+            </a:r>
+          </a:p>
+        </p:txBody>
+      </p:sp>
+      <p:sp>
+        <p:nvSpPr>
+          <p:cNvPr id="12" name="TextBox 11"/>
+          <p:cNvSpPr txBox="1"/>
+          <p:nvPr/>
+        </p:nvSpPr>
+        <p:spPr>
+          <a:xfrm>
+            <a:off x="4572000" y="2249424"/>
+            <a:ext cx="7132320" cy="320040"/>
+          </a:xfrm>
+          <a:prstGeom prst="rect">
+            <a:avLst/>
+          </a:prstGeom>
+          <a:noFill/>
+        </p:spPr>
+        <p:txBody>
+          <a:bodyPr wrap="square">
+            <a:spAutoFit/>
+          </a:bodyPr>
+          <a:lstStyle/>
+          <a:p>
+            <a:pPr algn="l"/>
+            <a:r>
+              <a:rPr sz="1300" b="1">
+                <a:solidFill>
+                  <a:srgbClr val="3F51B5"/>
+                </a:solidFill>
+              </a:rPr>
+              <a:t>2.  패키지 설치</a:t>
+            </a:r>
+          </a:p>
+        </p:txBody>
+      </p:sp>
+      <p:sp>
+        <p:nvSpPr>
+          <p:cNvPr id="13" name="Rectangle 12"/>
+          <p:cNvSpPr/>
+          <p:nvPr/>
+        </p:nvSpPr>
+        <p:spPr>
+          <a:xfrm>
+            <a:off x="4572000" y="2569464"/>
+            <a:ext cx="7132320" cy="347472"/>
+          </a:xfrm>
+          <a:prstGeom prst="rect">
+            <a:avLst/>
+          </a:prstGeom>
+          <a:solidFill>
+            <a:srgbClr val="F5F5F5"/>
+          </a:solidFill>
+          <a:ln>
+            <a:noFill/>
+          </a:ln>
+        </p:spPr>
+        <p:style>
+          <a:lnRef idx="1">
+            <a:schemeClr val="accent1"/>
+          </a:lnRef>
+          <a:fillRef idx="3">
+            <a:schemeClr val="accent1"/>
+          </a:fillRef>
+          <a:effectRef idx="2">
+            <a:schemeClr val="accent1"/>
+          </a:effectRef>
+          <a:fontRef idx="minor">
+            <a:schemeClr val="lt1"/>
+          </a:fontRef>
+        </p:style>
+        <p:txBody>
+          <a:bodyPr rtlCol="0" anchor="ctr"/>
+          <a:lstStyle/>
+          <a:p>
+            <a:pPr algn="ctr"/>
+          </a:p>
+        </p:txBody>
+      </p:sp>
+      <p:sp>
+        <p:nvSpPr>
+          <p:cNvPr id="14" name="TextBox 13"/>
+          <p:cNvSpPr txBox="1"/>
+          <p:nvPr/>
+        </p:nvSpPr>
+        <p:spPr>
+          <a:xfrm>
+            <a:off x="4709160" y="2587752"/>
+            <a:ext cx="6858000" cy="347472"/>
+          </a:xfrm>
+          <a:prstGeom prst="rect">
+            <a:avLst/>
+          </a:prstGeom>
+          <a:noFill/>
+        </p:spPr>
+        <p:txBody>
+          <a:bodyPr wrap="square">
+            <a:spAutoFit/>
+          </a:bodyPr>
+          <a:lstStyle/>
+          <a:p>
+            <a:pPr algn="l"/>
+            <a:r>
+              <a:rPr sz="1000" b="0">
+                <a:solidFill>
+                  <a:srgbClr val="212121"/>
+                </a:solidFill>
+              </a:rPr>
+              <a:t>flutter pub get</a:t>
+            </a:r>
+          </a:p>
+        </p:txBody>
+      </p:sp>
+      <p:sp>
+        <p:nvSpPr>
+          <p:cNvPr id="15" name="TextBox 14"/>
+          <p:cNvSpPr txBox="1"/>
+          <p:nvPr/>
+        </p:nvSpPr>
+        <p:spPr>
+          <a:xfrm>
+            <a:off x="4572000" y="3099816"/>
+            <a:ext cx="7132320" cy="320040"/>
+          </a:xfrm>
+          <a:prstGeom prst="rect">
+            <a:avLst/>
+          </a:prstGeom>
+          <a:noFill/>
+        </p:spPr>
+        <p:txBody>
+          <a:bodyPr wrap="square">
+            <a:spAutoFit/>
+          </a:bodyPr>
+          <a:lstStyle/>
+          <a:p>
+            <a:pPr algn="l"/>
+            <a:r>
+              <a:rPr sz="1300" b="1">
+                <a:solidFill>
+                  <a:srgbClr val="3F51B5"/>
+                </a:solidFill>
+              </a:rPr>
+              <a:t>3.  앱 실행</a:t>
+            </a:r>
+          </a:p>
+        </p:txBody>
+      </p:sp>
+      <p:sp>
+        <p:nvSpPr>
+          <p:cNvPr id="16" name="Rectangle 15"/>
+          <p:cNvSpPr/>
+          <p:nvPr/>
+        </p:nvSpPr>
+        <p:spPr>
+          <a:xfrm>
+            <a:off x="4572000" y="3419856"/>
+            <a:ext cx="7132320" cy="347472"/>
+          </a:xfrm>
+          <a:prstGeom prst="rect">
+            <a:avLst/>
+          </a:prstGeom>
+          <a:solidFill>
+            <a:srgbClr val="F5F5F5"/>
+          </a:solidFill>
+          <a:ln>
+            <a:noFill/>
+          </a:ln>
+        </p:spPr>
+        <p:style>
+          <a:lnRef idx="1">
+            <a:schemeClr val="accent1"/>
+          </a:lnRef>
+          <a:fillRef idx="3">
+            <a:schemeClr val="accent1"/>
+          </a:fillRef>
+          <a:effectRef idx="2">
+            <a:schemeClr val="accent1"/>
+          </a:effectRef>
+          <a:fontRef idx="minor">
+            <a:schemeClr val="lt1"/>
+          </a:fontRef>
+        </p:style>
+        <p:txBody>
+          <a:bodyPr rtlCol="0" anchor="ctr"/>
+          <a:lstStyle/>
+          <a:p>
+            <a:pPr algn="ctr"/>
+          </a:p>
+        </p:txBody>
+      </p:sp>
+      <p:sp>
+        <p:nvSpPr>
+          <p:cNvPr id="17" name="TextBox 16"/>
+          <p:cNvSpPr txBox="1"/>
+          <p:nvPr/>
+        </p:nvSpPr>
+        <p:spPr>
+          <a:xfrm>
+            <a:off x="4709160" y="3438144"/>
+            <a:ext cx="6858000" cy="347472"/>
+          </a:xfrm>
+          <a:prstGeom prst="rect">
+            <a:avLst/>
+          </a:prstGeom>
+          <a:noFill/>
+        </p:spPr>
+        <p:txBody>
+          <a:bodyPr wrap="square">
+            <a:spAutoFit/>
+          </a:bodyPr>
+          <a:lstStyle/>
+          <a:p>
+            <a:pPr algn="l"/>
+            <a:r>
+              <a:rPr sz="1000" b="0">
+                <a:solidFill>
+                  <a:srgbClr val="212121"/>
+                </a:solidFill>
+              </a:rPr>
+              <a:t>flutter run</a:t>
+            </a:r>
+          </a:p>
+        </p:txBody>
+      </p:sp>
+      <p:sp>
+        <p:nvSpPr>
+          <p:cNvPr id="18" name="TextBox 17"/>
+          <p:cNvSpPr txBox="1"/>
+          <p:nvPr/>
+        </p:nvSpPr>
+        <p:spPr>
+          <a:xfrm>
+            <a:off x="4572000" y="3950208"/>
+            <a:ext cx="7132320" cy="320040"/>
+          </a:xfrm>
+          <a:prstGeom prst="rect">
+            <a:avLst/>
+          </a:prstGeom>
+          <a:noFill/>
+        </p:spPr>
+        <p:txBody>
+          <a:bodyPr wrap="square">
+            <a:spAutoFit/>
+          </a:bodyPr>
+          <a:lstStyle/>
+          <a:p>
+            <a:pPr algn="l"/>
+            <a:r>
+              <a:rPr sz="1300" b="1">
+                <a:solidFill>
+                  <a:srgbClr val="3F51B5"/>
+                </a:solidFill>
+              </a:rPr>
+              <a:t>4.  APK 빌드 (Android)</a:t>
+            </a:r>
+          </a:p>
+        </p:txBody>
+      </p:sp>
+      <p:sp>
+        <p:nvSpPr>
+          <p:cNvPr id="19" name="Rectangle 18"/>
+          <p:cNvSpPr/>
+          <p:nvPr/>
+        </p:nvSpPr>
+        <p:spPr>
+          <a:xfrm>
+            <a:off x="4572000" y="4270248"/>
+            <a:ext cx="7132320" cy="347472"/>
+          </a:xfrm>
+          <a:prstGeom prst="rect">
+            <a:avLst/>
+          </a:prstGeom>
+          <a:solidFill>
+            <a:srgbClr val="F5F5F5"/>
+          </a:solidFill>
+          <a:ln>
+            <a:noFill/>
+          </a:ln>
+        </p:spPr>
+        <p:style>
+          <a:lnRef idx="1">
+            <a:schemeClr val="accent1"/>
+          </a:lnRef>
+          <a:fillRef idx="3">
+            <a:schemeClr val="accent1"/>
+          </a:fillRef>
+          <a:effectRef idx="2">
+            <a:schemeClr val="accent1"/>
+          </a:effectRef>
+          <a:fontRef idx="minor">
+            <a:schemeClr val="lt1"/>
+          </a:fontRef>
+        </p:style>
+        <p:txBody>
+          <a:bodyPr rtlCol="0" anchor="ctr"/>
+          <a:lstStyle/>
+          <a:p>
+            <a:pPr algn="ctr"/>
+          </a:p>
+        </p:txBody>
+      </p:sp>
+      <p:sp>
+        <p:nvSpPr>
+          <p:cNvPr id="20" name="TextBox 19"/>
+          <p:cNvSpPr txBox="1"/>
+          <p:nvPr/>
+        </p:nvSpPr>
+        <p:spPr>
+          <a:xfrm>
+            <a:off x="4709160" y="4288536"/>
+            <a:ext cx="6858000" cy="347472"/>
+          </a:xfrm>
+          <a:prstGeom prst="rect">
+            <a:avLst/>
+          </a:prstGeom>
+          <a:noFill/>
+        </p:spPr>
+        <p:txBody>
+          <a:bodyPr wrap="square">
+            <a:spAutoFit/>
+          </a:bodyPr>
+          <a:lstStyle/>
+          <a:p>
+            <a:pPr algn="l"/>
+            <a:r>
+              <a:rPr sz="1000" b="0">
+                <a:solidFill>
+                  <a:srgbClr val="212121"/>
+                </a:solidFill>
+              </a:rPr>
+              <a:t>flutter build apk --release</a:t>
+            </a:r>
+          </a:p>
+        </p:txBody>
+      </p:sp>
+      <p:sp>
+        <p:nvSpPr>
+          <p:cNvPr id="21" name="TextBox 20"/>
+          <p:cNvSpPr txBox="1"/>
+          <p:nvPr/>
+        </p:nvSpPr>
+        <p:spPr>
+          <a:xfrm>
+            <a:off x="457200" y="6263640"/>
+            <a:ext cx="11247120" cy="365760"/>
+          </a:xfrm>
+          <a:prstGeom prst="rect">
+            <a:avLst/>
+          </a:prstGeom>
+          <a:noFill/>
+        </p:spPr>
+        <p:txBody>
+          <a:bodyPr wrap="square">
+            <a:spAutoFit/>
+          </a:bodyPr>
+          <a:lstStyle/>
+          <a:p>
+            <a:pPr algn="ctr"/>
+            <a:r>
+              <a:rPr sz="1000" b="0">
+                <a:solidFill>
+                  <a:srgbClr val="9E9E9E"/>
+                </a:solidFill>
+              </a:rPr>
+              <a:t>상세 가이드: docs/setup.md  ·  docs/deploy.md  ·  portfolio-tracker/README.md</a:t>
+            </a:r>
+          </a:p>
+        </p:txBody>
+      </p:sp>
+    </p:spTree>
+  </p:cSld>
+  <p:clrMapOvr>
+    <a:masterClrMapping/>
+  </p:clrMapOvr>
+</p:sld>
+</file>
+
+<file path=ppt/slides/slide3.xml><?xml version="1.0" encoding="utf-8"?>
+<p:sld xmlns:a="http://schemas.openxmlformats.org/drawingml/2006/main" xmlns:r="http://schemas.openxmlformats.org/officeDocument/2006/relationships" xmlns:p="http://schemas.openxmlformats.org/presentationml/2006/main">
+  <p:cSld>
+    <p:spTree>
+      <p:nvGrpSpPr>
+        <p:cNvPr id="1" name=""/>
+        <p:cNvGrpSpPr/>
+        <p:nvPr/>
+      </p:nvGrpSpPr>
+      <p:grpSpPr>
+        <a:xfrm>
+          <a:off x="0" y="0"/>
+          <a:ext cx="0" cy="0"/>
+          <a:chOff x="0" y="0"/>
+          <a:chExt cx="0" cy="0"/>
+        </a:xfrm>
+      </p:grpSpPr>
+      <p:sp>
+        <p:nvSpPr>
+          <p:cNvPr id="2" name="Rectangle 1"/>
+          <p:cNvSpPr/>
+          <p:nvPr/>
+        </p:nvSpPr>
+        <p:spPr>
+          <a:xfrm>
+            <a:off x="0" y="0"/>
+            <a:ext cx="12188952" cy="914400"/>
+          </a:xfrm>
+          <a:prstGeom prst="rect">
+            <a:avLst/>
+          </a:prstGeom>
+          <a:noFill/>
+          <a:ln>
+            <a:noFill/>
+          </a:ln>
+        </p:spPr>
+        <p:style>
+          <a:lnRef idx="1">
+            <a:schemeClr val="accent1"/>
+          </a:lnRef>
+          <a:fillRef idx="3">
+            <a:schemeClr val="accent1"/>
+          </a:fillRef>
+          <a:effectRef idx="2">
+            <a:schemeClr val="accent1"/>
+          </a:effectRef>
+          <a:fontRef idx="minor">
+            <a:schemeClr val="lt1"/>
+          </a:fontRef>
+        </p:style>
+        <p:txBody>
+          <a:bodyPr rtlCol="0" anchor="ctr"/>
+          <a:lstStyle/>
+          <a:p>
+            <a:pPr algn="ctr"/>
+            <a:endParaRPr/>
+          </a:p>
+        </p:txBody>
+      </p:sp>
+      <p:sp>
+        <p:nvSpPr>
+          <p:cNvPr id="3" name="TextBox 2"/>
+          <p:cNvSpPr txBox="1"/>
+          <p:nvPr/>
+        </p:nvSpPr>
+        <p:spPr>
+          <a:xfrm>
+            <a:off x="457200" y="73152"/>
+            <a:ext cx="10972800" cy="566928"/>
+          </a:xfrm>
+          <a:prstGeom prst="rect">
+            <a:avLst/>
+          </a:prstGeom>
+          <a:noFill/>
+        </p:spPr>
+        <p:txBody>
+          <a:bodyPr wrap="square">
+            <a:spAutoFit/>
+          </a:bodyPr>
+          <a:lstStyle/>
+          <a:p>
+            <a:pPr algn="l"/>
+            <a:r>
+              <a:rPr sz="2400" b="1">
+                <a:solidFill>
+                  <a:srgbClr val="3F51B5"/>
+                </a:solidFill>
+              </a:rPr>
+              <a:t>2.  활용 방안 &amp; 기대 효과</a:t>
+            </a:r>
+          </a:p>
+        </p:txBody>
+      </p:sp>
+      <p:sp>
+        <p:nvSpPr>
+          <p:cNvPr id="4" name="TextBox 3"/>
+          <p:cNvSpPr txBox="1"/>
+          <p:nvPr/>
+        </p:nvSpPr>
+        <p:spPr>
+          <a:xfrm>
+            <a:off x="457200" y="621792"/>
+            <a:ext cx="10972800" cy="274320"/>
+          </a:xfrm>
+          <a:prstGeom prst="rect">
+            <a:avLst/>
+          </a:prstGeom>
+          <a:noFill/>
+        </p:spPr>
+        <p:txBody>
+          <a:bodyPr wrap="square">
+            <a:spAutoFit/>
+          </a:bodyPr>
+          <a:lstStyle/>
+          <a:p>
+            <a:pPr algn="l"/>
+            <a:r>
+              <a:rPr sz="1100" b="0">
+                <a:solidFill>
+                  <a:srgbClr val="9E9E9E"/>
+                </a:solidFill>
+              </a:rPr>
+              <a:t>이 앱으로 무엇을 할 수 있는가</a:t>
+            </a:r>
+          </a:p>
+        </p:txBody>
+      </p:sp>
+      <p:sp>
+        <p:nvSpPr>
+          <p:cNvPr id="5" name="Rectangle 4"/>
+          <p:cNvSpPr/>
+          <p:nvPr/>
+        </p:nvSpPr>
+        <p:spPr>
+          <a:xfrm>
+            <a:off x="0" y="868680"/>
+            <a:ext cx="12188952" cy="45720"/>
+          </a:xfrm>
+          <a:prstGeom prst="rect">
+            <a:avLst/>
+          </a:prstGeom>
+          <a:solidFill>
+            <a:srgbClr val="3F51B5"/>
+          </a:solidFill>
+          <a:ln>
+            <a:noFill/>
+          </a:ln>
+        </p:spPr>
+        <p:style>
+          <a:lnRef idx="1">
+            <a:schemeClr val="accent1"/>
+          </a:lnRef>
+          <a:fillRef idx="3">
+            <a:schemeClr val="accent1"/>
+          </a:fillRef>
+          <a:effectRef idx="2">
+            <a:schemeClr val="accent1"/>
+          </a:effectRef>
+          <a:fontRef idx="minor">
+            <a:schemeClr val="lt1"/>
+          </a:fontRef>
+        </p:style>
+        <p:txBody>
+          <a:bodyPr rtlCol="0" anchor="ctr"/>
+          <a:lstStyle/>
+          <a:p>
+            <a:pPr algn="ctr"/>
+            <a:endParaRPr/>
+          </a:p>
+        </p:txBody>
+      </p:sp>
+      <p:sp>
+        <p:nvSpPr>
+          <p:cNvPr id="6" name="TextBox 5"/>
+          <p:cNvSpPr txBox="1"/>
+          <p:nvPr/>
+        </p:nvSpPr>
+        <p:spPr>
+          <a:xfrm>
             <a:off x="11247120" y="6492240"/>
             <a:ext cx="822960" cy="274320"/>
           </a:xfrm>
@@ -13749,6 +14721,7 @@
           <a:lstStyle/>
           <a:p>
             <a:pPr algn="ctr"/>
+            <a:endParaRPr/>
           </a:p>
         </p:txBody>
       </p:sp>
@@ -13792,6 +14765,7 @@
           <a:lstStyle/>
           <a:p>
             <a:pPr algn="ctr"/>
+            <a:endParaRPr/>
           </a:p>
         </p:txBody>
       </p:sp>
@@ -13835,6 +14809,7 @@
           <a:lstStyle/>
           <a:p>
             <a:pPr algn="ctr"/>
+            <a:endParaRPr/>
           </a:p>
         </p:txBody>
       </p:sp>
@@ -13947,6 +14922,7 @@
           <a:lstStyle/>
           <a:p>
             <a:pPr algn="ctr"/>
+            <a:endParaRPr/>
           </a:p>
         </p:txBody>
       </p:sp>
@@ -13990,6 +14966,7 @@
           <a:lstStyle/>
           <a:p>
             <a:pPr algn="ctr"/>
+            <a:endParaRPr/>
           </a:p>
         </p:txBody>
       </p:sp>
@@ -14033,6 +15010,7 @@
           <a:lstStyle/>
           <a:p>
             <a:pPr algn="ctr"/>
+            <a:endParaRPr/>
           </a:p>
         </p:txBody>
       </p:sp>
@@ -14145,6 +15123,7 @@
           <a:lstStyle/>
           <a:p>
             <a:pPr algn="ctr"/>
+            <a:endParaRPr/>
           </a:p>
         </p:txBody>
       </p:sp>
@@ -14188,6 +15167,7 @@
           <a:lstStyle/>
           <a:p>
             <a:pPr algn="ctr"/>
+            <a:endParaRPr/>
           </a:p>
         </p:txBody>
       </p:sp>
@@ -14231,6 +15211,7 @@
           <a:lstStyle/>
           <a:p>
             <a:pPr algn="ctr"/>
+            <a:endParaRPr/>
           </a:p>
         </p:txBody>
       </p:sp>
@@ -14312,7 +15293,7 @@
 </file>
 
 <file path=ppt/slides/slide4.xml><?xml version="1.0" encoding="utf-8"?>
-<p:sld xmlns:a="http://schemas.openxmlformats.org/drawingml/2006/main" xmlns:p="http://schemas.openxmlformats.org/presentationml/2006/main" xmlns:r="http://schemas.openxmlformats.org/officeDocument/2006/relationships">
+<p:sld xmlns:a="http://schemas.openxmlformats.org/drawingml/2006/main" xmlns:r="http://schemas.openxmlformats.org/officeDocument/2006/relationships" xmlns:p="http://schemas.openxmlformats.org/presentationml/2006/main">
   <p:cSld>
     <p:spTree>
       <p:nvGrpSpPr>
@@ -14320,7 +15301,14 @@
         <p:cNvGrpSpPr/>
         <p:nvPr/>
       </p:nvGrpSpPr>
-      <p:grpSpPr/>
+      <p:grpSpPr>
+        <a:xfrm>
+          <a:off x="0" y="0"/>
+          <a:ext cx="0" cy="0"/>
+          <a:chOff x="0" y="0"/>
+          <a:chExt cx="0" cy="0"/>
+        </a:xfrm>
+      </p:grpSpPr>
       <p:sp>
         <p:nvSpPr>
           <p:cNvPr id="2" name="Rectangle 1"/>
@@ -14359,6 +15347,7 @@
           <a:lstStyle/>
           <a:p>
             <a:pPr algn="ctr"/>
+            <a:endParaRPr/>
           </a:p>
         </p:txBody>
       </p:sp>
@@ -14470,6 +15459,7 @@
           <a:lstStyle/>
           <a:p>
             <a:pPr algn="ctr"/>
+            <a:endParaRPr/>
           </a:p>
         </p:txBody>
       </p:sp>
@@ -14540,7 +15530,7 @@
 </file>
 
 <file path=ppt/slides/slide5.xml><?xml version="1.0" encoding="utf-8"?>
-<p:sld xmlns:a="http://schemas.openxmlformats.org/drawingml/2006/main" xmlns:p="http://schemas.openxmlformats.org/presentationml/2006/main" xmlns:r="http://schemas.openxmlformats.org/officeDocument/2006/relationships">
+<p:sld xmlns:a="http://schemas.openxmlformats.org/drawingml/2006/main" xmlns:r="http://schemas.openxmlformats.org/officeDocument/2006/relationships" xmlns:p="http://schemas.openxmlformats.org/presentationml/2006/main">
   <p:cSld>
     <p:spTree>
       <p:nvGrpSpPr>
@@ -14548,7 +15538,14 @@
         <p:cNvGrpSpPr/>
         <p:nvPr/>
       </p:nvGrpSpPr>
-      <p:grpSpPr/>
+      <p:grpSpPr>
+        <a:xfrm>
+          <a:off x="0" y="0"/>
+          <a:ext cx="0" cy="0"/>
+          <a:chOff x="0" y="0"/>
+          <a:chExt cx="0" cy="0"/>
+        </a:xfrm>
+      </p:grpSpPr>
       <p:sp>
         <p:nvSpPr>
           <p:cNvPr id="2" name="Rectangle 1"/>
@@ -14587,6 +15584,7 @@
           <a:lstStyle/>
           <a:p>
             <a:pPr algn="ctr"/>
+            <a:endParaRPr/>
           </a:p>
         </p:txBody>
       </p:sp>
@@ -14698,6 +15696,7 @@
           <a:lstStyle/>
           <a:p>
             <a:pPr algn="ctr"/>
+            <a:endParaRPr/>
           </a:p>
         </p:txBody>
       </p:sp>
@@ -14777,6 +15776,7 @@
           <a:lstStyle/>
           <a:p>
             <a:pPr algn="ctr"/>
+            <a:endParaRPr/>
           </a:p>
         </p:txBody>
       </p:sp>
@@ -14820,6 +15820,7 @@
           <a:lstStyle/>
           <a:p>
             <a:pPr algn="ctr"/>
+            <a:endParaRPr/>
           </a:p>
         </p:txBody>
       </p:sp>
@@ -14965,6 +15966,7 @@
           <a:lstStyle/>
           <a:p>
             <a:pPr algn="ctr"/>
+            <a:endParaRPr/>
           </a:p>
         </p:txBody>
       </p:sp>
@@ -15008,6 +16010,7 @@
           <a:lstStyle/>
           <a:p>
             <a:pPr algn="ctr"/>
+            <a:endParaRPr/>
           </a:p>
         </p:txBody>
       </p:sp>
@@ -15153,6 +16156,7 @@
           <a:lstStyle/>
           <a:p>
             <a:pPr algn="ctr"/>
+            <a:endParaRPr/>
           </a:p>
         </p:txBody>
       </p:sp>
@@ -15196,6 +16200,7 @@
           <a:lstStyle/>
           <a:p>
             <a:pPr algn="ctr"/>
+            <a:endParaRPr/>
           </a:p>
         </p:txBody>
       </p:sp>
@@ -15342,6 +16347,7 @@
           <a:lstStyle/>
           <a:p>
             <a:pPr algn="ctr"/>
+            <a:endParaRPr/>
           </a:p>
         </p:txBody>
       </p:sp>
@@ -15385,6 +16391,7 @@
           <a:lstStyle/>
           <a:p>
             <a:pPr algn="ctr"/>
+            <a:endParaRPr/>
           </a:p>
         </p:txBody>
       </p:sp>
@@ -15531,6 +16538,7 @@
           <a:lstStyle/>
           <a:p>
             <a:pPr algn="ctr"/>
+            <a:endParaRPr/>
           </a:p>
         </p:txBody>
       </p:sp>
@@ -15574,6 +16582,7 @@
           <a:lstStyle/>
           <a:p>
             <a:pPr algn="ctr"/>
+            <a:endParaRPr/>
           </a:p>
         </p:txBody>
       </p:sp>
@@ -15720,6 +16729,7 @@
           <a:lstStyle/>
           <a:p>
             <a:pPr algn="ctr"/>
+            <a:endParaRPr/>
           </a:p>
         </p:txBody>
       </p:sp>
@@ -15763,6 +16773,7 @@
           <a:lstStyle/>
           <a:p>
             <a:pPr algn="ctr"/>
+            <a:endParaRPr/>
           </a:p>
         </p:txBody>
       </p:sp>
@@ -15875,6 +16886,7 @@
           <a:lstStyle/>
           <a:p>
             <a:pPr algn="ctr"/>
+            <a:endParaRPr/>
           </a:p>
         </p:txBody>
       </p:sp>
@@ -15918,6 +16930,7 @@
           <a:lstStyle/>
           <a:p>
             <a:pPr algn="ctr"/>
+            <a:endParaRPr/>
           </a:p>
         </p:txBody>
       </p:sp>
@@ -15998,7 +17011,7 @@
 </file>
 
 <file path=ppt/slides/slide6.xml><?xml version="1.0" encoding="utf-8"?>
-<p:sld xmlns:a="http://schemas.openxmlformats.org/drawingml/2006/main" xmlns:p="http://schemas.openxmlformats.org/presentationml/2006/main" xmlns:r="http://schemas.openxmlformats.org/officeDocument/2006/relationships">
+<p:sld xmlns:a="http://schemas.openxmlformats.org/drawingml/2006/main" xmlns:r="http://schemas.openxmlformats.org/officeDocument/2006/relationships" xmlns:p="http://schemas.openxmlformats.org/presentationml/2006/main">
   <p:cSld>
     <p:spTree>
       <p:nvGrpSpPr>
@@ -16006,7 +17019,14 @@
         <p:cNvGrpSpPr/>
         <p:nvPr/>
       </p:nvGrpSpPr>
-      <p:grpSpPr/>
+      <p:grpSpPr>
+        <a:xfrm>
+          <a:off x="0" y="0"/>
+          <a:ext cx="0" cy="0"/>
+          <a:chOff x="0" y="0"/>
+          <a:chExt cx="0" cy="0"/>
+        </a:xfrm>
+      </p:grpSpPr>
       <p:sp>
         <p:nvSpPr>
           <p:cNvPr id="2" name="Rectangle 1"/>
@@ -16045,6 +17065,7 @@
           <a:lstStyle/>
           <a:p>
             <a:pPr algn="ctr"/>
+            <a:endParaRPr/>
           </a:p>
         </p:txBody>
       </p:sp>
@@ -16156,6 +17177,7 @@
           <a:lstStyle/>
           <a:p>
             <a:pPr algn="ctr"/>
+            <a:endParaRPr/>
           </a:p>
         </p:txBody>
       </p:sp>
@@ -16233,6 +17255,7 @@
           <a:lstStyle/>
           <a:p>
             <a:pPr algn="ctr"/>
+            <a:endParaRPr/>
           </a:p>
         </p:txBody>
       </p:sp>
@@ -16310,6 +17333,7 @@
           <a:lstStyle/>
           <a:p>
             <a:pPr algn="ctr"/>
+            <a:endParaRPr/>
           </a:p>
         </p:txBody>
       </p:sp>
@@ -16387,6 +17411,7 @@
           <a:lstStyle/>
           <a:p>
             <a:pPr algn="ctr"/>
+            <a:endParaRPr/>
           </a:p>
         </p:txBody>
       </p:sp>
@@ -16466,6 +17491,7 @@
           <a:lstStyle/>
           <a:p>
             <a:pPr algn="ctr"/>
+            <a:endParaRPr/>
           </a:p>
         </p:txBody>
       </p:sp>
@@ -16545,6 +17571,7 @@
           <a:lstStyle/>
           <a:p>
             <a:pPr algn="ctr"/>
+            <a:endParaRPr/>
           </a:p>
         </p:txBody>
       </p:sp>
@@ -16624,6 +17651,7 @@
           <a:lstStyle/>
           <a:p>
             <a:pPr algn="ctr"/>
+            <a:endParaRPr/>
           </a:p>
         </p:txBody>
       </p:sp>
@@ -16703,6 +17731,7 @@
           <a:lstStyle/>
           <a:p>
             <a:pPr algn="ctr"/>
+            <a:endParaRPr/>
           </a:p>
         </p:txBody>
       </p:sp>
@@ -16782,6 +17811,7 @@
           <a:lstStyle/>
           <a:p>
             <a:pPr algn="ctr"/>
+            <a:endParaRPr/>
           </a:p>
         </p:txBody>
       </p:sp>
@@ -16862,6 +17892,7 @@
           <a:lstStyle/>
           <a:p>
             <a:pPr algn="ctr"/>
+            <a:endParaRPr/>
           </a:p>
         </p:txBody>
       </p:sp>
@@ -16941,6 +17972,7 @@
           <a:lstStyle/>
           <a:p>
             <a:pPr algn="ctr"/>
+            <a:endParaRPr/>
           </a:p>
         </p:txBody>
       </p:sp>
@@ -17020,6 +18052,7 @@
           <a:lstStyle/>
           <a:p>
             <a:pPr algn="ctr"/>
+            <a:endParaRPr/>
           </a:p>
         </p:txBody>
       </p:sp>
@@ -17100,6 +18133,7 @@
           <a:lstStyle/>
           <a:p>
             <a:pPr algn="ctr"/>
+            <a:endParaRPr/>
           </a:p>
         </p:txBody>
       </p:sp>
@@ -17180,7 +18214,7 @@
 </file>
 
 <file path=ppt/slides/slide7.xml><?xml version="1.0" encoding="utf-8"?>
-<p:sld xmlns:a="http://schemas.openxmlformats.org/drawingml/2006/main" xmlns:p="http://schemas.openxmlformats.org/presentationml/2006/main" xmlns:r="http://schemas.openxmlformats.org/officeDocument/2006/relationships">
+<p:sld xmlns:a="http://schemas.openxmlformats.org/drawingml/2006/main" xmlns:r="http://schemas.openxmlformats.org/officeDocument/2006/relationships" xmlns:p="http://schemas.openxmlformats.org/presentationml/2006/main">
   <p:cSld>
     <p:spTree>
       <p:nvGrpSpPr>
@@ -17188,7 +18222,14 @@
         <p:cNvGrpSpPr/>
         <p:nvPr/>
       </p:nvGrpSpPr>
-      <p:grpSpPr/>
+      <p:grpSpPr>
+        <a:xfrm>
+          <a:off x="0" y="0"/>
+          <a:ext cx="0" cy="0"/>
+          <a:chOff x="0" y="0"/>
+          <a:chExt cx="0" cy="0"/>
+        </a:xfrm>
+      </p:grpSpPr>
       <p:sp>
         <p:nvSpPr>
           <p:cNvPr id="2" name="Rectangle 1"/>
@@ -17227,6 +18268,7 @@
           <a:lstStyle/>
           <a:p>
             <a:pPr algn="ctr"/>
+            <a:endParaRPr/>
           </a:p>
         </p:txBody>
       </p:sp>
@@ -17338,6 +18380,7 @@
           <a:lstStyle/>
           <a:p>
             <a:pPr algn="ctr"/>
+            <a:endParaRPr/>
           </a:p>
         </p:txBody>
       </p:sp>
@@ -17415,6 +18458,7 @@
           <a:lstStyle/>
           <a:p>
             <a:pPr algn="ctr"/>
+            <a:endParaRPr/>
           </a:p>
         </p:txBody>
       </p:sp>
@@ -17458,6 +18502,7 @@
           <a:lstStyle/>
           <a:p>
             <a:pPr algn="ctr"/>
+            <a:endParaRPr/>
           </a:p>
         </p:txBody>
       </p:sp>
@@ -17639,6 +18684,7 @@
           <a:lstStyle/>
           <a:p>
             <a:pPr algn="ctr"/>
+            <a:endParaRPr/>
           </a:p>
         </p:txBody>
       </p:sp>
@@ -17750,6 +18796,7 @@
           <a:lstStyle/>
           <a:p>
             <a:pPr algn="ctr"/>
+            <a:endParaRPr/>
           </a:p>
         </p:txBody>
       </p:sp>
@@ -17793,6 +18840,7 @@
           <a:lstStyle/>
           <a:p>
             <a:pPr algn="ctr"/>
+            <a:endParaRPr/>
           </a:p>
         </p:txBody>
       </p:sp>
@@ -17974,6 +19022,7 @@
           <a:lstStyle/>
           <a:p>
             <a:pPr algn="ctr"/>
+            <a:endParaRPr/>
           </a:p>
         </p:txBody>
       </p:sp>
@@ -18085,6 +19134,7 @@
           <a:lstStyle/>
           <a:p>
             <a:pPr algn="ctr"/>
+            <a:endParaRPr/>
           </a:p>
         </p:txBody>
       </p:sp>
@@ -18128,6 +19178,7 @@
           <a:lstStyle/>
           <a:p>
             <a:pPr algn="ctr"/>
+            <a:endParaRPr/>
           </a:p>
         </p:txBody>
       </p:sp>
@@ -18309,6 +19360,7 @@
           <a:lstStyle/>
           <a:p>
             <a:pPr algn="ctr"/>
+            <a:endParaRPr/>
           </a:p>
         </p:txBody>
       </p:sp>
@@ -18420,6 +19472,7 @@
           <a:lstStyle/>
           <a:p>
             <a:pPr algn="ctr"/>
+            <a:endParaRPr/>
           </a:p>
         </p:txBody>
       </p:sp>
@@ -18463,6 +19516,7 @@
           <a:lstStyle/>
           <a:p>
             <a:pPr algn="ctr"/>
+            <a:endParaRPr/>
           </a:p>
         </p:txBody>
       </p:sp>
@@ -18644,6 +19698,7 @@
           <a:lstStyle/>
           <a:p>
             <a:pPr algn="ctr"/>
+            <a:endParaRPr/>
           </a:p>
         </p:txBody>
       </p:sp>
@@ -18690,7 +19745,7 @@
 </file>
 
 <file path=ppt/slides/slide8.xml><?xml version="1.0" encoding="utf-8"?>
-<p:sld xmlns:a="http://schemas.openxmlformats.org/drawingml/2006/main" xmlns:p="http://schemas.openxmlformats.org/presentationml/2006/main" xmlns:r="http://schemas.openxmlformats.org/officeDocument/2006/relationships">
+<p:sld xmlns:a="http://schemas.openxmlformats.org/drawingml/2006/main" xmlns:r="http://schemas.openxmlformats.org/officeDocument/2006/relationships" xmlns:p="http://schemas.openxmlformats.org/presentationml/2006/main">
   <p:cSld>
     <p:spTree>
       <p:nvGrpSpPr>
@@ -18698,7 +19753,14 @@
         <p:cNvGrpSpPr/>
         <p:nvPr/>
       </p:nvGrpSpPr>
-      <p:grpSpPr/>
+      <p:grpSpPr>
+        <a:xfrm>
+          <a:off x="0" y="0"/>
+          <a:ext cx="0" cy="0"/>
+          <a:chOff x="0" y="0"/>
+          <a:chExt cx="0" cy="0"/>
+        </a:xfrm>
+      </p:grpSpPr>
       <p:sp>
         <p:nvSpPr>
           <p:cNvPr id="2" name="Rectangle 1"/>
@@ -18737,6 +19799,7 @@
           <a:lstStyle/>
           <a:p>
             <a:pPr algn="ctr"/>
+            <a:endParaRPr/>
           </a:p>
         </p:txBody>
       </p:sp>
@@ -18848,6 +19911,7 @@
           <a:lstStyle/>
           <a:p>
             <a:pPr algn="ctr"/>
+            <a:endParaRPr/>
           </a:p>
         </p:txBody>
       </p:sp>
@@ -18925,6 +19989,7 @@
           <a:lstStyle/>
           <a:p>
             <a:pPr algn="ctr"/>
+            <a:endParaRPr/>
           </a:p>
         </p:txBody>
       </p:sp>
@@ -18968,6 +20033,7 @@
           <a:lstStyle/>
           <a:p>
             <a:pPr algn="ctr"/>
+            <a:endParaRPr/>
           </a:p>
         </p:txBody>
       </p:sp>
@@ -19011,6 +20077,7 @@
           <a:lstStyle/>
           <a:p>
             <a:pPr algn="ctr"/>
+            <a:endParaRPr/>
           </a:p>
         </p:txBody>
       </p:sp>
@@ -19156,6 +20223,7 @@
           <a:lstStyle/>
           <a:p>
             <a:pPr algn="ctr"/>
+            <a:endParaRPr/>
           </a:p>
         </p:txBody>
       </p:sp>
@@ -19199,6 +20267,7 @@
           <a:lstStyle/>
           <a:p>
             <a:pPr algn="ctr"/>
+            <a:endParaRPr/>
           </a:p>
         </p:txBody>
       </p:sp>
@@ -19242,6 +20311,7 @@
           <a:lstStyle/>
           <a:p>
             <a:pPr algn="ctr"/>
+            <a:endParaRPr/>
           </a:p>
         </p:txBody>
       </p:sp>
@@ -19389,6 +20459,7 @@
           <a:lstStyle/>
           <a:p>
             <a:pPr algn="ctr"/>
+            <a:endParaRPr/>
           </a:p>
         </p:txBody>
       </p:sp>
@@ -19435,7 +20506,7 @@
 </file>
 
 <file path=ppt/slides/slide9.xml><?xml version="1.0" encoding="utf-8"?>
-<p:sld xmlns:a="http://schemas.openxmlformats.org/drawingml/2006/main" xmlns:p="http://schemas.openxmlformats.org/presentationml/2006/main" xmlns:r="http://schemas.openxmlformats.org/officeDocument/2006/relationships">
+<p:sld xmlns:a="http://schemas.openxmlformats.org/drawingml/2006/main" xmlns:r="http://schemas.openxmlformats.org/officeDocument/2006/relationships" xmlns:p="http://schemas.openxmlformats.org/presentationml/2006/main">
   <p:cSld>
     <p:spTree>
       <p:nvGrpSpPr>
@@ -19443,7 +20514,14 @@
         <p:cNvGrpSpPr/>
         <p:nvPr/>
       </p:nvGrpSpPr>
-      <p:grpSpPr/>
+      <p:grpSpPr>
+        <a:xfrm>
+          <a:off x="0" y="0"/>
+          <a:ext cx="0" cy="0"/>
+          <a:chOff x="0" y="0"/>
+          <a:chExt cx="0" cy="0"/>
+        </a:xfrm>
+      </p:grpSpPr>
       <p:sp>
         <p:nvSpPr>
           <p:cNvPr id="2" name="Rectangle 1"/>
@@ -19482,6 +20560,7 @@
           <a:lstStyle/>
           <a:p>
             <a:pPr algn="ctr"/>
+            <a:endParaRPr/>
           </a:p>
         </p:txBody>
       </p:sp>
@@ -19593,6 +20672,7 @@
           <a:lstStyle/>
           <a:p>
             <a:pPr algn="ctr"/>
+            <a:endParaRPr/>
           </a:p>
         </p:txBody>
       </p:sp>
@@ -19696,6 +20776,7 @@
           <a:lstStyle/>
           <a:p>
             <a:pPr algn="ctr"/>
+            <a:endParaRPr/>
           </a:p>
         </p:txBody>
       </p:sp>

--- a/portfolio-tracker/presentation/portfolio-tracker-final.pptx
+++ b/portfolio-tracker/presentation/portfolio-tracker-final.pptx
@@ -3510,7 +3510,7 @@
                   <a:srgbClr val="3F51B5"/>
                 </a:solidFill>
               </a:rPr>
-              <a:t>2.  활용 방안 &amp; 기대 효과</a:t>
+              <a:t>9.  활용 방안 &amp; 기대 효과</a:t>
             </a:r>
           </a:p>
         </p:txBody>
@@ -7128,7 +7128,7 @@
                   <a:srgbClr val="3F51B5"/>
                 </a:solidFill>
               </a:rPr>
-              <a:t>9.  개발 환경 · 빌드 &amp; 배포</a:t>
+              <a:t>10.  개발 환경 · 빌드 &amp; 배포</a:t>
             </a:r>
           </a:p>
         </p:txBody>
@@ -8596,7 +8596,7 @@
                   <a:srgbClr val="3F51B5"/>
                 </a:solidFill>
               </a:rPr>
-              <a:t>10.  코드 품질 · 테스트 · 성능 최적화</a:t>
+              <a:t>12.  코드 품질 · 테스트 · 성능 최적화</a:t>
             </a:r>
           </a:p>
         </p:txBody>
@@ -10120,7 +10120,7 @@
                   <a:srgbClr val="3F51B5"/>
                 </a:solidFill>
               </a:rPr>
-              <a:t>7.  데모</a:t>
+              <a:t>13.  데모</a:t>
             </a:r>
           </a:p>
         </p:txBody>
@@ -10881,7 +10881,7 @@
                   <a:srgbClr val="3F51B5"/>
                 </a:solidFill>
               </a:rPr>
-              <a:t>4.  사용자 시나리오</a:t>
+              <a:t>14.  사용자 시나리오</a:t>
             </a:r>
           </a:p>
         </p:txBody>
@@ -13167,7 +13167,7 @@
                   <a:srgbClr val="3F51B5"/>
                 </a:solidFill>
               </a:rPr>
-              <a:t>8.  포트폴리오 분석 화면</a:t>
+              <a:t>15.  포트폴리오 분석 화면</a:t>
             </a:r>
           </a:p>
         </p:txBody>
@@ -13484,7 +13484,7 @@
                   <a:srgbClr val="3F51B5"/>
                 </a:solidFill>
               </a:rPr>
-              <a:t>12.  향후 계획 — 지속적 기술 습득</a:t>
+              <a:t>16.  향후 계획 — 지속적 기술 습득</a:t>
             </a:r>
           </a:p>
         </p:txBody>
@@ -14693,7 +14693,7 @@
                   <a:srgbClr val="3F51B5"/>
                 </a:solidFill>
               </a:rPr>
-              <a:t>3.  WBS  (Work Breakdown Structure)</a:t>
+              <a:t>2.  WBS  (Work Breakdown Structure)</a:t>
             </a:r>
           </a:p>
         </p:txBody>
@@ -14930,7 +14930,7 @@
                   <a:srgbClr val="3F51B5"/>
                 </a:solidFill>
               </a:rPr>
-              <a:t>5.  기술 스택과 아키텍처</a:t>
+              <a:t>3.  기술 스택과 아키텍처</a:t>
             </a:r>
           </a:p>
         </p:txBody>
@@ -16133,7 +16133,7 @@
                   <a:srgbClr val="3F51B5"/>
                 </a:solidFill>
               </a:rPr>
-              <a:t>13.  개발 방식 — AI 워크플로우</a:t>
+              <a:t>4.  개발 방식 — AI 워크플로우</a:t>
             </a:r>
           </a:p>
         </p:txBody>
@@ -17054,7 +17054,7 @@
                   <a:srgbClr val="3F51B5"/>
                 </a:solidFill>
               </a:rPr>
-              <a:t>14.  개발 방식 — AI 워크플로우</a:t>
+              <a:t>5.  개발 방식 — AI 워크플로우</a:t>
             </a:r>
           </a:p>
         </p:txBody>
@@ -17739,7 +17739,7 @@
                   <a:srgbClr val="3F51B5"/>
                 </a:solidFill>
               </a:rPr>
-              <a:t>15.  개발 방식 — AI 워크플로우</a:t>
+              <a:t>6.  개발 방식 — AI 워크플로우</a:t>
             </a:r>
           </a:p>
         </p:txBody>
@@ -18660,7 +18660,7 @@
                   <a:srgbClr val="3F51B5"/>
                 </a:solidFill>
               </a:rPr>
-              <a:t>16.  개발 방식 — AI 워크플로우</a:t>
+              <a:t>7.  개발 방식 — AI 워크플로우</a:t>
             </a:r>
           </a:p>
         </p:txBody>
@@ -19345,7 +19345,7 @@
                   <a:srgbClr val="3F51B5"/>
                 </a:solidFill>
               </a:rPr>
-              <a:t>6.  아키텍처 다이어그램</a:t>
+              <a:t>8.  아키텍처 다이어그램</a:t>
             </a:r>
           </a:p>
         </p:txBody>

--- a/portfolio-tracker/presentation/portfolio-tracker-final.pptx
+++ b/portfolio-tracker/presentation/portfolio-tracker-final.pptx
@@ -7,27 +7,27 @@
   <p:sldIdLst>
     <p:sldId id="256" r:id="rId2"/>
     <p:sldId id="257" r:id="rId3"/>
-    <p:sldId id="259" r:id="rId5"/>
-    <p:sldId id="261" r:id="rId7"/>
-    <p:sldId id="269" r:id="rId15"/>
-    <p:sldId id="270" r:id="rId16"/>
-    <p:sldId id="271" r:id="rId17"/>
-    <p:sldId id="272" r:id="rId18"/>
-    <p:sldId id="262" r:id="rId8"/>
-    <p:sldId id="258" r:id="rId4"/>
-    <p:sldId id="273" r:id="rId19"/>
-    <p:sldId id="274" r:id="rId20"/>
-    <p:sldId id="275" r:id="rId21"/>
-    <p:sldId id="265" r:id="rId11"/>
-    <p:sldId id="267" r:id="rId13"/>
-    <p:sldId id="266" r:id="rId12"/>
-    <p:sldId id="278" r:id="rId28"/>
-    <p:sldId id="263" r:id="rId9"/>
-    <p:sldId id="260" r:id="rId6"/>
-    <p:sldId id="264" r:id="rId10"/>
-    <p:sldId id="268" r:id="rId14"/>
-    <p:sldId id="277" r:id="rId22"/>
-    <p:sldId id="276" r:id="rId23"/>
+    <p:sldId id="259" r:id="rId4"/>
+    <p:sldId id="261" r:id="rId5"/>
+    <p:sldId id="269" r:id="rId6"/>
+    <p:sldId id="270" r:id="rId7"/>
+    <p:sldId id="271" r:id="rId8"/>
+    <p:sldId id="272" r:id="rId9"/>
+    <p:sldId id="262" r:id="rId10"/>
+    <p:sldId id="258" r:id="rId11"/>
+    <p:sldId id="273" r:id="rId12"/>
+    <p:sldId id="274" r:id="rId13"/>
+    <p:sldId id="275" r:id="rId14"/>
+    <p:sldId id="265" r:id="rId15"/>
+    <p:sldId id="267" r:id="rId16"/>
+    <p:sldId id="266" r:id="rId17"/>
+    <p:sldId id="278" r:id="rId18"/>
+    <p:sldId id="263" r:id="rId19"/>
+    <p:sldId id="260" r:id="rId20"/>
+    <p:sldId id="264" r:id="rId21"/>
+    <p:sldId id="268" r:id="rId22"/>
+    <p:sldId id="277" r:id="rId23"/>
+    <p:sldId id="276" r:id="rId24"/>
   </p:sldIdLst>
   <p:sldSz cx="12188825" cy="6858000"/>
   <p:notesSz cx="6858000" cy="9144000"/>
@@ -324,7 +324,7 @@
           <a:p>
             <a:fld id="{5BCAD085-E8A6-8845-BD4E-CB4CCA059FC4}" type="datetimeFigureOut">
               <a:rPr lang="en-US" smtClean="0"/>
-              <a:t>6/15/2026</a:t>
+              <a:t>6/16/2026</a:t>
             </a:fld>
             <a:endParaRPr lang="en-US"/>
           </a:p>
@@ -492,7 +492,7 @@
           <a:p>
             <a:fld id="{5BCAD085-E8A6-8845-BD4E-CB4CCA059FC4}" type="datetimeFigureOut">
               <a:rPr lang="en-US" smtClean="0"/>
-              <a:t>6/15/2026</a:t>
+              <a:t>6/16/2026</a:t>
             </a:fld>
             <a:endParaRPr lang="en-US"/>
           </a:p>
@@ -670,7 +670,7 @@
           <a:p>
             <a:fld id="{5BCAD085-E8A6-8845-BD4E-CB4CCA059FC4}" type="datetimeFigureOut">
               <a:rPr lang="en-US" smtClean="0"/>
-              <a:t>6/15/2026</a:t>
+              <a:t>6/16/2026</a:t>
             </a:fld>
             <a:endParaRPr lang="en-US"/>
           </a:p>
@@ -838,7 +838,7 @@
           <a:p>
             <a:fld id="{5BCAD085-E8A6-8845-BD4E-CB4CCA059FC4}" type="datetimeFigureOut">
               <a:rPr lang="en-US" smtClean="0"/>
-              <a:t>6/15/2026</a:t>
+              <a:t>6/16/2026</a:t>
             </a:fld>
             <a:endParaRPr lang="en-US"/>
           </a:p>
@@ -1083,7 +1083,7 @@
           <a:p>
             <a:fld id="{5BCAD085-E8A6-8845-BD4E-CB4CCA059FC4}" type="datetimeFigureOut">
               <a:rPr lang="en-US" smtClean="0"/>
-              <a:t>6/15/2026</a:t>
+              <a:t>6/16/2026</a:t>
             </a:fld>
             <a:endParaRPr lang="en-US"/>
           </a:p>
@@ -1368,7 +1368,7 @@
           <a:p>
             <a:fld id="{5BCAD085-E8A6-8845-BD4E-CB4CCA059FC4}" type="datetimeFigureOut">
               <a:rPr lang="en-US" smtClean="0"/>
-              <a:t>6/15/2026</a:t>
+              <a:t>6/16/2026</a:t>
             </a:fld>
             <a:endParaRPr lang="en-US"/>
           </a:p>
@@ -1787,7 +1787,7 @@
           <a:p>
             <a:fld id="{5BCAD085-E8A6-8845-BD4E-CB4CCA059FC4}" type="datetimeFigureOut">
               <a:rPr lang="en-US" smtClean="0"/>
-              <a:t>6/15/2026</a:t>
+              <a:t>6/16/2026</a:t>
             </a:fld>
             <a:endParaRPr lang="en-US"/>
           </a:p>
@@ -1904,7 +1904,7 @@
           <a:p>
             <a:fld id="{5BCAD085-E8A6-8845-BD4E-CB4CCA059FC4}" type="datetimeFigureOut">
               <a:rPr lang="en-US" smtClean="0"/>
-              <a:t>6/15/2026</a:t>
+              <a:t>6/16/2026</a:t>
             </a:fld>
             <a:endParaRPr lang="en-US"/>
           </a:p>
@@ -1999,7 +1999,7 @@
           <a:p>
             <a:fld id="{5BCAD085-E8A6-8845-BD4E-CB4CCA059FC4}" type="datetimeFigureOut">
               <a:rPr lang="en-US" smtClean="0"/>
-              <a:t>6/15/2026</a:t>
+              <a:t>6/16/2026</a:t>
             </a:fld>
             <a:endParaRPr lang="en-US"/>
           </a:p>
@@ -2274,7 +2274,7 @@
           <a:p>
             <a:fld id="{5BCAD085-E8A6-8845-BD4E-CB4CCA059FC4}" type="datetimeFigureOut">
               <a:rPr lang="en-US" smtClean="0"/>
-              <a:t>6/15/2026</a:t>
+              <a:t>6/16/2026</a:t>
             </a:fld>
             <a:endParaRPr lang="en-US"/>
           </a:p>
@@ -2526,7 +2526,7 @@
           <a:p>
             <a:fld id="{5BCAD085-E8A6-8845-BD4E-CB4CCA059FC4}" type="datetimeFigureOut">
               <a:rPr lang="en-US" smtClean="0"/>
-              <a:t>6/15/2026</a:t>
+              <a:t>6/16/2026</a:t>
             </a:fld>
             <a:endParaRPr lang="en-US"/>
           </a:p>
@@ -2737,7 +2737,7 @@
           <a:p>
             <a:fld id="{5BCAD085-E8A6-8845-BD4E-CB4CCA059FC4}" type="datetimeFigureOut">
               <a:rPr lang="en-US" smtClean="0"/>
-              <a:t>6/15/2026</a:t>
+              <a:t>6/16/2026</a:t>
             </a:fld>
             <a:endParaRPr lang="en-US"/>
           </a:p>
@@ -9293,7 +9293,7 @@
 </file>
 
 <file path=ppt/slides/slide17.xml><?xml version="1.0" encoding="utf-8"?>
-<p:sld xmlns:a="http://schemas.openxmlformats.org/drawingml/2006/main" xmlns:p="http://schemas.openxmlformats.org/presentationml/2006/main" xmlns:r="http://schemas.openxmlformats.org/officeDocument/2006/relationships">
+<p:sld xmlns:a="http://schemas.openxmlformats.org/drawingml/2006/main" xmlns:r="http://schemas.openxmlformats.org/officeDocument/2006/relationships" xmlns:p="http://schemas.openxmlformats.org/presentationml/2006/main">
   <p:cSld>
     <p:spTree>
       <p:nvGrpSpPr>
@@ -9301,7 +9301,14 @@
         <p:cNvGrpSpPr/>
         <p:nvPr/>
       </p:nvGrpSpPr>
-      <p:grpSpPr/>
+      <p:grpSpPr>
+        <a:xfrm>
+          <a:off x="0" y="0"/>
+          <a:ext cx="0" cy="0"/>
+          <a:chOff x="0" y="0"/>
+          <a:chExt cx="0" cy="0"/>
+        </a:xfrm>
+      </p:grpSpPr>
       <p:sp>
         <p:nvSpPr>
           <p:cNvPr id="2" name="Rectangle 1"/>
@@ -9340,6 +9347,7 @@
           <a:lstStyle/>
           <a:p>
             <a:pPr algn="ctr"/>
+            <a:endParaRPr/>
           </a:p>
         </p:txBody>
       </p:sp>
@@ -9451,6 +9459,7 @@
           <a:lstStyle/>
           <a:p>
             <a:pPr algn="ctr"/>
+            <a:endParaRPr/>
           </a:p>
         </p:txBody>
       </p:sp>
@@ -9619,6 +9628,7 @@
           <a:lstStyle/>
           <a:p>
             <a:pPr algn="ctr"/>
+            <a:endParaRPr/>
           </a:p>
         </p:txBody>
       </p:sp>
@@ -9731,6 +9741,7 @@
           <a:lstStyle/>
           <a:p>
             <a:pPr algn="ctr"/>
+            <a:endParaRPr/>
           </a:p>
         </p:txBody>
       </p:sp>
@@ -9842,6 +9853,7 @@
           <a:lstStyle/>
           <a:p>
             <a:pPr algn="ctr"/>
+            <a:endParaRPr/>
           </a:p>
         </p:txBody>
       </p:sp>
@@ -9953,6 +9965,7 @@
           <a:lstStyle/>
           <a:p>
             <a:pPr algn="ctr"/>
+            <a:endParaRPr/>
           </a:p>
         </p:txBody>
       </p:sp>
@@ -14319,8 +14332,13 @@
       </p:grpSpPr>
       <p:pic>
         <p:nvPicPr>
-          <p:cNvPr id="2" name="PortfolioTracker.mp4">
+          <p:cNvPr id="3" name="PortfolioTracker">
             <a:hlinkClick r:id="" action="ppaction://media"/>
+            <a:extLst>
+              <a:ext uri="{FF2B5EF4-FFF2-40B4-BE49-F238E27FC236}">
+                <a16:creationId xmlns:a16="http://schemas.microsoft.com/office/drawing/2014/main" id="{0CAE50B3-397C-EE45-2FF0-AA1718AEEDF7}"/>
+              </a:ext>
+            </a:extLst>
           </p:cNvPr>
           <p:cNvPicPr>
             <a:picLocks noChangeAspect="1"/>
@@ -14342,8 +14360,8 @@
         </p:blipFill>
         <p:spPr>
           <a:xfrm>
-            <a:off x="3931315" y="0"/>
-            <a:ext cx="4326194" cy="6858000"/>
+            <a:off x="0" y="0"/>
+            <a:ext cx="4751273" cy="6858000"/>
           </a:xfrm>
           <a:prstGeom prst="rect">
             <a:avLst/>
@@ -14355,28 +14373,6 @@
   <p:clrMapOvr>
     <a:masterClrMapping/>
   </p:clrMapOvr>
-  <p:timing>
-    <p:tnLst>
-      <p:par>
-        <p:cTn id="1" dur="indefinite" restart="never" nodeType="tmRoot">
-          <p:childTnLst>
-            <p:video>
-              <p:cMediaNode vol="80000">
-                <p:cTn id="2" fill="hold" display="0">
-                  <p:stCondLst>
-                    <p:cond delay="indefinite"/>
-                  </p:stCondLst>
-                </p:cTn>
-                <p:tgtEl>
-                  <p:spTgt spid="2"/>
-                </p:tgtEl>
-              </p:cMediaNode>
-            </p:video>
-          </p:childTnLst>
-        </p:cTn>
-      </p:par>
-    </p:tnLst>
-  </p:timing>
 </p:sld>
 </file>
 

--- a/portfolio-tracker/presentation/portfolio-tracker-final.pptx
+++ b/portfolio-tracker/presentation/portfolio-tracker-final.pptx
@@ -8495,7 +8495,7 @@
                 </a:solidFill>
               </a:rPr>
               <a:t>Google Play Console 등록 절차 및 APK 서명 과정 첫 시도
-배포 오류 발생 시 대응 방법 조언 필요</a:t>
+배포 및 오류 발생 시 대응 방법 조언 필요</a:t>
             </a:r>
           </a:p>
         </p:txBody>
@@ -14360,7 +14360,7 @@
         </p:blipFill>
         <p:spPr>
           <a:xfrm>
-            <a:off x="0" y="0"/>
+            <a:off x="3718775" y="0"/>
             <a:ext cx="4751273" cy="6858000"/>
           </a:xfrm>
           <a:prstGeom prst="rect">
